--- a/presentation/NIR2_slide01_v2.pptx
+++ b/presentation/NIR2_slide01_v2.pptx
@@ -5,11 +5,12 @@
     <p:sldMasterId id="2147483648" r:id="rId1"/>
   </p:sldMasterIdLst>
   <p:notesMasterIdLst>
-    <p:notesMasterId r:id="rId4"/>
+    <p:notesMasterId r:id="rId5"/>
   </p:notesMasterIdLst>
   <p:sldIdLst>
     <p:sldId id="257" r:id="rId2"/>
     <p:sldId id="258" r:id="rId3"/>
+    <p:sldId id="256" r:id="rId4"/>
   </p:sldIdLst>
   <p:sldSz cx="9144000" cy="6858000" type="screen4x3"/>
   <p:notesSz cx="6858000" cy="9144000"/>
@@ -369,6 +370,98 @@
     <p:extLst>
       <p:ext uri="{BB962C8B-B14F-4D97-AF65-F5344CB8AC3E}">
         <p14:creationId xmlns:p14="http://schemas.microsoft.com/office/powerpoint/2010/main" val="3044815676"/>
+      </p:ext>
+    </p:extLst>
+  </p:cSld>
+  <p:clrMapOvr>
+    <a:masterClrMapping/>
+  </p:clrMapOvr>
+</p:notes>
+</file>
+
+<file path=ppt/notesSlides/notesSlide2.xml><?xml version="1.0" encoding="utf-8"?>
+<p:notes xmlns:a="http://schemas.openxmlformats.org/drawingml/2006/main" xmlns:r="http://schemas.openxmlformats.org/officeDocument/2006/relationships" xmlns:p="http://schemas.openxmlformats.org/presentationml/2006/main">
+  <p:cSld>
+    <p:spTree>
+      <p:nvGrpSpPr>
+        <p:cNvPr id="1" name=""/>
+        <p:cNvGrpSpPr/>
+        <p:nvPr/>
+      </p:nvGrpSpPr>
+      <p:grpSpPr>
+        <a:xfrm>
+          <a:off x="0" y="0"/>
+          <a:ext cx="0" cy="0"/>
+          <a:chOff x="0" y="0"/>
+          <a:chExt cx="0" cy="0"/>
+        </a:xfrm>
+      </p:grpSpPr>
+      <p:sp>
+        <p:nvSpPr>
+          <p:cNvPr id="2" name="Slide Image Placeholder 1"/>
+          <p:cNvSpPr>
+            <a:spLocks noGrp="1" noRot="1" noChangeAspect="1"/>
+          </p:cNvSpPr>
+          <p:nvPr>
+            <p:ph type="sldImg"/>
+          </p:nvPr>
+        </p:nvSpPr>
+        <p:spPr/>
+      </p:sp>
+      <p:sp>
+        <p:nvSpPr>
+          <p:cNvPr id="3" name="Notes Placeholder 2"/>
+          <p:cNvSpPr>
+            <a:spLocks noGrp="1"/>
+          </p:cNvSpPr>
+          <p:nvPr>
+            <p:ph type="body" idx="1"/>
+          </p:nvPr>
+        </p:nvSpPr>
+        <p:spPr/>
+        <p:txBody>
+          <a:bodyPr/>
+          <a:lstStyle/>
+          <a:p>
+            <a:r>
+              <a:t>Основание текста: Intro.tex — ручной контроль нескольких принтеров; Chapter1.tex — отлипание или смещение модели, образование хаотичных нитей, потери материала и машинного времени; Chapter2.tex — камерный метод обнаружения и результаты статьи. Рисунок взят из fig/spag.jpeg, используемого в главе 1.</a:t>
+            </a:r>
+          </a:p>
+          <a:p>
+            <a:r>
+              <a:t>[1] Hyungjung Kim, Hyunsu Lee, Ji-Soo Kim, Sung-Hoon Ahn. Image-based failure detection for material extrusion process using a convolutional neural network. The International Journal of Advanced Manufacturing Technology, 111, 1291–1302 (2020). https://doi.org/10.1007/s00170-020-06201-0</a:t>
+            </a:r>
+          </a:p>
+          <a:p>
+            <a:r>
+              <a:t>В разделе 5.2 статьи: 100 тестовых изображений, 50 с дефектом и 50 без дефекта; общая точность 96 %, доли правильного распознавания классов 94 % и 98 %. Предупреждение или остановка процесса описаны авторами как предусмотренные действия метода. Эти показатели относятся к литературному источнику, а не к собственной модели НИР. Сведения проверены по официальной странице издателя: https://link.springer.com/article/10.1007/s00170-020-06201-0</a:t>
+            </a:r>
+          </a:p>
+        </p:txBody>
+      </p:sp>
+      <p:sp>
+        <p:nvSpPr>
+          <p:cNvPr id="4" name="Slide Number Placeholder 3"/>
+          <p:cNvSpPr>
+            <a:spLocks noGrp="1"/>
+          </p:cNvSpPr>
+          <p:nvPr>
+            <p:ph type="sldNum" idx="5"/>
+          </p:nvPr>
+        </p:nvSpPr>
+        <p:spPr/>
+        <p:txBody>
+          <a:bodyPr/>
+          <a:lstStyle/>
+          <a:p>
+            <a:endParaRPr/>
+          </a:p>
+        </p:txBody>
+      </p:sp>
+    </p:spTree>
+    <p:extLst>
+      <p:ext uri="{BB962C8B-B14F-4D97-AF65-F5344CB8AC3E}">
+        <p14:creationId xmlns:p14="http://schemas.microsoft.com/office/powerpoint/2010/main" val="282807122"/>
       </p:ext>
     </p:extLst>
   </p:cSld>
@@ -4648,144 +4741,1299 @@
       </p:sp>
       <p:sp>
         <p:nvSpPr>
-          <p:cNvPr id="10" name="Замещающий номер слайда 2">
-            <a:extLst>
-              <a:ext uri="{FF2B5EF4-FFF2-40B4-BE49-F238E27FC236}">
-                <a16:creationId xmlns:a16="http://schemas.microsoft.com/office/drawing/2014/main" id="{D9CCC33F-C312-18FB-FDC6-D90C8FA741EB}"/>
-              </a:ext>
-            </a:extLst>
-          </p:cNvPr>
-          <p:cNvSpPr txBox="1">
-            <a:spLocks/>
-          </p:cNvSpPr>
-          <p:nvPr/>
+          <p:cNvPr id="6" name="Замещающий номер слайда 4">
+            <a:extLst>
+              <a:ext uri="{FF2B5EF4-FFF2-40B4-BE49-F238E27FC236}">
+                <a16:creationId xmlns:a16="http://schemas.microsoft.com/office/drawing/2014/main" id="{C78DB24C-FC20-2FE0-98E7-F598D1843687}"/>
+              </a:ext>
+            </a:extLst>
+          </p:cNvPr>
+          <p:cNvSpPr>
+            <a:spLocks noGrp="1"/>
+          </p:cNvSpPr>
+          <p:nvPr>
+            <p:ph type="sldNum" sz="quarter" idx="12"/>
+          </p:nvPr>
         </p:nvSpPr>
         <p:spPr>
           <a:xfrm>
-            <a:off x="7026910" y="6396991"/>
+            <a:off x="7088886" y="6493511"/>
             <a:ext cx="2057400" cy="365125"/>
+          </a:xfrm>
+        </p:spPr>
+        <p:txBody>
+          <a:bodyPr/>
+          <a:lstStyle/>
+          <a:p>
+            <a:fld id="{D6ED8A53-8D2F-4011-BE06-EDB0774336BA}" type="slidenum">
+              <a:rPr lang="ru-RU" sz="2000" dirty="0" smtClean="0">
+                <a:solidFill>
+                  <a:schemeClr val="tx1"/>
+                </a:solidFill>
+                <a:latin typeface="Times New Roman"/>
+                <a:cs typeface="Times New Roman"/>
+              </a:rPr>
+              <a:t>2</a:t>
+            </a:fld>
+            <a:endParaRPr lang="ru-RU" sz="2000">
+              <a:solidFill>
+                <a:schemeClr val="tx1"/>
+              </a:solidFill>
+              <a:latin typeface="Times New Roman"/>
+              <a:ea typeface="Calibri"/>
+              <a:cs typeface="Times New Roman"/>
+            </a:endParaRPr>
+          </a:p>
+        </p:txBody>
+      </p:sp>
+    </p:spTree>
+  </p:cSld>
+  <p:clrMapOvr>
+    <a:masterClrMapping/>
+  </p:clrMapOvr>
+</p:sld>
+</file>
+
+<file path=ppt/slides/slide3.xml><?xml version="1.0" encoding="utf-8"?>
+<p:sld xmlns:a="http://schemas.openxmlformats.org/drawingml/2006/main" xmlns:r="http://schemas.openxmlformats.org/officeDocument/2006/relationships" xmlns:p="http://schemas.openxmlformats.org/presentationml/2006/main">
+  <p:cSld>
+    <p:spTree>
+      <p:nvGrpSpPr>
+        <p:cNvPr id="1" name=""/>
+        <p:cNvGrpSpPr/>
+        <p:nvPr/>
+      </p:nvGrpSpPr>
+      <p:grpSpPr>
+        <a:xfrm>
+          <a:off x="0" y="0"/>
+          <a:ext cx="0" cy="0"/>
+          <a:chOff x="0" y="0"/>
+          <a:chExt cx="0" cy="0"/>
+        </a:xfrm>
+      </p:grpSpPr>
+      <p:sp>
+        <p:nvSpPr>
+          <p:cNvPr id="2" name="Заголовок 1">
+            <a:extLst>
+              <a:ext uri="{FF2B5EF4-FFF2-40B4-BE49-F238E27FC236}">
+                <a16:creationId xmlns:a16="http://schemas.microsoft.com/office/drawing/2014/main" id="{49CC29E7-47AE-4C1B-A66A-06BAB8AB4DBE}"/>
+              </a:ext>
+            </a:extLst>
+          </p:cNvPr>
+          <p:cNvSpPr>
+            <a:spLocks noGrp="1"/>
+          </p:cNvSpPr>
+          <p:nvPr>
+            <p:ph type="title"/>
+          </p:nvPr>
+        </p:nvSpPr>
+        <p:spPr>
+          <a:xfrm>
+            <a:off x="628650" y="-3176"/>
+            <a:ext cx="7886700" cy="712868"/>
+          </a:xfrm>
+        </p:spPr>
+        <p:txBody>
+          <a:bodyPr wrap="square" lIns="91440" tIns="45720" rIns="91440" bIns="45720">
+            <a:noAutofit/>
+          </a:bodyPr>
+          <a:lstStyle>
+            <a:defPPr algn="ctr">
+              <a:defRPr sz="4400" b="0">
+                <a:solidFill>
+                  <a:srgbClr val="000000"/>
+                </a:solidFill>
+                <a:latin typeface="Times New Roman"/>
+                <a:ea typeface="Times New Roman"/>
+                <a:cs typeface="Times New Roman"/>
+              </a:defRPr>
+            </a:defPPr>
+          </a:lstStyle>
+          <a:p>
+            <a:pPr algn="ctr">
+              <a:buNone/>
+              <a:defRPr sz="4400" b="0">
+                <a:solidFill>
+                  <a:srgbClr val="000000"/>
+                </a:solidFill>
+                <a:latin typeface="Times New Roman"/>
+                <a:ea typeface="Times New Roman"/>
+                <a:cs typeface="Times New Roman"/>
+              </a:defRPr>
+            </a:pPr>
+            <a:r>
+              <a:rPr sz="4400" b="0">
+                <a:solidFill>
+                  <a:srgbClr val="000000"/>
+                </a:solidFill>
+                <a:latin typeface="Times New Roman"/>
+                <a:ea typeface="Times New Roman"/>
+                <a:cs typeface="Times New Roman"/>
+              </a:rPr>
+              <a:t>В чем заключается проблема:</a:t>
+            </a:r>
+            <a:endParaRPr/>
+          </a:p>
+        </p:txBody>
+      </p:sp>
+      <p:sp>
+        <p:nvSpPr>
+          <p:cNvPr id="5" name="Замещающий номер слайда 4">
+            <a:extLst>
+              <a:ext uri="{FF2B5EF4-FFF2-40B4-BE49-F238E27FC236}">
+                <a16:creationId xmlns:a16="http://schemas.microsoft.com/office/drawing/2014/main" id="{7A7AC3B3-0D3D-46AF-A9AF-3FA15E2C3D9E}"/>
+              </a:ext>
+            </a:extLst>
+          </p:cNvPr>
+          <p:cNvSpPr>
+            <a:spLocks noGrp="1"/>
+          </p:cNvSpPr>
+          <p:nvPr>
+            <p:ph type="sldNum" idx="12"/>
+          </p:nvPr>
+        </p:nvSpPr>
+        <p:spPr>
+          <a:xfrm>
+            <a:off x="7088886" y="6493511"/>
+            <a:ext cx="2057400" cy="365125"/>
+          </a:xfrm>
+        </p:spPr>
+        <p:txBody>
+          <a:bodyPr wrap="square" lIns="91440" tIns="45720" rIns="91440" bIns="45720">
+            <a:noAutofit/>
+          </a:bodyPr>
+          <a:lstStyle>
+            <a:defPPr algn="r">
+              <a:defRPr sz="2000" b="0">
+                <a:solidFill>
+                  <a:srgbClr val="000000"/>
+                </a:solidFill>
+                <a:latin typeface="Times New Roman"/>
+                <a:ea typeface="Times New Roman"/>
+                <a:cs typeface="Times New Roman"/>
+              </a:defRPr>
+            </a:defPPr>
+          </a:lstStyle>
+          <a:p>
+            <a:pPr algn="r">
+              <a:defRPr sz="2000" b="0">
+                <a:solidFill>
+                  <a:srgbClr val="000000"/>
+                </a:solidFill>
+                <a:latin typeface="Times New Roman"/>
+                <a:ea typeface="Times New Roman"/>
+                <a:cs typeface="Times New Roman"/>
+              </a:defRPr>
+            </a:pPr>
+            <a:fld id="{D6ED8A53-8D2F-4011-BE06-EDB0774336BA}" type="slidenum">
+              <a:rPr sz="2000" b="0">
+                <a:solidFill>
+                  <a:srgbClr val="000000"/>
+                </a:solidFill>
+                <a:latin typeface="Times New Roman"/>
+                <a:ea typeface="Times New Roman"/>
+                <a:cs typeface="Times New Roman"/>
+              </a:rPr>
+              <a:t>3</a:t>
+            </a:fld>
+            <a:endParaRPr sz="2000">
+              <a:solidFill>
+                <a:schemeClr val="tx1"/>
+              </a:solidFill>
+              <a:latin typeface="Times New Roman"/>
+              <a:ea typeface="Times New Roman"/>
+              <a:cs typeface="Times New Roman"/>
+            </a:endParaRPr>
+          </a:p>
+        </p:txBody>
+      </p:sp>
+      <p:sp>
+        <p:nvSpPr>
+          <p:cNvPr id="3" name="TextBox 2">
+            <a:extLst>
+              <a:ext uri="{FF2B5EF4-FFF2-40B4-BE49-F238E27FC236}">
+                <a16:creationId xmlns:a16="http://schemas.microsoft.com/office/drawing/2014/main" id="{B9A98C53-8330-9192-D210-4F5703BD6F05}"/>
+              </a:ext>
+            </a:extLst>
+          </p:cNvPr>
+          <p:cNvSpPr>
+            <a:spLocks noGrp="1"/>
+          </p:cNvSpPr>
+          <p:nvPr/>
+        </p:nvSpPr>
+        <p:spPr>
+          <a:xfrm>
+            <a:off x="277898" y="906051"/>
+            <a:ext cx="5718578" cy="1737360"/>
+          </a:xfrm>
+          <a:prstGeom prst="rect">
+            <a:avLst/>
+          </a:prstGeom>
+          <a:noFill/>
+          <a:ln>
+            <a:solidFill>
+              <a:schemeClr val="tx1"/>
+            </a:solidFill>
+            <a:prstDash val="dash"/>
+          </a:ln>
+        </p:spPr>
+        <p:txBody>
+          <a:bodyPr rot="0" spcFirstLastPara="0" vert="horz" wrap="square" lIns="91440" tIns="45720" rIns="91440" bIns="45720" anchor="ctr">
+            <a:noAutofit/>
+          </a:bodyPr>
+          <a:lstStyle>
+            <a:defPPr algn="l">
+              <a:defRPr sz="1800" b="0">
+                <a:solidFill>
+                  <a:srgbClr val="000000"/>
+                </a:solidFill>
+                <a:latin typeface="Times New Roman"/>
+                <a:ea typeface="Times New Roman"/>
+                <a:cs typeface="Times New Roman"/>
+              </a:defRPr>
+            </a:defPPr>
+          </a:lstStyle>
+          <a:p>
+            <a:pPr algn="l">
+              <a:defRPr sz="1800" b="0">
+                <a:solidFill>
+                  <a:srgbClr val="000000"/>
+                </a:solidFill>
+                <a:latin typeface="Times New Roman"/>
+                <a:ea typeface="Times New Roman"/>
+                <a:cs typeface="Times New Roman"/>
+              </a:defRPr>
+            </a:pPr>
+            <a:r>
+              <a:rPr sz="1800" b="0" dirty="0" err="1">
+                <a:solidFill>
+                  <a:srgbClr val="000000"/>
+                </a:solidFill>
+                <a:latin typeface="Times New Roman"/>
+                <a:ea typeface="Times New Roman"/>
+                <a:cs typeface="Times New Roman"/>
+              </a:rPr>
+              <a:t>При</a:t>
+            </a:r>
+            <a:r>
+              <a:rPr sz="1800" b="0" dirty="0">
+                <a:solidFill>
+                  <a:srgbClr val="000000"/>
+                </a:solidFill>
+                <a:latin typeface="Times New Roman"/>
+                <a:ea typeface="Times New Roman"/>
+                <a:cs typeface="Times New Roman"/>
+              </a:rPr>
+              <a:t> </a:t>
+            </a:r>
+            <a:r>
+              <a:rPr sz="1800" b="1" dirty="0" err="1">
+                <a:solidFill>
+                  <a:srgbClr val="000000"/>
+                </a:solidFill>
+                <a:latin typeface="Times New Roman"/>
+                <a:ea typeface="Times New Roman"/>
+                <a:cs typeface="Times New Roman"/>
+              </a:rPr>
+              <a:t>отлипании</a:t>
+            </a:r>
+            <a:r>
+              <a:rPr sz="1800" b="1" dirty="0">
+                <a:solidFill>
+                  <a:srgbClr val="000000"/>
+                </a:solidFill>
+                <a:latin typeface="Times New Roman"/>
+                <a:ea typeface="Times New Roman"/>
+                <a:cs typeface="Times New Roman"/>
+              </a:rPr>
+              <a:t> </a:t>
+            </a:r>
+            <a:r>
+              <a:rPr sz="1800" b="1" dirty="0" err="1">
+                <a:solidFill>
+                  <a:srgbClr val="000000"/>
+                </a:solidFill>
+                <a:latin typeface="Times New Roman"/>
+                <a:ea typeface="Times New Roman"/>
+                <a:cs typeface="Times New Roman"/>
+              </a:rPr>
+              <a:t>или</a:t>
+            </a:r>
+            <a:r>
+              <a:rPr sz="1800" b="1" dirty="0">
+                <a:solidFill>
+                  <a:srgbClr val="000000"/>
+                </a:solidFill>
+                <a:latin typeface="Times New Roman"/>
+                <a:ea typeface="Times New Roman"/>
+                <a:cs typeface="Times New Roman"/>
+              </a:rPr>
+              <a:t> </a:t>
+            </a:r>
+            <a:r>
+              <a:rPr sz="1800" b="1" dirty="0" err="1">
+                <a:solidFill>
+                  <a:srgbClr val="000000"/>
+                </a:solidFill>
+                <a:latin typeface="Times New Roman"/>
+                <a:ea typeface="Times New Roman"/>
+                <a:cs typeface="Times New Roman"/>
+              </a:rPr>
+              <a:t>смещении</a:t>
+            </a:r>
+            <a:r>
+              <a:rPr sz="1800" b="1" dirty="0">
+                <a:solidFill>
+                  <a:srgbClr val="000000"/>
+                </a:solidFill>
+                <a:latin typeface="Times New Roman"/>
+                <a:ea typeface="Times New Roman"/>
+                <a:cs typeface="Times New Roman"/>
+              </a:rPr>
+              <a:t> </a:t>
+            </a:r>
+            <a:r>
+              <a:rPr sz="1800" b="1" dirty="0" err="1">
+                <a:solidFill>
+                  <a:srgbClr val="000000"/>
+                </a:solidFill>
+                <a:latin typeface="Times New Roman"/>
+                <a:ea typeface="Times New Roman"/>
+                <a:cs typeface="Times New Roman"/>
+              </a:rPr>
+              <a:t>модели</a:t>
+            </a:r>
+            <a:r>
+              <a:rPr sz="1800" b="0" dirty="0">
+                <a:solidFill>
+                  <a:srgbClr val="000000"/>
+                </a:solidFill>
+                <a:latin typeface="Times New Roman"/>
+                <a:ea typeface="Times New Roman"/>
+                <a:cs typeface="Times New Roman"/>
+              </a:rPr>
+              <a:t> </a:t>
+            </a:r>
+            <a:r>
+              <a:rPr sz="1800" b="0" dirty="0" err="1">
+                <a:solidFill>
+                  <a:srgbClr val="000000"/>
+                </a:solidFill>
+                <a:latin typeface="Times New Roman"/>
+                <a:ea typeface="Times New Roman"/>
+                <a:cs typeface="Times New Roman"/>
+              </a:rPr>
+              <a:t>пластик</a:t>
+            </a:r>
+            <a:r>
+              <a:rPr sz="1800" b="0" dirty="0">
+                <a:solidFill>
+                  <a:srgbClr val="000000"/>
+                </a:solidFill>
+                <a:latin typeface="Times New Roman"/>
+                <a:ea typeface="Times New Roman"/>
+                <a:cs typeface="Times New Roman"/>
+              </a:rPr>
+              <a:t> </a:t>
+            </a:r>
+            <a:r>
+              <a:rPr sz="1800" b="0" dirty="0" err="1">
+                <a:solidFill>
+                  <a:srgbClr val="000000"/>
+                </a:solidFill>
+                <a:latin typeface="Times New Roman"/>
+                <a:ea typeface="Times New Roman"/>
+                <a:cs typeface="Times New Roman"/>
+              </a:rPr>
+              <a:t>накапливается</a:t>
+            </a:r>
+            <a:r>
+              <a:rPr sz="1800" b="0" dirty="0">
+                <a:solidFill>
+                  <a:srgbClr val="000000"/>
+                </a:solidFill>
+                <a:latin typeface="Times New Roman"/>
+                <a:ea typeface="Times New Roman"/>
+                <a:cs typeface="Times New Roman"/>
+              </a:rPr>
+              <a:t> в </a:t>
+            </a:r>
+            <a:r>
+              <a:rPr sz="1800" b="0" dirty="0" err="1">
+                <a:solidFill>
+                  <a:srgbClr val="000000"/>
+                </a:solidFill>
+                <a:latin typeface="Times New Roman"/>
+                <a:ea typeface="Times New Roman"/>
+                <a:cs typeface="Times New Roman"/>
+              </a:rPr>
+              <a:t>виде</a:t>
+            </a:r>
+            <a:r>
+              <a:rPr sz="1800" b="0" dirty="0">
+                <a:solidFill>
+                  <a:srgbClr val="000000"/>
+                </a:solidFill>
+                <a:latin typeface="Times New Roman"/>
+                <a:ea typeface="Times New Roman"/>
+                <a:cs typeface="Times New Roman"/>
+              </a:rPr>
+              <a:t> </a:t>
+            </a:r>
+            <a:r>
+              <a:rPr sz="1800" b="0" dirty="0" err="1">
+                <a:solidFill>
+                  <a:srgbClr val="000000"/>
+                </a:solidFill>
+                <a:latin typeface="Times New Roman"/>
+                <a:ea typeface="Times New Roman"/>
+                <a:cs typeface="Times New Roman"/>
+              </a:rPr>
+              <a:t>хаотичных</a:t>
+            </a:r>
+            <a:r>
+              <a:rPr sz="1800" b="0" dirty="0">
+                <a:solidFill>
+                  <a:srgbClr val="000000"/>
+                </a:solidFill>
+                <a:latin typeface="Times New Roman"/>
+                <a:ea typeface="Times New Roman"/>
+                <a:cs typeface="Times New Roman"/>
+              </a:rPr>
+              <a:t> </a:t>
+            </a:r>
+            <a:r>
+              <a:rPr sz="1800" b="0" dirty="0" err="1">
+                <a:solidFill>
+                  <a:srgbClr val="000000"/>
+                </a:solidFill>
+                <a:latin typeface="Times New Roman"/>
+                <a:ea typeface="Times New Roman"/>
+                <a:cs typeface="Times New Roman"/>
+              </a:rPr>
+              <a:t>нитей</a:t>
+            </a:r>
+            <a:r>
+              <a:rPr sz="1800" b="0" dirty="0">
+                <a:solidFill>
+                  <a:srgbClr val="000000"/>
+                </a:solidFill>
+                <a:latin typeface="Times New Roman"/>
+                <a:ea typeface="Times New Roman"/>
+                <a:cs typeface="Times New Roman"/>
+              </a:rPr>
+              <a:t> — </a:t>
+            </a:r>
+            <a:r>
+              <a:rPr sz="1800" b="0" dirty="0" err="1">
+                <a:solidFill>
+                  <a:srgbClr val="000000"/>
+                </a:solidFill>
+                <a:latin typeface="Times New Roman"/>
+                <a:ea typeface="Times New Roman"/>
+                <a:cs typeface="Times New Roman"/>
+              </a:rPr>
+              <a:t>возникает</a:t>
+            </a:r>
+            <a:r>
+              <a:rPr sz="1800" b="0" dirty="0">
+                <a:solidFill>
+                  <a:srgbClr val="000000"/>
+                </a:solidFill>
+                <a:latin typeface="Times New Roman"/>
+                <a:ea typeface="Times New Roman"/>
+                <a:cs typeface="Times New Roman"/>
+              </a:rPr>
+              <a:t> </a:t>
+            </a:r>
+            <a:r>
+              <a:rPr sz="1800" b="1" dirty="0" err="1">
+                <a:solidFill>
+                  <a:srgbClr val="000000"/>
+                </a:solidFill>
+                <a:latin typeface="Times New Roman"/>
+                <a:ea typeface="Times New Roman"/>
+                <a:cs typeface="Times New Roman"/>
+              </a:rPr>
+              <a:t>дефект</a:t>
+            </a:r>
+            <a:r>
+              <a:rPr sz="1800" b="1" dirty="0">
+                <a:solidFill>
+                  <a:srgbClr val="000000"/>
+                </a:solidFill>
+                <a:latin typeface="Times New Roman"/>
+                <a:ea typeface="Times New Roman"/>
+                <a:cs typeface="Times New Roman"/>
+              </a:rPr>
+              <a:t> «</a:t>
+            </a:r>
+            <a:r>
+              <a:rPr sz="1800" b="1" dirty="0" err="1">
+                <a:solidFill>
+                  <a:srgbClr val="000000"/>
+                </a:solidFill>
+                <a:latin typeface="Times New Roman"/>
+                <a:ea typeface="Times New Roman"/>
+                <a:cs typeface="Times New Roman"/>
+              </a:rPr>
+              <a:t>спагетти</a:t>
+            </a:r>
+            <a:r>
+              <a:rPr sz="1800" b="1" dirty="0">
+                <a:solidFill>
+                  <a:srgbClr val="000000"/>
+                </a:solidFill>
+                <a:latin typeface="Times New Roman"/>
+                <a:ea typeface="Times New Roman"/>
+                <a:cs typeface="Times New Roman"/>
+              </a:rPr>
+              <a:t>»</a:t>
+            </a:r>
+            <a:r>
+              <a:rPr sz="1800" b="0" dirty="0">
+                <a:solidFill>
+                  <a:srgbClr val="000000"/>
+                </a:solidFill>
+                <a:latin typeface="Times New Roman"/>
+                <a:ea typeface="Times New Roman"/>
+                <a:cs typeface="Times New Roman"/>
+              </a:rPr>
+              <a:t>.</a:t>
+            </a:r>
+            <a:endParaRPr dirty="0"/>
+          </a:p>
+        </p:txBody>
+      </p:sp>
+      <p:sp>
+        <p:nvSpPr>
+          <p:cNvPr id="27" name="TextBox 26">
+            <a:extLst>
+              <a:ext uri="{FF2B5EF4-FFF2-40B4-BE49-F238E27FC236}">
+                <a16:creationId xmlns:a16="http://schemas.microsoft.com/office/drawing/2014/main" id="{93027D3F-6BC8-2110-F2D0-39287E8FAFD7}"/>
+              </a:ext>
+            </a:extLst>
+          </p:cNvPr>
+          <p:cNvSpPr>
+            <a:spLocks noGrp="1"/>
+          </p:cNvSpPr>
+          <p:nvPr/>
+        </p:nvSpPr>
+        <p:spPr>
+          <a:xfrm>
+            <a:off x="6002915" y="5906647"/>
+            <a:ext cx="2868613" cy="579120"/>
+          </a:xfrm>
+          <a:prstGeom prst="rect">
+            <a:avLst/>
+          </a:prstGeom>
+          <a:noFill/>
+        </p:spPr>
+        <p:txBody>
+          <a:bodyPr rot="0" spcFirstLastPara="0" vert="horz" wrap="square" lIns="91440" tIns="45720" rIns="91440" bIns="45720" anchor="t">
+            <a:noAutofit/>
+          </a:bodyPr>
+          <a:lstStyle>
+            <a:defPPr algn="l">
+              <a:defRPr sz="1600" b="0">
+                <a:solidFill>
+                  <a:srgbClr val="000000"/>
+                </a:solidFill>
+                <a:latin typeface="Times New Roman"/>
+                <a:ea typeface="Times New Roman"/>
+                <a:cs typeface="Times New Roman"/>
+              </a:defRPr>
+            </a:defPPr>
+          </a:lstStyle>
+          <a:p>
+            <a:pPr algn="l">
+              <a:defRPr sz="1600" b="0">
+                <a:solidFill>
+                  <a:srgbClr val="000000"/>
+                </a:solidFill>
+                <a:latin typeface="Times New Roman"/>
+                <a:ea typeface="Times New Roman"/>
+                <a:cs typeface="Times New Roman"/>
+              </a:defRPr>
+            </a:pPr>
+            <a:r>
+              <a:rPr sz="1600" b="0">
+                <a:solidFill>
+                  <a:srgbClr val="000000"/>
+                </a:solidFill>
+                <a:latin typeface="Times New Roman"/>
+                <a:ea typeface="Times New Roman"/>
+                <a:cs typeface="Times New Roman"/>
+              </a:rPr>
+              <a:t>Рис. 1 – Дефект типа «спагетти»</a:t>
+            </a:r>
+          </a:p>
+        </p:txBody>
+      </p:sp>
+      <p:sp>
+        <p:nvSpPr>
+          <p:cNvPr id="30" name="TextBox 29">
+            <a:extLst>
+              <a:ext uri="{FF2B5EF4-FFF2-40B4-BE49-F238E27FC236}">
+                <a16:creationId xmlns:a16="http://schemas.microsoft.com/office/drawing/2014/main" id="{E103B4DB-8439-9822-A8EA-B3F1D6AB4219}"/>
+              </a:ext>
+            </a:extLst>
+          </p:cNvPr>
+          <p:cNvSpPr>
+            <a:spLocks noGrp="1"/>
+          </p:cNvSpPr>
+          <p:nvPr/>
+        </p:nvSpPr>
+        <p:spPr>
+          <a:xfrm>
+            <a:off x="277897" y="3056229"/>
+            <a:ext cx="5718578" cy="2560320"/>
+          </a:xfrm>
+          <a:prstGeom prst="rect">
+            <a:avLst/>
+          </a:prstGeom>
+          <a:noFill/>
+          <a:ln>
+            <a:solidFill>
+              <a:schemeClr val="tx1"/>
+            </a:solidFill>
+            <a:prstDash val="dash"/>
+          </a:ln>
+        </p:spPr>
+        <p:txBody>
+          <a:bodyPr rot="0" spcFirstLastPara="0" vert="horz" wrap="square" lIns="91440" tIns="45720" rIns="91440" bIns="45720" anchor="ctr">
+            <a:noAutofit/>
+          </a:bodyPr>
+          <a:lstStyle>
+            <a:defPPr algn="l">
+              <a:defRPr sz="1800" b="0">
+                <a:solidFill>
+                  <a:srgbClr val="000000"/>
+                </a:solidFill>
+                <a:latin typeface="Times New Roman"/>
+                <a:ea typeface="Times New Roman"/>
+                <a:cs typeface="Times New Roman"/>
+              </a:defRPr>
+            </a:defPPr>
+          </a:lstStyle>
+          <a:p>
+            <a:pPr algn="ctr">
+              <a:spcBef>
+                <a:spcPts val="0"/>
+              </a:spcBef>
+              <a:spcAft>
+                <a:spcPts val="0"/>
+              </a:spcAft>
+              <a:buNone/>
+              <a:defRPr sz="1800" b="0">
+                <a:solidFill>
+                  <a:srgbClr val="000000"/>
+                </a:solidFill>
+                <a:latin typeface="Times New Roman"/>
+                <a:ea typeface="Times New Roman"/>
+                <a:cs typeface="Times New Roman"/>
+              </a:defRPr>
+            </a:pPr>
+            <a:r>
+              <a:rPr dirty="0" err="1"/>
+              <a:t>Последствия</a:t>
+            </a:r>
+            <a:r>
+              <a:rPr dirty="0"/>
+              <a:t> и </a:t>
+            </a:r>
+            <a:r>
+              <a:rPr dirty="0" err="1"/>
+              <a:t>способ</a:t>
+            </a:r>
+            <a:r>
+              <a:rPr dirty="0"/>
+              <a:t> </a:t>
+            </a:r>
+            <a:r>
+              <a:rPr dirty="0" err="1"/>
+              <a:t>решения</a:t>
+            </a:r>
+            <a:r>
+              <a:rPr dirty="0"/>
+              <a:t>:</a:t>
+            </a:r>
+          </a:p>
+          <a:p>
+            <a:pPr marL="228600" indent="-228600">
+              <a:spcBef>
+                <a:spcPts val="0"/>
+              </a:spcBef>
+              <a:spcAft>
+                <a:spcPts val="0"/>
+              </a:spcAft>
+              <a:buChar char="•"/>
+              <a:defRPr sz="1800" b="0">
+                <a:solidFill>
+                  <a:srgbClr val="000000"/>
+                </a:solidFill>
+                <a:latin typeface="Times New Roman"/>
+                <a:ea typeface="Times New Roman"/>
+                <a:cs typeface="Times New Roman"/>
+              </a:defRPr>
+            </a:pPr>
+            <a:r>
+              <a:rPr dirty="0" err="1"/>
+              <a:t>Продолжение</a:t>
+            </a:r>
+            <a:r>
+              <a:rPr dirty="0"/>
+              <a:t> </a:t>
+            </a:r>
+            <a:r>
+              <a:rPr dirty="0" err="1"/>
+              <a:t>неудачной</a:t>
+            </a:r>
+            <a:r>
+              <a:rPr dirty="0"/>
+              <a:t> </a:t>
+            </a:r>
+            <a:r>
+              <a:rPr dirty="0" err="1"/>
+              <a:t>печати</a:t>
+            </a:r>
+            <a:r>
+              <a:rPr dirty="0"/>
+              <a:t> </a:t>
+            </a:r>
+            <a:r>
+              <a:rPr dirty="0" err="1"/>
+              <a:t>приводит</a:t>
+            </a:r>
+            <a:r>
+              <a:rPr dirty="0"/>
+              <a:t> к </a:t>
+            </a:r>
+            <a:r>
+              <a:rPr sz="1800" b="1" dirty="0" err="1">
+                <a:solidFill>
+                  <a:srgbClr val="000000"/>
+                </a:solidFill>
+                <a:latin typeface="Times New Roman"/>
+                <a:ea typeface="Times New Roman"/>
+                <a:cs typeface="Times New Roman"/>
+              </a:rPr>
+              <a:t>потере</a:t>
+            </a:r>
+            <a:r>
+              <a:rPr sz="1800" b="1" dirty="0">
+                <a:solidFill>
+                  <a:srgbClr val="000000"/>
+                </a:solidFill>
+                <a:latin typeface="Times New Roman"/>
+                <a:ea typeface="Times New Roman"/>
+                <a:cs typeface="Times New Roman"/>
+              </a:rPr>
+              <a:t> </a:t>
+            </a:r>
+            <a:r>
+              <a:rPr sz="1800" b="1" dirty="0" err="1">
+                <a:solidFill>
+                  <a:srgbClr val="000000"/>
+                </a:solidFill>
+                <a:latin typeface="Times New Roman"/>
+                <a:ea typeface="Times New Roman"/>
+                <a:cs typeface="Times New Roman"/>
+              </a:rPr>
+              <a:t>материала</a:t>
+            </a:r>
+            <a:r>
+              <a:rPr sz="1800" b="1" dirty="0">
+                <a:solidFill>
+                  <a:srgbClr val="000000"/>
+                </a:solidFill>
+                <a:latin typeface="Times New Roman"/>
+                <a:ea typeface="Times New Roman"/>
+                <a:cs typeface="Times New Roman"/>
+              </a:rPr>
+              <a:t> и </a:t>
+            </a:r>
+            <a:r>
+              <a:rPr sz="1800" b="1" dirty="0" err="1">
+                <a:solidFill>
+                  <a:srgbClr val="000000"/>
+                </a:solidFill>
+                <a:latin typeface="Times New Roman"/>
+                <a:ea typeface="Times New Roman"/>
+                <a:cs typeface="Times New Roman"/>
+              </a:rPr>
+              <a:t>машинного</a:t>
+            </a:r>
+            <a:r>
+              <a:rPr sz="1800" b="1" dirty="0">
+                <a:solidFill>
+                  <a:srgbClr val="000000"/>
+                </a:solidFill>
+                <a:latin typeface="Times New Roman"/>
+                <a:ea typeface="Times New Roman"/>
+                <a:cs typeface="Times New Roman"/>
+              </a:rPr>
+              <a:t> </a:t>
+            </a:r>
+            <a:r>
+              <a:rPr sz="1800" b="1" dirty="0" err="1">
+                <a:solidFill>
+                  <a:srgbClr val="000000"/>
+                </a:solidFill>
+                <a:latin typeface="Times New Roman"/>
+                <a:ea typeface="Times New Roman"/>
+                <a:cs typeface="Times New Roman"/>
+              </a:rPr>
+              <a:t>времени</a:t>
+            </a:r>
+            <a:r>
+              <a:rPr dirty="0"/>
+              <a:t>.</a:t>
+            </a:r>
+          </a:p>
+          <a:p>
+            <a:pPr marL="228600" indent="-228600">
+              <a:spcBef>
+                <a:spcPts val="0"/>
+              </a:spcBef>
+              <a:spcAft>
+                <a:spcPts val="0"/>
+              </a:spcAft>
+              <a:buChar char="•"/>
+              <a:defRPr sz="1800" b="0">
+                <a:solidFill>
+                  <a:srgbClr val="000000"/>
+                </a:solidFill>
+                <a:latin typeface="Times New Roman"/>
+                <a:ea typeface="Times New Roman"/>
+                <a:cs typeface="Times New Roman"/>
+              </a:defRPr>
+            </a:pPr>
+            <a:r>
+              <a:rPr sz="1800" b="1" dirty="0" err="1">
+                <a:solidFill>
+                  <a:srgbClr val="000000"/>
+                </a:solidFill>
+                <a:latin typeface="Times New Roman"/>
+                <a:ea typeface="Times New Roman"/>
+                <a:cs typeface="Times New Roman"/>
+              </a:rPr>
+              <a:t>Камера</a:t>
+            </a:r>
+            <a:r>
+              <a:rPr sz="1800" b="1" dirty="0">
+                <a:solidFill>
+                  <a:srgbClr val="000000"/>
+                </a:solidFill>
+                <a:latin typeface="Times New Roman"/>
+                <a:ea typeface="Times New Roman"/>
+                <a:cs typeface="Times New Roman"/>
+              </a:rPr>
+              <a:t> и </a:t>
+            </a:r>
+            <a:r>
+              <a:rPr sz="1800" b="1" dirty="0" err="1">
+                <a:solidFill>
+                  <a:srgbClr val="000000"/>
+                </a:solidFill>
+                <a:latin typeface="Times New Roman"/>
+                <a:ea typeface="Times New Roman"/>
+                <a:cs typeface="Times New Roman"/>
+              </a:rPr>
+              <a:t>свёрточная</a:t>
+            </a:r>
+            <a:r>
+              <a:rPr sz="1800" b="1" dirty="0">
+                <a:solidFill>
+                  <a:srgbClr val="000000"/>
+                </a:solidFill>
+                <a:latin typeface="Times New Roman"/>
+                <a:ea typeface="Times New Roman"/>
+                <a:cs typeface="Times New Roman"/>
+              </a:rPr>
+              <a:t> </a:t>
+            </a:r>
+            <a:r>
+              <a:rPr sz="1800" b="1" dirty="0" err="1">
+                <a:solidFill>
+                  <a:srgbClr val="000000"/>
+                </a:solidFill>
+                <a:latin typeface="Times New Roman"/>
+                <a:ea typeface="Times New Roman"/>
+                <a:cs typeface="Times New Roman"/>
+              </a:rPr>
+              <a:t>нейронная</a:t>
+            </a:r>
+            <a:r>
+              <a:rPr sz="1800" b="1" dirty="0">
+                <a:solidFill>
+                  <a:srgbClr val="000000"/>
+                </a:solidFill>
+                <a:latin typeface="Times New Roman"/>
+                <a:ea typeface="Times New Roman"/>
+                <a:cs typeface="Times New Roman"/>
+              </a:rPr>
+              <a:t> </a:t>
+            </a:r>
+            <a:r>
+              <a:rPr sz="1800" b="1" dirty="0" err="1">
+                <a:solidFill>
+                  <a:srgbClr val="000000"/>
+                </a:solidFill>
+                <a:latin typeface="Times New Roman"/>
+                <a:ea typeface="Times New Roman"/>
+                <a:cs typeface="Times New Roman"/>
+              </a:rPr>
+              <a:t>сеть</a:t>
+            </a:r>
+            <a:r>
+              <a:rPr dirty="0"/>
+              <a:t> </a:t>
+            </a:r>
+            <a:r>
+              <a:rPr dirty="0" err="1"/>
+              <a:t>обнаруживают</a:t>
+            </a:r>
+            <a:r>
+              <a:rPr dirty="0"/>
+              <a:t> «</a:t>
+            </a:r>
+            <a:r>
+              <a:rPr dirty="0" err="1"/>
+              <a:t>спагетти</a:t>
+            </a:r>
+            <a:r>
+              <a:rPr dirty="0"/>
+              <a:t>» </a:t>
+            </a:r>
+            <a:r>
+              <a:rPr dirty="0" err="1"/>
+              <a:t>по</a:t>
+            </a:r>
+            <a:r>
+              <a:rPr dirty="0"/>
+              <a:t> </a:t>
+            </a:r>
+            <a:r>
+              <a:rPr dirty="0" err="1"/>
+              <a:t>изображениям</a:t>
+            </a:r>
+            <a:r>
+              <a:rPr dirty="0"/>
+              <a:t>.</a:t>
+            </a:r>
+          </a:p>
+          <a:p>
+            <a:pPr marL="228600" indent="-228600">
+              <a:spcBef>
+                <a:spcPts val="0"/>
+              </a:spcBef>
+              <a:spcAft>
+                <a:spcPts val="0"/>
+              </a:spcAft>
+              <a:buChar char="•"/>
+              <a:defRPr sz="1800" b="0">
+                <a:solidFill>
+                  <a:srgbClr val="000000"/>
+                </a:solidFill>
+                <a:latin typeface="Times New Roman"/>
+                <a:ea typeface="Times New Roman"/>
+                <a:cs typeface="Times New Roman"/>
+              </a:defRPr>
+            </a:pPr>
+            <a:r>
+              <a:rPr dirty="0"/>
+              <a:t>В </a:t>
+            </a:r>
+            <a:r>
+              <a:rPr dirty="0" err="1"/>
+              <a:t>исследовании</a:t>
+            </a:r>
+            <a:r>
+              <a:rPr dirty="0"/>
+              <a:t> [1] </a:t>
+            </a:r>
+            <a:r>
+              <a:rPr dirty="0" err="1"/>
+              <a:t>точность</a:t>
+            </a:r>
+            <a:r>
+              <a:rPr dirty="0"/>
+              <a:t> </a:t>
+            </a:r>
+            <a:r>
+              <a:rPr dirty="0" err="1"/>
+              <a:t>классификации</a:t>
+            </a:r>
+            <a:r>
+              <a:rPr dirty="0"/>
+              <a:t> </a:t>
+            </a:r>
+            <a:r>
+              <a:rPr dirty="0" err="1"/>
+              <a:t>составила</a:t>
+            </a:r>
+            <a:r>
+              <a:rPr dirty="0"/>
+              <a:t> </a:t>
+            </a:r>
+            <a:r>
+              <a:rPr sz="1800" b="1" dirty="0">
+                <a:solidFill>
+                  <a:srgbClr val="000000"/>
+                </a:solidFill>
+                <a:latin typeface="Times New Roman"/>
+                <a:ea typeface="Times New Roman"/>
+                <a:cs typeface="Times New Roman"/>
+              </a:rPr>
+              <a:t>96 % </a:t>
+            </a:r>
+            <a:r>
+              <a:rPr sz="1800" b="1" dirty="0" err="1">
+                <a:solidFill>
+                  <a:srgbClr val="000000"/>
+                </a:solidFill>
+                <a:latin typeface="Times New Roman"/>
+                <a:ea typeface="Times New Roman"/>
+                <a:cs typeface="Times New Roman"/>
+              </a:rPr>
+              <a:t>на</a:t>
+            </a:r>
+            <a:r>
+              <a:rPr sz="1800" b="1" dirty="0">
+                <a:solidFill>
+                  <a:srgbClr val="000000"/>
+                </a:solidFill>
+                <a:latin typeface="Times New Roman"/>
+                <a:ea typeface="Times New Roman"/>
+                <a:cs typeface="Times New Roman"/>
+              </a:rPr>
+              <a:t> 100 </a:t>
+            </a:r>
+            <a:r>
+              <a:rPr sz="1800" b="1" dirty="0" err="1">
+                <a:solidFill>
+                  <a:srgbClr val="000000"/>
+                </a:solidFill>
+                <a:latin typeface="Times New Roman"/>
+                <a:ea typeface="Times New Roman"/>
+                <a:cs typeface="Times New Roman"/>
+              </a:rPr>
+              <a:t>тестовых</a:t>
+            </a:r>
+            <a:r>
+              <a:rPr sz="1800" b="1" dirty="0">
+                <a:solidFill>
+                  <a:srgbClr val="000000"/>
+                </a:solidFill>
+                <a:latin typeface="Times New Roman"/>
+                <a:ea typeface="Times New Roman"/>
+                <a:cs typeface="Times New Roman"/>
+              </a:rPr>
+              <a:t> </a:t>
+            </a:r>
+            <a:r>
+              <a:rPr sz="1800" b="1" dirty="0" err="1">
+                <a:solidFill>
+                  <a:srgbClr val="000000"/>
+                </a:solidFill>
+                <a:latin typeface="Times New Roman"/>
+                <a:ea typeface="Times New Roman"/>
+                <a:cs typeface="Times New Roman"/>
+              </a:rPr>
+              <a:t>кадрах</a:t>
+            </a:r>
+            <a:r>
+              <a:rPr dirty="0"/>
+              <a:t>. </a:t>
+            </a:r>
+            <a:r>
+              <a:rPr dirty="0" err="1"/>
+              <a:t>Метод</a:t>
+            </a:r>
+            <a:r>
+              <a:rPr dirty="0"/>
+              <a:t> </a:t>
+            </a:r>
+            <a:r>
+              <a:rPr dirty="0" err="1"/>
+              <a:t>предусматривает</a:t>
+            </a:r>
+            <a:r>
+              <a:rPr dirty="0"/>
+              <a:t> </a:t>
+            </a:r>
+            <a:r>
+              <a:rPr dirty="0" err="1"/>
+              <a:t>предупреждение</a:t>
+            </a:r>
+            <a:r>
+              <a:rPr dirty="0"/>
+              <a:t> </a:t>
+            </a:r>
+            <a:r>
+              <a:rPr dirty="0" err="1"/>
+              <a:t>оператора</a:t>
+            </a:r>
+            <a:r>
+              <a:rPr dirty="0"/>
+              <a:t> </a:t>
+            </a:r>
+            <a:r>
+              <a:rPr dirty="0" err="1"/>
+              <a:t>или</a:t>
+            </a:r>
+            <a:r>
+              <a:rPr dirty="0"/>
+              <a:t> </a:t>
+            </a:r>
+            <a:r>
+              <a:rPr dirty="0" err="1"/>
+              <a:t>остановку</a:t>
+            </a:r>
+            <a:r>
+              <a:rPr dirty="0"/>
+              <a:t> </a:t>
+            </a:r>
+            <a:r>
+              <a:rPr dirty="0" err="1"/>
+              <a:t>печати</a:t>
+            </a:r>
+            <a:r>
+              <a:rPr dirty="0"/>
+              <a:t>.</a:t>
+            </a:r>
+          </a:p>
+        </p:txBody>
+      </p:sp>
+      <p:pic>
+        <p:nvPicPr>
+          <p:cNvPr id="31" name="Рисунок 30">
+            <a:extLst>
+              <a:ext uri="{FF2B5EF4-FFF2-40B4-BE49-F238E27FC236}">
+                <a16:creationId xmlns:a16="http://schemas.microsoft.com/office/drawing/2014/main" id="{C75C9600-E24B-4427-841C-17EE22ED7C5B}"/>
+              </a:ext>
+            </a:extLst>
+          </p:cNvPr>
+          <p:cNvPicPr>
+            <a:picLocks noChangeAspect="1"/>
+          </p:cNvPicPr>
+          <p:nvPr/>
+        </p:nvPicPr>
+        <p:blipFill>
+          <a:blip r:embed="rId3"/>
+          <a:srcRect l="32072" r="32072"/>
+          <a:stretch>
+            <a:fillRect/>
+          </a:stretch>
+        </p:blipFill>
+        <p:spPr>
+          <a:xfrm>
+            <a:off x="6212878" y="709255"/>
+            <a:ext cx="2446242" cy="5175504"/>
           </a:xfrm>
           <a:prstGeom prst="rect">
             <a:avLst/>
           </a:prstGeom>
         </p:spPr>
-        <p:txBody>
-          <a:bodyPr vert="horz" lIns="91440" tIns="45720" rIns="91440" bIns="45720" rtlCol="0" anchor="ctr"/>
+      </p:pic>
+      <p:sp>
+        <p:nvSpPr>
+          <p:cNvPr id="32" name="Литературный источник">
+            <a:extLst>
+              <a:ext uri="{FF2B5EF4-FFF2-40B4-BE49-F238E27FC236}">
+                <a16:creationId xmlns:a16="http://schemas.microsoft.com/office/drawing/2014/main" id="{BCB7E54A-107D-4D70-A4F5-88440DD0E3D7}"/>
+              </a:ext>
+            </a:extLst>
+          </p:cNvPr>
+          <p:cNvSpPr>
+            <a:spLocks noGrp="1"/>
+          </p:cNvSpPr>
+          <p:nvPr/>
+        </p:nvSpPr>
+        <p:spPr>
+          <a:xfrm>
+            <a:off x="277940" y="5906643"/>
+            <a:ext cx="5718620" cy="584740"/>
+          </a:xfrm>
+          <a:prstGeom prst="rect">
+            <a:avLst/>
+          </a:prstGeom>
+          <a:noFill/>
+          <a:ln w="0">
+            <a:noFill/>
+          </a:ln>
+        </p:spPr>
+        <p:txBody>
+          <a:bodyPr wrap="square" lIns="91440" tIns="45720" rIns="91440" bIns="45720">
+            <a:noAutofit/>
+          </a:bodyPr>
           <a:lstStyle>
-            <a:defPPr>
-              <a:defRPr lang="en-US"/>
+            <a:defPPr algn="l">
+              <a:defRPr sz="1600" b="0">
+                <a:solidFill>
+                  <a:srgbClr val="000000"/>
+                </a:solidFill>
+                <a:latin typeface="Times New Roman"/>
+                <a:ea typeface="Times New Roman"/>
+                <a:cs typeface="Times New Roman"/>
+              </a:defRPr>
             </a:defPPr>
-            <a:lvl1pPr marL="0" algn="r" defTabSz="457200" rtl="0" eaLnBrk="1" latinLnBrk="0" hangingPunct="1">
-              <a:defRPr sz="1200" kern="1200">
-                <a:solidFill>
-                  <a:schemeClr val="tx1">
-                    <a:tint val="75000"/>
-                  </a:schemeClr>
-                </a:solidFill>
-                <a:latin typeface="+mn-lt"/>
-                <a:ea typeface="+mn-ea"/>
-                <a:cs typeface="+mn-cs"/>
+          </a:lstStyle>
+          <a:p>
+            <a:pPr algn="l">
+              <a:defRPr sz="1600" b="0">
+                <a:solidFill>
+                  <a:srgbClr val="000000"/>
+                </a:solidFill>
+                <a:latin typeface="Times New Roman"/>
+                <a:ea typeface="Times New Roman"/>
+                <a:cs typeface="Times New Roman"/>
               </a:defRPr>
-            </a:lvl1pPr>
-            <a:lvl2pPr marL="457200" algn="l" defTabSz="457200" rtl="0" eaLnBrk="1" latinLnBrk="0" hangingPunct="1">
-              <a:defRPr sz="1800" kern="1200">
-                <a:solidFill>
-                  <a:schemeClr val="tx1"/>
-                </a:solidFill>
-                <a:latin typeface="+mn-lt"/>
-                <a:ea typeface="+mn-ea"/>
-                <a:cs typeface="+mn-cs"/>
+            </a:pPr>
+            <a:r>
+              <a:rPr sz="1600" b="0">
+                <a:solidFill>
+                  <a:srgbClr val="000000"/>
+                </a:solidFill>
+                <a:latin typeface="Times New Roman"/>
+                <a:ea typeface="Times New Roman"/>
+                <a:cs typeface="Times New Roman"/>
+              </a:rPr>
+              <a:t>[1] Kim H., Lee H., Kim J.-S., Ahn S.-H., 2020.</a:t>
+            </a:r>
+          </a:p>
+          <a:p>
+            <a:pPr algn="l">
+              <a:defRPr sz="1600" b="0">
+                <a:solidFill>
+                  <a:srgbClr val="000000"/>
+                </a:solidFill>
+                <a:latin typeface="Times New Roman"/>
+                <a:ea typeface="Times New Roman"/>
+                <a:cs typeface="Times New Roman"/>
               </a:defRPr>
-            </a:lvl2pPr>
-            <a:lvl3pPr marL="914400" algn="l" defTabSz="457200" rtl="0" eaLnBrk="1" latinLnBrk="0" hangingPunct="1">
-              <a:defRPr sz="1800" kern="1200">
-                <a:solidFill>
-                  <a:schemeClr val="tx1"/>
-                </a:solidFill>
-                <a:latin typeface="+mn-lt"/>
-                <a:ea typeface="+mn-ea"/>
-                <a:cs typeface="+mn-cs"/>
-              </a:defRPr>
-            </a:lvl3pPr>
-            <a:lvl4pPr marL="1371600" algn="l" defTabSz="457200" rtl="0" eaLnBrk="1" latinLnBrk="0" hangingPunct="1">
-              <a:defRPr sz="1800" kern="1200">
-                <a:solidFill>
-                  <a:schemeClr val="tx1"/>
-                </a:solidFill>
-                <a:latin typeface="+mn-lt"/>
-                <a:ea typeface="+mn-ea"/>
-                <a:cs typeface="+mn-cs"/>
-              </a:defRPr>
-            </a:lvl4pPr>
-            <a:lvl5pPr marL="1828800" algn="l" defTabSz="457200" rtl="0" eaLnBrk="1" latinLnBrk="0" hangingPunct="1">
-              <a:defRPr sz="1800" kern="1200">
-                <a:solidFill>
-                  <a:schemeClr val="tx1"/>
-                </a:solidFill>
-                <a:latin typeface="+mn-lt"/>
-                <a:ea typeface="+mn-ea"/>
-                <a:cs typeface="+mn-cs"/>
-              </a:defRPr>
-            </a:lvl5pPr>
-            <a:lvl6pPr marL="2286000" algn="l" defTabSz="457200" rtl="0" eaLnBrk="1" latinLnBrk="0" hangingPunct="1">
-              <a:defRPr sz="1800" kern="1200">
-                <a:solidFill>
-                  <a:schemeClr val="tx1"/>
-                </a:solidFill>
-                <a:latin typeface="+mn-lt"/>
-                <a:ea typeface="+mn-ea"/>
-                <a:cs typeface="+mn-cs"/>
-              </a:defRPr>
-            </a:lvl6pPr>
-            <a:lvl7pPr marL="2743200" algn="l" defTabSz="457200" rtl="0" eaLnBrk="1" latinLnBrk="0" hangingPunct="1">
-              <a:defRPr sz="1800" kern="1200">
-                <a:solidFill>
-                  <a:schemeClr val="tx1"/>
-                </a:solidFill>
-                <a:latin typeface="+mn-lt"/>
-                <a:ea typeface="+mn-ea"/>
-                <a:cs typeface="+mn-cs"/>
-              </a:defRPr>
-            </a:lvl7pPr>
-            <a:lvl8pPr marL="3200400" algn="l" defTabSz="457200" rtl="0" eaLnBrk="1" latinLnBrk="0" hangingPunct="1">
-              <a:defRPr sz="1800" kern="1200">
-                <a:solidFill>
-                  <a:schemeClr val="tx1"/>
-                </a:solidFill>
-                <a:latin typeface="+mn-lt"/>
-                <a:ea typeface="+mn-ea"/>
-                <a:cs typeface="+mn-cs"/>
-              </a:defRPr>
-            </a:lvl8pPr>
-            <a:lvl9pPr marL="3657600" algn="l" defTabSz="457200" rtl="0" eaLnBrk="1" latinLnBrk="0" hangingPunct="1">
-              <a:defRPr sz="1800" kern="1200">
-                <a:solidFill>
-                  <a:schemeClr val="tx1"/>
-                </a:solidFill>
-                <a:latin typeface="+mn-lt"/>
-                <a:ea typeface="+mn-ea"/>
-                <a:cs typeface="+mn-cs"/>
-              </a:defRPr>
-            </a:lvl9pPr>
-          </a:lstStyle>
-          <a:p>
-            <a:fld id="{D6ED8A53-8D2F-4011-BE06-EDB0774336BA}" type="slidenum">
-              <a:rPr lang="ru-RU" sz="3200" dirty="0" smtClean="0">
-                <a:latin typeface="Times New Roman"/>
-                <a:cs typeface="Times New Roman"/>
-              </a:rPr>
-              <a:pPr/>
-              <a:t>2</a:t>
-            </a:fld>
-            <a:endParaRPr lang="ru-RU" sz="3200">
-              <a:latin typeface="Times New Roman"/>
-              <a:ea typeface="Calibri"/>
-              <a:cs typeface="Times New Roman"/>
-            </a:endParaRPr>
+            </a:pPr>
+            <a:r>
+              <a:rPr sz="1600" b="0">
+                <a:solidFill>
+                  <a:srgbClr val="000000"/>
+                </a:solidFill>
+                <a:latin typeface="Times New Roman"/>
+                <a:ea typeface="Times New Roman"/>
+                <a:cs typeface="Times New Roman"/>
+              </a:rPr>
+              <a:t>DOI: 10.1007/s00170-020-06201-0.</a:t>
+            </a:r>
           </a:p>
         </p:txBody>
       </p:sp>
     </p:spTree>
+    <p:extLst>
+      <p:ext uri="{BB962C8B-B14F-4D97-AF65-F5344CB8AC3E}">
+        <p14:creationId xmlns:p14="http://schemas.microsoft.com/office/powerpoint/2010/main" val="2011050586"/>
+      </p:ext>
+    </p:extLst>
   </p:cSld>
   <p:clrMapOvr>
     <a:masterClrMapping/>

--- a/presentation/NIR2_slide01_v2.pptx
+++ b/presentation/NIR2_slide01_v2.pptx
@@ -5,12 +5,15 @@
     <p:sldMasterId id="2147483648" r:id="rId1"/>
   </p:sldMasterIdLst>
   <p:notesMasterIdLst>
-    <p:notesMasterId r:id="rId5"/>
+    <p:notesMasterId r:id="rId8"/>
   </p:notesMasterIdLst>
   <p:sldIdLst>
     <p:sldId id="257" r:id="rId2"/>
     <p:sldId id="258" r:id="rId3"/>
     <p:sldId id="256" r:id="rId4"/>
+    <p:sldId id="268" r:id="rId5"/>
+    <p:sldId id="270" r:id="rId6"/>
+    <p:sldId id="271" r:id="rId7"/>
   </p:sldIdLst>
   <p:sldSz cx="9144000" cy="6858000" type="screen4x3"/>
   <p:notesSz cx="6858000" cy="9144000"/>
@@ -423,19 +426,7 @@
           <a:bodyPr/>
           <a:lstStyle/>
           <a:p>
-            <a:r>
-              <a:t>Основание текста: Intro.tex — ручной контроль нескольких принтеров; Chapter1.tex — отлипание или смещение модели, образование хаотичных нитей, потери материала и машинного времени; Chapter2.tex — камерный метод обнаружения и результаты статьи. Рисунок взят из fig/spag.jpeg, используемого в главе 1.</a:t>
-            </a:r>
-          </a:p>
-          <a:p>
-            <a:r>
-              <a:t>[1] Hyungjung Kim, Hyunsu Lee, Ji-Soo Kim, Sung-Hoon Ahn. Image-based failure detection for material extrusion process using a convolutional neural network. The International Journal of Advanced Manufacturing Technology, 111, 1291–1302 (2020). https://doi.org/10.1007/s00170-020-06201-0</a:t>
-            </a:r>
-          </a:p>
-          <a:p>
-            <a:r>
-              <a:t>В разделе 5.2 статьи: 100 тестовых изображений, 50 с дефектом и 50 без дефекта; общая точность 96 %, доли правильного распознавания классов 94 % и 98 %. Предупреждение или остановка процесса описаны авторами как предусмотренные действия метода. Эти показатели относятся к литературному источнику, а не к собственной модели НИР. Сведения проверены по официальной странице издателя: https://link.springer.com/article/10.1007/s00170-020-06201-0</a:t>
-            </a:r>
+            <a:endParaRPr lang="ru-RU" dirty="0"/>
           </a:p>
         </p:txBody>
       </p:sp>
@@ -462,6 +453,330 @@
     <p:extLst>
       <p:ext uri="{BB962C8B-B14F-4D97-AF65-F5344CB8AC3E}">
         <p14:creationId xmlns:p14="http://schemas.microsoft.com/office/powerpoint/2010/main" val="282807122"/>
+      </p:ext>
+    </p:extLst>
+  </p:cSld>
+  <p:clrMapOvr>
+    <a:masterClrMapping/>
+  </p:clrMapOvr>
+</p:notes>
+</file>
+
+<file path=ppt/notesSlides/notesSlide3.xml><?xml version="1.0" encoding="utf-8"?>
+<p:notes xmlns:a="http://schemas.openxmlformats.org/drawingml/2006/main" xmlns:r="http://schemas.openxmlformats.org/officeDocument/2006/relationships" xmlns:p="http://schemas.openxmlformats.org/presentationml/2006/main">
+  <p:cSld>
+    <p:spTree>
+      <p:nvGrpSpPr>
+        <p:cNvPr id="1" name="">
+          <a:extLst>
+            <a:ext uri="{FF2B5EF4-FFF2-40B4-BE49-F238E27FC236}">
+              <a16:creationId xmlns:a16="http://schemas.microsoft.com/office/drawing/2014/main" id="{F11BACC8-2C4D-334B-9042-96E69D47FBC5}"/>
+            </a:ext>
+          </a:extLst>
+        </p:cNvPr>
+        <p:cNvGrpSpPr/>
+        <p:nvPr/>
+      </p:nvGrpSpPr>
+      <p:grpSpPr>
+        <a:xfrm>
+          <a:off x="0" y="0"/>
+          <a:ext cx="0" cy="0"/>
+          <a:chOff x="0" y="0"/>
+          <a:chExt cx="0" cy="0"/>
+        </a:xfrm>
+      </p:grpSpPr>
+      <p:sp>
+        <p:nvSpPr>
+          <p:cNvPr id="2" name="Образ слайда 1">
+            <a:extLst>
+              <a:ext uri="{FF2B5EF4-FFF2-40B4-BE49-F238E27FC236}">
+                <a16:creationId xmlns:a16="http://schemas.microsoft.com/office/drawing/2014/main" id="{22BE1D05-A3F2-9A1C-96D7-51E72924A0B9}"/>
+              </a:ext>
+            </a:extLst>
+          </p:cNvPr>
+          <p:cNvSpPr>
+            <a:spLocks noGrp="1" noRot="1" noChangeAspect="1"/>
+          </p:cNvSpPr>
+          <p:nvPr>
+            <p:ph type="sldImg"/>
+          </p:nvPr>
+        </p:nvSpPr>
+        <p:spPr/>
+      </p:sp>
+      <p:sp>
+        <p:nvSpPr>
+          <p:cNvPr id="3" name="Заметки 2">
+            <a:extLst>
+              <a:ext uri="{FF2B5EF4-FFF2-40B4-BE49-F238E27FC236}">
+                <a16:creationId xmlns:a16="http://schemas.microsoft.com/office/drawing/2014/main" id="{01E14AF7-2AA3-67C6-62C2-2ADB9EC803C7}"/>
+              </a:ext>
+            </a:extLst>
+          </p:cNvPr>
+          <p:cNvSpPr>
+            <a:spLocks noGrp="1"/>
+          </p:cNvSpPr>
+          <p:nvPr>
+            <p:ph type="body" idx="1"/>
+          </p:nvPr>
+        </p:nvSpPr>
+        <p:spPr/>
+        <p:txBody>
+          <a:bodyPr/>
+          <a:lstStyle/>
+          <a:p>
+            <a:endParaRPr lang="ru-RU"/>
+          </a:p>
+        </p:txBody>
+      </p:sp>
+      <p:sp>
+        <p:nvSpPr>
+          <p:cNvPr id="4" name="Номер слайда 3">
+            <a:extLst>
+              <a:ext uri="{FF2B5EF4-FFF2-40B4-BE49-F238E27FC236}">
+                <a16:creationId xmlns:a16="http://schemas.microsoft.com/office/drawing/2014/main" id="{0D686308-0247-4379-103C-289F8CA0A19D}"/>
+              </a:ext>
+            </a:extLst>
+          </p:cNvPr>
+          <p:cNvSpPr>
+            <a:spLocks noGrp="1"/>
+          </p:cNvSpPr>
+          <p:nvPr>
+            <p:ph type="sldNum" sz="quarter" idx="5"/>
+          </p:nvPr>
+        </p:nvSpPr>
+        <p:spPr/>
+        <p:txBody>
+          <a:bodyPr/>
+          <a:lstStyle/>
+          <a:p>
+            <a:fld id="{8C7347D7-6652-406A-AA51-ABE302EA4CF8}" type="slidenum">
+              <a:rPr lang="ru-RU" smtClean="0"/>
+              <a:t>4</a:t>
+            </a:fld>
+            <a:endParaRPr lang="ru-RU"/>
+          </a:p>
+        </p:txBody>
+      </p:sp>
+    </p:spTree>
+    <p:extLst>
+      <p:ext uri="{BB962C8B-B14F-4D97-AF65-F5344CB8AC3E}">
+        <p14:creationId xmlns:p14="http://schemas.microsoft.com/office/powerpoint/2010/main" val="2184438951"/>
+      </p:ext>
+    </p:extLst>
+  </p:cSld>
+  <p:clrMapOvr>
+    <a:masterClrMapping/>
+  </p:clrMapOvr>
+</p:notes>
+</file>
+
+<file path=ppt/notesSlides/notesSlide4.xml><?xml version="1.0" encoding="utf-8"?>
+<p:notes xmlns:a="http://schemas.openxmlformats.org/drawingml/2006/main" xmlns:r="http://schemas.openxmlformats.org/officeDocument/2006/relationships" xmlns:p="http://schemas.openxmlformats.org/presentationml/2006/main">
+  <p:cSld>
+    <p:spTree>
+      <p:nvGrpSpPr>
+        <p:cNvPr id="1" name="">
+          <a:extLst>
+            <a:ext uri="{FF2B5EF4-FFF2-40B4-BE49-F238E27FC236}">
+              <a16:creationId xmlns:a16="http://schemas.microsoft.com/office/drawing/2014/main" id="{B17726DC-CE10-F03F-2142-18D5DEE97B8B}"/>
+            </a:ext>
+          </a:extLst>
+        </p:cNvPr>
+        <p:cNvGrpSpPr/>
+        <p:nvPr/>
+      </p:nvGrpSpPr>
+      <p:grpSpPr>
+        <a:xfrm>
+          <a:off x="0" y="0"/>
+          <a:ext cx="0" cy="0"/>
+          <a:chOff x="0" y="0"/>
+          <a:chExt cx="0" cy="0"/>
+        </a:xfrm>
+      </p:grpSpPr>
+      <p:sp>
+        <p:nvSpPr>
+          <p:cNvPr id="2" name="Образ слайда 1">
+            <a:extLst>
+              <a:ext uri="{FF2B5EF4-FFF2-40B4-BE49-F238E27FC236}">
+                <a16:creationId xmlns:a16="http://schemas.microsoft.com/office/drawing/2014/main" id="{CBD27571-4120-1AD9-24AF-1F6C37D039DE}"/>
+              </a:ext>
+            </a:extLst>
+          </p:cNvPr>
+          <p:cNvSpPr>
+            <a:spLocks noGrp="1" noRot="1" noChangeAspect="1"/>
+          </p:cNvSpPr>
+          <p:nvPr>
+            <p:ph type="sldImg"/>
+          </p:nvPr>
+        </p:nvSpPr>
+        <p:spPr/>
+      </p:sp>
+      <p:sp>
+        <p:nvSpPr>
+          <p:cNvPr id="3" name="Заметки 2">
+            <a:extLst>
+              <a:ext uri="{FF2B5EF4-FFF2-40B4-BE49-F238E27FC236}">
+                <a16:creationId xmlns:a16="http://schemas.microsoft.com/office/drawing/2014/main" id="{C020C72C-20DC-053F-06DA-226D6D644D97}"/>
+              </a:ext>
+            </a:extLst>
+          </p:cNvPr>
+          <p:cNvSpPr>
+            <a:spLocks noGrp="1"/>
+          </p:cNvSpPr>
+          <p:nvPr>
+            <p:ph type="body" idx="1"/>
+          </p:nvPr>
+        </p:nvSpPr>
+        <p:spPr/>
+        <p:txBody>
+          <a:bodyPr/>
+          <a:lstStyle/>
+          <a:p>
+            <a:endParaRPr lang="ru-RU" dirty="0"/>
+          </a:p>
+        </p:txBody>
+      </p:sp>
+      <p:sp>
+        <p:nvSpPr>
+          <p:cNvPr id="4" name="Номер слайда 3">
+            <a:extLst>
+              <a:ext uri="{FF2B5EF4-FFF2-40B4-BE49-F238E27FC236}">
+                <a16:creationId xmlns:a16="http://schemas.microsoft.com/office/drawing/2014/main" id="{55F1735C-DD43-29D0-C068-51A4DFD82638}"/>
+              </a:ext>
+            </a:extLst>
+          </p:cNvPr>
+          <p:cNvSpPr>
+            <a:spLocks noGrp="1"/>
+          </p:cNvSpPr>
+          <p:nvPr>
+            <p:ph type="sldNum" sz="quarter" idx="5"/>
+          </p:nvPr>
+        </p:nvSpPr>
+        <p:spPr/>
+        <p:txBody>
+          <a:bodyPr/>
+          <a:lstStyle/>
+          <a:p>
+            <a:fld id="{8C7347D7-6652-406A-AA51-ABE302EA4CF8}" type="slidenum">
+              <a:rPr lang="ru-RU" smtClean="0"/>
+              <a:t>5</a:t>
+            </a:fld>
+            <a:endParaRPr lang="ru-RU"/>
+          </a:p>
+        </p:txBody>
+      </p:sp>
+    </p:spTree>
+    <p:extLst>
+      <p:ext uri="{BB962C8B-B14F-4D97-AF65-F5344CB8AC3E}">
+        <p14:creationId xmlns:p14="http://schemas.microsoft.com/office/powerpoint/2010/main" val="3979846337"/>
+      </p:ext>
+    </p:extLst>
+  </p:cSld>
+  <p:clrMapOvr>
+    <a:masterClrMapping/>
+  </p:clrMapOvr>
+</p:notes>
+</file>
+
+<file path=ppt/notesSlides/notesSlide5.xml><?xml version="1.0" encoding="utf-8"?>
+<p:notes xmlns:a="http://schemas.openxmlformats.org/drawingml/2006/main" xmlns:r="http://schemas.openxmlformats.org/officeDocument/2006/relationships" xmlns:p="http://schemas.openxmlformats.org/presentationml/2006/main">
+  <p:cSld>
+    <p:spTree>
+      <p:nvGrpSpPr>
+        <p:cNvPr id="1" name="">
+          <a:extLst>
+            <a:ext uri="{FF2B5EF4-FFF2-40B4-BE49-F238E27FC236}">
+              <a16:creationId xmlns:a16="http://schemas.microsoft.com/office/drawing/2014/main" id="{B17726DC-CE10-F03F-2142-18D5DEE97B8B}"/>
+            </a:ext>
+          </a:extLst>
+        </p:cNvPr>
+        <p:cNvGrpSpPr/>
+        <p:nvPr/>
+      </p:nvGrpSpPr>
+      <p:grpSpPr>
+        <a:xfrm>
+          <a:off x="0" y="0"/>
+          <a:ext cx="0" cy="0"/>
+          <a:chOff x="0" y="0"/>
+          <a:chExt cx="0" cy="0"/>
+        </a:xfrm>
+      </p:grpSpPr>
+      <p:sp>
+        <p:nvSpPr>
+          <p:cNvPr id="2" name="Образ слайда 1">
+            <a:extLst>
+              <a:ext uri="{FF2B5EF4-FFF2-40B4-BE49-F238E27FC236}">
+                <a16:creationId xmlns:a16="http://schemas.microsoft.com/office/drawing/2014/main" id="{CBD27571-4120-1AD9-24AF-1F6C37D039DE}"/>
+              </a:ext>
+            </a:extLst>
+          </p:cNvPr>
+          <p:cNvSpPr>
+            <a:spLocks noGrp="1" noRot="1" noChangeAspect="1"/>
+          </p:cNvSpPr>
+          <p:nvPr>
+            <p:ph type="sldImg"/>
+          </p:nvPr>
+        </p:nvSpPr>
+        <p:spPr/>
+      </p:sp>
+      <p:sp>
+        <p:nvSpPr>
+          <p:cNvPr id="3" name="Заметки 2">
+            <a:extLst>
+              <a:ext uri="{FF2B5EF4-FFF2-40B4-BE49-F238E27FC236}">
+                <a16:creationId xmlns:a16="http://schemas.microsoft.com/office/drawing/2014/main" id="{C020C72C-20DC-053F-06DA-226D6D644D97}"/>
+              </a:ext>
+            </a:extLst>
+          </p:cNvPr>
+          <p:cNvSpPr>
+            <a:spLocks noGrp="1"/>
+          </p:cNvSpPr>
+          <p:nvPr>
+            <p:ph type="body" idx="1"/>
+          </p:nvPr>
+        </p:nvSpPr>
+        <p:spPr/>
+        <p:txBody>
+          <a:bodyPr/>
+          <a:lstStyle/>
+          <a:p>
+            <a:endParaRPr lang="ru-RU" dirty="0"/>
+          </a:p>
+        </p:txBody>
+      </p:sp>
+      <p:sp>
+        <p:nvSpPr>
+          <p:cNvPr id="4" name="Номер слайда 3">
+            <a:extLst>
+              <a:ext uri="{FF2B5EF4-FFF2-40B4-BE49-F238E27FC236}">
+                <a16:creationId xmlns:a16="http://schemas.microsoft.com/office/drawing/2014/main" id="{55F1735C-DD43-29D0-C068-51A4DFD82638}"/>
+              </a:ext>
+            </a:extLst>
+          </p:cNvPr>
+          <p:cNvSpPr>
+            <a:spLocks noGrp="1"/>
+          </p:cNvSpPr>
+          <p:nvPr>
+            <p:ph type="sldNum" sz="quarter" idx="5"/>
+          </p:nvPr>
+        </p:nvSpPr>
+        <p:spPr/>
+        <p:txBody>
+          <a:bodyPr/>
+          <a:lstStyle/>
+          <a:p>
+            <a:fld id="{8C7347D7-6652-406A-AA51-ABE302EA4CF8}" type="slidenum">
+              <a:rPr lang="ru-RU" smtClean="0"/>
+              <a:t>6</a:t>
+            </a:fld>
+            <a:endParaRPr lang="ru-RU"/>
+          </a:p>
+        </p:txBody>
+      </p:sp>
+    </p:spTree>
+    <p:extLst>
+      <p:ext uri="{BB962C8B-B14F-4D97-AF65-F5344CB8AC3E}">
+        <p14:creationId xmlns:p14="http://schemas.microsoft.com/office/powerpoint/2010/main" val="3040273396"/>
       </p:ext>
     </p:extLst>
   </p:cSld>
@@ -3724,16 +4039,46 @@
               </a:defRPr>
             </a:pPr>
             <a:r>
-              <a:rPr sz="3600" b="1">
+              <a:rPr sz="3600" b="1" dirty="0" err="1">
                 <a:solidFill>
                   <a:srgbClr val="000000"/>
                 </a:solidFill>
-                <a:latin typeface="Times New Roman"/>
-                <a:ea typeface="Times New Roman"/>
-                <a:cs typeface="Times New Roman"/>
-              </a:rPr>
-              <a:t>Автоматическое выявление</a:t>
-            </a:r>
+                <a:latin typeface="Times New Roman" panose="02020603050405020304" pitchFamily="18" charset="0"/>
+                <a:ea typeface="Times New Roman"/>
+                <a:cs typeface="Times New Roman" panose="02020603050405020304" pitchFamily="18" charset="0"/>
+              </a:rPr>
+              <a:t>Автоматическое</a:t>
+            </a:r>
+            <a:r>
+              <a:rPr sz="3600" b="1" dirty="0">
+                <a:solidFill>
+                  <a:srgbClr val="000000"/>
+                </a:solidFill>
+                <a:latin typeface="Times New Roman" panose="02020603050405020304" pitchFamily="18" charset="0"/>
+                <a:ea typeface="Times New Roman"/>
+                <a:cs typeface="Times New Roman" panose="02020603050405020304" pitchFamily="18" charset="0"/>
+              </a:rPr>
+              <a:t> </a:t>
+            </a:r>
+            <a:r>
+              <a:rPr sz="3600" b="1" dirty="0" err="1">
+                <a:solidFill>
+                  <a:srgbClr val="000000"/>
+                </a:solidFill>
+                <a:latin typeface="Times New Roman" panose="02020603050405020304" pitchFamily="18" charset="0"/>
+                <a:ea typeface="Times New Roman"/>
+                <a:cs typeface="Times New Roman" panose="02020603050405020304" pitchFamily="18" charset="0"/>
+              </a:rPr>
+              <a:t>выявление</a:t>
+            </a:r>
+            <a:endParaRPr sz="3600" b="1" dirty="0">
+              <a:solidFill>
+                <a:srgbClr val="000000"/>
+              </a:solidFill>
+              <a:latin typeface="Times New Roman" panose="02020603050405020304" pitchFamily="18" charset="0"/>
+              <a:ea typeface="Times New Roman"/>
+              <a:cs typeface="Times New Roman" panose="02020603050405020304" pitchFamily="18" charset="0"/>
+            </a:endParaRPr>
           </a:p>
           <a:p>
             <a:pPr algn="ctr">
@@ -3748,15 +4093,48 @@
               </a:defRPr>
             </a:pPr>
             <a:r>
-              <a:rPr sz="3600" b="1">
+              <a:rPr sz="3600" b="1" dirty="0" err="1">
                 <a:solidFill>
                   <a:srgbClr val="000000"/>
                 </a:solidFill>
-                <a:latin typeface="Times New Roman"/>
-                <a:ea typeface="Times New Roman"/>
-                <a:cs typeface="Times New Roman"/>
-              </a:rPr>
-              <a:t>дефектов в процессе 3D-печати</a:t>
+                <a:latin typeface="Times New Roman" panose="02020603050405020304" pitchFamily="18" charset="0"/>
+                <a:ea typeface="Times New Roman"/>
+                <a:cs typeface="Times New Roman" panose="02020603050405020304" pitchFamily="18" charset="0"/>
+              </a:rPr>
+              <a:t>дефектов</a:t>
+            </a:r>
+            <a:r>
+              <a:rPr sz="3600" b="1" dirty="0">
+                <a:solidFill>
+                  <a:srgbClr val="000000"/>
+                </a:solidFill>
+                <a:latin typeface="Times New Roman" panose="02020603050405020304" pitchFamily="18" charset="0"/>
+                <a:ea typeface="Times New Roman"/>
+                <a:cs typeface="Times New Roman" panose="02020603050405020304" pitchFamily="18" charset="0"/>
+              </a:rPr>
+              <a:t> в </a:t>
+            </a:r>
+            <a:r>
+              <a:rPr sz="3600" b="1" dirty="0" err="1">
+                <a:solidFill>
+                  <a:srgbClr val="000000"/>
+                </a:solidFill>
+                <a:latin typeface="Times New Roman" panose="02020603050405020304" pitchFamily="18" charset="0"/>
+                <a:ea typeface="Times New Roman"/>
+                <a:cs typeface="Times New Roman" panose="02020603050405020304" pitchFamily="18" charset="0"/>
+              </a:rPr>
+              <a:t>процессе</a:t>
+            </a:r>
+            <a:r>
+              <a:rPr sz="3600" b="1" dirty="0">
+                <a:solidFill>
+                  <a:srgbClr val="000000"/>
+                </a:solidFill>
+                <a:latin typeface="Times New Roman" panose="02020603050405020304" pitchFamily="18" charset="0"/>
+                <a:ea typeface="Times New Roman"/>
+                <a:cs typeface="Times New Roman" panose="02020603050405020304" pitchFamily="18" charset="0"/>
+              </a:rPr>
+              <a:t> 3D-печати</a:t>
             </a:r>
           </a:p>
         </p:txBody>
@@ -3803,36 +4181,36 @@
             <a:pPr algn="just"/>
             <a:r>
               <a:rPr lang="ru-RU" sz="1800" dirty="0">
-                <a:latin typeface="Times New Roman"/>
-                <a:cs typeface="Times New Roman"/>
+                <a:latin typeface="Times New Roman" panose="02020603050405020304" pitchFamily="18" charset="0"/>
+                <a:cs typeface="Times New Roman" panose="02020603050405020304" pitchFamily="18" charset="0"/>
               </a:rPr>
               <a:t>Студент группы ИВТм-2</a:t>
             </a:r>
             <a:r>
               <a:rPr lang="en-US" sz="1800" dirty="0">
-                <a:latin typeface="Times New Roman"/>
-                <a:cs typeface="Times New Roman"/>
+                <a:latin typeface="Times New Roman" panose="02020603050405020304" pitchFamily="18" charset="0"/>
+                <a:cs typeface="Times New Roman" panose="02020603050405020304" pitchFamily="18" charset="0"/>
               </a:rPr>
               <a:t>5</a:t>
             </a:r>
             <a:r>
               <a:rPr lang="ru-RU" sz="1800" dirty="0">
-                <a:latin typeface="Times New Roman"/>
-                <a:cs typeface="Times New Roman"/>
+                <a:latin typeface="Times New Roman" panose="02020603050405020304" pitchFamily="18" charset="0"/>
+                <a:cs typeface="Times New Roman" panose="02020603050405020304" pitchFamily="18" charset="0"/>
               </a:rPr>
               <a:t>1:                                      </a:t>
             </a:r>
             <a:r>
               <a:rPr lang="ru-RU" sz="1800" dirty="0" err="1">
-                <a:latin typeface="Times New Roman"/>
-                <a:cs typeface="Times New Roman"/>
+                <a:latin typeface="Times New Roman" panose="02020603050405020304" pitchFamily="18" charset="0"/>
+                <a:cs typeface="Times New Roman" panose="02020603050405020304" pitchFamily="18" charset="0"/>
               </a:rPr>
               <a:t>Ешенко</a:t>
             </a:r>
             <a:r>
               <a:rPr lang="ru-RU" sz="1800" dirty="0">
-                <a:latin typeface="Times New Roman"/>
-                <a:cs typeface="Times New Roman"/>
+                <a:latin typeface="Times New Roman" panose="02020603050405020304" pitchFamily="18" charset="0"/>
+                <a:cs typeface="Times New Roman" panose="02020603050405020304" pitchFamily="18" charset="0"/>
               </a:rPr>
               <a:t> Даниил Ярославович</a:t>
             </a:r>
@@ -3841,52 +4219,41 @@
             <a:pPr algn="just"/>
             <a:r>
               <a:rPr lang="ru-RU" sz="1800" dirty="0">
-                <a:latin typeface="Times New Roman"/>
-                <a:cs typeface="Calibri"/>
-              </a:rPr>
-              <a:t>Руководитель практики:     </a:t>
+                <a:latin typeface="Times New Roman" panose="02020603050405020304" pitchFamily="18" charset="0"/>
+                <a:cs typeface="Times New Roman" panose="02020603050405020304" pitchFamily="18" charset="0"/>
+              </a:rPr>
+              <a:t>Руководитель практики:     к. ф.-м. н.,</a:t>
             </a:r>
             <a:r>
               <a:rPr lang="ru-RU" sz="1800" dirty="0">
-                <a:latin typeface="Times New Roman"/>
-              </a:rPr>
-              <a:t>к. ф.-м. н.,</a:t>
+                <a:latin typeface="Times New Roman" panose="02020603050405020304" pitchFamily="18" charset="0"/>
+                <a:ea typeface="Calibri"/>
+                <a:cs typeface="Times New Roman" panose="02020603050405020304" pitchFamily="18" charset="0"/>
+              </a:rPr>
+              <a:t> </a:t>
             </a:r>
             <a:r>
               <a:rPr lang="ru-RU" sz="1800" dirty="0">
-                <a:latin typeface="Times New Roman"/>
+                <a:latin typeface="Times New Roman" panose="02020603050405020304" pitchFamily="18" charset="0"/>
+                <a:cs typeface="Times New Roman" panose="02020603050405020304" pitchFamily="18" charset="0"/>
+              </a:rPr>
+              <a:t>доцент каф. ИСКM, Иванченко Г. С.</a:t>
+            </a:r>
+          </a:p>
+          <a:p>
+            <a:pPr algn="just"/>
+            <a:r>
+              <a:rPr lang="ru-RU" sz="1800" dirty="0">
+                <a:latin typeface="Times New Roman" panose="02020603050405020304" pitchFamily="18" charset="0"/>
                 <a:ea typeface="Calibri"/>
-                <a:cs typeface="Calibri"/>
-              </a:rPr>
-              <a:t> </a:t>
-            </a:r>
-            <a:r>
-              <a:rPr lang="ru-RU" sz="1800" dirty="0">
-                <a:latin typeface="Times New Roman"/>
-                <a:cs typeface="Calibri"/>
-              </a:rPr>
-              <a:t>доцент каф. ИСКM, </a:t>
-            </a:r>
-            <a:r>
-              <a:rPr lang="ru-RU" sz="1800" dirty="0">
-                <a:latin typeface="Times New Roman"/>
-              </a:rPr>
-              <a:t>Иванченко Г. С.</a:t>
-            </a:r>
-          </a:p>
-          <a:p>
-            <a:pPr algn="just"/>
-            <a:r>
-              <a:rPr lang="ru-RU" sz="1800" dirty="0">
-                <a:latin typeface="Times New Roman"/>
-                <a:ea typeface="Calibri"/>
-                <a:cs typeface="Times New Roman"/>
+                <a:cs typeface="Times New Roman" panose="02020603050405020304" pitchFamily="18" charset="0"/>
               </a:rPr>
               <a:t>Научный консультант:                          ст. преп. каф. ИСКМ, Астахов А.С.</a:t>
             </a:r>
             <a:endParaRPr lang="ru-RU" dirty="0">
+              <a:latin typeface="Times New Roman" panose="02020603050405020304" pitchFamily="18" charset="0"/>
               <a:ea typeface="Calibri"/>
-              <a:cs typeface="Calibri"/>
+              <a:cs typeface="Times New Roman" panose="02020603050405020304" pitchFamily="18" charset="0"/>
             </a:endParaRPr>
           </a:p>
         </p:txBody>
@@ -3925,43 +4292,197 @@
               <a:buNone/>
             </a:pPr>
             <a:r>
-              <a:rPr sz="2000" b="0" i="0" u="none" strike="noStrike" baseline="0">
-                <a:latin typeface="Times New Roman"/>
-                <a:ea typeface="Times New Roman"/>
-                <a:cs typeface="Times New Roman"/>
-              </a:rPr>
-              <a:t>Волгоградский государственный университет</a:t>
-            </a:r>
+              <a:rPr sz="2000" b="0" i="0" u="none" strike="noStrike" baseline="0" dirty="0" err="1">
+                <a:latin typeface="Times New Roman" panose="02020603050405020304" pitchFamily="18" charset="0"/>
+                <a:ea typeface="Times New Roman"/>
+                <a:cs typeface="Times New Roman" panose="02020603050405020304" pitchFamily="18" charset="0"/>
+              </a:rPr>
+              <a:t>Волгоградский</a:t>
+            </a:r>
+            <a:r>
+              <a:rPr sz="2000" b="0" i="0" u="none" strike="noStrike" baseline="0" dirty="0">
+                <a:latin typeface="Times New Roman" panose="02020603050405020304" pitchFamily="18" charset="0"/>
+                <a:ea typeface="Times New Roman"/>
+                <a:cs typeface="Times New Roman" panose="02020603050405020304" pitchFamily="18" charset="0"/>
+              </a:rPr>
+              <a:t> </a:t>
+            </a:r>
+            <a:r>
+              <a:rPr sz="2000" b="0" i="0" u="none" strike="noStrike" baseline="0" dirty="0" err="1">
+                <a:latin typeface="Times New Roman" panose="02020603050405020304" pitchFamily="18" charset="0"/>
+                <a:ea typeface="Times New Roman"/>
+                <a:cs typeface="Times New Roman" panose="02020603050405020304" pitchFamily="18" charset="0"/>
+              </a:rPr>
+              <a:t>государственный</a:t>
+            </a:r>
+            <a:r>
+              <a:rPr sz="2000" b="0" i="0" u="none" strike="noStrike" baseline="0" dirty="0">
+                <a:latin typeface="Times New Roman" panose="02020603050405020304" pitchFamily="18" charset="0"/>
+                <a:ea typeface="Times New Roman"/>
+                <a:cs typeface="Times New Roman" panose="02020603050405020304" pitchFamily="18" charset="0"/>
+              </a:rPr>
+              <a:t> </a:t>
+            </a:r>
+            <a:r>
+              <a:rPr sz="2000" b="0" i="0" u="none" strike="noStrike" baseline="0" dirty="0" err="1">
+                <a:latin typeface="Times New Roman" panose="02020603050405020304" pitchFamily="18" charset="0"/>
+                <a:ea typeface="Times New Roman"/>
+                <a:cs typeface="Times New Roman" panose="02020603050405020304" pitchFamily="18" charset="0"/>
+              </a:rPr>
+              <a:t>университет</a:t>
+            </a:r>
+            <a:endParaRPr sz="2000" b="0" i="0" u="none" strike="noStrike" baseline="0" dirty="0">
+              <a:latin typeface="Times New Roman" panose="02020603050405020304" pitchFamily="18" charset="0"/>
+              <a:ea typeface="Times New Roman"/>
+              <a:cs typeface="Times New Roman" panose="02020603050405020304" pitchFamily="18" charset="0"/>
+            </a:endParaRPr>
           </a:p>
           <a:p>
             <a:pPr algn="ctr">
               <a:buNone/>
             </a:pPr>
             <a:r>
-              <a:rPr sz="2000" b="0" i="0" u="none" strike="noStrike" baseline="0">
-                <a:latin typeface="Times New Roman"/>
-                <a:ea typeface="Times New Roman"/>
-                <a:cs typeface="Times New Roman"/>
-              </a:rPr>
-              <a:t>Институт математики и информационных технологий</a:t>
-            </a:r>
+              <a:rPr sz="2000" b="0" i="0" u="none" strike="noStrike" baseline="0" dirty="0" err="1">
+                <a:latin typeface="Times New Roman" panose="02020603050405020304" pitchFamily="18" charset="0"/>
+                <a:ea typeface="Times New Roman"/>
+                <a:cs typeface="Times New Roman" panose="02020603050405020304" pitchFamily="18" charset="0"/>
+              </a:rPr>
+              <a:t>Институт</a:t>
+            </a:r>
+            <a:r>
+              <a:rPr sz="2000" b="0" i="0" u="none" strike="noStrike" baseline="0" dirty="0">
+                <a:latin typeface="Times New Roman" panose="02020603050405020304" pitchFamily="18" charset="0"/>
+                <a:ea typeface="Times New Roman"/>
+                <a:cs typeface="Times New Roman" panose="02020603050405020304" pitchFamily="18" charset="0"/>
+              </a:rPr>
+              <a:t> </a:t>
+            </a:r>
+            <a:r>
+              <a:rPr sz="2000" b="0" i="0" u="none" strike="noStrike" baseline="0" dirty="0" err="1">
+                <a:latin typeface="Times New Roman" panose="02020603050405020304" pitchFamily="18" charset="0"/>
+                <a:ea typeface="Times New Roman"/>
+                <a:cs typeface="Times New Roman" panose="02020603050405020304" pitchFamily="18" charset="0"/>
+              </a:rPr>
+              <a:t>математики</a:t>
+            </a:r>
+            <a:r>
+              <a:rPr sz="2000" b="0" i="0" u="none" strike="noStrike" baseline="0" dirty="0">
+                <a:latin typeface="Times New Roman" panose="02020603050405020304" pitchFamily="18" charset="0"/>
+                <a:ea typeface="Times New Roman"/>
+                <a:cs typeface="Times New Roman" panose="02020603050405020304" pitchFamily="18" charset="0"/>
+              </a:rPr>
+              <a:t> и </a:t>
+            </a:r>
+            <a:r>
+              <a:rPr sz="2000" b="0" i="0" u="none" strike="noStrike" baseline="0" dirty="0" err="1">
+                <a:latin typeface="Times New Roman" panose="02020603050405020304" pitchFamily="18" charset="0"/>
+                <a:ea typeface="Times New Roman"/>
+                <a:cs typeface="Times New Roman" panose="02020603050405020304" pitchFamily="18" charset="0"/>
+              </a:rPr>
+              <a:t>информационных</a:t>
+            </a:r>
+            <a:r>
+              <a:rPr sz="2000" b="0" i="0" u="none" strike="noStrike" baseline="0" dirty="0">
+                <a:latin typeface="Times New Roman" panose="02020603050405020304" pitchFamily="18" charset="0"/>
+                <a:ea typeface="Times New Roman"/>
+                <a:cs typeface="Times New Roman" panose="02020603050405020304" pitchFamily="18" charset="0"/>
+              </a:rPr>
+              <a:t> </a:t>
+            </a:r>
+            <a:r>
+              <a:rPr sz="2000" b="0" i="0" u="none" strike="noStrike" baseline="0" dirty="0" err="1">
+                <a:latin typeface="Times New Roman" panose="02020603050405020304" pitchFamily="18" charset="0"/>
+                <a:ea typeface="Times New Roman"/>
+                <a:cs typeface="Times New Roman" panose="02020603050405020304" pitchFamily="18" charset="0"/>
+              </a:rPr>
+              <a:t>технологий</a:t>
+            </a:r>
+            <a:endParaRPr sz="2000" b="0" i="0" u="none" strike="noStrike" baseline="0" dirty="0">
+              <a:latin typeface="Times New Roman" panose="02020603050405020304" pitchFamily="18" charset="0"/>
+              <a:ea typeface="Times New Roman"/>
+              <a:cs typeface="Times New Roman" panose="02020603050405020304" pitchFamily="18" charset="0"/>
+            </a:endParaRPr>
           </a:p>
           <a:p>
             <a:pPr algn="ctr">
               <a:buNone/>
             </a:pPr>
             <a:r>
-              <a:rPr sz="2000" b="0" i="0" u="none" strike="noStrike" baseline="0">
-                <a:latin typeface="Times New Roman"/>
-                <a:ea typeface="Times New Roman"/>
-                <a:cs typeface="Times New Roman"/>
-              </a:rPr>
-              <a:t>Кафедра информационных систем и компьютерного моделирования</a:t>
-            </a:r>
-            <a:endParaRPr sz="2000">
-              <a:latin typeface="Times New Roman"/>
+              <a:rPr sz="2000" b="0" i="0" u="none" strike="noStrike" baseline="0" dirty="0" err="1">
+                <a:latin typeface="Times New Roman" panose="02020603050405020304" pitchFamily="18" charset="0"/>
+                <a:ea typeface="Times New Roman"/>
+                <a:cs typeface="Times New Roman" panose="02020603050405020304" pitchFamily="18" charset="0"/>
+              </a:rPr>
+              <a:t>Кафедра</a:t>
+            </a:r>
+            <a:r>
+              <a:rPr sz="2000" b="0" i="0" u="none" strike="noStrike" baseline="0" dirty="0">
+                <a:latin typeface="Times New Roman" panose="02020603050405020304" pitchFamily="18" charset="0"/>
+                <a:ea typeface="Times New Roman"/>
+                <a:cs typeface="Times New Roman" panose="02020603050405020304" pitchFamily="18" charset="0"/>
+              </a:rPr>
+              <a:t> </a:t>
+            </a:r>
+            <a:r>
+              <a:rPr sz="2000" b="0" i="0" u="none" strike="noStrike" baseline="0" dirty="0" err="1">
+                <a:latin typeface="Times New Roman" panose="02020603050405020304" pitchFamily="18" charset="0"/>
+                <a:ea typeface="Times New Roman"/>
+                <a:cs typeface="Times New Roman" panose="02020603050405020304" pitchFamily="18" charset="0"/>
+              </a:rPr>
+              <a:t>информационных</a:t>
+            </a:r>
+            <a:r>
+              <a:rPr sz="2000" b="0" i="0" u="none" strike="noStrike" baseline="0" dirty="0">
+                <a:latin typeface="Times New Roman" panose="02020603050405020304" pitchFamily="18" charset="0"/>
+                <a:ea typeface="Times New Roman"/>
+                <a:cs typeface="Times New Roman" panose="02020603050405020304" pitchFamily="18" charset="0"/>
+              </a:rPr>
+              <a:t> </a:t>
+            </a:r>
+            <a:r>
+              <a:rPr sz="2000" b="0" i="0" u="none" strike="noStrike" baseline="0" dirty="0" err="1">
+                <a:latin typeface="Times New Roman" panose="02020603050405020304" pitchFamily="18" charset="0"/>
+                <a:ea typeface="Times New Roman"/>
+                <a:cs typeface="Times New Roman" panose="02020603050405020304" pitchFamily="18" charset="0"/>
+              </a:rPr>
+              <a:t>систем</a:t>
+            </a:r>
+            <a:r>
+              <a:rPr sz="2000" b="0" i="0" u="none" strike="noStrike" baseline="0" dirty="0">
+                <a:latin typeface="Times New Roman" panose="02020603050405020304" pitchFamily="18" charset="0"/>
+                <a:ea typeface="Times New Roman"/>
+                <a:cs typeface="Times New Roman" panose="02020603050405020304" pitchFamily="18" charset="0"/>
+              </a:rPr>
+              <a:t> и </a:t>
+            </a:r>
+            <a:r>
+              <a:rPr sz="2000" b="0" i="0" u="none" strike="noStrike" baseline="0" dirty="0" err="1">
+                <a:latin typeface="Times New Roman" panose="02020603050405020304" pitchFamily="18" charset="0"/>
+                <a:ea typeface="Times New Roman"/>
+                <a:cs typeface="Times New Roman" panose="02020603050405020304" pitchFamily="18" charset="0"/>
+              </a:rPr>
+              <a:t>компьютерного</a:t>
+            </a:r>
+            <a:r>
+              <a:rPr sz="2000" b="0" i="0" u="none" strike="noStrike" baseline="0" dirty="0">
+                <a:latin typeface="Times New Roman" panose="02020603050405020304" pitchFamily="18" charset="0"/>
+                <a:ea typeface="Times New Roman"/>
+                <a:cs typeface="Times New Roman" panose="02020603050405020304" pitchFamily="18" charset="0"/>
+              </a:rPr>
+              <a:t> </a:t>
+            </a:r>
+            <a:r>
+              <a:rPr sz="2000" b="0" i="0" u="none" strike="noStrike" baseline="0" dirty="0" err="1">
+                <a:latin typeface="Times New Roman" panose="02020603050405020304" pitchFamily="18" charset="0"/>
+                <a:ea typeface="Times New Roman"/>
+                <a:cs typeface="Times New Roman" panose="02020603050405020304" pitchFamily="18" charset="0"/>
+              </a:rPr>
+              <a:t>моделирования</a:t>
+            </a:r>
+            <a:endParaRPr sz="2000" dirty="0">
+              <a:latin typeface="Times New Roman" panose="02020603050405020304" pitchFamily="18" charset="0"/>
               <a:ea typeface="Times New Roman"/>
-              <a:cs typeface="Times New Roman"/>
+              <a:cs typeface="Times New Roman" panose="02020603050405020304" pitchFamily="18" charset="0"/>
             </a:endParaRPr>
           </a:p>
         </p:txBody>
@@ -4042,16 +4563,16 @@
                 <a:solidFill>
                   <a:srgbClr val="000000"/>
                 </a:solidFill>
-                <a:latin typeface="Times New Roman"/>
-                <a:ea typeface="Times New Roman"/>
-                <a:cs typeface="Times New Roman"/>
+                <a:latin typeface="Times New Roman" panose="02020603050405020304" pitchFamily="18" charset="0"/>
+                <a:ea typeface="Times New Roman"/>
+                <a:cs typeface="Times New Roman" panose="02020603050405020304" pitchFamily="18" charset="0"/>
               </a:rPr>
               <a:t>Научно-исследовательская работа по направлению</a:t>
             </a:r>
             <a:endParaRPr sz="2000">
-              <a:latin typeface="Calibri Light"/>
+              <a:latin typeface="Times New Roman" panose="02020603050405020304" pitchFamily="18" charset="0"/>
               <a:ea typeface="Calibri Light"/>
-              <a:cs typeface="Calibri Light"/>
+              <a:cs typeface="Times New Roman" panose="02020603050405020304" pitchFamily="18" charset="0"/>
             </a:endParaRPr>
           </a:p>
           <a:p>
@@ -4074,16 +4595,16 @@
                 <a:solidFill>
                   <a:srgbClr val="000000"/>
                 </a:solidFill>
-                <a:latin typeface="Times New Roman"/>
-                <a:ea typeface="Times New Roman"/>
-                <a:cs typeface="Times New Roman"/>
+                <a:latin typeface="Times New Roman" panose="02020603050405020304" pitchFamily="18" charset="0"/>
+                <a:ea typeface="Times New Roman"/>
+                <a:cs typeface="Times New Roman" panose="02020603050405020304" pitchFamily="18" charset="0"/>
               </a:rPr>
               <a:t>09.04.01 «Информатика и вычислительная техника»</a:t>
             </a:r>
             <a:endParaRPr sz="2000">
-              <a:latin typeface="Times New Roman"/>
+              <a:latin typeface="Times New Roman" panose="02020603050405020304" pitchFamily="18" charset="0"/>
               <a:ea typeface="Times New Roman"/>
-              <a:cs typeface="Times New Roman"/>
+              <a:cs typeface="Times New Roman" panose="02020603050405020304" pitchFamily="18" charset="0"/>
             </a:endParaRPr>
           </a:p>
         </p:txBody>
@@ -4306,9 +4827,9 @@
                 <a:solidFill>
                   <a:srgbClr val="000000"/>
                 </a:solidFill>
-                <a:latin typeface="Times New Roman"/>
-                <a:ea typeface="Times New Roman"/>
-                <a:cs typeface="Times New Roman"/>
+                <a:latin typeface="Times New Roman" panose="02020603050405020304" pitchFamily="18" charset="0"/>
+                <a:ea typeface="Times New Roman"/>
+                <a:cs typeface="Times New Roman" panose="02020603050405020304" pitchFamily="18" charset="0"/>
               </a:rPr>
               <a:t>Волгоград 2026</a:t>
             </a:r>
@@ -4509,8 +5030,9 @@
           <a:p>
             <a:pPr algn="just"/>
             <a:endParaRPr lang="ru-RU" dirty="0">
+              <a:latin typeface="Times New Roman" panose="02020603050405020304" pitchFamily="18" charset="0"/>
               <a:ea typeface="Calibri"/>
-              <a:cs typeface="Calibri"/>
+              <a:cs typeface="Times New Roman" panose="02020603050405020304" pitchFamily="18" charset="0"/>
             </a:endParaRPr>
           </a:p>
         </p:txBody>
@@ -4570,12 +5092,15 @@
             <a:pPr algn="ctr"/>
             <a:r>
               <a:rPr lang="ru-RU" sz="3600" b="1" dirty="0">
-                <a:latin typeface="Times New Roman"/>
-                <a:cs typeface="Times New Roman"/>
+                <a:latin typeface="Times New Roman" panose="02020603050405020304" pitchFamily="18" charset="0"/>
+                <a:cs typeface="Times New Roman" panose="02020603050405020304" pitchFamily="18" charset="0"/>
               </a:rPr>
               <a:t>Цель работы</a:t>
             </a:r>
-            <a:endParaRPr lang="ru-RU" dirty="0"/>
+            <a:endParaRPr lang="ru-RU" dirty="0">
+              <a:latin typeface="Times New Roman" panose="02020603050405020304" pitchFamily="18" charset="0"/>
+              <a:cs typeface="Times New Roman" panose="02020603050405020304" pitchFamily="18" charset="0"/>
+            </a:endParaRPr>
           </a:p>
         </p:txBody>
       </p:sp>
@@ -4606,15 +5131,14 @@
             </a:pPr>
             <a:r>
               <a:rPr lang="ru-RU" sz="2400" dirty="0">
-                <a:latin typeface="Times New Roman"/>
-                <a:ea typeface="+mn-lt"/>
-                <a:cs typeface="+mn-lt"/>
+                <a:latin typeface="Times New Roman" panose="02020603050405020304" pitchFamily="18" charset="0"/>
+                <a:cs typeface="Times New Roman" panose="02020603050405020304" pitchFamily="18" charset="0"/>
               </a:rPr>
               <a:t>Цель работы — разработка и тестирование версии 3D-принтера с системой обнаружения дефектов в процессе печати и механизмом своевременного реагирования.</a:t>
             </a:r>
             <a:endParaRPr lang="ru-RU" dirty="0">
-              <a:latin typeface="Times New Roman"/>
-              <a:cs typeface="Times New Roman"/>
+              <a:latin typeface="Times New Roman" panose="02020603050405020304" pitchFamily="18" charset="0"/>
+              <a:cs typeface="Times New Roman" panose="02020603050405020304" pitchFamily="18" charset="0"/>
             </a:endParaRPr>
           </a:p>
         </p:txBody>
@@ -4644,8 +5168,8 @@
             <a:pPr algn="ctr"/>
             <a:r>
               <a:rPr lang="ru-RU" sz="3600" b="1" dirty="0">
-                <a:latin typeface="Times New Roman"/>
-                <a:cs typeface="Times New Roman"/>
+                <a:latin typeface="Times New Roman" panose="02020603050405020304" pitchFamily="18" charset="0"/>
+                <a:cs typeface="Times New Roman" panose="02020603050405020304" pitchFamily="18" charset="0"/>
               </a:rPr>
               <a:t>Основные задачи работы</a:t>
             </a:r>
@@ -4679,14 +5203,11 @@
               <a:buChar char="•"/>
             </a:pPr>
             <a:r>
-              <a:rPr lang="ru-RU" sz="2400" dirty="0"/>
-              <a:t>Изучение дефектов FDM-печати и выбор целевого дефекта для автоматического обнаружения</a:t>
-            </a:r>
-            <a:r>
               <a:rPr lang="ru-RU" sz="2400" dirty="0">
-                <a:cs typeface="Times New Roman"/>
-              </a:rPr>
-              <a:t>.</a:t>
+                <a:latin typeface="Times New Roman" panose="02020603050405020304" pitchFamily="18" charset="0"/>
+                <a:cs typeface="Times New Roman" panose="02020603050405020304" pitchFamily="18" charset="0"/>
+              </a:rPr>
+              <a:t>Изучение дефектов FDM-печати и выбор целевого дефекта для автоматического обнаружения.</a:t>
             </a:r>
           </a:p>
           <a:p>
@@ -4696,7 +5217,8 @@
             </a:pPr>
             <a:r>
               <a:rPr lang="ru-RU" sz="2400" dirty="0">
-                <a:cs typeface="Times New Roman"/>
+                <a:latin typeface="Times New Roman" panose="02020603050405020304" pitchFamily="18" charset="0"/>
+                <a:cs typeface="Times New Roman" panose="02020603050405020304" pitchFamily="18" charset="0"/>
               </a:rPr>
               <a:t>Проектирование, сборка и отладка аппаратно-программного комплекса экспериментального 3D-принтера.</a:t>
             </a:r>
@@ -4708,7 +5230,8 @@
             </a:pPr>
             <a:r>
               <a:rPr lang="ru-RU" sz="2400" dirty="0">
-                <a:cs typeface="Times New Roman"/>
+                <a:latin typeface="Times New Roman" panose="02020603050405020304" pitchFamily="18" charset="0"/>
+                <a:cs typeface="Times New Roman" panose="02020603050405020304" pitchFamily="18" charset="0"/>
               </a:rPr>
               <a:t>Сбор и подготовка данных для обучения нейросети и обучение модели обнаружения целевого дефекта.</a:t>
             </a:r>
@@ -4720,7 +5243,8 @@
             </a:pPr>
             <a:r>
               <a:rPr lang="ru-RU" sz="2400" dirty="0">
-                <a:cs typeface="Times New Roman"/>
+                <a:latin typeface="Times New Roman" panose="02020603050405020304" pitchFamily="18" charset="0"/>
+                <a:cs typeface="Times New Roman" panose="02020603050405020304" pitchFamily="18" charset="0"/>
               </a:rPr>
               <a:t>Разработка внешней системы контроля печати с автоматическим обнаружением дефектов.</a:t>
             </a:r>
@@ -4732,7 +5256,8 @@
             </a:pPr>
             <a:r>
               <a:rPr lang="ru-RU" sz="2400" dirty="0">
-                <a:cs typeface="Times New Roman"/>
+                <a:latin typeface="Times New Roman" panose="02020603050405020304" pitchFamily="18" charset="0"/>
+                <a:cs typeface="Times New Roman" panose="02020603050405020304" pitchFamily="18" charset="0"/>
               </a:rPr>
               <a:t>Тестирование работы системы контроля и 3D-принтера в процессе печати.</a:t>
             </a:r>
@@ -4770,8 +5295,8 @@
                 <a:solidFill>
                   <a:schemeClr val="tx1"/>
                 </a:solidFill>
-                <a:latin typeface="Times New Roman"/>
-                <a:cs typeface="Times New Roman"/>
+                <a:latin typeface="Times New Roman" panose="02020603050405020304" pitchFamily="18" charset="0"/>
+                <a:cs typeface="Times New Roman" panose="02020603050405020304" pitchFamily="18" charset="0"/>
               </a:rPr>
               <a:t>2</a:t>
             </a:fld>
@@ -4779,9 +5304,9 @@
               <a:solidFill>
                 <a:schemeClr val="tx1"/>
               </a:solidFill>
-              <a:latin typeface="Times New Roman"/>
+              <a:latin typeface="Times New Roman" panose="02020603050405020304" pitchFamily="18" charset="0"/>
               <a:ea typeface="Calibri"/>
-              <a:cs typeface="Times New Roman"/>
+              <a:cs typeface="Times New Roman" panose="02020603050405020304" pitchFamily="18" charset="0"/>
             </a:endParaRPr>
           </a:p>
         </p:txBody>
@@ -4811,25 +5336,60 @@
           <a:chExt cx="0" cy="0"/>
         </a:xfrm>
       </p:grpSpPr>
-      <p:sp>
-        <p:nvSpPr>
-          <p:cNvPr id="2" name="Заголовок 1">
-            <a:extLst>
-              <a:ext uri="{FF2B5EF4-FFF2-40B4-BE49-F238E27FC236}">
-                <a16:creationId xmlns:a16="http://schemas.microsoft.com/office/drawing/2014/main" id="{49CC29E7-47AE-4C1B-A66A-06BAB8AB4DBE}"/>
-              </a:ext>
-            </a:extLst>
-          </p:cNvPr>
-          <p:cNvSpPr>
-            <a:spLocks noGrp="1"/>
-          </p:cNvSpPr>
-          <p:nvPr>
-            <p:ph type="title"/>
-          </p:nvPr>
-        </p:nvSpPr>
+      <p:pic>
+        <p:nvPicPr>
+          <p:cNvPr id="19" name="Рисунок 18">
+            <a:extLst>
+              <a:ext uri="{FF2B5EF4-FFF2-40B4-BE49-F238E27FC236}">
+                <a16:creationId xmlns:a16="http://schemas.microsoft.com/office/drawing/2014/main" id="{99FE507C-2C48-A423-9756-13891072B78F}"/>
+              </a:ext>
+            </a:extLst>
+          </p:cNvPr>
+          <p:cNvPicPr>
+            <a:picLocks noChangeAspect="1"/>
+          </p:cNvPicPr>
+          <p:nvPr/>
+        </p:nvPicPr>
+        <p:blipFill>
+          <a:blip r:embed="rId3">
+            <a:extLst>
+              <a:ext uri="{28A0092B-C50C-407E-A947-70E740481C1C}">
+                <a14:useLocalDpi xmlns:a14="http://schemas.microsoft.com/office/drawing/2010/main" val="0"/>
+              </a:ext>
+            </a:extLst>
+          </a:blip>
+          <a:srcRect l="8733" t="13068" r="8466" b="3458"/>
+          <a:stretch/>
+        </p:blipFill>
         <p:spPr>
           <a:xfrm>
-            <a:off x="628650" y="-3176"/>
+            <a:off x="5021065" y="3253523"/>
+            <a:ext cx="3921040" cy="2555874"/>
+          </a:xfrm>
+          <a:prstGeom prst="rect">
+            <a:avLst/>
+          </a:prstGeom>
+        </p:spPr>
+      </p:pic>
+      <p:sp>
+        <p:nvSpPr>
+          <p:cNvPr id="2" name="Заголовок 1">
+            <a:extLst>
+              <a:ext uri="{FF2B5EF4-FFF2-40B4-BE49-F238E27FC236}">
+                <a16:creationId xmlns:a16="http://schemas.microsoft.com/office/drawing/2014/main" id="{49CC29E7-47AE-4C1B-A66A-06BAB8AB4DBE}"/>
+              </a:ext>
+            </a:extLst>
+          </p:cNvPr>
+          <p:cNvSpPr>
+            <a:spLocks noGrp="1"/>
+          </p:cNvSpPr>
+          <p:nvPr>
+            <p:ph type="title"/>
+          </p:nvPr>
+        </p:nvSpPr>
+        <p:spPr>
+          <a:xfrm>
+            <a:off x="628650" y="-116476"/>
             <a:ext cx="7886700" cy="712868"/>
           </a:xfrm>
         </p:spPr>
@@ -4862,7 +5422,7 @@
               </a:defRPr>
             </a:pPr>
             <a:r>
-              <a:rPr sz="4400" b="0">
+              <a:rPr sz="4400" b="0" dirty="0">
                 <a:solidFill>
                   <a:srgbClr val="000000"/>
                 </a:solidFill>
@@ -4870,9 +5430,75 @@
                 <a:ea typeface="Times New Roman"/>
                 <a:cs typeface="Times New Roman"/>
               </a:rPr>
-              <a:t>В чем заключается проблема:</a:t>
-            </a:r>
-            <a:endParaRPr/>
+              <a:t>В </a:t>
+            </a:r>
+            <a:r>
+              <a:rPr sz="4400" b="0" dirty="0" err="1">
+                <a:solidFill>
+                  <a:srgbClr val="000000"/>
+                </a:solidFill>
+                <a:latin typeface="Times New Roman"/>
+                <a:ea typeface="Times New Roman"/>
+                <a:cs typeface="Times New Roman"/>
+              </a:rPr>
+              <a:t>чем</a:t>
+            </a:r>
+            <a:r>
+              <a:rPr sz="4400" b="0" dirty="0">
+                <a:solidFill>
+                  <a:srgbClr val="000000"/>
+                </a:solidFill>
+                <a:latin typeface="Times New Roman"/>
+                <a:ea typeface="Times New Roman"/>
+                <a:cs typeface="Times New Roman"/>
+              </a:rPr>
+              <a:t> </a:t>
+            </a:r>
+            <a:r>
+              <a:rPr sz="4400" b="0" dirty="0" err="1">
+                <a:solidFill>
+                  <a:srgbClr val="000000"/>
+                </a:solidFill>
+                <a:latin typeface="Times New Roman"/>
+                <a:ea typeface="Times New Roman"/>
+                <a:cs typeface="Times New Roman"/>
+              </a:rPr>
+              <a:t>заключается</a:t>
+            </a:r>
+            <a:r>
+              <a:rPr sz="4400" b="0" dirty="0">
+                <a:solidFill>
+                  <a:srgbClr val="000000"/>
+                </a:solidFill>
+                <a:latin typeface="Times New Roman"/>
+                <a:ea typeface="Times New Roman"/>
+                <a:cs typeface="Times New Roman"/>
+              </a:rPr>
+              <a:t> </a:t>
+            </a:r>
+            <a:r>
+              <a:rPr sz="4400" b="0" dirty="0" err="1">
+                <a:solidFill>
+                  <a:srgbClr val="000000"/>
+                </a:solidFill>
+                <a:latin typeface="Times New Roman"/>
+                <a:ea typeface="Times New Roman"/>
+                <a:cs typeface="Times New Roman"/>
+              </a:rPr>
+              <a:t>проблема</a:t>
+            </a:r>
+            <a:r>
+              <a:rPr sz="4400" b="0" dirty="0">
+                <a:solidFill>
+                  <a:srgbClr val="000000"/>
+                </a:solidFill>
+                <a:latin typeface="Times New Roman"/>
+                <a:ea typeface="Times New Roman"/>
+                <a:cs typeface="Times New Roman"/>
+              </a:rPr>
+              <a:t>:</a:t>
+            </a:r>
+            <a:endParaRPr dirty="0"/>
           </a:p>
         </p:txBody>
       </p:sp>
@@ -4963,8 +5589,8 @@
         </p:nvSpPr>
         <p:spPr>
           <a:xfrm>
-            <a:off x="277898" y="906051"/>
-            <a:ext cx="5718578" cy="1737360"/>
+            <a:off x="277897" y="597203"/>
+            <a:ext cx="5948583" cy="2297417"/>
           </a:xfrm>
           <a:prstGeom prst="rect">
             <a:avLst/>
@@ -5005,7 +5631,7 @@
               </a:defRPr>
             </a:pPr>
             <a:r>
-              <a:rPr sz="1800" b="0" dirty="0" err="1">
+              <a:rPr lang="ru-RU" sz="1800" b="0" dirty="0">
                 <a:solidFill>
                   <a:srgbClr val="000000"/>
                 </a:solidFill>
@@ -5013,10 +5639,10 @@
                 <a:ea typeface="Times New Roman"/>
                 <a:cs typeface="Times New Roman"/>
               </a:rPr>
-              <a:t>При</a:t>
-            </a:r>
-            <a:r>
-              <a:rPr sz="1800" b="0" dirty="0">
+              <a:t>На фермах 3D-принтеров в процессе печати могут возникать сбои, вызванные различными факторами. Такие дефекты, как отлипание, расслоение или смещение слоёв, в конечном итоге могут привести к </a:t>
+            </a:r>
+            <a:r>
+              <a:rPr lang="ru-RU" sz="1800" b="1" dirty="0">
                 <a:solidFill>
                   <a:srgbClr val="000000"/>
                 </a:solidFill>
@@ -5024,10 +5650,10 @@
                 <a:ea typeface="Times New Roman"/>
                 <a:cs typeface="Times New Roman"/>
               </a:rPr>
-              <a:t> </a:t>
-            </a:r>
-            <a:r>
-              <a:rPr sz="1800" b="1" dirty="0" err="1">
+              <a:t>критическому дефекту «спагетти»</a:t>
+            </a:r>
+            <a:r>
+              <a:rPr lang="ru-RU" sz="1800" b="0" dirty="0">
                 <a:solidFill>
                   <a:srgbClr val="000000"/>
                 </a:solidFill>
@@ -5035,10 +5661,10 @@
                 <a:ea typeface="Times New Roman"/>
                 <a:cs typeface="Times New Roman"/>
               </a:rPr>
-              <a:t>отлипании</a:t>
-            </a:r>
-            <a:r>
-              <a:rPr sz="1800" b="1" dirty="0">
+              <a:t>, при котором пластик начинает хаотично укладываться в воздухе. Такой дефект приводит к перерасходу материала, а в отдельных случаях может стать </a:t>
+            </a:r>
+            <a:r>
+              <a:rPr lang="ru-RU" sz="1800" b="1" dirty="0">
                 <a:solidFill>
                   <a:srgbClr val="000000"/>
                 </a:solidFill>
@@ -5046,10 +5672,10 @@
                 <a:ea typeface="Times New Roman"/>
                 <a:cs typeface="Times New Roman"/>
               </a:rPr>
-              <a:t> </a:t>
-            </a:r>
-            <a:r>
-              <a:rPr sz="1800" b="1" dirty="0" err="1">
+              <a:t>причиной повреждения </a:t>
+            </a:r>
+            <a:r>
+              <a:rPr lang="ru-RU" sz="1800" b="0" dirty="0">
                 <a:solidFill>
                   <a:srgbClr val="000000"/>
                 </a:solidFill>
@@ -5057,251 +5683,9 @@
                 <a:ea typeface="Times New Roman"/>
                 <a:cs typeface="Times New Roman"/>
               </a:rPr>
-              <a:t>или</a:t>
-            </a:r>
-            <a:r>
-              <a:rPr sz="1800" b="1" dirty="0">
-                <a:solidFill>
-                  <a:srgbClr val="000000"/>
-                </a:solidFill>
-                <a:latin typeface="Times New Roman"/>
-                <a:ea typeface="Times New Roman"/>
-                <a:cs typeface="Times New Roman"/>
-              </a:rPr>
-              <a:t> </a:t>
-            </a:r>
-            <a:r>
-              <a:rPr sz="1800" b="1" dirty="0" err="1">
-                <a:solidFill>
-                  <a:srgbClr val="000000"/>
-                </a:solidFill>
-                <a:latin typeface="Times New Roman"/>
-                <a:ea typeface="Times New Roman"/>
-                <a:cs typeface="Times New Roman"/>
-              </a:rPr>
-              <a:t>смещении</a:t>
-            </a:r>
-            <a:r>
-              <a:rPr sz="1800" b="1" dirty="0">
-                <a:solidFill>
-                  <a:srgbClr val="000000"/>
-                </a:solidFill>
-                <a:latin typeface="Times New Roman"/>
-                <a:ea typeface="Times New Roman"/>
-                <a:cs typeface="Times New Roman"/>
-              </a:rPr>
-              <a:t> </a:t>
-            </a:r>
-            <a:r>
-              <a:rPr sz="1800" b="1" dirty="0" err="1">
-                <a:solidFill>
-                  <a:srgbClr val="000000"/>
-                </a:solidFill>
-                <a:latin typeface="Times New Roman"/>
-                <a:ea typeface="Times New Roman"/>
-                <a:cs typeface="Times New Roman"/>
-              </a:rPr>
-              <a:t>модели</a:t>
-            </a:r>
-            <a:r>
-              <a:rPr sz="1800" b="0" dirty="0">
-                <a:solidFill>
-                  <a:srgbClr val="000000"/>
-                </a:solidFill>
-                <a:latin typeface="Times New Roman"/>
-                <a:ea typeface="Times New Roman"/>
-                <a:cs typeface="Times New Roman"/>
-              </a:rPr>
-              <a:t> </a:t>
-            </a:r>
-            <a:r>
-              <a:rPr sz="1800" b="0" dirty="0" err="1">
-                <a:solidFill>
-                  <a:srgbClr val="000000"/>
-                </a:solidFill>
-                <a:latin typeface="Times New Roman"/>
-                <a:ea typeface="Times New Roman"/>
-                <a:cs typeface="Times New Roman"/>
-              </a:rPr>
-              <a:t>пластик</a:t>
-            </a:r>
-            <a:r>
-              <a:rPr sz="1800" b="0" dirty="0">
-                <a:solidFill>
-                  <a:srgbClr val="000000"/>
-                </a:solidFill>
-                <a:latin typeface="Times New Roman"/>
-                <a:ea typeface="Times New Roman"/>
-                <a:cs typeface="Times New Roman"/>
-              </a:rPr>
-              <a:t> </a:t>
-            </a:r>
-            <a:r>
-              <a:rPr sz="1800" b="0" dirty="0" err="1">
-                <a:solidFill>
-                  <a:srgbClr val="000000"/>
-                </a:solidFill>
-                <a:latin typeface="Times New Roman"/>
-                <a:ea typeface="Times New Roman"/>
-                <a:cs typeface="Times New Roman"/>
-              </a:rPr>
-              <a:t>накапливается</a:t>
-            </a:r>
-            <a:r>
-              <a:rPr sz="1800" b="0" dirty="0">
-                <a:solidFill>
-                  <a:srgbClr val="000000"/>
-                </a:solidFill>
-                <a:latin typeface="Times New Roman"/>
-                <a:ea typeface="Times New Roman"/>
-                <a:cs typeface="Times New Roman"/>
-              </a:rPr>
-              <a:t> в </a:t>
-            </a:r>
-            <a:r>
-              <a:rPr sz="1800" b="0" dirty="0" err="1">
-                <a:solidFill>
-                  <a:srgbClr val="000000"/>
-                </a:solidFill>
-                <a:latin typeface="Times New Roman"/>
-                <a:ea typeface="Times New Roman"/>
-                <a:cs typeface="Times New Roman"/>
-              </a:rPr>
-              <a:t>виде</a:t>
-            </a:r>
-            <a:r>
-              <a:rPr sz="1800" b="0" dirty="0">
-                <a:solidFill>
-                  <a:srgbClr val="000000"/>
-                </a:solidFill>
-                <a:latin typeface="Times New Roman"/>
-                <a:ea typeface="Times New Roman"/>
-                <a:cs typeface="Times New Roman"/>
-              </a:rPr>
-              <a:t> </a:t>
-            </a:r>
-            <a:r>
-              <a:rPr sz="1800" b="0" dirty="0" err="1">
-                <a:solidFill>
-                  <a:srgbClr val="000000"/>
-                </a:solidFill>
-                <a:latin typeface="Times New Roman"/>
-                <a:ea typeface="Times New Roman"/>
-                <a:cs typeface="Times New Roman"/>
-              </a:rPr>
-              <a:t>хаотичных</a:t>
-            </a:r>
-            <a:r>
-              <a:rPr sz="1800" b="0" dirty="0">
-                <a:solidFill>
-                  <a:srgbClr val="000000"/>
-                </a:solidFill>
-                <a:latin typeface="Times New Roman"/>
-                <a:ea typeface="Times New Roman"/>
-                <a:cs typeface="Times New Roman"/>
-              </a:rPr>
-              <a:t> </a:t>
-            </a:r>
-            <a:r>
-              <a:rPr sz="1800" b="0" dirty="0" err="1">
-                <a:solidFill>
-                  <a:srgbClr val="000000"/>
-                </a:solidFill>
-                <a:latin typeface="Times New Roman"/>
-                <a:ea typeface="Times New Roman"/>
-                <a:cs typeface="Times New Roman"/>
-              </a:rPr>
-              <a:t>нитей</a:t>
-            </a:r>
-            <a:r>
-              <a:rPr sz="1800" b="0" dirty="0">
-                <a:solidFill>
-                  <a:srgbClr val="000000"/>
-                </a:solidFill>
-                <a:latin typeface="Times New Roman"/>
-                <a:ea typeface="Times New Roman"/>
-                <a:cs typeface="Times New Roman"/>
-              </a:rPr>
-              <a:t> — </a:t>
-            </a:r>
-            <a:r>
-              <a:rPr sz="1800" b="0" dirty="0" err="1">
-                <a:solidFill>
-                  <a:srgbClr val="000000"/>
-                </a:solidFill>
-                <a:latin typeface="Times New Roman"/>
-                <a:ea typeface="Times New Roman"/>
-                <a:cs typeface="Times New Roman"/>
-              </a:rPr>
-              <a:t>возникает</a:t>
-            </a:r>
-            <a:r>
-              <a:rPr sz="1800" b="0" dirty="0">
-                <a:solidFill>
-                  <a:srgbClr val="000000"/>
-                </a:solidFill>
-                <a:latin typeface="Times New Roman"/>
-                <a:ea typeface="Times New Roman"/>
-                <a:cs typeface="Times New Roman"/>
-              </a:rPr>
-              <a:t> </a:t>
-            </a:r>
-            <a:r>
-              <a:rPr sz="1800" b="1" dirty="0" err="1">
-                <a:solidFill>
-                  <a:srgbClr val="000000"/>
-                </a:solidFill>
-                <a:latin typeface="Times New Roman"/>
-                <a:ea typeface="Times New Roman"/>
-                <a:cs typeface="Times New Roman"/>
-              </a:rPr>
-              <a:t>дефект</a:t>
-            </a:r>
-            <a:r>
-              <a:rPr sz="1800" b="1" dirty="0">
-                <a:solidFill>
-                  <a:srgbClr val="000000"/>
-                </a:solidFill>
-                <a:latin typeface="Times New Roman"/>
-                <a:ea typeface="Times New Roman"/>
-                <a:cs typeface="Times New Roman"/>
-              </a:rPr>
-              <a:t> «</a:t>
-            </a:r>
-            <a:r>
-              <a:rPr sz="1800" b="1" dirty="0" err="1">
-                <a:solidFill>
-                  <a:srgbClr val="000000"/>
-                </a:solidFill>
-                <a:latin typeface="Times New Roman"/>
-                <a:ea typeface="Times New Roman"/>
-                <a:cs typeface="Times New Roman"/>
-              </a:rPr>
-              <a:t>спагетти</a:t>
-            </a:r>
-            <a:r>
-              <a:rPr sz="1800" b="1" dirty="0">
-                <a:solidFill>
-                  <a:srgbClr val="000000"/>
-                </a:solidFill>
-                <a:latin typeface="Times New Roman"/>
-                <a:ea typeface="Times New Roman"/>
-                <a:cs typeface="Times New Roman"/>
-              </a:rPr>
-              <a:t>»</a:t>
-            </a:r>
-            <a:r>
-              <a:rPr sz="1800" b="0" dirty="0">
-                <a:solidFill>
-                  <a:srgbClr val="000000"/>
-                </a:solidFill>
-                <a:latin typeface="Times New Roman"/>
-                <a:ea typeface="Times New Roman"/>
-                <a:cs typeface="Times New Roman"/>
-              </a:rPr>
-              <a:t>.</a:t>
-            </a:r>
-            <a:endParaRPr dirty="0"/>
+              <a:t>самого 3D-принтера.</a:t>
+            </a:r>
+            <a:endParaRPr lang="ru-RU" dirty="0"/>
           </a:p>
         </p:txBody>
       </p:sp>
@@ -5321,8 +5705,8 @@
         </p:nvSpPr>
         <p:spPr>
           <a:xfrm>
-            <a:off x="6002915" y="5906647"/>
-            <a:ext cx="2868613" cy="579120"/>
+            <a:off x="6440105" y="2547592"/>
+            <a:ext cx="2182057" cy="579120"/>
           </a:xfrm>
           <a:prstGeom prst="rect">
             <a:avLst/>
@@ -5357,7 +5741,7 @@
               </a:defRPr>
             </a:pPr>
             <a:r>
-              <a:rPr sz="1600" b="0">
+              <a:rPr sz="1600" b="0" dirty="0" err="1">
                 <a:solidFill>
                   <a:srgbClr val="000000"/>
                 </a:solidFill>
@@ -5365,29 +5749,138 @@
                 <a:ea typeface="Times New Roman"/>
                 <a:cs typeface="Times New Roman"/>
               </a:rPr>
-              <a:t>Рис. 1 – Дефект типа «спагетти»</a:t>
-            </a:r>
-          </a:p>
-        </p:txBody>
-      </p:sp>
-      <p:sp>
-        <p:nvSpPr>
-          <p:cNvPr id="30" name="TextBox 29">
-            <a:extLst>
-              <a:ext uri="{FF2B5EF4-FFF2-40B4-BE49-F238E27FC236}">
-                <a16:creationId xmlns:a16="http://schemas.microsoft.com/office/drawing/2014/main" id="{E103B4DB-8439-9822-A8EA-B3F1D6AB4219}"/>
-              </a:ext>
-            </a:extLst>
-          </p:cNvPr>
-          <p:cNvSpPr>
-            <a:spLocks noGrp="1"/>
-          </p:cNvSpPr>
+              <a:t>Рис</a:t>
+            </a:r>
+            <a:r>
+              <a:rPr sz="1600" b="0" dirty="0">
+                <a:solidFill>
+                  <a:srgbClr val="000000"/>
+                </a:solidFill>
+                <a:latin typeface="Times New Roman"/>
+                <a:ea typeface="Times New Roman"/>
+                <a:cs typeface="Times New Roman"/>
+              </a:rPr>
+              <a:t>. 1 – </a:t>
+            </a:r>
+            <a:r>
+              <a:rPr sz="1600" b="0" dirty="0" err="1">
+                <a:solidFill>
+                  <a:srgbClr val="000000"/>
+                </a:solidFill>
+                <a:latin typeface="Times New Roman"/>
+                <a:ea typeface="Times New Roman"/>
+                <a:cs typeface="Times New Roman"/>
+              </a:rPr>
+              <a:t>Дефект</a:t>
+            </a:r>
+            <a:r>
+              <a:rPr sz="1600" b="0" dirty="0">
+                <a:solidFill>
+                  <a:srgbClr val="000000"/>
+                </a:solidFill>
+                <a:latin typeface="Times New Roman"/>
+                <a:ea typeface="Times New Roman"/>
+                <a:cs typeface="Times New Roman"/>
+              </a:rPr>
+              <a:t> </a:t>
+            </a:r>
+            <a:r>
+              <a:rPr sz="1600" b="0" dirty="0" err="1">
+                <a:solidFill>
+                  <a:srgbClr val="000000"/>
+                </a:solidFill>
+                <a:latin typeface="Times New Roman"/>
+                <a:ea typeface="Times New Roman"/>
+                <a:cs typeface="Times New Roman"/>
+              </a:rPr>
+              <a:t>типа</a:t>
+            </a:r>
+            <a:r>
+              <a:rPr sz="1600" b="0" dirty="0">
+                <a:solidFill>
+                  <a:srgbClr val="000000"/>
+                </a:solidFill>
+                <a:latin typeface="Times New Roman"/>
+                <a:ea typeface="Times New Roman"/>
+                <a:cs typeface="Times New Roman"/>
+              </a:rPr>
+              <a:t> «</a:t>
+            </a:r>
+            <a:r>
+              <a:rPr sz="1600" b="0" dirty="0" err="1">
+                <a:solidFill>
+                  <a:srgbClr val="000000"/>
+                </a:solidFill>
+                <a:latin typeface="Times New Roman"/>
+                <a:ea typeface="Times New Roman"/>
+                <a:cs typeface="Times New Roman"/>
+              </a:rPr>
+              <a:t>спагетти</a:t>
+            </a:r>
+            <a:r>
+              <a:rPr sz="1600" b="0" dirty="0">
+                <a:solidFill>
+                  <a:srgbClr val="000000"/>
+                </a:solidFill>
+                <a:latin typeface="Times New Roman"/>
+                <a:ea typeface="Times New Roman"/>
+                <a:cs typeface="Times New Roman"/>
+              </a:rPr>
+              <a:t>»</a:t>
+            </a:r>
+          </a:p>
+        </p:txBody>
+      </p:sp>
+      <p:pic>
+        <p:nvPicPr>
+          <p:cNvPr id="4" name="Рисунок 3" descr="Изображение выглядит как искусство, дизайн, соединитель, свет&#10;&#10;Содержимое, созданное ИИ, может быть неверным.">
+            <a:extLst>
+              <a:ext uri="{FF2B5EF4-FFF2-40B4-BE49-F238E27FC236}">
+                <a16:creationId xmlns:a16="http://schemas.microsoft.com/office/drawing/2014/main" id="{AE67ED3C-CB37-618A-EEBF-9C9FF1AB5D40}"/>
+              </a:ext>
+            </a:extLst>
+          </p:cNvPr>
+          <p:cNvPicPr>
+            <a:picLocks noChangeAspect="1"/>
+          </p:cNvPicPr>
           <p:nvPr/>
-        </p:nvSpPr>
+        </p:nvPicPr>
+        <p:blipFill>
+          <a:blip r:embed="rId4"/>
+          <a:srcRect l="6291" t="18812" r="21153" b="24354"/>
+          <a:stretch/>
+        </p:blipFill>
         <p:spPr>
           <a:xfrm>
-            <a:off x="277897" y="3056229"/>
-            <a:ext cx="5718578" cy="2560320"/>
+            <a:off x="6333293" y="704535"/>
+            <a:ext cx="2288869" cy="1792981"/>
+          </a:xfrm>
+          <a:prstGeom prst="rect">
+            <a:avLst/>
+          </a:prstGeom>
+          <a:ln w="28575">
+            <a:noFill/>
+          </a:ln>
+        </p:spPr>
+      </p:pic>
+      <p:sp>
+        <p:nvSpPr>
+          <p:cNvPr id="6" name="TextBox 2">
+            <a:extLst>
+              <a:ext uri="{FF2B5EF4-FFF2-40B4-BE49-F238E27FC236}">
+                <a16:creationId xmlns:a16="http://schemas.microsoft.com/office/drawing/2014/main" id="{452C65C1-2992-0840-D7B0-DF2AD9057D63}"/>
+              </a:ext>
+            </a:extLst>
+          </p:cNvPr>
+          <p:cNvSpPr>
+            <a:spLocks noGrp="1"/>
+          </p:cNvSpPr>
+          <p:nvPr/>
+        </p:nvSpPr>
+        <p:spPr>
+          <a:xfrm>
+            <a:off x="277897" y="3017804"/>
+            <a:ext cx="4637770" cy="2791593"/>
           </a:xfrm>
           <a:prstGeom prst="rect">
             <a:avLst/>
@@ -5417,14 +5910,7 @@
             </a:defPPr>
           </a:lstStyle>
           <a:p>
-            <a:pPr algn="ctr">
-              <a:spcBef>
-                <a:spcPts val="0"/>
-              </a:spcBef>
-              <a:spcAft>
-                <a:spcPts val="0"/>
-              </a:spcAft>
-              <a:buNone/>
+            <a:pPr algn="l">
               <a:defRPr sz="1800" b="0">
                 <a:solidFill>
                   <a:srgbClr val="000000"/>
@@ -5435,40 +5921,85 @@
               </a:defRPr>
             </a:pPr>
             <a:r>
-              <a:rPr dirty="0" err="1"/>
-              <a:t>Последствия</a:t>
-            </a:r>
-            <a:r>
-              <a:rPr dirty="0"/>
-              <a:t> и </a:t>
-            </a:r>
-            <a:r>
-              <a:rPr dirty="0" err="1"/>
-              <a:t>способ</a:t>
-            </a:r>
-            <a:r>
-              <a:rPr dirty="0"/>
-              <a:t> </a:t>
-            </a:r>
-            <a:r>
-              <a:rPr dirty="0" err="1"/>
-              <a:t>решения</a:t>
-            </a:r>
-            <a:r>
-              <a:rPr dirty="0"/>
-              <a:t>:</a:t>
-            </a:r>
-          </a:p>
-          <a:p>
-            <a:pPr marL="228600" indent="-228600">
-              <a:spcBef>
-                <a:spcPts val="0"/>
-              </a:spcBef>
-              <a:spcAft>
-                <a:spcPts val="0"/>
-              </a:spcAft>
-              <a:buChar char="•"/>
-              <a:defRPr sz="1800" b="0">
+              <a:rPr lang="ru-RU" dirty="0">
+                <a:solidFill>
+                  <a:srgbClr val="000000"/>
+                </a:solidFill>
+                <a:latin typeface="Times New Roman"/>
+                <a:ea typeface="Times New Roman"/>
+                <a:cs typeface="Times New Roman"/>
+              </a:rPr>
+              <a:t>Проблему удалось подтвердить на ферме Волгоградской компании «</a:t>
+            </a:r>
+            <a:r>
+              <a:rPr lang="ru-RU" dirty="0" err="1">
+                <a:solidFill>
+                  <a:srgbClr val="000000"/>
+                </a:solidFill>
+                <a:latin typeface="Times New Roman"/>
+                <a:ea typeface="Times New Roman"/>
+                <a:cs typeface="Times New Roman"/>
+              </a:rPr>
+              <a:t>Stereotech</a:t>
+            </a:r>
+            <a:r>
+              <a:rPr lang="ru-RU" dirty="0">
+                <a:solidFill>
+                  <a:srgbClr val="000000"/>
+                </a:solidFill>
+                <a:latin typeface="Times New Roman"/>
+                <a:ea typeface="Times New Roman"/>
+                <a:cs typeface="Times New Roman"/>
+              </a:rPr>
+              <a:t>». По накопленной статистике принтеров с фермы, 26,7% заданий были отменены оператором вручную из-за подобных сбоев. Статистика имеет погрешность, так как часть успешных заданий — это печати, когда оператор не мог отменить задачу, хотя сбой был, а часть отмен не связаны со сбоем.</a:t>
+            </a:r>
+            <a:endParaRPr lang="ru-RU" dirty="0"/>
+          </a:p>
+        </p:txBody>
+      </p:sp>
+      <p:sp>
+        <p:nvSpPr>
+          <p:cNvPr id="12" name="TextBox 26">
+            <a:extLst>
+              <a:ext uri="{FF2B5EF4-FFF2-40B4-BE49-F238E27FC236}">
+                <a16:creationId xmlns:a16="http://schemas.microsoft.com/office/drawing/2014/main" id="{DC9D2F2B-4F62-AFAE-5BC3-F6D246AAE8E4}"/>
+              </a:ext>
+            </a:extLst>
+          </p:cNvPr>
+          <p:cNvSpPr>
+            <a:spLocks noGrp="1"/>
+          </p:cNvSpPr>
+          <p:nvPr/>
+        </p:nvSpPr>
+        <p:spPr>
+          <a:xfrm>
+            <a:off x="4868975" y="6014767"/>
+            <a:ext cx="4073130" cy="579120"/>
+          </a:xfrm>
+          <a:prstGeom prst="rect">
+            <a:avLst/>
+          </a:prstGeom>
+          <a:noFill/>
+        </p:spPr>
+        <p:txBody>
+          <a:bodyPr rot="0" spcFirstLastPara="0" vert="horz" wrap="square" lIns="91440" tIns="45720" rIns="91440" bIns="45720" anchor="ctr">
+            <a:noAutofit/>
+          </a:bodyPr>
+          <a:lstStyle>
+            <a:defPPr algn="l">
+              <a:defRPr sz="1600" b="0">
+                <a:solidFill>
+                  <a:srgbClr val="000000"/>
+                </a:solidFill>
+                <a:latin typeface="Times New Roman"/>
+                <a:ea typeface="Times New Roman"/>
+                <a:cs typeface="Times New Roman"/>
+              </a:defRPr>
+            </a:defPPr>
+          </a:lstStyle>
+          <a:p>
+            <a:pPr algn="ctr">
+              <a:defRPr sz="1600" b="0">
                 <a:solidFill>
                   <a:srgbClr val="000000"/>
                 </a:solidFill>
@@ -5478,39 +6009,7 @@
               </a:defRPr>
             </a:pPr>
             <a:r>
-              <a:rPr dirty="0" err="1"/>
-              <a:t>Продолжение</a:t>
-            </a:r>
-            <a:r>
-              <a:rPr dirty="0"/>
-              <a:t> </a:t>
-            </a:r>
-            <a:r>
-              <a:rPr dirty="0" err="1"/>
-              <a:t>неудачной</a:t>
-            </a:r>
-            <a:r>
-              <a:rPr dirty="0"/>
-              <a:t> </a:t>
-            </a:r>
-            <a:r>
-              <a:rPr dirty="0" err="1"/>
-              <a:t>печати</a:t>
-            </a:r>
-            <a:r>
-              <a:rPr dirty="0"/>
-              <a:t> </a:t>
-            </a:r>
-            <a:r>
-              <a:rPr dirty="0" err="1"/>
-              <a:t>приводит</a:t>
-            </a:r>
-            <a:r>
-              <a:rPr dirty="0"/>
-              <a:t> к </a:t>
-            </a:r>
-            <a:r>
-              <a:rPr sz="1800" b="1" dirty="0" err="1">
+              <a:rPr sz="1600" b="0" dirty="0" err="1">
                 <a:solidFill>
                   <a:srgbClr val="000000"/>
                 </a:solidFill>
@@ -5518,10 +6017,10 @@
                 <a:ea typeface="Times New Roman"/>
                 <a:cs typeface="Times New Roman"/>
               </a:rPr>
-              <a:t>потере</a:t>
-            </a:r>
-            <a:r>
-              <a:rPr sz="1800" b="1" dirty="0">
+              <a:t>Рис</a:t>
+            </a:r>
+            <a:r>
+              <a:rPr sz="1600" b="0" dirty="0">
                 <a:solidFill>
                   <a:srgbClr val="000000"/>
                 </a:solidFill>
@@ -5529,10 +6028,10 @@
                 <a:ea typeface="Times New Roman"/>
                 <a:cs typeface="Times New Roman"/>
               </a:rPr>
-              <a:t> </a:t>
-            </a:r>
-            <a:r>
-              <a:rPr sz="1800" b="1" dirty="0" err="1">
+              <a:t>. </a:t>
+            </a:r>
+            <a:r>
+              <a:rPr lang="ru-RU" sz="1600" b="0" dirty="0">
                 <a:solidFill>
                   <a:srgbClr val="000000"/>
                 </a:solidFill>
@@ -5540,10 +6039,10 @@
                 <a:ea typeface="Times New Roman"/>
                 <a:cs typeface="Times New Roman"/>
               </a:rPr>
-              <a:t>материала</a:t>
-            </a:r>
-            <a:r>
-              <a:rPr sz="1800" b="1" dirty="0">
+              <a:t>2</a:t>
+            </a:r>
+            <a:r>
+              <a:rPr sz="1600" b="0" dirty="0">
                 <a:solidFill>
                   <a:srgbClr val="000000"/>
                 </a:solidFill>
@@ -5551,10 +6050,10 @@
                 <a:ea typeface="Times New Roman"/>
                 <a:cs typeface="Times New Roman"/>
               </a:rPr>
-              <a:t> и </a:t>
-            </a:r>
-            <a:r>
-              <a:rPr sz="1800" b="1" dirty="0" err="1">
+              <a:t> – </a:t>
+            </a:r>
+            <a:r>
+              <a:rPr lang="ru-RU" sz="1600" b="0" dirty="0">
                 <a:solidFill>
                   <a:srgbClr val="000000"/>
                 </a:solidFill>
@@ -5562,10 +6061,10 @@
                 <a:ea typeface="Times New Roman"/>
                 <a:cs typeface="Times New Roman"/>
               </a:rPr>
-              <a:t>машинного</a:t>
-            </a:r>
-            <a:r>
-              <a:rPr sz="1800" b="1" dirty="0">
+              <a:t>Диаграмма статистики печатей на ферме компании «</a:t>
+            </a:r>
+            <a:r>
+              <a:rPr lang="en-US" sz="1600" b="0" dirty="0" err="1">
                 <a:solidFill>
                   <a:srgbClr val="000000"/>
                 </a:solidFill>
@@ -5573,10 +6072,10 @@
                 <a:ea typeface="Times New Roman"/>
                 <a:cs typeface="Times New Roman"/>
               </a:rPr>
-              <a:t> </a:t>
-            </a:r>
-            <a:r>
-              <a:rPr sz="1800" b="1" dirty="0" err="1">
+              <a:t>Stereotech</a:t>
+            </a:r>
+            <a:r>
+              <a:rPr lang="ru-RU" sz="1600" b="0" dirty="0">
                 <a:solidFill>
                   <a:srgbClr val="000000"/>
                 </a:solidFill>
@@ -5584,22 +6083,67 @@
                 <a:ea typeface="Times New Roman"/>
                 <a:cs typeface="Times New Roman"/>
               </a:rPr>
-              <a:t>времени</a:t>
-            </a:r>
-            <a:r>
-              <a:rPr dirty="0"/>
-              <a:t>.</a:t>
-            </a:r>
-          </a:p>
-          <a:p>
-            <a:pPr marL="228600" indent="-228600">
-              <a:spcBef>
-                <a:spcPts val="0"/>
-              </a:spcBef>
-              <a:spcAft>
-                <a:spcPts val="0"/>
-              </a:spcAft>
-              <a:buChar char="•"/>
+              <a:t>»</a:t>
+            </a:r>
+            <a:endParaRPr sz="1600" b="0" dirty="0">
+              <a:solidFill>
+                <a:srgbClr val="000000"/>
+              </a:solidFill>
+              <a:latin typeface="Times New Roman"/>
+              <a:ea typeface="Times New Roman"/>
+              <a:cs typeface="Times New Roman"/>
+            </a:endParaRPr>
+          </a:p>
+        </p:txBody>
+      </p:sp>
+      <p:sp>
+        <p:nvSpPr>
+          <p:cNvPr id="21" name="TextBox 2">
+            <a:extLst>
+              <a:ext uri="{FF2B5EF4-FFF2-40B4-BE49-F238E27FC236}">
+                <a16:creationId xmlns:a16="http://schemas.microsoft.com/office/drawing/2014/main" id="{776FE2EE-EE34-7E14-84FE-9C2304D04340}"/>
+              </a:ext>
+            </a:extLst>
+          </p:cNvPr>
+          <p:cNvSpPr>
+            <a:spLocks noGrp="1"/>
+          </p:cNvSpPr>
+          <p:nvPr/>
+        </p:nvSpPr>
+        <p:spPr>
+          <a:xfrm>
+            <a:off x="277897" y="5932581"/>
+            <a:ext cx="4637770" cy="743492"/>
+          </a:xfrm>
+          <a:prstGeom prst="rect">
+            <a:avLst/>
+          </a:prstGeom>
+          <a:noFill/>
+          <a:ln>
+            <a:solidFill>
+              <a:schemeClr val="tx1"/>
+            </a:solidFill>
+            <a:prstDash val="dash"/>
+          </a:ln>
+        </p:spPr>
+        <p:txBody>
+          <a:bodyPr rot="0" spcFirstLastPara="0" vert="horz" wrap="square" lIns="91440" tIns="45720" rIns="91440" bIns="45720" anchor="ctr">
+            <a:noAutofit/>
+          </a:bodyPr>
+          <a:lstStyle>
+            <a:defPPr algn="l">
+              <a:defRPr sz="1800" b="0">
+                <a:solidFill>
+                  <a:srgbClr val="000000"/>
+                </a:solidFill>
+                <a:latin typeface="Times New Roman"/>
+                <a:ea typeface="Times New Roman"/>
+                <a:cs typeface="Times New Roman"/>
+              </a:defRPr>
+            </a:defPPr>
+          </a:lstStyle>
+          <a:p>
+            <a:pPr algn="l">
               <a:defRPr sz="1800" b="0">
                 <a:solidFill>
                   <a:srgbClr val="000000"/>
@@ -5610,308 +6154,678 @@
               </a:defRPr>
             </a:pPr>
             <a:r>
-              <a:rPr sz="1800" b="1" dirty="0" err="1">
+              <a:rPr lang="ru-RU" b="1" dirty="0">
                 <a:solidFill>
                   <a:srgbClr val="000000"/>
                 </a:solidFill>
                 <a:latin typeface="Times New Roman"/>
-                <a:ea typeface="Times New Roman"/>
                 <a:cs typeface="Times New Roman"/>
               </a:rPr>
-              <a:t>Камера</a:t>
-            </a:r>
-            <a:r>
-              <a:rPr sz="1800" b="1" dirty="0">
+              <a:t>Предлагаемое</a:t>
+            </a:r>
+            <a:r>
+              <a:rPr lang="ru-RU" dirty="0">
                 <a:solidFill>
                   <a:srgbClr val="000000"/>
                 </a:solidFill>
                 <a:latin typeface="Times New Roman"/>
-                <a:ea typeface="Times New Roman"/>
                 <a:cs typeface="Times New Roman"/>
               </a:rPr>
-              <a:t> и </a:t>
-            </a:r>
-            <a:r>
-              <a:rPr sz="1800" b="1" dirty="0" err="1">
+              <a:t> </a:t>
+            </a:r>
+            <a:r>
+              <a:rPr lang="ru-RU" b="1" dirty="0">
                 <a:solidFill>
                   <a:srgbClr val="000000"/>
                 </a:solidFill>
                 <a:latin typeface="Times New Roman"/>
-                <a:ea typeface="Times New Roman"/>
                 <a:cs typeface="Times New Roman"/>
               </a:rPr>
-              <a:t>свёрточная</a:t>
-            </a:r>
-            <a:r>
-              <a:rPr sz="1800" b="1" dirty="0">
+              <a:t>решение</a:t>
+            </a:r>
+            <a:r>
+              <a:rPr lang="ru-RU" dirty="0">
                 <a:solidFill>
                   <a:srgbClr val="000000"/>
                 </a:solidFill>
                 <a:latin typeface="Times New Roman"/>
-                <a:ea typeface="Times New Roman"/>
                 <a:cs typeface="Times New Roman"/>
               </a:rPr>
-              <a:t> </a:t>
-            </a:r>
-            <a:r>
-              <a:rPr sz="1800" b="1" dirty="0" err="1">
-                <a:solidFill>
-                  <a:srgbClr val="000000"/>
-                </a:solidFill>
+              <a:t>: мониторинг печати с помощью методов машинного зрения.</a:t>
+            </a:r>
+            <a:endParaRPr lang="ru-RU" dirty="0"/>
+          </a:p>
+        </p:txBody>
+      </p:sp>
+    </p:spTree>
+    <p:extLst>
+      <p:ext uri="{BB962C8B-B14F-4D97-AF65-F5344CB8AC3E}">
+        <p14:creationId xmlns:p14="http://schemas.microsoft.com/office/powerpoint/2010/main" val="2011050586"/>
+      </p:ext>
+    </p:extLst>
+  </p:cSld>
+  <p:clrMapOvr>
+    <a:masterClrMapping/>
+  </p:clrMapOvr>
+</p:sld>
+</file>
+
+<file path=ppt/slides/slide4.xml><?xml version="1.0" encoding="utf-8"?>
+<p:sld xmlns:a="http://schemas.openxmlformats.org/drawingml/2006/main" xmlns:r="http://schemas.openxmlformats.org/officeDocument/2006/relationships" xmlns:p="http://schemas.openxmlformats.org/presentationml/2006/main">
+  <p:cSld>
+    <p:spTree>
+      <p:nvGrpSpPr>
+        <p:cNvPr id="1" name="">
+          <a:extLst>
+            <a:ext uri="{FF2B5EF4-FFF2-40B4-BE49-F238E27FC236}">
+              <a16:creationId xmlns:a16="http://schemas.microsoft.com/office/drawing/2014/main" id="{586A209A-B3B7-9043-FC7E-DD693EE6AACA}"/>
+            </a:ext>
+          </a:extLst>
+        </p:cNvPr>
+        <p:cNvGrpSpPr/>
+        <p:nvPr/>
+      </p:nvGrpSpPr>
+      <p:grpSpPr>
+        <a:xfrm>
+          <a:off x="0" y="0"/>
+          <a:ext cx="0" cy="0"/>
+          <a:chOff x="0" y="0"/>
+          <a:chExt cx="0" cy="0"/>
+        </a:xfrm>
+      </p:grpSpPr>
+      <p:sp>
+        <p:nvSpPr>
+          <p:cNvPr id="2" name="Заголовок 1">
+            <a:extLst>
+              <a:ext uri="{FF2B5EF4-FFF2-40B4-BE49-F238E27FC236}">
+                <a16:creationId xmlns:a16="http://schemas.microsoft.com/office/drawing/2014/main" id="{648A91D6-F58A-86A8-231A-A5AC58545903}"/>
+              </a:ext>
+            </a:extLst>
+          </p:cNvPr>
+          <p:cNvSpPr>
+            <a:spLocks noGrp="1"/>
+          </p:cNvSpPr>
+          <p:nvPr>
+            <p:ph type="title"/>
+          </p:nvPr>
+        </p:nvSpPr>
+        <p:spPr>
+          <a:xfrm>
+            <a:off x="628650" y="-104931"/>
+            <a:ext cx="7886700" cy="712868"/>
+          </a:xfrm>
+        </p:spPr>
+        <p:txBody>
+          <a:bodyPr>
+            <a:normAutofit/>
+          </a:bodyPr>
+          <a:lstStyle/>
+          <a:p>
+            <a:pPr algn="ctr"/>
+            <a:r>
+              <a:rPr lang="ru-RU" dirty="0">
+                <a:latin typeface="Times New Roman" panose="02020603050405020304" pitchFamily="18" charset="0"/>
+                <a:ea typeface="Calibri"/>
+                <a:cs typeface="Times New Roman" panose="02020603050405020304" pitchFamily="18" charset="0"/>
+              </a:rPr>
+              <a:t>Обучение нейросети</a:t>
+            </a:r>
+          </a:p>
+        </p:txBody>
+      </p:sp>
+      <p:sp>
+        <p:nvSpPr>
+          <p:cNvPr id="5" name="Замещающий номер слайда 4">
+            <a:extLst>
+              <a:ext uri="{FF2B5EF4-FFF2-40B4-BE49-F238E27FC236}">
+                <a16:creationId xmlns:a16="http://schemas.microsoft.com/office/drawing/2014/main" id="{425BE312-5EC5-E722-FD8E-916DFE636F2B}"/>
+              </a:ext>
+            </a:extLst>
+          </p:cNvPr>
+          <p:cNvSpPr>
+            <a:spLocks noGrp="1"/>
+          </p:cNvSpPr>
+          <p:nvPr>
+            <p:ph type="sldNum" sz="quarter" idx="12"/>
+          </p:nvPr>
+        </p:nvSpPr>
+        <p:spPr>
+          <a:xfrm>
+            <a:off x="7088886" y="6493511"/>
+            <a:ext cx="2057400" cy="365125"/>
+          </a:xfrm>
+        </p:spPr>
+        <p:txBody>
+          <a:bodyPr/>
+          <a:lstStyle/>
+          <a:p>
+            <a:fld id="{D6ED8A53-8D2F-4011-BE06-EDB0774336BA}" type="slidenum">
+              <a:rPr lang="ru-RU" sz="2000" dirty="0" smtClean="0">
+                <a:solidFill>
+                  <a:schemeClr val="tx1"/>
+                </a:solidFill>
+                <a:latin typeface="Times New Roman" panose="02020603050405020304" pitchFamily="18" charset="0"/>
+                <a:cs typeface="Times New Roman" panose="02020603050405020304" pitchFamily="18" charset="0"/>
+              </a:rPr>
+              <a:t>4</a:t>
+            </a:fld>
+            <a:endParaRPr lang="ru-RU" sz="2000">
+              <a:solidFill>
+                <a:schemeClr val="tx1"/>
+              </a:solidFill>
+              <a:latin typeface="Times New Roman" panose="02020603050405020304" pitchFamily="18" charset="0"/>
+              <a:ea typeface="Calibri"/>
+              <a:cs typeface="Times New Roman" panose="02020603050405020304" pitchFamily="18" charset="0"/>
+            </a:endParaRPr>
+          </a:p>
+        </p:txBody>
+      </p:sp>
+      <p:sp>
+        <p:nvSpPr>
+          <p:cNvPr id="14" name="TextBox 13">
+            <a:extLst>
+              <a:ext uri="{FF2B5EF4-FFF2-40B4-BE49-F238E27FC236}">
+                <a16:creationId xmlns:a16="http://schemas.microsoft.com/office/drawing/2014/main" id="{733275A9-2422-EE65-68B7-2EFC7CB717FE}"/>
+              </a:ext>
+            </a:extLst>
+          </p:cNvPr>
+          <p:cNvSpPr txBox="1"/>
+          <p:nvPr/>
+        </p:nvSpPr>
+        <p:spPr>
+          <a:xfrm>
+            <a:off x="174554" y="615748"/>
+            <a:ext cx="4397445" cy="2308324"/>
+          </a:xfrm>
+          <a:prstGeom prst="rect">
+            <a:avLst/>
+          </a:prstGeom>
+          <a:noFill/>
+          <a:ln>
+            <a:solidFill>
+              <a:schemeClr val="tx1"/>
+            </a:solidFill>
+            <a:prstDash val="dash"/>
+          </a:ln>
+        </p:spPr>
+        <p:txBody>
+          <a:bodyPr rot="0" spcFirstLastPara="0" vertOverflow="overflow" horzOverflow="overflow" vert="horz" wrap="square" lIns="91440" tIns="45720" rIns="91440" bIns="45720" numCol="1" spcCol="0" rtlCol="0" fromWordArt="0" anchor="ctr" anchorCtr="0" forceAA="0" compatLnSpc="1">
+            <a:prstTxWarp prst="textNoShape">
+              <a:avLst/>
+            </a:prstTxWarp>
+            <a:spAutoFit/>
+          </a:bodyPr>
+          <a:lstStyle/>
+          <a:p>
+            <a:r>
+              <a:rPr lang="ru-RU" dirty="0">
+                <a:latin typeface="Times New Roman" panose="02020603050405020304" pitchFamily="18" charset="0"/>
+                <a:cs typeface="Times New Roman" panose="02020603050405020304" pitchFamily="18" charset="0"/>
+              </a:rPr>
+              <a:t>Для обнаружения «спагетти» выбрана </a:t>
+            </a:r>
+            <a:r>
+              <a:rPr lang="ru-RU" b="1" dirty="0">
+                <a:latin typeface="Times New Roman" panose="02020603050405020304" pitchFamily="18" charset="0"/>
+                <a:cs typeface="Times New Roman" panose="02020603050405020304" pitchFamily="18" charset="0"/>
+              </a:rPr>
+              <a:t>ResNet18</a:t>
+            </a:r>
+            <a:r>
+              <a:rPr lang="ru-RU" dirty="0">
+                <a:latin typeface="Times New Roman" panose="02020603050405020304" pitchFamily="18" charset="0"/>
+                <a:cs typeface="Times New Roman" panose="02020603050405020304" pitchFamily="18" charset="0"/>
+              </a:rPr>
+              <a:t>. Она решает задачу как бинарную классификацию полного кадра: </a:t>
+            </a:r>
+            <a:r>
+              <a:rPr lang="ru-RU" b="1" dirty="0">
+                <a:latin typeface="Times New Roman" panose="02020603050405020304" pitchFamily="18" charset="0"/>
+                <a:cs typeface="Times New Roman" panose="02020603050405020304" pitchFamily="18" charset="0"/>
+              </a:rPr>
+              <a:t>есть дефект или нет</a:t>
+            </a:r>
+            <a:r>
+              <a:rPr lang="ru-RU" dirty="0">
+                <a:latin typeface="Times New Roman" panose="02020603050405020304" pitchFamily="18" charset="0"/>
+                <a:cs typeface="Times New Roman" panose="02020603050405020304" pitchFamily="18" charset="0"/>
+              </a:rPr>
+              <a:t>. Локализация дефектов рамкой в прошлых работах показала низкую точность. Детекция объектов сохранена только для поиска детали на столе.</a:t>
+            </a:r>
+            <a:endParaRPr lang="ru-RU" dirty="0">
+              <a:solidFill>
+                <a:srgbClr val="000000"/>
+              </a:solidFill>
+              <a:latin typeface="Times New Roman" panose="02020603050405020304" pitchFamily="18" charset="0"/>
+              <a:cs typeface="Times New Roman" panose="02020603050405020304" pitchFamily="18" charset="0"/>
+            </a:endParaRPr>
+          </a:p>
+        </p:txBody>
+      </p:sp>
+      <p:sp>
+        <p:nvSpPr>
+          <p:cNvPr id="22" name="TextBox 21">
+            <a:extLst>
+              <a:ext uri="{FF2B5EF4-FFF2-40B4-BE49-F238E27FC236}">
+                <a16:creationId xmlns:a16="http://schemas.microsoft.com/office/drawing/2014/main" id="{EED866B5-82E1-33E1-5DF7-1DCBBD9DCDF8}"/>
+              </a:ext>
+            </a:extLst>
+          </p:cNvPr>
+          <p:cNvSpPr txBox="1"/>
+          <p:nvPr/>
+        </p:nvSpPr>
+        <p:spPr>
+          <a:xfrm>
+            <a:off x="4771554" y="615748"/>
+            <a:ext cx="4197892" cy="1477328"/>
+          </a:xfrm>
+          <a:prstGeom prst="rect">
+            <a:avLst/>
+          </a:prstGeom>
+          <a:noFill/>
+          <a:ln>
+            <a:solidFill>
+              <a:schemeClr val="tx1"/>
+            </a:solidFill>
+            <a:prstDash val="dash"/>
+          </a:ln>
+        </p:spPr>
+        <p:txBody>
+          <a:bodyPr rot="0" spcFirstLastPara="0" vertOverflow="overflow" horzOverflow="overflow" vert="horz" wrap="square" lIns="91440" tIns="45720" rIns="91440" bIns="45720" numCol="1" spcCol="0" rtlCol="0" fromWordArt="0" anchor="ctr" anchorCtr="0" forceAA="0" compatLnSpc="1">
+            <a:prstTxWarp prst="textNoShape">
+              <a:avLst/>
+            </a:prstTxWarp>
+            <a:spAutoFit/>
+          </a:bodyPr>
+          <a:lstStyle/>
+          <a:p>
+            <a:r>
+              <a:rPr lang="ru-RU" dirty="0">
+                <a:latin typeface="Times New Roman" panose="02020603050405020304" pitchFamily="18" charset="0"/>
+                <a:cs typeface="Times New Roman" panose="02020603050405020304" pitchFamily="18" charset="0"/>
+              </a:rPr>
+              <a:t>Датасет содержит </a:t>
+            </a:r>
+            <a:r>
+              <a:rPr lang="ru-RU" b="1" dirty="0">
+                <a:latin typeface="Times New Roman" panose="02020603050405020304" pitchFamily="18" charset="0"/>
+                <a:cs typeface="Times New Roman" panose="02020603050405020304" pitchFamily="18" charset="0"/>
+              </a:rPr>
+              <a:t>16 014 кадров без аугментаций</a:t>
+            </a:r>
+            <a:r>
+              <a:rPr lang="ru-RU" dirty="0">
+                <a:latin typeface="Times New Roman" panose="02020603050405020304" pitchFamily="18" charset="0"/>
+                <a:cs typeface="Times New Roman" panose="02020603050405020304" pitchFamily="18" charset="0"/>
+              </a:rPr>
+              <a:t>: 4 574 кадра со «спагетти» и 11 440 кадров без видимых признаков этого дефекта. Выборки делились по соотношению 60/20/20.</a:t>
+            </a:r>
+          </a:p>
+        </p:txBody>
+      </p:sp>
+      <p:sp>
+        <p:nvSpPr>
+          <p:cNvPr id="25" name="TextBox 24">
+            <a:extLst>
+              <a:ext uri="{FF2B5EF4-FFF2-40B4-BE49-F238E27FC236}">
+                <a16:creationId xmlns:a16="http://schemas.microsoft.com/office/drawing/2014/main" id="{C8B6B692-286B-EE82-F648-38C45239ECF9}"/>
+              </a:ext>
+            </a:extLst>
+          </p:cNvPr>
+          <p:cNvSpPr txBox="1"/>
+          <p:nvPr/>
+        </p:nvSpPr>
+        <p:spPr>
+          <a:xfrm>
+            <a:off x="4771554" y="2274838"/>
+            <a:ext cx="4197892" cy="2308324"/>
+          </a:xfrm>
+          <a:prstGeom prst="rect">
+            <a:avLst/>
+          </a:prstGeom>
+          <a:noFill/>
+          <a:ln>
+            <a:solidFill>
+              <a:schemeClr val="tx1"/>
+            </a:solidFill>
+            <a:prstDash val="dash"/>
+          </a:ln>
+        </p:spPr>
+        <p:txBody>
+          <a:bodyPr rot="0" spcFirstLastPara="0" vertOverflow="overflow" horzOverflow="overflow" vert="horz" wrap="square" lIns="91440" tIns="45720" rIns="91440" bIns="45720" numCol="1" spcCol="0" rtlCol="0" fromWordArt="0" anchor="ctr" anchorCtr="0" forceAA="0" compatLnSpc="1">
+            <a:prstTxWarp prst="textNoShape">
+              <a:avLst/>
+            </a:prstTxWarp>
+            <a:spAutoFit/>
+          </a:bodyPr>
+          <a:lstStyle/>
+          <a:p>
+            <a:r>
+              <a:rPr lang="ru-RU" dirty="0">
+                <a:latin typeface="Times New Roman" panose="02020603050405020304" pitchFamily="18" charset="0"/>
+                <a:cs typeface="Times New Roman" panose="02020603050405020304" pitchFamily="18" charset="0"/>
+              </a:rPr>
+              <a:t>Для каждой эпохи обучения сохранялся </a:t>
+            </a:r>
+            <a:r>
+              <a:rPr lang="ru-RU" b="1" dirty="0">
+                <a:latin typeface="Times New Roman" panose="02020603050405020304" pitchFamily="18" charset="0"/>
+                <a:cs typeface="Times New Roman" panose="02020603050405020304" pitchFamily="18" charset="0"/>
+              </a:rPr>
+              <a:t>баланс классов 50/50</a:t>
+            </a:r>
+            <a:r>
+              <a:rPr lang="ru-RU" dirty="0">
+                <a:latin typeface="Times New Roman" panose="02020603050405020304" pitchFamily="18" charset="0"/>
+                <a:cs typeface="Times New Roman" panose="02020603050405020304" pitchFamily="18" charset="0"/>
+              </a:rPr>
+              <a:t>: использовались все 2 746 кадров со «спагетти» и столько же случайно выбранных кадров без дефекта. Всего модель получала </a:t>
+            </a:r>
+            <a:r>
+              <a:rPr lang="ru-RU" b="1" dirty="0">
+                <a:latin typeface="Times New Roman" panose="02020603050405020304" pitchFamily="18" charset="0"/>
+                <a:cs typeface="Times New Roman" panose="02020603050405020304" pitchFamily="18" charset="0"/>
+              </a:rPr>
+              <a:t>5 492 изображения за эпоху</a:t>
+            </a:r>
+            <a:r>
+              <a:rPr lang="ru-RU" dirty="0">
+                <a:latin typeface="Times New Roman" panose="02020603050405020304" pitchFamily="18" charset="0"/>
+                <a:cs typeface="Times New Roman" panose="02020603050405020304" pitchFamily="18" charset="0"/>
+              </a:rPr>
+              <a:t>. </a:t>
+            </a:r>
+            <a:r>
+              <a:rPr lang="ru-RU" dirty="0" err="1">
+                <a:latin typeface="Times New Roman" panose="02020603050405020304" pitchFamily="18" charset="0"/>
+                <a:cs typeface="Times New Roman" panose="02020603050405020304" pitchFamily="18" charset="0"/>
+              </a:rPr>
+              <a:t>Валидационная</a:t>
+            </a:r>
+            <a:r>
+              <a:rPr lang="ru-RU" dirty="0">
+                <a:latin typeface="Times New Roman" panose="02020603050405020304" pitchFamily="18" charset="0"/>
+                <a:cs typeface="Times New Roman" panose="02020603050405020304" pitchFamily="18" charset="0"/>
+              </a:rPr>
+              <a:t> и тестовая выборки содержат только исходные изображения без аугментаций.</a:t>
+            </a:r>
+          </a:p>
+        </p:txBody>
+      </p:sp>
+    </p:spTree>
+    <p:extLst>
+      <p:ext uri="{BB962C8B-B14F-4D97-AF65-F5344CB8AC3E}">
+        <p14:creationId xmlns:p14="http://schemas.microsoft.com/office/powerpoint/2010/main" val="2707964732"/>
+      </p:ext>
+    </p:extLst>
+  </p:cSld>
+  <p:clrMapOvr>
+    <a:masterClrMapping/>
+  </p:clrMapOvr>
+</p:sld>
+</file>
+
+<file path=ppt/slides/slide5.xml><?xml version="1.0" encoding="utf-8"?>
+<p:sld xmlns:a="http://schemas.openxmlformats.org/drawingml/2006/main" xmlns:r="http://schemas.openxmlformats.org/officeDocument/2006/relationships" xmlns:p="http://schemas.openxmlformats.org/presentationml/2006/main">
+  <p:cSld>
+    <p:spTree>
+      <p:nvGrpSpPr>
+        <p:cNvPr id="1" name="">
+          <a:extLst>
+            <a:ext uri="{FF2B5EF4-FFF2-40B4-BE49-F238E27FC236}">
+              <a16:creationId xmlns:a16="http://schemas.microsoft.com/office/drawing/2014/main" id="{829A4193-2A96-4292-27DF-7C8F10ED51F0}"/>
+            </a:ext>
+          </a:extLst>
+        </p:cNvPr>
+        <p:cNvGrpSpPr/>
+        <p:nvPr/>
+      </p:nvGrpSpPr>
+      <p:grpSpPr>
+        <a:xfrm>
+          <a:off x="0" y="0"/>
+          <a:ext cx="0" cy="0"/>
+          <a:chOff x="0" y="0"/>
+          <a:chExt cx="0" cy="0"/>
+        </a:xfrm>
+      </p:grpSpPr>
+      <p:sp>
+        <p:nvSpPr>
+          <p:cNvPr id="2" name="Заголовок 1">
+            <a:extLst>
+              <a:ext uri="{FF2B5EF4-FFF2-40B4-BE49-F238E27FC236}">
+                <a16:creationId xmlns:a16="http://schemas.microsoft.com/office/drawing/2014/main" id="{F71B51DD-8424-3898-F322-045B44C926E8}"/>
+              </a:ext>
+            </a:extLst>
+          </p:cNvPr>
+          <p:cNvSpPr>
+            <a:spLocks noGrp="1"/>
+          </p:cNvSpPr>
+          <p:nvPr>
+            <p:ph type="title"/>
+          </p:nvPr>
+        </p:nvSpPr>
+        <p:spPr>
+          <a:xfrm>
+            <a:off x="628650" y="9098"/>
+            <a:ext cx="7886700" cy="712868"/>
+          </a:xfrm>
+        </p:spPr>
+        <p:txBody>
+          <a:bodyPr>
+            <a:normAutofit/>
+          </a:bodyPr>
+          <a:lstStyle/>
+          <a:p>
+            <a:pPr algn="ctr"/>
+            <a:r>
+              <a:rPr lang="ru-RU" dirty="0">
                 <a:latin typeface="Times New Roman"/>
-                <a:ea typeface="Times New Roman"/>
+                <a:ea typeface="Calibri"/>
                 <a:cs typeface="Times New Roman"/>
               </a:rPr>
-              <a:t>нейронная</a:t>
-            </a:r>
-            <a:r>
-              <a:rPr sz="1800" b="1" dirty="0">
-                <a:solidFill>
-                  <a:srgbClr val="000000"/>
+              <a:t>Обработка на сервере</a:t>
+            </a:r>
+          </a:p>
+        </p:txBody>
+      </p:sp>
+      <p:sp>
+        <p:nvSpPr>
+          <p:cNvPr id="4" name="Текстовое поле 3">
+            <a:extLst>
+              <a:ext uri="{FF2B5EF4-FFF2-40B4-BE49-F238E27FC236}">
+                <a16:creationId xmlns:a16="http://schemas.microsoft.com/office/drawing/2014/main" id="{5E8559DA-50BE-07AC-B0EB-3414FBFB6481}"/>
+              </a:ext>
+            </a:extLst>
+          </p:cNvPr>
+          <p:cNvSpPr txBox="1"/>
+          <p:nvPr/>
+        </p:nvSpPr>
+        <p:spPr>
+          <a:xfrm>
+            <a:off x="3775710" y="5640705"/>
+            <a:ext cx="309880" cy="368300"/>
+          </a:xfrm>
+          <a:prstGeom prst="rect">
+            <a:avLst/>
+          </a:prstGeom>
+          <a:noFill/>
+        </p:spPr>
+        <p:txBody>
+          <a:bodyPr wrap="none" rtlCol="0">
+            <a:spAutoFit/>
+          </a:bodyPr>
+          <a:lstStyle/>
+          <a:p>
+            <a:endParaRPr lang="ru-RU" altLang="en-US"/>
+          </a:p>
+        </p:txBody>
+      </p:sp>
+      <p:sp>
+        <p:nvSpPr>
+          <p:cNvPr id="5" name="Замещающий номер слайда 4">
+            <a:extLst>
+              <a:ext uri="{FF2B5EF4-FFF2-40B4-BE49-F238E27FC236}">
+                <a16:creationId xmlns:a16="http://schemas.microsoft.com/office/drawing/2014/main" id="{28EFF76E-32CA-AB56-A1FE-FC86064D66B4}"/>
+              </a:ext>
+            </a:extLst>
+          </p:cNvPr>
+          <p:cNvSpPr>
+            <a:spLocks noGrp="1"/>
+          </p:cNvSpPr>
+          <p:nvPr>
+            <p:ph type="sldNum" sz="quarter" idx="12"/>
+          </p:nvPr>
+        </p:nvSpPr>
+        <p:spPr>
+          <a:xfrm>
+            <a:off x="7088886" y="6493511"/>
+            <a:ext cx="2057400" cy="365125"/>
+          </a:xfrm>
+        </p:spPr>
+        <p:txBody>
+          <a:bodyPr/>
+          <a:lstStyle/>
+          <a:p>
+            <a:fld id="{D6ED8A53-8D2F-4011-BE06-EDB0774336BA}" type="slidenum">
+              <a:rPr lang="ru-RU" sz="2000" dirty="0" smtClean="0">
+                <a:solidFill>
+                  <a:schemeClr val="tx1"/>
                 </a:solidFill>
                 <a:latin typeface="Times New Roman"/>
-                <a:ea typeface="Times New Roman"/>
                 <a:cs typeface="Times New Roman"/>
               </a:rPr>
-              <a:t> </a:t>
-            </a:r>
-            <a:r>
-              <a:rPr sz="1800" b="1" dirty="0" err="1">
-                <a:solidFill>
-                  <a:srgbClr val="000000"/>
-                </a:solidFill>
+              <a:t>5</a:t>
+            </a:fld>
+            <a:endParaRPr lang="ru-RU" sz="2000">
+              <a:solidFill>
+                <a:schemeClr val="tx1"/>
+              </a:solidFill>
+              <a:latin typeface="Times New Roman"/>
+              <a:ea typeface="Calibri"/>
+              <a:cs typeface="Times New Roman"/>
+            </a:endParaRPr>
+          </a:p>
+        </p:txBody>
+      </p:sp>
+      <p:sp>
+        <p:nvSpPr>
+          <p:cNvPr id="8" name="TextBox 7">
+            <a:extLst>
+              <a:ext uri="{FF2B5EF4-FFF2-40B4-BE49-F238E27FC236}">
+                <a16:creationId xmlns:a16="http://schemas.microsoft.com/office/drawing/2014/main" id="{3FDAB50E-3BD8-57A2-B047-497A3FD50648}"/>
+              </a:ext>
+            </a:extLst>
+          </p:cNvPr>
+          <p:cNvSpPr txBox="1"/>
+          <p:nvPr/>
+        </p:nvSpPr>
+        <p:spPr>
+          <a:xfrm>
+            <a:off x="186213" y="875407"/>
+            <a:ext cx="2920514" cy="1477328"/>
+          </a:xfrm>
+          <a:prstGeom prst="rect">
+            <a:avLst/>
+          </a:prstGeom>
+          <a:noFill/>
+          <a:ln>
+            <a:solidFill>
+              <a:schemeClr val="tx1"/>
+            </a:solidFill>
+            <a:prstDash val="dash"/>
+          </a:ln>
+        </p:spPr>
+        <p:txBody>
+          <a:bodyPr rot="0" spcFirstLastPara="0" vertOverflow="overflow" horzOverflow="overflow" vert="horz" wrap="square" lIns="91440" tIns="45720" rIns="91440" bIns="45720" numCol="1" spcCol="0" rtlCol="0" fromWordArt="0" anchor="ctr" anchorCtr="0" forceAA="0" compatLnSpc="1">
+            <a:prstTxWarp prst="textNoShape">
+              <a:avLst/>
+            </a:prstTxWarp>
+            <a:spAutoFit/>
+          </a:bodyPr>
+          <a:lstStyle/>
+          <a:p>
+            <a:pPr algn="ctr"/>
+            <a:r>
+              <a:rPr lang="ru-RU" dirty="0">
                 <a:latin typeface="Times New Roman"/>
-                <a:ea typeface="Times New Roman"/>
-                <a:cs typeface="Times New Roman"/>
-              </a:rPr>
-              <a:t>сеть</a:t>
-            </a:r>
-            <a:r>
-              <a:rPr dirty="0"/>
-              <a:t> </a:t>
-            </a:r>
-            <a:r>
-              <a:rPr dirty="0" err="1"/>
-              <a:t>обнаруживают</a:t>
-            </a:r>
-            <a:r>
-              <a:rPr dirty="0"/>
-              <a:t> «</a:t>
-            </a:r>
-            <a:r>
-              <a:rPr dirty="0" err="1"/>
-              <a:t>спагетти</a:t>
-            </a:r>
-            <a:r>
-              <a:rPr dirty="0"/>
-              <a:t>» </a:t>
-            </a:r>
-            <a:r>
-              <a:rPr dirty="0" err="1"/>
-              <a:t>по</a:t>
-            </a:r>
-            <a:r>
-              <a:rPr dirty="0"/>
-              <a:t> </a:t>
-            </a:r>
-            <a:r>
-              <a:rPr dirty="0" err="1"/>
-              <a:t>изображениям</a:t>
-            </a:r>
-            <a:r>
-              <a:rPr dirty="0"/>
-              <a:t>.</a:t>
-            </a:r>
-          </a:p>
-          <a:p>
-            <a:pPr marL="228600" indent="-228600">
-              <a:spcBef>
-                <a:spcPts val="0"/>
-              </a:spcBef>
-              <a:spcAft>
-                <a:spcPts val="0"/>
-              </a:spcAft>
+                <a:ea typeface="+mn-lt"/>
+                <a:cs typeface="+mn-lt"/>
+              </a:rPr>
+              <a:t>Роль сервера:</a:t>
+            </a:r>
+            <a:endParaRPr lang="ru-RU" dirty="0">
+              <a:latin typeface="Times New Roman"/>
+              <a:cs typeface="Times New Roman"/>
+            </a:endParaRPr>
+          </a:p>
+          <a:p>
+            <a:pPr marL="285750" indent="-285750">
+              <a:buFont typeface="Arial"/>
               <a:buChar char="•"/>
-              <a:defRPr sz="1800" b="0">
-                <a:solidFill>
-                  <a:srgbClr val="000000"/>
-                </a:solidFill>
+            </a:pPr>
+            <a:r>
+              <a:rPr lang="ru-RU" b="1" dirty="0">
                 <a:latin typeface="Times New Roman"/>
-                <a:ea typeface="Times New Roman"/>
-                <a:cs typeface="Times New Roman"/>
-              </a:defRPr>
+                <a:ea typeface="+mn-lt"/>
+                <a:cs typeface="+mn-lt"/>
+              </a:rPr>
+              <a:t>Централизованная </a:t>
+            </a:r>
+            <a:r>
+              <a:rPr lang="ru-RU" dirty="0">
+                <a:latin typeface="Times New Roman"/>
+                <a:ea typeface="+mn-lt"/>
+                <a:cs typeface="+mn-lt"/>
+              </a:rPr>
+              <a:t>обработка запросов.</a:t>
+            </a:r>
+            <a:endParaRPr lang="ru-RU" dirty="0">
+              <a:latin typeface="Times New Roman"/>
+              <a:cs typeface="Times New Roman"/>
+            </a:endParaRPr>
+          </a:p>
+          <a:p>
+            <a:pPr marL="285750" indent="-285750">
+              <a:buFont typeface="Arial"/>
+              <a:buChar char="•"/>
             </a:pPr>
             <a:r>
-              <a:rPr dirty="0"/>
-              <a:t>В </a:t>
-            </a:r>
-            <a:r>
-              <a:rPr dirty="0" err="1"/>
-              <a:t>исследовании</a:t>
-            </a:r>
-            <a:r>
-              <a:rPr dirty="0"/>
-              <a:t> [1] </a:t>
-            </a:r>
-            <a:r>
-              <a:rPr dirty="0" err="1"/>
-              <a:t>точность</a:t>
-            </a:r>
-            <a:r>
-              <a:rPr dirty="0"/>
-              <a:t> </a:t>
-            </a:r>
-            <a:r>
-              <a:rPr dirty="0" err="1"/>
-              <a:t>классификации</a:t>
-            </a:r>
-            <a:r>
-              <a:rPr dirty="0"/>
-              <a:t> </a:t>
-            </a:r>
-            <a:r>
-              <a:rPr dirty="0" err="1"/>
-              <a:t>составила</a:t>
-            </a:r>
-            <a:r>
-              <a:rPr dirty="0"/>
-              <a:t> </a:t>
-            </a:r>
-            <a:r>
-              <a:rPr sz="1800" b="1" dirty="0">
-                <a:solidFill>
-                  <a:srgbClr val="000000"/>
-                </a:solidFill>
+              <a:rPr lang="ru-RU" dirty="0">
                 <a:latin typeface="Times New Roman"/>
-                <a:ea typeface="Times New Roman"/>
-                <a:cs typeface="Times New Roman"/>
-              </a:rPr>
-              <a:t>96 % </a:t>
-            </a:r>
-            <a:r>
-              <a:rPr sz="1800" b="1" dirty="0" err="1">
-                <a:solidFill>
-                  <a:srgbClr val="000000"/>
-                </a:solidFill>
+                <a:ea typeface="+mn-lt"/>
+                <a:cs typeface="+mn-lt"/>
+              </a:rPr>
+              <a:t>Выполнение </a:t>
+            </a:r>
+            <a:r>
+              <a:rPr lang="ru-RU" b="1" dirty="0">
                 <a:latin typeface="Times New Roman"/>
-                <a:ea typeface="Times New Roman"/>
-                <a:cs typeface="Times New Roman"/>
-              </a:rPr>
-              <a:t>на</a:t>
-            </a:r>
-            <a:r>
-              <a:rPr sz="1800" b="1" dirty="0">
-                <a:solidFill>
-                  <a:srgbClr val="000000"/>
-                </a:solidFill>
+                <a:ea typeface="+mn-lt"/>
+                <a:cs typeface="+mn-lt"/>
+              </a:rPr>
+              <a:t>ресурсоёмких </a:t>
+            </a:r>
+            <a:r>
+              <a:rPr lang="ru-RU" dirty="0">
                 <a:latin typeface="Times New Roman"/>
-                <a:ea typeface="Times New Roman"/>
-                <a:cs typeface="Times New Roman"/>
-              </a:rPr>
-              <a:t> 100 </a:t>
-            </a:r>
-            <a:r>
-              <a:rPr sz="1800" b="1" dirty="0" err="1">
-                <a:solidFill>
-                  <a:srgbClr val="000000"/>
-                </a:solidFill>
-                <a:latin typeface="Times New Roman"/>
-                <a:ea typeface="Times New Roman"/>
-                <a:cs typeface="Times New Roman"/>
-              </a:rPr>
-              <a:t>тестовых</a:t>
-            </a:r>
-            <a:r>
-              <a:rPr sz="1800" b="1" dirty="0">
-                <a:solidFill>
-                  <a:srgbClr val="000000"/>
-                </a:solidFill>
-                <a:latin typeface="Times New Roman"/>
-                <a:ea typeface="Times New Roman"/>
-                <a:cs typeface="Times New Roman"/>
-              </a:rPr>
-              <a:t> </a:t>
-            </a:r>
-            <a:r>
-              <a:rPr sz="1800" b="1" dirty="0" err="1">
-                <a:solidFill>
-                  <a:srgbClr val="000000"/>
-                </a:solidFill>
-                <a:latin typeface="Times New Roman"/>
-                <a:ea typeface="Times New Roman"/>
-                <a:cs typeface="Times New Roman"/>
-              </a:rPr>
-              <a:t>кадрах</a:t>
-            </a:r>
-            <a:r>
-              <a:rPr dirty="0"/>
-              <a:t>. </a:t>
-            </a:r>
-            <a:r>
-              <a:rPr dirty="0" err="1"/>
-              <a:t>Метод</a:t>
-            </a:r>
-            <a:r>
-              <a:rPr dirty="0"/>
-              <a:t> </a:t>
-            </a:r>
-            <a:r>
-              <a:rPr dirty="0" err="1"/>
-              <a:t>предусматривает</a:t>
-            </a:r>
-            <a:r>
-              <a:rPr dirty="0"/>
-              <a:t> </a:t>
-            </a:r>
-            <a:r>
-              <a:rPr dirty="0" err="1"/>
-              <a:t>предупреждение</a:t>
-            </a:r>
-            <a:r>
-              <a:rPr dirty="0"/>
-              <a:t> </a:t>
-            </a:r>
-            <a:r>
-              <a:rPr dirty="0" err="1"/>
-              <a:t>оператора</a:t>
-            </a:r>
-            <a:r>
-              <a:rPr dirty="0"/>
-              <a:t> </a:t>
-            </a:r>
-            <a:r>
-              <a:rPr dirty="0" err="1"/>
-              <a:t>или</a:t>
-            </a:r>
-            <a:r>
-              <a:rPr dirty="0"/>
-              <a:t> </a:t>
-            </a:r>
-            <a:r>
-              <a:rPr dirty="0" err="1"/>
-              <a:t>остановку</a:t>
-            </a:r>
-            <a:r>
-              <a:rPr dirty="0"/>
-              <a:t> </a:t>
-            </a:r>
-            <a:r>
-              <a:rPr dirty="0" err="1"/>
-              <a:t>печати</a:t>
-            </a:r>
-            <a:r>
-              <a:rPr dirty="0"/>
-              <a:t>.</a:t>
-            </a:r>
+                <a:ea typeface="+mn-lt"/>
+                <a:cs typeface="+mn-lt"/>
+              </a:rPr>
+              <a:t>задач.</a:t>
+            </a:r>
+            <a:endParaRPr lang="ru-RU" dirty="0">
+              <a:latin typeface="Times New Roman"/>
+              <a:cs typeface="Times New Roman"/>
+            </a:endParaRPr>
           </a:p>
         </p:txBody>
       </p:sp>
       <p:pic>
         <p:nvPicPr>
-          <p:cNvPr id="31" name="Рисунок 30">
-            <a:extLst>
-              <a:ext uri="{FF2B5EF4-FFF2-40B4-BE49-F238E27FC236}">
-                <a16:creationId xmlns:a16="http://schemas.microsoft.com/office/drawing/2014/main" id="{C75C9600-E24B-4427-841C-17EE22ED7C5B}"/>
+          <p:cNvPr id="7" name="Рисунок 6">
+            <a:extLst>
+              <a:ext uri="{FF2B5EF4-FFF2-40B4-BE49-F238E27FC236}">
+                <a16:creationId xmlns:a16="http://schemas.microsoft.com/office/drawing/2014/main" id="{DA035444-9EBE-0F23-C21B-B713FDEC75FD}"/>
               </a:ext>
             </a:extLst>
           </p:cNvPr>
@@ -5921,16 +6835,20 @@
           <p:nvPr/>
         </p:nvPicPr>
         <p:blipFill>
-          <a:blip r:embed="rId3"/>
-          <a:srcRect l="32072" r="32072"/>
-          <a:stretch>
-            <a:fillRect/>
-          </a:stretch>
+          <a:blip r:embed="rId3">
+            <a:extLst>
+              <a:ext uri="{28A0092B-C50C-407E-A947-70E740481C1C}">
+                <a14:useLocalDpi xmlns:a14="http://schemas.microsoft.com/office/drawing/2010/main" val="0"/>
+              </a:ext>
+            </a:extLst>
+          </a:blip>
+          <a:srcRect/>
+          <a:stretch/>
         </p:blipFill>
         <p:spPr>
           <a:xfrm>
-            <a:off x="6212878" y="709255"/>
-            <a:ext cx="2446242" cy="5175504"/>
+            <a:off x="3318649" y="1011857"/>
+            <a:ext cx="5639137" cy="5093570"/>
           </a:xfrm>
           <a:prstGeom prst="rect">
             <a:avLst/>
@@ -5939,91 +6857,89 @@
       </p:pic>
       <p:sp>
         <p:nvSpPr>
-          <p:cNvPr id="32" name="Литературный источник">
-            <a:extLst>
-              <a:ext uri="{FF2B5EF4-FFF2-40B4-BE49-F238E27FC236}">
-                <a16:creationId xmlns:a16="http://schemas.microsoft.com/office/drawing/2014/main" id="{BCB7E54A-107D-4D70-A4F5-88440DD0E3D7}"/>
-              </a:ext>
-            </a:extLst>
-          </p:cNvPr>
-          <p:cNvSpPr>
-            <a:spLocks noGrp="1"/>
-          </p:cNvSpPr>
+          <p:cNvPr id="12" name="TextBox 11">
+            <a:extLst>
+              <a:ext uri="{FF2B5EF4-FFF2-40B4-BE49-F238E27FC236}">
+                <a16:creationId xmlns:a16="http://schemas.microsoft.com/office/drawing/2014/main" id="{D77D804C-EAD2-5379-2030-7517770A46AB}"/>
+              </a:ext>
+            </a:extLst>
+          </p:cNvPr>
+          <p:cNvSpPr txBox="1"/>
           <p:nvPr/>
         </p:nvSpPr>
         <p:spPr>
           <a:xfrm>
-            <a:off x="277940" y="5906643"/>
-            <a:ext cx="5718620" cy="584740"/>
+            <a:off x="186213" y="2593566"/>
+            <a:ext cx="2920514" cy="3416320"/>
           </a:xfrm>
           <a:prstGeom prst="rect">
             <a:avLst/>
           </a:prstGeom>
           <a:noFill/>
-          <a:ln w="0">
-            <a:noFill/>
+          <a:ln>
+            <a:solidFill>
+              <a:schemeClr val="tx1"/>
+            </a:solidFill>
+            <a:prstDash val="dash"/>
           </a:ln>
         </p:spPr>
         <p:txBody>
-          <a:bodyPr wrap="square" lIns="91440" tIns="45720" rIns="91440" bIns="45720">
-            <a:noAutofit/>
+          <a:bodyPr rot="0" spcFirstLastPara="0" vertOverflow="overflow" horzOverflow="overflow" vert="horz" wrap="square" lIns="91440" tIns="45720" rIns="91440" bIns="45720" numCol="1" spcCol="0" rtlCol="0" fromWordArt="0" anchor="ctr" anchorCtr="0" forceAA="0" compatLnSpc="1">
+            <a:prstTxWarp prst="textNoShape">
+              <a:avLst/>
+            </a:prstTxWarp>
+            <a:spAutoFit/>
           </a:bodyPr>
-          <a:lstStyle>
-            <a:defPPr algn="l">
-              <a:defRPr sz="1600" b="0">
-                <a:solidFill>
-                  <a:srgbClr val="000000"/>
-                </a:solidFill>
-                <a:latin typeface="Times New Roman"/>
-                <a:ea typeface="Times New Roman"/>
-                <a:cs typeface="Times New Roman"/>
-              </a:defRPr>
-            </a:defPPr>
-          </a:lstStyle>
-          <a:p>
-            <a:pPr algn="l">
-              <a:defRPr sz="1600" b="0">
-                <a:solidFill>
-                  <a:srgbClr val="000000"/>
-                </a:solidFill>
-                <a:latin typeface="Times New Roman"/>
-                <a:ea typeface="Times New Roman"/>
-                <a:cs typeface="Times New Roman"/>
-              </a:defRPr>
-            </a:pPr>
-            <a:r>
-              <a:rPr sz="1600" b="0">
-                <a:solidFill>
-                  <a:srgbClr val="000000"/>
-                </a:solidFill>
-                <a:latin typeface="Times New Roman"/>
-                <a:ea typeface="Times New Roman"/>
-                <a:cs typeface="Times New Roman"/>
-              </a:rPr>
-              <a:t>[1] Kim H., Lee H., Kim J.-S., Ahn S.-H., 2020.</a:t>
-            </a:r>
-          </a:p>
-          <a:p>
-            <a:pPr algn="l">
-              <a:defRPr sz="1600" b="0">
-                <a:solidFill>
-                  <a:srgbClr val="000000"/>
-                </a:solidFill>
-                <a:latin typeface="Times New Roman"/>
-                <a:ea typeface="Times New Roman"/>
-                <a:cs typeface="Times New Roman"/>
-              </a:defRPr>
-            </a:pPr>
-            <a:r>
-              <a:rPr sz="1600" b="0">
-                <a:solidFill>
-                  <a:srgbClr val="000000"/>
-                </a:solidFill>
-                <a:latin typeface="Times New Roman"/>
-                <a:ea typeface="Times New Roman"/>
-                <a:cs typeface="Times New Roman"/>
-              </a:rPr>
-              <a:t>DOI: 10.1007/s00170-020-06201-0.</a:t>
+          <a:lstStyle/>
+          <a:p>
+            <a:r>
+              <a:rPr lang="ru-RU" dirty="0">
+                <a:latin typeface="Times New Roman" panose="02020603050405020304" pitchFamily="18" charset="0"/>
+                <a:cs typeface="Times New Roman" panose="02020603050405020304" pitchFamily="18" charset="0"/>
+              </a:rPr>
+              <a:t>Сервер </a:t>
+            </a:r>
+            <a:r>
+              <a:rPr lang="ru-RU" b="1" dirty="0">
+                <a:latin typeface="Times New Roman" panose="02020603050405020304" pitchFamily="18" charset="0"/>
+                <a:cs typeface="Times New Roman" panose="02020603050405020304" pitchFamily="18" charset="0"/>
+              </a:rPr>
+              <a:t>получает кадр </a:t>
+            </a:r>
+            <a:r>
+              <a:rPr lang="ru-RU" dirty="0">
+                <a:latin typeface="Times New Roman" panose="02020603050405020304" pitchFamily="18" charset="0"/>
+                <a:cs typeface="Times New Roman" panose="02020603050405020304" pitchFamily="18" charset="0"/>
+              </a:rPr>
+              <a:t>с камеры и идентификаторы сессии. После кадр анализируется нейросетью, которая </a:t>
+            </a:r>
+            <a:r>
+              <a:rPr lang="ru-RU" b="1" dirty="0">
+                <a:latin typeface="Times New Roman" panose="02020603050405020304" pitchFamily="18" charset="0"/>
+                <a:cs typeface="Times New Roman" panose="02020603050405020304" pitchFamily="18" charset="0"/>
+              </a:rPr>
+              <a:t>определяет наличие «спагетти»</a:t>
+            </a:r>
+            <a:r>
+              <a:rPr lang="ru-RU" dirty="0">
+                <a:latin typeface="Times New Roman" panose="02020603050405020304" pitchFamily="18" charset="0"/>
+                <a:cs typeface="Times New Roman" panose="02020603050405020304" pitchFamily="18" charset="0"/>
+              </a:rPr>
+              <a:t>.</a:t>
+            </a:r>
+            <a:r>
+              <a:rPr lang="ru-RU" b="1" dirty="0">
+                <a:latin typeface="Times New Roman" panose="02020603050405020304" pitchFamily="18" charset="0"/>
+                <a:cs typeface="Times New Roman" panose="02020603050405020304" pitchFamily="18" charset="0"/>
+              </a:rPr>
+              <a:t> </a:t>
+            </a:r>
+            <a:r>
+              <a:rPr lang="ru-RU" dirty="0">
+                <a:latin typeface="Times New Roman" panose="02020603050405020304" pitchFamily="18" charset="0"/>
+                <a:cs typeface="Times New Roman" panose="02020603050405020304" pitchFamily="18" charset="0"/>
+              </a:rPr>
+              <a:t>Сервер возвращает признак дефекта и числовую оценку модели вместе с исходными идентификаторами, связывающими результат с конкретным кадром</a:t>
             </a:r>
           </a:p>
         </p:txBody>
@@ -6031,7 +6947,286 @@
     </p:spTree>
     <p:extLst>
       <p:ext uri="{BB962C8B-B14F-4D97-AF65-F5344CB8AC3E}">
-        <p14:creationId xmlns:p14="http://schemas.microsoft.com/office/powerpoint/2010/main" val="2011050586"/>
+        <p14:creationId xmlns:p14="http://schemas.microsoft.com/office/powerpoint/2010/main" val="2065725557"/>
+      </p:ext>
+    </p:extLst>
+  </p:cSld>
+  <p:clrMapOvr>
+    <a:masterClrMapping/>
+  </p:clrMapOvr>
+</p:sld>
+</file>
+
+<file path=ppt/slides/slide6.xml><?xml version="1.0" encoding="utf-8"?>
+<p:sld xmlns:a="http://schemas.openxmlformats.org/drawingml/2006/main" xmlns:r="http://schemas.openxmlformats.org/officeDocument/2006/relationships" xmlns:p="http://schemas.openxmlformats.org/presentationml/2006/main">
+  <p:cSld>
+    <p:spTree>
+      <p:nvGrpSpPr>
+        <p:cNvPr id="1" name="">
+          <a:extLst>
+            <a:ext uri="{FF2B5EF4-FFF2-40B4-BE49-F238E27FC236}">
+              <a16:creationId xmlns:a16="http://schemas.microsoft.com/office/drawing/2014/main" id="{829A4193-2A96-4292-27DF-7C8F10ED51F0}"/>
+            </a:ext>
+          </a:extLst>
+        </p:cNvPr>
+        <p:cNvGrpSpPr/>
+        <p:nvPr/>
+      </p:nvGrpSpPr>
+      <p:grpSpPr>
+        <a:xfrm>
+          <a:off x="0" y="0"/>
+          <a:ext cx="0" cy="0"/>
+          <a:chOff x="0" y="0"/>
+          <a:chExt cx="0" cy="0"/>
+        </a:xfrm>
+      </p:grpSpPr>
+      <p:sp>
+        <p:nvSpPr>
+          <p:cNvPr id="2" name="Заголовок 1">
+            <a:extLst>
+              <a:ext uri="{FF2B5EF4-FFF2-40B4-BE49-F238E27FC236}">
+                <a16:creationId xmlns:a16="http://schemas.microsoft.com/office/drawing/2014/main" id="{F71B51DD-8424-3898-F322-045B44C926E8}"/>
+              </a:ext>
+            </a:extLst>
+          </p:cNvPr>
+          <p:cNvSpPr>
+            <a:spLocks noGrp="1"/>
+          </p:cNvSpPr>
+          <p:nvPr>
+            <p:ph type="title"/>
+          </p:nvPr>
+        </p:nvSpPr>
+        <p:spPr>
+          <a:xfrm>
+            <a:off x="628650" y="9098"/>
+            <a:ext cx="7886700" cy="712868"/>
+          </a:xfrm>
+        </p:spPr>
+        <p:txBody>
+          <a:bodyPr>
+            <a:normAutofit/>
+          </a:bodyPr>
+          <a:lstStyle/>
+          <a:p>
+            <a:pPr algn="ctr"/>
+            <a:r>
+              <a:rPr lang="ru-RU" dirty="0">
+                <a:latin typeface="Times New Roman"/>
+                <a:ea typeface="Calibri"/>
+                <a:cs typeface="Times New Roman"/>
+              </a:rPr>
+              <a:t>Обработка на принтере</a:t>
+            </a:r>
+          </a:p>
+        </p:txBody>
+      </p:sp>
+      <p:sp>
+        <p:nvSpPr>
+          <p:cNvPr id="4" name="Текстовое поле 3">
+            <a:extLst>
+              <a:ext uri="{FF2B5EF4-FFF2-40B4-BE49-F238E27FC236}">
+                <a16:creationId xmlns:a16="http://schemas.microsoft.com/office/drawing/2014/main" id="{5E8559DA-50BE-07AC-B0EB-3414FBFB6481}"/>
+              </a:ext>
+            </a:extLst>
+          </p:cNvPr>
+          <p:cNvSpPr txBox="1"/>
+          <p:nvPr/>
+        </p:nvSpPr>
+        <p:spPr>
+          <a:xfrm>
+            <a:off x="3775710" y="5640705"/>
+            <a:ext cx="309880" cy="368300"/>
+          </a:xfrm>
+          <a:prstGeom prst="rect">
+            <a:avLst/>
+          </a:prstGeom>
+          <a:noFill/>
+        </p:spPr>
+        <p:txBody>
+          <a:bodyPr wrap="none" rtlCol="0">
+            <a:spAutoFit/>
+          </a:bodyPr>
+          <a:lstStyle/>
+          <a:p>
+            <a:endParaRPr lang="ru-RU" altLang="en-US"/>
+          </a:p>
+        </p:txBody>
+      </p:sp>
+      <p:sp>
+        <p:nvSpPr>
+          <p:cNvPr id="5" name="Замещающий номер слайда 4">
+            <a:extLst>
+              <a:ext uri="{FF2B5EF4-FFF2-40B4-BE49-F238E27FC236}">
+                <a16:creationId xmlns:a16="http://schemas.microsoft.com/office/drawing/2014/main" id="{28EFF76E-32CA-AB56-A1FE-FC86064D66B4}"/>
+              </a:ext>
+            </a:extLst>
+          </p:cNvPr>
+          <p:cNvSpPr>
+            <a:spLocks noGrp="1"/>
+          </p:cNvSpPr>
+          <p:nvPr>
+            <p:ph type="sldNum" sz="quarter" idx="12"/>
+          </p:nvPr>
+        </p:nvSpPr>
+        <p:spPr>
+          <a:xfrm>
+            <a:off x="7088886" y="6493511"/>
+            <a:ext cx="2057400" cy="365125"/>
+          </a:xfrm>
+        </p:spPr>
+        <p:txBody>
+          <a:bodyPr/>
+          <a:lstStyle/>
+          <a:p>
+            <a:fld id="{D6ED8A53-8D2F-4011-BE06-EDB0774336BA}" type="slidenum">
+              <a:rPr lang="ru-RU" sz="2000" dirty="0" smtClean="0">
+                <a:solidFill>
+                  <a:schemeClr val="tx1"/>
+                </a:solidFill>
+                <a:latin typeface="Times New Roman"/>
+                <a:cs typeface="Times New Roman"/>
+              </a:rPr>
+              <a:t>6</a:t>
+            </a:fld>
+            <a:endParaRPr lang="ru-RU" sz="2000">
+              <a:solidFill>
+                <a:schemeClr val="tx1"/>
+              </a:solidFill>
+              <a:latin typeface="Times New Roman"/>
+              <a:ea typeface="Calibri"/>
+              <a:cs typeface="Times New Roman"/>
+            </a:endParaRPr>
+          </a:p>
+        </p:txBody>
+      </p:sp>
+      <p:pic>
+        <p:nvPicPr>
+          <p:cNvPr id="7" name="Рисунок 6">
+            <a:extLst>
+              <a:ext uri="{FF2B5EF4-FFF2-40B4-BE49-F238E27FC236}">
+                <a16:creationId xmlns:a16="http://schemas.microsoft.com/office/drawing/2014/main" id="{DA035444-9EBE-0F23-C21B-B713FDEC75FD}"/>
+              </a:ext>
+            </a:extLst>
+          </p:cNvPr>
+          <p:cNvPicPr>
+            <a:picLocks noChangeAspect="1"/>
+          </p:cNvPicPr>
+          <p:nvPr/>
+        </p:nvPicPr>
+        <p:blipFill>
+          <a:blip r:embed="rId3">
+            <a:extLst>
+              <a:ext uri="{28A0092B-C50C-407E-A947-70E740481C1C}">
+                <a14:useLocalDpi xmlns:a14="http://schemas.microsoft.com/office/drawing/2010/main" val="0"/>
+              </a:ext>
+            </a:extLst>
+          </a:blip>
+          <a:srcRect/>
+          <a:stretch/>
+        </p:blipFill>
+        <p:spPr>
+          <a:xfrm>
+            <a:off x="3106727" y="875407"/>
+            <a:ext cx="5905217" cy="5295358"/>
+          </a:xfrm>
+          <a:prstGeom prst="rect">
+            <a:avLst/>
+          </a:prstGeom>
+        </p:spPr>
+      </p:pic>
+      <p:sp>
+        <p:nvSpPr>
+          <p:cNvPr id="12" name="TextBox 11">
+            <a:extLst>
+              <a:ext uri="{FF2B5EF4-FFF2-40B4-BE49-F238E27FC236}">
+                <a16:creationId xmlns:a16="http://schemas.microsoft.com/office/drawing/2014/main" id="{D77D804C-EAD2-5379-2030-7517770A46AB}"/>
+              </a:ext>
+            </a:extLst>
+          </p:cNvPr>
+          <p:cNvSpPr txBox="1"/>
+          <p:nvPr/>
+        </p:nvSpPr>
+        <p:spPr>
+          <a:xfrm>
+            <a:off x="132056" y="875407"/>
+            <a:ext cx="2917990" cy="5355312"/>
+          </a:xfrm>
+          <a:prstGeom prst="rect">
+            <a:avLst/>
+          </a:prstGeom>
+          <a:noFill/>
+          <a:ln>
+            <a:solidFill>
+              <a:schemeClr val="tx1"/>
+            </a:solidFill>
+            <a:prstDash val="dash"/>
+          </a:ln>
+        </p:spPr>
+        <p:txBody>
+          <a:bodyPr rot="0" spcFirstLastPara="0" vertOverflow="overflow" horzOverflow="overflow" vert="horz" wrap="square" lIns="91440" tIns="45720" rIns="91440" bIns="45720" numCol="1" spcCol="0" rtlCol="0" fromWordArt="0" anchor="ctr" anchorCtr="0" forceAA="0" compatLnSpc="1">
+            <a:prstTxWarp prst="textNoShape">
+              <a:avLst/>
+            </a:prstTxWarp>
+            <a:spAutoFit/>
+          </a:bodyPr>
+          <a:lstStyle/>
+          <a:p>
+            <a:r>
+              <a:rPr lang="ru-RU" dirty="0">
+                <a:latin typeface="Times New Roman" panose="02020603050405020304" pitchFamily="18" charset="0"/>
+                <a:cs typeface="Times New Roman" panose="02020603050405020304" pitchFamily="18" charset="0"/>
+              </a:rPr>
+              <a:t>Единичное обнаружение дефекта не приводит к отмене задания. Локальный модуль </a:t>
+            </a:r>
+            <a:r>
+              <a:rPr lang="ru-RU" b="1" dirty="0">
+                <a:latin typeface="Times New Roman" panose="02020603050405020304" pitchFamily="18" charset="0"/>
+                <a:cs typeface="Times New Roman" panose="02020603050405020304" pitchFamily="18" charset="0"/>
+              </a:rPr>
+              <a:t>проверяет принадлежность результата </a:t>
+            </a:r>
+            <a:r>
+              <a:rPr lang="ru-RU" dirty="0">
+                <a:latin typeface="Times New Roman" panose="02020603050405020304" pitchFamily="18" charset="0"/>
+                <a:cs typeface="Times New Roman" panose="02020603050405020304" pitchFamily="18" charset="0"/>
+              </a:rPr>
+              <a:t>текущей печатной сессии и учитывает последовательные срабатывания. Отрицательный или неопределённый результат сбрасывает счётчик. </a:t>
+            </a:r>
+            <a:r>
+              <a:rPr lang="ru-RU" b="1" dirty="0">
+                <a:latin typeface="Times New Roman" panose="02020603050405020304" pitchFamily="18" charset="0"/>
+                <a:cs typeface="Times New Roman" panose="02020603050405020304" pitchFamily="18" charset="0"/>
+              </a:rPr>
+              <a:t>После трёх последовательных обнаружений</a:t>
+            </a:r>
+            <a:r>
+              <a:rPr lang="ru-RU" dirty="0">
+                <a:latin typeface="Times New Roman" panose="02020603050405020304" pitchFamily="18" charset="0"/>
+                <a:cs typeface="Times New Roman" panose="02020603050405020304" pitchFamily="18" charset="0"/>
+              </a:rPr>
+              <a:t> «спагетти» повторно проверяется активность сессии и </a:t>
+            </a:r>
+            <a:r>
+              <a:rPr lang="ru-RU" b="1" dirty="0">
+                <a:latin typeface="Times New Roman" panose="02020603050405020304" pitchFamily="18" charset="0"/>
+                <a:cs typeface="Times New Roman" panose="02020603050405020304" pitchFamily="18" charset="0"/>
+              </a:rPr>
+              <a:t>формируется команда отмены печати</a:t>
+            </a:r>
+            <a:r>
+              <a:rPr lang="ru-RU" dirty="0">
+                <a:latin typeface="Times New Roman" panose="02020603050405020304" pitchFamily="18" charset="0"/>
+                <a:cs typeface="Times New Roman" panose="02020603050405020304" pitchFamily="18" charset="0"/>
+              </a:rPr>
+              <a:t>.</a:t>
+            </a:r>
+          </a:p>
+        </p:txBody>
+      </p:sp>
+    </p:spTree>
+    <p:extLst>
+      <p:ext uri="{BB962C8B-B14F-4D97-AF65-F5344CB8AC3E}">
+        <p14:creationId xmlns:p14="http://schemas.microsoft.com/office/powerpoint/2010/main" val="1366394556"/>
       </p:ext>
     </p:extLst>
   </p:cSld>

--- a/presentation/NIR2_slide01_v2.pptx
+++ b/presentation/NIR2_slide01_v2.pptx
@@ -5,7 +5,7 @@
     <p:sldMasterId id="2147483648" r:id="rId1"/>
   </p:sldMasterIdLst>
   <p:notesMasterIdLst>
-    <p:notesMasterId r:id="rId8"/>
+    <p:notesMasterId r:id="rId9"/>
   </p:notesMasterIdLst>
   <p:sldIdLst>
     <p:sldId id="257" r:id="rId2"/>
@@ -14,6 +14,7 @@
     <p:sldId id="268" r:id="rId5"/>
     <p:sldId id="270" r:id="rId6"/>
     <p:sldId id="271" r:id="rId7"/>
+    <p:sldId id="272" r:id="rId8"/>
   </p:sldIdLst>
   <p:sldSz cx="9144000" cy="6858000" type="screen4x3"/>
   <p:notesSz cx="6858000" cy="9144000"/>
@@ -786,6 +787,114 @@
 </p:notes>
 </file>
 
+<file path=ppt/notesSlides/notesSlide6.xml><?xml version="1.0" encoding="utf-8"?>
+<p:notes xmlns:a="http://schemas.openxmlformats.org/drawingml/2006/main" xmlns:r="http://schemas.openxmlformats.org/officeDocument/2006/relationships" xmlns:p="http://schemas.openxmlformats.org/presentationml/2006/main">
+  <p:cSld>
+    <p:spTree>
+      <p:nvGrpSpPr>
+        <p:cNvPr id="1" name="">
+          <a:extLst>
+            <a:ext uri="{FF2B5EF4-FFF2-40B4-BE49-F238E27FC236}">
+              <a16:creationId xmlns:a16="http://schemas.microsoft.com/office/drawing/2014/main" id="{B17726DC-CE10-F03F-2142-18D5DEE97B8B}"/>
+            </a:ext>
+          </a:extLst>
+        </p:cNvPr>
+        <p:cNvGrpSpPr/>
+        <p:nvPr/>
+      </p:nvGrpSpPr>
+      <p:grpSpPr>
+        <a:xfrm>
+          <a:off x="0" y="0"/>
+          <a:ext cx="0" cy="0"/>
+          <a:chOff x="0" y="0"/>
+          <a:chExt cx="0" cy="0"/>
+        </a:xfrm>
+      </p:grpSpPr>
+      <p:sp>
+        <p:nvSpPr>
+          <p:cNvPr id="2" name="Образ слайда 1">
+            <a:extLst>
+              <a:ext uri="{FF2B5EF4-FFF2-40B4-BE49-F238E27FC236}">
+                <a16:creationId xmlns:a16="http://schemas.microsoft.com/office/drawing/2014/main" id="{CBD27571-4120-1AD9-24AF-1F6C37D039DE}"/>
+              </a:ext>
+            </a:extLst>
+          </p:cNvPr>
+          <p:cNvSpPr>
+            <a:spLocks noGrp="1" noRot="1" noChangeAspect="1"/>
+          </p:cNvSpPr>
+          <p:nvPr>
+            <p:ph type="sldImg"/>
+          </p:nvPr>
+        </p:nvSpPr>
+        <p:spPr/>
+      </p:sp>
+      <p:sp>
+        <p:nvSpPr>
+          <p:cNvPr id="3" name="Заметки 2">
+            <a:extLst>
+              <a:ext uri="{FF2B5EF4-FFF2-40B4-BE49-F238E27FC236}">
+                <a16:creationId xmlns:a16="http://schemas.microsoft.com/office/drawing/2014/main" id="{C020C72C-20DC-053F-06DA-226D6D644D97}"/>
+              </a:ext>
+            </a:extLst>
+          </p:cNvPr>
+          <p:cNvSpPr>
+            <a:spLocks noGrp="1"/>
+          </p:cNvSpPr>
+          <p:nvPr>
+            <p:ph type="body" idx="1"/>
+          </p:nvPr>
+        </p:nvSpPr>
+        <p:spPr/>
+        <p:txBody>
+          <a:bodyPr/>
+          <a:lstStyle/>
+          <a:p>
+            <a:endParaRPr lang="ru-RU" dirty="0"/>
+          </a:p>
+        </p:txBody>
+      </p:sp>
+      <p:sp>
+        <p:nvSpPr>
+          <p:cNvPr id="4" name="Номер слайда 3">
+            <a:extLst>
+              <a:ext uri="{FF2B5EF4-FFF2-40B4-BE49-F238E27FC236}">
+                <a16:creationId xmlns:a16="http://schemas.microsoft.com/office/drawing/2014/main" id="{55F1735C-DD43-29D0-C068-51A4DFD82638}"/>
+              </a:ext>
+            </a:extLst>
+          </p:cNvPr>
+          <p:cNvSpPr>
+            <a:spLocks noGrp="1"/>
+          </p:cNvSpPr>
+          <p:nvPr>
+            <p:ph type="sldNum" sz="quarter" idx="5"/>
+          </p:nvPr>
+        </p:nvSpPr>
+        <p:spPr/>
+        <p:txBody>
+          <a:bodyPr/>
+          <a:lstStyle/>
+          <a:p>
+            <a:fld id="{8C7347D7-6652-406A-AA51-ABE302EA4CF8}" type="slidenum">
+              <a:rPr lang="ru-RU" smtClean="0"/>
+              <a:t>7</a:t>
+            </a:fld>
+            <a:endParaRPr lang="ru-RU"/>
+          </a:p>
+        </p:txBody>
+      </p:sp>
+    </p:spTree>
+    <p:extLst>
+      <p:ext uri="{BB962C8B-B14F-4D97-AF65-F5344CB8AC3E}">
+        <p14:creationId xmlns:p14="http://schemas.microsoft.com/office/powerpoint/2010/main" val="879894849"/>
+      </p:ext>
+    </p:extLst>
+  </p:cSld>
+  <p:clrMapOvr>
+    <a:masterClrMapping/>
+  </p:clrMapOvr>
+</p:notes>
+</file>
+
 <file path=ppt/slideLayouts/slideLayout1.xml><?xml version="1.0" encoding="utf-8"?>
 <p:sldLayout xmlns:a="http://schemas.openxmlformats.org/drawingml/2006/main" xmlns:r="http://schemas.openxmlformats.org/officeDocument/2006/relationships" xmlns:p="http://schemas.openxmlformats.org/presentationml/2006/main" type="title" preserve="1">
   <p:cSld name="Титульный слайд">
@@ -931,7 +1040,7 @@
           <a:lstStyle/>
           <a:p>
             <a:fld id="{F0FFA9E1-D308-41E7-A8C4-3E7207C0A6E1}" type="datetimeFigureOut">
-              <a:t>07.10.2026</a:t>
+              <a:t>08.10.2026</a:t>
             </a:fld>
             <a:endParaRPr/>
           </a:p>
@@ -1127,7 +1236,7 @@
           <a:lstStyle/>
           <a:p>
             <a:fld id="{F0FFA9E1-D308-41E7-A8C4-3E7207C0A6E1}" type="datetimeFigureOut">
-              <a:t>07.10.2026</a:t>
+              <a:t>08.10.2026</a:t>
             </a:fld>
             <a:endParaRPr/>
           </a:p>
@@ -1333,7 +1442,7 @@
           <a:lstStyle/>
           <a:p>
             <a:fld id="{F0FFA9E1-D308-41E7-A8C4-3E7207C0A6E1}" type="datetimeFigureOut">
-              <a:t>07.10.2026</a:t>
+              <a:t>08.10.2026</a:t>
             </a:fld>
             <a:endParaRPr/>
           </a:p>
@@ -1529,7 +1638,7 @@
           <a:lstStyle/>
           <a:p>
             <a:fld id="{F0FFA9E1-D308-41E7-A8C4-3E7207C0A6E1}" type="datetimeFigureOut">
-              <a:t>07.10.2026</a:t>
+              <a:t>08.10.2026</a:t>
             </a:fld>
             <a:endParaRPr/>
           </a:p>
@@ -1797,7 +1906,7 @@
           <a:lstStyle/>
           <a:p>
             <a:fld id="{F0FFA9E1-D308-41E7-A8C4-3E7207C0A6E1}" type="datetimeFigureOut">
-              <a:t>07.10.2026</a:t>
+              <a:t>08.10.2026</a:t>
             </a:fld>
             <a:endParaRPr/>
           </a:p>
@@ -2065,7 +2174,7 @@
           <a:lstStyle/>
           <a:p>
             <a:fld id="{F0FFA9E1-D308-41E7-A8C4-3E7207C0A6E1}" type="datetimeFigureOut">
-              <a:t>07.10.2026</a:t>
+              <a:t>08.10.2026</a:t>
             </a:fld>
             <a:endParaRPr/>
           </a:p>
@@ -2482,7 +2591,7 @@
           <a:lstStyle/>
           <a:p>
             <a:fld id="{F0FFA9E1-D308-41E7-A8C4-3E7207C0A6E1}" type="datetimeFigureOut">
-              <a:t>07.10.2026</a:t>
+              <a:t>08.10.2026</a:t>
             </a:fld>
             <a:endParaRPr/>
           </a:p>
@@ -2616,7 +2725,7 @@
           <a:lstStyle/>
           <a:p>
             <a:fld id="{F0FFA9E1-D308-41E7-A8C4-3E7207C0A6E1}" type="datetimeFigureOut">
-              <a:t>07.10.2026</a:t>
+              <a:t>08.10.2026</a:t>
             </a:fld>
             <a:endParaRPr/>
           </a:p>
@@ -2723,7 +2832,7 @@
           <a:lstStyle/>
           <a:p>
             <a:fld id="{F0FFA9E1-D308-41E7-A8C4-3E7207C0A6E1}" type="datetimeFigureOut">
-              <a:t>07.10.2026</a:t>
+              <a:t>08.10.2026</a:t>
             </a:fld>
             <a:endParaRPr/>
           </a:p>
@@ -3043,7 +3152,7 @@
           <a:lstStyle/>
           <a:p>
             <a:fld id="{F0FFA9E1-D308-41E7-A8C4-3E7207C0A6E1}" type="datetimeFigureOut">
-              <a:t>07.10.2026</a:t>
+              <a:t>08.10.2026</a:t>
             </a:fld>
             <a:endParaRPr/>
           </a:p>
@@ -3328,7 +3437,7 @@
           <a:lstStyle/>
           <a:p>
             <a:fld id="{F0FFA9E1-D308-41E7-A8C4-3E7207C0A6E1}" type="datetimeFigureOut">
-              <a:t>07.10.2026</a:t>
+              <a:t>08.10.2026</a:t>
             </a:fld>
             <a:endParaRPr/>
           </a:p>
@@ -3568,7 +3677,7 @@
           </a:lstStyle>
           <a:p>
             <a:fld id="{F0FFA9E1-D308-41E7-A8C4-3E7207C0A6E1}" type="datetimeFigureOut">
-              <a:t>07.10.2026</a:t>
+              <a:t>08.10.2026</a:t>
             </a:fld>
             <a:endParaRPr/>
           </a:p>
@@ -6251,7 +6360,7 @@
         </p:nvSpPr>
         <p:spPr>
           <a:xfrm>
-            <a:off x="628650" y="-104931"/>
+            <a:off x="628648" y="0"/>
             <a:ext cx="7886700" cy="712868"/>
           </a:xfrm>
         </p:spPr>
@@ -6334,8 +6443,8 @@
         </p:nvSpPr>
         <p:spPr>
           <a:xfrm>
-            <a:off x="174554" y="615748"/>
-            <a:ext cx="4397445" cy="2308324"/>
+            <a:off x="444579" y="731952"/>
+            <a:ext cx="3869672" cy="2585323"/>
           </a:xfrm>
           <a:prstGeom prst="rect">
             <a:avLst/>
@@ -6416,7 +6525,7 @@
         </p:nvSpPr>
         <p:spPr>
           <a:xfrm>
-            <a:off x="4771554" y="615748"/>
+            <a:off x="4771553" y="724829"/>
             <a:ext cx="4197892" cy="1477328"/>
           </a:xfrm>
           <a:prstGeom prst="rect">
@@ -6477,8 +6586,8 @@
         </p:nvSpPr>
         <p:spPr>
           <a:xfrm>
-            <a:off x="4771554" y="2274838"/>
-            <a:ext cx="4197892" cy="2308324"/>
+            <a:off x="487537" y="3466535"/>
+            <a:ext cx="3869672" cy="2862322"/>
           </a:xfrm>
           <a:prstGeom prst="rect">
             <a:avLst/>
@@ -7227,6 +7336,407 @@
     <p:extLst>
       <p:ext uri="{BB962C8B-B14F-4D97-AF65-F5344CB8AC3E}">
         <p14:creationId xmlns:p14="http://schemas.microsoft.com/office/powerpoint/2010/main" val="1366394556"/>
+      </p:ext>
+    </p:extLst>
+  </p:cSld>
+  <p:clrMapOvr>
+    <a:masterClrMapping/>
+  </p:clrMapOvr>
+</p:sld>
+</file>
+
+<file path=ppt/slides/slide7.xml><?xml version="1.0" encoding="utf-8"?>
+<p:sld xmlns:a="http://schemas.openxmlformats.org/drawingml/2006/main" xmlns:r="http://schemas.openxmlformats.org/officeDocument/2006/relationships" xmlns:p="http://schemas.openxmlformats.org/presentationml/2006/main">
+  <p:cSld>
+    <p:spTree>
+      <p:nvGrpSpPr>
+        <p:cNvPr id="1" name="">
+          <a:extLst>
+            <a:ext uri="{FF2B5EF4-FFF2-40B4-BE49-F238E27FC236}">
+              <a16:creationId xmlns:a16="http://schemas.microsoft.com/office/drawing/2014/main" id="{829A4193-2A96-4292-27DF-7C8F10ED51F0}"/>
+            </a:ext>
+          </a:extLst>
+        </p:cNvPr>
+        <p:cNvGrpSpPr/>
+        <p:nvPr/>
+      </p:nvGrpSpPr>
+      <p:grpSpPr>
+        <a:xfrm>
+          <a:off x="0" y="0"/>
+          <a:ext cx="0" cy="0"/>
+          <a:chOff x="0" y="0"/>
+          <a:chExt cx="0" cy="0"/>
+        </a:xfrm>
+      </p:grpSpPr>
+      <p:sp>
+        <p:nvSpPr>
+          <p:cNvPr id="2" name="Заголовок 1">
+            <a:extLst>
+              <a:ext uri="{FF2B5EF4-FFF2-40B4-BE49-F238E27FC236}">
+                <a16:creationId xmlns:a16="http://schemas.microsoft.com/office/drawing/2014/main" id="{F71B51DD-8424-3898-F322-045B44C926E8}"/>
+              </a:ext>
+            </a:extLst>
+          </p:cNvPr>
+          <p:cNvSpPr>
+            <a:spLocks noGrp="1"/>
+          </p:cNvSpPr>
+          <p:nvPr>
+            <p:ph type="title"/>
+          </p:nvPr>
+        </p:nvSpPr>
+        <p:spPr>
+          <a:xfrm>
+            <a:off x="628650" y="-64546"/>
+            <a:ext cx="7886700" cy="712868"/>
+          </a:xfrm>
+        </p:spPr>
+        <p:txBody>
+          <a:bodyPr>
+            <a:normAutofit/>
+          </a:bodyPr>
+          <a:lstStyle/>
+          <a:p>
+            <a:pPr algn="ctr"/>
+            <a:r>
+              <a:rPr lang="ru-RU" dirty="0">
+                <a:latin typeface="Times New Roman"/>
+                <a:ea typeface="Calibri"/>
+                <a:cs typeface="Times New Roman"/>
+              </a:rPr>
+              <a:t>Электросхема 3</a:t>
+            </a:r>
+            <a:r>
+              <a:rPr lang="en-US" dirty="0">
+                <a:latin typeface="Times New Roman"/>
+                <a:ea typeface="Calibri"/>
+                <a:cs typeface="Times New Roman"/>
+              </a:rPr>
+              <a:t>D-</a:t>
+            </a:r>
+            <a:r>
+              <a:rPr lang="ru-RU" dirty="0">
+                <a:latin typeface="Times New Roman"/>
+                <a:ea typeface="Calibri"/>
+                <a:cs typeface="Times New Roman"/>
+              </a:rPr>
+              <a:t>принтера</a:t>
+            </a:r>
+          </a:p>
+        </p:txBody>
+      </p:sp>
+      <p:sp>
+        <p:nvSpPr>
+          <p:cNvPr id="4" name="Текстовое поле 3">
+            <a:extLst>
+              <a:ext uri="{FF2B5EF4-FFF2-40B4-BE49-F238E27FC236}">
+                <a16:creationId xmlns:a16="http://schemas.microsoft.com/office/drawing/2014/main" id="{5E8559DA-50BE-07AC-B0EB-3414FBFB6481}"/>
+              </a:ext>
+            </a:extLst>
+          </p:cNvPr>
+          <p:cNvSpPr txBox="1"/>
+          <p:nvPr/>
+        </p:nvSpPr>
+        <p:spPr>
+          <a:xfrm>
+            <a:off x="3775710" y="5640705"/>
+            <a:ext cx="309880" cy="368300"/>
+          </a:xfrm>
+          <a:prstGeom prst="rect">
+            <a:avLst/>
+          </a:prstGeom>
+          <a:noFill/>
+        </p:spPr>
+        <p:txBody>
+          <a:bodyPr wrap="none" rtlCol="0">
+            <a:spAutoFit/>
+          </a:bodyPr>
+          <a:lstStyle/>
+          <a:p>
+            <a:endParaRPr lang="ru-RU" altLang="en-US"/>
+          </a:p>
+        </p:txBody>
+      </p:sp>
+      <p:sp>
+        <p:nvSpPr>
+          <p:cNvPr id="5" name="Замещающий номер слайда 4">
+            <a:extLst>
+              <a:ext uri="{FF2B5EF4-FFF2-40B4-BE49-F238E27FC236}">
+                <a16:creationId xmlns:a16="http://schemas.microsoft.com/office/drawing/2014/main" id="{28EFF76E-32CA-AB56-A1FE-FC86064D66B4}"/>
+              </a:ext>
+            </a:extLst>
+          </p:cNvPr>
+          <p:cNvSpPr>
+            <a:spLocks noGrp="1"/>
+          </p:cNvSpPr>
+          <p:nvPr>
+            <p:ph type="sldNum" sz="quarter" idx="12"/>
+          </p:nvPr>
+        </p:nvSpPr>
+        <p:spPr>
+          <a:xfrm>
+            <a:off x="7088886" y="6493511"/>
+            <a:ext cx="2057400" cy="365125"/>
+          </a:xfrm>
+        </p:spPr>
+        <p:txBody>
+          <a:bodyPr/>
+          <a:lstStyle/>
+          <a:p>
+            <a:fld id="{D6ED8A53-8D2F-4011-BE06-EDB0774336BA}" type="slidenum">
+              <a:rPr lang="ru-RU" sz="2000" dirty="0" smtClean="0">
+                <a:solidFill>
+                  <a:schemeClr val="tx1"/>
+                </a:solidFill>
+                <a:latin typeface="Times New Roman"/>
+                <a:cs typeface="Times New Roman"/>
+              </a:rPr>
+              <a:t>7</a:t>
+            </a:fld>
+            <a:endParaRPr lang="ru-RU" sz="2000">
+              <a:solidFill>
+                <a:schemeClr val="tx1"/>
+              </a:solidFill>
+              <a:latin typeface="Times New Roman"/>
+              <a:ea typeface="Calibri"/>
+              <a:cs typeface="Times New Roman"/>
+            </a:endParaRPr>
+          </a:p>
+        </p:txBody>
+      </p:sp>
+      <p:pic>
+        <p:nvPicPr>
+          <p:cNvPr id="13" name="Рисунок 12">
+            <a:extLst>
+              <a:ext uri="{FF2B5EF4-FFF2-40B4-BE49-F238E27FC236}">
+                <a16:creationId xmlns:a16="http://schemas.microsoft.com/office/drawing/2014/main" id="{4E875F94-D2E7-0E2D-5267-8B670B1C8AC0}"/>
+              </a:ext>
+            </a:extLst>
+          </p:cNvPr>
+          <p:cNvPicPr>
+            <a:picLocks noChangeAspect="1"/>
+          </p:cNvPicPr>
+          <p:nvPr/>
+        </p:nvPicPr>
+        <p:blipFill>
+          <a:blip r:embed="rId3">
+            <a:extLst>
+              <a:ext uri="{96DAC541-7B7A-43D3-8B79-37D633B846F1}">
+                <asvg:svgBlip xmlns:asvg="http://schemas.microsoft.com/office/drawing/2016/SVG/main" r:embed="rId4"/>
+              </a:ext>
+            </a:extLst>
+          </a:blip>
+          <a:stretch>
+            <a:fillRect/>
+          </a:stretch>
+        </p:blipFill>
+        <p:spPr>
+          <a:xfrm>
+            <a:off x="351681" y="768972"/>
+            <a:ext cx="8440637" cy="3708649"/>
+          </a:xfrm>
+          <a:prstGeom prst="rect">
+            <a:avLst/>
+          </a:prstGeom>
+        </p:spPr>
+      </p:pic>
+      <p:sp>
+        <p:nvSpPr>
+          <p:cNvPr id="14" name="TextBox 13">
+            <a:extLst>
+              <a:ext uri="{FF2B5EF4-FFF2-40B4-BE49-F238E27FC236}">
+                <a16:creationId xmlns:a16="http://schemas.microsoft.com/office/drawing/2014/main" id="{971BDEBA-A42A-8680-F3A2-087C760E6CFE}"/>
+              </a:ext>
+            </a:extLst>
+          </p:cNvPr>
+          <p:cNvSpPr txBox="1"/>
+          <p:nvPr/>
+        </p:nvSpPr>
+        <p:spPr>
+          <a:xfrm>
+            <a:off x="304801" y="4600686"/>
+            <a:ext cx="8487517" cy="2031325"/>
+          </a:xfrm>
+          <a:prstGeom prst="rect">
+            <a:avLst/>
+          </a:prstGeom>
+          <a:noFill/>
+          <a:ln>
+            <a:solidFill>
+              <a:schemeClr val="tx1"/>
+            </a:solidFill>
+            <a:prstDash val="dash"/>
+          </a:ln>
+        </p:spPr>
+        <p:txBody>
+          <a:bodyPr rot="0" spcFirstLastPara="0" vertOverflow="overflow" horzOverflow="overflow" vert="horz" wrap="square" lIns="91440" tIns="45720" rIns="91440" bIns="45720" numCol="1" spcCol="0" rtlCol="0" fromWordArt="0" anchor="ctr" anchorCtr="0" forceAA="0" compatLnSpc="1">
+            <a:prstTxWarp prst="textNoShape">
+              <a:avLst/>
+            </a:prstTxWarp>
+            <a:spAutoFit/>
+          </a:bodyPr>
+          <a:lstStyle/>
+          <a:p>
+            <a:r>
+              <a:rPr lang="ru-RU" dirty="0">
+                <a:latin typeface="Times New Roman" panose="02020603050405020304" pitchFamily="18" charset="0"/>
+                <a:cs typeface="Times New Roman" panose="02020603050405020304" pitchFamily="18" charset="0"/>
+              </a:rPr>
+              <a:t>Для электрической части разрабатываемого 3</a:t>
+            </a:r>
+            <a:r>
+              <a:rPr lang="en-US" dirty="0">
+                <a:latin typeface="Times New Roman" panose="02020603050405020304" pitchFamily="18" charset="0"/>
+                <a:cs typeface="Times New Roman" panose="02020603050405020304" pitchFamily="18" charset="0"/>
+              </a:rPr>
+              <a:t>D-</a:t>
+            </a:r>
+            <a:r>
+              <a:rPr lang="ru-RU" dirty="0">
+                <a:latin typeface="Times New Roman" panose="02020603050405020304" pitchFamily="18" charset="0"/>
+                <a:cs typeface="Times New Roman" panose="02020603050405020304" pitchFamily="18" charset="0"/>
+              </a:rPr>
+              <a:t>принтера выбрана плата </a:t>
+            </a:r>
+            <a:r>
+              <a:rPr lang="ru-RU" b="1" dirty="0">
+                <a:latin typeface="Times New Roman" panose="02020603050405020304" pitchFamily="18" charset="0"/>
+                <a:cs typeface="Times New Roman" panose="02020603050405020304" pitchFamily="18" charset="0"/>
+              </a:rPr>
+              <a:t>MKS </a:t>
+            </a:r>
+            <a:r>
+              <a:rPr lang="ru-RU" b="1" dirty="0" err="1">
+                <a:latin typeface="Times New Roman" panose="02020603050405020304" pitchFamily="18" charset="0"/>
+                <a:cs typeface="Times New Roman" panose="02020603050405020304" pitchFamily="18" charset="0"/>
+              </a:rPr>
+              <a:t>Robin</a:t>
+            </a:r>
+            <a:r>
+              <a:rPr lang="ru-RU" b="1" dirty="0">
+                <a:latin typeface="Times New Roman" panose="02020603050405020304" pitchFamily="18" charset="0"/>
+                <a:cs typeface="Times New Roman" panose="02020603050405020304" pitchFamily="18" charset="0"/>
+              </a:rPr>
+              <a:t> </a:t>
+            </a:r>
+            <a:r>
+              <a:rPr lang="ru-RU" b="1" dirty="0" err="1">
+                <a:latin typeface="Times New Roman" panose="02020603050405020304" pitchFamily="18" charset="0"/>
+                <a:cs typeface="Times New Roman" panose="02020603050405020304" pitchFamily="18" charset="0"/>
+              </a:rPr>
+              <a:t>Nano</a:t>
+            </a:r>
+            <a:r>
+              <a:rPr lang="ru-RU" b="1" dirty="0">
+                <a:latin typeface="Times New Roman" panose="02020603050405020304" pitchFamily="18" charset="0"/>
+                <a:cs typeface="Times New Roman" panose="02020603050405020304" pitchFamily="18" charset="0"/>
+              </a:rPr>
+              <a:t> V1.2 (7) </a:t>
+            </a:r>
+            <a:r>
+              <a:rPr lang="ru-RU" dirty="0">
+                <a:latin typeface="Times New Roman" panose="02020603050405020304" pitchFamily="18" charset="0"/>
+                <a:cs typeface="Times New Roman" panose="02020603050405020304" pitchFamily="18" charset="0"/>
+              </a:rPr>
+              <a:t>и драйвера TMC2209. Плата управляет двигателями (5), нагревателями (1, 2) и вентиляторами, а также получает сигналы с датчиков (6). </a:t>
+            </a:r>
+            <a:r>
+              <a:rPr lang="ru-RU" b="1" dirty="0" err="1">
+                <a:latin typeface="Times New Roman" panose="02020603050405020304" pitchFamily="18" charset="0"/>
+                <a:cs typeface="Times New Roman" panose="02020603050405020304" pitchFamily="18" charset="0"/>
+              </a:rPr>
+              <a:t>Raspberry</a:t>
+            </a:r>
+            <a:r>
+              <a:rPr lang="ru-RU" b="1" dirty="0">
+                <a:latin typeface="Times New Roman" panose="02020603050405020304" pitchFamily="18" charset="0"/>
+                <a:cs typeface="Times New Roman" panose="02020603050405020304" pitchFamily="18" charset="0"/>
+              </a:rPr>
+              <a:t> </a:t>
+            </a:r>
+            <a:r>
+              <a:rPr lang="ru-RU" b="1" dirty="0" err="1">
+                <a:latin typeface="Times New Roman" panose="02020603050405020304" pitchFamily="18" charset="0"/>
+                <a:cs typeface="Times New Roman" panose="02020603050405020304" pitchFamily="18" charset="0"/>
+              </a:rPr>
+              <a:t>Pi</a:t>
+            </a:r>
+            <a:r>
+              <a:rPr lang="ru-RU" b="1" dirty="0">
+                <a:latin typeface="Times New Roman" panose="02020603050405020304" pitchFamily="18" charset="0"/>
+                <a:cs typeface="Times New Roman" panose="02020603050405020304" pitchFamily="18" charset="0"/>
+              </a:rPr>
+              <a:t> 3B (10) </a:t>
+            </a:r>
+            <a:r>
+              <a:rPr lang="ru-RU" dirty="0">
+                <a:latin typeface="Times New Roman" panose="02020603050405020304" pitchFamily="18" charset="0"/>
+                <a:cs typeface="Times New Roman" panose="02020603050405020304" pitchFamily="18" charset="0"/>
+              </a:rPr>
+              <a:t>обеспечивает подключение камеры (9), сенсорного экрана (8) и обменивается данными с управляющей платой по UART. Блок питания (3) обеспечивает силовые узлы напряжением </a:t>
+            </a:r>
+            <a:r>
+              <a:rPr lang="ru-RU" b="1" dirty="0">
+                <a:latin typeface="Times New Roman" panose="02020603050405020304" pitchFamily="18" charset="0"/>
+                <a:cs typeface="Times New Roman" panose="02020603050405020304" pitchFamily="18" charset="0"/>
+              </a:rPr>
+              <a:t>24 В</a:t>
+            </a:r>
+            <a:r>
+              <a:rPr lang="ru-RU" dirty="0">
+                <a:latin typeface="Times New Roman" panose="02020603050405020304" pitchFamily="18" charset="0"/>
+                <a:cs typeface="Times New Roman" panose="02020603050405020304" pitchFamily="18" charset="0"/>
+              </a:rPr>
+              <a:t>, а DC-DC-преобразователь (4) понижает его до </a:t>
+            </a:r>
+            <a:r>
+              <a:rPr lang="ru-RU" b="1" dirty="0">
+                <a:latin typeface="Times New Roman" panose="02020603050405020304" pitchFamily="18" charset="0"/>
+                <a:cs typeface="Times New Roman" panose="02020603050405020304" pitchFamily="18" charset="0"/>
+              </a:rPr>
+              <a:t>5 В</a:t>
+            </a:r>
+            <a:r>
+              <a:rPr lang="ru-RU" dirty="0">
+                <a:latin typeface="Times New Roman" panose="02020603050405020304" pitchFamily="18" charset="0"/>
+                <a:cs typeface="Times New Roman" panose="02020603050405020304" pitchFamily="18" charset="0"/>
+              </a:rPr>
+              <a:t> для </a:t>
+            </a:r>
+            <a:r>
+              <a:rPr lang="ru-RU" dirty="0" err="1">
+                <a:latin typeface="Times New Roman" panose="02020603050405020304" pitchFamily="18" charset="0"/>
+                <a:cs typeface="Times New Roman" panose="02020603050405020304" pitchFamily="18" charset="0"/>
+              </a:rPr>
+              <a:t>Raspberry</a:t>
+            </a:r>
+            <a:r>
+              <a:rPr lang="ru-RU" dirty="0">
+                <a:latin typeface="Times New Roman" panose="02020603050405020304" pitchFamily="18" charset="0"/>
+                <a:cs typeface="Times New Roman" panose="02020603050405020304" pitchFamily="18" charset="0"/>
+              </a:rPr>
+              <a:t> </a:t>
+            </a:r>
+            <a:r>
+              <a:rPr lang="ru-RU" dirty="0" err="1">
+                <a:latin typeface="Times New Roman" panose="02020603050405020304" pitchFamily="18" charset="0"/>
+                <a:cs typeface="Times New Roman" panose="02020603050405020304" pitchFamily="18" charset="0"/>
+              </a:rPr>
+              <a:t>Pi</a:t>
+            </a:r>
+            <a:r>
+              <a:rPr lang="ru-RU" dirty="0">
+                <a:latin typeface="Times New Roman" panose="02020603050405020304" pitchFamily="18" charset="0"/>
+                <a:cs typeface="Times New Roman" panose="02020603050405020304" pitchFamily="18" charset="0"/>
+              </a:rPr>
+              <a:t> и подключённой периферии.</a:t>
+            </a:r>
+          </a:p>
+        </p:txBody>
+      </p:sp>
+    </p:spTree>
+    <p:extLst>
+      <p:ext uri="{BB962C8B-B14F-4D97-AF65-F5344CB8AC3E}">
+        <p14:creationId xmlns:p14="http://schemas.microsoft.com/office/powerpoint/2010/main" val="128376505"/>
       </p:ext>
     </p:extLst>
   </p:cSld>

--- a/presentation/NIR2_slide01_v2.pptx
+++ b/presentation/NIR2_slide01_v2.pptx
@@ -5,16 +5,19 @@
     <p:sldMasterId id="2147483648" r:id="rId1"/>
   </p:sldMasterIdLst>
   <p:notesMasterIdLst>
-    <p:notesMasterId r:id="rId9"/>
+    <p:notesMasterId r:id="rId12"/>
   </p:notesMasterIdLst>
   <p:sldIdLst>
     <p:sldId id="257" r:id="rId2"/>
     <p:sldId id="258" r:id="rId3"/>
     <p:sldId id="256" r:id="rId4"/>
     <p:sldId id="268" r:id="rId5"/>
-    <p:sldId id="270" r:id="rId6"/>
-    <p:sldId id="271" r:id="rId7"/>
-    <p:sldId id="272" r:id="rId8"/>
+    <p:sldId id="273" r:id="rId6"/>
+    <p:sldId id="270" r:id="rId7"/>
+    <p:sldId id="271" r:id="rId8"/>
+    <p:sldId id="272" r:id="rId9"/>
+    <p:sldId id="274" r:id="rId10"/>
+    <p:sldId id="266" r:id="rId11"/>
   </p:sldIdLst>
   <p:sldSz cx="9144000" cy="6858000" type="screen4x3"/>
   <p:notesSz cx="6858000" cy="9144000"/>
@@ -579,7 +582,7 @@
         <p:cNvPr id="1" name="">
           <a:extLst>
             <a:ext uri="{FF2B5EF4-FFF2-40B4-BE49-F238E27FC236}">
-              <a16:creationId xmlns:a16="http://schemas.microsoft.com/office/drawing/2014/main" id="{B17726DC-CE10-F03F-2142-18D5DEE97B8B}"/>
+              <a16:creationId xmlns:a16="http://schemas.microsoft.com/office/drawing/2014/main" id="{F11BACC8-2C4D-334B-9042-96E69D47FBC5}"/>
             </a:ext>
           </a:extLst>
         </p:cNvPr>
@@ -599,7 +602,7 @@
           <p:cNvPr id="2" name="Образ слайда 1">
             <a:extLst>
               <a:ext uri="{FF2B5EF4-FFF2-40B4-BE49-F238E27FC236}">
-                <a16:creationId xmlns:a16="http://schemas.microsoft.com/office/drawing/2014/main" id="{CBD27571-4120-1AD9-24AF-1F6C37D039DE}"/>
+                <a16:creationId xmlns:a16="http://schemas.microsoft.com/office/drawing/2014/main" id="{22BE1D05-A3F2-9A1C-96D7-51E72924A0B9}"/>
               </a:ext>
             </a:extLst>
           </p:cNvPr>
@@ -617,7 +620,7 @@
           <p:cNvPr id="3" name="Заметки 2">
             <a:extLst>
               <a:ext uri="{FF2B5EF4-FFF2-40B4-BE49-F238E27FC236}">
-                <a16:creationId xmlns:a16="http://schemas.microsoft.com/office/drawing/2014/main" id="{C020C72C-20DC-053F-06DA-226D6D644D97}"/>
+                <a16:creationId xmlns:a16="http://schemas.microsoft.com/office/drawing/2014/main" id="{01E14AF7-2AA3-67C6-62C2-2ADB9EC803C7}"/>
               </a:ext>
             </a:extLst>
           </p:cNvPr>
@@ -633,7 +636,7 @@
           <a:bodyPr/>
           <a:lstStyle/>
           <a:p>
-            <a:endParaRPr lang="ru-RU" dirty="0"/>
+            <a:endParaRPr lang="ru-RU"/>
           </a:p>
         </p:txBody>
       </p:sp>
@@ -642,7 +645,7 @@
           <p:cNvPr id="4" name="Номер слайда 3">
             <a:extLst>
               <a:ext uri="{FF2B5EF4-FFF2-40B4-BE49-F238E27FC236}">
-                <a16:creationId xmlns:a16="http://schemas.microsoft.com/office/drawing/2014/main" id="{55F1735C-DD43-29D0-C068-51A4DFD82638}"/>
+                <a16:creationId xmlns:a16="http://schemas.microsoft.com/office/drawing/2014/main" id="{0D686308-0247-4379-103C-289F8CA0A19D}"/>
               </a:ext>
             </a:extLst>
           </p:cNvPr>
@@ -669,7 +672,7 @@
     </p:spTree>
     <p:extLst>
       <p:ext uri="{BB962C8B-B14F-4D97-AF65-F5344CB8AC3E}">
-        <p14:creationId xmlns:p14="http://schemas.microsoft.com/office/powerpoint/2010/main" val="3979846337"/>
+        <p14:creationId xmlns:p14="http://schemas.microsoft.com/office/powerpoint/2010/main" val="2033981817"/>
       </p:ext>
     </p:extLst>
   </p:cSld>
@@ -777,7 +780,7 @@
     </p:spTree>
     <p:extLst>
       <p:ext uri="{BB962C8B-B14F-4D97-AF65-F5344CB8AC3E}">
-        <p14:creationId xmlns:p14="http://schemas.microsoft.com/office/powerpoint/2010/main" val="3040273396"/>
+        <p14:creationId xmlns:p14="http://schemas.microsoft.com/office/powerpoint/2010/main" val="3979846337"/>
       </p:ext>
     </p:extLst>
   </p:cSld>
@@ -885,7 +888,223 @@
     </p:spTree>
     <p:extLst>
       <p:ext uri="{BB962C8B-B14F-4D97-AF65-F5344CB8AC3E}">
+        <p14:creationId xmlns:p14="http://schemas.microsoft.com/office/powerpoint/2010/main" val="3040273396"/>
+      </p:ext>
+    </p:extLst>
+  </p:cSld>
+  <p:clrMapOvr>
+    <a:masterClrMapping/>
+  </p:clrMapOvr>
+</p:notes>
+</file>
+
+<file path=ppt/notesSlides/notesSlide7.xml><?xml version="1.0" encoding="utf-8"?>
+<p:notes xmlns:a="http://schemas.openxmlformats.org/drawingml/2006/main" xmlns:r="http://schemas.openxmlformats.org/officeDocument/2006/relationships" xmlns:p="http://schemas.openxmlformats.org/presentationml/2006/main">
+  <p:cSld>
+    <p:spTree>
+      <p:nvGrpSpPr>
+        <p:cNvPr id="1" name="">
+          <a:extLst>
+            <a:ext uri="{FF2B5EF4-FFF2-40B4-BE49-F238E27FC236}">
+              <a16:creationId xmlns:a16="http://schemas.microsoft.com/office/drawing/2014/main" id="{B17726DC-CE10-F03F-2142-18D5DEE97B8B}"/>
+            </a:ext>
+          </a:extLst>
+        </p:cNvPr>
+        <p:cNvGrpSpPr/>
+        <p:nvPr/>
+      </p:nvGrpSpPr>
+      <p:grpSpPr>
+        <a:xfrm>
+          <a:off x="0" y="0"/>
+          <a:ext cx="0" cy="0"/>
+          <a:chOff x="0" y="0"/>
+          <a:chExt cx="0" cy="0"/>
+        </a:xfrm>
+      </p:grpSpPr>
+      <p:sp>
+        <p:nvSpPr>
+          <p:cNvPr id="2" name="Образ слайда 1">
+            <a:extLst>
+              <a:ext uri="{FF2B5EF4-FFF2-40B4-BE49-F238E27FC236}">
+                <a16:creationId xmlns:a16="http://schemas.microsoft.com/office/drawing/2014/main" id="{CBD27571-4120-1AD9-24AF-1F6C37D039DE}"/>
+              </a:ext>
+            </a:extLst>
+          </p:cNvPr>
+          <p:cNvSpPr>
+            <a:spLocks noGrp="1" noRot="1" noChangeAspect="1"/>
+          </p:cNvSpPr>
+          <p:nvPr>
+            <p:ph type="sldImg"/>
+          </p:nvPr>
+        </p:nvSpPr>
+        <p:spPr/>
+      </p:sp>
+      <p:sp>
+        <p:nvSpPr>
+          <p:cNvPr id="3" name="Заметки 2">
+            <a:extLst>
+              <a:ext uri="{FF2B5EF4-FFF2-40B4-BE49-F238E27FC236}">
+                <a16:creationId xmlns:a16="http://schemas.microsoft.com/office/drawing/2014/main" id="{C020C72C-20DC-053F-06DA-226D6D644D97}"/>
+              </a:ext>
+            </a:extLst>
+          </p:cNvPr>
+          <p:cNvSpPr>
+            <a:spLocks noGrp="1"/>
+          </p:cNvSpPr>
+          <p:nvPr>
+            <p:ph type="body" idx="1"/>
+          </p:nvPr>
+        </p:nvSpPr>
+        <p:spPr/>
+        <p:txBody>
+          <a:bodyPr/>
+          <a:lstStyle/>
+          <a:p>
+            <a:endParaRPr lang="ru-RU" dirty="0"/>
+          </a:p>
+        </p:txBody>
+      </p:sp>
+      <p:sp>
+        <p:nvSpPr>
+          <p:cNvPr id="4" name="Номер слайда 3">
+            <a:extLst>
+              <a:ext uri="{FF2B5EF4-FFF2-40B4-BE49-F238E27FC236}">
+                <a16:creationId xmlns:a16="http://schemas.microsoft.com/office/drawing/2014/main" id="{55F1735C-DD43-29D0-C068-51A4DFD82638}"/>
+              </a:ext>
+            </a:extLst>
+          </p:cNvPr>
+          <p:cNvSpPr>
+            <a:spLocks noGrp="1"/>
+          </p:cNvSpPr>
+          <p:nvPr>
+            <p:ph type="sldNum" sz="quarter" idx="5"/>
+          </p:nvPr>
+        </p:nvSpPr>
+        <p:spPr/>
+        <p:txBody>
+          <a:bodyPr/>
+          <a:lstStyle/>
+          <a:p>
+            <a:fld id="{8C7347D7-6652-406A-AA51-ABE302EA4CF8}" type="slidenum">
+              <a:rPr lang="ru-RU" smtClean="0"/>
+              <a:t>8</a:t>
+            </a:fld>
+            <a:endParaRPr lang="ru-RU"/>
+          </a:p>
+        </p:txBody>
+      </p:sp>
+    </p:spTree>
+    <p:extLst>
+      <p:ext uri="{BB962C8B-B14F-4D97-AF65-F5344CB8AC3E}">
         <p14:creationId xmlns:p14="http://schemas.microsoft.com/office/powerpoint/2010/main" val="879894849"/>
+      </p:ext>
+    </p:extLst>
+  </p:cSld>
+  <p:clrMapOvr>
+    <a:masterClrMapping/>
+  </p:clrMapOvr>
+</p:notes>
+</file>
+
+<file path=ppt/notesSlides/notesSlide8.xml><?xml version="1.0" encoding="utf-8"?>
+<p:notes xmlns:a="http://schemas.openxmlformats.org/drawingml/2006/main" xmlns:r="http://schemas.openxmlformats.org/officeDocument/2006/relationships" xmlns:p="http://schemas.openxmlformats.org/presentationml/2006/main">
+  <p:cSld>
+    <p:spTree>
+      <p:nvGrpSpPr>
+        <p:cNvPr id="1" name="">
+          <a:extLst>
+            <a:ext uri="{FF2B5EF4-FFF2-40B4-BE49-F238E27FC236}">
+              <a16:creationId xmlns:a16="http://schemas.microsoft.com/office/drawing/2014/main" id="{B17726DC-CE10-F03F-2142-18D5DEE97B8B}"/>
+            </a:ext>
+          </a:extLst>
+        </p:cNvPr>
+        <p:cNvGrpSpPr/>
+        <p:nvPr/>
+      </p:nvGrpSpPr>
+      <p:grpSpPr>
+        <a:xfrm>
+          <a:off x="0" y="0"/>
+          <a:ext cx="0" cy="0"/>
+          <a:chOff x="0" y="0"/>
+          <a:chExt cx="0" cy="0"/>
+        </a:xfrm>
+      </p:grpSpPr>
+      <p:sp>
+        <p:nvSpPr>
+          <p:cNvPr id="2" name="Образ слайда 1">
+            <a:extLst>
+              <a:ext uri="{FF2B5EF4-FFF2-40B4-BE49-F238E27FC236}">
+                <a16:creationId xmlns:a16="http://schemas.microsoft.com/office/drawing/2014/main" id="{CBD27571-4120-1AD9-24AF-1F6C37D039DE}"/>
+              </a:ext>
+            </a:extLst>
+          </p:cNvPr>
+          <p:cNvSpPr>
+            <a:spLocks noGrp="1" noRot="1" noChangeAspect="1"/>
+          </p:cNvSpPr>
+          <p:nvPr>
+            <p:ph type="sldImg"/>
+          </p:nvPr>
+        </p:nvSpPr>
+        <p:spPr/>
+      </p:sp>
+      <p:sp>
+        <p:nvSpPr>
+          <p:cNvPr id="3" name="Заметки 2">
+            <a:extLst>
+              <a:ext uri="{FF2B5EF4-FFF2-40B4-BE49-F238E27FC236}">
+                <a16:creationId xmlns:a16="http://schemas.microsoft.com/office/drawing/2014/main" id="{C020C72C-20DC-053F-06DA-226D6D644D97}"/>
+              </a:ext>
+            </a:extLst>
+          </p:cNvPr>
+          <p:cNvSpPr>
+            <a:spLocks noGrp="1"/>
+          </p:cNvSpPr>
+          <p:nvPr>
+            <p:ph type="body" idx="1"/>
+          </p:nvPr>
+        </p:nvSpPr>
+        <p:spPr/>
+        <p:txBody>
+          <a:bodyPr/>
+          <a:lstStyle/>
+          <a:p>
+            <a:endParaRPr lang="ru-RU" dirty="0"/>
+          </a:p>
+        </p:txBody>
+      </p:sp>
+      <p:sp>
+        <p:nvSpPr>
+          <p:cNvPr id="4" name="Номер слайда 3">
+            <a:extLst>
+              <a:ext uri="{FF2B5EF4-FFF2-40B4-BE49-F238E27FC236}">
+                <a16:creationId xmlns:a16="http://schemas.microsoft.com/office/drawing/2014/main" id="{55F1735C-DD43-29D0-C068-51A4DFD82638}"/>
+              </a:ext>
+            </a:extLst>
+          </p:cNvPr>
+          <p:cNvSpPr>
+            <a:spLocks noGrp="1"/>
+          </p:cNvSpPr>
+          <p:nvPr>
+            <p:ph type="sldNum" sz="quarter" idx="5"/>
+          </p:nvPr>
+        </p:nvSpPr>
+        <p:spPr/>
+        <p:txBody>
+          <a:bodyPr/>
+          <a:lstStyle/>
+          <a:p>
+            <a:fld id="{8C7347D7-6652-406A-AA51-ABE302EA4CF8}" type="slidenum">
+              <a:rPr lang="ru-RU" smtClean="0"/>
+              <a:t>9</a:t>
+            </a:fld>
+            <a:endParaRPr lang="ru-RU"/>
+          </a:p>
+        </p:txBody>
+      </p:sp>
+    </p:spTree>
+    <p:extLst>
+      <p:ext uri="{BB962C8B-B14F-4D97-AF65-F5344CB8AC3E}">
+        <p14:creationId xmlns:p14="http://schemas.microsoft.com/office/powerpoint/2010/main" val="2475953112"/>
       </p:ext>
     </p:extLst>
   </p:cSld>
@@ -5159,6 +5378,356 @@
 </p:sld>
 </file>
 
+<file path=ppt/slides/slide10.xml><?xml version="1.0" encoding="utf-8"?>
+<p:sld xmlns:a="http://schemas.openxmlformats.org/drawingml/2006/main" xmlns:r="http://schemas.openxmlformats.org/officeDocument/2006/relationships" xmlns:p="http://schemas.openxmlformats.org/presentationml/2006/main">
+  <p:cSld>
+    <p:spTree>
+      <p:nvGrpSpPr>
+        <p:cNvPr id="1" name=""/>
+        <p:cNvGrpSpPr/>
+        <p:nvPr/>
+      </p:nvGrpSpPr>
+      <p:grpSpPr>
+        <a:xfrm>
+          <a:off x="0" y="0"/>
+          <a:ext cx="0" cy="0"/>
+          <a:chOff x="0" y="0"/>
+          <a:chExt cx="0" cy="0"/>
+        </a:xfrm>
+      </p:grpSpPr>
+      <p:sp>
+        <p:nvSpPr>
+          <p:cNvPr id="3" name="Объект 2"/>
+          <p:cNvSpPr>
+            <a:spLocks noGrp="1"/>
+          </p:cNvSpPr>
+          <p:nvPr>
+            <p:ph idx="1"/>
+          </p:nvPr>
+        </p:nvSpPr>
+        <p:spPr>
+          <a:xfrm>
+            <a:off x="200634" y="1034005"/>
+            <a:ext cx="8736990" cy="5827551"/>
+          </a:xfrm>
+        </p:spPr>
+        <p:txBody>
+          <a:bodyPr vert="horz" lIns="91440" tIns="45720" rIns="91440" bIns="45720" rtlCol="0" anchor="ctr">
+            <a:noAutofit/>
+          </a:bodyPr>
+          <a:lstStyle/>
+          <a:p>
+            <a:pPr marL="0" indent="0">
+              <a:lnSpc>
+                <a:spcPct val="100000"/>
+              </a:lnSpc>
+              <a:buNone/>
+            </a:pPr>
+            <a:r>
+              <a:rPr lang="ru-RU" sz="2000" dirty="0">
+                <a:latin typeface="Times New Roman" panose="02020603050405020304" pitchFamily="18" charset="0"/>
+                <a:cs typeface="Times New Roman" panose="02020603050405020304" pitchFamily="18" charset="0"/>
+              </a:rPr>
+              <a:t>	Цель и задачи моей научно-исследовательской работы выполнены:</a:t>
+            </a:r>
+            <a:endParaRPr lang="ru-RU" sz="2000" dirty="0">
+              <a:latin typeface="Times New Roman" panose="02020603050405020304" pitchFamily="18" charset="0"/>
+              <a:ea typeface="Calibri"/>
+              <a:cs typeface="Times New Roman" panose="02020603050405020304" pitchFamily="18" charset="0"/>
+            </a:endParaRPr>
+          </a:p>
+          <a:p>
+            <a:pPr>
+              <a:lnSpc>
+                <a:spcPct val="100000"/>
+              </a:lnSpc>
+            </a:pPr>
+            <a:r>
+              <a:rPr lang="ru-RU" sz="2000" dirty="0">
+                <a:solidFill>
+                  <a:srgbClr val="000000"/>
+                </a:solidFill>
+                <a:latin typeface="Times New Roman" panose="02020603050405020304" pitchFamily="18" charset="0"/>
+                <a:cs typeface="Times New Roman" panose="02020603050405020304" pitchFamily="18" charset="0"/>
+              </a:rPr>
+              <a:t>Изучены дефекты FDM-печати и выбран целевого дефекта для автоматического обнаружения.</a:t>
+            </a:r>
+          </a:p>
+          <a:p>
+            <a:pPr>
+              <a:lnSpc>
+                <a:spcPct val="100000"/>
+              </a:lnSpc>
+            </a:pPr>
+            <a:r>
+              <a:rPr lang="ru-RU" sz="2000" dirty="0">
+                <a:solidFill>
+                  <a:srgbClr val="000000"/>
+                </a:solidFill>
+                <a:latin typeface="Times New Roman" panose="02020603050405020304" pitchFamily="18" charset="0"/>
+                <a:cs typeface="Times New Roman" panose="02020603050405020304" pitchFamily="18" charset="0"/>
+              </a:rPr>
+              <a:t>Сформирован датасет: произведен поиск данных, балансировка классов, </a:t>
+            </a:r>
+            <a:r>
+              <a:rPr lang="ru-RU" sz="2000" dirty="0" err="1">
+                <a:solidFill>
+                  <a:srgbClr val="000000"/>
+                </a:solidFill>
+                <a:latin typeface="Times New Roman" panose="02020603050405020304" pitchFamily="18" charset="0"/>
+                <a:cs typeface="Times New Roman" panose="02020603050405020304" pitchFamily="18" charset="0"/>
+              </a:rPr>
+              <a:t>аугментирование</a:t>
+            </a:r>
+            <a:r>
+              <a:rPr lang="ru-RU" sz="2000" dirty="0">
+                <a:solidFill>
+                  <a:srgbClr val="000000"/>
+                </a:solidFill>
+                <a:latin typeface="Times New Roman" panose="02020603050405020304" pitchFamily="18" charset="0"/>
+                <a:cs typeface="Times New Roman" panose="02020603050405020304" pitchFamily="18" charset="0"/>
+              </a:rPr>
+              <a:t>, разделение на обучающую и тестовую выборки; </a:t>
+            </a:r>
+          </a:p>
+          <a:p>
+            <a:pPr marL="214630" indent="-214630">
+              <a:lnSpc>
+                <a:spcPct val="100000"/>
+              </a:lnSpc>
+              <a:spcBef>
+                <a:spcPts val="0"/>
+              </a:spcBef>
+              <a:buFont typeface="Arial,Sans-Serif" panose="020B0604020202020204" pitchFamily="34" charset="0"/>
+            </a:pPr>
+            <a:r>
+              <a:rPr lang="ru-RU" sz="2000" dirty="0">
+                <a:latin typeface="Times New Roman" panose="02020603050405020304" pitchFamily="18" charset="0"/>
+                <a:ea typeface="Calibri"/>
+                <a:cs typeface="Times New Roman" panose="02020603050405020304" pitchFamily="18" charset="0"/>
+              </a:rPr>
+              <a:t>Обучена нейронная сеть для распознавания дефекта «Спагетти» на основе изображений печатей; </a:t>
+            </a:r>
+            <a:endParaRPr lang="en-US" sz="2000" dirty="0">
+              <a:latin typeface="Times New Roman" panose="02020603050405020304" pitchFamily="18" charset="0"/>
+              <a:ea typeface="Calibri"/>
+              <a:cs typeface="Times New Roman" panose="02020603050405020304" pitchFamily="18" charset="0"/>
+            </a:endParaRPr>
+          </a:p>
+          <a:p>
+            <a:pPr>
+              <a:lnSpc>
+                <a:spcPct val="100000"/>
+              </a:lnSpc>
+            </a:pPr>
+            <a:r>
+              <a:rPr lang="ru-RU" sz="2000" dirty="0">
+                <a:latin typeface="Times New Roman" panose="02020603050405020304" pitchFamily="18" charset="0"/>
+                <a:ea typeface="Calibri"/>
+                <a:cs typeface="Times New Roman" panose="02020603050405020304" pitchFamily="18" charset="0"/>
+              </a:rPr>
+              <a:t>Разработан, собран и отлажен аппаратно-программный комплекса экспериментального 3D-принтера.</a:t>
+            </a:r>
+            <a:endParaRPr lang="ru-RU" sz="2000" dirty="0">
+              <a:solidFill>
+                <a:srgbClr val="000000"/>
+              </a:solidFill>
+              <a:latin typeface="Times New Roman" panose="02020603050405020304" pitchFamily="18" charset="0"/>
+              <a:cs typeface="Times New Roman" panose="02020603050405020304" pitchFamily="18" charset="0"/>
+            </a:endParaRPr>
+          </a:p>
+          <a:p>
+            <a:pPr>
+              <a:lnSpc>
+                <a:spcPct val="100000"/>
+              </a:lnSpc>
+            </a:pPr>
+            <a:r>
+              <a:rPr lang="ru-RU" sz="2000" dirty="0">
+                <a:latin typeface="Times New Roman" panose="02020603050405020304" pitchFamily="18" charset="0"/>
+                <a:cs typeface="Times New Roman" panose="02020603050405020304" pitchFamily="18" charset="0"/>
+              </a:rPr>
+              <a:t>Проведен тестовый запуск работы системы контроля и 3D-принтера в процессе печати.</a:t>
+            </a:r>
+          </a:p>
+          <a:p>
+            <a:pPr>
+              <a:lnSpc>
+                <a:spcPct val="100000"/>
+              </a:lnSpc>
+            </a:pPr>
+            <a:endParaRPr lang="ru-RU" sz="2000" dirty="0">
+              <a:latin typeface="Times New Roman" panose="02020603050405020304" pitchFamily="18" charset="0"/>
+              <a:cs typeface="Times New Roman" panose="02020603050405020304" pitchFamily="18" charset="0"/>
+            </a:endParaRPr>
+          </a:p>
+          <a:p>
+            <a:pPr marL="0" indent="0">
+              <a:lnSpc>
+                <a:spcPct val="100000"/>
+              </a:lnSpc>
+              <a:buNone/>
+            </a:pPr>
+            <a:r>
+              <a:rPr lang="ru-RU" sz="2000" dirty="0">
+                <a:latin typeface="Times New Roman" panose="02020603050405020304" pitchFamily="18" charset="0"/>
+                <a:cs typeface="Times New Roman" panose="02020603050405020304" pitchFamily="18" charset="0"/>
+              </a:rPr>
+              <a:t>	Цель и задачи моей научно-исследовательской работы выполнены:</a:t>
+            </a:r>
+            <a:endParaRPr lang="ru-RU" sz="2000" dirty="0">
+              <a:latin typeface="Times New Roman" panose="02020603050405020304" pitchFamily="18" charset="0"/>
+              <a:ea typeface="Calibri"/>
+              <a:cs typeface="Times New Roman" panose="02020603050405020304" pitchFamily="18" charset="0"/>
+            </a:endParaRPr>
+          </a:p>
+          <a:p>
+            <a:pPr>
+              <a:lnSpc>
+                <a:spcPct val="100000"/>
+              </a:lnSpc>
+            </a:pPr>
+            <a:endParaRPr lang="ru-RU" sz="2000" dirty="0">
+              <a:latin typeface="Times New Roman" panose="02020603050405020304" pitchFamily="18" charset="0"/>
+              <a:cs typeface="Times New Roman" panose="02020603050405020304" pitchFamily="18" charset="0"/>
+            </a:endParaRPr>
+          </a:p>
+          <a:p>
+            <a:pPr>
+              <a:lnSpc>
+                <a:spcPct val="100000"/>
+              </a:lnSpc>
+            </a:pPr>
+            <a:endParaRPr lang="ru-RU" sz="2000" dirty="0">
+              <a:latin typeface="Times New Roman" panose="02020603050405020304" pitchFamily="18" charset="0"/>
+              <a:cs typeface="Times New Roman" panose="02020603050405020304" pitchFamily="18" charset="0"/>
+            </a:endParaRPr>
+          </a:p>
+          <a:p>
+            <a:pPr>
+              <a:lnSpc>
+                <a:spcPct val="100000"/>
+              </a:lnSpc>
+            </a:pPr>
+            <a:endParaRPr lang="ru-RU" sz="2000" dirty="0">
+              <a:latin typeface="Times New Roman" panose="02020603050405020304" pitchFamily="18" charset="0"/>
+              <a:ea typeface="Calibri"/>
+              <a:cs typeface="Times New Roman" panose="02020603050405020304" pitchFamily="18" charset="0"/>
+            </a:endParaRPr>
+          </a:p>
+        </p:txBody>
+      </p:sp>
+      <p:sp>
+        <p:nvSpPr>
+          <p:cNvPr id="4" name="Замещающий номер слайда 3"/>
+          <p:cNvSpPr>
+            <a:spLocks noGrp="1"/>
+          </p:cNvSpPr>
+          <p:nvPr>
+            <p:ph type="sldNum" sz="quarter" idx="12"/>
+          </p:nvPr>
+        </p:nvSpPr>
+        <p:spPr>
+          <a:xfrm>
+            <a:off x="7088886" y="6493511"/>
+            <a:ext cx="2057400" cy="365125"/>
+          </a:xfrm>
+        </p:spPr>
+        <p:txBody>
+          <a:bodyPr/>
+          <a:lstStyle/>
+          <a:p>
+            <a:fld id="{D6ED8A53-8D2F-4011-BE06-EDB0774336BA}" type="slidenum">
+              <a:rPr lang="ru-RU" sz="2000" dirty="0" smtClean="0">
+                <a:solidFill>
+                  <a:schemeClr val="tx1"/>
+                </a:solidFill>
+                <a:latin typeface="Times New Roman"/>
+                <a:cs typeface="Times New Roman"/>
+              </a:rPr>
+              <a:t>10</a:t>
+            </a:fld>
+            <a:endParaRPr lang="ru-RU" sz="2000">
+              <a:solidFill>
+                <a:schemeClr val="tx1"/>
+              </a:solidFill>
+              <a:latin typeface="Times New Roman"/>
+              <a:cs typeface="Times New Roman"/>
+            </a:endParaRPr>
+          </a:p>
+        </p:txBody>
+      </p:sp>
+      <p:sp>
+        <p:nvSpPr>
+          <p:cNvPr id="6" name="Заголовок 1">
+            <a:extLst>
+              <a:ext uri="{FF2B5EF4-FFF2-40B4-BE49-F238E27FC236}">
+                <a16:creationId xmlns:a16="http://schemas.microsoft.com/office/drawing/2014/main" id="{A5D6DF51-0B62-79A6-6D5B-9EBEFC4103B7}"/>
+              </a:ext>
+            </a:extLst>
+          </p:cNvPr>
+          <p:cNvSpPr txBox="1">
+            <a:spLocks/>
+          </p:cNvSpPr>
+          <p:nvPr/>
+        </p:nvSpPr>
+        <p:spPr>
+          <a:xfrm>
+            <a:off x="701718" y="3637"/>
+            <a:ext cx="7886700" cy="712868"/>
+          </a:xfrm>
+          <a:prstGeom prst="rect">
+            <a:avLst/>
+          </a:prstGeom>
+        </p:spPr>
+        <p:txBody>
+          <a:bodyPr vert="horz" lIns="91440" tIns="45720" rIns="91440" bIns="45720" rtlCol="0" anchor="ctr">
+            <a:normAutofit/>
+          </a:bodyPr>
+          <a:lstStyle>
+            <a:lvl1pPr algn="l" defTabSz="914400" rtl="0" eaLnBrk="1" latinLnBrk="0" hangingPunct="1">
+              <a:lnSpc>
+                <a:spcPct val="90000"/>
+              </a:lnSpc>
+              <a:spcBef>
+                <a:spcPct val="0"/>
+              </a:spcBef>
+              <a:buNone/>
+              <a:defRPr sz="4400" kern="1200">
+                <a:solidFill>
+                  <a:schemeClr val="tx1"/>
+                </a:solidFill>
+                <a:latin typeface="+mj-lt"/>
+                <a:ea typeface="+mj-ea"/>
+                <a:cs typeface="+mj-cs"/>
+              </a:defRPr>
+            </a:lvl1pPr>
+          </a:lstStyle>
+          <a:p>
+            <a:pPr algn="ctr"/>
+            <a:r>
+              <a:rPr lang="ru-RU">
+                <a:latin typeface="Times New Roman"/>
+                <a:ea typeface="Calibri"/>
+                <a:cs typeface="Times New Roman"/>
+              </a:rPr>
+              <a:t>Заключение</a:t>
+            </a:r>
+            <a:endParaRPr lang="ru-RU">
+              <a:ea typeface="Calibri Light"/>
+              <a:cs typeface="Calibri Light"/>
+            </a:endParaRPr>
+          </a:p>
+        </p:txBody>
+      </p:sp>
+    </p:spTree>
+  </p:cSld>
+  <p:clrMapOvr>
+    <a:masterClrMapping/>
+  </p:clrMapOvr>
+</p:sld>
+</file>
+
 <file path=ppt/slides/slide2.xml><?xml version="1.0" encoding="utf-8"?>
 <p:sld xmlns:a="http://schemas.openxmlformats.org/drawingml/2006/main" xmlns:r="http://schemas.openxmlformats.org/officeDocument/2006/relationships" xmlns:p="http://schemas.openxmlformats.org/presentationml/2006/main">
   <p:cSld>
@@ -5531,7 +6100,7 @@
               </a:defRPr>
             </a:pPr>
             <a:r>
-              <a:rPr sz="4400" b="0" dirty="0">
+              <a:rPr sz="4000" b="0" dirty="0">
                 <a:solidFill>
                   <a:srgbClr val="000000"/>
                 </a:solidFill>
@@ -5542,7 +6111,7 @@
               <a:t>В </a:t>
             </a:r>
             <a:r>
-              <a:rPr sz="4400" b="0" dirty="0" err="1">
+              <a:rPr sz="4000" b="0" dirty="0" err="1">
                 <a:solidFill>
                   <a:srgbClr val="000000"/>
                 </a:solidFill>
@@ -5553,7 +6122,7 @@
               <a:t>чем</a:t>
             </a:r>
             <a:r>
-              <a:rPr sz="4400" b="0" dirty="0">
+              <a:rPr sz="4000" b="0" dirty="0">
                 <a:solidFill>
                   <a:srgbClr val="000000"/>
                 </a:solidFill>
@@ -5564,7 +6133,7 @@
               <a:t> </a:t>
             </a:r>
             <a:r>
-              <a:rPr sz="4400" b="0" dirty="0" err="1">
+              <a:rPr sz="4000" b="0" dirty="0" err="1">
                 <a:solidFill>
                   <a:srgbClr val="000000"/>
                 </a:solidFill>
@@ -5575,7 +6144,7 @@
               <a:t>заключается</a:t>
             </a:r>
             <a:r>
-              <a:rPr sz="4400" b="0" dirty="0">
+              <a:rPr sz="4000" b="0" dirty="0">
                 <a:solidFill>
                   <a:srgbClr val="000000"/>
                 </a:solidFill>
@@ -5586,7 +6155,7 @@
               <a:t> </a:t>
             </a:r>
             <a:r>
-              <a:rPr sz="4400" b="0" dirty="0" err="1">
+              <a:rPr sz="4000" b="0" dirty="0" err="1">
                 <a:solidFill>
                   <a:srgbClr val="000000"/>
                 </a:solidFill>
@@ -5597,7 +6166,7 @@
               <a:t>проблема</a:t>
             </a:r>
             <a:r>
-              <a:rPr sz="4400" b="0" dirty="0">
+              <a:rPr sz="4000" b="0" dirty="0">
                 <a:solidFill>
                   <a:srgbClr val="000000"/>
                 </a:solidFill>
@@ -5607,7 +6176,7 @@
               </a:rPr>
               <a:t>:</a:t>
             </a:r>
-            <a:endParaRPr dirty="0"/>
+            <a:endParaRPr sz="4000" dirty="0"/>
           </a:p>
         </p:txBody>
       </p:sp>
@@ -6372,12 +6941,12 @@
           <a:p>
             <a:pPr algn="ctr"/>
             <a:r>
-              <a:rPr lang="ru-RU" dirty="0">
+              <a:rPr lang="ru-RU" sz="4000" dirty="0">
                 <a:latin typeface="Times New Roman" panose="02020603050405020304" pitchFamily="18" charset="0"/>
                 <a:ea typeface="Calibri"/>
                 <a:cs typeface="Times New Roman" panose="02020603050405020304" pitchFamily="18" charset="0"/>
               </a:rPr>
-              <a:t>Обучение нейросети</a:t>
+              <a:t>Подготовка обучения нейросети</a:t>
             </a:r>
           </a:p>
         </p:txBody>
@@ -6658,6 +7227,145 @@
               </a:rPr>
               <a:t> и тестовая выборки содержат только исходные изображения без аугментаций.</a:t>
             </a:r>
+          </a:p>
+        </p:txBody>
+      </p:sp>
+      <p:sp>
+        <p:nvSpPr>
+          <p:cNvPr id="3" name="TextBox 26">
+            <a:extLst>
+              <a:ext uri="{FF2B5EF4-FFF2-40B4-BE49-F238E27FC236}">
+                <a16:creationId xmlns:a16="http://schemas.microsoft.com/office/drawing/2014/main" id="{DAC2E642-4E22-B5B0-DB31-19292E122F11}"/>
+              </a:ext>
+            </a:extLst>
+          </p:cNvPr>
+          <p:cNvSpPr>
+            <a:spLocks noGrp="1"/>
+          </p:cNvSpPr>
+          <p:nvPr/>
+        </p:nvSpPr>
+        <p:spPr>
+          <a:xfrm>
+            <a:off x="4634025" y="5970317"/>
+            <a:ext cx="4073130" cy="579120"/>
+          </a:xfrm>
+          <a:prstGeom prst="rect">
+            <a:avLst/>
+          </a:prstGeom>
+          <a:noFill/>
+        </p:spPr>
+        <p:txBody>
+          <a:bodyPr rot="0" spcFirstLastPara="0" vert="horz" wrap="square" lIns="91440" tIns="45720" rIns="91440" bIns="45720" anchor="ctr">
+            <a:noAutofit/>
+          </a:bodyPr>
+          <a:lstStyle>
+            <a:defPPr algn="l">
+              <a:defRPr sz="1600" b="0">
+                <a:solidFill>
+                  <a:srgbClr val="000000"/>
+                </a:solidFill>
+                <a:latin typeface="Times New Roman"/>
+                <a:ea typeface="Times New Roman"/>
+                <a:cs typeface="Times New Roman"/>
+              </a:defRPr>
+            </a:defPPr>
+          </a:lstStyle>
+          <a:p>
+            <a:pPr algn="ctr">
+              <a:defRPr sz="1600" b="0">
+                <a:solidFill>
+                  <a:srgbClr val="000000"/>
+                </a:solidFill>
+                <a:latin typeface="Times New Roman"/>
+                <a:ea typeface="Times New Roman"/>
+                <a:cs typeface="Times New Roman"/>
+              </a:defRPr>
+            </a:pPr>
+            <a:r>
+              <a:rPr sz="1600" b="0" dirty="0" err="1">
+                <a:solidFill>
+                  <a:srgbClr val="000000"/>
+                </a:solidFill>
+                <a:latin typeface="Times New Roman"/>
+                <a:ea typeface="Times New Roman"/>
+                <a:cs typeface="Times New Roman"/>
+              </a:rPr>
+              <a:t>Рис</a:t>
+            </a:r>
+            <a:r>
+              <a:rPr sz="1600" b="0" dirty="0">
+                <a:solidFill>
+                  <a:srgbClr val="000000"/>
+                </a:solidFill>
+                <a:latin typeface="Times New Roman"/>
+                <a:ea typeface="Times New Roman"/>
+                <a:cs typeface="Times New Roman"/>
+              </a:rPr>
+              <a:t>. </a:t>
+            </a:r>
+            <a:r>
+              <a:rPr lang="ru-RU" sz="1600" b="0" dirty="0">
+                <a:solidFill>
+                  <a:srgbClr val="000000"/>
+                </a:solidFill>
+                <a:latin typeface="Times New Roman"/>
+                <a:ea typeface="Times New Roman"/>
+                <a:cs typeface="Times New Roman"/>
+              </a:rPr>
+              <a:t>3</a:t>
+            </a:r>
+            <a:r>
+              <a:rPr sz="1600" b="0" dirty="0">
+                <a:solidFill>
+                  <a:srgbClr val="000000"/>
+                </a:solidFill>
+                <a:latin typeface="Times New Roman"/>
+                <a:ea typeface="Times New Roman"/>
+                <a:cs typeface="Times New Roman"/>
+              </a:rPr>
+              <a:t> – </a:t>
+            </a:r>
+            <a:r>
+              <a:rPr lang="ru-RU" sz="1600" b="0" dirty="0">
+                <a:solidFill>
+                  <a:srgbClr val="000000"/>
+                </a:solidFill>
+                <a:latin typeface="Times New Roman"/>
+                <a:ea typeface="Times New Roman"/>
+                <a:cs typeface="Times New Roman"/>
+              </a:rPr>
+              <a:t>Диаграмма статистики печатей на ферме компании «</a:t>
+            </a:r>
+            <a:r>
+              <a:rPr lang="en-US" sz="1600" b="0" dirty="0" err="1">
+                <a:solidFill>
+                  <a:srgbClr val="000000"/>
+                </a:solidFill>
+                <a:latin typeface="Times New Roman"/>
+                <a:ea typeface="Times New Roman"/>
+                <a:cs typeface="Times New Roman"/>
+              </a:rPr>
+              <a:t>Stereotech</a:t>
+            </a:r>
+            <a:r>
+              <a:rPr lang="ru-RU" sz="1600" b="0" dirty="0">
+                <a:solidFill>
+                  <a:srgbClr val="000000"/>
+                </a:solidFill>
+                <a:latin typeface="Times New Roman"/>
+                <a:ea typeface="Times New Roman"/>
+                <a:cs typeface="Times New Roman"/>
+              </a:rPr>
+              <a:t>»</a:t>
+            </a:r>
+            <a:endParaRPr sz="1600" b="0" dirty="0">
+              <a:solidFill>
+                <a:srgbClr val="000000"/>
+              </a:solidFill>
+              <a:latin typeface="Times New Roman"/>
+              <a:ea typeface="Times New Roman"/>
+              <a:cs typeface="Times New Roman"/>
+            </a:endParaRPr>
           </a:p>
         </p:txBody>
       </p:sp>
@@ -6682,7 +7390,7 @@
         <p:cNvPr id="1" name="">
           <a:extLst>
             <a:ext uri="{FF2B5EF4-FFF2-40B4-BE49-F238E27FC236}">
-              <a16:creationId xmlns:a16="http://schemas.microsoft.com/office/drawing/2014/main" id="{829A4193-2A96-4292-27DF-7C8F10ED51F0}"/>
+              <a16:creationId xmlns:a16="http://schemas.microsoft.com/office/drawing/2014/main" id="{586A209A-B3B7-9043-FC7E-DD693EE6AACA}"/>
             </a:ext>
           </a:extLst>
         </p:cNvPr>
@@ -6702,7 +7410,7 @@
           <p:cNvPr id="2" name="Заголовок 1">
             <a:extLst>
               <a:ext uri="{FF2B5EF4-FFF2-40B4-BE49-F238E27FC236}">
-                <a16:creationId xmlns:a16="http://schemas.microsoft.com/office/drawing/2014/main" id="{F71B51DD-8424-3898-F322-045B44C926E8}"/>
+                <a16:creationId xmlns:a16="http://schemas.microsoft.com/office/drawing/2014/main" id="{648A91D6-F58A-86A8-231A-A5AC58545903}"/>
               </a:ext>
             </a:extLst>
           </p:cNvPr>
@@ -6715,7 +7423,7 @@
         </p:nvSpPr>
         <p:spPr>
           <a:xfrm>
-            <a:off x="628650" y="9098"/>
+            <a:off x="628648" y="0"/>
             <a:ext cx="7886700" cy="712868"/>
           </a:xfrm>
         </p:spPr>
@@ -6727,45 +7435,13 @@
           <a:p>
             <a:pPr algn="ctr"/>
             <a:r>
-              <a:rPr lang="ru-RU" dirty="0">
-                <a:latin typeface="Times New Roman"/>
+              <a:rPr lang="ru-RU" sz="4000" dirty="0">
+                <a:latin typeface="Times New Roman" panose="02020603050405020304" pitchFamily="18" charset="0"/>
                 <a:ea typeface="Calibri"/>
-                <a:cs typeface="Times New Roman"/>
-              </a:rPr>
-              <a:t>Обработка на сервере</a:t>
-            </a:r>
-          </a:p>
-        </p:txBody>
-      </p:sp>
-      <p:sp>
-        <p:nvSpPr>
-          <p:cNvPr id="4" name="Текстовое поле 3">
-            <a:extLst>
-              <a:ext uri="{FF2B5EF4-FFF2-40B4-BE49-F238E27FC236}">
-                <a16:creationId xmlns:a16="http://schemas.microsoft.com/office/drawing/2014/main" id="{5E8559DA-50BE-07AC-B0EB-3414FBFB6481}"/>
-              </a:ext>
-            </a:extLst>
-          </p:cNvPr>
-          <p:cNvSpPr txBox="1"/>
-          <p:nvPr/>
-        </p:nvSpPr>
-        <p:spPr>
-          <a:xfrm>
-            <a:off x="3775710" y="5640705"/>
-            <a:ext cx="309880" cy="368300"/>
-          </a:xfrm>
-          <a:prstGeom prst="rect">
-            <a:avLst/>
-          </a:prstGeom>
-          <a:noFill/>
-        </p:spPr>
-        <p:txBody>
-          <a:bodyPr wrap="none" rtlCol="0">
-            <a:spAutoFit/>
-          </a:bodyPr>
-          <a:lstStyle/>
-          <a:p>
-            <a:endParaRPr lang="ru-RU" altLang="en-US"/>
+                <a:cs typeface="Times New Roman" panose="02020603050405020304" pitchFamily="18" charset="0"/>
+              </a:rPr>
+              <a:t>Результат обучения нейросети</a:t>
+            </a:r>
           </a:p>
         </p:txBody>
       </p:sp>
@@ -6774,7 +7450,7 @@
           <p:cNvPr id="5" name="Замещающий номер слайда 4">
             <a:extLst>
               <a:ext uri="{FF2B5EF4-FFF2-40B4-BE49-F238E27FC236}">
-                <a16:creationId xmlns:a16="http://schemas.microsoft.com/office/drawing/2014/main" id="{28EFF76E-32CA-AB56-A1FE-FC86064D66B4}"/>
+                <a16:creationId xmlns:a16="http://schemas.microsoft.com/office/drawing/2014/main" id="{425BE312-5EC5-E722-FD8E-916DFE636F2B}"/>
               </a:ext>
             </a:extLst>
           </p:cNvPr>
@@ -6800,8 +7476,8 @@
                 <a:solidFill>
                   <a:schemeClr val="tx1"/>
                 </a:solidFill>
-                <a:latin typeface="Times New Roman"/>
-                <a:cs typeface="Times New Roman"/>
+                <a:latin typeface="Times New Roman" panose="02020603050405020304" pitchFamily="18" charset="0"/>
+                <a:cs typeface="Times New Roman" panose="02020603050405020304" pitchFamily="18" charset="0"/>
               </a:rPr>
               <a:t>5</a:t>
             </a:fld>
@@ -6809,19 +7485,19 @@
               <a:solidFill>
                 <a:schemeClr val="tx1"/>
               </a:solidFill>
-              <a:latin typeface="Times New Roman"/>
+              <a:latin typeface="Times New Roman" panose="02020603050405020304" pitchFamily="18" charset="0"/>
               <a:ea typeface="Calibri"/>
-              <a:cs typeface="Times New Roman"/>
+              <a:cs typeface="Times New Roman" panose="02020603050405020304" pitchFamily="18" charset="0"/>
             </a:endParaRPr>
           </a:p>
         </p:txBody>
       </p:sp>
       <p:sp>
         <p:nvSpPr>
-          <p:cNvPr id="8" name="TextBox 7">
-            <a:extLst>
-              <a:ext uri="{FF2B5EF4-FFF2-40B4-BE49-F238E27FC236}">
-                <a16:creationId xmlns:a16="http://schemas.microsoft.com/office/drawing/2014/main" id="{3FDAB50E-3BD8-57A2-B047-497A3FD50648}"/>
+          <p:cNvPr id="14" name="TextBox 13">
+            <a:extLst>
+              <a:ext uri="{FF2B5EF4-FFF2-40B4-BE49-F238E27FC236}">
+                <a16:creationId xmlns:a16="http://schemas.microsoft.com/office/drawing/2014/main" id="{733275A9-2422-EE65-68B7-2EFC7CB717FE}"/>
               </a:ext>
             </a:extLst>
           </p:cNvPr>
@@ -6830,8 +7506,8 @@
         </p:nvSpPr>
         <p:spPr>
           <a:xfrm>
-            <a:off x="186213" y="875407"/>
-            <a:ext cx="2920514" cy="1477328"/>
+            <a:off x="444579" y="731952"/>
+            <a:ext cx="3869672" cy="2585323"/>
           </a:xfrm>
           <a:prstGeom prst="rect">
             <a:avLst/>
@@ -6853,133 +7529,67 @@
           </a:bodyPr>
           <a:lstStyle/>
           <a:p>
-            <a:pPr algn="ctr"/>
             <a:r>
               <a:rPr lang="ru-RU" dirty="0">
-                <a:latin typeface="Times New Roman"/>
-                <a:ea typeface="+mn-lt"/>
-                <a:cs typeface="+mn-lt"/>
-              </a:rPr>
-              <a:t>Роль сервера:</a:t>
+                <a:latin typeface="Times New Roman" panose="02020603050405020304" pitchFamily="18" charset="0"/>
+                <a:cs typeface="Times New Roman" panose="02020603050405020304" pitchFamily="18" charset="0"/>
+              </a:rPr>
+              <a:t>Для обнаружения «спагетти» выбрана </a:t>
+            </a:r>
+            <a:r>
+              <a:rPr lang="ru-RU" b="1" dirty="0">
+                <a:latin typeface="Times New Roman" panose="02020603050405020304" pitchFamily="18" charset="0"/>
+                <a:cs typeface="Times New Roman" panose="02020603050405020304" pitchFamily="18" charset="0"/>
+              </a:rPr>
+              <a:t>ResNet18</a:t>
+            </a:r>
+            <a:r>
+              <a:rPr lang="ru-RU" dirty="0">
+                <a:latin typeface="Times New Roman" panose="02020603050405020304" pitchFamily="18" charset="0"/>
+                <a:cs typeface="Times New Roman" panose="02020603050405020304" pitchFamily="18" charset="0"/>
+              </a:rPr>
+              <a:t>. Она решает задачу как бинарную классификацию полного кадра: </a:t>
+            </a:r>
+            <a:r>
+              <a:rPr lang="ru-RU" b="1" dirty="0">
+                <a:latin typeface="Times New Roman" panose="02020603050405020304" pitchFamily="18" charset="0"/>
+                <a:cs typeface="Times New Roman" panose="02020603050405020304" pitchFamily="18" charset="0"/>
+              </a:rPr>
+              <a:t>есть дефект или нет</a:t>
+            </a:r>
+            <a:r>
+              <a:rPr lang="ru-RU" dirty="0">
+                <a:latin typeface="Times New Roman" panose="02020603050405020304" pitchFamily="18" charset="0"/>
+                <a:cs typeface="Times New Roman" panose="02020603050405020304" pitchFamily="18" charset="0"/>
+              </a:rPr>
+              <a:t>. Локализация дефектов рамкой в прошлых работах показала низкую точность. Детекция объектов сохранена только для поиска детали на столе.</a:t>
             </a:r>
             <a:endParaRPr lang="ru-RU" dirty="0">
-              <a:latin typeface="Times New Roman"/>
-              <a:cs typeface="Times New Roman"/>
+              <a:solidFill>
+                <a:srgbClr val="000000"/>
+              </a:solidFill>
+              <a:latin typeface="Times New Roman" panose="02020603050405020304" pitchFamily="18" charset="0"/>
+              <a:cs typeface="Times New Roman" panose="02020603050405020304" pitchFamily="18" charset="0"/>
             </a:endParaRPr>
           </a:p>
-          <a:p>
-            <a:pPr marL="285750" indent="-285750">
-              <a:buFont typeface="Arial"/>
-              <a:buChar char="•"/>
-            </a:pPr>
-            <a:r>
-              <a:rPr lang="ru-RU" b="1" dirty="0">
-                <a:latin typeface="Times New Roman"/>
-                <a:ea typeface="+mn-lt"/>
-                <a:cs typeface="+mn-lt"/>
-              </a:rPr>
-              <a:t>Централизованная </a:t>
-            </a:r>
-            <a:r>
-              <a:rPr lang="ru-RU" dirty="0">
-                <a:latin typeface="Times New Roman"/>
-                <a:ea typeface="+mn-lt"/>
-                <a:cs typeface="+mn-lt"/>
-              </a:rPr>
-              <a:t>обработка запросов.</a:t>
-            </a:r>
-            <a:endParaRPr lang="ru-RU" dirty="0">
-              <a:latin typeface="Times New Roman"/>
-              <a:cs typeface="Times New Roman"/>
-            </a:endParaRPr>
-          </a:p>
-          <a:p>
-            <a:pPr marL="285750" indent="-285750">
-              <a:buFont typeface="Arial"/>
-              <a:buChar char="•"/>
-            </a:pPr>
-            <a:r>
-              <a:rPr lang="ru-RU" dirty="0">
-                <a:latin typeface="Times New Roman"/>
-                <a:ea typeface="+mn-lt"/>
-                <a:cs typeface="+mn-lt"/>
-              </a:rPr>
-              <a:t>Выполнение </a:t>
-            </a:r>
-            <a:r>
-              <a:rPr lang="ru-RU" b="1" dirty="0">
-                <a:latin typeface="Times New Roman"/>
-                <a:ea typeface="+mn-lt"/>
-                <a:cs typeface="+mn-lt"/>
-              </a:rPr>
-              <a:t>ресурсоёмких </a:t>
-            </a:r>
-            <a:r>
-              <a:rPr lang="ru-RU" dirty="0">
-                <a:latin typeface="Times New Roman"/>
-                <a:ea typeface="+mn-lt"/>
-                <a:cs typeface="+mn-lt"/>
-              </a:rPr>
-              <a:t>задач.</a:t>
-            </a:r>
-            <a:endParaRPr lang="ru-RU" dirty="0">
-              <a:latin typeface="Times New Roman"/>
-              <a:cs typeface="Times New Roman"/>
-            </a:endParaRPr>
-          </a:p>
-        </p:txBody>
-      </p:sp>
-      <p:pic>
-        <p:nvPicPr>
-          <p:cNvPr id="7" name="Рисунок 6">
-            <a:extLst>
-              <a:ext uri="{FF2B5EF4-FFF2-40B4-BE49-F238E27FC236}">
-                <a16:creationId xmlns:a16="http://schemas.microsoft.com/office/drawing/2014/main" id="{DA035444-9EBE-0F23-C21B-B713FDEC75FD}"/>
-              </a:ext>
-            </a:extLst>
-          </p:cNvPr>
-          <p:cNvPicPr>
-            <a:picLocks noChangeAspect="1"/>
-          </p:cNvPicPr>
+        </p:txBody>
+      </p:sp>
+      <p:sp>
+        <p:nvSpPr>
+          <p:cNvPr id="22" name="TextBox 21">
+            <a:extLst>
+              <a:ext uri="{FF2B5EF4-FFF2-40B4-BE49-F238E27FC236}">
+                <a16:creationId xmlns:a16="http://schemas.microsoft.com/office/drawing/2014/main" id="{EED866B5-82E1-33E1-5DF7-1DCBBD9DCDF8}"/>
+              </a:ext>
+            </a:extLst>
+          </p:cNvPr>
+          <p:cNvSpPr txBox="1"/>
           <p:nvPr/>
-        </p:nvPicPr>
-        <p:blipFill>
-          <a:blip r:embed="rId3">
-            <a:extLst>
-              <a:ext uri="{28A0092B-C50C-407E-A947-70E740481C1C}">
-                <a14:useLocalDpi xmlns:a14="http://schemas.microsoft.com/office/drawing/2010/main" val="0"/>
-              </a:ext>
-            </a:extLst>
-          </a:blip>
-          <a:srcRect/>
-          <a:stretch/>
-        </p:blipFill>
+        </p:nvSpPr>
         <p:spPr>
           <a:xfrm>
-            <a:off x="3318649" y="1011857"/>
-            <a:ext cx="5639137" cy="5093570"/>
-          </a:xfrm>
-          <a:prstGeom prst="rect">
-            <a:avLst/>
-          </a:prstGeom>
-        </p:spPr>
-      </p:pic>
-      <p:sp>
-        <p:nvSpPr>
-          <p:cNvPr id="12" name="TextBox 11">
-            <a:extLst>
-              <a:ext uri="{FF2B5EF4-FFF2-40B4-BE49-F238E27FC236}">
-                <a16:creationId xmlns:a16="http://schemas.microsoft.com/office/drawing/2014/main" id="{D77D804C-EAD2-5379-2030-7517770A46AB}"/>
-              </a:ext>
-            </a:extLst>
-          </p:cNvPr>
-          <p:cNvSpPr txBox="1"/>
-          <p:nvPr/>
-        </p:nvSpPr>
-        <p:spPr>
-          <a:xfrm>
-            <a:off x="186213" y="2593566"/>
-            <a:ext cx="2920514" cy="3416320"/>
+            <a:off x="4771553" y="724829"/>
+            <a:ext cx="4197892" cy="1477328"/>
           </a:xfrm>
           <a:prstGeom prst="rect">
             <a:avLst/>
@@ -7006,57 +7616,257 @@
                 <a:latin typeface="Times New Roman" panose="02020603050405020304" pitchFamily="18" charset="0"/>
                 <a:cs typeface="Times New Roman" panose="02020603050405020304" pitchFamily="18" charset="0"/>
               </a:rPr>
-              <a:t>Сервер </a:t>
+              <a:t>Датасет содержит </a:t>
             </a:r>
             <a:r>
               <a:rPr lang="ru-RU" b="1" dirty="0">
                 <a:latin typeface="Times New Roman" panose="02020603050405020304" pitchFamily="18" charset="0"/>
                 <a:cs typeface="Times New Roman" panose="02020603050405020304" pitchFamily="18" charset="0"/>
               </a:rPr>
-              <a:t>получает кадр </a:t>
+              <a:t>16 014 кадров без аугментаций</a:t>
             </a:r>
             <a:r>
               <a:rPr lang="ru-RU" dirty="0">
                 <a:latin typeface="Times New Roman" panose="02020603050405020304" pitchFamily="18" charset="0"/>
                 <a:cs typeface="Times New Roman" panose="02020603050405020304" pitchFamily="18" charset="0"/>
               </a:rPr>
-              <a:t>с камеры и идентификаторы сессии. После кадр анализируется нейросетью, которая </a:t>
+              <a:t>: 4 574 кадра со «спагетти» и 11 440 кадров без видимых признаков этого дефекта. Выборки делились по соотношению 60/20/20.</a:t>
+            </a:r>
+          </a:p>
+        </p:txBody>
+      </p:sp>
+      <p:sp>
+        <p:nvSpPr>
+          <p:cNvPr id="25" name="TextBox 24">
+            <a:extLst>
+              <a:ext uri="{FF2B5EF4-FFF2-40B4-BE49-F238E27FC236}">
+                <a16:creationId xmlns:a16="http://schemas.microsoft.com/office/drawing/2014/main" id="{C8B6B692-286B-EE82-F648-38C45239ECF9}"/>
+              </a:ext>
+            </a:extLst>
+          </p:cNvPr>
+          <p:cNvSpPr txBox="1"/>
+          <p:nvPr/>
+        </p:nvSpPr>
+        <p:spPr>
+          <a:xfrm>
+            <a:off x="487537" y="3466535"/>
+            <a:ext cx="3869672" cy="2862322"/>
+          </a:xfrm>
+          <a:prstGeom prst="rect">
+            <a:avLst/>
+          </a:prstGeom>
+          <a:noFill/>
+          <a:ln>
+            <a:solidFill>
+              <a:schemeClr val="tx1"/>
+            </a:solidFill>
+            <a:prstDash val="dash"/>
+          </a:ln>
+        </p:spPr>
+        <p:txBody>
+          <a:bodyPr rot="0" spcFirstLastPara="0" vertOverflow="overflow" horzOverflow="overflow" vert="horz" wrap="square" lIns="91440" tIns="45720" rIns="91440" bIns="45720" numCol="1" spcCol="0" rtlCol="0" fromWordArt="0" anchor="ctr" anchorCtr="0" forceAA="0" compatLnSpc="1">
+            <a:prstTxWarp prst="textNoShape">
+              <a:avLst/>
+            </a:prstTxWarp>
+            <a:spAutoFit/>
+          </a:bodyPr>
+          <a:lstStyle/>
+          <a:p>
+            <a:r>
+              <a:rPr lang="ru-RU" dirty="0">
+                <a:latin typeface="Times New Roman" panose="02020603050405020304" pitchFamily="18" charset="0"/>
+                <a:cs typeface="Times New Roman" panose="02020603050405020304" pitchFamily="18" charset="0"/>
+              </a:rPr>
+              <a:t>Для каждой эпохи обучения сохранялся </a:t>
             </a:r>
             <a:r>
               <a:rPr lang="ru-RU" b="1" dirty="0">
                 <a:latin typeface="Times New Roman" panose="02020603050405020304" pitchFamily="18" charset="0"/>
                 <a:cs typeface="Times New Roman" panose="02020603050405020304" pitchFamily="18" charset="0"/>
               </a:rPr>
-              <a:t>определяет наличие «спагетти»</a:t>
+              <a:t>баланс классов 50/50</a:t>
             </a:r>
             <a:r>
               <a:rPr lang="ru-RU" dirty="0">
                 <a:latin typeface="Times New Roman" panose="02020603050405020304" pitchFamily="18" charset="0"/>
                 <a:cs typeface="Times New Roman" panose="02020603050405020304" pitchFamily="18" charset="0"/>
               </a:rPr>
-              <a:t>.</a:t>
+              <a:t>: использовались все 2 746 кадров со «спагетти» и столько же случайно выбранных кадров без дефекта. Всего модель получала </a:t>
             </a:r>
             <a:r>
               <a:rPr lang="ru-RU" b="1" dirty="0">
                 <a:latin typeface="Times New Roman" panose="02020603050405020304" pitchFamily="18" charset="0"/>
                 <a:cs typeface="Times New Roman" panose="02020603050405020304" pitchFamily="18" charset="0"/>
               </a:rPr>
-              <a:t> </a:t>
+              <a:t>5 492 изображения за эпоху</a:t>
             </a:r>
             <a:r>
               <a:rPr lang="ru-RU" dirty="0">
                 <a:latin typeface="Times New Roman" panose="02020603050405020304" pitchFamily="18" charset="0"/>
                 <a:cs typeface="Times New Roman" panose="02020603050405020304" pitchFamily="18" charset="0"/>
               </a:rPr>
-              <a:t>Сервер возвращает признак дефекта и числовую оценку модели вместе с исходными идентификаторами, связывающими результат с конкретным кадром</a:t>
-            </a:r>
+              <a:t>. </a:t>
+            </a:r>
+            <a:r>
+              <a:rPr lang="ru-RU" dirty="0" err="1">
+                <a:latin typeface="Times New Roman" panose="02020603050405020304" pitchFamily="18" charset="0"/>
+                <a:cs typeface="Times New Roman" panose="02020603050405020304" pitchFamily="18" charset="0"/>
+              </a:rPr>
+              <a:t>Валидационная</a:t>
+            </a:r>
+            <a:r>
+              <a:rPr lang="ru-RU" dirty="0">
+                <a:latin typeface="Times New Roman" panose="02020603050405020304" pitchFamily="18" charset="0"/>
+                <a:cs typeface="Times New Roman" panose="02020603050405020304" pitchFamily="18" charset="0"/>
+              </a:rPr>
+              <a:t> и тестовая выборки содержат только исходные изображения без аугментаций.</a:t>
+            </a:r>
+          </a:p>
+        </p:txBody>
+      </p:sp>
+      <p:sp>
+        <p:nvSpPr>
+          <p:cNvPr id="3" name="TextBox 26">
+            <a:extLst>
+              <a:ext uri="{FF2B5EF4-FFF2-40B4-BE49-F238E27FC236}">
+                <a16:creationId xmlns:a16="http://schemas.microsoft.com/office/drawing/2014/main" id="{155F7BCE-57B1-4886-841D-DAD17BC5CA7C}"/>
+              </a:ext>
+            </a:extLst>
+          </p:cNvPr>
+          <p:cNvSpPr>
+            <a:spLocks noGrp="1"/>
+          </p:cNvSpPr>
+          <p:nvPr/>
+        </p:nvSpPr>
+        <p:spPr>
+          <a:xfrm>
+            <a:off x="4703875" y="5554051"/>
+            <a:ext cx="4073130" cy="579120"/>
+          </a:xfrm>
+          <a:prstGeom prst="rect">
+            <a:avLst/>
+          </a:prstGeom>
+          <a:noFill/>
+        </p:spPr>
+        <p:txBody>
+          <a:bodyPr rot="0" spcFirstLastPara="0" vert="horz" wrap="square" lIns="91440" tIns="45720" rIns="91440" bIns="45720" anchor="ctr">
+            <a:noAutofit/>
+          </a:bodyPr>
+          <a:lstStyle>
+            <a:defPPr algn="l">
+              <a:defRPr sz="1600" b="0">
+                <a:solidFill>
+                  <a:srgbClr val="000000"/>
+                </a:solidFill>
+                <a:latin typeface="Times New Roman"/>
+                <a:ea typeface="Times New Roman"/>
+                <a:cs typeface="Times New Roman"/>
+              </a:defRPr>
+            </a:defPPr>
+          </a:lstStyle>
+          <a:p>
+            <a:pPr algn="ctr">
+              <a:defRPr sz="1600" b="0">
+                <a:solidFill>
+                  <a:srgbClr val="000000"/>
+                </a:solidFill>
+                <a:latin typeface="Times New Roman"/>
+                <a:ea typeface="Times New Roman"/>
+                <a:cs typeface="Times New Roman"/>
+              </a:defRPr>
+            </a:pPr>
+            <a:r>
+              <a:rPr sz="1600" b="0" dirty="0" err="1">
+                <a:solidFill>
+                  <a:srgbClr val="000000"/>
+                </a:solidFill>
+                <a:latin typeface="Times New Roman"/>
+                <a:ea typeface="Times New Roman"/>
+                <a:cs typeface="Times New Roman"/>
+              </a:rPr>
+              <a:t>Рис</a:t>
+            </a:r>
+            <a:r>
+              <a:rPr sz="1600" b="0" dirty="0">
+                <a:solidFill>
+                  <a:srgbClr val="000000"/>
+                </a:solidFill>
+                <a:latin typeface="Times New Roman"/>
+                <a:ea typeface="Times New Roman"/>
+                <a:cs typeface="Times New Roman"/>
+              </a:rPr>
+              <a:t>. </a:t>
+            </a:r>
+            <a:r>
+              <a:rPr lang="ru-RU" sz="1600" b="0" dirty="0">
+                <a:solidFill>
+                  <a:srgbClr val="000000"/>
+                </a:solidFill>
+                <a:latin typeface="Times New Roman"/>
+                <a:ea typeface="Times New Roman"/>
+                <a:cs typeface="Times New Roman"/>
+              </a:rPr>
+              <a:t>4,5</a:t>
+            </a:r>
+            <a:r>
+              <a:rPr sz="1600" b="0" dirty="0">
+                <a:solidFill>
+                  <a:srgbClr val="000000"/>
+                </a:solidFill>
+                <a:latin typeface="Times New Roman"/>
+                <a:ea typeface="Times New Roman"/>
+                <a:cs typeface="Times New Roman"/>
+              </a:rPr>
+              <a:t> – </a:t>
+            </a:r>
+            <a:r>
+              <a:rPr lang="ru-RU" sz="1600" b="0" dirty="0">
+                <a:solidFill>
+                  <a:srgbClr val="000000"/>
+                </a:solidFill>
+                <a:latin typeface="Times New Roman"/>
+                <a:ea typeface="Times New Roman"/>
+                <a:cs typeface="Times New Roman"/>
+              </a:rPr>
+              <a:t>Диаграмма статистики печатей на ферме компании «</a:t>
+            </a:r>
+            <a:r>
+              <a:rPr lang="en-US" sz="1600" b="0" dirty="0" err="1">
+                <a:solidFill>
+                  <a:srgbClr val="000000"/>
+                </a:solidFill>
+                <a:latin typeface="Times New Roman"/>
+                <a:ea typeface="Times New Roman"/>
+                <a:cs typeface="Times New Roman"/>
+              </a:rPr>
+              <a:t>Stereotech</a:t>
+            </a:r>
+            <a:r>
+              <a:rPr lang="ru-RU" sz="1600" b="0" dirty="0">
+                <a:solidFill>
+                  <a:srgbClr val="000000"/>
+                </a:solidFill>
+                <a:latin typeface="Times New Roman"/>
+                <a:ea typeface="Times New Roman"/>
+                <a:cs typeface="Times New Roman"/>
+              </a:rPr>
+              <a:t>»</a:t>
+            </a:r>
+            <a:endParaRPr sz="1600" b="0" dirty="0">
+              <a:solidFill>
+                <a:srgbClr val="000000"/>
+              </a:solidFill>
+              <a:latin typeface="Times New Roman"/>
+              <a:ea typeface="Times New Roman"/>
+              <a:cs typeface="Times New Roman"/>
+            </a:endParaRPr>
           </a:p>
         </p:txBody>
       </p:sp>
     </p:spTree>
     <p:extLst>
       <p:ext uri="{BB962C8B-B14F-4D97-AF65-F5344CB8AC3E}">
-        <p14:creationId xmlns:p14="http://schemas.microsoft.com/office/powerpoint/2010/main" val="2065725557"/>
+        <p14:creationId xmlns:p14="http://schemas.microsoft.com/office/powerpoint/2010/main" val="3025447512"/>
       </p:ext>
     </p:extLst>
   </p:cSld>
@@ -7119,12 +7929,12 @@
           <a:p>
             <a:pPr algn="ctr"/>
             <a:r>
-              <a:rPr lang="ru-RU" dirty="0">
+              <a:rPr lang="ru-RU" sz="4000" dirty="0">
                 <a:latin typeface="Times New Roman"/>
                 <a:ea typeface="Calibri"/>
                 <a:cs typeface="Times New Roman"/>
               </a:rPr>
-              <a:t>Обработка на принтере</a:t>
+              <a:t>Обработка на сервере</a:t>
             </a:r>
           </a:p>
         </p:txBody>
@@ -7208,57 +8018,22 @@
           </a:p>
         </p:txBody>
       </p:sp>
-      <p:pic>
-        <p:nvPicPr>
-          <p:cNvPr id="7" name="Рисунок 6">
-            <a:extLst>
-              <a:ext uri="{FF2B5EF4-FFF2-40B4-BE49-F238E27FC236}">
-                <a16:creationId xmlns:a16="http://schemas.microsoft.com/office/drawing/2014/main" id="{DA035444-9EBE-0F23-C21B-B713FDEC75FD}"/>
-              </a:ext>
-            </a:extLst>
-          </p:cNvPr>
-          <p:cNvPicPr>
-            <a:picLocks noChangeAspect="1"/>
-          </p:cNvPicPr>
+      <p:sp>
+        <p:nvSpPr>
+          <p:cNvPr id="8" name="TextBox 7">
+            <a:extLst>
+              <a:ext uri="{FF2B5EF4-FFF2-40B4-BE49-F238E27FC236}">
+                <a16:creationId xmlns:a16="http://schemas.microsoft.com/office/drawing/2014/main" id="{3FDAB50E-3BD8-57A2-B047-497A3FD50648}"/>
+              </a:ext>
+            </a:extLst>
+          </p:cNvPr>
+          <p:cNvSpPr txBox="1"/>
           <p:nvPr/>
-        </p:nvPicPr>
-        <p:blipFill>
-          <a:blip r:embed="rId3">
-            <a:extLst>
-              <a:ext uri="{28A0092B-C50C-407E-A947-70E740481C1C}">
-                <a14:useLocalDpi xmlns:a14="http://schemas.microsoft.com/office/drawing/2010/main" val="0"/>
-              </a:ext>
-            </a:extLst>
-          </a:blip>
-          <a:srcRect/>
-          <a:stretch/>
-        </p:blipFill>
+        </p:nvSpPr>
         <p:spPr>
           <a:xfrm>
-            <a:off x="3106727" y="875407"/>
-            <a:ext cx="5905217" cy="5295358"/>
-          </a:xfrm>
-          <a:prstGeom prst="rect">
-            <a:avLst/>
-          </a:prstGeom>
-        </p:spPr>
-      </p:pic>
-      <p:sp>
-        <p:nvSpPr>
-          <p:cNvPr id="12" name="TextBox 11">
-            <a:extLst>
-              <a:ext uri="{FF2B5EF4-FFF2-40B4-BE49-F238E27FC236}">
-                <a16:creationId xmlns:a16="http://schemas.microsoft.com/office/drawing/2014/main" id="{D77D804C-EAD2-5379-2030-7517770A46AB}"/>
-              </a:ext>
-            </a:extLst>
-          </p:cNvPr>
-          <p:cNvSpPr txBox="1"/>
-          <p:nvPr/>
-        </p:nvSpPr>
-        <p:spPr>
-          <a:xfrm>
-            <a:off x="132056" y="875407"/>
-            <a:ext cx="2917990" cy="5355312"/>
+            <a:off x="186213" y="875407"/>
+            <a:ext cx="2920514" cy="1477328"/>
           </a:xfrm>
           <a:prstGeom prst="rect">
             <a:avLst/>
@@ -7280,54 +8055,322 @@
           </a:bodyPr>
           <a:lstStyle/>
           <a:p>
+            <a:pPr algn="ctr"/>
             <a:r>
               <a:rPr lang="ru-RU" dirty="0">
-                <a:latin typeface="Times New Roman" panose="02020603050405020304" pitchFamily="18" charset="0"/>
-                <a:cs typeface="Times New Roman" panose="02020603050405020304" pitchFamily="18" charset="0"/>
-              </a:rPr>
-              <a:t>Единичное обнаружение дефекта не приводит к отмене задания. Локальный модуль </a:t>
-            </a:r>
+                <a:latin typeface="Times New Roman"/>
+                <a:ea typeface="+mn-lt"/>
+                <a:cs typeface="+mn-lt"/>
+              </a:rPr>
+              <a:t>Роль сервера:</a:t>
+            </a:r>
+            <a:endParaRPr lang="ru-RU" dirty="0">
+              <a:latin typeface="Times New Roman"/>
+              <a:cs typeface="Times New Roman"/>
+            </a:endParaRPr>
+          </a:p>
+          <a:p>
+            <a:pPr marL="285750" indent="-285750">
+              <a:buFont typeface="Arial"/>
+              <a:buChar char="•"/>
+            </a:pPr>
             <a:r>
               <a:rPr lang="ru-RU" b="1" dirty="0">
-                <a:latin typeface="Times New Roman" panose="02020603050405020304" pitchFamily="18" charset="0"/>
-                <a:cs typeface="Times New Roman" panose="02020603050405020304" pitchFamily="18" charset="0"/>
-              </a:rPr>
-              <a:t>проверяет принадлежность результата </a:t>
+                <a:latin typeface="Times New Roman"/>
+                <a:ea typeface="+mn-lt"/>
+                <a:cs typeface="+mn-lt"/>
+              </a:rPr>
+              <a:t>Централизованная </a:t>
             </a:r>
             <a:r>
               <a:rPr lang="ru-RU" dirty="0">
-                <a:latin typeface="Times New Roman" panose="02020603050405020304" pitchFamily="18" charset="0"/>
-                <a:cs typeface="Times New Roman" panose="02020603050405020304" pitchFamily="18" charset="0"/>
-              </a:rPr>
-              <a:t>текущей печатной сессии и учитывает последовательные срабатывания. Отрицательный или неопределённый результат сбрасывает счётчик. </a:t>
+                <a:latin typeface="Times New Roman"/>
+                <a:ea typeface="+mn-lt"/>
+                <a:cs typeface="+mn-lt"/>
+              </a:rPr>
+              <a:t>обработка запросов.</a:t>
+            </a:r>
+            <a:endParaRPr lang="ru-RU" dirty="0">
+              <a:latin typeface="Times New Roman"/>
+              <a:cs typeface="Times New Roman"/>
+            </a:endParaRPr>
+          </a:p>
+          <a:p>
+            <a:pPr marL="285750" indent="-285750">
+              <a:buFont typeface="Arial"/>
+              <a:buChar char="•"/>
+            </a:pPr>
+            <a:r>
+              <a:rPr lang="ru-RU" dirty="0">
+                <a:latin typeface="Times New Roman"/>
+                <a:ea typeface="+mn-lt"/>
+                <a:cs typeface="+mn-lt"/>
+              </a:rPr>
+              <a:t>Выполнение </a:t>
             </a:r>
             <a:r>
               <a:rPr lang="ru-RU" b="1" dirty="0">
-                <a:latin typeface="Times New Roman" panose="02020603050405020304" pitchFamily="18" charset="0"/>
-                <a:cs typeface="Times New Roman" panose="02020603050405020304" pitchFamily="18" charset="0"/>
-              </a:rPr>
-              <a:t>После трёх последовательных обнаружений</a:t>
+                <a:latin typeface="Times New Roman"/>
+                <a:ea typeface="+mn-lt"/>
+                <a:cs typeface="+mn-lt"/>
+              </a:rPr>
+              <a:t>ресурсоёмких </a:t>
             </a:r>
             <a:r>
               <a:rPr lang="ru-RU" dirty="0">
-                <a:latin typeface="Times New Roman" panose="02020603050405020304" pitchFamily="18" charset="0"/>
-                <a:cs typeface="Times New Roman" panose="02020603050405020304" pitchFamily="18" charset="0"/>
-              </a:rPr>
-              <a:t> «спагетти» повторно проверяется активность сессии и </a:t>
+                <a:latin typeface="Times New Roman"/>
+                <a:ea typeface="+mn-lt"/>
+                <a:cs typeface="+mn-lt"/>
+              </a:rPr>
+              <a:t>задач.</a:t>
+            </a:r>
+            <a:endParaRPr lang="ru-RU" dirty="0">
+              <a:latin typeface="Times New Roman"/>
+              <a:cs typeface="Times New Roman"/>
+            </a:endParaRPr>
+          </a:p>
+        </p:txBody>
+      </p:sp>
+      <p:pic>
+        <p:nvPicPr>
+          <p:cNvPr id="7" name="Рисунок 6">
+            <a:extLst>
+              <a:ext uri="{FF2B5EF4-FFF2-40B4-BE49-F238E27FC236}">
+                <a16:creationId xmlns:a16="http://schemas.microsoft.com/office/drawing/2014/main" id="{DA035444-9EBE-0F23-C21B-B713FDEC75FD}"/>
+              </a:ext>
+            </a:extLst>
+          </p:cNvPr>
+          <p:cNvPicPr>
+            <a:picLocks noChangeAspect="1"/>
+          </p:cNvPicPr>
+          <p:nvPr/>
+        </p:nvPicPr>
+        <p:blipFill>
+          <a:blip r:embed="rId3">
+            <a:extLst>
+              <a:ext uri="{28A0092B-C50C-407E-A947-70E740481C1C}">
+                <a14:useLocalDpi xmlns:a14="http://schemas.microsoft.com/office/drawing/2010/main" val="0"/>
+              </a:ext>
+            </a:extLst>
+          </a:blip>
+          <a:srcRect/>
+          <a:stretch/>
+        </p:blipFill>
+        <p:spPr>
+          <a:xfrm>
+            <a:off x="3302968" y="875407"/>
+            <a:ext cx="5639137" cy="5093570"/>
+          </a:xfrm>
+          <a:prstGeom prst="rect">
+            <a:avLst/>
+          </a:prstGeom>
+        </p:spPr>
+      </p:pic>
+      <p:sp>
+        <p:nvSpPr>
+          <p:cNvPr id="12" name="TextBox 11">
+            <a:extLst>
+              <a:ext uri="{FF2B5EF4-FFF2-40B4-BE49-F238E27FC236}">
+                <a16:creationId xmlns:a16="http://schemas.microsoft.com/office/drawing/2014/main" id="{D77D804C-EAD2-5379-2030-7517770A46AB}"/>
+              </a:ext>
+            </a:extLst>
+          </p:cNvPr>
+          <p:cNvSpPr txBox="1"/>
+          <p:nvPr/>
+        </p:nvSpPr>
+        <p:spPr>
+          <a:xfrm>
+            <a:off x="186213" y="2593566"/>
+            <a:ext cx="2920514" cy="3416320"/>
+          </a:xfrm>
+          <a:prstGeom prst="rect">
+            <a:avLst/>
+          </a:prstGeom>
+          <a:noFill/>
+          <a:ln>
+            <a:solidFill>
+              <a:schemeClr val="tx1"/>
+            </a:solidFill>
+            <a:prstDash val="dash"/>
+          </a:ln>
+        </p:spPr>
+        <p:txBody>
+          <a:bodyPr rot="0" spcFirstLastPara="0" vertOverflow="overflow" horzOverflow="overflow" vert="horz" wrap="square" lIns="91440" tIns="45720" rIns="91440" bIns="45720" numCol="1" spcCol="0" rtlCol="0" fromWordArt="0" anchor="ctr" anchorCtr="0" forceAA="0" compatLnSpc="1">
+            <a:prstTxWarp prst="textNoShape">
+              <a:avLst/>
+            </a:prstTxWarp>
+            <a:spAutoFit/>
+          </a:bodyPr>
+          <a:lstStyle/>
+          <a:p>
+            <a:r>
+              <a:rPr lang="ru-RU" dirty="0">
+                <a:latin typeface="Times New Roman" panose="02020603050405020304" pitchFamily="18" charset="0"/>
+                <a:cs typeface="Times New Roman" panose="02020603050405020304" pitchFamily="18" charset="0"/>
+              </a:rPr>
+              <a:t>Сервер </a:t>
             </a:r>
             <a:r>
               <a:rPr lang="ru-RU" b="1" dirty="0">
                 <a:latin typeface="Times New Roman" panose="02020603050405020304" pitchFamily="18" charset="0"/>
                 <a:cs typeface="Times New Roman" panose="02020603050405020304" pitchFamily="18" charset="0"/>
               </a:rPr>
-              <a:t>формируется команда отмены печати</a:t>
+              <a:t>получает кадр </a:t>
             </a:r>
             <a:r>
               <a:rPr lang="ru-RU" dirty="0">
                 <a:latin typeface="Times New Roman" panose="02020603050405020304" pitchFamily="18" charset="0"/>
                 <a:cs typeface="Times New Roman" panose="02020603050405020304" pitchFamily="18" charset="0"/>
               </a:rPr>
+              <a:t>с камеры и идентификаторы сессии. После кадр анализируется нейросетью, которая </a:t>
+            </a:r>
+            <a:r>
+              <a:rPr lang="ru-RU" b="1" dirty="0">
+                <a:latin typeface="Times New Roman" panose="02020603050405020304" pitchFamily="18" charset="0"/>
+                <a:cs typeface="Times New Roman" panose="02020603050405020304" pitchFamily="18" charset="0"/>
+              </a:rPr>
+              <a:t>определяет наличие «спагетти»</a:t>
+            </a:r>
+            <a:r>
+              <a:rPr lang="ru-RU" dirty="0">
+                <a:latin typeface="Times New Roman" panose="02020603050405020304" pitchFamily="18" charset="0"/>
+                <a:cs typeface="Times New Roman" panose="02020603050405020304" pitchFamily="18" charset="0"/>
+              </a:rPr>
               <a:t>.</a:t>
+            </a:r>
+            <a:r>
+              <a:rPr lang="ru-RU" b="1" dirty="0">
+                <a:latin typeface="Times New Roman" panose="02020603050405020304" pitchFamily="18" charset="0"/>
+                <a:cs typeface="Times New Roman" panose="02020603050405020304" pitchFamily="18" charset="0"/>
+              </a:rPr>
+              <a:t> </a:t>
+            </a:r>
+            <a:r>
+              <a:rPr lang="ru-RU" dirty="0">
+                <a:latin typeface="Times New Roman" panose="02020603050405020304" pitchFamily="18" charset="0"/>
+                <a:cs typeface="Times New Roman" panose="02020603050405020304" pitchFamily="18" charset="0"/>
+              </a:rPr>
+              <a:t>Сервер возвращает признак дефекта и числовую оценку модели вместе с исходными идентификаторами, связывающими результат с конкретным кадром</a:t>
+            </a:r>
+          </a:p>
+        </p:txBody>
+      </p:sp>
+      <p:sp>
+        <p:nvSpPr>
+          <p:cNvPr id="3" name="TextBox 26">
+            <a:extLst>
+              <a:ext uri="{FF2B5EF4-FFF2-40B4-BE49-F238E27FC236}">
+                <a16:creationId xmlns:a16="http://schemas.microsoft.com/office/drawing/2014/main" id="{B2494F24-8111-2CAC-A358-3AE7239D4D1C}"/>
+              </a:ext>
+            </a:extLst>
+          </p:cNvPr>
+          <p:cNvSpPr>
+            <a:spLocks noGrp="1"/>
+          </p:cNvSpPr>
+          <p:nvPr/>
+        </p:nvSpPr>
+        <p:spPr>
+          <a:xfrm>
+            <a:off x="4085971" y="6009005"/>
+            <a:ext cx="4073130" cy="579120"/>
+          </a:xfrm>
+          <a:prstGeom prst="rect">
+            <a:avLst/>
+          </a:prstGeom>
+          <a:noFill/>
+        </p:spPr>
+        <p:txBody>
+          <a:bodyPr rot="0" spcFirstLastPara="0" vert="horz" wrap="square" lIns="91440" tIns="45720" rIns="91440" bIns="45720" anchor="ctr">
+            <a:noAutofit/>
+          </a:bodyPr>
+          <a:lstStyle>
+            <a:defPPr algn="l">
+              <a:defRPr sz="1600" b="0">
+                <a:solidFill>
+                  <a:srgbClr val="000000"/>
+                </a:solidFill>
+                <a:latin typeface="Times New Roman"/>
+                <a:ea typeface="Times New Roman"/>
+                <a:cs typeface="Times New Roman"/>
+              </a:defRPr>
+            </a:defPPr>
+          </a:lstStyle>
+          <a:p>
+            <a:pPr algn="ctr">
+              <a:defRPr sz="1600" b="0">
+                <a:solidFill>
+                  <a:srgbClr val="000000"/>
+                </a:solidFill>
+                <a:latin typeface="Times New Roman"/>
+                <a:ea typeface="Times New Roman"/>
+                <a:cs typeface="Times New Roman"/>
+              </a:defRPr>
+            </a:pPr>
+            <a:r>
+              <a:rPr sz="1600" b="0" dirty="0" err="1">
+                <a:solidFill>
+                  <a:srgbClr val="000000"/>
+                </a:solidFill>
+                <a:latin typeface="Times New Roman"/>
+                <a:ea typeface="Times New Roman"/>
+                <a:cs typeface="Times New Roman"/>
+              </a:rPr>
+              <a:t>Рис</a:t>
+            </a:r>
+            <a:r>
+              <a:rPr sz="1600" b="0" dirty="0">
+                <a:solidFill>
+                  <a:srgbClr val="000000"/>
+                </a:solidFill>
+                <a:latin typeface="Times New Roman"/>
+                <a:ea typeface="Times New Roman"/>
+                <a:cs typeface="Times New Roman"/>
+              </a:rPr>
+              <a:t>. </a:t>
+            </a:r>
+            <a:r>
+              <a:rPr lang="ru-RU" sz="1600" b="0" dirty="0">
+                <a:solidFill>
+                  <a:srgbClr val="000000"/>
+                </a:solidFill>
+                <a:latin typeface="Times New Roman"/>
+                <a:ea typeface="Times New Roman"/>
+                <a:cs typeface="Times New Roman"/>
+              </a:rPr>
+              <a:t>6</a:t>
+            </a:r>
+            <a:r>
+              <a:rPr sz="1600" b="0" dirty="0">
+                <a:solidFill>
+                  <a:srgbClr val="000000"/>
+                </a:solidFill>
+                <a:latin typeface="Times New Roman"/>
+                <a:ea typeface="Times New Roman"/>
+                <a:cs typeface="Times New Roman"/>
+              </a:rPr>
+              <a:t> –</a:t>
+            </a:r>
+            <a:r>
+              <a:rPr lang="ru-RU" sz="1600" b="0" dirty="0">
+                <a:solidFill>
+                  <a:srgbClr val="000000"/>
+                </a:solidFill>
+                <a:latin typeface="Times New Roman"/>
+                <a:ea typeface="Times New Roman"/>
+                <a:cs typeface="Times New Roman"/>
+              </a:rPr>
+              <a:t> Блок-схема серверной обработки кадров и определения дефектов FDM-печати</a:t>
+            </a:r>
+            <a:r>
+              <a:rPr sz="1600" b="0" dirty="0">
+                <a:solidFill>
+                  <a:srgbClr val="000000"/>
+                </a:solidFill>
+                <a:latin typeface="Times New Roman"/>
+                <a:ea typeface="Times New Roman"/>
+                <a:cs typeface="Times New Roman"/>
+              </a:rPr>
+              <a:t> </a:t>
             </a:r>
           </a:p>
         </p:txBody>
@@ -7335,7 +8378,7 @@
     </p:spTree>
     <p:extLst>
       <p:ext uri="{BB962C8B-B14F-4D97-AF65-F5344CB8AC3E}">
-        <p14:creationId xmlns:p14="http://schemas.microsoft.com/office/powerpoint/2010/main" val="1366394556"/>
+        <p14:creationId xmlns:p14="http://schemas.microsoft.com/office/powerpoint/2010/main" val="2065725557"/>
       </p:ext>
     </p:extLst>
   </p:cSld>
@@ -7386,7 +8429,7 @@
         </p:nvSpPr>
         <p:spPr>
           <a:xfrm>
-            <a:off x="628650" y="-64546"/>
+            <a:off x="628650" y="9098"/>
             <a:ext cx="7886700" cy="712868"/>
           </a:xfrm>
         </p:spPr>
@@ -7398,28 +8441,12 @@
           <a:p>
             <a:pPr algn="ctr"/>
             <a:r>
-              <a:rPr lang="ru-RU" dirty="0">
+              <a:rPr lang="ru-RU" sz="4000" dirty="0">
                 <a:latin typeface="Times New Roman"/>
                 <a:ea typeface="Calibri"/>
                 <a:cs typeface="Times New Roman"/>
               </a:rPr>
-              <a:t>Электросхема 3</a:t>
-            </a:r>
-            <a:r>
-              <a:rPr lang="en-US" dirty="0">
-                <a:latin typeface="Times New Roman"/>
-                <a:ea typeface="Calibri"/>
-                <a:cs typeface="Times New Roman"/>
-              </a:rPr>
-              <a:t>D-</a:t>
-            </a:r>
-            <a:r>
-              <a:rPr lang="ru-RU" dirty="0">
-                <a:latin typeface="Times New Roman"/>
-                <a:ea typeface="Calibri"/>
-                <a:cs typeface="Times New Roman"/>
-              </a:rPr>
-              <a:t>принтера</a:t>
+              <a:t>Обработка на принтере</a:t>
             </a:r>
           </a:p>
         </p:txBody>
@@ -7505,10 +8532,10 @@
       </p:sp>
       <p:pic>
         <p:nvPicPr>
-          <p:cNvPr id="13" name="Рисунок 12">
-            <a:extLst>
-              <a:ext uri="{FF2B5EF4-FFF2-40B4-BE49-F238E27FC236}">
-                <a16:creationId xmlns:a16="http://schemas.microsoft.com/office/drawing/2014/main" id="{4E875F94-D2E7-0E2D-5267-8B670B1C8AC0}"/>
+          <p:cNvPr id="7" name="Рисунок 6">
+            <a:extLst>
+              <a:ext uri="{FF2B5EF4-FFF2-40B4-BE49-F238E27FC236}">
+                <a16:creationId xmlns:a16="http://schemas.microsoft.com/office/drawing/2014/main" id="{DA035444-9EBE-0F23-C21B-B713FDEC75FD}"/>
               </a:ext>
             </a:extLst>
           </p:cNvPr>
@@ -7520,6 +8547,516 @@
         <p:blipFill>
           <a:blip r:embed="rId3">
             <a:extLst>
+              <a:ext uri="{28A0092B-C50C-407E-A947-70E740481C1C}">
+                <a14:useLocalDpi xmlns:a14="http://schemas.microsoft.com/office/drawing/2010/main" val="0"/>
+              </a:ext>
+            </a:extLst>
+          </a:blip>
+          <a:srcRect/>
+          <a:stretch/>
+        </p:blipFill>
+        <p:spPr>
+          <a:xfrm>
+            <a:off x="3106727" y="875407"/>
+            <a:ext cx="5905217" cy="5295358"/>
+          </a:xfrm>
+          <a:prstGeom prst="rect">
+            <a:avLst/>
+          </a:prstGeom>
+        </p:spPr>
+      </p:pic>
+      <p:sp>
+        <p:nvSpPr>
+          <p:cNvPr id="12" name="TextBox 11">
+            <a:extLst>
+              <a:ext uri="{FF2B5EF4-FFF2-40B4-BE49-F238E27FC236}">
+                <a16:creationId xmlns:a16="http://schemas.microsoft.com/office/drawing/2014/main" id="{D77D804C-EAD2-5379-2030-7517770A46AB}"/>
+              </a:ext>
+            </a:extLst>
+          </p:cNvPr>
+          <p:cNvSpPr txBox="1"/>
+          <p:nvPr/>
+        </p:nvSpPr>
+        <p:spPr>
+          <a:xfrm>
+            <a:off x="132056" y="875407"/>
+            <a:ext cx="2917990" cy="5355312"/>
+          </a:xfrm>
+          <a:prstGeom prst="rect">
+            <a:avLst/>
+          </a:prstGeom>
+          <a:noFill/>
+          <a:ln>
+            <a:solidFill>
+              <a:schemeClr val="tx1"/>
+            </a:solidFill>
+            <a:prstDash val="dash"/>
+          </a:ln>
+        </p:spPr>
+        <p:txBody>
+          <a:bodyPr rot="0" spcFirstLastPara="0" vertOverflow="overflow" horzOverflow="overflow" vert="horz" wrap="square" lIns="91440" tIns="45720" rIns="91440" bIns="45720" numCol="1" spcCol="0" rtlCol="0" fromWordArt="0" anchor="ctr" anchorCtr="0" forceAA="0" compatLnSpc="1">
+            <a:prstTxWarp prst="textNoShape">
+              <a:avLst/>
+            </a:prstTxWarp>
+            <a:spAutoFit/>
+          </a:bodyPr>
+          <a:lstStyle/>
+          <a:p>
+            <a:r>
+              <a:rPr lang="ru-RU" dirty="0">
+                <a:latin typeface="Times New Roman" panose="02020603050405020304" pitchFamily="18" charset="0"/>
+                <a:cs typeface="Times New Roman" panose="02020603050405020304" pitchFamily="18" charset="0"/>
+              </a:rPr>
+              <a:t>Единичное обнаружение дефекта не приводит к отмене задания. Локальный модуль </a:t>
+            </a:r>
+            <a:r>
+              <a:rPr lang="ru-RU" b="1" dirty="0">
+                <a:latin typeface="Times New Roman" panose="02020603050405020304" pitchFamily="18" charset="0"/>
+                <a:cs typeface="Times New Roman" panose="02020603050405020304" pitchFamily="18" charset="0"/>
+              </a:rPr>
+              <a:t>проверяет принадлежность результата </a:t>
+            </a:r>
+            <a:r>
+              <a:rPr lang="ru-RU" dirty="0">
+                <a:latin typeface="Times New Roman" panose="02020603050405020304" pitchFamily="18" charset="0"/>
+                <a:cs typeface="Times New Roman" panose="02020603050405020304" pitchFamily="18" charset="0"/>
+              </a:rPr>
+              <a:t>текущей печатной сессии и учитывает последовательные срабатывания. Отрицательный или неопределённый результат сбрасывает счётчик. </a:t>
+            </a:r>
+            <a:r>
+              <a:rPr lang="ru-RU" b="1" dirty="0">
+                <a:latin typeface="Times New Roman" panose="02020603050405020304" pitchFamily="18" charset="0"/>
+                <a:cs typeface="Times New Roman" panose="02020603050405020304" pitchFamily="18" charset="0"/>
+              </a:rPr>
+              <a:t>После трёх последовательных обнаружений</a:t>
+            </a:r>
+            <a:r>
+              <a:rPr lang="ru-RU" dirty="0">
+                <a:latin typeface="Times New Roman" panose="02020603050405020304" pitchFamily="18" charset="0"/>
+                <a:cs typeface="Times New Roman" panose="02020603050405020304" pitchFamily="18" charset="0"/>
+              </a:rPr>
+              <a:t> «спагетти» повторно проверяется активность сессии и </a:t>
+            </a:r>
+            <a:r>
+              <a:rPr lang="ru-RU" b="1" dirty="0">
+                <a:latin typeface="Times New Roman" panose="02020603050405020304" pitchFamily="18" charset="0"/>
+                <a:cs typeface="Times New Roman" panose="02020603050405020304" pitchFamily="18" charset="0"/>
+              </a:rPr>
+              <a:t>формируется команда отмены печати</a:t>
+            </a:r>
+            <a:r>
+              <a:rPr lang="ru-RU" dirty="0">
+                <a:latin typeface="Times New Roman" panose="02020603050405020304" pitchFamily="18" charset="0"/>
+                <a:cs typeface="Times New Roman" panose="02020603050405020304" pitchFamily="18" charset="0"/>
+              </a:rPr>
+              <a:t>.</a:t>
+            </a:r>
+          </a:p>
+        </p:txBody>
+      </p:sp>
+      <p:sp>
+        <p:nvSpPr>
+          <p:cNvPr id="3" name="TextBox 26">
+            <a:extLst>
+              <a:ext uri="{FF2B5EF4-FFF2-40B4-BE49-F238E27FC236}">
+                <a16:creationId xmlns:a16="http://schemas.microsoft.com/office/drawing/2014/main" id="{E5B04886-22A1-2CCD-9C65-F1ADEC0EB19F}"/>
+              </a:ext>
+            </a:extLst>
+          </p:cNvPr>
+          <p:cNvSpPr>
+            <a:spLocks noGrp="1"/>
+          </p:cNvSpPr>
+          <p:nvPr/>
+        </p:nvSpPr>
+        <p:spPr>
+          <a:xfrm>
+            <a:off x="3723995" y="6170765"/>
+            <a:ext cx="4670679" cy="579120"/>
+          </a:xfrm>
+          <a:prstGeom prst="rect">
+            <a:avLst/>
+          </a:prstGeom>
+          <a:noFill/>
+        </p:spPr>
+        <p:txBody>
+          <a:bodyPr rot="0" spcFirstLastPara="0" vert="horz" wrap="square" lIns="91440" tIns="45720" rIns="91440" bIns="45720" anchor="ctr">
+            <a:noAutofit/>
+          </a:bodyPr>
+          <a:lstStyle>
+            <a:defPPr algn="l">
+              <a:defRPr sz="1600" b="0">
+                <a:solidFill>
+                  <a:srgbClr val="000000"/>
+                </a:solidFill>
+                <a:latin typeface="Times New Roman"/>
+                <a:ea typeface="Times New Roman"/>
+                <a:cs typeface="Times New Roman"/>
+              </a:defRPr>
+            </a:defPPr>
+          </a:lstStyle>
+          <a:p>
+            <a:pPr algn="ctr">
+              <a:defRPr sz="1600" b="0">
+                <a:solidFill>
+                  <a:srgbClr val="000000"/>
+                </a:solidFill>
+                <a:latin typeface="Times New Roman"/>
+                <a:ea typeface="Times New Roman"/>
+                <a:cs typeface="Times New Roman"/>
+              </a:defRPr>
+            </a:pPr>
+            <a:r>
+              <a:rPr sz="1600" b="0" dirty="0" err="1">
+                <a:solidFill>
+                  <a:srgbClr val="000000"/>
+                </a:solidFill>
+                <a:latin typeface="Times New Roman"/>
+                <a:ea typeface="Times New Roman"/>
+                <a:cs typeface="Times New Roman"/>
+              </a:rPr>
+              <a:t>Рис</a:t>
+            </a:r>
+            <a:r>
+              <a:rPr sz="1600" b="0" dirty="0">
+                <a:solidFill>
+                  <a:srgbClr val="000000"/>
+                </a:solidFill>
+                <a:latin typeface="Times New Roman"/>
+                <a:ea typeface="Times New Roman"/>
+                <a:cs typeface="Times New Roman"/>
+              </a:rPr>
+              <a:t>. </a:t>
+            </a:r>
+            <a:r>
+              <a:rPr lang="ru-RU" sz="1600" b="0" dirty="0">
+                <a:solidFill>
+                  <a:srgbClr val="000000"/>
+                </a:solidFill>
+                <a:latin typeface="Times New Roman"/>
+                <a:ea typeface="Times New Roman"/>
+                <a:cs typeface="Times New Roman"/>
+              </a:rPr>
+              <a:t>7</a:t>
+            </a:r>
+            <a:r>
+              <a:rPr sz="1600" b="0" dirty="0">
+                <a:solidFill>
+                  <a:srgbClr val="000000"/>
+                </a:solidFill>
+                <a:latin typeface="Times New Roman"/>
+                <a:ea typeface="Times New Roman"/>
+                <a:cs typeface="Times New Roman"/>
+              </a:rPr>
+              <a:t> – </a:t>
+            </a:r>
+            <a:r>
+              <a:rPr lang="ru-RU" sz="1600" b="0" dirty="0">
+                <a:solidFill>
+                  <a:srgbClr val="000000"/>
+                </a:solidFill>
+                <a:latin typeface="Times New Roman"/>
+                <a:ea typeface="Times New Roman"/>
+                <a:cs typeface="Times New Roman"/>
+              </a:rPr>
+              <a:t>Блок-схема проверки результатов обнаружения дефекта и отмены FDM-печати</a:t>
+            </a:r>
+            <a:endParaRPr sz="1600" b="0" dirty="0">
+              <a:solidFill>
+                <a:srgbClr val="000000"/>
+              </a:solidFill>
+              <a:latin typeface="Times New Roman"/>
+              <a:ea typeface="Times New Roman"/>
+              <a:cs typeface="Times New Roman"/>
+            </a:endParaRPr>
+          </a:p>
+        </p:txBody>
+      </p:sp>
+      <p:sp>
+        <p:nvSpPr>
+          <p:cNvPr id="6" name="TextBox 26">
+            <a:extLst>
+              <a:ext uri="{FF2B5EF4-FFF2-40B4-BE49-F238E27FC236}">
+                <a16:creationId xmlns:a16="http://schemas.microsoft.com/office/drawing/2014/main" id="{8AF7D2B0-5020-6F43-9662-A5B7C34B40EB}"/>
+              </a:ext>
+            </a:extLst>
+          </p:cNvPr>
+          <p:cNvSpPr>
+            <a:spLocks noGrp="1"/>
+          </p:cNvSpPr>
+          <p:nvPr/>
+        </p:nvSpPr>
+        <p:spPr>
+          <a:xfrm>
+            <a:off x="339471" y="5651599"/>
+            <a:ext cx="4073130" cy="579120"/>
+          </a:xfrm>
+          <a:prstGeom prst="rect">
+            <a:avLst/>
+          </a:prstGeom>
+          <a:noFill/>
+        </p:spPr>
+        <p:txBody>
+          <a:bodyPr rot="0" spcFirstLastPara="0" vert="horz" wrap="square" lIns="91440" tIns="45720" rIns="91440" bIns="45720" anchor="ctr">
+            <a:noAutofit/>
+          </a:bodyPr>
+          <a:lstStyle>
+            <a:defPPr algn="l">
+              <a:defRPr sz="1600" b="0">
+                <a:solidFill>
+                  <a:srgbClr val="000000"/>
+                </a:solidFill>
+                <a:latin typeface="Times New Roman"/>
+                <a:ea typeface="Times New Roman"/>
+                <a:cs typeface="Times New Roman"/>
+              </a:defRPr>
+            </a:defPPr>
+          </a:lstStyle>
+          <a:p>
+            <a:pPr algn="ctr">
+              <a:defRPr sz="1600" b="0">
+                <a:solidFill>
+                  <a:srgbClr val="000000"/>
+                </a:solidFill>
+                <a:latin typeface="Times New Roman"/>
+                <a:ea typeface="Times New Roman"/>
+                <a:cs typeface="Times New Roman"/>
+              </a:defRPr>
+            </a:pPr>
+            <a:r>
+              <a:rPr sz="1600" b="0" dirty="0" err="1">
+                <a:solidFill>
+                  <a:srgbClr val="000000"/>
+                </a:solidFill>
+                <a:latin typeface="Times New Roman"/>
+                <a:ea typeface="Times New Roman"/>
+                <a:cs typeface="Times New Roman"/>
+              </a:rPr>
+              <a:t>Рис</a:t>
+            </a:r>
+            <a:r>
+              <a:rPr sz="1600" b="0" dirty="0">
+                <a:solidFill>
+                  <a:srgbClr val="000000"/>
+                </a:solidFill>
+                <a:latin typeface="Times New Roman"/>
+                <a:ea typeface="Times New Roman"/>
+                <a:cs typeface="Times New Roman"/>
+              </a:rPr>
+              <a:t>. </a:t>
+            </a:r>
+            <a:r>
+              <a:rPr lang="ru-RU" sz="1600" b="0" dirty="0">
+                <a:solidFill>
+                  <a:srgbClr val="000000"/>
+                </a:solidFill>
+                <a:latin typeface="Times New Roman"/>
+                <a:ea typeface="Times New Roman"/>
+                <a:cs typeface="Times New Roman"/>
+              </a:rPr>
+              <a:t>7</a:t>
+            </a:r>
+            <a:r>
+              <a:rPr sz="1600" b="0" dirty="0">
+                <a:solidFill>
+                  <a:srgbClr val="000000"/>
+                </a:solidFill>
+                <a:latin typeface="Times New Roman"/>
+                <a:ea typeface="Times New Roman"/>
+                <a:cs typeface="Times New Roman"/>
+              </a:rPr>
+              <a:t> – </a:t>
+            </a:r>
+          </a:p>
+        </p:txBody>
+      </p:sp>
+    </p:spTree>
+    <p:extLst>
+      <p:ext uri="{BB962C8B-B14F-4D97-AF65-F5344CB8AC3E}">
+        <p14:creationId xmlns:p14="http://schemas.microsoft.com/office/powerpoint/2010/main" val="1366394556"/>
+      </p:ext>
+    </p:extLst>
+  </p:cSld>
+  <p:clrMapOvr>
+    <a:masterClrMapping/>
+  </p:clrMapOvr>
+</p:sld>
+</file>
+
+<file path=ppt/slides/slide8.xml><?xml version="1.0" encoding="utf-8"?>
+<p:sld xmlns:a="http://schemas.openxmlformats.org/drawingml/2006/main" xmlns:r="http://schemas.openxmlformats.org/officeDocument/2006/relationships" xmlns:p="http://schemas.openxmlformats.org/presentationml/2006/main">
+  <p:cSld>
+    <p:spTree>
+      <p:nvGrpSpPr>
+        <p:cNvPr id="1" name="">
+          <a:extLst>
+            <a:ext uri="{FF2B5EF4-FFF2-40B4-BE49-F238E27FC236}">
+              <a16:creationId xmlns:a16="http://schemas.microsoft.com/office/drawing/2014/main" id="{829A4193-2A96-4292-27DF-7C8F10ED51F0}"/>
+            </a:ext>
+          </a:extLst>
+        </p:cNvPr>
+        <p:cNvGrpSpPr/>
+        <p:nvPr/>
+      </p:nvGrpSpPr>
+      <p:grpSpPr>
+        <a:xfrm>
+          <a:off x="0" y="0"/>
+          <a:ext cx="0" cy="0"/>
+          <a:chOff x="0" y="0"/>
+          <a:chExt cx="0" cy="0"/>
+        </a:xfrm>
+      </p:grpSpPr>
+      <p:sp>
+        <p:nvSpPr>
+          <p:cNvPr id="2" name="Заголовок 1">
+            <a:extLst>
+              <a:ext uri="{FF2B5EF4-FFF2-40B4-BE49-F238E27FC236}">
+                <a16:creationId xmlns:a16="http://schemas.microsoft.com/office/drawing/2014/main" id="{F71B51DD-8424-3898-F322-045B44C926E8}"/>
+              </a:ext>
+            </a:extLst>
+          </p:cNvPr>
+          <p:cNvSpPr>
+            <a:spLocks noGrp="1"/>
+          </p:cNvSpPr>
+          <p:nvPr>
+            <p:ph type="title"/>
+          </p:nvPr>
+        </p:nvSpPr>
+        <p:spPr>
+          <a:xfrm>
+            <a:off x="628650" y="-64546"/>
+            <a:ext cx="7886700" cy="712868"/>
+          </a:xfrm>
+        </p:spPr>
+        <p:txBody>
+          <a:bodyPr>
+            <a:normAutofit/>
+          </a:bodyPr>
+          <a:lstStyle/>
+          <a:p>
+            <a:pPr algn="ctr"/>
+            <a:r>
+              <a:rPr lang="ru-RU" sz="4000" dirty="0">
+                <a:latin typeface="Times New Roman"/>
+                <a:ea typeface="Calibri"/>
+                <a:cs typeface="Times New Roman"/>
+              </a:rPr>
+              <a:t>Электросхема 3</a:t>
+            </a:r>
+            <a:r>
+              <a:rPr lang="en-US" sz="4000" dirty="0">
+                <a:latin typeface="Times New Roman"/>
+                <a:ea typeface="Calibri"/>
+                <a:cs typeface="Times New Roman"/>
+              </a:rPr>
+              <a:t>D-</a:t>
+            </a:r>
+            <a:r>
+              <a:rPr lang="ru-RU" sz="4000" dirty="0">
+                <a:latin typeface="Times New Roman"/>
+                <a:ea typeface="Calibri"/>
+                <a:cs typeface="Times New Roman"/>
+              </a:rPr>
+              <a:t>принтера</a:t>
+            </a:r>
+          </a:p>
+        </p:txBody>
+      </p:sp>
+      <p:sp>
+        <p:nvSpPr>
+          <p:cNvPr id="4" name="Текстовое поле 3">
+            <a:extLst>
+              <a:ext uri="{FF2B5EF4-FFF2-40B4-BE49-F238E27FC236}">
+                <a16:creationId xmlns:a16="http://schemas.microsoft.com/office/drawing/2014/main" id="{5E8559DA-50BE-07AC-B0EB-3414FBFB6481}"/>
+              </a:ext>
+            </a:extLst>
+          </p:cNvPr>
+          <p:cNvSpPr txBox="1"/>
+          <p:nvPr/>
+        </p:nvSpPr>
+        <p:spPr>
+          <a:xfrm>
+            <a:off x="3775710" y="5640705"/>
+            <a:ext cx="309880" cy="368300"/>
+          </a:xfrm>
+          <a:prstGeom prst="rect">
+            <a:avLst/>
+          </a:prstGeom>
+          <a:noFill/>
+        </p:spPr>
+        <p:txBody>
+          <a:bodyPr wrap="none" rtlCol="0">
+            <a:spAutoFit/>
+          </a:bodyPr>
+          <a:lstStyle/>
+          <a:p>
+            <a:endParaRPr lang="ru-RU" altLang="en-US"/>
+          </a:p>
+        </p:txBody>
+      </p:sp>
+      <p:sp>
+        <p:nvSpPr>
+          <p:cNvPr id="5" name="Замещающий номер слайда 4">
+            <a:extLst>
+              <a:ext uri="{FF2B5EF4-FFF2-40B4-BE49-F238E27FC236}">
+                <a16:creationId xmlns:a16="http://schemas.microsoft.com/office/drawing/2014/main" id="{28EFF76E-32CA-AB56-A1FE-FC86064D66B4}"/>
+              </a:ext>
+            </a:extLst>
+          </p:cNvPr>
+          <p:cNvSpPr>
+            <a:spLocks noGrp="1"/>
+          </p:cNvSpPr>
+          <p:nvPr>
+            <p:ph type="sldNum" sz="quarter" idx="12"/>
+          </p:nvPr>
+        </p:nvSpPr>
+        <p:spPr>
+          <a:xfrm>
+            <a:off x="7088886" y="6493511"/>
+            <a:ext cx="2057400" cy="365125"/>
+          </a:xfrm>
+        </p:spPr>
+        <p:txBody>
+          <a:bodyPr/>
+          <a:lstStyle/>
+          <a:p>
+            <a:fld id="{D6ED8A53-8D2F-4011-BE06-EDB0774336BA}" type="slidenum">
+              <a:rPr lang="ru-RU" sz="2000" dirty="0" smtClean="0">
+                <a:solidFill>
+                  <a:schemeClr val="tx1"/>
+                </a:solidFill>
+                <a:latin typeface="Times New Roman"/>
+                <a:cs typeface="Times New Roman"/>
+              </a:rPr>
+              <a:t>8</a:t>
+            </a:fld>
+            <a:endParaRPr lang="ru-RU" sz="2000">
+              <a:solidFill>
+                <a:schemeClr val="tx1"/>
+              </a:solidFill>
+              <a:latin typeface="Times New Roman"/>
+              <a:ea typeface="Calibri"/>
+              <a:cs typeface="Times New Roman"/>
+            </a:endParaRPr>
+          </a:p>
+        </p:txBody>
+      </p:sp>
+      <p:pic>
+        <p:nvPicPr>
+          <p:cNvPr id="13" name="Рисунок 12">
+            <a:extLst>
+              <a:ext uri="{FF2B5EF4-FFF2-40B4-BE49-F238E27FC236}">
+                <a16:creationId xmlns:a16="http://schemas.microsoft.com/office/drawing/2014/main" id="{4E875F94-D2E7-0E2D-5267-8B670B1C8AC0}"/>
+              </a:ext>
+            </a:extLst>
+          </p:cNvPr>
+          <p:cNvPicPr>
+            <a:picLocks noChangeAspect="1"/>
+          </p:cNvPicPr>
+          <p:nvPr/>
+        </p:nvPicPr>
+        <p:blipFill>
+          <a:blip r:embed="rId3">
+            <a:extLst>
               <a:ext uri="{96DAC541-7B7A-43D3-8B79-37D633B846F1}">
                 <asvg:svgBlip xmlns:asvg="http://schemas.microsoft.com/office/drawing/2016/SVG/main" r:embed="rId4"/>
               </a:ext>
@@ -7531,7 +9068,7 @@
         </p:blipFill>
         <p:spPr>
           <a:xfrm>
-            <a:off x="351681" y="768972"/>
+            <a:off x="351681" y="603944"/>
             <a:ext cx="8440637" cy="3708649"/>
           </a:xfrm>
           <a:prstGeom prst="rect">
@@ -7553,7 +9090,7 @@
         </p:nvSpPr>
         <p:spPr>
           <a:xfrm>
-            <a:off x="304801" y="4600686"/>
+            <a:off x="254001" y="4734036"/>
             <a:ext cx="8487517" cy="2031325"/>
           </a:xfrm>
           <a:prstGeom prst="rect">
@@ -7733,10 +9270,948 @@
           </a:p>
         </p:txBody>
       </p:sp>
+      <p:sp>
+        <p:nvSpPr>
+          <p:cNvPr id="16" name="TextBox 26">
+            <a:extLst>
+              <a:ext uri="{FF2B5EF4-FFF2-40B4-BE49-F238E27FC236}">
+                <a16:creationId xmlns:a16="http://schemas.microsoft.com/office/drawing/2014/main" id="{6C4BDD25-6E44-8F04-93A8-3BDF96080B11}"/>
+              </a:ext>
+            </a:extLst>
+          </p:cNvPr>
+          <p:cNvSpPr>
+            <a:spLocks noGrp="1"/>
+          </p:cNvSpPr>
+          <p:nvPr/>
+        </p:nvSpPr>
+        <p:spPr>
+          <a:xfrm>
+            <a:off x="1313146" y="4181848"/>
+            <a:ext cx="6517706" cy="579120"/>
+          </a:xfrm>
+          <a:prstGeom prst="rect">
+            <a:avLst/>
+          </a:prstGeom>
+          <a:noFill/>
+        </p:spPr>
+        <p:txBody>
+          <a:bodyPr rot="0" spcFirstLastPara="0" vert="horz" wrap="square" lIns="91440" tIns="45720" rIns="91440" bIns="45720" anchor="ctr">
+            <a:noAutofit/>
+          </a:bodyPr>
+          <a:lstStyle>
+            <a:defPPr algn="l">
+              <a:defRPr sz="1600" b="0">
+                <a:solidFill>
+                  <a:srgbClr val="000000"/>
+                </a:solidFill>
+                <a:latin typeface="Times New Roman"/>
+                <a:ea typeface="Times New Roman"/>
+                <a:cs typeface="Times New Roman"/>
+              </a:defRPr>
+            </a:defPPr>
+          </a:lstStyle>
+          <a:p>
+            <a:pPr algn="ctr">
+              <a:defRPr sz="1600" b="0">
+                <a:solidFill>
+                  <a:srgbClr val="000000"/>
+                </a:solidFill>
+                <a:latin typeface="Times New Roman"/>
+                <a:ea typeface="Times New Roman"/>
+                <a:cs typeface="Times New Roman"/>
+              </a:defRPr>
+            </a:pPr>
+            <a:r>
+              <a:rPr lang="ru-RU" sz="1600" b="0" dirty="0">
+                <a:solidFill>
+                  <a:srgbClr val="000000"/>
+                </a:solidFill>
+                <a:latin typeface="Times New Roman"/>
+                <a:ea typeface="Times New Roman"/>
+                <a:cs typeface="Times New Roman"/>
+              </a:rPr>
+              <a:t>Рис. </a:t>
+            </a:r>
+            <a:r>
+              <a:rPr lang="ru-RU" sz="1600" dirty="0">
+                <a:solidFill>
+                  <a:srgbClr val="000000"/>
+                </a:solidFill>
+                <a:latin typeface="Times New Roman"/>
+                <a:ea typeface="Times New Roman"/>
+                <a:cs typeface="Times New Roman"/>
+              </a:rPr>
+              <a:t>8</a:t>
+            </a:r>
+            <a:r>
+              <a:rPr lang="ru-RU" sz="1600" b="0" dirty="0">
+                <a:solidFill>
+                  <a:srgbClr val="000000"/>
+                </a:solidFill>
+                <a:latin typeface="Times New Roman"/>
+                <a:ea typeface="Times New Roman"/>
+                <a:cs typeface="Times New Roman"/>
+              </a:rPr>
+              <a:t> – Схема электрической коммутации компонентов 3D-принтера </a:t>
+            </a:r>
+          </a:p>
+        </p:txBody>
+      </p:sp>
     </p:spTree>
     <p:extLst>
       <p:ext uri="{BB962C8B-B14F-4D97-AF65-F5344CB8AC3E}">
         <p14:creationId xmlns:p14="http://schemas.microsoft.com/office/powerpoint/2010/main" val="128376505"/>
+      </p:ext>
+    </p:extLst>
+  </p:cSld>
+  <p:clrMapOvr>
+    <a:masterClrMapping/>
+  </p:clrMapOvr>
+</p:sld>
+</file>
+
+<file path=ppt/slides/slide9.xml><?xml version="1.0" encoding="utf-8"?>
+<p:sld xmlns:a="http://schemas.openxmlformats.org/drawingml/2006/main" xmlns:r="http://schemas.openxmlformats.org/officeDocument/2006/relationships" xmlns:p="http://schemas.openxmlformats.org/presentationml/2006/main">
+  <p:cSld>
+    <p:spTree>
+      <p:nvGrpSpPr>
+        <p:cNvPr id="1" name="">
+          <a:extLst>
+            <a:ext uri="{FF2B5EF4-FFF2-40B4-BE49-F238E27FC236}">
+              <a16:creationId xmlns:a16="http://schemas.microsoft.com/office/drawing/2014/main" id="{829A4193-2A96-4292-27DF-7C8F10ED51F0}"/>
+            </a:ext>
+          </a:extLst>
+        </p:cNvPr>
+        <p:cNvGrpSpPr/>
+        <p:nvPr/>
+      </p:nvGrpSpPr>
+      <p:grpSpPr>
+        <a:xfrm>
+          <a:off x="0" y="0"/>
+          <a:ext cx="0" cy="0"/>
+          <a:chOff x="0" y="0"/>
+          <a:chExt cx="0" cy="0"/>
+        </a:xfrm>
+      </p:grpSpPr>
+      <p:sp>
+        <p:nvSpPr>
+          <p:cNvPr id="2" name="Заголовок 1">
+            <a:extLst>
+              <a:ext uri="{FF2B5EF4-FFF2-40B4-BE49-F238E27FC236}">
+                <a16:creationId xmlns:a16="http://schemas.microsoft.com/office/drawing/2014/main" id="{F71B51DD-8424-3898-F322-045B44C926E8}"/>
+              </a:ext>
+            </a:extLst>
+          </p:cNvPr>
+          <p:cNvSpPr>
+            <a:spLocks noGrp="1"/>
+          </p:cNvSpPr>
+          <p:nvPr>
+            <p:ph type="title"/>
+          </p:nvPr>
+        </p:nvSpPr>
+        <p:spPr>
+          <a:xfrm>
+            <a:off x="628650" y="-64546"/>
+            <a:ext cx="7886700" cy="712868"/>
+          </a:xfrm>
+        </p:spPr>
+        <p:txBody>
+          <a:bodyPr>
+            <a:normAutofit fontScale="90000"/>
+          </a:bodyPr>
+          <a:lstStyle/>
+          <a:p>
+            <a:pPr algn="ctr"/>
+            <a:r>
+              <a:rPr lang="ru-RU" dirty="0">
+                <a:latin typeface="Times New Roman"/>
+                <a:ea typeface="Calibri"/>
+                <a:cs typeface="Times New Roman"/>
+              </a:rPr>
+              <a:t>Тестирование на реальной печати</a:t>
+            </a:r>
+          </a:p>
+        </p:txBody>
+      </p:sp>
+      <p:sp>
+        <p:nvSpPr>
+          <p:cNvPr id="4" name="Текстовое поле 3">
+            <a:extLst>
+              <a:ext uri="{FF2B5EF4-FFF2-40B4-BE49-F238E27FC236}">
+                <a16:creationId xmlns:a16="http://schemas.microsoft.com/office/drawing/2014/main" id="{5E8559DA-50BE-07AC-B0EB-3414FBFB6481}"/>
+              </a:ext>
+            </a:extLst>
+          </p:cNvPr>
+          <p:cNvSpPr txBox="1"/>
+          <p:nvPr/>
+        </p:nvSpPr>
+        <p:spPr>
+          <a:xfrm>
+            <a:off x="3775710" y="5640705"/>
+            <a:ext cx="309880" cy="368300"/>
+          </a:xfrm>
+          <a:prstGeom prst="rect">
+            <a:avLst/>
+          </a:prstGeom>
+          <a:noFill/>
+        </p:spPr>
+        <p:txBody>
+          <a:bodyPr wrap="none" rtlCol="0">
+            <a:spAutoFit/>
+          </a:bodyPr>
+          <a:lstStyle/>
+          <a:p>
+            <a:endParaRPr lang="ru-RU" altLang="en-US"/>
+          </a:p>
+        </p:txBody>
+      </p:sp>
+      <p:sp>
+        <p:nvSpPr>
+          <p:cNvPr id="5" name="Замещающий номер слайда 4">
+            <a:extLst>
+              <a:ext uri="{FF2B5EF4-FFF2-40B4-BE49-F238E27FC236}">
+                <a16:creationId xmlns:a16="http://schemas.microsoft.com/office/drawing/2014/main" id="{28EFF76E-32CA-AB56-A1FE-FC86064D66B4}"/>
+              </a:ext>
+            </a:extLst>
+          </p:cNvPr>
+          <p:cNvSpPr>
+            <a:spLocks noGrp="1"/>
+          </p:cNvSpPr>
+          <p:nvPr>
+            <p:ph type="sldNum" sz="quarter" idx="12"/>
+          </p:nvPr>
+        </p:nvSpPr>
+        <p:spPr>
+          <a:xfrm>
+            <a:off x="7088886" y="6493511"/>
+            <a:ext cx="2057400" cy="365125"/>
+          </a:xfrm>
+        </p:spPr>
+        <p:txBody>
+          <a:bodyPr/>
+          <a:lstStyle/>
+          <a:p>
+            <a:fld id="{D6ED8A53-8D2F-4011-BE06-EDB0774336BA}" type="slidenum">
+              <a:rPr lang="ru-RU" sz="2000" dirty="0" smtClean="0">
+                <a:solidFill>
+                  <a:schemeClr val="tx1"/>
+                </a:solidFill>
+                <a:latin typeface="Times New Roman"/>
+                <a:cs typeface="Times New Roman"/>
+              </a:rPr>
+              <a:t>9</a:t>
+            </a:fld>
+            <a:endParaRPr lang="ru-RU" sz="2000">
+              <a:solidFill>
+                <a:schemeClr val="tx1"/>
+              </a:solidFill>
+              <a:latin typeface="Times New Roman"/>
+              <a:ea typeface="Calibri"/>
+              <a:cs typeface="Times New Roman"/>
+            </a:endParaRPr>
+          </a:p>
+        </p:txBody>
+      </p:sp>
+      <p:sp>
+        <p:nvSpPr>
+          <p:cNvPr id="14" name="TextBox 13">
+            <a:extLst>
+              <a:ext uri="{FF2B5EF4-FFF2-40B4-BE49-F238E27FC236}">
+                <a16:creationId xmlns:a16="http://schemas.microsoft.com/office/drawing/2014/main" id="{971BDEBA-A42A-8680-F3A2-087C760E6CFE}"/>
+              </a:ext>
+            </a:extLst>
+          </p:cNvPr>
+          <p:cNvSpPr txBox="1"/>
+          <p:nvPr/>
+        </p:nvSpPr>
+        <p:spPr>
+          <a:xfrm>
+            <a:off x="203200" y="4078032"/>
+            <a:ext cx="3882390" cy="2585323"/>
+          </a:xfrm>
+          <a:prstGeom prst="rect">
+            <a:avLst/>
+          </a:prstGeom>
+          <a:noFill/>
+          <a:ln>
+            <a:solidFill>
+              <a:schemeClr val="tx1"/>
+            </a:solidFill>
+            <a:prstDash val="dash"/>
+          </a:ln>
+        </p:spPr>
+        <p:txBody>
+          <a:bodyPr rot="0" spcFirstLastPara="0" vertOverflow="overflow" horzOverflow="overflow" vert="horz" wrap="square" lIns="91440" tIns="45720" rIns="91440" bIns="45720" numCol="1" spcCol="0" rtlCol="0" fromWordArt="0" anchor="ctr" anchorCtr="0" forceAA="0" compatLnSpc="1">
+            <a:prstTxWarp prst="textNoShape">
+              <a:avLst/>
+            </a:prstTxWarp>
+            <a:spAutoFit/>
+          </a:bodyPr>
+          <a:lstStyle/>
+          <a:p>
+            <a:r>
+              <a:rPr lang="ru-RU" dirty="0">
+                <a:latin typeface="Times New Roman" panose="02020603050405020304" pitchFamily="18" charset="0"/>
+                <a:cs typeface="Times New Roman" panose="02020603050405020304" pitchFamily="18" charset="0"/>
+              </a:rPr>
+              <a:t>В процессе печати после запуска контролируемого сбоя, модель постепенно увеличивала оценку обнаружения «спагетти». Через </a:t>
+            </a:r>
+            <a:r>
+              <a:rPr lang="ru-RU" b="1" dirty="0" err="1">
+                <a:latin typeface="Times New Roman" panose="02020603050405020304" pitchFamily="18" charset="0"/>
+                <a:cs typeface="Times New Roman" panose="02020603050405020304" pitchFamily="18" charset="0"/>
+              </a:rPr>
+              <a:t>Через</a:t>
+            </a:r>
+            <a:r>
+              <a:rPr lang="ru-RU" b="1" dirty="0">
+                <a:latin typeface="Times New Roman" panose="02020603050405020304" pitchFamily="18" charset="0"/>
+                <a:cs typeface="Times New Roman" panose="02020603050405020304" pitchFamily="18" charset="0"/>
+              </a:rPr>
+              <a:t> 3 мин 21 с,</a:t>
+            </a:r>
+            <a:r>
+              <a:rPr lang="ru-RU" dirty="0">
+                <a:latin typeface="Times New Roman" panose="02020603050405020304" pitchFamily="18" charset="0"/>
+                <a:cs typeface="Times New Roman" panose="02020603050405020304" pitchFamily="18" charset="0"/>
+              </a:rPr>
+              <a:t> система контроля получила </a:t>
+            </a:r>
+            <a:r>
+              <a:rPr lang="ru-RU" b="1" dirty="0">
+                <a:latin typeface="Times New Roman" panose="02020603050405020304" pitchFamily="18" charset="0"/>
+                <a:cs typeface="Times New Roman" panose="02020603050405020304" pitchFamily="18" charset="0"/>
+              </a:rPr>
+              <a:t>3 уверенных последовательных обнаружения</a:t>
+            </a:r>
+            <a:r>
+              <a:rPr lang="ru-RU" dirty="0">
+                <a:latin typeface="Times New Roman" panose="02020603050405020304" pitchFamily="18" charset="0"/>
+                <a:cs typeface="Times New Roman" panose="02020603050405020304" pitchFamily="18" charset="0"/>
+              </a:rPr>
+              <a:t> и </a:t>
+            </a:r>
+            <a:r>
+              <a:rPr lang="ru-RU" b="1" dirty="0">
+                <a:latin typeface="Times New Roman" panose="02020603050405020304" pitchFamily="18" charset="0"/>
+                <a:cs typeface="Times New Roman" panose="02020603050405020304" pitchFamily="18" charset="0"/>
+              </a:rPr>
+              <a:t>принтер отменил </a:t>
+            </a:r>
+            <a:r>
+              <a:rPr lang="ru-RU" dirty="0">
+                <a:latin typeface="Times New Roman" panose="02020603050405020304" pitchFamily="18" charset="0"/>
+                <a:cs typeface="Times New Roman" panose="02020603050405020304" pitchFamily="18" charset="0"/>
+              </a:rPr>
+              <a:t>задание с выводом соответствующей ошибки</a:t>
+            </a:r>
+          </a:p>
+        </p:txBody>
+      </p:sp>
+      <p:pic>
+        <p:nvPicPr>
+          <p:cNvPr id="7" name="Рисунок 6">
+            <a:extLst>
+              <a:ext uri="{FF2B5EF4-FFF2-40B4-BE49-F238E27FC236}">
+                <a16:creationId xmlns:a16="http://schemas.microsoft.com/office/drawing/2014/main" id="{1265B33C-B5D3-98C3-9211-F88247D66440}"/>
+              </a:ext>
+            </a:extLst>
+          </p:cNvPr>
+          <p:cNvPicPr>
+            <a:picLocks noChangeAspect="1"/>
+          </p:cNvPicPr>
+          <p:nvPr/>
+        </p:nvPicPr>
+        <p:blipFill>
+          <a:blip r:embed="rId3"/>
+          <a:srcRect l="13750" t="10273" r="32713" b="28766"/>
+          <a:stretch/>
+        </p:blipFill>
+        <p:spPr>
+          <a:xfrm>
+            <a:off x="4572000" y="678623"/>
+            <a:ext cx="4073130" cy="2608849"/>
+          </a:xfrm>
+          <a:prstGeom prst="rect">
+            <a:avLst/>
+          </a:prstGeom>
+        </p:spPr>
+      </p:pic>
+      <p:sp>
+        <p:nvSpPr>
+          <p:cNvPr id="10" name="TextBox 26">
+            <a:extLst>
+              <a:ext uri="{FF2B5EF4-FFF2-40B4-BE49-F238E27FC236}">
+                <a16:creationId xmlns:a16="http://schemas.microsoft.com/office/drawing/2014/main" id="{B3EABF96-386D-700B-07FB-75E0CD46DA63}"/>
+              </a:ext>
+            </a:extLst>
+          </p:cNvPr>
+          <p:cNvSpPr>
+            <a:spLocks noGrp="1"/>
+          </p:cNvSpPr>
+          <p:nvPr/>
+        </p:nvSpPr>
+        <p:spPr>
+          <a:xfrm>
+            <a:off x="4572000" y="3280969"/>
+            <a:ext cx="4073130" cy="579120"/>
+          </a:xfrm>
+          <a:prstGeom prst="rect">
+            <a:avLst/>
+          </a:prstGeom>
+          <a:noFill/>
+        </p:spPr>
+        <p:txBody>
+          <a:bodyPr rot="0" spcFirstLastPara="0" vert="horz" wrap="square" lIns="91440" tIns="45720" rIns="91440" bIns="45720" anchor="ctr">
+            <a:noAutofit/>
+          </a:bodyPr>
+          <a:lstStyle>
+            <a:defPPr algn="l">
+              <a:defRPr sz="1600" b="0">
+                <a:solidFill>
+                  <a:srgbClr val="000000"/>
+                </a:solidFill>
+                <a:latin typeface="Times New Roman"/>
+                <a:ea typeface="Times New Roman"/>
+                <a:cs typeface="Times New Roman"/>
+              </a:defRPr>
+            </a:defPPr>
+          </a:lstStyle>
+          <a:p>
+            <a:pPr algn="ctr">
+              <a:defRPr sz="1600" b="0">
+                <a:solidFill>
+                  <a:srgbClr val="000000"/>
+                </a:solidFill>
+                <a:latin typeface="Times New Roman"/>
+                <a:ea typeface="Times New Roman"/>
+                <a:cs typeface="Times New Roman"/>
+              </a:defRPr>
+            </a:pPr>
+            <a:r>
+              <a:rPr sz="1600" b="0" dirty="0" err="1">
+                <a:solidFill>
+                  <a:srgbClr val="000000"/>
+                </a:solidFill>
+                <a:latin typeface="Times New Roman"/>
+                <a:ea typeface="Times New Roman"/>
+                <a:cs typeface="Times New Roman"/>
+              </a:rPr>
+              <a:t>Рис</a:t>
+            </a:r>
+            <a:r>
+              <a:rPr sz="1600" b="0" dirty="0">
+                <a:solidFill>
+                  <a:srgbClr val="000000"/>
+                </a:solidFill>
+                <a:latin typeface="Times New Roman"/>
+                <a:ea typeface="Times New Roman"/>
+                <a:cs typeface="Times New Roman"/>
+              </a:rPr>
+              <a:t>. </a:t>
+            </a:r>
+            <a:r>
+              <a:rPr lang="ru-RU" sz="1600" b="0" dirty="0">
+                <a:solidFill>
+                  <a:srgbClr val="000000"/>
+                </a:solidFill>
+                <a:latin typeface="Times New Roman"/>
+                <a:ea typeface="Times New Roman"/>
+                <a:cs typeface="Times New Roman"/>
+              </a:rPr>
+              <a:t>9</a:t>
+            </a:r>
+            <a:r>
+              <a:rPr sz="1600" b="0" dirty="0">
+                <a:solidFill>
+                  <a:srgbClr val="000000"/>
+                </a:solidFill>
+                <a:latin typeface="Times New Roman"/>
+                <a:ea typeface="Times New Roman"/>
+                <a:cs typeface="Times New Roman"/>
+              </a:rPr>
+              <a:t> –</a:t>
+            </a:r>
+            <a:r>
+              <a:rPr lang="ru-RU" sz="1600" b="0" dirty="0">
+                <a:solidFill>
+                  <a:srgbClr val="000000"/>
+                </a:solidFill>
+                <a:latin typeface="Times New Roman"/>
+                <a:ea typeface="Times New Roman"/>
+                <a:cs typeface="Times New Roman"/>
+              </a:rPr>
+              <a:t> Кадр с камеры </a:t>
+            </a:r>
+            <a:r>
+              <a:rPr lang="en-US" sz="1600" dirty="0">
+                <a:solidFill>
+                  <a:srgbClr val="000000"/>
+                </a:solidFill>
+                <a:latin typeface="Times New Roman"/>
+                <a:ea typeface="Times New Roman"/>
+                <a:cs typeface="Times New Roman"/>
+              </a:rPr>
+              <a:t>3D-</a:t>
+            </a:r>
+            <a:r>
+              <a:rPr lang="ru-RU" sz="1600" dirty="0">
+                <a:solidFill>
+                  <a:srgbClr val="000000"/>
+                </a:solidFill>
+                <a:latin typeface="Times New Roman"/>
+                <a:ea typeface="Times New Roman"/>
+                <a:cs typeface="Times New Roman"/>
+              </a:rPr>
+              <a:t>принтера с дефектом типа  «спагетти»</a:t>
+            </a:r>
+            <a:r>
+              <a:rPr sz="1600" b="0" dirty="0">
+                <a:solidFill>
+                  <a:srgbClr val="000000"/>
+                </a:solidFill>
+                <a:latin typeface="Times New Roman"/>
+                <a:ea typeface="Times New Roman"/>
+                <a:cs typeface="Times New Roman"/>
+              </a:rPr>
+              <a:t> </a:t>
+            </a:r>
+          </a:p>
+        </p:txBody>
+      </p:sp>
+      <p:graphicFrame>
+        <p:nvGraphicFramePr>
+          <p:cNvPr id="11" name="Таблица 10">
+            <a:extLst>
+              <a:ext uri="{FF2B5EF4-FFF2-40B4-BE49-F238E27FC236}">
+                <a16:creationId xmlns:a16="http://schemas.microsoft.com/office/drawing/2014/main" id="{BDAA191B-FE24-F716-CFE2-146C9DF24C16}"/>
+              </a:ext>
+            </a:extLst>
+          </p:cNvPr>
+          <p:cNvGraphicFramePr>
+            <a:graphicFrameLocks noGrp="1"/>
+          </p:cNvGraphicFramePr>
+          <p:nvPr>
+            <p:extLst>
+              <p:ext uri="{D42A27DB-BD31-4B8C-83A1-F6EECF244321}">
+                <p14:modId xmlns:p14="http://schemas.microsoft.com/office/powerpoint/2010/main" val="3485620183"/>
+              </p:ext>
+            </p:extLst>
+          </p:nvPr>
+        </p:nvGraphicFramePr>
+        <p:xfrm>
+          <a:off x="203200" y="678623"/>
+          <a:ext cx="3882390" cy="3194144"/>
+        </p:xfrm>
+        <a:graphic>
+          <a:graphicData uri="http://schemas.openxmlformats.org/drawingml/2006/table">
+            <a:tbl>
+              <a:tblPr firstRow="1" bandRow="1">
+                <a:tableStyleId>{C083E6E3-FA7D-4D7B-A595-EF9225AFEA82}</a:tableStyleId>
+              </a:tblPr>
+              <a:tblGrid>
+                <a:gridCol w="2159000">
+                  <a:extLst>
+                    <a:ext uri="{9D8B030D-6E8A-4147-A177-3AD203B41FA5}">
+                      <a16:colId xmlns:a16="http://schemas.microsoft.com/office/drawing/2014/main" val="665109338"/>
+                    </a:ext>
+                  </a:extLst>
+                </a:gridCol>
+                <a:gridCol w="1723390">
+                  <a:extLst>
+                    <a:ext uri="{9D8B030D-6E8A-4147-A177-3AD203B41FA5}">
+                      <a16:colId xmlns:a16="http://schemas.microsoft.com/office/drawing/2014/main" val="3225751743"/>
+                    </a:ext>
+                  </a:extLst>
+                </a:gridCol>
+              </a:tblGrid>
+              <a:tr h="412304">
+                <a:tc>
+                  <a:txBody>
+                    <a:bodyPr/>
+                    <a:lstStyle/>
+                    <a:p>
+                      <a:pPr algn="ctr"/>
+                      <a:r>
+                        <a:rPr lang="ru-RU" sz="1600" dirty="0">
+                          <a:latin typeface="Times New Roman" panose="02020603050405020304" pitchFamily="18" charset="0"/>
+                          <a:cs typeface="Times New Roman" panose="02020603050405020304" pitchFamily="18" charset="0"/>
+                        </a:rPr>
+                        <a:t>Показатель</a:t>
+                      </a:r>
+                    </a:p>
+                  </a:txBody>
+                  <a:tcPr/>
+                </a:tc>
+                <a:tc>
+                  <a:txBody>
+                    <a:bodyPr/>
+                    <a:lstStyle/>
+                    <a:p>
+                      <a:pPr algn="ctr"/>
+                      <a:r>
+                        <a:rPr lang="ru-RU" sz="1600" dirty="0">
+                          <a:latin typeface="Times New Roman" panose="02020603050405020304" pitchFamily="18" charset="0"/>
+                          <a:cs typeface="Times New Roman" panose="02020603050405020304" pitchFamily="18" charset="0"/>
+                        </a:rPr>
+                        <a:t>Результат</a:t>
+                      </a:r>
+                    </a:p>
+                  </a:txBody>
+                  <a:tcPr/>
+                </a:tc>
+                <a:extLst>
+                  <a:ext uri="{0D108BD9-81ED-4DB2-BD59-A6C34878D82A}">
+                    <a16:rowId xmlns:a16="http://schemas.microsoft.com/office/drawing/2014/main" val="1026950191"/>
+                  </a:ext>
+                </a:extLst>
+              </a:tr>
+              <a:tr h="914976">
+                <a:tc>
+                  <a:txBody>
+                    <a:bodyPr/>
+                    <a:lstStyle/>
+                    <a:p>
+                      <a:pPr algn="l"/>
+                      <a:r>
+                        <a:rPr lang="ru-RU" sz="1600" dirty="0">
+                          <a:latin typeface="Times New Roman" panose="02020603050405020304" pitchFamily="18" charset="0"/>
+                          <a:cs typeface="Times New Roman" panose="02020603050405020304" pitchFamily="18" charset="0"/>
+                        </a:rPr>
+                        <a:t>Время от появления дефекта до срабатывания отмены</a:t>
+                      </a:r>
+                    </a:p>
+                  </a:txBody>
+                  <a:tcPr/>
+                </a:tc>
+                <a:tc>
+                  <a:txBody>
+                    <a:bodyPr/>
+                    <a:lstStyle/>
+                    <a:p>
+                      <a:pPr algn="l"/>
+                      <a:r>
+                        <a:rPr lang="ru-RU" sz="1600" dirty="0">
+                          <a:latin typeface="Times New Roman" panose="02020603050405020304" pitchFamily="18" charset="0"/>
+                          <a:cs typeface="Times New Roman" panose="02020603050405020304" pitchFamily="18" charset="0"/>
+                        </a:rPr>
+                        <a:t>3 минуты, 21 секунда</a:t>
+                      </a:r>
+                    </a:p>
+                  </a:txBody>
+                  <a:tcPr/>
+                </a:tc>
+                <a:extLst>
+                  <a:ext uri="{0D108BD9-81ED-4DB2-BD59-A6C34878D82A}">
+                    <a16:rowId xmlns:a16="http://schemas.microsoft.com/office/drawing/2014/main" val="3956288437"/>
+                  </a:ext>
+                </a:extLst>
+              </a:tr>
+              <a:tr h="412304">
+                <a:tc>
+                  <a:txBody>
+                    <a:bodyPr/>
+                    <a:lstStyle/>
+                    <a:p>
+                      <a:pPr algn="l"/>
+                      <a:r>
+                        <a:rPr lang="ru-RU" sz="1600" dirty="0">
+                          <a:latin typeface="Times New Roman" panose="02020603050405020304" pitchFamily="18" charset="0"/>
+                          <a:cs typeface="Times New Roman" panose="02020603050405020304" pitchFamily="18" charset="0"/>
+                        </a:rPr>
+                        <a:t>Порог автоматической отмены</a:t>
+                      </a:r>
+                    </a:p>
+                  </a:txBody>
+                  <a:tcPr/>
+                </a:tc>
+                <a:tc>
+                  <a:txBody>
+                    <a:bodyPr/>
+                    <a:lstStyle/>
+                    <a:p>
+                      <a:pPr algn="l"/>
+                      <a:r>
+                        <a:rPr lang="ru-RU" sz="1600" dirty="0">
+                          <a:latin typeface="Times New Roman" panose="02020603050405020304" pitchFamily="18" charset="0"/>
+                          <a:cs typeface="Times New Roman" panose="02020603050405020304" pitchFamily="18" charset="0"/>
+                        </a:rPr>
+                        <a:t>0,5</a:t>
+                      </a:r>
+                    </a:p>
+                  </a:txBody>
+                  <a:tcPr/>
+                </a:tc>
+                <a:extLst>
+                  <a:ext uri="{0D108BD9-81ED-4DB2-BD59-A6C34878D82A}">
+                    <a16:rowId xmlns:a16="http://schemas.microsoft.com/office/drawing/2014/main" val="106043534"/>
+                  </a:ext>
+                </a:extLst>
+              </a:tr>
+              <a:tr h="643872">
+                <a:tc>
+                  <a:txBody>
+                    <a:bodyPr/>
+                    <a:lstStyle/>
+                    <a:p>
+                      <a:pPr algn="l"/>
+                      <a:r>
+                        <a:rPr lang="ru-RU" sz="1600" dirty="0">
+                          <a:latin typeface="Times New Roman" panose="02020603050405020304" pitchFamily="18" charset="0"/>
+                          <a:cs typeface="Times New Roman" panose="02020603050405020304" pitchFamily="18" charset="0"/>
+                        </a:rPr>
+                        <a:t>Минимальная отображённая оценка</a:t>
+                      </a:r>
+                    </a:p>
+                  </a:txBody>
+                  <a:tcPr/>
+                </a:tc>
+                <a:tc>
+                  <a:txBody>
+                    <a:bodyPr/>
+                    <a:lstStyle/>
+                    <a:p>
+                      <a:pPr algn="l"/>
+                      <a:r>
+                        <a:rPr lang="ru-RU" sz="1600" dirty="0">
+                          <a:latin typeface="Times New Roman" panose="02020603050405020304" pitchFamily="18" charset="0"/>
+                          <a:cs typeface="Times New Roman" panose="02020603050405020304" pitchFamily="18" charset="0"/>
+                        </a:rPr>
+                        <a:t>0,3655, в начале записи</a:t>
+                      </a:r>
+                    </a:p>
+                  </a:txBody>
+                  <a:tcPr/>
+                </a:tc>
+                <a:extLst>
+                  <a:ext uri="{0D108BD9-81ED-4DB2-BD59-A6C34878D82A}">
+                    <a16:rowId xmlns:a16="http://schemas.microsoft.com/office/drawing/2014/main" val="2504774038"/>
+                  </a:ext>
+                </a:extLst>
+              </a:tr>
+              <a:tr h="643872">
+                <a:tc>
+                  <a:txBody>
+                    <a:bodyPr/>
+                    <a:lstStyle/>
+                    <a:p>
+                      <a:pPr algn="l"/>
+                      <a:r>
+                        <a:rPr lang="ru-RU" sz="1600" dirty="0">
+                          <a:latin typeface="Times New Roman" panose="02020603050405020304" pitchFamily="18" charset="0"/>
+                          <a:cs typeface="Times New Roman" panose="02020603050405020304" pitchFamily="18" charset="0"/>
+                        </a:rPr>
+                        <a:t>Максимальная отображённая оценка</a:t>
+                      </a:r>
+                    </a:p>
+                  </a:txBody>
+                  <a:tcPr/>
+                </a:tc>
+                <a:tc>
+                  <a:txBody>
+                    <a:bodyPr/>
+                    <a:lstStyle/>
+                    <a:p>
+                      <a:pPr algn="l"/>
+                      <a:r>
+                        <a:rPr lang="ru-RU" sz="1600" dirty="0">
+                          <a:latin typeface="Times New Roman" panose="02020603050405020304" pitchFamily="18" charset="0"/>
+                          <a:cs typeface="Times New Roman" panose="02020603050405020304" pitchFamily="18" charset="0"/>
+                        </a:rPr>
+                        <a:t>0,9918</a:t>
+                      </a:r>
+                    </a:p>
+                  </a:txBody>
+                  <a:tcPr/>
+                </a:tc>
+                <a:extLst>
+                  <a:ext uri="{0D108BD9-81ED-4DB2-BD59-A6C34878D82A}">
+                    <a16:rowId xmlns:a16="http://schemas.microsoft.com/office/drawing/2014/main" val="1842670564"/>
+                  </a:ext>
+                </a:extLst>
+              </a:tr>
+            </a:tbl>
+          </a:graphicData>
+        </a:graphic>
+      </p:graphicFrame>
+      <p:sp>
+        <p:nvSpPr>
+          <p:cNvPr id="12" name="TextBox 26">
+            <a:extLst>
+              <a:ext uri="{FF2B5EF4-FFF2-40B4-BE49-F238E27FC236}">
+                <a16:creationId xmlns:a16="http://schemas.microsoft.com/office/drawing/2014/main" id="{0F1BE2F2-80C9-8159-C3BF-933349087573}"/>
+              </a:ext>
+            </a:extLst>
+          </p:cNvPr>
+          <p:cNvSpPr>
+            <a:spLocks noGrp="1"/>
+          </p:cNvSpPr>
+          <p:nvPr/>
+        </p:nvSpPr>
+        <p:spPr>
+          <a:xfrm>
+            <a:off x="4815206" y="6150348"/>
+            <a:ext cx="3586718" cy="579120"/>
+          </a:xfrm>
+          <a:prstGeom prst="rect">
+            <a:avLst/>
+          </a:prstGeom>
+          <a:noFill/>
+        </p:spPr>
+        <p:txBody>
+          <a:bodyPr rot="0" spcFirstLastPara="0" vert="horz" wrap="square" lIns="91440" tIns="45720" rIns="91440" bIns="45720" anchor="ctr">
+            <a:noAutofit/>
+          </a:bodyPr>
+          <a:lstStyle>
+            <a:defPPr algn="l">
+              <a:defRPr sz="1600" b="0">
+                <a:solidFill>
+                  <a:srgbClr val="000000"/>
+                </a:solidFill>
+                <a:latin typeface="Times New Roman"/>
+                <a:ea typeface="Times New Roman"/>
+                <a:cs typeface="Times New Roman"/>
+              </a:defRPr>
+            </a:defPPr>
+          </a:lstStyle>
+          <a:p>
+            <a:pPr algn="ctr">
+              <a:defRPr sz="1600" b="0">
+                <a:solidFill>
+                  <a:srgbClr val="000000"/>
+                </a:solidFill>
+                <a:latin typeface="Times New Roman"/>
+                <a:ea typeface="Times New Roman"/>
+                <a:cs typeface="Times New Roman"/>
+              </a:defRPr>
+            </a:pPr>
+            <a:r>
+              <a:rPr sz="1600" b="0" dirty="0" err="1">
+                <a:solidFill>
+                  <a:srgbClr val="000000"/>
+                </a:solidFill>
+                <a:latin typeface="Times New Roman"/>
+                <a:ea typeface="Times New Roman"/>
+                <a:cs typeface="Times New Roman"/>
+              </a:rPr>
+              <a:t>Рис</a:t>
+            </a:r>
+            <a:r>
+              <a:rPr sz="1600" b="0" dirty="0">
+                <a:solidFill>
+                  <a:srgbClr val="000000"/>
+                </a:solidFill>
+                <a:latin typeface="Times New Roman"/>
+                <a:ea typeface="Times New Roman"/>
+                <a:cs typeface="Times New Roman"/>
+              </a:rPr>
+              <a:t>. </a:t>
+            </a:r>
+            <a:r>
+              <a:rPr lang="ru-RU" sz="1600" dirty="0">
+                <a:solidFill>
+                  <a:srgbClr val="000000"/>
+                </a:solidFill>
+                <a:latin typeface="Times New Roman"/>
+                <a:ea typeface="Times New Roman"/>
+                <a:cs typeface="Times New Roman"/>
+              </a:rPr>
+              <a:t>10</a:t>
+            </a:r>
+            <a:r>
+              <a:rPr sz="1600" b="0" dirty="0">
+                <a:solidFill>
+                  <a:srgbClr val="000000"/>
+                </a:solidFill>
+                <a:latin typeface="Times New Roman"/>
+                <a:ea typeface="Times New Roman"/>
+                <a:cs typeface="Times New Roman"/>
+              </a:rPr>
+              <a:t> –</a:t>
+            </a:r>
+            <a:r>
+              <a:rPr lang="ru-RU" sz="1600" b="0" dirty="0">
+                <a:solidFill>
+                  <a:srgbClr val="000000"/>
+                </a:solidFill>
+                <a:latin typeface="Times New Roman"/>
+                <a:ea typeface="Times New Roman"/>
+                <a:cs typeface="Times New Roman"/>
+              </a:rPr>
+              <a:t> Кадр с камеры </a:t>
+            </a:r>
+            <a:r>
+              <a:rPr lang="en-US" sz="1600" dirty="0">
+                <a:solidFill>
+                  <a:srgbClr val="000000"/>
+                </a:solidFill>
+                <a:latin typeface="Times New Roman"/>
+                <a:ea typeface="Times New Roman"/>
+                <a:cs typeface="Times New Roman"/>
+              </a:rPr>
+              <a:t>3D-</a:t>
+            </a:r>
+            <a:r>
+              <a:rPr lang="ru-RU" sz="1600" dirty="0">
+                <a:solidFill>
+                  <a:srgbClr val="000000"/>
+                </a:solidFill>
+                <a:latin typeface="Times New Roman"/>
+                <a:ea typeface="Times New Roman"/>
+                <a:cs typeface="Times New Roman"/>
+              </a:rPr>
+              <a:t>принтера с примером обнаружения детали</a:t>
+            </a:r>
+            <a:endParaRPr sz="1600" b="0" dirty="0">
+              <a:solidFill>
+                <a:srgbClr val="000000"/>
+              </a:solidFill>
+              <a:latin typeface="Times New Roman"/>
+              <a:ea typeface="Times New Roman"/>
+              <a:cs typeface="Times New Roman"/>
+            </a:endParaRPr>
+          </a:p>
+        </p:txBody>
+      </p:sp>
+      <p:pic>
+        <p:nvPicPr>
+          <p:cNvPr id="19" name="Рисунок 18">
+            <a:extLst>
+              <a:ext uri="{FF2B5EF4-FFF2-40B4-BE49-F238E27FC236}">
+                <a16:creationId xmlns:a16="http://schemas.microsoft.com/office/drawing/2014/main" id="{ED4B603F-73F4-5404-D6AD-383F980E8726}"/>
+              </a:ext>
+            </a:extLst>
+          </p:cNvPr>
+          <p:cNvPicPr>
+            <a:picLocks noChangeAspect="1"/>
+          </p:cNvPicPr>
+          <p:nvPr/>
+        </p:nvPicPr>
+        <p:blipFill>
+          <a:blip r:embed="rId4">
+            <a:extLst>
+              <a:ext uri="{28A0092B-C50C-407E-A947-70E740481C1C}">
+                <a14:useLocalDpi xmlns:a14="http://schemas.microsoft.com/office/drawing/2010/main" val="0"/>
+              </a:ext>
+            </a:extLst>
+          </a:blip>
+          <a:srcRect l="8168" t="12057" r="32186" b="15292"/>
+          <a:stretch/>
+        </p:blipFill>
+        <p:spPr>
+          <a:xfrm>
+            <a:off x="5078978" y="4078032"/>
+            <a:ext cx="3059174" cy="2095942"/>
+          </a:xfrm>
+          <a:prstGeom prst="rect">
+            <a:avLst/>
+          </a:prstGeom>
+        </p:spPr>
+      </p:pic>
+    </p:spTree>
+    <p:extLst>
+      <p:ext uri="{BB962C8B-B14F-4D97-AF65-F5344CB8AC3E}">
+        <p14:creationId xmlns:p14="http://schemas.microsoft.com/office/powerpoint/2010/main" val="3237985341"/>
       </p:ext>
     </p:extLst>
   </p:cSld>

--- a/presentation/NIR2_slide01_v2.pptx
+++ b/presentation/NIR2_slide01_v2.pptx
@@ -528,7 +528,7 @@
           <a:bodyPr/>
           <a:lstStyle/>
           <a:p>
-            <a:endParaRPr lang="ru-RU"/>
+            <a:endParaRPr lang="ru-RU" dirty="0"/>
           </a:p>
         </p:txBody>
       </p:sp>
@@ -6041,7 +6041,7 @@
         </p:blipFill>
         <p:spPr>
           <a:xfrm>
-            <a:off x="5021065" y="3253523"/>
+            <a:off x="5021065" y="3247173"/>
             <a:ext cx="3921040" cy="2555874"/>
           </a:xfrm>
           <a:prstGeom prst="rect">
@@ -6629,7 +6629,25 @@
                 <a:ea typeface="Times New Roman"/>
                 <a:cs typeface="Times New Roman"/>
               </a:rPr>
-              <a:t>». По накопленной статистике принтеров с фермы, 26,7% заданий были отменены оператором вручную из-за подобных сбоев. Статистика имеет погрешность, так как часть успешных заданий — это печати, когда оператор не мог отменить задачу, хотя сбой был, а часть отмен не связаны со сбоем.</a:t>
+              <a:t>». По накопленной статистике принтеров с фермы, 26,7</a:t>
+            </a:r>
+            <a:r>
+              <a:rPr lang="ru-RU" b="1" dirty="0">
+                <a:latin typeface="Times New Roman" panose="02020603050405020304" pitchFamily="18" charset="0"/>
+                <a:cs typeface="Times New Roman" panose="02020603050405020304" pitchFamily="18" charset="0"/>
+              </a:rPr>
+              <a:t> </a:t>
+            </a:r>
+            <a:r>
+              <a:rPr lang="ru-RU" dirty="0">
+                <a:solidFill>
+                  <a:srgbClr val="000000"/>
+                </a:solidFill>
+                <a:latin typeface="Times New Roman"/>
+                <a:ea typeface="Times New Roman"/>
+                <a:cs typeface="Times New Roman"/>
+              </a:rPr>
+              <a:t>% заданий были отменены оператором вручную из-за подобных сбоев. Статистика имеет погрешность, так как часть успешных заданий — это печати, когда оператор не мог отменить задачу, хотя сбой был, а часть отмен не связаны со сбоем.</a:t>
             </a:r>
             <a:endParaRPr lang="ru-RU" dirty="0"/>
           </a:p>
@@ -6946,7 +6964,7 @@
                 <a:ea typeface="Calibri"/>
                 <a:cs typeface="Times New Roman" panose="02020603050405020304" pitchFamily="18" charset="0"/>
               </a:rPr>
-              <a:t>Подготовка обучения нейросети</a:t>
+              <a:t>Подготовка к обучению нейросети</a:t>
             </a:r>
           </a:p>
         </p:txBody>
@@ -7094,8 +7112,8 @@
         </p:nvSpPr>
         <p:spPr>
           <a:xfrm>
-            <a:off x="4771553" y="724829"/>
-            <a:ext cx="4197892" cy="1477328"/>
+            <a:off x="4571998" y="709017"/>
+            <a:ext cx="4197892" cy="2585323"/>
           </a:xfrm>
           <a:prstGeom prst="rect">
             <a:avLst/>
@@ -7129,14 +7147,154 @@
                 <a:latin typeface="Times New Roman" panose="02020603050405020304" pitchFamily="18" charset="0"/>
                 <a:cs typeface="Times New Roman" panose="02020603050405020304" pitchFamily="18" charset="0"/>
               </a:rPr>
-              <a:t>16 014 кадров без аугментаций</a:t>
+              <a:t>16 126 </a:t>
             </a:r>
             <a:r>
               <a:rPr lang="ru-RU" dirty="0">
                 <a:latin typeface="Times New Roman" panose="02020603050405020304" pitchFamily="18" charset="0"/>
                 <a:cs typeface="Times New Roman" panose="02020603050405020304" pitchFamily="18" charset="0"/>
               </a:rPr>
-              <a:t>: 4 574 кадра со «спагетти» и 11 440 кадров без видимых признаков этого дефекта. Выборки делились по соотношению 60/20/20.</a:t>
+              <a:t>исходных кадров </a:t>
+            </a:r>
+            <a:r>
+              <a:rPr lang="ru-RU" b="1" dirty="0">
+                <a:latin typeface="Times New Roman" panose="02020603050405020304" pitchFamily="18" charset="0"/>
+                <a:cs typeface="Times New Roman" panose="02020603050405020304" pitchFamily="18" charset="0"/>
+              </a:rPr>
+              <a:t>без аугментаций</a:t>
+            </a:r>
+            <a:r>
+              <a:rPr lang="ru-RU" dirty="0">
+                <a:latin typeface="Times New Roman" panose="02020603050405020304" pitchFamily="18" charset="0"/>
+                <a:cs typeface="Times New Roman" panose="02020603050405020304" pitchFamily="18" charset="0"/>
+              </a:rPr>
+              <a:t>. Обучающая выборка включает </a:t>
+            </a:r>
+            <a:r>
+              <a:rPr lang="ru-RU" b="1" dirty="0">
+                <a:latin typeface="Times New Roman" panose="02020603050405020304" pitchFamily="18" charset="0"/>
+                <a:cs typeface="Times New Roman" panose="02020603050405020304" pitchFamily="18" charset="0"/>
+              </a:rPr>
+              <a:t>9 768</a:t>
+            </a:r>
+            <a:r>
+              <a:rPr lang="ru-RU" dirty="0">
+                <a:latin typeface="Times New Roman" panose="02020603050405020304" pitchFamily="18" charset="0"/>
+                <a:cs typeface="Times New Roman" panose="02020603050405020304" pitchFamily="18" charset="0"/>
+              </a:rPr>
+              <a:t> кадров, </a:t>
+            </a:r>
+            <a:r>
+              <a:rPr lang="ru-RU" dirty="0" err="1">
+                <a:latin typeface="Times New Roman" panose="02020603050405020304" pitchFamily="18" charset="0"/>
+                <a:cs typeface="Times New Roman" panose="02020603050405020304" pitchFamily="18" charset="0"/>
+              </a:rPr>
+              <a:t>валидационная</a:t>
+            </a:r>
+            <a:r>
+              <a:rPr lang="ru-RU" dirty="0">
+                <a:latin typeface="Times New Roman" panose="02020603050405020304" pitchFamily="18" charset="0"/>
+                <a:cs typeface="Times New Roman" panose="02020603050405020304" pitchFamily="18" charset="0"/>
+              </a:rPr>
+              <a:t> </a:t>
+            </a:r>
+            <a:r>
+              <a:rPr lang="ru-RU" b="1" dirty="0">
+                <a:latin typeface="Times New Roman" panose="02020603050405020304" pitchFamily="18" charset="0"/>
+                <a:cs typeface="Times New Roman" panose="02020603050405020304" pitchFamily="18" charset="0"/>
+              </a:rPr>
+              <a:t>3 021 </a:t>
+            </a:r>
+            <a:r>
+              <a:rPr lang="ru-RU" dirty="0">
+                <a:latin typeface="Times New Roman" panose="02020603050405020304" pitchFamily="18" charset="0"/>
+                <a:cs typeface="Times New Roman" panose="02020603050405020304" pitchFamily="18" charset="0"/>
+              </a:rPr>
+              <a:t>кадр, тестовая </a:t>
+            </a:r>
+            <a:r>
+              <a:rPr lang="ru-RU" b="1" dirty="0">
+                <a:latin typeface="Times New Roman" panose="02020603050405020304" pitchFamily="18" charset="0"/>
+                <a:cs typeface="Times New Roman" panose="02020603050405020304" pitchFamily="18" charset="0"/>
+              </a:rPr>
+              <a:t>3 337</a:t>
+            </a:r>
+            <a:r>
+              <a:rPr lang="ru-RU" dirty="0">
+                <a:latin typeface="Times New Roman" panose="02020603050405020304" pitchFamily="18" charset="0"/>
+                <a:cs typeface="Times New Roman" panose="02020603050405020304" pitchFamily="18" charset="0"/>
+              </a:rPr>
+              <a:t> кадров. Их доли составляют 60,6</a:t>
+            </a:r>
+            <a:r>
+              <a:rPr lang="ru-RU" b="1" dirty="0">
+                <a:latin typeface="Times New Roman" panose="02020603050405020304" pitchFamily="18" charset="0"/>
+                <a:cs typeface="Times New Roman" panose="02020603050405020304" pitchFamily="18" charset="0"/>
+              </a:rPr>
+              <a:t> </a:t>
+            </a:r>
+            <a:r>
+              <a:rPr lang="ru-RU" dirty="0">
+                <a:latin typeface="Times New Roman" panose="02020603050405020304" pitchFamily="18" charset="0"/>
+                <a:cs typeface="Times New Roman" panose="02020603050405020304" pitchFamily="18" charset="0"/>
+              </a:rPr>
+              <a:t>%, 18,7</a:t>
+            </a:r>
+            <a:r>
+              <a:rPr lang="ru-RU" b="1" dirty="0">
+                <a:latin typeface="Times New Roman" panose="02020603050405020304" pitchFamily="18" charset="0"/>
+                <a:cs typeface="Times New Roman" panose="02020603050405020304" pitchFamily="18" charset="0"/>
+              </a:rPr>
+              <a:t> </a:t>
+            </a:r>
+            <a:r>
+              <a:rPr lang="ru-RU" dirty="0">
+                <a:latin typeface="Times New Roman" panose="02020603050405020304" pitchFamily="18" charset="0"/>
+                <a:cs typeface="Times New Roman" panose="02020603050405020304" pitchFamily="18" charset="0"/>
+              </a:rPr>
+              <a:t>% и 20,7</a:t>
+            </a:r>
+            <a:r>
+              <a:rPr lang="ru-RU" b="1" dirty="0">
+                <a:latin typeface="Times New Roman" panose="02020603050405020304" pitchFamily="18" charset="0"/>
+                <a:cs typeface="Times New Roman" panose="02020603050405020304" pitchFamily="18" charset="0"/>
+              </a:rPr>
+              <a:t> </a:t>
+            </a:r>
+            <a:r>
+              <a:rPr lang="ru-RU" dirty="0">
+                <a:latin typeface="Times New Roman" panose="02020603050405020304" pitchFamily="18" charset="0"/>
+                <a:cs typeface="Times New Roman" panose="02020603050405020304" pitchFamily="18" charset="0"/>
+              </a:rPr>
+              <a:t>% соответственно. В обучающей выборке представлены </a:t>
+            </a:r>
+            <a:r>
+              <a:rPr lang="ru-RU" b="1" dirty="0">
+                <a:latin typeface="Times New Roman" panose="02020603050405020304" pitchFamily="18" charset="0"/>
+                <a:cs typeface="Times New Roman" panose="02020603050405020304" pitchFamily="18" charset="0"/>
+              </a:rPr>
+              <a:t>2 751 </a:t>
+            </a:r>
+            <a:r>
+              <a:rPr lang="ru-RU" dirty="0">
+                <a:latin typeface="Times New Roman" panose="02020603050405020304" pitchFamily="18" charset="0"/>
+                <a:cs typeface="Times New Roman" panose="02020603050405020304" pitchFamily="18" charset="0"/>
+              </a:rPr>
+              <a:t>кадр со «спагетти» и </a:t>
+            </a:r>
+            <a:r>
+              <a:rPr lang="ru-RU" b="1" dirty="0">
+                <a:latin typeface="Times New Roman" panose="02020603050405020304" pitchFamily="18" charset="0"/>
+                <a:cs typeface="Times New Roman" panose="02020603050405020304" pitchFamily="18" charset="0"/>
+              </a:rPr>
+              <a:t>7 017 </a:t>
+            </a:r>
+            <a:r>
+              <a:rPr lang="ru-RU" dirty="0">
+                <a:latin typeface="Times New Roman" panose="02020603050405020304" pitchFamily="18" charset="0"/>
+                <a:cs typeface="Times New Roman" panose="02020603050405020304" pitchFamily="18" charset="0"/>
+              </a:rPr>
+              <a:t>кадров без видимых признаков этого дефекта</a:t>
             </a:r>
           </a:p>
         </p:txBody>
@@ -7155,8 +7313,8 @@
         </p:nvSpPr>
         <p:spPr>
           <a:xfrm>
-            <a:off x="487537" y="3466535"/>
-            <a:ext cx="3869672" cy="2862322"/>
+            <a:off x="480428" y="3410116"/>
+            <a:ext cx="3869672" cy="3139321"/>
           </a:xfrm>
           <a:prstGeom prst="rect">
             <a:avLst/>
@@ -7183,7 +7341,7 @@
                 <a:latin typeface="Times New Roman" panose="02020603050405020304" pitchFamily="18" charset="0"/>
                 <a:cs typeface="Times New Roman" panose="02020603050405020304" pitchFamily="18" charset="0"/>
               </a:rPr>
-              <a:t>Для каждой эпохи обучения сохранялся </a:t>
+              <a:t>В каждой эпохе обучения сохранялся </a:t>
             </a:r>
             <a:r>
               <a:rPr lang="ru-RU" b="1" dirty="0">
@@ -7197,21 +7355,49 @@
                 <a:latin typeface="Times New Roman" panose="02020603050405020304" pitchFamily="18" charset="0"/>
                 <a:cs typeface="Times New Roman" panose="02020603050405020304" pitchFamily="18" charset="0"/>
               </a:rPr>
-              <a:t>: использовались все 2 746 кадров со «спагетти» и столько же случайно выбранных кадров без дефекта. Всего модель получала </a:t>
+              <a:t>: модель получала </a:t>
             </a:r>
             <a:r>
               <a:rPr lang="ru-RU" b="1" dirty="0">
                 <a:latin typeface="Times New Roman" panose="02020603050405020304" pitchFamily="18" charset="0"/>
                 <a:cs typeface="Times New Roman" panose="02020603050405020304" pitchFamily="18" charset="0"/>
               </a:rPr>
-              <a:t>5 492 изображения за эпоху</a:t>
+              <a:t>5 502</a:t>
             </a:r>
             <a:r>
               <a:rPr lang="ru-RU" dirty="0">
                 <a:latin typeface="Times New Roman" panose="02020603050405020304" pitchFamily="18" charset="0"/>
                 <a:cs typeface="Times New Roman" panose="02020603050405020304" pitchFamily="18" charset="0"/>
               </a:rPr>
-              <a:t>. </a:t>
+              <a:t> показа изображений, по </a:t>
+            </a:r>
+            <a:r>
+              <a:rPr lang="ru-RU" b="1" dirty="0">
+                <a:latin typeface="Times New Roman" panose="02020603050405020304" pitchFamily="18" charset="0"/>
+                <a:cs typeface="Times New Roman" panose="02020603050405020304" pitchFamily="18" charset="0"/>
+              </a:rPr>
+              <a:t>2 751</a:t>
+            </a:r>
+            <a:r>
+              <a:rPr lang="ru-RU" dirty="0">
+                <a:latin typeface="Times New Roman" panose="02020603050405020304" pitchFamily="18" charset="0"/>
+                <a:cs typeface="Times New Roman" panose="02020603050405020304" pitchFamily="18" charset="0"/>
+              </a:rPr>
+              <a:t> на каждый класс. После аугментации обучающая выборка содержит </a:t>
+            </a:r>
+            <a:r>
+              <a:rPr lang="ru-RU" b="1" dirty="0">
+                <a:latin typeface="Times New Roman" panose="02020603050405020304" pitchFamily="18" charset="0"/>
+                <a:cs typeface="Times New Roman" panose="02020603050405020304" pitchFamily="18" charset="0"/>
+              </a:rPr>
+              <a:t>29 304</a:t>
+            </a:r>
+            <a:r>
+              <a:rPr lang="ru-RU" dirty="0">
+                <a:latin typeface="Times New Roman" panose="02020603050405020304" pitchFamily="18" charset="0"/>
+                <a:cs typeface="Times New Roman" panose="02020603050405020304" pitchFamily="18" charset="0"/>
+              </a:rPr>
+              <a:t> изображения: к каждому исходному кадру добавлены два варианта. </a:t>
             </a:r>
             <a:r>
               <a:rPr lang="ru-RU" dirty="0" err="1">
@@ -7225,7 +7411,21 @@
                 <a:latin typeface="Times New Roman" panose="02020603050405020304" pitchFamily="18" charset="0"/>
                 <a:cs typeface="Times New Roman" panose="02020603050405020304" pitchFamily="18" charset="0"/>
               </a:rPr>
-              <a:t> и тестовая выборки содержат только исходные изображения без аугментаций.</a:t>
+              <a:t> и тестовая выборки содержат только исходные изображения и не </a:t>
+            </a:r>
+            <a:r>
+              <a:rPr lang="ru-RU" dirty="0" err="1">
+                <a:latin typeface="Times New Roman" panose="02020603050405020304" pitchFamily="18" charset="0"/>
+                <a:cs typeface="Times New Roman" panose="02020603050405020304" pitchFamily="18" charset="0"/>
+              </a:rPr>
+              <a:t>аугментируются</a:t>
+            </a:r>
+            <a:r>
+              <a:rPr lang="ru-RU" dirty="0">
+                <a:latin typeface="Times New Roman" panose="02020603050405020304" pitchFamily="18" charset="0"/>
+                <a:cs typeface="Times New Roman" panose="02020603050405020304" pitchFamily="18" charset="0"/>
+              </a:rPr>
+              <a:t>.</a:t>
             </a:r>
           </a:p>
         </p:txBody>
@@ -7334,29 +7534,7 @@
                 <a:ea typeface="Times New Roman"/>
                 <a:cs typeface="Times New Roman"/>
               </a:rPr>
-              <a:t>Диаграмма статистики печатей на ферме компании «</a:t>
-            </a:r>
-            <a:r>
-              <a:rPr lang="en-US" sz="1600" b="0" dirty="0" err="1">
-                <a:solidFill>
-                  <a:srgbClr val="000000"/>
-                </a:solidFill>
-                <a:latin typeface="Times New Roman"/>
-                <a:ea typeface="Times New Roman"/>
-                <a:cs typeface="Times New Roman"/>
-              </a:rPr>
-              <a:t>Stereotech</a:t>
-            </a:r>
-            <a:r>
-              <a:rPr lang="ru-RU" sz="1600" b="0" dirty="0">
-                <a:solidFill>
-                  <a:srgbClr val="000000"/>
-                </a:solidFill>
-                <a:latin typeface="Times New Roman"/>
-                <a:ea typeface="Times New Roman"/>
-                <a:cs typeface="Times New Roman"/>
-              </a:rPr>
-              <a:t>»</a:t>
+              <a:t>Диаграмма распределения исходных кадров по выборкам</a:t>
             </a:r>
             <a:endParaRPr sz="1600" b="0" dirty="0">
               <a:solidFill>
@@ -7369,6 +7547,36 @@
           </a:p>
         </p:txBody>
       </p:sp>
+      <p:pic>
+        <p:nvPicPr>
+          <p:cNvPr id="8" name="Рисунок 7">
+            <a:extLst>
+              <a:ext uri="{FF2B5EF4-FFF2-40B4-BE49-F238E27FC236}">
+                <a16:creationId xmlns:a16="http://schemas.microsoft.com/office/drawing/2014/main" id="{A2B5EBF5-FBE6-336C-42E4-49A8C5D8A0DF}"/>
+              </a:ext>
+            </a:extLst>
+          </p:cNvPr>
+          <p:cNvPicPr>
+            <a:picLocks noChangeAspect="1"/>
+          </p:cNvPicPr>
+          <p:nvPr/>
+        </p:nvPicPr>
+        <p:blipFill>
+          <a:blip r:embed="rId3"/>
+          <a:stretch>
+            <a:fillRect/>
+          </a:stretch>
+        </p:blipFill>
+        <p:spPr>
+          <a:xfrm>
+            <a:off x="4882102" y="3317275"/>
+            <a:ext cx="3976794" cy="2630107"/>
+          </a:xfrm>
+          <a:prstGeom prst="rect">
+            <a:avLst/>
+          </a:prstGeom>
+        </p:spPr>
+      </p:pic>
     </p:spTree>
     <p:extLst>
       <p:ext uri="{BB962C8B-B14F-4D97-AF65-F5344CB8AC3E}">
@@ -9216,7 +9424,7 @@
                 <a:latin typeface="Times New Roman" panose="02020603050405020304" pitchFamily="18" charset="0"/>
                 <a:cs typeface="Times New Roman" panose="02020603050405020304" pitchFamily="18" charset="0"/>
               </a:rPr>
-              <a:t>24 В</a:t>
+              <a:t>24 В</a:t>
             </a:r>
             <a:r>
               <a:rPr lang="ru-RU" dirty="0">
@@ -9230,7 +9438,7 @@
                 <a:latin typeface="Times New Roman" panose="02020603050405020304" pitchFamily="18" charset="0"/>
                 <a:cs typeface="Times New Roman" panose="02020603050405020304" pitchFamily="18" charset="0"/>
               </a:rPr>
-              <a:t>5 В</a:t>
+              <a:t>5 В</a:t>
             </a:r>
             <a:r>
               <a:rPr lang="ru-RU" dirty="0">
@@ -9568,7 +9776,7 @@
                 <a:latin typeface="Times New Roman" panose="02020603050405020304" pitchFamily="18" charset="0"/>
                 <a:cs typeface="Times New Roman" panose="02020603050405020304" pitchFamily="18" charset="0"/>
               </a:rPr>
-              <a:t> 3 мин 21 с,</a:t>
+              <a:t> 3 мин 21 с,</a:t>
             </a:r>
             <a:r>
               <a:rPr lang="ru-RU" dirty="0">

--- a/presentation/NIR2_slide01_v2.pptx
+++ b/presentation/NIR2_slide01_v2.pptx
@@ -5,19 +5,20 @@
     <p:sldMasterId id="2147483648" r:id="rId1"/>
   </p:sldMasterIdLst>
   <p:notesMasterIdLst>
-    <p:notesMasterId r:id="rId12"/>
+    <p:notesMasterId r:id="rId13"/>
   </p:notesMasterIdLst>
   <p:sldIdLst>
     <p:sldId id="257" r:id="rId2"/>
     <p:sldId id="258" r:id="rId3"/>
     <p:sldId id="256" r:id="rId4"/>
-    <p:sldId id="268" r:id="rId5"/>
-    <p:sldId id="273" r:id="rId6"/>
-    <p:sldId id="270" r:id="rId7"/>
-    <p:sldId id="271" r:id="rId8"/>
-    <p:sldId id="272" r:id="rId9"/>
-    <p:sldId id="274" r:id="rId10"/>
-    <p:sldId id="266" r:id="rId11"/>
+    <p:sldId id="275" r:id="rId5"/>
+    <p:sldId id="268" r:id="rId6"/>
+    <p:sldId id="273" r:id="rId7"/>
+    <p:sldId id="270" r:id="rId8"/>
+    <p:sldId id="271" r:id="rId9"/>
+    <p:sldId id="272" r:id="rId10"/>
+    <p:sldId id="274" r:id="rId11"/>
+    <p:sldId id="266" r:id="rId12"/>
   </p:sldIdLst>
   <p:sldSz cx="9144000" cy="6858000" type="screen4x3"/>
   <p:notesSz cx="6858000" cy="9144000"/>
@@ -636,7 +637,7 @@
           <a:bodyPr/>
           <a:lstStyle/>
           <a:p>
-            <a:endParaRPr lang="ru-RU"/>
+            <a:endParaRPr lang="ru-RU" dirty="0"/>
           </a:p>
         </p:txBody>
       </p:sp>
@@ -672,7 +673,7 @@
     </p:spTree>
     <p:extLst>
       <p:ext uri="{BB962C8B-B14F-4D97-AF65-F5344CB8AC3E}">
-        <p14:creationId xmlns:p14="http://schemas.microsoft.com/office/powerpoint/2010/main" val="2033981817"/>
+        <p14:creationId xmlns:p14="http://schemas.microsoft.com/office/powerpoint/2010/main" val="2184438951"/>
       </p:ext>
     </p:extLst>
   </p:cSld>
@@ -690,7 +691,7 @@
         <p:cNvPr id="1" name="">
           <a:extLst>
             <a:ext uri="{FF2B5EF4-FFF2-40B4-BE49-F238E27FC236}">
-              <a16:creationId xmlns:a16="http://schemas.microsoft.com/office/drawing/2014/main" id="{B17726DC-CE10-F03F-2142-18D5DEE97B8B}"/>
+              <a16:creationId xmlns:a16="http://schemas.microsoft.com/office/drawing/2014/main" id="{F11BACC8-2C4D-334B-9042-96E69D47FBC5}"/>
             </a:ext>
           </a:extLst>
         </p:cNvPr>
@@ -710,7 +711,7 @@
           <p:cNvPr id="2" name="Образ слайда 1">
             <a:extLst>
               <a:ext uri="{FF2B5EF4-FFF2-40B4-BE49-F238E27FC236}">
-                <a16:creationId xmlns:a16="http://schemas.microsoft.com/office/drawing/2014/main" id="{CBD27571-4120-1AD9-24AF-1F6C37D039DE}"/>
+                <a16:creationId xmlns:a16="http://schemas.microsoft.com/office/drawing/2014/main" id="{22BE1D05-A3F2-9A1C-96D7-51E72924A0B9}"/>
               </a:ext>
             </a:extLst>
           </p:cNvPr>
@@ -728,7 +729,7 @@
           <p:cNvPr id="3" name="Заметки 2">
             <a:extLst>
               <a:ext uri="{FF2B5EF4-FFF2-40B4-BE49-F238E27FC236}">
-                <a16:creationId xmlns:a16="http://schemas.microsoft.com/office/drawing/2014/main" id="{C020C72C-20DC-053F-06DA-226D6D644D97}"/>
+                <a16:creationId xmlns:a16="http://schemas.microsoft.com/office/drawing/2014/main" id="{01E14AF7-2AA3-67C6-62C2-2ADB9EC803C7}"/>
               </a:ext>
             </a:extLst>
           </p:cNvPr>
@@ -744,7 +745,7 @@
           <a:bodyPr/>
           <a:lstStyle/>
           <a:p>
-            <a:endParaRPr lang="ru-RU" dirty="0"/>
+            <a:endParaRPr lang="ru-RU"/>
           </a:p>
         </p:txBody>
       </p:sp>
@@ -753,7 +754,7 @@
           <p:cNvPr id="4" name="Номер слайда 3">
             <a:extLst>
               <a:ext uri="{FF2B5EF4-FFF2-40B4-BE49-F238E27FC236}">
-                <a16:creationId xmlns:a16="http://schemas.microsoft.com/office/drawing/2014/main" id="{55F1735C-DD43-29D0-C068-51A4DFD82638}"/>
+                <a16:creationId xmlns:a16="http://schemas.microsoft.com/office/drawing/2014/main" id="{0D686308-0247-4379-103C-289F8CA0A19D}"/>
               </a:ext>
             </a:extLst>
           </p:cNvPr>
@@ -780,7 +781,7 @@
     </p:spTree>
     <p:extLst>
       <p:ext uri="{BB962C8B-B14F-4D97-AF65-F5344CB8AC3E}">
-        <p14:creationId xmlns:p14="http://schemas.microsoft.com/office/powerpoint/2010/main" val="3979846337"/>
+        <p14:creationId xmlns:p14="http://schemas.microsoft.com/office/powerpoint/2010/main" val="2033981817"/>
       </p:ext>
     </p:extLst>
   </p:cSld>
@@ -888,7 +889,7 @@
     </p:spTree>
     <p:extLst>
       <p:ext uri="{BB962C8B-B14F-4D97-AF65-F5344CB8AC3E}">
-        <p14:creationId xmlns:p14="http://schemas.microsoft.com/office/powerpoint/2010/main" val="3040273396"/>
+        <p14:creationId xmlns:p14="http://schemas.microsoft.com/office/powerpoint/2010/main" val="3979846337"/>
       </p:ext>
     </p:extLst>
   </p:cSld>
@@ -996,7 +997,7 @@
     </p:spTree>
     <p:extLst>
       <p:ext uri="{BB962C8B-B14F-4D97-AF65-F5344CB8AC3E}">
-        <p14:creationId xmlns:p14="http://schemas.microsoft.com/office/powerpoint/2010/main" val="879894849"/>
+        <p14:creationId xmlns:p14="http://schemas.microsoft.com/office/powerpoint/2010/main" val="3040273396"/>
       </p:ext>
     </p:extLst>
   </p:cSld>
@@ -1096,6 +1097,114 @@
             <a:fld id="{8C7347D7-6652-406A-AA51-ABE302EA4CF8}" type="slidenum">
               <a:rPr lang="ru-RU" smtClean="0"/>
               <a:t>9</a:t>
+            </a:fld>
+            <a:endParaRPr lang="ru-RU"/>
+          </a:p>
+        </p:txBody>
+      </p:sp>
+    </p:spTree>
+    <p:extLst>
+      <p:ext uri="{BB962C8B-B14F-4D97-AF65-F5344CB8AC3E}">
+        <p14:creationId xmlns:p14="http://schemas.microsoft.com/office/powerpoint/2010/main" val="879894849"/>
+      </p:ext>
+    </p:extLst>
+  </p:cSld>
+  <p:clrMapOvr>
+    <a:masterClrMapping/>
+  </p:clrMapOvr>
+</p:notes>
+</file>
+
+<file path=ppt/notesSlides/notesSlide9.xml><?xml version="1.0" encoding="utf-8"?>
+<p:notes xmlns:a="http://schemas.openxmlformats.org/drawingml/2006/main" xmlns:r="http://schemas.openxmlformats.org/officeDocument/2006/relationships" xmlns:p="http://schemas.openxmlformats.org/presentationml/2006/main">
+  <p:cSld>
+    <p:spTree>
+      <p:nvGrpSpPr>
+        <p:cNvPr id="1" name="">
+          <a:extLst>
+            <a:ext uri="{FF2B5EF4-FFF2-40B4-BE49-F238E27FC236}">
+              <a16:creationId xmlns:a16="http://schemas.microsoft.com/office/drawing/2014/main" id="{B17726DC-CE10-F03F-2142-18D5DEE97B8B}"/>
+            </a:ext>
+          </a:extLst>
+        </p:cNvPr>
+        <p:cNvGrpSpPr/>
+        <p:nvPr/>
+      </p:nvGrpSpPr>
+      <p:grpSpPr>
+        <a:xfrm>
+          <a:off x="0" y="0"/>
+          <a:ext cx="0" cy="0"/>
+          <a:chOff x="0" y="0"/>
+          <a:chExt cx="0" cy="0"/>
+        </a:xfrm>
+      </p:grpSpPr>
+      <p:sp>
+        <p:nvSpPr>
+          <p:cNvPr id="2" name="Образ слайда 1">
+            <a:extLst>
+              <a:ext uri="{FF2B5EF4-FFF2-40B4-BE49-F238E27FC236}">
+                <a16:creationId xmlns:a16="http://schemas.microsoft.com/office/drawing/2014/main" id="{CBD27571-4120-1AD9-24AF-1F6C37D039DE}"/>
+              </a:ext>
+            </a:extLst>
+          </p:cNvPr>
+          <p:cNvSpPr>
+            <a:spLocks noGrp="1" noRot="1" noChangeAspect="1"/>
+          </p:cNvSpPr>
+          <p:nvPr>
+            <p:ph type="sldImg"/>
+          </p:nvPr>
+        </p:nvSpPr>
+        <p:spPr/>
+      </p:sp>
+      <p:sp>
+        <p:nvSpPr>
+          <p:cNvPr id="3" name="Заметки 2">
+            <a:extLst>
+              <a:ext uri="{FF2B5EF4-FFF2-40B4-BE49-F238E27FC236}">
+                <a16:creationId xmlns:a16="http://schemas.microsoft.com/office/drawing/2014/main" id="{C020C72C-20DC-053F-06DA-226D6D644D97}"/>
+              </a:ext>
+            </a:extLst>
+          </p:cNvPr>
+          <p:cNvSpPr>
+            <a:spLocks noGrp="1"/>
+          </p:cNvSpPr>
+          <p:nvPr>
+            <p:ph type="body" idx="1"/>
+          </p:nvPr>
+        </p:nvSpPr>
+        <p:spPr/>
+        <p:txBody>
+          <a:bodyPr/>
+          <a:lstStyle/>
+          <a:p>
+            <a:endParaRPr lang="ru-RU" dirty="0"/>
+          </a:p>
+        </p:txBody>
+      </p:sp>
+      <p:sp>
+        <p:nvSpPr>
+          <p:cNvPr id="4" name="Номер слайда 3">
+            <a:extLst>
+              <a:ext uri="{FF2B5EF4-FFF2-40B4-BE49-F238E27FC236}">
+                <a16:creationId xmlns:a16="http://schemas.microsoft.com/office/drawing/2014/main" id="{55F1735C-DD43-29D0-C068-51A4DFD82638}"/>
+              </a:ext>
+            </a:extLst>
+          </p:cNvPr>
+          <p:cNvSpPr>
+            <a:spLocks noGrp="1"/>
+          </p:cNvSpPr>
+          <p:nvPr>
+            <p:ph type="sldNum" sz="quarter" idx="5"/>
+          </p:nvPr>
+        </p:nvSpPr>
+        <p:spPr/>
+        <p:txBody>
+          <a:bodyPr/>
+          <a:lstStyle/>
+          <a:p>
+            <a:fld id="{8C7347D7-6652-406A-AA51-ABE302EA4CF8}" type="slidenum">
+              <a:rPr lang="ru-RU" smtClean="0"/>
+              <a:t>10</a:t>
             </a:fld>
             <a:endParaRPr lang="ru-RU"/>
           </a:p>
@@ -5383,2712 +5492,6 @@
   <p:cSld>
     <p:spTree>
       <p:nvGrpSpPr>
-        <p:cNvPr id="1" name=""/>
-        <p:cNvGrpSpPr/>
-        <p:nvPr/>
-      </p:nvGrpSpPr>
-      <p:grpSpPr>
-        <a:xfrm>
-          <a:off x="0" y="0"/>
-          <a:ext cx="0" cy="0"/>
-          <a:chOff x="0" y="0"/>
-          <a:chExt cx="0" cy="0"/>
-        </a:xfrm>
-      </p:grpSpPr>
-      <p:sp>
-        <p:nvSpPr>
-          <p:cNvPr id="3" name="Объект 2"/>
-          <p:cNvSpPr>
-            <a:spLocks noGrp="1"/>
-          </p:cNvSpPr>
-          <p:nvPr>
-            <p:ph idx="1"/>
-          </p:nvPr>
-        </p:nvSpPr>
-        <p:spPr>
-          <a:xfrm>
-            <a:off x="200634" y="1034005"/>
-            <a:ext cx="8736990" cy="5827551"/>
-          </a:xfrm>
-        </p:spPr>
-        <p:txBody>
-          <a:bodyPr vert="horz" lIns="91440" tIns="45720" rIns="91440" bIns="45720" rtlCol="0" anchor="ctr">
-            <a:noAutofit/>
-          </a:bodyPr>
-          <a:lstStyle/>
-          <a:p>
-            <a:pPr marL="0" indent="0">
-              <a:lnSpc>
-                <a:spcPct val="100000"/>
-              </a:lnSpc>
-              <a:buNone/>
-            </a:pPr>
-            <a:r>
-              <a:rPr lang="ru-RU" sz="2000" dirty="0">
-                <a:latin typeface="Times New Roman" panose="02020603050405020304" pitchFamily="18" charset="0"/>
-                <a:cs typeface="Times New Roman" panose="02020603050405020304" pitchFamily="18" charset="0"/>
-              </a:rPr>
-              <a:t>	Цель и задачи моей научно-исследовательской работы выполнены:</a:t>
-            </a:r>
-            <a:endParaRPr lang="ru-RU" sz="2000" dirty="0">
-              <a:latin typeface="Times New Roman" panose="02020603050405020304" pitchFamily="18" charset="0"/>
-              <a:ea typeface="Calibri"/>
-              <a:cs typeface="Times New Roman" panose="02020603050405020304" pitchFamily="18" charset="0"/>
-            </a:endParaRPr>
-          </a:p>
-          <a:p>
-            <a:pPr>
-              <a:lnSpc>
-                <a:spcPct val="100000"/>
-              </a:lnSpc>
-            </a:pPr>
-            <a:r>
-              <a:rPr lang="ru-RU" sz="2000" dirty="0">
-                <a:solidFill>
-                  <a:srgbClr val="000000"/>
-                </a:solidFill>
-                <a:latin typeface="Times New Roman" panose="02020603050405020304" pitchFamily="18" charset="0"/>
-                <a:cs typeface="Times New Roman" panose="02020603050405020304" pitchFamily="18" charset="0"/>
-              </a:rPr>
-              <a:t>Изучены дефекты FDM-печати и выбран целевого дефекта для автоматического обнаружения.</a:t>
-            </a:r>
-          </a:p>
-          <a:p>
-            <a:pPr>
-              <a:lnSpc>
-                <a:spcPct val="100000"/>
-              </a:lnSpc>
-            </a:pPr>
-            <a:r>
-              <a:rPr lang="ru-RU" sz="2000" dirty="0">
-                <a:solidFill>
-                  <a:srgbClr val="000000"/>
-                </a:solidFill>
-                <a:latin typeface="Times New Roman" panose="02020603050405020304" pitchFamily="18" charset="0"/>
-                <a:cs typeface="Times New Roman" panose="02020603050405020304" pitchFamily="18" charset="0"/>
-              </a:rPr>
-              <a:t>Сформирован датасет: произведен поиск данных, балансировка классов, </a:t>
-            </a:r>
-            <a:r>
-              <a:rPr lang="ru-RU" sz="2000" dirty="0" err="1">
-                <a:solidFill>
-                  <a:srgbClr val="000000"/>
-                </a:solidFill>
-                <a:latin typeface="Times New Roman" panose="02020603050405020304" pitchFamily="18" charset="0"/>
-                <a:cs typeface="Times New Roman" panose="02020603050405020304" pitchFamily="18" charset="0"/>
-              </a:rPr>
-              <a:t>аугментирование</a:t>
-            </a:r>
-            <a:r>
-              <a:rPr lang="ru-RU" sz="2000" dirty="0">
-                <a:solidFill>
-                  <a:srgbClr val="000000"/>
-                </a:solidFill>
-                <a:latin typeface="Times New Roman" panose="02020603050405020304" pitchFamily="18" charset="0"/>
-                <a:cs typeface="Times New Roman" panose="02020603050405020304" pitchFamily="18" charset="0"/>
-              </a:rPr>
-              <a:t>, разделение на обучающую и тестовую выборки; </a:t>
-            </a:r>
-          </a:p>
-          <a:p>
-            <a:pPr marL="214630" indent="-214630">
-              <a:lnSpc>
-                <a:spcPct val="100000"/>
-              </a:lnSpc>
-              <a:spcBef>
-                <a:spcPts val="0"/>
-              </a:spcBef>
-              <a:buFont typeface="Arial,Sans-Serif" panose="020B0604020202020204" pitchFamily="34" charset="0"/>
-            </a:pPr>
-            <a:r>
-              <a:rPr lang="ru-RU" sz="2000" dirty="0">
-                <a:latin typeface="Times New Roman" panose="02020603050405020304" pitchFamily="18" charset="0"/>
-                <a:ea typeface="Calibri"/>
-                <a:cs typeface="Times New Roman" panose="02020603050405020304" pitchFamily="18" charset="0"/>
-              </a:rPr>
-              <a:t>Обучена нейронная сеть для распознавания дефекта «Спагетти» на основе изображений печатей; </a:t>
-            </a:r>
-            <a:endParaRPr lang="en-US" sz="2000" dirty="0">
-              <a:latin typeface="Times New Roman" panose="02020603050405020304" pitchFamily="18" charset="0"/>
-              <a:ea typeface="Calibri"/>
-              <a:cs typeface="Times New Roman" panose="02020603050405020304" pitchFamily="18" charset="0"/>
-            </a:endParaRPr>
-          </a:p>
-          <a:p>
-            <a:pPr>
-              <a:lnSpc>
-                <a:spcPct val="100000"/>
-              </a:lnSpc>
-            </a:pPr>
-            <a:r>
-              <a:rPr lang="ru-RU" sz="2000" dirty="0">
-                <a:latin typeface="Times New Roman" panose="02020603050405020304" pitchFamily="18" charset="0"/>
-                <a:ea typeface="Calibri"/>
-                <a:cs typeface="Times New Roman" panose="02020603050405020304" pitchFamily="18" charset="0"/>
-              </a:rPr>
-              <a:t>Разработан, собран и отлажен аппаратно-программный комплекса экспериментального 3D-принтера.</a:t>
-            </a:r>
-            <a:endParaRPr lang="ru-RU" sz="2000" dirty="0">
-              <a:solidFill>
-                <a:srgbClr val="000000"/>
-              </a:solidFill>
-              <a:latin typeface="Times New Roman" panose="02020603050405020304" pitchFamily="18" charset="0"/>
-              <a:cs typeface="Times New Roman" panose="02020603050405020304" pitchFamily="18" charset="0"/>
-            </a:endParaRPr>
-          </a:p>
-          <a:p>
-            <a:pPr>
-              <a:lnSpc>
-                <a:spcPct val="100000"/>
-              </a:lnSpc>
-            </a:pPr>
-            <a:r>
-              <a:rPr lang="ru-RU" sz="2000" dirty="0">
-                <a:latin typeface="Times New Roman" panose="02020603050405020304" pitchFamily="18" charset="0"/>
-                <a:cs typeface="Times New Roman" panose="02020603050405020304" pitchFamily="18" charset="0"/>
-              </a:rPr>
-              <a:t>Проведен тестовый запуск работы системы контроля и 3D-принтера в процессе печати.</a:t>
-            </a:r>
-          </a:p>
-          <a:p>
-            <a:pPr>
-              <a:lnSpc>
-                <a:spcPct val="100000"/>
-              </a:lnSpc>
-            </a:pPr>
-            <a:endParaRPr lang="ru-RU" sz="2000" dirty="0">
-              <a:latin typeface="Times New Roman" panose="02020603050405020304" pitchFamily="18" charset="0"/>
-              <a:cs typeface="Times New Roman" panose="02020603050405020304" pitchFamily="18" charset="0"/>
-            </a:endParaRPr>
-          </a:p>
-          <a:p>
-            <a:pPr marL="0" indent="0">
-              <a:lnSpc>
-                <a:spcPct val="100000"/>
-              </a:lnSpc>
-              <a:buNone/>
-            </a:pPr>
-            <a:r>
-              <a:rPr lang="ru-RU" sz="2000" dirty="0">
-                <a:latin typeface="Times New Roman" panose="02020603050405020304" pitchFamily="18" charset="0"/>
-                <a:cs typeface="Times New Roman" panose="02020603050405020304" pitchFamily="18" charset="0"/>
-              </a:rPr>
-              <a:t>	Цель и задачи моей научно-исследовательской работы выполнены:</a:t>
-            </a:r>
-            <a:endParaRPr lang="ru-RU" sz="2000" dirty="0">
-              <a:latin typeface="Times New Roman" panose="02020603050405020304" pitchFamily="18" charset="0"/>
-              <a:ea typeface="Calibri"/>
-              <a:cs typeface="Times New Roman" panose="02020603050405020304" pitchFamily="18" charset="0"/>
-            </a:endParaRPr>
-          </a:p>
-          <a:p>
-            <a:pPr>
-              <a:lnSpc>
-                <a:spcPct val="100000"/>
-              </a:lnSpc>
-            </a:pPr>
-            <a:endParaRPr lang="ru-RU" sz="2000" dirty="0">
-              <a:latin typeface="Times New Roman" panose="02020603050405020304" pitchFamily="18" charset="0"/>
-              <a:cs typeface="Times New Roman" panose="02020603050405020304" pitchFamily="18" charset="0"/>
-            </a:endParaRPr>
-          </a:p>
-          <a:p>
-            <a:pPr>
-              <a:lnSpc>
-                <a:spcPct val="100000"/>
-              </a:lnSpc>
-            </a:pPr>
-            <a:endParaRPr lang="ru-RU" sz="2000" dirty="0">
-              <a:latin typeface="Times New Roman" panose="02020603050405020304" pitchFamily="18" charset="0"/>
-              <a:cs typeface="Times New Roman" panose="02020603050405020304" pitchFamily="18" charset="0"/>
-            </a:endParaRPr>
-          </a:p>
-          <a:p>
-            <a:pPr>
-              <a:lnSpc>
-                <a:spcPct val="100000"/>
-              </a:lnSpc>
-            </a:pPr>
-            <a:endParaRPr lang="ru-RU" sz="2000" dirty="0">
-              <a:latin typeface="Times New Roman" panose="02020603050405020304" pitchFamily="18" charset="0"/>
-              <a:ea typeface="Calibri"/>
-              <a:cs typeface="Times New Roman" panose="02020603050405020304" pitchFamily="18" charset="0"/>
-            </a:endParaRPr>
-          </a:p>
-        </p:txBody>
-      </p:sp>
-      <p:sp>
-        <p:nvSpPr>
-          <p:cNvPr id="4" name="Замещающий номер слайда 3"/>
-          <p:cNvSpPr>
-            <a:spLocks noGrp="1"/>
-          </p:cNvSpPr>
-          <p:nvPr>
-            <p:ph type="sldNum" sz="quarter" idx="12"/>
-          </p:nvPr>
-        </p:nvSpPr>
-        <p:spPr>
-          <a:xfrm>
-            <a:off x="7088886" y="6493511"/>
-            <a:ext cx="2057400" cy="365125"/>
-          </a:xfrm>
-        </p:spPr>
-        <p:txBody>
-          <a:bodyPr/>
-          <a:lstStyle/>
-          <a:p>
-            <a:fld id="{D6ED8A53-8D2F-4011-BE06-EDB0774336BA}" type="slidenum">
-              <a:rPr lang="ru-RU" sz="2000" dirty="0" smtClean="0">
-                <a:solidFill>
-                  <a:schemeClr val="tx1"/>
-                </a:solidFill>
-                <a:latin typeface="Times New Roman"/>
-                <a:cs typeface="Times New Roman"/>
-              </a:rPr>
-              <a:t>10</a:t>
-            </a:fld>
-            <a:endParaRPr lang="ru-RU" sz="2000">
-              <a:solidFill>
-                <a:schemeClr val="tx1"/>
-              </a:solidFill>
-              <a:latin typeface="Times New Roman"/>
-              <a:cs typeface="Times New Roman"/>
-            </a:endParaRPr>
-          </a:p>
-        </p:txBody>
-      </p:sp>
-      <p:sp>
-        <p:nvSpPr>
-          <p:cNvPr id="6" name="Заголовок 1">
-            <a:extLst>
-              <a:ext uri="{FF2B5EF4-FFF2-40B4-BE49-F238E27FC236}">
-                <a16:creationId xmlns:a16="http://schemas.microsoft.com/office/drawing/2014/main" id="{A5D6DF51-0B62-79A6-6D5B-9EBEFC4103B7}"/>
-              </a:ext>
-            </a:extLst>
-          </p:cNvPr>
-          <p:cNvSpPr txBox="1">
-            <a:spLocks/>
-          </p:cNvSpPr>
-          <p:nvPr/>
-        </p:nvSpPr>
-        <p:spPr>
-          <a:xfrm>
-            <a:off x="701718" y="3637"/>
-            <a:ext cx="7886700" cy="712868"/>
-          </a:xfrm>
-          <a:prstGeom prst="rect">
-            <a:avLst/>
-          </a:prstGeom>
-        </p:spPr>
-        <p:txBody>
-          <a:bodyPr vert="horz" lIns="91440" tIns="45720" rIns="91440" bIns="45720" rtlCol="0" anchor="ctr">
-            <a:normAutofit/>
-          </a:bodyPr>
-          <a:lstStyle>
-            <a:lvl1pPr algn="l" defTabSz="914400" rtl="0" eaLnBrk="1" latinLnBrk="0" hangingPunct="1">
-              <a:lnSpc>
-                <a:spcPct val="90000"/>
-              </a:lnSpc>
-              <a:spcBef>
-                <a:spcPct val="0"/>
-              </a:spcBef>
-              <a:buNone/>
-              <a:defRPr sz="4400" kern="1200">
-                <a:solidFill>
-                  <a:schemeClr val="tx1"/>
-                </a:solidFill>
-                <a:latin typeface="+mj-lt"/>
-                <a:ea typeface="+mj-ea"/>
-                <a:cs typeface="+mj-cs"/>
-              </a:defRPr>
-            </a:lvl1pPr>
-          </a:lstStyle>
-          <a:p>
-            <a:pPr algn="ctr"/>
-            <a:r>
-              <a:rPr lang="ru-RU">
-                <a:latin typeface="Times New Roman"/>
-                <a:ea typeface="Calibri"/>
-                <a:cs typeface="Times New Roman"/>
-              </a:rPr>
-              <a:t>Заключение</a:t>
-            </a:r>
-            <a:endParaRPr lang="ru-RU">
-              <a:ea typeface="Calibri Light"/>
-              <a:cs typeface="Calibri Light"/>
-            </a:endParaRPr>
-          </a:p>
-        </p:txBody>
-      </p:sp>
-    </p:spTree>
-  </p:cSld>
-  <p:clrMapOvr>
-    <a:masterClrMapping/>
-  </p:clrMapOvr>
-</p:sld>
-</file>
-
-<file path=ppt/slides/slide2.xml><?xml version="1.0" encoding="utf-8"?>
-<p:sld xmlns:a="http://schemas.openxmlformats.org/drawingml/2006/main" xmlns:r="http://schemas.openxmlformats.org/officeDocument/2006/relationships" xmlns:p="http://schemas.openxmlformats.org/presentationml/2006/main">
-  <p:cSld>
-    <p:spTree>
-      <p:nvGrpSpPr>
-        <p:cNvPr id="1" name=""/>
-        <p:cNvGrpSpPr/>
-        <p:nvPr/>
-      </p:nvGrpSpPr>
-      <p:grpSpPr>
-        <a:xfrm>
-          <a:off x="0" y="0"/>
-          <a:ext cx="0" cy="0"/>
-          <a:chOff x="0" y="0"/>
-          <a:chExt cx="0" cy="0"/>
-        </a:xfrm>
-      </p:grpSpPr>
-      <p:sp>
-        <p:nvSpPr>
-          <p:cNvPr id="2" name="Заголовок 1"/>
-          <p:cNvSpPr>
-            <a:spLocks noGrp="1"/>
-          </p:cNvSpPr>
-          <p:nvPr>
-            <p:ph type="title"/>
-          </p:nvPr>
-        </p:nvSpPr>
-        <p:spPr>
-          <a:xfrm>
-            <a:off x="633432" y="-5479"/>
-            <a:ext cx="7877136" cy="758162"/>
-          </a:xfrm>
-        </p:spPr>
-        <p:txBody>
-          <a:bodyPr>
-            <a:normAutofit/>
-          </a:bodyPr>
-          <a:lstStyle/>
-          <a:p>
-            <a:pPr algn="ctr"/>
-            <a:r>
-              <a:rPr lang="ru-RU" sz="3600" b="1" dirty="0">
-                <a:latin typeface="Times New Roman" panose="02020603050405020304" pitchFamily="18" charset="0"/>
-                <a:cs typeface="Times New Roman" panose="02020603050405020304" pitchFamily="18" charset="0"/>
-              </a:rPr>
-              <a:t>Цель работы</a:t>
-            </a:r>
-            <a:endParaRPr lang="ru-RU" dirty="0">
-              <a:latin typeface="Times New Roman" panose="02020603050405020304" pitchFamily="18" charset="0"/>
-              <a:cs typeface="Times New Roman" panose="02020603050405020304" pitchFamily="18" charset="0"/>
-            </a:endParaRPr>
-          </a:p>
-        </p:txBody>
-      </p:sp>
-      <p:sp>
-        <p:nvSpPr>
-          <p:cNvPr id="3" name="Объект 2"/>
-          <p:cNvSpPr>
-            <a:spLocks noGrp="1"/>
-          </p:cNvSpPr>
-          <p:nvPr>
-            <p:ph idx="1"/>
-          </p:nvPr>
-        </p:nvSpPr>
-        <p:spPr>
-          <a:xfrm>
-            <a:off x="625440" y="752683"/>
-            <a:ext cx="7885128" cy="1170901"/>
-          </a:xfrm>
-        </p:spPr>
-        <p:txBody>
-          <a:bodyPr vert="horz" lIns="91440" tIns="45720" rIns="91440" bIns="45720" rtlCol="0" anchor="t">
-            <a:noAutofit/>
-          </a:bodyPr>
-          <a:lstStyle/>
-          <a:p>
-            <a:pPr marL="0" indent="0" algn="just">
-              <a:buNone/>
-            </a:pPr>
-            <a:r>
-              <a:rPr lang="ru-RU" sz="2400" dirty="0">
-                <a:latin typeface="Times New Roman" panose="02020603050405020304" pitchFamily="18" charset="0"/>
-                <a:cs typeface="Times New Roman" panose="02020603050405020304" pitchFamily="18" charset="0"/>
-              </a:rPr>
-              <a:t>Цель работы — разработка и тестирование версии 3D-принтера с системой обнаружения дефектов в процессе печати и механизмом своевременного реагирования.</a:t>
-            </a:r>
-            <a:endParaRPr lang="ru-RU" dirty="0">
-              <a:latin typeface="Times New Roman" panose="02020603050405020304" pitchFamily="18" charset="0"/>
-              <a:cs typeface="Times New Roman" panose="02020603050405020304" pitchFamily="18" charset="0"/>
-            </a:endParaRPr>
-          </a:p>
-        </p:txBody>
-      </p:sp>
-      <p:sp>
-        <p:nvSpPr>
-          <p:cNvPr id="4" name="TextBox 3"/>
-          <p:cNvSpPr txBox="1"/>
-          <p:nvPr/>
-        </p:nvSpPr>
-        <p:spPr>
-          <a:xfrm>
-            <a:off x="644087" y="1960801"/>
-            <a:ext cx="7878196" cy="646331"/>
-          </a:xfrm>
-          <a:prstGeom prst="rect">
-            <a:avLst/>
-          </a:prstGeom>
-          <a:noFill/>
-        </p:spPr>
-        <p:txBody>
-          <a:bodyPr wrap="square" lIns="91440" tIns="45720" rIns="91440" bIns="45720" rtlCol="0" anchor="t">
-            <a:spAutoFit/>
-          </a:bodyPr>
-          <a:lstStyle/>
-          <a:p>
-            <a:pPr algn="ctr"/>
-            <a:r>
-              <a:rPr lang="ru-RU" sz="3600" b="1" dirty="0">
-                <a:latin typeface="Times New Roman" panose="02020603050405020304" pitchFamily="18" charset="0"/>
-                <a:cs typeface="Times New Roman" panose="02020603050405020304" pitchFamily="18" charset="0"/>
-              </a:rPr>
-              <a:t>Основные задачи работы</a:t>
-            </a:r>
-          </a:p>
-        </p:txBody>
-      </p:sp>
-      <p:sp>
-        <p:nvSpPr>
-          <p:cNvPr id="5" name="TextBox 4"/>
-          <p:cNvSpPr txBox="1"/>
-          <p:nvPr/>
-        </p:nvSpPr>
-        <p:spPr>
-          <a:xfrm>
-            <a:off x="544994" y="2607132"/>
-            <a:ext cx="8069450" cy="4154984"/>
-          </a:xfrm>
-          <a:prstGeom prst="rect">
-            <a:avLst/>
-          </a:prstGeom>
-          <a:noFill/>
-        </p:spPr>
-        <p:txBody>
-          <a:bodyPr wrap="square" lIns="91440" tIns="45720" rIns="91440" bIns="45720" rtlCol="0" anchor="t">
-            <a:spAutoFit/>
-          </a:bodyPr>
-          <a:lstStyle/>
-          <a:p>
-            <a:pPr marL="214630" indent="-214630" algn="just">
-              <a:buFont typeface="Arial" panose="020B0604020202020204" pitchFamily="34" charset="0"/>
-              <a:buChar char="•"/>
-            </a:pPr>
-            <a:r>
-              <a:rPr lang="ru-RU" sz="2400" dirty="0">
-                <a:latin typeface="Times New Roman" panose="02020603050405020304" pitchFamily="18" charset="0"/>
-                <a:cs typeface="Times New Roman" panose="02020603050405020304" pitchFamily="18" charset="0"/>
-              </a:rPr>
-              <a:t>Изучение дефектов FDM-печати и выбор целевого дефекта для автоматического обнаружения.</a:t>
-            </a:r>
-          </a:p>
-          <a:p>
-            <a:pPr marL="214630" indent="-214630" algn="just">
-              <a:buFont typeface="Arial" panose="020B0604020202020204" pitchFamily="34" charset="0"/>
-              <a:buChar char="•"/>
-            </a:pPr>
-            <a:r>
-              <a:rPr lang="ru-RU" sz="2400" dirty="0">
-                <a:latin typeface="Times New Roman" panose="02020603050405020304" pitchFamily="18" charset="0"/>
-                <a:cs typeface="Times New Roman" panose="02020603050405020304" pitchFamily="18" charset="0"/>
-              </a:rPr>
-              <a:t>Проектирование, сборка и отладка аппаратно-программного комплекса экспериментального 3D-принтера.</a:t>
-            </a:r>
-          </a:p>
-          <a:p>
-            <a:pPr marL="214630" indent="-214630" algn="just">
-              <a:buFont typeface="Arial" panose="020B0604020202020204" pitchFamily="34" charset="0"/>
-              <a:buChar char="•"/>
-            </a:pPr>
-            <a:r>
-              <a:rPr lang="ru-RU" sz="2400" dirty="0">
-                <a:latin typeface="Times New Roman" panose="02020603050405020304" pitchFamily="18" charset="0"/>
-                <a:cs typeface="Times New Roman" panose="02020603050405020304" pitchFamily="18" charset="0"/>
-              </a:rPr>
-              <a:t>Сбор и подготовка данных для обучения нейросети и обучение модели обнаружения целевого дефекта.</a:t>
-            </a:r>
-          </a:p>
-          <a:p>
-            <a:pPr marL="214630" indent="-214630" algn="just">
-              <a:buFont typeface="Arial" panose="020B0604020202020204" pitchFamily="34" charset="0"/>
-              <a:buChar char="•"/>
-            </a:pPr>
-            <a:r>
-              <a:rPr lang="ru-RU" sz="2400" dirty="0">
-                <a:latin typeface="Times New Roman" panose="02020603050405020304" pitchFamily="18" charset="0"/>
-                <a:cs typeface="Times New Roman" panose="02020603050405020304" pitchFamily="18" charset="0"/>
-              </a:rPr>
-              <a:t>Разработка внешней системы контроля печати с автоматическим обнаружением дефектов.</a:t>
-            </a:r>
-          </a:p>
-          <a:p>
-            <a:pPr marL="214630" indent="-214630" algn="just">
-              <a:buFont typeface="Arial" panose="020B0604020202020204" pitchFamily="34" charset="0"/>
-              <a:buChar char="•"/>
-            </a:pPr>
-            <a:r>
-              <a:rPr lang="ru-RU" sz="2400" dirty="0">
-                <a:latin typeface="Times New Roman" panose="02020603050405020304" pitchFamily="18" charset="0"/>
-                <a:cs typeface="Times New Roman" panose="02020603050405020304" pitchFamily="18" charset="0"/>
-              </a:rPr>
-              <a:t>Тестирование работы системы контроля и 3D-принтера в процессе печати.</a:t>
-            </a:r>
-          </a:p>
-        </p:txBody>
-      </p:sp>
-      <p:sp>
-        <p:nvSpPr>
-          <p:cNvPr id="6" name="Замещающий номер слайда 4">
-            <a:extLst>
-              <a:ext uri="{FF2B5EF4-FFF2-40B4-BE49-F238E27FC236}">
-                <a16:creationId xmlns:a16="http://schemas.microsoft.com/office/drawing/2014/main" id="{C78DB24C-FC20-2FE0-98E7-F598D1843687}"/>
-              </a:ext>
-            </a:extLst>
-          </p:cNvPr>
-          <p:cNvSpPr>
-            <a:spLocks noGrp="1"/>
-          </p:cNvSpPr>
-          <p:nvPr>
-            <p:ph type="sldNum" sz="quarter" idx="12"/>
-          </p:nvPr>
-        </p:nvSpPr>
-        <p:spPr>
-          <a:xfrm>
-            <a:off x="7088886" y="6493511"/>
-            <a:ext cx="2057400" cy="365125"/>
-          </a:xfrm>
-        </p:spPr>
-        <p:txBody>
-          <a:bodyPr/>
-          <a:lstStyle/>
-          <a:p>
-            <a:fld id="{D6ED8A53-8D2F-4011-BE06-EDB0774336BA}" type="slidenum">
-              <a:rPr lang="ru-RU" sz="2000" dirty="0" smtClean="0">
-                <a:solidFill>
-                  <a:schemeClr val="tx1"/>
-                </a:solidFill>
-                <a:latin typeface="Times New Roman" panose="02020603050405020304" pitchFamily="18" charset="0"/>
-                <a:cs typeface="Times New Roman" panose="02020603050405020304" pitchFamily="18" charset="0"/>
-              </a:rPr>
-              <a:t>2</a:t>
-            </a:fld>
-            <a:endParaRPr lang="ru-RU" sz="2000">
-              <a:solidFill>
-                <a:schemeClr val="tx1"/>
-              </a:solidFill>
-              <a:latin typeface="Times New Roman" panose="02020603050405020304" pitchFamily="18" charset="0"/>
-              <a:ea typeface="Calibri"/>
-              <a:cs typeface="Times New Roman" panose="02020603050405020304" pitchFamily="18" charset="0"/>
-            </a:endParaRPr>
-          </a:p>
-        </p:txBody>
-      </p:sp>
-    </p:spTree>
-  </p:cSld>
-  <p:clrMapOvr>
-    <a:masterClrMapping/>
-  </p:clrMapOvr>
-</p:sld>
-</file>
-
-<file path=ppt/slides/slide3.xml><?xml version="1.0" encoding="utf-8"?>
-<p:sld xmlns:a="http://schemas.openxmlformats.org/drawingml/2006/main" xmlns:r="http://schemas.openxmlformats.org/officeDocument/2006/relationships" xmlns:p="http://schemas.openxmlformats.org/presentationml/2006/main">
-  <p:cSld>
-    <p:spTree>
-      <p:nvGrpSpPr>
-        <p:cNvPr id="1" name=""/>
-        <p:cNvGrpSpPr/>
-        <p:nvPr/>
-      </p:nvGrpSpPr>
-      <p:grpSpPr>
-        <a:xfrm>
-          <a:off x="0" y="0"/>
-          <a:ext cx="0" cy="0"/>
-          <a:chOff x="0" y="0"/>
-          <a:chExt cx="0" cy="0"/>
-        </a:xfrm>
-      </p:grpSpPr>
-      <p:pic>
-        <p:nvPicPr>
-          <p:cNvPr id="19" name="Рисунок 18">
-            <a:extLst>
-              <a:ext uri="{FF2B5EF4-FFF2-40B4-BE49-F238E27FC236}">
-                <a16:creationId xmlns:a16="http://schemas.microsoft.com/office/drawing/2014/main" id="{99FE507C-2C48-A423-9756-13891072B78F}"/>
-              </a:ext>
-            </a:extLst>
-          </p:cNvPr>
-          <p:cNvPicPr>
-            <a:picLocks noChangeAspect="1"/>
-          </p:cNvPicPr>
-          <p:nvPr/>
-        </p:nvPicPr>
-        <p:blipFill>
-          <a:blip r:embed="rId3">
-            <a:extLst>
-              <a:ext uri="{28A0092B-C50C-407E-A947-70E740481C1C}">
-                <a14:useLocalDpi xmlns:a14="http://schemas.microsoft.com/office/drawing/2010/main" val="0"/>
-              </a:ext>
-            </a:extLst>
-          </a:blip>
-          <a:srcRect l="8733" t="13068" r="8466" b="3458"/>
-          <a:stretch/>
-        </p:blipFill>
-        <p:spPr>
-          <a:xfrm>
-            <a:off x="5021065" y="3247173"/>
-            <a:ext cx="3921040" cy="2555874"/>
-          </a:xfrm>
-          <a:prstGeom prst="rect">
-            <a:avLst/>
-          </a:prstGeom>
-        </p:spPr>
-      </p:pic>
-      <p:sp>
-        <p:nvSpPr>
-          <p:cNvPr id="2" name="Заголовок 1">
-            <a:extLst>
-              <a:ext uri="{FF2B5EF4-FFF2-40B4-BE49-F238E27FC236}">
-                <a16:creationId xmlns:a16="http://schemas.microsoft.com/office/drawing/2014/main" id="{49CC29E7-47AE-4C1B-A66A-06BAB8AB4DBE}"/>
-              </a:ext>
-            </a:extLst>
-          </p:cNvPr>
-          <p:cNvSpPr>
-            <a:spLocks noGrp="1"/>
-          </p:cNvSpPr>
-          <p:nvPr>
-            <p:ph type="title"/>
-          </p:nvPr>
-        </p:nvSpPr>
-        <p:spPr>
-          <a:xfrm>
-            <a:off x="628650" y="-116476"/>
-            <a:ext cx="7886700" cy="712868"/>
-          </a:xfrm>
-        </p:spPr>
-        <p:txBody>
-          <a:bodyPr wrap="square" lIns="91440" tIns="45720" rIns="91440" bIns="45720">
-            <a:noAutofit/>
-          </a:bodyPr>
-          <a:lstStyle>
-            <a:defPPr algn="ctr">
-              <a:defRPr sz="4400" b="0">
-                <a:solidFill>
-                  <a:srgbClr val="000000"/>
-                </a:solidFill>
-                <a:latin typeface="Times New Roman"/>
-                <a:ea typeface="Times New Roman"/>
-                <a:cs typeface="Times New Roman"/>
-              </a:defRPr>
-            </a:defPPr>
-          </a:lstStyle>
-          <a:p>
-            <a:pPr algn="ctr">
-              <a:buNone/>
-              <a:defRPr sz="4400" b="0">
-                <a:solidFill>
-                  <a:srgbClr val="000000"/>
-                </a:solidFill>
-                <a:latin typeface="Times New Roman"/>
-                <a:ea typeface="Times New Roman"/>
-                <a:cs typeface="Times New Roman"/>
-              </a:defRPr>
-            </a:pPr>
-            <a:r>
-              <a:rPr sz="4000" b="0" dirty="0">
-                <a:solidFill>
-                  <a:srgbClr val="000000"/>
-                </a:solidFill>
-                <a:latin typeface="Times New Roman"/>
-                <a:ea typeface="Times New Roman"/>
-                <a:cs typeface="Times New Roman"/>
-              </a:rPr>
-              <a:t>В </a:t>
-            </a:r>
-            <a:r>
-              <a:rPr sz="4000" b="0" dirty="0" err="1">
-                <a:solidFill>
-                  <a:srgbClr val="000000"/>
-                </a:solidFill>
-                <a:latin typeface="Times New Roman"/>
-                <a:ea typeface="Times New Roman"/>
-                <a:cs typeface="Times New Roman"/>
-              </a:rPr>
-              <a:t>чем</a:t>
-            </a:r>
-            <a:r>
-              <a:rPr sz="4000" b="0" dirty="0">
-                <a:solidFill>
-                  <a:srgbClr val="000000"/>
-                </a:solidFill>
-                <a:latin typeface="Times New Roman"/>
-                <a:ea typeface="Times New Roman"/>
-                <a:cs typeface="Times New Roman"/>
-              </a:rPr>
-              <a:t> </a:t>
-            </a:r>
-            <a:r>
-              <a:rPr sz="4000" b="0" dirty="0" err="1">
-                <a:solidFill>
-                  <a:srgbClr val="000000"/>
-                </a:solidFill>
-                <a:latin typeface="Times New Roman"/>
-                <a:ea typeface="Times New Roman"/>
-                <a:cs typeface="Times New Roman"/>
-              </a:rPr>
-              <a:t>заключается</a:t>
-            </a:r>
-            <a:r>
-              <a:rPr sz="4000" b="0" dirty="0">
-                <a:solidFill>
-                  <a:srgbClr val="000000"/>
-                </a:solidFill>
-                <a:latin typeface="Times New Roman"/>
-                <a:ea typeface="Times New Roman"/>
-                <a:cs typeface="Times New Roman"/>
-              </a:rPr>
-              <a:t> </a:t>
-            </a:r>
-            <a:r>
-              <a:rPr sz="4000" b="0" dirty="0" err="1">
-                <a:solidFill>
-                  <a:srgbClr val="000000"/>
-                </a:solidFill>
-                <a:latin typeface="Times New Roman"/>
-                <a:ea typeface="Times New Roman"/>
-                <a:cs typeface="Times New Roman"/>
-              </a:rPr>
-              <a:t>проблема</a:t>
-            </a:r>
-            <a:r>
-              <a:rPr sz="4000" b="0" dirty="0">
-                <a:solidFill>
-                  <a:srgbClr val="000000"/>
-                </a:solidFill>
-                <a:latin typeface="Times New Roman"/>
-                <a:ea typeface="Times New Roman"/>
-                <a:cs typeface="Times New Roman"/>
-              </a:rPr>
-              <a:t>:</a:t>
-            </a:r>
-            <a:endParaRPr sz="4000" dirty="0"/>
-          </a:p>
-        </p:txBody>
-      </p:sp>
-      <p:sp>
-        <p:nvSpPr>
-          <p:cNvPr id="5" name="Замещающий номер слайда 4">
-            <a:extLst>
-              <a:ext uri="{FF2B5EF4-FFF2-40B4-BE49-F238E27FC236}">
-                <a16:creationId xmlns:a16="http://schemas.microsoft.com/office/drawing/2014/main" id="{7A7AC3B3-0D3D-46AF-A9AF-3FA15E2C3D9E}"/>
-              </a:ext>
-            </a:extLst>
-          </p:cNvPr>
-          <p:cNvSpPr>
-            <a:spLocks noGrp="1"/>
-          </p:cNvSpPr>
-          <p:nvPr>
-            <p:ph type="sldNum" idx="12"/>
-          </p:nvPr>
-        </p:nvSpPr>
-        <p:spPr>
-          <a:xfrm>
-            <a:off x="7088886" y="6493511"/>
-            <a:ext cx="2057400" cy="365125"/>
-          </a:xfrm>
-        </p:spPr>
-        <p:txBody>
-          <a:bodyPr wrap="square" lIns="91440" tIns="45720" rIns="91440" bIns="45720">
-            <a:noAutofit/>
-          </a:bodyPr>
-          <a:lstStyle>
-            <a:defPPr algn="r">
-              <a:defRPr sz="2000" b="0">
-                <a:solidFill>
-                  <a:srgbClr val="000000"/>
-                </a:solidFill>
-                <a:latin typeface="Times New Roman"/>
-                <a:ea typeface="Times New Roman"/>
-                <a:cs typeface="Times New Roman"/>
-              </a:defRPr>
-            </a:defPPr>
-          </a:lstStyle>
-          <a:p>
-            <a:pPr algn="r">
-              <a:defRPr sz="2000" b="0">
-                <a:solidFill>
-                  <a:srgbClr val="000000"/>
-                </a:solidFill>
-                <a:latin typeface="Times New Roman"/>
-                <a:ea typeface="Times New Roman"/>
-                <a:cs typeface="Times New Roman"/>
-              </a:defRPr>
-            </a:pPr>
-            <a:fld id="{D6ED8A53-8D2F-4011-BE06-EDB0774336BA}" type="slidenum">
-              <a:rPr sz="2000" b="0">
-                <a:solidFill>
-                  <a:srgbClr val="000000"/>
-                </a:solidFill>
-                <a:latin typeface="Times New Roman"/>
-                <a:ea typeface="Times New Roman"/>
-                <a:cs typeface="Times New Roman"/>
-              </a:rPr>
-              <a:t>3</a:t>
-            </a:fld>
-            <a:endParaRPr sz="2000">
-              <a:solidFill>
-                <a:schemeClr val="tx1"/>
-              </a:solidFill>
-              <a:latin typeface="Times New Roman"/>
-              <a:ea typeface="Times New Roman"/>
-              <a:cs typeface="Times New Roman"/>
-            </a:endParaRPr>
-          </a:p>
-        </p:txBody>
-      </p:sp>
-      <p:sp>
-        <p:nvSpPr>
-          <p:cNvPr id="3" name="TextBox 2">
-            <a:extLst>
-              <a:ext uri="{FF2B5EF4-FFF2-40B4-BE49-F238E27FC236}">
-                <a16:creationId xmlns:a16="http://schemas.microsoft.com/office/drawing/2014/main" id="{B9A98C53-8330-9192-D210-4F5703BD6F05}"/>
-              </a:ext>
-            </a:extLst>
-          </p:cNvPr>
-          <p:cNvSpPr>
-            <a:spLocks noGrp="1"/>
-          </p:cNvSpPr>
-          <p:nvPr/>
-        </p:nvSpPr>
-        <p:spPr>
-          <a:xfrm>
-            <a:off x="277897" y="597203"/>
-            <a:ext cx="5948583" cy="2297417"/>
-          </a:xfrm>
-          <a:prstGeom prst="rect">
-            <a:avLst/>
-          </a:prstGeom>
-          <a:noFill/>
-          <a:ln>
-            <a:solidFill>
-              <a:schemeClr val="tx1"/>
-            </a:solidFill>
-            <a:prstDash val="dash"/>
-          </a:ln>
-        </p:spPr>
-        <p:txBody>
-          <a:bodyPr rot="0" spcFirstLastPara="0" vert="horz" wrap="square" lIns="91440" tIns="45720" rIns="91440" bIns="45720" anchor="ctr">
-            <a:noAutofit/>
-          </a:bodyPr>
-          <a:lstStyle>
-            <a:defPPr algn="l">
-              <a:defRPr sz="1800" b="0">
-                <a:solidFill>
-                  <a:srgbClr val="000000"/>
-                </a:solidFill>
-                <a:latin typeface="Times New Roman"/>
-                <a:ea typeface="Times New Roman"/>
-                <a:cs typeface="Times New Roman"/>
-              </a:defRPr>
-            </a:defPPr>
-          </a:lstStyle>
-          <a:p>
-            <a:pPr algn="l">
-              <a:defRPr sz="1800" b="0">
-                <a:solidFill>
-                  <a:srgbClr val="000000"/>
-                </a:solidFill>
-                <a:latin typeface="Times New Roman"/>
-                <a:ea typeface="Times New Roman"/>
-                <a:cs typeface="Times New Roman"/>
-              </a:defRPr>
-            </a:pPr>
-            <a:r>
-              <a:rPr lang="ru-RU" sz="1800" b="0" dirty="0">
-                <a:solidFill>
-                  <a:srgbClr val="000000"/>
-                </a:solidFill>
-                <a:latin typeface="Times New Roman"/>
-                <a:ea typeface="Times New Roman"/>
-                <a:cs typeface="Times New Roman"/>
-              </a:rPr>
-              <a:t>На фермах 3D-принтеров в процессе печати могут возникать сбои, вызванные различными факторами. Такие дефекты, как отлипание, расслоение или смещение слоёв, в конечном итоге могут привести к </a:t>
-            </a:r>
-            <a:r>
-              <a:rPr lang="ru-RU" sz="1800" b="1" dirty="0">
-                <a:solidFill>
-                  <a:srgbClr val="000000"/>
-                </a:solidFill>
-                <a:latin typeface="Times New Roman"/>
-                <a:ea typeface="Times New Roman"/>
-                <a:cs typeface="Times New Roman"/>
-              </a:rPr>
-              <a:t>критическому дефекту «спагетти»</a:t>
-            </a:r>
-            <a:r>
-              <a:rPr lang="ru-RU" sz="1800" b="0" dirty="0">
-                <a:solidFill>
-                  <a:srgbClr val="000000"/>
-                </a:solidFill>
-                <a:latin typeface="Times New Roman"/>
-                <a:ea typeface="Times New Roman"/>
-                <a:cs typeface="Times New Roman"/>
-              </a:rPr>
-              <a:t>, при котором пластик начинает хаотично укладываться в воздухе. Такой дефект приводит к перерасходу материала, а в отдельных случаях может стать </a:t>
-            </a:r>
-            <a:r>
-              <a:rPr lang="ru-RU" sz="1800" b="1" dirty="0">
-                <a:solidFill>
-                  <a:srgbClr val="000000"/>
-                </a:solidFill>
-                <a:latin typeface="Times New Roman"/>
-                <a:ea typeface="Times New Roman"/>
-                <a:cs typeface="Times New Roman"/>
-              </a:rPr>
-              <a:t>причиной повреждения </a:t>
-            </a:r>
-            <a:r>
-              <a:rPr lang="ru-RU" sz="1800" b="0" dirty="0">
-                <a:solidFill>
-                  <a:srgbClr val="000000"/>
-                </a:solidFill>
-                <a:latin typeface="Times New Roman"/>
-                <a:ea typeface="Times New Roman"/>
-                <a:cs typeface="Times New Roman"/>
-              </a:rPr>
-              <a:t>самого 3D-принтера.</a:t>
-            </a:r>
-            <a:endParaRPr lang="ru-RU" dirty="0"/>
-          </a:p>
-        </p:txBody>
-      </p:sp>
-      <p:sp>
-        <p:nvSpPr>
-          <p:cNvPr id="27" name="TextBox 26">
-            <a:extLst>
-              <a:ext uri="{FF2B5EF4-FFF2-40B4-BE49-F238E27FC236}">
-                <a16:creationId xmlns:a16="http://schemas.microsoft.com/office/drawing/2014/main" id="{93027D3F-6BC8-2110-F2D0-39287E8FAFD7}"/>
-              </a:ext>
-            </a:extLst>
-          </p:cNvPr>
-          <p:cNvSpPr>
-            <a:spLocks noGrp="1"/>
-          </p:cNvSpPr>
-          <p:nvPr/>
-        </p:nvSpPr>
-        <p:spPr>
-          <a:xfrm>
-            <a:off x="6440105" y="2547592"/>
-            <a:ext cx="2182057" cy="579120"/>
-          </a:xfrm>
-          <a:prstGeom prst="rect">
-            <a:avLst/>
-          </a:prstGeom>
-          <a:noFill/>
-        </p:spPr>
-        <p:txBody>
-          <a:bodyPr rot="0" spcFirstLastPara="0" vert="horz" wrap="square" lIns="91440" tIns="45720" rIns="91440" bIns="45720" anchor="t">
-            <a:noAutofit/>
-          </a:bodyPr>
-          <a:lstStyle>
-            <a:defPPr algn="l">
-              <a:defRPr sz="1600" b="0">
-                <a:solidFill>
-                  <a:srgbClr val="000000"/>
-                </a:solidFill>
-                <a:latin typeface="Times New Roman"/>
-                <a:ea typeface="Times New Roman"/>
-                <a:cs typeface="Times New Roman"/>
-              </a:defRPr>
-            </a:defPPr>
-          </a:lstStyle>
-          <a:p>
-            <a:pPr algn="l">
-              <a:defRPr sz="1600" b="0">
-                <a:solidFill>
-                  <a:srgbClr val="000000"/>
-                </a:solidFill>
-                <a:latin typeface="Times New Roman"/>
-                <a:ea typeface="Times New Roman"/>
-                <a:cs typeface="Times New Roman"/>
-              </a:defRPr>
-            </a:pPr>
-            <a:r>
-              <a:rPr sz="1600" b="0" dirty="0" err="1">
-                <a:solidFill>
-                  <a:srgbClr val="000000"/>
-                </a:solidFill>
-                <a:latin typeface="Times New Roman"/>
-                <a:ea typeface="Times New Roman"/>
-                <a:cs typeface="Times New Roman"/>
-              </a:rPr>
-              <a:t>Рис</a:t>
-            </a:r>
-            <a:r>
-              <a:rPr sz="1600" b="0" dirty="0">
-                <a:solidFill>
-                  <a:srgbClr val="000000"/>
-                </a:solidFill>
-                <a:latin typeface="Times New Roman"/>
-                <a:ea typeface="Times New Roman"/>
-                <a:cs typeface="Times New Roman"/>
-              </a:rPr>
-              <a:t>. 1 – </a:t>
-            </a:r>
-            <a:r>
-              <a:rPr sz="1600" b="0" dirty="0" err="1">
-                <a:solidFill>
-                  <a:srgbClr val="000000"/>
-                </a:solidFill>
-                <a:latin typeface="Times New Roman"/>
-                <a:ea typeface="Times New Roman"/>
-                <a:cs typeface="Times New Roman"/>
-              </a:rPr>
-              <a:t>Дефект</a:t>
-            </a:r>
-            <a:r>
-              <a:rPr sz="1600" b="0" dirty="0">
-                <a:solidFill>
-                  <a:srgbClr val="000000"/>
-                </a:solidFill>
-                <a:latin typeface="Times New Roman"/>
-                <a:ea typeface="Times New Roman"/>
-                <a:cs typeface="Times New Roman"/>
-              </a:rPr>
-              <a:t> </a:t>
-            </a:r>
-            <a:r>
-              <a:rPr sz="1600" b="0" dirty="0" err="1">
-                <a:solidFill>
-                  <a:srgbClr val="000000"/>
-                </a:solidFill>
-                <a:latin typeface="Times New Roman"/>
-                <a:ea typeface="Times New Roman"/>
-                <a:cs typeface="Times New Roman"/>
-              </a:rPr>
-              <a:t>типа</a:t>
-            </a:r>
-            <a:r>
-              <a:rPr sz="1600" b="0" dirty="0">
-                <a:solidFill>
-                  <a:srgbClr val="000000"/>
-                </a:solidFill>
-                <a:latin typeface="Times New Roman"/>
-                <a:ea typeface="Times New Roman"/>
-                <a:cs typeface="Times New Roman"/>
-              </a:rPr>
-              <a:t> «</a:t>
-            </a:r>
-            <a:r>
-              <a:rPr sz="1600" b="0" dirty="0" err="1">
-                <a:solidFill>
-                  <a:srgbClr val="000000"/>
-                </a:solidFill>
-                <a:latin typeface="Times New Roman"/>
-                <a:ea typeface="Times New Roman"/>
-                <a:cs typeface="Times New Roman"/>
-              </a:rPr>
-              <a:t>спагетти</a:t>
-            </a:r>
-            <a:r>
-              <a:rPr sz="1600" b="0" dirty="0">
-                <a:solidFill>
-                  <a:srgbClr val="000000"/>
-                </a:solidFill>
-                <a:latin typeface="Times New Roman"/>
-                <a:ea typeface="Times New Roman"/>
-                <a:cs typeface="Times New Roman"/>
-              </a:rPr>
-              <a:t>»</a:t>
-            </a:r>
-          </a:p>
-        </p:txBody>
-      </p:sp>
-      <p:pic>
-        <p:nvPicPr>
-          <p:cNvPr id="4" name="Рисунок 3" descr="Изображение выглядит как искусство, дизайн, соединитель, свет&#10;&#10;Содержимое, созданное ИИ, может быть неверным.">
-            <a:extLst>
-              <a:ext uri="{FF2B5EF4-FFF2-40B4-BE49-F238E27FC236}">
-                <a16:creationId xmlns:a16="http://schemas.microsoft.com/office/drawing/2014/main" id="{AE67ED3C-CB37-618A-EEBF-9C9FF1AB5D40}"/>
-              </a:ext>
-            </a:extLst>
-          </p:cNvPr>
-          <p:cNvPicPr>
-            <a:picLocks noChangeAspect="1"/>
-          </p:cNvPicPr>
-          <p:nvPr/>
-        </p:nvPicPr>
-        <p:blipFill>
-          <a:blip r:embed="rId4"/>
-          <a:srcRect l="6291" t="18812" r="21153" b="24354"/>
-          <a:stretch/>
-        </p:blipFill>
-        <p:spPr>
-          <a:xfrm>
-            <a:off x="6333293" y="704535"/>
-            <a:ext cx="2288869" cy="1792981"/>
-          </a:xfrm>
-          <a:prstGeom prst="rect">
-            <a:avLst/>
-          </a:prstGeom>
-          <a:ln w="28575">
-            <a:noFill/>
-          </a:ln>
-        </p:spPr>
-      </p:pic>
-      <p:sp>
-        <p:nvSpPr>
-          <p:cNvPr id="6" name="TextBox 2">
-            <a:extLst>
-              <a:ext uri="{FF2B5EF4-FFF2-40B4-BE49-F238E27FC236}">
-                <a16:creationId xmlns:a16="http://schemas.microsoft.com/office/drawing/2014/main" id="{452C65C1-2992-0840-D7B0-DF2AD9057D63}"/>
-              </a:ext>
-            </a:extLst>
-          </p:cNvPr>
-          <p:cNvSpPr>
-            <a:spLocks noGrp="1"/>
-          </p:cNvSpPr>
-          <p:nvPr/>
-        </p:nvSpPr>
-        <p:spPr>
-          <a:xfrm>
-            <a:off x="277897" y="3017804"/>
-            <a:ext cx="4637770" cy="2791593"/>
-          </a:xfrm>
-          <a:prstGeom prst="rect">
-            <a:avLst/>
-          </a:prstGeom>
-          <a:noFill/>
-          <a:ln>
-            <a:solidFill>
-              <a:schemeClr val="tx1"/>
-            </a:solidFill>
-            <a:prstDash val="dash"/>
-          </a:ln>
-        </p:spPr>
-        <p:txBody>
-          <a:bodyPr rot="0" spcFirstLastPara="0" vert="horz" wrap="square" lIns="91440" tIns="45720" rIns="91440" bIns="45720" anchor="ctr">
-            <a:noAutofit/>
-          </a:bodyPr>
-          <a:lstStyle>
-            <a:defPPr algn="l">
-              <a:defRPr sz="1800" b="0">
-                <a:solidFill>
-                  <a:srgbClr val="000000"/>
-                </a:solidFill>
-                <a:latin typeface="Times New Roman"/>
-                <a:ea typeface="Times New Roman"/>
-                <a:cs typeface="Times New Roman"/>
-              </a:defRPr>
-            </a:defPPr>
-          </a:lstStyle>
-          <a:p>
-            <a:pPr algn="l">
-              <a:defRPr sz="1800" b="0">
-                <a:solidFill>
-                  <a:srgbClr val="000000"/>
-                </a:solidFill>
-                <a:latin typeface="Times New Roman"/>
-                <a:ea typeface="Times New Roman"/>
-                <a:cs typeface="Times New Roman"/>
-              </a:defRPr>
-            </a:pPr>
-            <a:r>
-              <a:rPr lang="ru-RU" dirty="0">
-                <a:solidFill>
-                  <a:srgbClr val="000000"/>
-                </a:solidFill>
-                <a:latin typeface="Times New Roman"/>
-                <a:ea typeface="Times New Roman"/>
-                <a:cs typeface="Times New Roman"/>
-              </a:rPr>
-              <a:t>Проблему удалось подтвердить на ферме Волгоградской компании «</a:t>
-            </a:r>
-            <a:r>
-              <a:rPr lang="ru-RU" dirty="0" err="1">
-                <a:solidFill>
-                  <a:srgbClr val="000000"/>
-                </a:solidFill>
-                <a:latin typeface="Times New Roman"/>
-                <a:ea typeface="Times New Roman"/>
-                <a:cs typeface="Times New Roman"/>
-              </a:rPr>
-              <a:t>Stereotech</a:t>
-            </a:r>
-            <a:r>
-              <a:rPr lang="ru-RU" dirty="0">
-                <a:solidFill>
-                  <a:srgbClr val="000000"/>
-                </a:solidFill>
-                <a:latin typeface="Times New Roman"/>
-                <a:ea typeface="Times New Roman"/>
-                <a:cs typeface="Times New Roman"/>
-              </a:rPr>
-              <a:t>». По накопленной статистике принтеров с фермы, 26,7</a:t>
-            </a:r>
-            <a:r>
-              <a:rPr lang="ru-RU" b="1" dirty="0">
-                <a:latin typeface="Times New Roman" panose="02020603050405020304" pitchFamily="18" charset="0"/>
-                <a:cs typeface="Times New Roman" panose="02020603050405020304" pitchFamily="18" charset="0"/>
-              </a:rPr>
-              <a:t> </a:t>
-            </a:r>
-            <a:r>
-              <a:rPr lang="ru-RU" dirty="0">
-                <a:solidFill>
-                  <a:srgbClr val="000000"/>
-                </a:solidFill>
-                <a:latin typeface="Times New Roman"/>
-                <a:ea typeface="Times New Roman"/>
-                <a:cs typeface="Times New Roman"/>
-              </a:rPr>
-              <a:t>% заданий были отменены оператором вручную из-за подобных сбоев. Статистика имеет погрешность, так как часть успешных заданий — это печати, когда оператор не мог отменить задачу, хотя сбой был, а часть отмен не связаны со сбоем.</a:t>
-            </a:r>
-            <a:endParaRPr lang="ru-RU" dirty="0"/>
-          </a:p>
-        </p:txBody>
-      </p:sp>
-      <p:sp>
-        <p:nvSpPr>
-          <p:cNvPr id="12" name="TextBox 26">
-            <a:extLst>
-              <a:ext uri="{FF2B5EF4-FFF2-40B4-BE49-F238E27FC236}">
-                <a16:creationId xmlns:a16="http://schemas.microsoft.com/office/drawing/2014/main" id="{DC9D2F2B-4F62-AFAE-5BC3-F6D246AAE8E4}"/>
-              </a:ext>
-            </a:extLst>
-          </p:cNvPr>
-          <p:cNvSpPr>
-            <a:spLocks noGrp="1"/>
-          </p:cNvSpPr>
-          <p:nvPr/>
-        </p:nvSpPr>
-        <p:spPr>
-          <a:xfrm>
-            <a:off x="4868975" y="6014767"/>
-            <a:ext cx="4073130" cy="579120"/>
-          </a:xfrm>
-          <a:prstGeom prst="rect">
-            <a:avLst/>
-          </a:prstGeom>
-          <a:noFill/>
-        </p:spPr>
-        <p:txBody>
-          <a:bodyPr rot="0" spcFirstLastPara="0" vert="horz" wrap="square" lIns="91440" tIns="45720" rIns="91440" bIns="45720" anchor="ctr">
-            <a:noAutofit/>
-          </a:bodyPr>
-          <a:lstStyle>
-            <a:defPPr algn="l">
-              <a:defRPr sz="1600" b="0">
-                <a:solidFill>
-                  <a:srgbClr val="000000"/>
-                </a:solidFill>
-                <a:latin typeface="Times New Roman"/>
-                <a:ea typeface="Times New Roman"/>
-                <a:cs typeface="Times New Roman"/>
-              </a:defRPr>
-            </a:defPPr>
-          </a:lstStyle>
-          <a:p>
-            <a:pPr algn="ctr">
-              <a:defRPr sz="1600" b="0">
-                <a:solidFill>
-                  <a:srgbClr val="000000"/>
-                </a:solidFill>
-                <a:latin typeface="Times New Roman"/>
-                <a:ea typeface="Times New Roman"/>
-                <a:cs typeface="Times New Roman"/>
-              </a:defRPr>
-            </a:pPr>
-            <a:r>
-              <a:rPr sz="1600" b="0" dirty="0" err="1">
-                <a:solidFill>
-                  <a:srgbClr val="000000"/>
-                </a:solidFill>
-                <a:latin typeface="Times New Roman"/>
-                <a:ea typeface="Times New Roman"/>
-                <a:cs typeface="Times New Roman"/>
-              </a:rPr>
-              <a:t>Рис</a:t>
-            </a:r>
-            <a:r>
-              <a:rPr sz="1600" b="0" dirty="0">
-                <a:solidFill>
-                  <a:srgbClr val="000000"/>
-                </a:solidFill>
-                <a:latin typeface="Times New Roman"/>
-                <a:ea typeface="Times New Roman"/>
-                <a:cs typeface="Times New Roman"/>
-              </a:rPr>
-              <a:t>. </a:t>
-            </a:r>
-            <a:r>
-              <a:rPr lang="ru-RU" sz="1600" b="0" dirty="0">
-                <a:solidFill>
-                  <a:srgbClr val="000000"/>
-                </a:solidFill>
-                <a:latin typeface="Times New Roman"/>
-                <a:ea typeface="Times New Roman"/>
-                <a:cs typeface="Times New Roman"/>
-              </a:rPr>
-              <a:t>2</a:t>
-            </a:r>
-            <a:r>
-              <a:rPr sz="1600" b="0" dirty="0">
-                <a:solidFill>
-                  <a:srgbClr val="000000"/>
-                </a:solidFill>
-                <a:latin typeface="Times New Roman"/>
-                <a:ea typeface="Times New Roman"/>
-                <a:cs typeface="Times New Roman"/>
-              </a:rPr>
-              <a:t> – </a:t>
-            </a:r>
-            <a:r>
-              <a:rPr lang="ru-RU" sz="1600" b="0" dirty="0">
-                <a:solidFill>
-                  <a:srgbClr val="000000"/>
-                </a:solidFill>
-                <a:latin typeface="Times New Roman"/>
-                <a:ea typeface="Times New Roman"/>
-                <a:cs typeface="Times New Roman"/>
-              </a:rPr>
-              <a:t>Диаграмма статистики печатей на ферме компании «</a:t>
-            </a:r>
-            <a:r>
-              <a:rPr lang="en-US" sz="1600" b="0" dirty="0" err="1">
-                <a:solidFill>
-                  <a:srgbClr val="000000"/>
-                </a:solidFill>
-                <a:latin typeface="Times New Roman"/>
-                <a:ea typeface="Times New Roman"/>
-                <a:cs typeface="Times New Roman"/>
-              </a:rPr>
-              <a:t>Stereotech</a:t>
-            </a:r>
-            <a:r>
-              <a:rPr lang="ru-RU" sz="1600" b="0" dirty="0">
-                <a:solidFill>
-                  <a:srgbClr val="000000"/>
-                </a:solidFill>
-                <a:latin typeface="Times New Roman"/>
-                <a:ea typeface="Times New Roman"/>
-                <a:cs typeface="Times New Roman"/>
-              </a:rPr>
-              <a:t>»</a:t>
-            </a:r>
-            <a:endParaRPr sz="1600" b="0" dirty="0">
-              <a:solidFill>
-                <a:srgbClr val="000000"/>
-              </a:solidFill>
-              <a:latin typeface="Times New Roman"/>
-              <a:ea typeface="Times New Roman"/>
-              <a:cs typeface="Times New Roman"/>
-            </a:endParaRPr>
-          </a:p>
-        </p:txBody>
-      </p:sp>
-      <p:sp>
-        <p:nvSpPr>
-          <p:cNvPr id="21" name="TextBox 2">
-            <a:extLst>
-              <a:ext uri="{FF2B5EF4-FFF2-40B4-BE49-F238E27FC236}">
-                <a16:creationId xmlns:a16="http://schemas.microsoft.com/office/drawing/2014/main" id="{776FE2EE-EE34-7E14-84FE-9C2304D04340}"/>
-              </a:ext>
-            </a:extLst>
-          </p:cNvPr>
-          <p:cNvSpPr>
-            <a:spLocks noGrp="1"/>
-          </p:cNvSpPr>
-          <p:nvPr/>
-        </p:nvSpPr>
-        <p:spPr>
-          <a:xfrm>
-            <a:off x="277897" y="5932581"/>
-            <a:ext cx="4637770" cy="743492"/>
-          </a:xfrm>
-          <a:prstGeom prst="rect">
-            <a:avLst/>
-          </a:prstGeom>
-          <a:noFill/>
-          <a:ln>
-            <a:solidFill>
-              <a:schemeClr val="tx1"/>
-            </a:solidFill>
-            <a:prstDash val="dash"/>
-          </a:ln>
-        </p:spPr>
-        <p:txBody>
-          <a:bodyPr rot="0" spcFirstLastPara="0" vert="horz" wrap="square" lIns="91440" tIns="45720" rIns="91440" bIns="45720" anchor="ctr">
-            <a:noAutofit/>
-          </a:bodyPr>
-          <a:lstStyle>
-            <a:defPPr algn="l">
-              <a:defRPr sz="1800" b="0">
-                <a:solidFill>
-                  <a:srgbClr val="000000"/>
-                </a:solidFill>
-                <a:latin typeface="Times New Roman"/>
-                <a:ea typeface="Times New Roman"/>
-                <a:cs typeface="Times New Roman"/>
-              </a:defRPr>
-            </a:defPPr>
-          </a:lstStyle>
-          <a:p>
-            <a:pPr algn="l">
-              <a:defRPr sz="1800" b="0">
-                <a:solidFill>
-                  <a:srgbClr val="000000"/>
-                </a:solidFill>
-                <a:latin typeface="Times New Roman"/>
-                <a:ea typeface="Times New Roman"/>
-                <a:cs typeface="Times New Roman"/>
-              </a:defRPr>
-            </a:pPr>
-            <a:r>
-              <a:rPr lang="ru-RU" b="1" dirty="0">
-                <a:solidFill>
-                  <a:srgbClr val="000000"/>
-                </a:solidFill>
-                <a:latin typeface="Times New Roman"/>
-                <a:cs typeface="Times New Roman"/>
-              </a:rPr>
-              <a:t>Предлагаемое</a:t>
-            </a:r>
-            <a:r>
-              <a:rPr lang="ru-RU" dirty="0">
-                <a:solidFill>
-                  <a:srgbClr val="000000"/>
-                </a:solidFill>
-                <a:latin typeface="Times New Roman"/>
-                <a:cs typeface="Times New Roman"/>
-              </a:rPr>
-              <a:t> </a:t>
-            </a:r>
-            <a:r>
-              <a:rPr lang="ru-RU" b="1" dirty="0">
-                <a:solidFill>
-                  <a:srgbClr val="000000"/>
-                </a:solidFill>
-                <a:latin typeface="Times New Roman"/>
-                <a:cs typeface="Times New Roman"/>
-              </a:rPr>
-              <a:t>решение</a:t>
-            </a:r>
-            <a:r>
-              <a:rPr lang="ru-RU" dirty="0">
-                <a:solidFill>
-                  <a:srgbClr val="000000"/>
-                </a:solidFill>
-                <a:latin typeface="Times New Roman"/>
-                <a:cs typeface="Times New Roman"/>
-              </a:rPr>
-              <a:t>: мониторинг печати с помощью методов машинного зрения.</a:t>
-            </a:r>
-            <a:endParaRPr lang="ru-RU" dirty="0"/>
-          </a:p>
-        </p:txBody>
-      </p:sp>
-    </p:spTree>
-    <p:extLst>
-      <p:ext uri="{BB962C8B-B14F-4D97-AF65-F5344CB8AC3E}">
-        <p14:creationId xmlns:p14="http://schemas.microsoft.com/office/powerpoint/2010/main" val="2011050586"/>
-      </p:ext>
-    </p:extLst>
-  </p:cSld>
-  <p:clrMapOvr>
-    <a:masterClrMapping/>
-  </p:clrMapOvr>
-</p:sld>
-</file>
-
-<file path=ppt/slides/slide4.xml><?xml version="1.0" encoding="utf-8"?>
-<p:sld xmlns:a="http://schemas.openxmlformats.org/drawingml/2006/main" xmlns:r="http://schemas.openxmlformats.org/officeDocument/2006/relationships" xmlns:p="http://schemas.openxmlformats.org/presentationml/2006/main">
-  <p:cSld>
-    <p:spTree>
-      <p:nvGrpSpPr>
-        <p:cNvPr id="1" name="">
-          <a:extLst>
-            <a:ext uri="{FF2B5EF4-FFF2-40B4-BE49-F238E27FC236}">
-              <a16:creationId xmlns:a16="http://schemas.microsoft.com/office/drawing/2014/main" id="{586A209A-B3B7-9043-FC7E-DD693EE6AACA}"/>
-            </a:ext>
-          </a:extLst>
-        </p:cNvPr>
-        <p:cNvGrpSpPr/>
-        <p:nvPr/>
-      </p:nvGrpSpPr>
-      <p:grpSpPr>
-        <a:xfrm>
-          <a:off x="0" y="0"/>
-          <a:ext cx="0" cy="0"/>
-          <a:chOff x="0" y="0"/>
-          <a:chExt cx="0" cy="0"/>
-        </a:xfrm>
-      </p:grpSpPr>
-      <p:sp>
-        <p:nvSpPr>
-          <p:cNvPr id="2" name="Заголовок 1">
-            <a:extLst>
-              <a:ext uri="{FF2B5EF4-FFF2-40B4-BE49-F238E27FC236}">
-                <a16:creationId xmlns:a16="http://schemas.microsoft.com/office/drawing/2014/main" id="{648A91D6-F58A-86A8-231A-A5AC58545903}"/>
-              </a:ext>
-            </a:extLst>
-          </p:cNvPr>
-          <p:cNvSpPr>
-            <a:spLocks noGrp="1"/>
-          </p:cNvSpPr>
-          <p:nvPr>
-            <p:ph type="title"/>
-          </p:nvPr>
-        </p:nvSpPr>
-        <p:spPr>
-          <a:xfrm>
-            <a:off x="628648" y="0"/>
-            <a:ext cx="7886700" cy="712868"/>
-          </a:xfrm>
-        </p:spPr>
-        <p:txBody>
-          <a:bodyPr>
-            <a:normAutofit/>
-          </a:bodyPr>
-          <a:lstStyle/>
-          <a:p>
-            <a:pPr algn="ctr"/>
-            <a:r>
-              <a:rPr lang="ru-RU" sz="4000" dirty="0">
-                <a:latin typeface="Times New Roman" panose="02020603050405020304" pitchFamily="18" charset="0"/>
-                <a:ea typeface="Calibri"/>
-                <a:cs typeface="Times New Roman" panose="02020603050405020304" pitchFamily="18" charset="0"/>
-              </a:rPr>
-              <a:t>Подготовка к обучению нейросети</a:t>
-            </a:r>
-          </a:p>
-        </p:txBody>
-      </p:sp>
-      <p:sp>
-        <p:nvSpPr>
-          <p:cNvPr id="5" name="Замещающий номер слайда 4">
-            <a:extLst>
-              <a:ext uri="{FF2B5EF4-FFF2-40B4-BE49-F238E27FC236}">
-                <a16:creationId xmlns:a16="http://schemas.microsoft.com/office/drawing/2014/main" id="{425BE312-5EC5-E722-FD8E-916DFE636F2B}"/>
-              </a:ext>
-            </a:extLst>
-          </p:cNvPr>
-          <p:cNvSpPr>
-            <a:spLocks noGrp="1"/>
-          </p:cNvSpPr>
-          <p:nvPr>
-            <p:ph type="sldNum" sz="quarter" idx="12"/>
-          </p:nvPr>
-        </p:nvSpPr>
-        <p:spPr>
-          <a:xfrm>
-            <a:off x="7088886" y="6493511"/>
-            <a:ext cx="2057400" cy="365125"/>
-          </a:xfrm>
-        </p:spPr>
-        <p:txBody>
-          <a:bodyPr/>
-          <a:lstStyle/>
-          <a:p>
-            <a:fld id="{D6ED8A53-8D2F-4011-BE06-EDB0774336BA}" type="slidenum">
-              <a:rPr lang="ru-RU" sz="2000" dirty="0" smtClean="0">
-                <a:solidFill>
-                  <a:schemeClr val="tx1"/>
-                </a:solidFill>
-                <a:latin typeface="Times New Roman" panose="02020603050405020304" pitchFamily="18" charset="0"/>
-                <a:cs typeface="Times New Roman" panose="02020603050405020304" pitchFamily="18" charset="0"/>
-              </a:rPr>
-              <a:t>4</a:t>
-            </a:fld>
-            <a:endParaRPr lang="ru-RU" sz="2000">
-              <a:solidFill>
-                <a:schemeClr val="tx1"/>
-              </a:solidFill>
-              <a:latin typeface="Times New Roman" panose="02020603050405020304" pitchFamily="18" charset="0"/>
-              <a:ea typeface="Calibri"/>
-              <a:cs typeface="Times New Roman" panose="02020603050405020304" pitchFamily="18" charset="0"/>
-            </a:endParaRPr>
-          </a:p>
-        </p:txBody>
-      </p:sp>
-      <p:sp>
-        <p:nvSpPr>
-          <p:cNvPr id="14" name="TextBox 13">
-            <a:extLst>
-              <a:ext uri="{FF2B5EF4-FFF2-40B4-BE49-F238E27FC236}">
-                <a16:creationId xmlns:a16="http://schemas.microsoft.com/office/drawing/2014/main" id="{733275A9-2422-EE65-68B7-2EFC7CB717FE}"/>
-              </a:ext>
-            </a:extLst>
-          </p:cNvPr>
-          <p:cNvSpPr txBox="1"/>
-          <p:nvPr/>
-        </p:nvSpPr>
-        <p:spPr>
-          <a:xfrm>
-            <a:off x="444579" y="731952"/>
-            <a:ext cx="3869672" cy="2585323"/>
-          </a:xfrm>
-          <a:prstGeom prst="rect">
-            <a:avLst/>
-          </a:prstGeom>
-          <a:noFill/>
-          <a:ln>
-            <a:solidFill>
-              <a:schemeClr val="tx1"/>
-            </a:solidFill>
-            <a:prstDash val="dash"/>
-          </a:ln>
-        </p:spPr>
-        <p:txBody>
-          <a:bodyPr rot="0" spcFirstLastPara="0" vertOverflow="overflow" horzOverflow="overflow" vert="horz" wrap="square" lIns="91440" tIns="45720" rIns="91440" bIns="45720" numCol="1" spcCol="0" rtlCol="0" fromWordArt="0" anchor="ctr" anchorCtr="0" forceAA="0" compatLnSpc="1">
-            <a:prstTxWarp prst="textNoShape">
-              <a:avLst/>
-            </a:prstTxWarp>
-            <a:spAutoFit/>
-          </a:bodyPr>
-          <a:lstStyle/>
-          <a:p>
-            <a:r>
-              <a:rPr lang="ru-RU" dirty="0">
-                <a:latin typeface="Times New Roman" panose="02020603050405020304" pitchFamily="18" charset="0"/>
-                <a:cs typeface="Times New Roman" panose="02020603050405020304" pitchFamily="18" charset="0"/>
-              </a:rPr>
-              <a:t>Для обнаружения «спагетти» выбрана </a:t>
-            </a:r>
-            <a:r>
-              <a:rPr lang="ru-RU" b="1" dirty="0">
-                <a:latin typeface="Times New Roman" panose="02020603050405020304" pitchFamily="18" charset="0"/>
-                <a:cs typeface="Times New Roman" panose="02020603050405020304" pitchFamily="18" charset="0"/>
-              </a:rPr>
-              <a:t>ResNet18</a:t>
-            </a:r>
-            <a:r>
-              <a:rPr lang="ru-RU" dirty="0">
-                <a:latin typeface="Times New Roman" panose="02020603050405020304" pitchFamily="18" charset="0"/>
-                <a:cs typeface="Times New Roman" panose="02020603050405020304" pitchFamily="18" charset="0"/>
-              </a:rPr>
-              <a:t>. Она решает задачу как бинарную классификацию полного кадра: </a:t>
-            </a:r>
-            <a:r>
-              <a:rPr lang="ru-RU" b="1" dirty="0">
-                <a:latin typeface="Times New Roman" panose="02020603050405020304" pitchFamily="18" charset="0"/>
-                <a:cs typeface="Times New Roman" panose="02020603050405020304" pitchFamily="18" charset="0"/>
-              </a:rPr>
-              <a:t>есть дефект или нет</a:t>
-            </a:r>
-            <a:r>
-              <a:rPr lang="ru-RU" dirty="0">
-                <a:latin typeface="Times New Roman" panose="02020603050405020304" pitchFamily="18" charset="0"/>
-                <a:cs typeface="Times New Roman" panose="02020603050405020304" pitchFamily="18" charset="0"/>
-              </a:rPr>
-              <a:t>. Локализация дефектов рамкой в прошлых работах показала низкую точность. Детекция объектов сохранена только для поиска детали на столе.</a:t>
-            </a:r>
-            <a:endParaRPr lang="ru-RU" dirty="0">
-              <a:solidFill>
-                <a:srgbClr val="000000"/>
-              </a:solidFill>
-              <a:latin typeface="Times New Roman" panose="02020603050405020304" pitchFamily="18" charset="0"/>
-              <a:cs typeface="Times New Roman" panose="02020603050405020304" pitchFamily="18" charset="0"/>
-            </a:endParaRPr>
-          </a:p>
-        </p:txBody>
-      </p:sp>
-      <p:sp>
-        <p:nvSpPr>
-          <p:cNvPr id="22" name="TextBox 21">
-            <a:extLst>
-              <a:ext uri="{FF2B5EF4-FFF2-40B4-BE49-F238E27FC236}">
-                <a16:creationId xmlns:a16="http://schemas.microsoft.com/office/drawing/2014/main" id="{EED866B5-82E1-33E1-5DF7-1DCBBD9DCDF8}"/>
-              </a:ext>
-            </a:extLst>
-          </p:cNvPr>
-          <p:cNvSpPr txBox="1"/>
-          <p:nvPr/>
-        </p:nvSpPr>
-        <p:spPr>
-          <a:xfrm>
-            <a:off x="4571998" y="709017"/>
-            <a:ext cx="4197892" cy="2585323"/>
-          </a:xfrm>
-          <a:prstGeom prst="rect">
-            <a:avLst/>
-          </a:prstGeom>
-          <a:noFill/>
-          <a:ln>
-            <a:solidFill>
-              <a:schemeClr val="tx1"/>
-            </a:solidFill>
-            <a:prstDash val="dash"/>
-          </a:ln>
-        </p:spPr>
-        <p:txBody>
-          <a:bodyPr rot="0" spcFirstLastPara="0" vertOverflow="overflow" horzOverflow="overflow" vert="horz" wrap="square" lIns="91440" tIns="45720" rIns="91440" bIns="45720" numCol="1" spcCol="0" rtlCol="0" fromWordArt="0" anchor="ctr" anchorCtr="0" forceAA="0" compatLnSpc="1">
-            <a:prstTxWarp prst="textNoShape">
-              <a:avLst/>
-            </a:prstTxWarp>
-            <a:spAutoFit/>
-          </a:bodyPr>
-          <a:lstStyle/>
-          <a:p>
-            <a:r>
-              <a:rPr lang="ru-RU" dirty="0">
-                <a:latin typeface="Times New Roman" panose="02020603050405020304" pitchFamily="18" charset="0"/>
-                <a:cs typeface="Times New Roman" panose="02020603050405020304" pitchFamily="18" charset="0"/>
-              </a:rPr>
-              <a:t>Датасет содержит </a:t>
-            </a:r>
-            <a:r>
-              <a:rPr lang="ru-RU" b="1" dirty="0">
-                <a:latin typeface="Times New Roman" panose="02020603050405020304" pitchFamily="18" charset="0"/>
-                <a:cs typeface="Times New Roman" panose="02020603050405020304" pitchFamily="18" charset="0"/>
-              </a:rPr>
-              <a:t>16 126 </a:t>
-            </a:r>
-            <a:r>
-              <a:rPr lang="ru-RU" dirty="0">
-                <a:latin typeface="Times New Roman" panose="02020603050405020304" pitchFamily="18" charset="0"/>
-                <a:cs typeface="Times New Roman" panose="02020603050405020304" pitchFamily="18" charset="0"/>
-              </a:rPr>
-              <a:t>исходных кадров </a:t>
-            </a:r>
-            <a:r>
-              <a:rPr lang="ru-RU" b="1" dirty="0">
-                <a:latin typeface="Times New Roman" panose="02020603050405020304" pitchFamily="18" charset="0"/>
-                <a:cs typeface="Times New Roman" panose="02020603050405020304" pitchFamily="18" charset="0"/>
-              </a:rPr>
-              <a:t>без аугментаций</a:t>
-            </a:r>
-            <a:r>
-              <a:rPr lang="ru-RU" dirty="0">
-                <a:latin typeface="Times New Roman" panose="02020603050405020304" pitchFamily="18" charset="0"/>
-                <a:cs typeface="Times New Roman" panose="02020603050405020304" pitchFamily="18" charset="0"/>
-              </a:rPr>
-              <a:t>. Обучающая выборка включает </a:t>
-            </a:r>
-            <a:r>
-              <a:rPr lang="ru-RU" b="1" dirty="0">
-                <a:latin typeface="Times New Roman" panose="02020603050405020304" pitchFamily="18" charset="0"/>
-                <a:cs typeface="Times New Roman" panose="02020603050405020304" pitchFamily="18" charset="0"/>
-              </a:rPr>
-              <a:t>9 768</a:t>
-            </a:r>
-            <a:r>
-              <a:rPr lang="ru-RU" dirty="0">
-                <a:latin typeface="Times New Roman" panose="02020603050405020304" pitchFamily="18" charset="0"/>
-                <a:cs typeface="Times New Roman" panose="02020603050405020304" pitchFamily="18" charset="0"/>
-              </a:rPr>
-              <a:t> кадров, </a:t>
-            </a:r>
-            <a:r>
-              <a:rPr lang="ru-RU" dirty="0" err="1">
-                <a:latin typeface="Times New Roman" panose="02020603050405020304" pitchFamily="18" charset="0"/>
-                <a:cs typeface="Times New Roman" panose="02020603050405020304" pitchFamily="18" charset="0"/>
-              </a:rPr>
-              <a:t>валидационная</a:t>
-            </a:r>
-            <a:r>
-              <a:rPr lang="ru-RU" dirty="0">
-                <a:latin typeface="Times New Roman" panose="02020603050405020304" pitchFamily="18" charset="0"/>
-                <a:cs typeface="Times New Roman" panose="02020603050405020304" pitchFamily="18" charset="0"/>
-              </a:rPr>
-              <a:t> </a:t>
-            </a:r>
-            <a:r>
-              <a:rPr lang="ru-RU" b="1" dirty="0">
-                <a:latin typeface="Times New Roman" panose="02020603050405020304" pitchFamily="18" charset="0"/>
-                <a:cs typeface="Times New Roman" panose="02020603050405020304" pitchFamily="18" charset="0"/>
-              </a:rPr>
-              <a:t>3 021 </a:t>
-            </a:r>
-            <a:r>
-              <a:rPr lang="ru-RU" dirty="0">
-                <a:latin typeface="Times New Roman" panose="02020603050405020304" pitchFamily="18" charset="0"/>
-                <a:cs typeface="Times New Roman" panose="02020603050405020304" pitchFamily="18" charset="0"/>
-              </a:rPr>
-              <a:t>кадр, тестовая </a:t>
-            </a:r>
-            <a:r>
-              <a:rPr lang="ru-RU" b="1" dirty="0">
-                <a:latin typeface="Times New Roman" panose="02020603050405020304" pitchFamily="18" charset="0"/>
-                <a:cs typeface="Times New Roman" panose="02020603050405020304" pitchFamily="18" charset="0"/>
-              </a:rPr>
-              <a:t>3 337</a:t>
-            </a:r>
-            <a:r>
-              <a:rPr lang="ru-RU" dirty="0">
-                <a:latin typeface="Times New Roman" panose="02020603050405020304" pitchFamily="18" charset="0"/>
-                <a:cs typeface="Times New Roman" panose="02020603050405020304" pitchFamily="18" charset="0"/>
-              </a:rPr>
-              <a:t> кадров. Их доли составляют 60,6</a:t>
-            </a:r>
-            <a:r>
-              <a:rPr lang="ru-RU" b="1" dirty="0">
-                <a:latin typeface="Times New Roman" panose="02020603050405020304" pitchFamily="18" charset="0"/>
-                <a:cs typeface="Times New Roman" panose="02020603050405020304" pitchFamily="18" charset="0"/>
-              </a:rPr>
-              <a:t> </a:t>
-            </a:r>
-            <a:r>
-              <a:rPr lang="ru-RU" dirty="0">
-                <a:latin typeface="Times New Roman" panose="02020603050405020304" pitchFamily="18" charset="0"/>
-                <a:cs typeface="Times New Roman" panose="02020603050405020304" pitchFamily="18" charset="0"/>
-              </a:rPr>
-              <a:t>%, 18,7</a:t>
-            </a:r>
-            <a:r>
-              <a:rPr lang="ru-RU" b="1" dirty="0">
-                <a:latin typeface="Times New Roman" panose="02020603050405020304" pitchFamily="18" charset="0"/>
-                <a:cs typeface="Times New Roman" panose="02020603050405020304" pitchFamily="18" charset="0"/>
-              </a:rPr>
-              <a:t> </a:t>
-            </a:r>
-            <a:r>
-              <a:rPr lang="ru-RU" dirty="0">
-                <a:latin typeface="Times New Roman" panose="02020603050405020304" pitchFamily="18" charset="0"/>
-                <a:cs typeface="Times New Roman" panose="02020603050405020304" pitchFamily="18" charset="0"/>
-              </a:rPr>
-              <a:t>% и 20,7</a:t>
-            </a:r>
-            <a:r>
-              <a:rPr lang="ru-RU" b="1" dirty="0">
-                <a:latin typeface="Times New Roman" panose="02020603050405020304" pitchFamily="18" charset="0"/>
-                <a:cs typeface="Times New Roman" panose="02020603050405020304" pitchFamily="18" charset="0"/>
-              </a:rPr>
-              <a:t> </a:t>
-            </a:r>
-            <a:r>
-              <a:rPr lang="ru-RU" dirty="0">
-                <a:latin typeface="Times New Roman" panose="02020603050405020304" pitchFamily="18" charset="0"/>
-                <a:cs typeface="Times New Roman" panose="02020603050405020304" pitchFamily="18" charset="0"/>
-              </a:rPr>
-              <a:t>% соответственно. В обучающей выборке представлены </a:t>
-            </a:r>
-            <a:r>
-              <a:rPr lang="ru-RU" b="1" dirty="0">
-                <a:latin typeface="Times New Roman" panose="02020603050405020304" pitchFamily="18" charset="0"/>
-                <a:cs typeface="Times New Roman" panose="02020603050405020304" pitchFamily="18" charset="0"/>
-              </a:rPr>
-              <a:t>2 751 </a:t>
-            </a:r>
-            <a:r>
-              <a:rPr lang="ru-RU" dirty="0">
-                <a:latin typeface="Times New Roman" panose="02020603050405020304" pitchFamily="18" charset="0"/>
-                <a:cs typeface="Times New Roman" panose="02020603050405020304" pitchFamily="18" charset="0"/>
-              </a:rPr>
-              <a:t>кадр со «спагетти» и </a:t>
-            </a:r>
-            <a:r>
-              <a:rPr lang="ru-RU" b="1" dirty="0">
-                <a:latin typeface="Times New Roman" panose="02020603050405020304" pitchFamily="18" charset="0"/>
-                <a:cs typeface="Times New Roman" panose="02020603050405020304" pitchFamily="18" charset="0"/>
-              </a:rPr>
-              <a:t>7 017 </a:t>
-            </a:r>
-            <a:r>
-              <a:rPr lang="ru-RU" dirty="0">
-                <a:latin typeface="Times New Roman" panose="02020603050405020304" pitchFamily="18" charset="0"/>
-                <a:cs typeface="Times New Roman" panose="02020603050405020304" pitchFamily="18" charset="0"/>
-              </a:rPr>
-              <a:t>кадров без видимых признаков этого дефекта</a:t>
-            </a:r>
-          </a:p>
-        </p:txBody>
-      </p:sp>
-      <p:sp>
-        <p:nvSpPr>
-          <p:cNvPr id="25" name="TextBox 24">
-            <a:extLst>
-              <a:ext uri="{FF2B5EF4-FFF2-40B4-BE49-F238E27FC236}">
-                <a16:creationId xmlns:a16="http://schemas.microsoft.com/office/drawing/2014/main" id="{C8B6B692-286B-EE82-F648-38C45239ECF9}"/>
-              </a:ext>
-            </a:extLst>
-          </p:cNvPr>
-          <p:cNvSpPr txBox="1"/>
-          <p:nvPr/>
-        </p:nvSpPr>
-        <p:spPr>
-          <a:xfrm>
-            <a:off x="480428" y="3410116"/>
-            <a:ext cx="3869672" cy="3139321"/>
-          </a:xfrm>
-          <a:prstGeom prst="rect">
-            <a:avLst/>
-          </a:prstGeom>
-          <a:noFill/>
-          <a:ln>
-            <a:solidFill>
-              <a:schemeClr val="tx1"/>
-            </a:solidFill>
-            <a:prstDash val="dash"/>
-          </a:ln>
-        </p:spPr>
-        <p:txBody>
-          <a:bodyPr rot="0" spcFirstLastPara="0" vertOverflow="overflow" horzOverflow="overflow" vert="horz" wrap="square" lIns="91440" tIns="45720" rIns="91440" bIns="45720" numCol="1" spcCol="0" rtlCol="0" fromWordArt="0" anchor="ctr" anchorCtr="0" forceAA="0" compatLnSpc="1">
-            <a:prstTxWarp prst="textNoShape">
-              <a:avLst/>
-            </a:prstTxWarp>
-            <a:spAutoFit/>
-          </a:bodyPr>
-          <a:lstStyle/>
-          <a:p>
-            <a:r>
-              <a:rPr lang="ru-RU" dirty="0">
-                <a:latin typeface="Times New Roman" panose="02020603050405020304" pitchFamily="18" charset="0"/>
-                <a:cs typeface="Times New Roman" panose="02020603050405020304" pitchFamily="18" charset="0"/>
-              </a:rPr>
-              <a:t>В каждой эпохе обучения сохранялся </a:t>
-            </a:r>
-            <a:r>
-              <a:rPr lang="ru-RU" b="1" dirty="0">
-                <a:latin typeface="Times New Roman" panose="02020603050405020304" pitchFamily="18" charset="0"/>
-                <a:cs typeface="Times New Roman" panose="02020603050405020304" pitchFamily="18" charset="0"/>
-              </a:rPr>
-              <a:t>баланс классов 50/50</a:t>
-            </a:r>
-            <a:r>
-              <a:rPr lang="ru-RU" dirty="0">
-                <a:latin typeface="Times New Roman" panose="02020603050405020304" pitchFamily="18" charset="0"/>
-                <a:cs typeface="Times New Roman" panose="02020603050405020304" pitchFamily="18" charset="0"/>
-              </a:rPr>
-              <a:t>: модель получала </a:t>
-            </a:r>
-            <a:r>
-              <a:rPr lang="ru-RU" b="1" dirty="0">
-                <a:latin typeface="Times New Roman" panose="02020603050405020304" pitchFamily="18" charset="0"/>
-                <a:cs typeface="Times New Roman" panose="02020603050405020304" pitchFamily="18" charset="0"/>
-              </a:rPr>
-              <a:t>5 502</a:t>
-            </a:r>
-            <a:r>
-              <a:rPr lang="ru-RU" dirty="0">
-                <a:latin typeface="Times New Roman" panose="02020603050405020304" pitchFamily="18" charset="0"/>
-                <a:cs typeface="Times New Roman" panose="02020603050405020304" pitchFamily="18" charset="0"/>
-              </a:rPr>
-              <a:t> показа изображений, по </a:t>
-            </a:r>
-            <a:r>
-              <a:rPr lang="ru-RU" b="1" dirty="0">
-                <a:latin typeface="Times New Roman" panose="02020603050405020304" pitchFamily="18" charset="0"/>
-                <a:cs typeface="Times New Roman" panose="02020603050405020304" pitchFamily="18" charset="0"/>
-              </a:rPr>
-              <a:t>2 751</a:t>
-            </a:r>
-            <a:r>
-              <a:rPr lang="ru-RU" dirty="0">
-                <a:latin typeface="Times New Roman" panose="02020603050405020304" pitchFamily="18" charset="0"/>
-                <a:cs typeface="Times New Roman" panose="02020603050405020304" pitchFamily="18" charset="0"/>
-              </a:rPr>
-              <a:t> на каждый класс. После аугментации обучающая выборка содержит </a:t>
-            </a:r>
-            <a:r>
-              <a:rPr lang="ru-RU" b="1" dirty="0">
-                <a:latin typeface="Times New Roman" panose="02020603050405020304" pitchFamily="18" charset="0"/>
-                <a:cs typeface="Times New Roman" panose="02020603050405020304" pitchFamily="18" charset="0"/>
-              </a:rPr>
-              <a:t>29 304</a:t>
-            </a:r>
-            <a:r>
-              <a:rPr lang="ru-RU" dirty="0">
-                <a:latin typeface="Times New Roman" panose="02020603050405020304" pitchFamily="18" charset="0"/>
-                <a:cs typeface="Times New Roman" panose="02020603050405020304" pitchFamily="18" charset="0"/>
-              </a:rPr>
-              <a:t> изображения: к каждому исходному кадру добавлены два варианта. </a:t>
-            </a:r>
-            <a:r>
-              <a:rPr lang="ru-RU" dirty="0" err="1">
-                <a:latin typeface="Times New Roman" panose="02020603050405020304" pitchFamily="18" charset="0"/>
-                <a:cs typeface="Times New Roman" panose="02020603050405020304" pitchFamily="18" charset="0"/>
-              </a:rPr>
-              <a:t>Валидационная</a:t>
-            </a:r>
-            <a:r>
-              <a:rPr lang="ru-RU" dirty="0">
-                <a:latin typeface="Times New Roman" panose="02020603050405020304" pitchFamily="18" charset="0"/>
-                <a:cs typeface="Times New Roman" panose="02020603050405020304" pitchFamily="18" charset="0"/>
-              </a:rPr>
-              <a:t> и тестовая выборки содержат только исходные изображения и не </a:t>
-            </a:r>
-            <a:r>
-              <a:rPr lang="ru-RU" dirty="0" err="1">
-                <a:latin typeface="Times New Roman" panose="02020603050405020304" pitchFamily="18" charset="0"/>
-                <a:cs typeface="Times New Roman" panose="02020603050405020304" pitchFamily="18" charset="0"/>
-              </a:rPr>
-              <a:t>аугментируются</a:t>
-            </a:r>
-            <a:r>
-              <a:rPr lang="ru-RU" dirty="0">
-                <a:latin typeface="Times New Roman" panose="02020603050405020304" pitchFamily="18" charset="0"/>
-                <a:cs typeface="Times New Roman" panose="02020603050405020304" pitchFamily="18" charset="0"/>
-              </a:rPr>
-              <a:t>.</a:t>
-            </a:r>
-          </a:p>
-        </p:txBody>
-      </p:sp>
-      <p:sp>
-        <p:nvSpPr>
-          <p:cNvPr id="3" name="TextBox 26">
-            <a:extLst>
-              <a:ext uri="{FF2B5EF4-FFF2-40B4-BE49-F238E27FC236}">
-                <a16:creationId xmlns:a16="http://schemas.microsoft.com/office/drawing/2014/main" id="{DAC2E642-4E22-B5B0-DB31-19292E122F11}"/>
-              </a:ext>
-            </a:extLst>
-          </p:cNvPr>
-          <p:cNvSpPr>
-            <a:spLocks noGrp="1"/>
-          </p:cNvSpPr>
-          <p:nvPr/>
-        </p:nvSpPr>
-        <p:spPr>
-          <a:xfrm>
-            <a:off x="4634025" y="5970317"/>
-            <a:ext cx="4073130" cy="579120"/>
-          </a:xfrm>
-          <a:prstGeom prst="rect">
-            <a:avLst/>
-          </a:prstGeom>
-          <a:noFill/>
-        </p:spPr>
-        <p:txBody>
-          <a:bodyPr rot="0" spcFirstLastPara="0" vert="horz" wrap="square" lIns="91440" tIns="45720" rIns="91440" bIns="45720" anchor="ctr">
-            <a:noAutofit/>
-          </a:bodyPr>
-          <a:lstStyle>
-            <a:defPPr algn="l">
-              <a:defRPr sz="1600" b="0">
-                <a:solidFill>
-                  <a:srgbClr val="000000"/>
-                </a:solidFill>
-                <a:latin typeface="Times New Roman"/>
-                <a:ea typeface="Times New Roman"/>
-                <a:cs typeface="Times New Roman"/>
-              </a:defRPr>
-            </a:defPPr>
-          </a:lstStyle>
-          <a:p>
-            <a:pPr algn="ctr">
-              <a:defRPr sz="1600" b="0">
-                <a:solidFill>
-                  <a:srgbClr val="000000"/>
-                </a:solidFill>
-                <a:latin typeface="Times New Roman"/>
-                <a:ea typeface="Times New Roman"/>
-                <a:cs typeface="Times New Roman"/>
-              </a:defRPr>
-            </a:pPr>
-            <a:r>
-              <a:rPr sz="1600" b="0" dirty="0" err="1">
-                <a:solidFill>
-                  <a:srgbClr val="000000"/>
-                </a:solidFill>
-                <a:latin typeface="Times New Roman"/>
-                <a:ea typeface="Times New Roman"/>
-                <a:cs typeface="Times New Roman"/>
-              </a:rPr>
-              <a:t>Рис</a:t>
-            </a:r>
-            <a:r>
-              <a:rPr sz="1600" b="0" dirty="0">
-                <a:solidFill>
-                  <a:srgbClr val="000000"/>
-                </a:solidFill>
-                <a:latin typeface="Times New Roman"/>
-                <a:ea typeface="Times New Roman"/>
-                <a:cs typeface="Times New Roman"/>
-              </a:rPr>
-              <a:t>. </a:t>
-            </a:r>
-            <a:r>
-              <a:rPr lang="ru-RU" sz="1600" b="0" dirty="0">
-                <a:solidFill>
-                  <a:srgbClr val="000000"/>
-                </a:solidFill>
-                <a:latin typeface="Times New Roman"/>
-                <a:ea typeface="Times New Roman"/>
-                <a:cs typeface="Times New Roman"/>
-              </a:rPr>
-              <a:t>3</a:t>
-            </a:r>
-            <a:r>
-              <a:rPr sz="1600" b="0" dirty="0">
-                <a:solidFill>
-                  <a:srgbClr val="000000"/>
-                </a:solidFill>
-                <a:latin typeface="Times New Roman"/>
-                <a:ea typeface="Times New Roman"/>
-                <a:cs typeface="Times New Roman"/>
-              </a:rPr>
-              <a:t> – </a:t>
-            </a:r>
-            <a:r>
-              <a:rPr lang="ru-RU" sz="1600" b="0" dirty="0">
-                <a:solidFill>
-                  <a:srgbClr val="000000"/>
-                </a:solidFill>
-                <a:latin typeface="Times New Roman"/>
-                <a:ea typeface="Times New Roman"/>
-                <a:cs typeface="Times New Roman"/>
-              </a:rPr>
-              <a:t>Диаграмма распределения исходных кадров по выборкам</a:t>
-            </a:r>
-            <a:endParaRPr sz="1600" b="0" dirty="0">
-              <a:solidFill>
-                <a:srgbClr val="000000"/>
-              </a:solidFill>
-              <a:latin typeface="Times New Roman"/>
-              <a:ea typeface="Times New Roman"/>
-              <a:cs typeface="Times New Roman"/>
-            </a:endParaRPr>
-          </a:p>
-        </p:txBody>
-      </p:sp>
-      <p:pic>
-        <p:nvPicPr>
-          <p:cNvPr id="8" name="Рисунок 7">
-            <a:extLst>
-              <a:ext uri="{FF2B5EF4-FFF2-40B4-BE49-F238E27FC236}">
-                <a16:creationId xmlns:a16="http://schemas.microsoft.com/office/drawing/2014/main" id="{A2B5EBF5-FBE6-336C-42E4-49A8C5D8A0DF}"/>
-              </a:ext>
-            </a:extLst>
-          </p:cNvPr>
-          <p:cNvPicPr>
-            <a:picLocks noChangeAspect="1"/>
-          </p:cNvPicPr>
-          <p:nvPr/>
-        </p:nvPicPr>
-        <p:blipFill>
-          <a:blip r:embed="rId3"/>
-          <a:stretch>
-            <a:fillRect/>
-          </a:stretch>
-        </p:blipFill>
-        <p:spPr>
-          <a:xfrm>
-            <a:off x="4882102" y="3317275"/>
-            <a:ext cx="3976794" cy="2630107"/>
-          </a:xfrm>
-          <a:prstGeom prst="rect">
-            <a:avLst/>
-          </a:prstGeom>
-        </p:spPr>
-      </p:pic>
-    </p:spTree>
-    <p:extLst>
-      <p:ext uri="{BB962C8B-B14F-4D97-AF65-F5344CB8AC3E}">
-        <p14:creationId xmlns:p14="http://schemas.microsoft.com/office/powerpoint/2010/main" val="2707964732"/>
-      </p:ext>
-    </p:extLst>
-  </p:cSld>
-  <p:clrMapOvr>
-    <a:masterClrMapping/>
-  </p:clrMapOvr>
-</p:sld>
-</file>
-
-<file path=ppt/slides/slide5.xml><?xml version="1.0" encoding="utf-8"?>
-<p:sld xmlns:a="http://schemas.openxmlformats.org/drawingml/2006/main" xmlns:r="http://schemas.openxmlformats.org/officeDocument/2006/relationships" xmlns:p="http://schemas.openxmlformats.org/presentationml/2006/main">
-  <p:cSld>
-    <p:spTree>
-      <p:nvGrpSpPr>
-        <p:cNvPr id="1" name="">
-          <a:extLst>
-            <a:ext uri="{FF2B5EF4-FFF2-40B4-BE49-F238E27FC236}">
-              <a16:creationId xmlns:a16="http://schemas.microsoft.com/office/drawing/2014/main" id="{586A209A-B3B7-9043-FC7E-DD693EE6AACA}"/>
-            </a:ext>
-          </a:extLst>
-        </p:cNvPr>
-        <p:cNvGrpSpPr/>
-        <p:nvPr/>
-      </p:nvGrpSpPr>
-      <p:grpSpPr>
-        <a:xfrm>
-          <a:off x="0" y="0"/>
-          <a:ext cx="0" cy="0"/>
-          <a:chOff x="0" y="0"/>
-          <a:chExt cx="0" cy="0"/>
-        </a:xfrm>
-      </p:grpSpPr>
-      <p:sp>
-        <p:nvSpPr>
-          <p:cNvPr id="2" name="Заголовок 1">
-            <a:extLst>
-              <a:ext uri="{FF2B5EF4-FFF2-40B4-BE49-F238E27FC236}">
-                <a16:creationId xmlns:a16="http://schemas.microsoft.com/office/drawing/2014/main" id="{648A91D6-F58A-86A8-231A-A5AC58545903}"/>
-              </a:ext>
-            </a:extLst>
-          </p:cNvPr>
-          <p:cNvSpPr>
-            <a:spLocks noGrp="1"/>
-          </p:cNvSpPr>
-          <p:nvPr>
-            <p:ph type="title"/>
-          </p:nvPr>
-        </p:nvSpPr>
-        <p:spPr>
-          <a:xfrm>
-            <a:off x="628648" y="0"/>
-            <a:ext cx="7886700" cy="712868"/>
-          </a:xfrm>
-        </p:spPr>
-        <p:txBody>
-          <a:bodyPr>
-            <a:normAutofit/>
-          </a:bodyPr>
-          <a:lstStyle/>
-          <a:p>
-            <a:pPr algn="ctr"/>
-            <a:r>
-              <a:rPr lang="ru-RU" sz="4000" dirty="0">
-                <a:latin typeface="Times New Roman" panose="02020603050405020304" pitchFamily="18" charset="0"/>
-                <a:ea typeface="Calibri"/>
-                <a:cs typeface="Times New Roman" panose="02020603050405020304" pitchFamily="18" charset="0"/>
-              </a:rPr>
-              <a:t>Результат обучения нейросети</a:t>
-            </a:r>
-          </a:p>
-        </p:txBody>
-      </p:sp>
-      <p:sp>
-        <p:nvSpPr>
-          <p:cNvPr id="5" name="Замещающий номер слайда 4">
-            <a:extLst>
-              <a:ext uri="{FF2B5EF4-FFF2-40B4-BE49-F238E27FC236}">
-                <a16:creationId xmlns:a16="http://schemas.microsoft.com/office/drawing/2014/main" id="{425BE312-5EC5-E722-FD8E-916DFE636F2B}"/>
-              </a:ext>
-            </a:extLst>
-          </p:cNvPr>
-          <p:cNvSpPr>
-            <a:spLocks noGrp="1"/>
-          </p:cNvSpPr>
-          <p:nvPr>
-            <p:ph type="sldNum" sz="quarter" idx="12"/>
-          </p:nvPr>
-        </p:nvSpPr>
-        <p:spPr>
-          <a:xfrm>
-            <a:off x="7088886" y="6493511"/>
-            <a:ext cx="2057400" cy="365125"/>
-          </a:xfrm>
-        </p:spPr>
-        <p:txBody>
-          <a:bodyPr/>
-          <a:lstStyle/>
-          <a:p>
-            <a:fld id="{D6ED8A53-8D2F-4011-BE06-EDB0774336BA}" type="slidenum">
-              <a:rPr lang="ru-RU" sz="2000" dirty="0" smtClean="0">
-                <a:solidFill>
-                  <a:schemeClr val="tx1"/>
-                </a:solidFill>
-                <a:latin typeface="Times New Roman" panose="02020603050405020304" pitchFamily="18" charset="0"/>
-                <a:cs typeface="Times New Roman" panose="02020603050405020304" pitchFamily="18" charset="0"/>
-              </a:rPr>
-              <a:t>5</a:t>
-            </a:fld>
-            <a:endParaRPr lang="ru-RU" sz="2000">
-              <a:solidFill>
-                <a:schemeClr val="tx1"/>
-              </a:solidFill>
-              <a:latin typeface="Times New Roman" panose="02020603050405020304" pitchFamily="18" charset="0"/>
-              <a:ea typeface="Calibri"/>
-              <a:cs typeface="Times New Roman" panose="02020603050405020304" pitchFamily="18" charset="0"/>
-            </a:endParaRPr>
-          </a:p>
-        </p:txBody>
-      </p:sp>
-      <p:sp>
-        <p:nvSpPr>
-          <p:cNvPr id="14" name="TextBox 13">
-            <a:extLst>
-              <a:ext uri="{FF2B5EF4-FFF2-40B4-BE49-F238E27FC236}">
-                <a16:creationId xmlns:a16="http://schemas.microsoft.com/office/drawing/2014/main" id="{733275A9-2422-EE65-68B7-2EFC7CB717FE}"/>
-              </a:ext>
-            </a:extLst>
-          </p:cNvPr>
-          <p:cNvSpPr txBox="1"/>
-          <p:nvPr/>
-        </p:nvSpPr>
-        <p:spPr>
-          <a:xfrm>
-            <a:off x="444579" y="731952"/>
-            <a:ext cx="3869672" cy="2585323"/>
-          </a:xfrm>
-          <a:prstGeom prst="rect">
-            <a:avLst/>
-          </a:prstGeom>
-          <a:noFill/>
-          <a:ln>
-            <a:solidFill>
-              <a:schemeClr val="tx1"/>
-            </a:solidFill>
-            <a:prstDash val="dash"/>
-          </a:ln>
-        </p:spPr>
-        <p:txBody>
-          <a:bodyPr rot="0" spcFirstLastPara="0" vertOverflow="overflow" horzOverflow="overflow" vert="horz" wrap="square" lIns="91440" tIns="45720" rIns="91440" bIns="45720" numCol="1" spcCol="0" rtlCol="0" fromWordArt="0" anchor="ctr" anchorCtr="0" forceAA="0" compatLnSpc="1">
-            <a:prstTxWarp prst="textNoShape">
-              <a:avLst/>
-            </a:prstTxWarp>
-            <a:spAutoFit/>
-          </a:bodyPr>
-          <a:lstStyle/>
-          <a:p>
-            <a:r>
-              <a:rPr lang="ru-RU" dirty="0">
-                <a:latin typeface="Times New Roman" panose="02020603050405020304" pitchFamily="18" charset="0"/>
-                <a:cs typeface="Times New Roman" panose="02020603050405020304" pitchFamily="18" charset="0"/>
-              </a:rPr>
-              <a:t>Для обнаружения «спагетти» выбрана </a:t>
-            </a:r>
-            <a:r>
-              <a:rPr lang="ru-RU" b="1" dirty="0">
-                <a:latin typeface="Times New Roman" panose="02020603050405020304" pitchFamily="18" charset="0"/>
-                <a:cs typeface="Times New Roman" panose="02020603050405020304" pitchFamily="18" charset="0"/>
-              </a:rPr>
-              <a:t>ResNet18</a:t>
-            </a:r>
-            <a:r>
-              <a:rPr lang="ru-RU" dirty="0">
-                <a:latin typeface="Times New Roman" panose="02020603050405020304" pitchFamily="18" charset="0"/>
-                <a:cs typeface="Times New Roman" panose="02020603050405020304" pitchFamily="18" charset="0"/>
-              </a:rPr>
-              <a:t>. Она решает задачу как бинарную классификацию полного кадра: </a:t>
-            </a:r>
-            <a:r>
-              <a:rPr lang="ru-RU" b="1" dirty="0">
-                <a:latin typeface="Times New Roman" panose="02020603050405020304" pitchFamily="18" charset="0"/>
-                <a:cs typeface="Times New Roman" panose="02020603050405020304" pitchFamily="18" charset="0"/>
-              </a:rPr>
-              <a:t>есть дефект или нет</a:t>
-            </a:r>
-            <a:r>
-              <a:rPr lang="ru-RU" dirty="0">
-                <a:latin typeface="Times New Roman" panose="02020603050405020304" pitchFamily="18" charset="0"/>
-                <a:cs typeface="Times New Roman" panose="02020603050405020304" pitchFamily="18" charset="0"/>
-              </a:rPr>
-              <a:t>. Локализация дефектов рамкой в прошлых работах показала низкую точность. Детекция объектов сохранена только для поиска детали на столе.</a:t>
-            </a:r>
-            <a:endParaRPr lang="ru-RU" dirty="0">
-              <a:solidFill>
-                <a:srgbClr val="000000"/>
-              </a:solidFill>
-              <a:latin typeface="Times New Roman" panose="02020603050405020304" pitchFamily="18" charset="0"/>
-              <a:cs typeface="Times New Roman" panose="02020603050405020304" pitchFamily="18" charset="0"/>
-            </a:endParaRPr>
-          </a:p>
-        </p:txBody>
-      </p:sp>
-      <p:sp>
-        <p:nvSpPr>
-          <p:cNvPr id="22" name="TextBox 21">
-            <a:extLst>
-              <a:ext uri="{FF2B5EF4-FFF2-40B4-BE49-F238E27FC236}">
-                <a16:creationId xmlns:a16="http://schemas.microsoft.com/office/drawing/2014/main" id="{EED866B5-82E1-33E1-5DF7-1DCBBD9DCDF8}"/>
-              </a:ext>
-            </a:extLst>
-          </p:cNvPr>
-          <p:cNvSpPr txBox="1"/>
-          <p:nvPr/>
-        </p:nvSpPr>
-        <p:spPr>
-          <a:xfrm>
-            <a:off x="4771553" y="724829"/>
-            <a:ext cx="4197892" cy="1477328"/>
-          </a:xfrm>
-          <a:prstGeom prst="rect">
-            <a:avLst/>
-          </a:prstGeom>
-          <a:noFill/>
-          <a:ln>
-            <a:solidFill>
-              <a:schemeClr val="tx1"/>
-            </a:solidFill>
-            <a:prstDash val="dash"/>
-          </a:ln>
-        </p:spPr>
-        <p:txBody>
-          <a:bodyPr rot="0" spcFirstLastPara="0" vertOverflow="overflow" horzOverflow="overflow" vert="horz" wrap="square" lIns="91440" tIns="45720" rIns="91440" bIns="45720" numCol="1" spcCol="0" rtlCol="0" fromWordArt="0" anchor="ctr" anchorCtr="0" forceAA="0" compatLnSpc="1">
-            <a:prstTxWarp prst="textNoShape">
-              <a:avLst/>
-            </a:prstTxWarp>
-            <a:spAutoFit/>
-          </a:bodyPr>
-          <a:lstStyle/>
-          <a:p>
-            <a:r>
-              <a:rPr lang="ru-RU" dirty="0">
-                <a:latin typeface="Times New Roman" panose="02020603050405020304" pitchFamily="18" charset="0"/>
-                <a:cs typeface="Times New Roman" panose="02020603050405020304" pitchFamily="18" charset="0"/>
-              </a:rPr>
-              <a:t>Датасет содержит </a:t>
-            </a:r>
-            <a:r>
-              <a:rPr lang="ru-RU" b="1" dirty="0">
-                <a:latin typeface="Times New Roman" panose="02020603050405020304" pitchFamily="18" charset="0"/>
-                <a:cs typeface="Times New Roman" panose="02020603050405020304" pitchFamily="18" charset="0"/>
-              </a:rPr>
-              <a:t>16 014 кадров без аугментаций</a:t>
-            </a:r>
-            <a:r>
-              <a:rPr lang="ru-RU" dirty="0">
-                <a:latin typeface="Times New Roman" panose="02020603050405020304" pitchFamily="18" charset="0"/>
-                <a:cs typeface="Times New Roman" panose="02020603050405020304" pitchFamily="18" charset="0"/>
-              </a:rPr>
-              <a:t>: 4 574 кадра со «спагетти» и 11 440 кадров без видимых признаков этого дефекта. Выборки делились по соотношению 60/20/20.</a:t>
-            </a:r>
-          </a:p>
-        </p:txBody>
-      </p:sp>
-      <p:sp>
-        <p:nvSpPr>
-          <p:cNvPr id="25" name="TextBox 24">
-            <a:extLst>
-              <a:ext uri="{FF2B5EF4-FFF2-40B4-BE49-F238E27FC236}">
-                <a16:creationId xmlns:a16="http://schemas.microsoft.com/office/drawing/2014/main" id="{C8B6B692-286B-EE82-F648-38C45239ECF9}"/>
-              </a:ext>
-            </a:extLst>
-          </p:cNvPr>
-          <p:cNvSpPr txBox="1"/>
-          <p:nvPr/>
-        </p:nvSpPr>
-        <p:spPr>
-          <a:xfrm>
-            <a:off x="487537" y="3466535"/>
-            <a:ext cx="3869672" cy="2862322"/>
-          </a:xfrm>
-          <a:prstGeom prst="rect">
-            <a:avLst/>
-          </a:prstGeom>
-          <a:noFill/>
-          <a:ln>
-            <a:solidFill>
-              <a:schemeClr val="tx1"/>
-            </a:solidFill>
-            <a:prstDash val="dash"/>
-          </a:ln>
-        </p:spPr>
-        <p:txBody>
-          <a:bodyPr rot="0" spcFirstLastPara="0" vertOverflow="overflow" horzOverflow="overflow" vert="horz" wrap="square" lIns="91440" tIns="45720" rIns="91440" bIns="45720" numCol="1" spcCol="0" rtlCol="0" fromWordArt="0" anchor="ctr" anchorCtr="0" forceAA="0" compatLnSpc="1">
-            <a:prstTxWarp prst="textNoShape">
-              <a:avLst/>
-            </a:prstTxWarp>
-            <a:spAutoFit/>
-          </a:bodyPr>
-          <a:lstStyle/>
-          <a:p>
-            <a:r>
-              <a:rPr lang="ru-RU" dirty="0">
-                <a:latin typeface="Times New Roman" panose="02020603050405020304" pitchFamily="18" charset="0"/>
-                <a:cs typeface="Times New Roman" panose="02020603050405020304" pitchFamily="18" charset="0"/>
-              </a:rPr>
-              <a:t>Для каждой эпохи обучения сохранялся </a:t>
-            </a:r>
-            <a:r>
-              <a:rPr lang="ru-RU" b="1" dirty="0">
-                <a:latin typeface="Times New Roman" panose="02020603050405020304" pitchFamily="18" charset="0"/>
-                <a:cs typeface="Times New Roman" panose="02020603050405020304" pitchFamily="18" charset="0"/>
-              </a:rPr>
-              <a:t>баланс классов 50/50</a:t>
-            </a:r>
-            <a:r>
-              <a:rPr lang="ru-RU" dirty="0">
-                <a:latin typeface="Times New Roman" panose="02020603050405020304" pitchFamily="18" charset="0"/>
-                <a:cs typeface="Times New Roman" panose="02020603050405020304" pitchFamily="18" charset="0"/>
-              </a:rPr>
-              <a:t>: использовались все 2 746 кадров со «спагетти» и столько же случайно выбранных кадров без дефекта. Всего модель получала </a:t>
-            </a:r>
-            <a:r>
-              <a:rPr lang="ru-RU" b="1" dirty="0">
-                <a:latin typeface="Times New Roman" panose="02020603050405020304" pitchFamily="18" charset="0"/>
-                <a:cs typeface="Times New Roman" panose="02020603050405020304" pitchFamily="18" charset="0"/>
-              </a:rPr>
-              <a:t>5 492 изображения за эпоху</a:t>
-            </a:r>
-            <a:r>
-              <a:rPr lang="ru-RU" dirty="0">
-                <a:latin typeface="Times New Roman" panose="02020603050405020304" pitchFamily="18" charset="0"/>
-                <a:cs typeface="Times New Roman" panose="02020603050405020304" pitchFamily="18" charset="0"/>
-              </a:rPr>
-              <a:t>. </a:t>
-            </a:r>
-            <a:r>
-              <a:rPr lang="ru-RU" dirty="0" err="1">
-                <a:latin typeface="Times New Roman" panose="02020603050405020304" pitchFamily="18" charset="0"/>
-                <a:cs typeface="Times New Roman" panose="02020603050405020304" pitchFamily="18" charset="0"/>
-              </a:rPr>
-              <a:t>Валидационная</a:t>
-            </a:r>
-            <a:r>
-              <a:rPr lang="ru-RU" dirty="0">
-                <a:latin typeface="Times New Roman" panose="02020603050405020304" pitchFamily="18" charset="0"/>
-                <a:cs typeface="Times New Roman" panose="02020603050405020304" pitchFamily="18" charset="0"/>
-              </a:rPr>
-              <a:t> и тестовая выборки содержат только исходные изображения без аугментаций.</a:t>
-            </a:r>
-          </a:p>
-        </p:txBody>
-      </p:sp>
-      <p:sp>
-        <p:nvSpPr>
-          <p:cNvPr id="3" name="TextBox 26">
-            <a:extLst>
-              <a:ext uri="{FF2B5EF4-FFF2-40B4-BE49-F238E27FC236}">
-                <a16:creationId xmlns:a16="http://schemas.microsoft.com/office/drawing/2014/main" id="{155F7BCE-57B1-4886-841D-DAD17BC5CA7C}"/>
-              </a:ext>
-            </a:extLst>
-          </p:cNvPr>
-          <p:cNvSpPr>
-            <a:spLocks noGrp="1"/>
-          </p:cNvSpPr>
-          <p:nvPr/>
-        </p:nvSpPr>
-        <p:spPr>
-          <a:xfrm>
-            <a:off x="4703875" y="5554051"/>
-            <a:ext cx="4073130" cy="579120"/>
-          </a:xfrm>
-          <a:prstGeom prst="rect">
-            <a:avLst/>
-          </a:prstGeom>
-          <a:noFill/>
-        </p:spPr>
-        <p:txBody>
-          <a:bodyPr rot="0" spcFirstLastPara="0" vert="horz" wrap="square" lIns="91440" tIns="45720" rIns="91440" bIns="45720" anchor="ctr">
-            <a:noAutofit/>
-          </a:bodyPr>
-          <a:lstStyle>
-            <a:defPPr algn="l">
-              <a:defRPr sz="1600" b="0">
-                <a:solidFill>
-                  <a:srgbClr val="000000"/>
-                </a:solidFill>
-                <a:latin typeface="Times New Roman"/>
-                <a:ea typeface="Times New Roman"/>
-                <a:cs typeface="Times New Roman"/>
-              </a:defRPr>
-            </a:defPPr>
-          </a:lstStyle>
-          <a:p>
-            <a:pPr algn="ctr">
-              <a:defRPr sz="1600" b="0">
-                <a:solidFill>
-                  <a:srgbClr val="000000"/>
-                </a:solidFill>
-                <a:latin typeface="Times New Roman"/>
-                <a:ea typeface="Times New Roman"/>
-                <a:cs typeface="Times New Roman"/>
-              </a:defRPr>
-            </a:pPr>
-            <a:r>
-              <a:rPr sz="1600" b="0" dirty="0" err="1">
-                <a:solidFill>
-                  <a:srgbClr val="000000"/>
-                </a:solidFill>
-                <a:latin typeface="Times New Roman"/>
-                <a:ea typeface="Times New Roman"/>
-                <a:cs typeface="Times New Roman"/>
-              </a:rPr>
-              <a:t>Рис</a:t>
-            </a:r>
-            <a:r>
-              <a:rPr sz="1600" b="0" dirty="0">
-                <a:solidFill>
-                  <a:srgbClr val="000000"/>
-                </a:solidFill>
-                <a:latin typeface="Times New Roman"/>
-                <a:ea typeface="Times New Roman"/>
-                <a:cs typeface="Times New Roman"/>
-              </a:rPr>
-              <a:t>. </a:t>
-            </a:r>
-            <a:r>
-              <a:rPr lang="ru-RU" sz="1600" b="0" dirty="0">
-                <a:solidFill>
-                  <a:srgbClr val="000000"/>
-                </a:solidFill>
-                <a:latin typeface="Times New Roman"/>
-                <a:ea typeface="Times New Roman"/>
-                <a:cs typeface="Times New Roman"/>
-              </a:rPr>
-              <a:t>4,5</a:t>
-            </a:r>
-            <a:r>
-              <a:rPr sz="1600" b="0" dirty="0">
-                <a:solidFill>
-                  <a:srgbClr val="000000"/>
-                </a:solidFill>
-                <a:latin typeface="Times New Roman"/>
-                <a:ea typeface="Times New Roman"/>
-                <a:cs typeface="Times New Roman"/>
-              </a:rPr>
-              <a:t> – </a:t>
-            </a:r>
-            <a:r>
-              <a:rPr lang="ru-RU" sz="1600" b="0" dirty="0">
-                <a:solidFill>
-                  <a:srgbClr val="000000"/>
-                </a:solidFill>
-                <a:latin typeface="Times New Roman"/>
-                <a:ea typeface="Times New Roman"/>
-                <a:cs typeface="Times New Roman"/>
-              </a:rPr>
-              <a:t>Диаграмма статистики печатей на ферме компании «</a:t>
-            </a:r>
-            <a:r>
-              <a:rPr lang="en-US" sz="1600" b="0" dirty="0" err="1">
-                <a:solidFill>
-                  <a:srgbClr val="000000"/>
-                </a:solidFill>
-                <a:latin typeface="Times New Roman"/>
-                <a:ea typeface="Times New Roman"/>
-                <a:cs typeface="Times New Roman"/>
-              </a:rPr>
-              <a:t>Stereotech</a:t>
-            </a:r>
-            <a:r>
-              <a:rPr lang="ru-RU" sz="1600" b="0" dirty="0">
-                <a:solidFill>
-                  <a:srgbClr val="000000"/>
-                </a:solidFill>
-                <a:latin typeface="Times New Roman"/>
-                <a:ea typeface="Times New Roman"/>
-                <a:cs typeface="Times New Roman"/>
-              </a:rPr>
-              <a:t>»</a:t>
-            </a:r>
-            <a:endParaRPr sz="1600" b="0" dirty="0">
-              <a:solidFill>
-                <a:srgbClr val="000000"/>
-              </a:solidFill>
-              <a:latin typeface="Times New Roman"/>
-              <a:ea typeface="Times New Roman"/>
-              <a:cs typeface="Times New Roman"/>
-            </a:endParaRPr>
-          </a:p>
-        </p:txBody>
-      </p:sp>
-    </p:spTree>
-    <p:extLst>
-      <p:ext uri="{BB962C8B-B14F-4D97-AF65-F5344CB8AC3E}">
-        <p14:creationId xmlns:p14="http://schemas.microsoft.com/office/powerpoint/2010/main" val="3025447512"/>
-      </p:ext>
-    </p:extLst>
-  </p:cSld>
-  <p:clrMapOvr>
-    <a:masterClrMapping/>
-  </p:clrMapOvr>
-</p:sld>
-</file>
-
-<file path=ppt/slides/slide6.xml><?xml version="1.0" encoding="utf-8"?>
-<p:sld xmlns:a="http://schemas.openxmlformats.org/drawingml/2006/main" xmlns:r="http://schemas.openxmlformats.org/officeDocument/2006/relationships" xmlns:p="http://schemas.openxmlformats.org/presentationml/2006/main">
-  <p:cSld>
-    <p:spTree>
-      <p:nvGrpSpPr>
         <p:cNvPr id="1" name="">
           <a:extLst>
             <a:ext uri="{FF2B5EF4-FFF2-40B4-BE49-F238E27FC236}">
@@ -8125,24 +5528,24 @@
         </p:nvSpPr>
         <p:spPr>
           <a:xfrm>
-            <a:off x="628650" y="9098"/>
+            <a:off x="628650" y="-64546"/>
             <a:ext cx="7886700" cy="712868"/>
           </a:xfrm>
         </p:spPr>
         <p:txBody>
           <a:bodyPr>
-            <a:normAutofit/>
+            <a:normAutofit fontScale="90000"/>
           </a:bodyPr>
           <a:lstStyle/>
           <a:p>
             <a:pPr algn="ctr"/>
             <a:r>
-              <a:rPr lang="ru-RU" sz="4000" dirty="0">
+              <a:rPr lang="ru-RU" dirty="0">
                 <a:latin typeface="Times New Roman"/>
                 <a:ea typeface="Calibri"/>
                 <a:cs typeface="Times New Roman"/>
               </a:rPr>
-              <a:t>Обработка на сервере</a:t>
+              <a:t>Тестирование на реальной печати</a:t>
             </a:r>
           </a:p>
         </p:txBody>
@@ -8213,1501 +5616,7 @@
                 <a:latin typeface="Times New Roman"/>
                 <a:cs typeface="Times New Roman"/>
               </a:rPr>
-              <a:t>6</a:t>
-            </a:fld>
-            <a:endParaRPr lang="ru-RU" sz="2000">
-              <a:solidFill>
-                <a:schemeClr val="tx1"/>
-              </a:solidFill>
-              <a:latin typeface="Times New Roman"/>
-              <a:ea typeface="Calibri"/>
-              <a:cs typeface="Times New Roman"/>
-            </a:endParaRPr>
-          </a:p>
-        </p:txBody>
-      </p:sp>
-      <p:sp>
-        <p:nvSpPr>
-          <p:cNvPr id="8" name="TextBox 7">
-            <a:extLst>
-              <a:ext uri="{FF2B5EF4-FFF2-40B4-BE49-F238E27FC236}">
-                <a16:creationId xmlns:a16="http://schemas.microsoft.com/office/drawing/2014/main" id="{3FDAB50E-3BD8-57A2-B047-497A3FD50648}"/>
-              </a:ext>
-            </a:extLst>
-          </p:cNvPr>
-          <p:cNvSpPr txBox="1"/>
-          <p:nvPr/>
-        </p:nvSpPr>
-        <p:spPr>
-          <a:xfrm>
-            <a:off x="186213" y="875407"/>
-            <a:ext cx="2920514" cy="1477328"/>
-          </a:xfrm>
-          <a:prstGeom prst="rect">
-            <a:avLst/>
-          </a:prstGeom>
-          <a:noFill/>
-          <a:ln>
-            <a:solidFill>
-              <a:schemeClr val="tx1"/>
-            </a:solidFill>
-            <a:prstDash val="dash"/>
-          </a:ln>
-        </p:spPr>
-        <p:txBody>
-          <a:bodyPr rot="0" spcFirstLastPara="0" vertOverflow="overflow" horzOverflow="overflow" vert="horz" wrap="square" lIns="91440" tIns="45720" rIns="91440" bIns="45720" numCol="1" spcCol="0" rtlCol="0" fromWordArt="0" anchor="ctr" anchorCtr="0" forceAA="0" compatLnSpc="1">
-            <a:prstTxWarp prst="textNoShape">
-              <a:avLst/>
-            </a:prstTxWarp>
-            <a:spAutoFit/>
-          </a:bodyPr>
-          <a:lstStyle/>
-          <a:p>
-            <a:pPr algn="ctr"/>
-            <a:r>
-              <a:rPr lang="ru-RU" dirty="0">
-                <a:latin typeface="Times New Roman"/>
-                <a:ea typeface="+mn-lt"/>
-                <a:cs typeface="+mn-lt"/>
-              </a:rPr>
-              <a:t>Роль сервера:</a:t>
-            </a:r>
-            <a:endParaRPr lang="ru-RU" dirty="0">
-              <a:latin typeface="Times New Roman"/>
-              <a:cs typeface="Times New Roman"/>
-            </a:endParaRPr>
-          </a:p>
-          <a:p>
-            <a:pPr marL="285750" indent="-285750">
-              <a:buFont typeface="Arial"/>
-              <a:buChar char="•"/>
-            </a:pPr>
-            <a:r>
-              <a:rPr lang="ru-RU" b="1" dirty="0">
-                <a:latin typeface="Times New Roman"/>
-                <a:ea typeface="+mn-lt"/>
-                <a:cs typeface="+mn-lt"/>
-              </a:rPr>
-              <a:t>Централизованная </a:t>
-            </a:r>
-            <a:r>
-              <a:rPr lang="ru-RU" dirty="0">
-                <a:latin typeface="Times New Roman"/>
-                <a:ea typeface="+mn-lt"/>
-                <a:cs typeface="+mn-lt"/>
-              </a:rPr>
-              <a:t>обработка запросов.</a:t>
-            </a:r>
-            <a:endParaRPr lang="ru-RU" dirty="0">
-              <a:latin typeface="Times New Roman"/>
-              <a:cs typeface="Times New Roman"/>
-            </a:endParaRPr>
-          </a:p>
-          <a:p>
-            <a:pPr marL="285750" indent="-285750">
-              <a:buFont typeface="Arial"/>
-              <a:buChar char="•"/>
-            </a:pPr>
-            <a:r>
-              <a:rPr lang="ru-RU" dirty="0">
-                <a:latin typeface="Times New Roman"/>
-                <a:ea typeface="+mn-lt"/>
-                <a:cs typeface="+mn-lt"/>
-              </a:rPr>
-              <a:t>Выполнение </a:t>
-            </a:r>
-            <a:r>
-              <a:rPr lang="ru-RU" b="1" dirty="0">
-                <a:latin typeface="Times New Roman"/>
-                <a:ea typeface="+mn-lt"/>
-                <a:cs typeface="+mn-lt"/>
-              </a:rPr>
-              <a:t>ресурсоёмких </a:t>
-            </a:r>
-            <a:r>
-              <a:rPr lang="ru-RU" dirty="0">
-                <a:latin typeface="Times New Roman"/>
-                <a:ea typeface="+mn-lt"/>
-                <a:cs typeface="+mn-lt"/>
-              </a:rPr>
-              <a:t>задач.</a:t>
-            </a:r>
-            <a:endParaRPr lang="ru-RU" dirty="0">
-              <a:latin typeface="Times New Roman"/>
-              <a:cs typeface="Times New Roman"/>
-            </a:endParaRPr>
-          </a:p>
-        </p:txBody>
-      </p:sp>
-      <p:pic>
-        <p:nvPicPr>
-          <p:cNvPr id="7" name="Рисунок 6">
-            <a:extLst>
-              <a:ext uri="{FF2B5EF4-FFF2-40B4-BE49-F238E27FC236}">
-                <a16:creationId xmlns:a16="http://schemas.microsoft.com/office/drawing/2014/main" id="{DA035444-9EBE-0F23-C21B-B713FDEC75FD}"/>
-              </a:ext>
-            </a:extLst>
-          </p:cNvPr>
-          <p:cNvPicPr>
-            <a:picLocks noChangeAspect="1"/>
-          </p:cNvPicPr>
-          <p:nvPr/>
-        </p:nvPicPr>
-        <p:blipFill>
-          <a:blip r:embed="rId3">
-            <a:extLst>
-              <a:ext uri="{28A0092B-C50C-407E-A947-70E740481C1C}">
-                <a14:useLocalDpi xmlns:a14="http://schemas.microsoft.com/office/drawing/2010/main" val="0"/>
-              </a:ext>
-            </a:extLst>
-          </a:blip>
-          <a:srcRect/>
-          <a:stretch/>
-        </p:blipFill>
-        <p:spPr>
-          <a:xfrm>
-            <a:off x="3302968" y="875407"/>
-            <a:ext cx="5639137" cy="5093570"/>
-          </a:xfrm>
-          <a:prstGeom prst="rect">
-            <a:avLst/>
-          </a:prstGeom>
-        </p:spPr>
-      </p:pic>
-      <p:sp>
-        <p:nvSpPr>
-          <p:cNvPr id="12" name="TextBox 11">
-            <a:extLst>
-              <a:ext uri="{FF2B5EF4-FFF2-40B4-BE49-F238E27FC236}">
-                <a16:creationId xmlns:a16="http://schemas.microsoft.com/office/drawing/2014/main" id="{D77D804C-EAD2-5379-2030-7517770A46AB}"/>
-              </a:ext>
-            </a:extLst>
-          </p:cNvPr>
-          <p:cNvSpPr txBox="1"/>
-          <p:nvPr/>
-        </p:nvSpPr>
-        <p:spPr>
-          <a:xfrm>
-            <a:off x="186213" y="2593566"/>
-            <a:ext cx="2920514" cy="3416320"/>
-          </a:xfrm>
-          <a:prstGeom prst="rect">
-            <a:avLst/>
-          </a:prstGeom>
-          <a:noFill/>
-          <a:ln>
-            <a:solidFill>
-              <a:schemeClr val="tx1"/>
-            </a:solidFill>
-            <a:prstDash val="dash"/>
-          </a:ln>
-        </p:spPr>
-        <p:txBody>
-          <a:bodyPr rot="0" spcFirstLastPara="0" vertOverflow="overflow" horzOverflow="overflow" vert="horz" wrap="square" lIns="91440" tIns="45720" rIns="91440" bIns="45720" numCol="1" spcCol="0" rtlCol="0" fromWordArt="0" anchor="ctr" anchorCtr="0" forceAA="0" compatLnSpc="1">
-            <a:prstTxWarp prst="textNoShape">
-              <a:avLst/>
-            </a:prstTxWarp>
-            <a:spAutoFit/>
-          </a:bodyPr>
-          <a:lstStyle/>
-          <a:p>
-            <a:r>
-              <a:rPr lang="ru-RU" dirty="0">
-                <a:latin typeface="Times New Roman" panose="02020603050405020304" pitchFamily="18" charset="0"/>
-                <a:cs typeface="Times New Roman" panose="02020603050405020304" pitchFamily="18" charset="0"/>
-              </a:rPr>
-              <a:t>Сервер </a:t>
-            </a:r>
-            <a:r>
-              <a:rPr lang="ru-RU" b="1" dirty="0">
-                <a:latin typeface="Times New Roman" panose="02020603050405020304" pitchFamily="18" charset="0"/>
-                <a:cs typeface="Times New Roman" panose="02020603050405020304" pitchFamily="18" charset="0"/>
-              </a:rPr>
-              <a:t>получает кадр </a:t>
-            </a:r>
-            <a:r>
-              <a:rPr lang="ru-RU" dirty="0">
-                <a:latin typeface="Times New Roman" panose="02020603050405020304" pitchFamily="18" charset="0"/>
-                <a:cs typeface="Times New Roman" panose="02020603050405020304" pitchFamily="18" charset="0"/>
-              </a:rPr>
-              <a:t>с камеры и идентификаторы сессии. После кадр анализируется нейросетью, которая </a:t>
-            </a:r>
-            <a:r>
-              <a:rPr lang="ru-RU" b="1" dirty="0">
-                <a:latin typeface="Times New Roman" panose="02020603050405020304" pitchFamily="18" charset="0"/>
-                <a:cs typeface="Times New Roman" panose="02020603050405020304" pitchFamily="18" charset="0"/>
-              </a:rPr>
-              <a:t>определяет наличие «спагетти»</a:t>
-            </a:r>
-            <a:r>
-              <a:rPr lang="ru-RU" dirty="0">
-                <a:latin typeface="Times New Roman" panose="02020603050405020304" pitchFamily="18" charset="0"/>
-                <a:cs typeface="Times New Roman" panose="02020603050405020304" pitchFamily="18" charset="0"/>
-              </a:rPr>
-              <a:t>.</a:t>
-            </a:r>
-            <a:r>
-              <a:rPr lang="ru-RU" b="1" dirty="0">
-                <a:latin typeface="Times New Roman" panose="02020603050405020304" pitchFamily="18" charset="0"/>
-                <a:cs typeface="Times New Roman" panose="02020603050405020304" pitchFamily="18" charset="0"/>
-              </a:rPr>
-              <a:t> </a:t>
-            </a:r>
-            <a:r>
-              <a:rPr lang="ru-RU" dirty="0">
-                <a:latin typeface="Times New Roman" panose="02020603050405020304" pitchFamily="18" charset="0"/>
-                <a:cs typeface="Times New Roman" panose="02020603050405020304" pitchFamily="18" charset="0"/>
-              </a:rPr>
-              <a:t>Сервер возвращает признак дефекта и числовую оценку модели вместе с исходными идентификаторами, связывающими результат с конкретным кадром</a:t>
-            </a:r>
-          </a:p>
-        </p:txBody>
-      </p:sp>
-      <p:sp>
-        <p:nvSpPr>
-          <p:cNvPr id="3" name="TextBox 26">
-            <a:extLst>
-              <a:ext uri="{FF2B5EF4-FFF2-40B4-BE49-F238E27FC236}">
-                <a16:creationId xmlns:a16="http://schemas.microsoft.com/office/drawing/2014/main" id="{B2494F24-8111-2CAC-A358-3AE7239D4D1C}"/>
-              </a:ext>
-            </a:extLst>
-          </p:cNvPr>
-          <p:cNvSpPr>
-            <a:spLocks noGrp="1"/>
-          </p:cNvSpPr>
-          <p:nvPr/>
-        </p:nvSpPr>
-        <p:spPr>
-          <a:xfrm>
-            <a:off x="4085971" y="6009005"/>
-            <a:ext cx="4073130" cy="579120"/>
-          </a:xfrm>
-          <a:prstGeom prst="rect">
-            <a:avLst/>
-          </a:prstGeom>
-          <a:noFill/>
-        </p:spPr>
-        <p:txBody>
-          <a:bodyPr rot="0" spcFirstLastPara="0" vert="horz" wrap="square" lIns="91440" tIns="45720" rIns="91440" bIns="45720" anchor="ctr">
-            <a:noAutofit/>
-          </a:bodyPr>
-          <a:lstStyle>
-            <a:defPPr algn="l">
-              <a:defRPr sz="1600" b="0">
-                <a:solidFill>
-                  <a:srgbClr val="000000"/>
-                </a:solidFill>
-                <a:latin typeface="Times New Roman"/>
-                <a:ea typeface="Times New Roman"/>
-                <a:cs typeface="Times New Roman"/>
-              </a:defRPr>
-            </a:defPPr>
-          </a:lstStyle>
-          <a:p>
-            <a:pPr algn="ctr">
-              <a:defRPr sz="1600" b="0">
-                <a:solidFill>
-                  <a:srgbClr val="000000"/>
-                </a:solidFill>
-                <a:latin typeface="Times New Roman"/>
-                <a:ea typeface="Times New Roman"/>
-                <a:cs typeface="Times New Roman"/>
-              </a:defRPr>
-            </a:pPr>
-            <a:r>
-              <a:rPr sz="1600" b="0" dirty="0" err="1">
-                <a:solidFill>
-                  <a:srgbClr val="000000"/>
-                </a:solidFill>
-                <a:latin typeface="Times New Roman"/>
-                <a:ea typeface="Times New Roman"/>
-                <a:cs typeface="Times New Roman"/>
-              </a:rPr>
-              <a:t>Рис</a:t>
-            </a:r>
-            <a:r>
-              <a:rPr sz="1600" b="0" dirty="0">
-                <a:solidFill>
-                  <a:srgbClr val="000000"/>
-                </a:solidFill>
-                <a:latin typeface="Times New Roman"/>
-                <a:ea typeface="Times New Roman"/>
-                <a:cs typeface="Times New Roman"/>
-              </a:rPr>
-              <a:t>. </a:t>
-            </a:r>
-            <a:r>
-              <a:rPr lang="ru-RU" sz="1600" b="0" dirty="0">
-                <a:solidFill>
-                  <a:srgbClr val="000000"/>
-                </a:solidFill>
-                <a:latin typeface="Times New Roman"/>
-                <a:ea typeface="Times New Roman"/>
-                <a:cs typeface="Times New Roman"/>
-              </a:rPr>
-              <a:t>6</a:t>
-            </a:r>
-            <a:r>
-              <a:rPr sz="1600" b="0" dirty="0">
-                <a:solidFill>
-                  <a:srgbClr val="000000"/>
-                </a:solidFill>
-                <a:latin typeface="Times New Roman"/>
-                <a:ea typeface="Times New Roman"/>
-                <a:cs typeface="Times New Roman"/>
-              </a:rPr>
-              <a:t> –</a:t>
-            </a:r>
-            <a:r>
-              <a:rPr lang="ru-RU" sz="1600" b="0" dirty="0">
-                <a:solidFill>
-                  <a:srgbClr val="000000"/>
-                </a:solidFill>
-                <a:latin typeface="Times New Roman"/>
-                <a:ea typeface="Times New Roman"/>
-                <a:cs typeface="Times New Roman"/>
-              </a:rPr>
-              <a:t> Блок-схема серверной обработки кадров и определения дефектов FDM-печати</a:t>
-            </a:r>
-            <a:r>
-              <a:rPr sz="1600" b="0" dirty="0">
-                <a:solidFill>
-                  <a:srgbClr val="000000"/>
-                </a:solidFill>
-                <a:latin typeface="Times New Roman"/>
-                <a:ea typeface="Times New Roman"/>
-                <a:cs typeface="Times New Roman"/>
-              </a:rPr>
-              <a:t> </a:t>
-            </a:r>
-          </a:p>
-        </p:txBody>
-      </p:sp>
-    </p:spTree>
-    <p:extLst>
-      <p:ext uri="{BB962C8B-B14F-4D97-AF65-F5344CB8AC3E}">
-        <p14:creationId xmlns:p14="http://schemas.microsoft.com/office/powerpoint/2010/main" val="2065725557"/>
-      </p:ext>
-    </p:extLst>
-  </p:cSld>
-  <p:clrMapOvr>
-    <a:masterClrMapping/>
-  </p:clrMapOvr>
-</p:sld>
-</file>
-
-<file path=ppt/slides/slide7.xml><?xml version="1.0" encoding="utf-8"?>
-<p:sld xmlns:a="http://schemas.openxmlformats.org/drawingml/2006/main" xmlns:r="http://schemas.openxmlformats.org/officeDocument/2006/relationships" xmlns:p="http://schemas.openxmlformats.org/presentationml/2006/main">
-  <p:cSld>
-    <p:spTree>
-      <p:nvGrpSpPr>
-        <p:cNvPr id="1" name="">
-          <a:extLst>
-            <a:ext uri="{FF2B5EF4-FFF2-40B4-BE49-F238E27FC236}">
-              <a16:creationId xmlns:a16="http://schemas.microsoft.com/office/drawing/2014/main" id="{829A4193-2A96-4292-27DF-7C8F10ED51F0}"/>
-            </a:ext>
-          </a:extLst>
-        </p:cNvPr>
-        <p:cNvGrpSpPr/>
-        <p:nvPr/>
-      </p:nvGrpSpPr>
-      <p:grpSpPr>
-        <a:xfrm>
-          <a:off x="0" y="0"/>
-          <a:ext cx="0" cy="0"/>
-          <a:chOff x="0" y="0"/>
-          <a:chExt cx="0" cy="0"/>
-        </a:xfrm>
-      </p:grpSpPr>
-      <p:sp>
-        <p:nvSpPr>
-          <p:cNvPr id="2" name="Заголовок 1">
-            <a:extLst>
-              <a:ext uri="{FF2B5EF4-FFF2-40B4-BE49-F238E27FC236}">
-                <a16:creationId xmlns:a16="http://schemas.microsoft.com/office/drawing/2014/main" id="{F71B51DD-8424-3898-F322-045B44C926E8}"/>
-              </a:ext>
-            </a:extLst>
-          </p:cNvPr>
-          <p:cNvSpPr>
-            <a:spLocks noGrp="1"/>
-          </p:cNvSpPr>
-          <p:nvPr>
-            <p:ph type="title"/>
-          </p:nvPr>
-        </p:nvSpPr>
-        <p:spPr>
-          <a:xfrm>
-            <a:off x="628650" y="9098"/>
-            <a:ext cx="7886700" cy="712868"/>
-          </a:xfrm>
-        </p:spPr>
-        <p:txBody>
-          <a:bodyPr>
-            <a:normAutofit/>
-          </a:bodyPr>
-          <a:lstStyle/>
-          <a:p>
-            <a:pPr algn="ctr"/>
-            <a:r>
-              <a:rPr lang="ru-RU" sz="4000" dirty="0">
-                <a:latin typeface="Times New Roman"/>
-                <a:ea typeface="Calibri"/>
-                <a:cs typeface="Times New Roman"/>
-              </a:rPr>
-              <a:t>Обработка на принтере</a:t>
-            </a:r>
-          </a:p>
-        </p:txBody>
-      </p:sp>
-      <p:sp>
-        <p:nvSpPr>
-          <p:cNvPr id="4" name="Текстовое поле 3">
-            <a:extLst>
-              <a:ext uri="{FF2B5EF4-FFF2-40B4-BE49-F238E27FC236}">
-                <a16:creationId xmlns:a16="http://schemas.microsoft.com/office/drawing/2014/main" id="{5E8559DA-50BE-07AC-B0EB-3414FBFB6481}"/>
-              </a:ext>
-            </a:extLst>
-          </p:cNvPr>
-          <p:cNvSpPr txBox="1"/>
-          <p:nvPr/>
-        </p:nvSpPr>
-        <p:spPr>
-          <a:xfrm>
-            <a:off x="3775710" y="5640705"/>
-            <a:ext cx="309880" cy="368300"/>
-          </a:xfrm>
-          <a:prstGeom prst="rect">
-            <a:avLst/>
-          </a:prstGeom>
-          <a:noFill/>
-        </p:spPr>
-        <p:txBody>
-          <a:bodyPr wrap="none" rtlCol="0">
-            <a:spAutoFit/>
-          </a:bodyPr>
-          <a:lstStyle/>
-          <a:p>
-            <a:endParaRPr lang="ru-RU" altLang="en-US"/>
-          </a:p>
-        </p:txBody>
-      </p:sp>
-      <p:sp>
-        <p:nvSpPr>
-          <p:cNvPr id="5" name="Замещающий номер слайда 4">
-            <a:extLst>
-              <a:ext uri="{FF2B5EF4-FFF2-40B4-BE49-F238E27FC236}">
-                <a16:creationId xmlns:a16="http://schemas.microsoft.com/office/drawing/2014/main" id="{28EFF76E-32CA-AB56-A1FE-FC86064D66B4}"/>
-              </a:ext>
-            </a:extLst>
-          </p:cNvPr>
-          <p:cNvSpPr>
-            <a:spLocks noGrp="1"/>
-          </p:cNvSpPr>
-          <p:nvPr>
-            <p:ph type="sldNum" sz="quarter" idx="12"/>
-          </p:nvPr>
-        </p:nvSpPr>
-        <p:spPr>
-          <a:xfrm>
-            <a:off x="7088886" y="6493511"/>
-            <a:ext cx="2057400" cy="365125"/>
-          </a:xfrm>
-        </p:spPr>
-        <p:txBody>
-          <a:bodyPr/>
-          <a:lstStyle/>
-          <a:p>
-            <a:fld id="{D6ED8A53-8D2F-4011-BE06-EDB0774336BA}" type="slidenum">
-              <a:rPr lang="ru-RU" sz="2000" dirty="0" smtClean="0">
-                <a:solidFill>
-                  <a:schemeClr val="tx1"/>
-                </a:solidFill>
-                <a:latin typeface="Times New Roman"/>
-                <a:cs typeface="Times New Roman"/>
-              </a:rPr>
-              <a:t>7</a:t>
-            </a:fld>
-            <a:endParaRPr lang="ru-RU" sz="2000">
-              <a:solidFill>
-                <a:schemeClr val="tx1"/>
-              </a:solidFill>
-              <a:latin typeface="Times New Roman"/>
-              <a:ea typeface="Calibri"/>
-              <a:cs typeface="Times New Roman"/>
-            </a:endParaRPr>
-          </a:p>
-        </p:txBody>
-      </p:sp>
-      <p:pic>
-        <p:nvPicPr>
-          <p:cNvPr id="7" name="Рисунок 6">
-            <a:extLst>
-              <a:ext uri="{FF2B5EF4-FFF2-40B4-BE49-F238E27FC236}">
-                <a16:creationId xmlns:a16="http://schemas.microsoft.com/office/drawing/2014/main" id="{DA035444-9EBE-0F23-C21B-B713FDEC75FD}"/>
-              </a:ext>
-            </a:extLst>
-          </p:cNvPr>
-          <p:cNvPicPr>
-            <a:picLocks noChangeAspect="1"/>
-          </p:cNvPicPr>
-          <p:nvPr/>
-        </p:nvPicPr>
-        <p:blipFill>
-          <a:blip r:embed="rId3">
-            <a:extLst>
-              <a:ext uri="{28A0092B-C50C-407E-A947-70E740481C1C}">
-                <a14:useLocalDpi xmlns:a14="http://schemas.microsoft.com/office/drawing/2010/main" val="0"/>
-              </a:ext>
-            </a:extLst>
-          </a:blip>
-          <a:srcRect/>
-          <a:stretch/>
-        </p:blipFill>
-        <p:spPr>
-          <a:xfrm>
-            <a:off x="3106727" y="875407"/>
-            <a:ext cx="5905217" cy="5295358"/>
-          </a:xfrm>
-          <a:prstGeom prst="rect">
-            <a:avLst/>
-          </a:prstGeom>
-        </p:spPr>
-      </p:pic>
-      <p:sp>
-        <p:nvSpPr>
-          <p:cNvPr id="12" name="TextBox 11">
-            <a:extLst>
-              <a:ext uri="{FF2B5EF4-FFF2-40B4-BE49-F238E27FC236}">
-                <a16:creationId xmlns:a16="http://schemas.microsoft.com/office/drawing/2014/main" id="{D77D804C-EAD2-5379-2030-7517770A46AB}"/>
-              </a:ext>
-            </a:extLst>
-          </p:cNvPr>
-          <p:cNvSpPr txBox="1"/>
-          <p:nvPr/>
-        </p:nvSpPr>
-        <p:spPr>
-          <a:xfrm>
-            <a:off x="132056" y="875407"/>
-            <a:ext cx="2917990" cy="5355312"/>
-          </a:xfrm>
-          <a:prstGeom prst="rect">
-            <a:avLst/>
-          </a:prstGeom>
-          <a:noFill/>
-          <a:ln>
-            <a:solidFill>
-              <a:schemeClr val="tx1"/>
-            </a:solidFill>
-            <a:prstDash val="dash"/>
-          </a:ln>
-        </p:spPr>
-        <p:txBody>
-          <a:bodyPr rot="0" spcFirstLastPara="0" vertOverflow="overflow" horzOverflow="overflow" vert="horz" wrap="square" lIns="91440" tIns="45720" rIns="91440" bIns="45720" numCol="1" spcCol="0" rtlCol="0" fromWordArt="0" anchor="ctr" anchorCtr="0" forceAA="0" compatLnSpc="1">
-            <a:prstTxWarp prst="textNoShape">
-              <a:avLst/>
-            </a:prstTxWarp>
-            <a:spAutoFit/>
-          </a:bodyPr>
-          <a:lstStyle/>
-          <a:p>
-            <a:r>
-              <a:rPr lang="ru-RU" dirty="0">
-                <a:latin typeface="Times New Roman" panose="02020603050405020304" pitchFamily="18" charset="0"/>
-                <a:cs typeface="Times New Roman" panose="02020603050405020304" pitchFamily="18" charset="0"/>
-              </a:rPr>
-              <a:t>Единичное обнаружение дефекта не приводит к отмене задания. Локальный модуль </a:t>
-            </a:r>
-            <a:r>
-              <a:rPr lang="ru-RU" b="1" dirty="0">
-                <a:latin typeface="Times New Roman" panose="02020603050405020304" pitchFamily="18" charset="0"/>
-                <a:cs typeface="Times New Roman" panose="02020603050405020304" pitchFamily="18" charset="0"/>
-              </a:rPr>
-              <a:t>проверяет принадлежность результата </a:t>
-            </a:r>
-            <a:r>
-              <a:rPr lang="ru-RU" dirty="0">
-                <a:latin typeface="Times New Roman" panose="02020603050405020304" pitchFamily="18" charset="0"/>
-                <a:cs typeface="Times New Roman" panose="02020603050405020304" pitchFamily="18" charset="0"/>
-              </a:rPr>
-              <a:t>текущей печатной сессии и учитывает последовательные срабатывания. Отрицательный или неопределённый результат сбрасывает счётчик. </a:t>
-            </a:r>
-            <a:r>
-              <a:rPr lang="ru-RU" b="1" dirty="0">
-                <a:latin typeface="Times New Roman" panose="02020603050405020304" pitchFamily="18" charset="0"/>
-                <a:cs typeface="Times New Roman" panose="02020603050405020304" pitchFamily="18" charset="0"/>
-              </a:rPr>
-              <a:t>После трёх последовательных обнаружений</a:t>
-            </a:r>
-            <a:r>
-              <a:rPr lang="ru-RU" dirty="0">
-                <a:latin typeface="Times New Roman" panose="02020603050405020304" pitchFamily="18" charset="0"/>
-                <a:cs typeface="Times New Roman" panose="02020603050405020304" pitchFamily="18" charset="0"/>
-              </a:rPr>
-              <a:t> «спагетти» повторно проверяется активность сессии и </a:t>
-            </a:r>
-            <a:r>
-              <a:rPr lang="ru-RU" b="1" dirty="0">
-                <a:latin typeface="Times New Roman" panose="02020603050405020304" pitchFamily="18" charset="0"/>
-                <a:cs typeface="Times New Roman" panose="02020603050405020304" pitchFamily="18" charset="0"/>
-              </a:rPr>
-              <a:t>формируется команда отмены печати</a:t>
-            </a:r>
-            <a:r>
-              <a:rPr lang="ru-RU" dirty="0">
-                <a:latin typeface="Times New Roman" panose="02020603050405020304" pitchFamily="18" charset="0"/>
-                <a:cs typeface="Times New Roman" panose="02020603050405020304" pitchFamily="18" charset="0"/>
-              </a:rPr>
-              <a:t>.</a:t>
-            </a:r>
-          </a:p>
-        </p:txBody>
-      </p:sp>
-      <p:sp>
-        <p:nvSpPr>
-          <p:cNvPr id="3" name="TextBox 26">
-            <a:extLst>
-              <a:ext uri="{FF2B5EF4-FFF2-40B4-BE49-F238E27FC236}">
-                <a16:creationId xmlns:a16="http://schemas.microsoft.com/office/drawing/2014/main" id="{E5B04886-22A1-2CCD-9C65-F1ADEC0EB19F}"/>
-              </a:ext>
-            </a:extLst>
-          </p:cNvPr>
-          <p:cNvSpPr>
-            <a:spLocks noGrp="1"/>
-          </p:cNvSpPr>
-          <p:nvPr/>
-        </p:nvSpPr>
-        <p:spPr>
-          <a:xfrm>
-            <a:off x="3723995" y="6170765"/>
-            <a:ext cx="4670679" cy="579120"/>
-          </a:xfrm>
-          <a:prstGeom prst="rect">
-            <a:avLst/>
-          </a:prstGeom>
-          <a:noFill/>
-        </p:spPr>
-        <p:txBody>
-          <a:bodyPr rot="0" spcFirstLastPara="0" vert="horz" wrap="square" lIns="91440" tIns="45720" rIns="91440" bIns="45720" anchor="ctr">
-            <a:noAutofit/>
-          </a:bodyPr>
-          <a:lstStyle>
-            <a:defPPr algn="l">
-              <a:defRPr sz="1600" b="0">
-                <a:solidFill>
-                  <a:srgbClr val="000000"/>
-                </a:solidFill>
-                <a:latin typeface="Times New Roman"/>
-                <a:ea typeface="Times New Roman"/>
-                <a:cs typeface="Times New Roman"/>
-              </a:defRPr>
-            </a:defPPr>
-          </a:lstStyle>
-          <a:p>
-            <a:pPr algn="ctr">
-              <a:defRPr sz="1600" b="0">
-                <a:solidFill>
-                  <a:srgbClr val="000000"/>
-                </a:solidFill>
-                <a:latin typeface="Times New Roman"/>
-                <a:ea typeface="Times New Roman"/>
-                <a:cs typeface="Times New Roman"/>
-              </a:defRPr>
-            </a:pPr>
-            <a:r>
-              <a:rPr sz="1600" b="0" dirty="0" err="1">
-                <a:solidFill>
-                  <a:srgbClr val="000000"/>
-                </a:solidFill>
-                <a:latin typeface="Times New Roman"/>
-                <a:ea typeface="Times New Roman"/>
-                <a:cs typeface="Times New Roman"/>
-              </a:rPr>
-              <a:t>Рис</a:t>
-            </a:r>
-            <a:r>
-              <a:rPr sz="1600" b="0" dirty="0">
-                <a:solidFill>
-                  <a:srgbClr val="000000"/>
-                </a:solidFill>
-                <a:latin typeface="Times New Roman"/>
-                <a:ea typeface="Times New Roman"/>
-                <a:cs typeface="Times New Roman"/>
-              </a:rPr>
-              <a:t>. </a:t>
-            </a:r>
-            <a:r>
-              <a:rPr lang="ru-RU" sz="1600" b="0" dirty="0">
-                <a:solidFill>
-                  <a:srgbClr val="000000"/>
-                </a:solidFill>
-                <a:latin typeface="Times New Roman"/>
-                <a:ea typeface="Times New Roman"/>
-                <a:cs typeface="Times New Roman"/>
-              </a:rPr>
-              <a:t>7</a:t>
-            </a:r>
-            <a:r>
-              <a:rPr sz="1600" b="0" dirty="0">
-                <a:solidFill>
-                  <a:srgbClr val="000000"/>
-                </a:solidFill>
-                <a:latin typeface="Times New Roman"/>
-                <a:ea typeface="Times New Roman"/>
-                <a:cs typeface="Times New Roman"/>
-              </a:rPr>
-              <a:t> – </a:t>
-            </a:r>
-            <a:r>
-              <a:rPr lang="ru-RU" sz="1600" b="0" dirty="0">
-                <a:solidFill>
-                  <a:srgbClr val="000000"/>
-                </a:solidFill>
-                <a:latin typeface="Times New Roman"/>
-                <a:ea typeface="Times New Roman"/>
-                <a:cs typeface="Times New Roman"/>
-              </a:rPr>
-              <a:t>Блок-схема проверки результатов обнаружения дефекта и отмены FDM-печати</a:t>
-            </a:r>
-            <a:endParaRPr sz="1600" b="0" dirty="0">
-              <a:solidFill>
-                <a:srgbClr val="000000"/>
-              </a:solidFill>
-              <a:latin typeface="Times New Roman"/>
-              <a:ea typeface="Times New Roman"/>
-              <a:cs typeface="Times New Roman"/>
-            </a:endParaRPr>
-          </a:p>
-        </p:txBody>
-      </p:sp>
-      <p:sp>
-        <p:nvSpPr>
-          <p:cNvPr id="6" name="TextBox 26">
-            <a:extLst>
-              <a:ext uri="{FF2B5EF4-FFF2-40B4-BE49-F238E27FC236}">
-                <a16:creationId xmlns:a16="http://schemas.microsoft.com/office/drawing/2014/main" id="{8AF7D2B0-5020-6F43-9662-A5B7C34B40EB}"/>
-              </a:ext>
-            </a:extLst>
-          </p:cNvPr>
-          <p:cNvSpPr>
-            <a:spLocks noGrp="1"/>
-          </p:cNvSpPr>
-          <p:nvPr/>
-        </p:nvSpPr>
-        <p:spPr>
-          <a:xfrm>
-            <a:off x="339471" y="5651599"/>
-            <a:ext cx="4073130" cy="579120"/>
-          </a:xfrm>
-          <a:prstGeom prst="rect">
-            <a:avLst/>
-          </a:prstGeom>
-          <a:noFill/>
-        </p:spPr>
-        <p:txBody>
-          <a:bodyPr rot="0" spcFirstLastPara="0" vert="horz" wrap="square" lIns="91440" tIns="45720" rIns="91440" bIns="45720" anchor="ctr">
-            <a:noAutofit/>
-          </a:bodyPr>
-          <a:lstStyle>
-            <a:defPPr algn="l">
-              <a:defRPr sz="1600" b="0">
-                <a:solidFill>
-                  <a:srgbClr val="000000"/>
-                </a:solidFill>
-                <a:latin typeface="Times New Roman"/>
-                <a:ea typeface="Times New Roman"/>
-                <a:cs typeface="Times New Roman"/>
-              </a:defRPr>
-            </a:defPPr>
-          </a:lstStyle>
-          <a:p>
-            <a:pPr algn="ctr">
-              <a:defRPr sz="1600" b="0">
-                <a:solidFill>
-                  <a:srgbClr val="000000"/>
-                </a:solidFill>
-                <a:latin typeface="Times New Roman"/>
-                <a:ea typeface="Times New Roman"/>
-                <a:cs typeface="Times New Roman"/>
-              </a:defRPr>
-            </a:pPr>
-            <a:r>
-              <a:rPr sz="1600" b="0" dirty="0" err="1">
-                <a:solidFill>
-                  <a:srgbClr val="000000"/>
-                </a:solidFill>
-                <a:latin typeface="Times New Roman"/>
-                <a:ea typeface="Times New Roman"/>
-                <a:cs typeface="Times New Roman"/>
-              </a:rPr>
-              <a:t>Рис</a:t>
-            </a:r>
-            <a:r>
-              <a:rPr sz="1600" b="0" dirty="0">
-                <a:solidFill>
-                  <a:srgbClr val="000000"/>
-                </a:solidFill>
-                <a:latin typeface="Times New Roman"/>
-                <a:ea typeface="Times New Roman"/>
-                <a:cs typeface="Times New Roman"/>
-              </a:rPr>
-              <a:t>. </a:t>
-            </a:r>
-            <a:r>
-              <a:rPr lang="ru-RU" sz="1600" b="0" dirty="0">
-                <a:solidFill>
-                  <a:srgbClr val="000000"/>
-                </a:solidFill>
-                <a:latin typeface="Times New Roman"/>
-                <a:ea typeface="Times New Roman"/>
-                <a:cs typeface="Times New Roman"/>
-              </a:rPr>
-              <a:t>7</a:t>
-            </a:r>
-            <a:r>
-              <a:rPr sz="1600" b="0" dirty="0">
-                <a:solidFill>
-                  <a:srgbClr val="000000"/>
-                </a:solidFill>
-                <a:latin typeface="Times New Roman"/>
-                <a:ea typeface="Times New Roman"/>
-                <a:cs typeface="Times New Roman"/>
-              </a:rPr>
-              <a:t> – </a:t>
-            </a:r>
-          </a:p>
-        </p:txBody>
-      </p:sp>
-    </p:spTree>
-    <p:extLst>
-      <p:ext uri="{BB962C8B-B14F-4D97-AF65-F5344CB8AC3E}">
-        <p14:creationId xmlns:p14="http://schemas.microsoft.com/office/powerpoint/2010/main" val="1366394556"/>
-      </p:ext>
-    </p:extLst>
-  </p:cSld>
-  <p:clrMapOvr>
-    <a:masterClrMapping/>
-  </p:clrMapOvr>
-</p:sld>
-</file>
-
-<file path=ppt/slides/slide8.xml><?xml version="1.0" encoding="utf-8"?>
-<p:sld xmlns:a="http://schemas.openxmlformats.org/drawingml/2006/main" xmlns:r="http://schemas.openxmlformats.org/officeDocument/2006/relationships" xmlns:p="http://schemas.openxmlformats.org/presentationml/2006/main">
-  <p:cSld>
-    <p:spTree>
-      <p:nvGrpSpPr>
-        <p:cNvPr id="1" name="">
-          <a:extLst>
-            <a:ext uri="{FF2B5EF4-FFF2-40B4-BE49-F238E27FC236}">
-              <a16:creationId xmlns:a16="http://schemas.microsoft.com/office/drawing/2014/main" id="{829A4193-2A96-4292-27DF-7C8F10ED51F0}"/>
-            </a:ext>
-          </a:extLst>
-        </p:cNvPr>
-        <p:cNvGrpSpPr/>
-        <p:nvPr/>
-      </p:nvGrpSpPr>
-      <p:grpSpPr>
-        <a:xfrm>
-          <a:off x="0" y="0"/>
-          <a:ext cx="0" cy="0"/>
-          <a:chOff x="0" y="0"/>
-          <a:chExt cx="0" cy="0"/>
-        </a:xfrm>
-      </p:grpSpPr>
-      <p:sp>
-        <p:nvSpPr>
-          <p:cNvPr id="2" name="Заголовок 1">
-            <a:extLst>
-              <a:ext uri="{FF2B5EF4-FFF2-40B4-BE49-F238E27FC236}">
-                <a16:creationId xmlns:a16="http://schemas.microsoft.com/office/drawing/2014/main" id="{F71B51DD-8424-3898-F322-045B44C926E8}"/>
-              </a:ext>
-            </a:extLst>
-          </p:cNvPr>
-          <p:cNvSpPr>
-            <a:spLocks noGrp="1"/>
-          </p:cNvSpPr>
-          <p:nvPr>
-            <p:ph type="title"/>
-          </p:nvPr>
-        </p:nvSpPr>
-        <p:spPr>
-          <a:xfrm>
-            <a:off x="628650" y="-64546"/>
-            <a:ext cx="7886700" cy="712868"/>
-          </a:xfrm>
-        </p:spPr>
-        <p:txBody>
-          <a:bodyPr>
-            <a:normAutofit/>
-          </a:bodyPr>
-          <a:lstStyle/>
-          <a:p>
-            <a:pPr algn="ctr"/>
-            <a:r>
-              <a:rPr lang="ru-RU" sz="4000" dirty="0">
-                <a:latin typeface="Times New Roman"/>
-                <a:ea typeface="Calibri"/>
-                <a:cs typeface="Times New Roman"/>
-              </a:rPr>
-              <a:t>Электросхема 3</a:t>
-            </a:r>
-            <a:r>
-              <a:rPr lang="en-US" sz="4000" dirty="0">
-                <a:latin typeface="Times New Roman"/>
-                <a:ea typeface="Calibri"/>
-                <a:cs typeface="Times New Roman"/>
-              </a:rPr>
-              <a:t>D-</a:t>
-            </a:r>
-            <a:r>
-              <a:rPr lang="ru-RU" sz="4000" dirty="0">
-                <a:latin typeface="Times New Roman"/>
-                <a:ea typeface="Calibri"/>
-                <a:cs typeface="Times New Roman"/>
-              </a:rPr>
-              <a:t>принтера</a:t>
-            </a:r>
-          </a:p>
-        </p:txBody>
-      </p:sp>
-      <p:sp>
-        <p:nvSpPr>
-          <p:cNvPr id="4" name="Текстовое поле 3">
-            <a:extLst>
-              <a:ext uri="{FF2B5EF4-FFF2-40B4-BE49-F238E27FC236}">
-                <a16:creationId xmlns:a16="http://schemas.microsoft.com/office/drawing/2014/main" id="{5E8559DA-50BE-07AC-B0EB-3414FBFB6481}"/>
-              </a:ext>
-            </a:extLst>
-          </p:cNvPr>
-          <p:cNvSpPr txBox="1"/>
-          <p:nvPr/>
-        </p:nvSpPr>
-        <p:spPr>
-          <a:xfrm>
-            <a:off x="3775710" y="5640705"/>
-            <a:ext cx="309880" cy="368300"/>
-          </a:xfrm>
-          <a:prstGeom prst="rect">
-            <a:avLst/>
-          </a:prstGeom>
-          <a:noFill/>
-        </p:spPr>
-        <p:txBody>
-          <a:bodyPr wrap="none" rtlCol="0">
-            <a:spAutoFit/>
-          </a:bodyPr>
-          <a:lstStyle/>
-          <a:p>
-            <a:endParaRPr lang="ru-RU" altLang="en-US"/>
-          </a:p>
-        </p:txBody>
-      </p:sp>
-      <p:sp>
-        <p:nvSpPr>
-          <p:cNvPr id="5" name="Замещающий номер слайда 4">
-            <a:extLst>
-              <a:ext uri="{FF2B5EF4-FFF2-40B4-BE49-F238E27FC236}">
-                <a16:creationId xmlns:a16="http://schemas.microsoft.com/office/drawing/2014/main" id="{28EFF76E-32CA-AB56-A1FE-FC86064D66B4}"/>
-              </a:ext>
-            </a:extLst>
-          </p:cNvPr>
-          <p:cNvSpPr>
-            <a:spLocks noGrp="1"/>
-          </p:cNvSpPr>
-          <p:nvPr>
-            <p:ph type="sldNum" sz="quarter" idx="12"/>
-          </p:nvPr>
-        </p:nvSpPr>
-        <p:spPr>
-          <a:xfrm>
-            <a:off x="7088886" y="6493511"/>
-            <a:ext cx="2057400" cy="365125"/>
-          </a:xfrm>
-        </p:spPr>
-        <p:txBody>
-          <a:bodyPr/>
-          <a:lstStyle/>
-          <a:p>
-            <a:fld id="{D6ED8A53-8D2F-4011-BE06-EDB0774336BA}" type="slidenum">
-              <a:rPr lang="ru-RU" sz="2000" dirty="0" smtClean="0">
-                <a:solidFill>
-                  <a:schemeClr val="tx1"/>
-                </a:solidFill>
-                <a:latin typeface="Times New Roman"/>
-                <a:cs typeface="Times New Roman"/>
-              </a:rPr>
-              <a:t>8</a:t>
-            </a:fld>
-            <a:endParaRPr lang="ru-RU" sz="2000">
-              <a:solidFill>
-                <a:schemeClr val="tx1"/>
-              </a:solidFill>
-              <a:latin typeface="Times New Roman"/>
-              <a:ea typeface="Calibri"/>
-              <a:cs typeface="Times New Roman"/>
-            </a:endParaRPr>
-          </a:p>
-        </p:txBody>
-      </p:sp>
-      <p:pic>
-        <p:nvPicPr>
-          <p:cNvPr id="13" name="Рисунок 12">
-            <a:extLst>
-              <a:ext uri="{FF2B5EF4-FFF2-40B4-BE49-F238E27FC236}">
-                <a16:creationId xmlns:a16="http://schemas.microsoft.com/office/drawing/2014/main" id="{4E875F94-D2E7-0E2D-5267-8B670B1C8AC0}"/>
-              </a:ext>
-            </a:extLst>
-          </p:cNvPr>
-          <p:cNvPicPr>
-            <a:picLocks noChangeAspect="1"/>
-          </p:cNvPicPr>
-          <p:nvPr/>
-        </p:nvPicPr>
-        <p:blipFill>
-          <a:blip r:embed="rId3">
-            <a:extLst>
-              <a:ext uri="{96DAC541-7B7A-43D3-8B79-37D633B846F1}">
-                <asvg:svgBlip xmlns:asvg="http://schemas.microsoft.com/office/drawing/2016/SVG/main" r:embed="rId4"/>
-              </a:ext>
-            </a:extLst>
-          </a:blip>
-          <a:stretch>
-            <a:fillRect/>
-          </a:stretch>
-        </p:blipFill>
-        <p:spPr>
-          <a:xfrm>
-            <a:off x="351681" y="603944"/>
-            <a:ext cx="8440637" cy="3708649"/>
-          </a:xfrm>
-          <a:prstGeom prst="rect">
-            <a:avLst/>
-          </a:prstGeom>
-        </p:spPr>
-      </p:pic>
-      <p:sp>
-        <p:nvSpPr>
-          <p:cNvPr id="14" name="TextBox 13">
-            <a:extLst>
-              <a:ext uri="{FF2B5EF4-FFF2-40B4-BE49-F238E27FC236}">
-                <a16:creationId xmlns:a16="http://schemas.microsoft.com/office/drawing/2014/main" id="{971BDEBA-A42A-8680-F3A2-087C760E6CFE}"/>
-              </a:ext>
-            </a:extLst>
-          </p:cNvPr>
-          <p:cNvSpPr txBox="1"/>
-          <p:nvPr/>
-        </p:nvSpPr>
-        <p:spPr>
-          <a:xfrm>
-            <a:off x="254001" y="4734036"/>
-            <a:ext cx="8487517" cy="2031325"/>
-          </a:xfrm>
-          <a:prstGeom prst="rect">
-            <a:avLst/>
-          </a:prstGeom>
-          <a:noFill/>
-          <a:ln>
-            <a:solidFill>
-              <a:schemeClr val="tx1"/>
-            </a:solidFill>
-            <a:prstDash val="dash"/>
-          </a:ln>
-        </p:spPr>
-        <p:txBody>
-          <a:bodyPr rot="0" spcFirstLastPara="0" vertOverflow="overflow" horzOverflow="overflow" vert="horz" wrap="square" lIns="91440" tIns="45720" rIns="91440" bIns="45720" numCol="1" spcCol="0" rtlCol="0" fromWordArt="0" anchor="ctr" anchorCtr="0" forceAA="0" compatLnSpc="1">
-            <a:prstTxWarp prst="textNoShape">
-              <a:avLst/>
-            </a:prstTxWarp>
-            <a:spAutoFit/>
-          </a:bodyPr>
-          <a:lstStyle/>
-          <a:p>
-            <a:r>
-              <a:rPr lang="ru-RU" dirty="0">
-                <a:latin typeface="Times New Roman" panose="02020603050405020304" pitchFamily="18" charset="0"/>
-                <a:cs typeface="Times New Roman" panose="02020603050405020304" pitchFamily="18" charset="0"/>
-              </a:rPr>
-              <a:t>Для электрической части разрабатываемого 3</a:t>
-            </a:r>
-            <a:r>
-              <a:rPr lang="en-US" dirty="0">
-                <a:latin typeface="Times New Roman" panose="02020603050405020304" pitchFamily="18" charset="0"/>
-                <a:cs typeface="Times New Roman" panose="02020603050405020304" pitchFamily="18" charset="0"/>
-              </a:rPr>
-              <a:t>D-</a:t>
-            </a:r>
-            <a:r>
-              <a:rPr lang="ru-RU" dirty="0">
-                <a:latin typeface="Times New Roman" panose="02020603050405020304" pitchFamily="18" charset="0"/>
-                <a:cs typeface="Times New Roman" panose="02020603050405020304" pitchFamily="18" charset="0"/>
-              </a:rPr>
-              <a:t>принтера выбрана плата </a:t>
-            </a:r>
-            <a:r>
-              <a:rPr lang="ru-RU" b="1" dirty="0">
-                <a:latin typeface="Times New Roman" panose="02020603050405020304" pitchFamily="18" charset="0"/>
-                <a:cs typeface="Times New Roman" panose="02020603050405020304" pitchFamily="18" charset="0"/>
-              </a:rPr>
-              <a:t>MKS </a:t>
-            </a:r>
-            <a:r>
-              <a:rPr lang="ru-RU" b="1" dirty="0" err="1">
-                <a:latin typeface="Times New Roman" panose="02020603050405020304" pitchFamily="18" charset="0"/>
-                <a:cs typeface="Times New Roman" panose="02020603050405020304" pitchFamily="18" charset="0"/>
-              </a:rPr>
-              <a:t>Robin</a:t>
-            </a:r>
-            <a:r>
-              <a:rPr lang="ru-RU" b="1" dirty="0">
-                <a:latin typeface="Times New Roman" panose="02020603050405020304" pitchFamily="18" charset="0"/>
-                <a:cs typeface="Times New Roman" panose="02020603050405020304" pitchFamily="18" charset="0"/>
-              </a:rPr>
-              <a:t> </a:t>
-            </a:r>
-            <a:r>
-              <a:rPr lang="ru-RU" b="1" dirty="0" err="1">
-                <a:latin typeface="Times New Roman" panose="02020603050405020304" pitchFamily="18" charset="0"/>
-                <a:cs typeface="Times New Roman" panose="02020603050405020304" pitchFamily="18" charset="0"/>
-              </a:rPr>
-              <a:t>Nano</a:t>
-            </a:r>
-            <a:r>
-              <a:rPr lang="ru-RU" b="1" dirty="0">
-                <a:latin typeface="Times New Roman" panose="02020603050405020304" pitchFamily="18" charset="0"/>
-                <a:cs typeface="Times New Roman" panose="02020603050405020304" pitchFamily="18" charset="0"/>
-              </a:rPr>
-              <a:t> V1.2 (7) </a:t>
-            </a:r>
-            <a:r>
-              <a:rPr lang="ru-RU" dirty="0">
-                <a:latin typeface="Times New Roman" panose="02020603050405020304" pitchFamily="18" charset="0"/>
-                <a:cs typeface="Times New Roman" panose="02020603050405020304" pitchFamily="18" charset="0"/>
-              </a:rPr>
-              <a:t>и драйвера TMC2209. Плата управляет двигателями (5), нагревателями (1, 2) и вентиляторами, а также получает сигналы с датчиков (6). </a:t>
-            </a:r>
-            <a:r>
-              <a:rPr lang="ru-RU" b="1" dirty="0" err="1">
-                <a:latin typeface="Times New Roman" panose="02020603050405020304" pitchFamily="18" charset="0"/>
-                <a:cs typeface="Times New Roman" panose="02020603050405020304" pitchFamily="18" charset="0"/>
-              </a:rPr>
-              <a:t>Raspberry</a:t>
-            </a:r>
-            <a:r>
-              <a:rPr lang="ru-RU" b="1" dirty="0">
-                <a:latin typeface="Times New Roman" panose="02020603050405020304" pitchFamily="18" charset="0"/>
-                <a:cs typeface="Times New Roman" panose="02020603050405020304" pitchFamily="18" charset="0"/>
-              </a:rPr>
-              <a:t> </a:t>
-            </a:r>
-            <a:r>
-              <a:rPr lang="ru-RU" b="1" dirty="0" err="1">
-                <a:latin typeface="Times New Roman" panose="02020603050405020304" pitchFamily="18" charset="0"/>
-                <a:cs typeface="Times New Roman" panose="02020603050405020304" pitchFamily="18" charset="0"/>
-              </a:rPr>
-              <a:t>Pi</a:t>
-            </a:r>
-            <a:r>
-              <a:rPr lang="ru-RU" b="1" dirty="0">
-                <a:latin typeface="Times New Roman" panose="02020603050405020304" pitchFamily="18" charset="0"/>
-                <a:cs typeface="Times New Roman" panose="02020603050405020304" pitchFamily="18" charset="0"/>
-              </a:rPr>
-              <a:t> 3B (10) </a:t>
-            </a:r>
-            <a:r>
-              <a:rPr lang="ru-RU" dirty="0">
-                <a:latin typeface="Times New Roman" panose="02020603050405020304" pitchFamily="18" charset="0"/>
-                <a:cs typeface="Times New Roman" panose="02020603050405020304" pitchFamily="18" charset="0"/>
-              </a:rPr>
-              <a:t>обеспечивает подключение камеры (9), сенсорного экрана (8) и обменивается данными с управляющей платой по UART. Блок питания (3) обеспечивает силовые узлы напряжением </a:t>
-            </a:r>
-            <a:r>
-              <a:rPr lang="ru-RU" b="1" dirty="0">
-                <a:latin typeface="Times New Roman" panose="02020603050405020304" pitchFamily="18" charset="0"/>
-                <a:cs typeface="Times New Roman" panose="02020603050405020304" pitchFamily="18" charset="0"/>
-              </a:rPr>
-              <a:t>24 В</a:t>
-            </a:r>
-            <a:r>
-              <a:rPr lang="ru-RU" dirty="0">
-                <a:latin typeface="Times New Roman" panose="02020603050405020304" pitchFamily="18" charset="0"/>
-                <a:cs typeface="Times New Roman" panose="02020603050405020304" pitchFamily="18" charset="0"/>
-              </a:rPr>
-              <a:t>, а DC-DC-преобразователь (4) понижает его до </a:t>
-            </a:r>
-            <a:r>
-              <a:rPr lang="ru-RU" b="1" dirty="0">
-                <a:latin typeface="Times New Roman" panose="02020603050405020304" pitchFamily="18" charset="0"/>
-                <a:cs typeface="Times New Roman" panose="02020603050405020304" pitchFamily="18" charset="0"/>
-              </a:rPr>
-              <a:t>5 В</a:t>
-            </a:r>
-            <a:r>
-              <a:rPr lang="ru-RU" dirty="0">
-                <a:latin typeface="Times New Roman" panose="02020603050405020304" pitchFamily="18" charset="0"/>
-                <a:cs typeface="Times New Roman" panose="02020603050405020304" pitchFamily="18" charset="0"/>
-              </a:rPr>
-              <a:t> для </a:t>
-            </a:r>
-            <a:r>
-              <a:rPr lang="ru-RU" dirty="0" err="1">
-                <a:latin typeface="Times New Roman" panose="02020603050405020304" pitchFamily="18" charset="0"/>
-                <a:cs typeface="Times New Roman" panose="02020603050405020304" pitchFamily="18" charset="0"/>
-              </a:rPr>
-              <a:t>Raspberry</a:t>
-            </a:r>
-            <a:r>
-              <a:rPr lang="ru-RU" dirty="0">
-                <a:latin typeface="Times New Roman" panose="02020603050405020304" pitchFamily="18" charset="0"/>
-                <a:cs typeface="Times New Roman" panose="02020603050405020304" pitchFamily="18" charset="0"/>
-              </a:rPr>
-              <a:t> </a:t>
-            </a:r>
-            <a:r>
-              <a:rPr lang="ru-RU" dirty="0" err="1">
-                <a:latin typeface="Times New Roman" panose="02020603050405020304" pitchFamily="18" charset="0"/>
-                <a:cs typeface="Times New Roman" panose="02020603050405020304" pitchFamily="18" charset="0"/>
-              </a:rPr>
-              <a:t>Pi</a:t>
-            </a:r>
-            <a:r>
-              <a:rPr lang="ru-RU" dirty="0">
-                <a:latin typeface="Times New Roman" panose="02020603050405020304" pitchFamily="18" charset="0"/>
-                <a:cs typeface="Times New Roman" panose="02020603050405020304" pitchFamily="18" charset="0"/>
-              </a:rPr>
-              <a:t> и подключённой периферии.</a:t>
-            </a:r>
-          </a:p>
-        </p:txBody>
-      </p:sp>
-      <p:sp>
-        <p:nvSpPr>
-          <p:cNvPr id="16" name="TextBox 26">
-            <a:extLst>
-              <a:ext uri="{FF2B5EF4-FFF2-40B4-BE49-F238E27FC236}">
-                <a16:creationId xmlns:a16="http://schemas.microsoft.com/office/drawing/2014/main" id="{6C4BDD25-6E44-8F04-93A8-3BDF96080B11}"/>
-              </a:ext>
-            </a:extLst>
-          </p:cNvPr>
-          <p:cNvSpPr>
-            <a:spLocks noGrp="1"/>
-          </p:cNvSpPr>
-          <p:nvPr/>
-        </p:nvSpPr>
-        <p:spPr>
-          <a:xfrm>
-            <a:off x="1313146" y="4181848"/>
-            <a:ext cx="6517706" cy="579120"/>
-          </a:xfrm>
-          <a:prstGeom prst="rect">
-            <a:avLst/>
-          </a:prstGeom>
-          <a:noFill/>
-        </p:spPr>
-        <p:txBody>
-          <a:bodyPr rot="0" spcFirstLastPara="0" vert="horz" wrap="square" lIns="91440" tIns="45720" rIns="91440" bIns="45720" anchor="ctr">
-            <a:noAutofit/>
-          </a:bodyPr>
-          <a:lstStyle>
-            <a:defPPr algn="l">
-              <a:defRPr sz="1600" b="0">
-                <a:solidFill>
-                  <a:srgbClr val="000000"/>
-                </a:solidFill>
-                <a:latin typeface="Times New Roman"/>
-                <a:ea typeface="Times New Roman"/>
-                <a:cs typeface="Times New Roman"/>
-              </a:defRPr>
-            </a:defPPr>
-          </a:lstStyle>
-          <a:p>
-            <a:pPr algn="ctr">
-              <a:defRPr sz="1600" b="0">
-                <a:solidFill>
-                  <a:srgbClr val="000000"/>
-                </a:solidFill>
-                <a:latin typeface="Times New Roman"/>
-                <a:ea typeface="Times New Roman"/>
-                <a:cs typeface="Times New Roman"/>
-              </a:defRPr>
-            </a:pPr>
-            <a:r>
-              <a:rPr lang="ru-RU" sz="1600" b="0" dirty="0">
-                <a:solidFill>
-                  <a:srgbClr val="000000"/>
-                </a:solidFill>
-                <a:latin typeface="Times New Roman"/>
-                <a:ea typeface="Times New Roman"/>
-                <a:cs typeface="Times New Roman"/>
-              </a:rPr>
-              <a:t>Рис. </a:t>
-            </a:r>
-            <a:r>
-              <a:rPr lang="ru-RU" sz="1600" dirty="0">
-                <a:solidFill>
-                  <a:srgbClr val="000000"/>
-                </a:solidFill>
-                <a:latin typeface="Times New Roman"/>
-                <a:ea typeface="Times New Roman"/>
-                <a:cs typeface="Times New Roman"/>
-              </a:rPr>
-              <a:t>8</a:t>
-            </a:r>
-            <a:r>
-              <a:rPr lang="ru-RU" sz="1600" b="0" dirty="0">
-                <a:solidFill>
-                  <a:srgbClr val="000000"/>
-                </a:solidFill>
-                <a:latin typeface="Times New Roman"/>
-                <a:ea typeface="Times New Roman"/>
-                <a:cs typeface="Times New Roman"/>
-              </a:rPr>
-              <a:t> – Схема электрической коммутации компонентов 3D-принтера </a:t>
-            </a:r>
-          </a:p>
-        </p:txBody>
-      </p:sp>
-    </p:spTree>
-    <p:extLst>
-      <p:ext uri="{BB962C8B-B14F-4D97-AF65-F5344CB8AC3E}">
-        <p14:creationId xmlns:p14="http://schemas.microsoft.com/office/powerpoint/2010/main" val="128376505"/>
-      </p:ext>
-    </p:extLst>
-  </p:cSld>
-  <p:clrMapOvr>
-    <a:masterClrMapping/>
-  </p:clrMapOvr>
-</p:sld>
-</file>
-
-<file path=ppt/slides/slide9.xml><?xml version="1.0" encoding="utf-8"?>
-<p:sld xmlns:a="http://schemas.openxmlformats.org/drawingml/2006/main" xmlns:r="http://schemas.openxmlformats.org/officeDocument/2006/relationships" xmlns:p="http://schemas.openxmlformats.org/presentationml/2006/main">
-  <p:cSld>
-    <p:spTree>
-      <p:nvGrpSpPr>
-        <p:cNvPr id="1" name="">
-          <a:extLst>
-            <a:ext uri="{FF2B5EF4-FFF2-40B4-BE49-F238E27FC236}">
-              <a16:creationId xmlns:a16="http://schemas.microsoft.com/office/drawing/2014/main" id="{829A4193-2A96-4292-27DF-7C8F10ED51F0}"/>
-            </a:ext>
-          </a:extLst>
-        </p:cNvPr>
-        <p:cNvGrpSpPr/>
-        <p:nvPr/>
-      </p:nvGrpSpPr>
-      <p:grpSpPr>
-        <a:xfrm>
-          <a:off x="0" y="0"/>
-          <a:ext cx="0" cy="0"/>
-          <a:chOff x="0" y="0"/>
-          <a:chExt cx="0" cy="0"/>
-        </a:xfrm>
-      </p:grpSpPr>
-      <p:sp>
-        <p:nvSpPr>
-          <p:cNvPr id="2" name="Заголовок 1">
-            <a:extLst>
-              <a:ext uri="{FF2B5EF4-FFF2-40B4-BE49-F238E27FC236}">
-                <a16:creationId xmlns:a16="http://schemas.microsoft.com/office/drawing/2014/main" id="{F71B51DD-8424-3898-F322-045B44C926E8}"/>
-              </a:ext>
-            </a:extLst>
-          </p:cNvPr>
-          <p:cNvSpPr>
-            <a:spLocks noGrp="1"/>
-          </p:cNvSpPr>
-          <p:nvPr>
-            <p:ph type="title"/>
-          </p:nvPr>
-        </p:nvSpPr>
-        <p:spPr>
-          <a:xfrm>
-            <a:off x="628650" y="-64546"/>
-            <a:ext cx="7886700" cy="712868"/>
-          </a:xfrm>
-        </p:spPr>
-        <p:txBody>
-          <a:bodyPr>
-            <a:normAutofit fontScale="90000"/>
-          </a:bodyPr>
-          <a:lstStyle/>
-          <a:p>
-            <a:pPr algn="ctr"/>
-            <a:r>
-              <a:rPr lang="ru-RU" dirty="0">
-                <a:latin typeface="Times New Roman"/>
-                <a:ea typeface="Calibri"/>
-                <a:cs typeface="Times New Roman"/>
-              </a:rPr>
-              <a:t>Тестирование на реальной печати</a:t>
-            </a:r>
-          </a:p>
-        </p:txBody>
-      </p:sp>
-      <p:sp>
-        <p:nvSpPr>
-          <p:cNvPr id="4" name="Текстовое поле 3">
-            <a:extLst>
-              <a:ext uri="{FF2B5EF4-FFF2-40B4-BE49-F238E27FC236}">
-                <a16:creationId xmlns:a16="http://schemas.microsoft.com/office/drawing/2014/main" id="{5E8559DA-50BE-07AC-B0EB-3414FBFB6481}"/>
-              </a:ext>
-            </a:extLst>
-          </p:cNvPr>
-          <p:cNvSpPr txBox="1"/>
-          <p:nvPr/>
-        </p:nvSpPr>
-        <p:spPr>
-          <a:xfrm>
-            <a:off x="3775710" y="5640705"/>
-            <a:ext cx="309880" cy="368300"/>
-          </a:xfrm>
-          <a:prstGeom prst="rect">
-            <a:avLst/>
-          </a:prstGeom>
-          <a:noFill/>
-        </p:spPr>
-        <p:txBody>
-          <a:bodyPr wrap="none" rtlCol="0">
-            <a:spAutoFit/>
-          </a:bodyPr>
-          <a:lstStyle/>
-          <a:p>
-            <a:endParaRPr lang="ru-RU" altLang="en-US"/>
-          </a:p>
-        </p:txBody>
-      </p:sp>
-      <p:sp>
-        <p:nvSpPr>
-          <p:cNvPr id="5" name="Замещающий номер слайда 4">
-            <a:extLst>
-              <a:ext uri="{FF2B5EF4-FFF2-40B4-BE49-F238E27FC236}">
-                <a16:creationId xmlns:a16="http://schemas.microsoft.com/office/drawing/2014/main" id="{28EFF76E-32CA-AB56-A1FE-FC86064D66B4}"/>
-              </a:ext>
-            </a:extLst>
-          </p:cNvPr>
-          <p:cNvSpPr>
-            <a:spLocks noGrp="1"/>
-          </p:cNvSpPr>
-          <p:nvPr>
-            <p:ph type="sldNum" sz="quarter" idx="12"/>
-          </p:nvPr>
-        </p:nvSpPr>
-        <p:spPr>
-          <a:xfrm>
-            <a:off x="7088886" y="6493511"/>
-            <a:ext cx="2057400" cy="365125"/>
-          </a:xfrm>
-        </p:spPr>
-        <p:txBody>
-          <a:bodyPr/>
-          <a:lstStyle/>
-          <a:p>
-            <a:fld id="{D6ED8A53-8D2F-4011-BE06-EDB0774336BA}" type="slidenum">
-              <a:rPr lang="ru-RU" sz="2000" dirty="0" smtClean="0">
-                <a:solidFill>
-                  <a:schemeClr val="tx1"/>
-                </a:solidFill>
-                <a:latin typeface="Times New Roman"/>
-                <a:cs typeface="Times New Roman"/>
-              </a:rPr>
-              <a:t>9</a:t>
+              <a:t>10</a:t>
             </a:fld>
             <a:endParaRPr lang="ru-RU" sz="2000">
               <a:solidFill>
@@ -10420,6 +6329,4890 @@
     <p:extLst>
       <p:ext uri="{BB962C8B-B14F-4D97-AF65-F5344CB8AC3E}">
         <p14:creationId xmlns:p14="http://schemas.microsoft.com/office/powerpoint/2010/main" val="3237985341"/>
+      </p:ext>
+    </p:extLst>
+  </p:cSld>
+  <p:clrMapOvr>
+    <a:masterClrMapping/>
+  </p:clrMapOvr>
+</p:sld>
+</file>
+
+<file path=ppt/slides/slide11.xml><?xml version="1.0" encoding="utf-8"?>
+<p:sld xmlns:a="http://schemas.openxmlformats.org/drawingml/2006/main" xmlns:r="http://schemas.openxmlformats.org/officeDocument/2006/relationships" xmlns:p="http://schemas.openxmlformats.org/presentationml/2006/main">
+  <p:cSld>
+    <p:spTree>
+      <p:nvGrpSpPr>
+        <p:cNvPr id="1" name=""/>
+        <p:cNvGrpSpPr/>
+        <p:nvPr/>
+      </p:nvGrpSpPr>
+      <p:grpSpPr>
+        <a:xfrm>
+          <a:off x="0" y="0"/>
+          <a:ext cx="0" cy="0"/>
+          <a:chOff x="0" y="0"/>
+          <a:chExt cx="0" cy="0"/>
+        </a:xfrm>
+      </p:grpSpPr>
+      <p:sp>
+        <p:nvSpPr>
+          <p:cNvPr id="3" name="Объект 2"/>
+          <p:cNvSpPr>
+            <a:spLocks noGrp="1"/>
+          </p:cNvSpPr>
+          <p:nvPr>
+            <p:ph idx="1"/>
+          </p:nvPr>
+        </p:nvSpPr>
+        <p:spPr>
+          <a:xfrm>
+            <a:off x="200634" y="1034005"/>
+            <a:ext cx="8736990" cy="5827551"/>
+          </a:xfrm>
+        </p:spPr>
+        <p:txBody>
+          <a:bodyPr vert="horz" lIns="91440" tIns="45720" rIns="91440" bIns="45720" rtlCol="0" anchor="ctr">
+            <a:noAutofit/>
+          </a:bodyPr>
+          <a:lstStyle/>
+          <a:p>
+            <a:pPr marL="0" indent="0">
+              <a:lnSpc>
+                <a:spcPct val="100000"/>
+              </a:lnSpc>
+              <a:buNone/>
+            </a:pPr>
+            <a:r>
+              <a:rPr lang="ru-RU" sz="2000" dirty="0">
+                <a:latin typeface="Times New Roman" panose="02020603050405020304" pitchFamily="18" charset="0"/>
+                <a:cs typeface="Times New Roman" panose="02020603050405020304" pitchFamily="18" charset="0"/>
+              </a:rPr>
+              <a:t>	Цель и задачи моей научно-исследовательской работы выполнены:</a:t>
+            </a:r>
+            <a:endParaRPr lang="ru-RU" sz="2000" dirty="0">
+              <a:latin typeface="Times New Roman" panose="02020603050405020304" pitchFamily="18" charset="0"/>
+              <a:ea typeface="Calibri"/>
+              <a:cs typeface="Times New Roman" panose="02020603050405020304" pitchFamily="18" charset="0"/>
+            </a:endParaRPr>
+          </a:p>
+          <a:p>
+            <a:pPr>
+              <a:lnSpc>
+                <a:spcPct val="100000"/>
+              </a:lnSpc>
+            </a:pPr>
+            <a:r>
+              <a:rPr lang="ru-RU" sz="2000" dirty="0">
+                <a:solidFill>
+                  <a:srgbClr val="000000"/>
+                </a:solidFill>
+                <a:latin typeface="Times New Roman" panose="02020603050405020304" pitchFamily="18" charset="0"/>
+                <a:cs typeface="Times New Roman" panose="02020603050405020304" pitchFamily="18" charset="0"/>
+              </a:rPr>
+              <a:t>Изучены дефекты FDM-печати и выбран целевого дефекта для автоматического обнаружения.</a:t>
+            </a:r>
+          </a:p>
+          <a:p>
+            <a:pPr>
+              <a:lnSpc>
+                <a:spcPct val="100000"/>
+              </a:lnSpc>
+            </a:pPr>
+            <a:r>
+              <a:rPr lang="ru-RU" sz="2000" dirty="0">
+                <a:solidFill>
+                  <a:srgbClr val="000000"/>
+                </a:solidFill>
+                <a:latin typeface="Times New Roman" panose="02020603050405020304" pitchFamily="18" charset="0"/>
+                <a:cs typeface="Times New Roman" panose="02020603050405020304" pitchFamily="18" charset="0"/>
+              </a:rPr>
+              <a:t>Сформирован датасет: произведен поиск данных, балансировка классов, </a:t>
+            </a:r>
+            <a:r>
+              <a:rPr lang="ru-RU" sz="2000" dirty="0" err="1">
+                <a:solidFill>
+                  <a:srgbClr val="000000"/>
+                </a:solidFill>
+                <a:latin typeface="Times New Roman" panose="02020603050405020304" pitchFamily="18" charset="0"/>
+                <a:cs typeface="Times New Roman" panose="02020603050405020304" pitchFamily="18" charset="0"/>
+              </a:rPr>
+              <a:t>аугментирование</a:t>
+            </a:r>
+            <a:r>
+              <a:rPr lang="ru-RU" sz="2000" dirty="0">
+                <a:solidFill>
+                  <a:srgbClr val="000000"/>
+                </a:solidFill>
+                <a:latin typeface="Times New Roman" panose="02020603050405020304" pitchFamily="18" charset="0"/>
+                <a:cs typeface="Times New Roman" panose="02020603050405020304" pitchFamily="18" charset="0"/>
+              </a:rPr>
+              <a:t>, разделение на обучающую и тестовую выборки; </a:t>
+            </a:r>
+          </a:p>
+          <a:p>
+            <a:pPr marL="214630" indent="-214630">
+              <a:lnSpc>
+                <a:spcPct val="100000"/>
+              </a:lnSpc>
+              <a:spcBef>
+                <a:spcPts val="0"/>
+              </a:spcBef>
+              <a:buFont typeface="Arial,Sans-Serif" panose="020B0604020202020204" pitchFamily="34" charset="0"/>
+            </a:pPr>
+            <a:r>
+              <a:rPr lang="ru-RU" sz="2000" dirty="0">
+                <a:latin typeface="Times New Roman" panose="02020603050405020304" pitchFamily="18" charset="0"/>
+                <a:ea typeface="Calibri"/>
+                <a:cs typeface="Times New Roman" panose="02020603050405020304" pitchFamily="18" charset="0"/>
+              </a:rPr>
+              <a:t>Обучена нейронная сеть для распознавания дефекта «Спагетти» на основе изображений печатей; </a:t>
+            </a:r>
+            <a:endParaRPr lang="en-US" sz="2000" dirty="0">
+              <a:latin typeface="Times New Roman" panose="02020603050405020304" pitchFamily="18" charset="0"/>
+              <a:ea typeface="Calibri"/>
+              <a:cs typeface="Times New Roman" panose="02020603050405020304" pitchFamily="18" charset="0"/>
+            </a:endParaRPr>
+          </a:p>
+          <a:p>
+            <a:pPr>
+              <a:lnSpc>
+                <a:spcPct val="100000"/>
+              </a:lnSpc>
+            </a:pPr>
+            <a:r>
+              <a:rPr lang="ru-RU" sz="2000" dirty="0">
+                <a:latin typeface="Times New Roman" panose="02020603050405020304" pitchFamily="18" charset="0"/>
+                <a:ea typeface="Calibri"/>
+                <a:cs typeface="Times New Roman" panose="02020603050405020304" pitchFamily="18" charset="0"/>
+              </a:rPr>
+              <a:t>Разработан, собран и отлажен аппаратно-программный комплекса экспериментального 3D-принтера.</a:t>
+            </a:r>
+            <a:endParaRPr lang="ru-RU" sz="2000" dirty="0">
+              <a:solidFill>
+                <a:srgbClr val="000000"/>
+              </a:solidFill>
+              <a:latin typeface="Times New Roman" panose="02020603050405020304" pitchFamily="18" charset="0"/>
+              <a:cs typeface="Times New Roman" panose="02020603050405020304" pitchFamily="18" charset="0"/>
+            </a:endParaRPr>
+          </a:p>
+          <a:p>
+            <a:pPr>
+              <a:lnSpc>
+                <a:spcPct val="100000"/>
+              </a:lnSpc>
+            </a:pPr>
+            <a:r>
+              <a:rPr lang="ru-RU" sz="2000" dirty="0">
+                <a:latin typeface="Times New Roman" panose="02020603050405020304" pitchFamily="18" charset="0"/>
+                <a:cs typeface="Times New Roman" panose="02020603050405020304" pitchFamily="18" charset="0"/>
+              </a:rPr>
+              <a:t>Проведен тестовый запуск работы системы контроля и 3D-принтера в процессе печати.</a:t>
+            </a:r>
+          </a:p>
+          <a:p>
+            <a:pPr>
+              <a:lnSpc>
+                <a:spcPct val="100000"/>
+              </a:lnSpc>
+            </a:pPr>
+            <a:endParaRPr lang="ru-RU" sz="2000" dirty="0">
+              <a:latin typeface="Times New Roman" panose="02020603050405020304" pitchFamily="18" charset="0"/>
+              <a:cs typeface="Times New Roman" panose="02020603050405020304" pitchFamily="18" charset="0"/>
+            </a:endParaRPr>
+          </a:p>
+          <a:p>
+            <a:pPr marL="0" indent="0">
+              <a:lnSpc>
+                <a:spcPct val="100000"/>
+              </a:lnSpc>
+              <a:buNone/>
+            </a:pPr>
+            <a:r>
+              <a:rPr lang="ru-RU" sz="2000" dirty="0">
+                <a:latin typeface="Times New Roman" panose="02020603050405020304" pitchFamily="18" charset="0"/>
+                <a:cs typeface="Times New Roman" panose="02020603050405020304" pitchFamily="18" charset="0"/>
+              </a:rPr>
+              <a:t>	Цель и задачи моей научно-исследовательской работы выполнены:</a:t>
+            </a:r>
+            <a:endParaRPr lang="ru-RU" sz="2000" dirty="0">
+              <a:latin typeface="Times New Roman" panose="02020603050405020304" pitchFamily="18" charset="0"/>
+              <a:ea typeface="Calibri"/>
+              <a:cs typeface="Times New Roman" panose="02020603050405020304" pitchFamily="18" charset="0"/>
+            </a:endParaRPr>
+          </a:p>
+          <a:p>
+            <a:pPr>
+              <a:lnSpc>
+                <a:spcPct val="100000"/>
+              </a:lnSpc>
+            </a:pPr>
+            <a:endParaRPr lang="ru-RU" sz="2000" dirty="0">
+              <a:latin typeface="Times New Roman" panose="02020603050405020304" pitchFamily="18" charset="0"/>
+              <a:cs typeface="Times New Roman" panose="02020603050405020304" pitchFamily="18" charset="0"/>
+            </a:endParaRPr>
+          </a:p>
+          <a:p>
+            <a:pPr>
+              <a:lnSpc>
+                <a:spcPct val="100000"/>
+              </a:lnSpc>
+            </a:pPr>
+            <a:endParaRPr lang="ru-RU" sz="2000" dirty="0">
+              <a:latin typeface="Times New Roman" panose="02020603050405020304" pitchFamily="18" charset="0"/>
+              <a:cs typeface="Times New Roman" panose="02020603050405020304" pitchFamily="18" charset="0"/>
+            </a:endParaRPr>
+          </a:p>
+          <a:p>
+            <a:pPr>
+              <a:lnSpc>
+                <a:spcPct val="100000"/>
+              </a:lnSpc>
+            </a:pPr>
+            <a:endParaRPr lang="ru-RU" sz="2000" dirty="0">
+              <a:latin typeface="Times New Roman" panose="02020603050405020304" pitchFamily="18" charset="0"/>
+              <a:ea typeface="Calibri"/>
+              <a:cs typeface="Times New Roman" panose="02020603050405020304" pitchFamily="18" charset="0"/>
+            </a:endParaRPr>
+          </a:p>
+        </p:txBody>
+      </p:sp>
+      <p:sp>
+        <p:nvSpPr>
+          <p:cNvPr id="4" name="Замещающий номер слайда 3"/>
+          <p:cNvSpPr>
+            <a:spLocks noGrp="1"/>
+          </p:cNvSpPr>
+          <p:nvPr>
+            <p:ph type="sldNum" sz="quarter" idx="12"/>
+          </p:nvPr>
+        </p:nvSpPr>
+        <p:spPr>
+          <a:xfrm>
+            <a:off x="7088886" y="6493511"/>
+            <a:ext cx="2057400" cy="365125"/>
+          </a:xfrm>
+        </p:spPr>
+        <p:txBody>
+          <a:bodyPr/>
+          <a:lstStyle/>
+          <a:p>
+            <a:fld id="{D6ED8A53-8D2F-4011-BE06-EDB0774336BA}" type="slidenum">
+              <a:rPr lang="ru-RU" sz="2000" dirty="0" smtClean="0">
+                <a:solidFill>
+                  <a:schemeClr val="tx1"/>
+                </a:solidFill>
+                <a:latin typeface="Times New Roman"/>
+                <a:cs typeface="Times New Roman"/>
+              </a:rPr>
+              <a:t>11</a:t>
+            </a:fld>
+            <a:endParaRPr lang="ru-RU" sz="2000">
+              <a:solidFill>
+                <a:schemeClr val="tx1"/>
+              </a:solidFill>
+              <a:latin typeface="Times New Roman"/>
+              <a:cs typeface="Times New Roman"/>
+            </a:endParaRPr>
+          </a:p>
+        </p:txBody>
+      </p:sp>
+      <p:sp>
+        <p:nvSpPr>
+          <p:cNvPr id="6" name="Заголовок 1">
+            <a:extLst>
+              <a:ext uri="{FF2B5EF4-FFF2-40B4-BE49-F238E27FC236}">
+                <a16:creationId xmlns:a16="http://schemas.microsoft.com/office/drawing/2014/main" id="{A5D6DF51-0B62-79A6-6D5B-9EBEFC4103B7}"/>
+              </a:ext>
+            </a:extLst>
+          </p:cNvPr>
+          <p:cNvSpPr txBox="1">
+            <a:spLocks/>
+          </p:cNvSpPr>
+          <p:nvPr/>
+        </p:nvSpPr>
+        <p:spPr>
+          <a:xfrm>
+            <a:off x="701718" y="3637"/>
+            <a:ext cx="7886700" cy="712868"/>
+          </a:xfrm>
+          <a:prstGeom prst="rect">
+            <a:avLst/>
+          </a:prstGeom>
+        </p:spPr>
+        <p:txBody>
+          <a:bodyPr vert="horz" lIns="91440" tIns="45720" rIns="91440" bIns="45720" rtlCol="0" anchor="ctr">
+            <a:normAutofit/>
+          </a:bodyPr>
+          <a:lstStyle>
+            <a:lvl1pPr algn="l" defTabSz="914400" rtl="0" eaLnBrk="1" latinLnBrk="0" hangingPunct="1">
+              <a:lnSpc>
+                <a:spcPct val="90000"/>
+              </a:lnSpc>
+              <a:spcBef>
+                <a:spcPct val="0"/>
+              </a:spcBef>
+              <a:buNone/>
+              <a:defRPr sz="4400" kern="1200">
+                <a:solidFill>
+                  <a:schemeClr val="tx1"/>
+                </a:solidFill>
+                <a:latin typeface="+mj-lt"/>
+                <a:ea typeface="+mj-ea"/>
+                <a:cs typeface="+mj-cs"/>
+              </a:defRPr>
+            </a:lvl1pPr>
+          </a:lstStyle>
+          <a:p>
+            <a:pPr algn="ctr"/>
+            <a:r>
+              <a:rPr lang="ru-RU">
+                <a:latin typeface="Times New Roman"/>
+                <a:ea typeface="Calibri"/>
+                <a:cs typeface="Times New Roman"/>
+              </a:rPr>
+              <a:t>Заключение</a:t>
+            </a:r>
+            <a:endParaRPr lang="ru-RU">
+              <a:ea typeface="Calibri Light"/>
+              <a:cs typeface="Calibri Light"/>
+            </a:endParaRPr>
+          </a:p>
+        </p:txBody>
+      </p:sp>
+    </p:spTree>
+  </p:cSld>
+  <p:clrMapOvr>
+    <a:masterClrMapping/>
+  </p:clrMapOvr>
+</p:sld>
+</file>
+
+<file path=ppt/slides/slide2.xml><?xml version="1.0" encoding="utf-8"?>
+<p:sld xmlns:a="http://schemas.openxmlformats.org/drawingml/2006/main" xmlns:r="http://schemas.openxmlformats.org/officeDocument/2006/relationships" xmlns:p="http://schemas.openxmlformats.org/presentationml/2006/main">
+  <p:cSld>
+    <p:spTree>
+      <p:nvGrpSpPr>
+        <p:cNvPr id="1" name=""/>
+        <p:cNvGrpSpPr/>
+        <p:nvPr/>
+      </p:nvGrpSpPr>
+      <p:grpSpPr>
+        <a:xfrm>
+          <a:off x="0" y="0"/>
+          <a:ext cx="0" cy="0"/>
+          <a:chOff x="0" y="0"/>
+          <a:chExt cx="0" cy="0"/>
+        </a:xfrm>
+      </p:grpSpPr>
+      <p:sp>
+        <p:nvSpPr>
+          <p:cNvPr id="2" name="Заголовок 1"/>
+          <p:cNvSpPr>
+            <a:spLocks noGrp="1"/>
+          </p:cNvSpPr>
+          <p:nvPr>
+            <p:ph type="title"/>
+          </p:nvPr>
+        </p:nvSpPr>
+        <p:spPr>
+          <a:xfrm>
+            <a:off x="633432" y="-5479"/>
+            <a:ext cx="7877136" cy="758162"/>
+          </a:xfrm>
+        </p:spPr>
+        <p:txBody>
+          <a:bodyPr>
+            <a:normAutofit/>
+          </a:bodyPr>
+          <a:lstStyle/>
+          <a:p>
+            <a:pPr algn="ctr"/>
+            <a:r>
+              <a:rPr lang="ru-RU" sz="3600" b="1" dirty="0">
+                <a:latin typeface="Times New Roman" panose="02020603050405020304" pitchFamily="18" charset="0"/>
+                <a:cs typeface="Times New Roman" panose="02020603050405020304" pitchFamily="18" charset="0"/>
+              </a:rPr>
+              <a:t>Цель работы</a:t>
+            </a:r>
+            <a:endParaRPr lang="ru-RU" dirty="0">
+              <a:latin typeface="Times New Roman" panose="02020603050405020304" pitchFamily="18" charset="0"/>
+              <a:cs typeface="Times New Roman" panose="02020603050405020304" pitchFamily="18" charset="0"/>
+            </a:endParaRPr>
+          </a:p>
+        </p:txBody>
+      </p:sp>
+      <p:sp>
+        <p:nvSpPr>
+          <p:cNvPr id="3" name="Объект 2"/>
+          <p:cNvSpPr>
+            <a:spLocks noGrp="1"/>
+          </p:cNvSpPr>
+          <p:nvPr>
+            <p:ph idx="1"/>
+          </p:nvPr>
+        </p:nvSpPr>
+        <p:spPr>
+          <a:xfrm>
+            <a:off x="625440" y="752683"/>
+            <a:ext cx="7885128" cy="1170901"/>
+          </a:xfrm>
+        </p:spPr>
+        <p:txBody>
+          <a:bodyPr vert="horz" lIns="91440" tIns="45720" rIns="91440" bIns="45720" rtlCol="0" anchor="t">
+            <a:noAutofit/>
+          </a:bodyPr>
+          <a:lstStyle/>
+          <a:p>
+            <a:pPr marL="0" indent="0" algn="just">
+              <a:buNone/>
+            </a:pPr>
+            <a:r>
+              <a:rPr lang="ru-RU" sz="2400" dirty="0">
+                <a:latin typeface="Times New Roman" panose="02020603050405020304" pitchFamily="18" charset="0"/>
+                <a:cs typeface="Times New Roman" panose="02020603050405020304" pitchFamily="18" charset="0"/>
+              </a:rPr>
+              <a:t>Цель работы — разработка и тестирование версии 3D-принтера с системой обнаружения дефектов в процессе печати и механизмом своевременного реагирования.</a:t>
+            </a:r>
+            <a:endParaRPr lang="ru-RU" dirty="0">
+              <a:latin typeface="Times New Roman" panose="02020603050405020304" pitchFamily="18" charset="0"/>
+              <a:cs typeface="Times New Roman" panose="02020603050405020304" pitchFamily="18" charset="0"/>
+            </a:endParaRPr>
+          </a:p>
+        </p:txBody>
+      </p:sp>
+      <p:sp>
+        <p:nvSpPr>
+          <p:cNvPr id="4" name="TextBox 3"/>
+          <p:cNvSpPr txBox="1"/>
+          <p:nvPr/>
+        </p:nvSpPr>
+        <p:spPr>
+          <a:xfrm>
+            <a:off x="644087" y="1960801"/>
+            <a:ext cx="7878196" cy="646331"/>
+          </a:xfrm>
+          <a:prstGeom prst="rect">
+            <a:avLst/>
+          </a:prstGeom>
+          <a:noFill/>
+        </p:spPr>
+        <p:txBody>
+          <a:bodyPr wrap="square" lIns="91440" tIns="45720" rIns="91440" bIns="45720" rtlCol="0" anchor="t">
+            <a:spAutoFit/>
+          </a:bodyPr>
+          <a:lstStyle/>
+          <a:p>
+            <a:pPr algn="ctr"/>
+            <a:r>
+              <a:rPr lang="ru-RU" sz="3600" b="1" dirty="0">
+                <a:latin typeface="Times New Roman" panose="02020603050405020304" pitchFamily="18" charset="0"/>
+                <a:cs typeface="Times New Roman" panose="02020603050405020304" pitchFamily="18" charset="0"/>
+              </a:rPr>
+              <a:t>Основные задачи работы</a:t>
+            </a:r>
+          </a:p>
+        </p:txBody>
+      </p:sp>
+      <p:sp>
+        <p:nvSpPr>
+          <p:cNvPr id="5" name="TextBox 4"/>
+          <p:cNvSpPr txBox="1"/>
+          <p:nvPr/>
+        </p:nvSpPr>
+        <p:spPr>
+          <a:xfrm>
+            <a:off x="544994" y="2607132"/>
+            <a:ext cx="8069450" cy="4154984"/>
+          </a:xfrm>
+          <a:prstGeom prst="rect">
+            <a:avLst/>
+          </a:prstGeom>
+          <a:noFill/>
+        </p:spPr>
+        <p:txBody>
+          <a:bodyPr wrap="square" lIns="91440" tIns="45720" rIns="91440" bIns="45720" rtlCol="0" anchor="t">
+            <a:spAutoFit/>
+          </a:bodyPr>
+          <a:lstStyle/>
+          <a:p>
+            <a:pPr marL="214630" indent="-214630" algn="just">
+              <a:buFont typeface="Arial" panose="020B0604020202020204" pitchFamily="34" charset="0"/>
+              <a:buChar char="•"/>
+            </a:pPr>
+            <a:r>
+              <a:rPr lang="ru-RU" sz="2400" dirty="0">
+                <a:latin typeface="Times New Roman" panose="02020603050405020304" pitchFamily="18" charset="0"/>
+                <a:cs typeface="Times New Roman" panose="02020603050405020304" pitchFamily="18" charset="0"/>
+              </a:rPr>
+              <a:t>Изучение дефектов FDM-печати и выбор целевого дефекта для автоматического обнаружения.</a:t>
+            </a:r>
+          </a:p>
+          <a:p>
+            <a:pPr marL="214630" indent="-214630" algn="just">
+              <a:buFont typeface="Arial" panose="020B0604020202020204" pitchFamily="34" charset="0"/>
+              <a:buChar char="•"/>
+            </a:pPr>
+            <a:r>
+              <a:rPr lang="ru-RU" sz="2400" dirty="0">
+                <a:latin typeface="Times New Roman" panose="02020603050405020304" pitchFamily="18" charset="0"/>
+                <a:cs typeface="Times New Roman" panose="02020603050405020304" pitchFamily="18" charset="0"/>
+              </a:rPr>
+              <a:t>Проектирование, сборка и отладка аппаратно-программного комплекса экспериментального 3D-принтера.</a:t>
+            </a:r>
+          </a:p>
+          <a:p>
+            <a:pPr marL="214630" indent="-214630" algn="just">
+              <a:buFont typeface="Arial" panose="020B0604020202020204" pitchFamily="34" charset="0"/>
+              <a:buChar char="•"/>
+            </a:pPr>
+            <a:r>
+              <a:rPr lang="ru-RU" sz="2400" dirty="0">
+                <a:latin typeface="Times New Roman" panose="02020603050405020304" pitchFamily="18" charset="0"/>
+                <a:cs typeface="Times New Roman" panose="02020603050405020304" pitchFamily="18" charset="0"/>
+              </a:rPr>
+              <a:t>Сбор и подготовка данных для обучения нейросети и обучение модели обнаружения целевого дефекта.</a:t>
+            </a:r>
+          </a:p>
+          <a:p>
+            <a:pPr marL="214630" indent="-214630" algn="just">
+              <a:buFont typeface="Arial" panose="020B0604020202020204" pitchFamily="34" charset="0"/>
+              <a:buChar char="•"/>
+            </a:pPr>
+            <a:r>
+              <a:rPr lang="ru-RU" sz="2400" dirty="0">
+                <a:latin typeface="Times New Roman" panose="02020603050405020304" pitchFamily="18" charset="0"/>
+                <a:cs typeface="Times New Roman" panose="02020603050405020304" pitchFamily="18" charset="0"/>
+              </a:rPr>
+              <a:t>Разработка внешней системы контроля печати с автоматическим обнаружением дефектов.</a:t>
+            </a:r>
+          </a:p>
+          <a:p>
+            <a:pPr marL="214630" indent="-214630" algn="just">
+              <a:buFont typeface="Arial" panose="020B0604020202020204" pitchFamily="34" charset="0"/>
+              <a:buChar char="•"/>
+            </a:pPr>
+            <a:r>
+              <a:rPr lang="ru-RU" sz="2400" dirty="0">
+                <a:latin typeface="Times New Roman" panose="02020603050405020304" pitchFamily="18" charset="0"/>
+                <a:cs typeface="Times New Roman" panose="02020603050405020304" pitchFamily="18" charset="0"/>
+              </a:rPr>
+              <a:t>Тестирование работы системы контроля и 3D-принтера в процессе печати.</a:t>
+            </a:r>
+          </a:p>
+        </p:txBody>
+      </p:sp>
+      <p:sp>
+        <p:nvSpPr>
+          <p:cNvPr id="6" name="Замещающий номер слайда 4">
+            <a:extLst>
+              <a:ext uri="{FF2B5EF4-FFF2-40B4-BE49-F238E27FC236}">
+                <a16:creationId xmlns:a16="http://schemas.microsoft.com/office/drawing/2014/main" id="{C78DB24C-FC20-2FE0-98E7-F598D1843687}"/>
+              </a:ext>
+            </a:extLst>
+          </p:cNvPr>
+          <p:cNvSpPr>
+            <a:spLocks noGrp="1"/>
+          </p:cNvSpPr>
+          <p:nvPr>
+            <p:ph type="sldNum" sz="quarter" idx="12"/>
+          </p:nvPr>
+        </p:nvSpPr>
+        <p:spPr>
+          <a:xfrm>
+            <a:off x="7088886" y="6493511"/>
+            <a:ext cx="2057400" cy="365125"/>
+          </a:xfrm>
+        </p:spPr>
+        <p:txBody>
+          <a:bodyPr/>
+          <a:lstStyle/>
+          <a:p>
+            <a:fld id="{D6ED8A53-8D2F-4011-BE06-EDB0774336BA}" type="slidenum">
+              <a:rPr lang="ru-RU" sz="2000" dirty="0" smtClean="0">
+                <a:solidFill>
+                  <a:schemeClr val="tx1"/>
+                </a:solidFill>
+                <a:latin typeface="Times New Roman" panose="02020603050405020304" pitchFamily="18" charset="0"/>
+                <a:cs typeface="Times New Roman" panose="02020603050405020304" pitchFamily="18" charset="0"/>
+              </a:rPr>
+              <a:t>2</a:t>
+            </a:fld>
+            <a:endParaRPr lang="ru-RU" sz="2000">
+              <a:solidFill>
+                <a:schemeClr val="tx1"/>
+              </a:solidFill>
+              <a:latin typeface="Times New Roman" panose="02020603050405020304" pitchFamily="18" charset="0"/>
+              <a:ea typeface="Calibri"/>
+              <a:cs typeface="Times New Roman" panose="02020603050405020304" pitchFamily="18" charset="0"/>
+            </a:endParaRPr>
+          </a:p>
+        </p:txBody>
+      </p:sp>
+    </p:spTree>
+  </p:cSld>
+  <p:clrMapOvr>
+    <a:masterClrMapping/>
+  </p:clrMapOvr>
+</p:sld>
+</file>
+
+<file path=ppt/slides/slide3.xml><?xml version="1.0" encoding="utf-8"?>
+<p:sld xmlns:a="http://schemas.openxmlformats.org/drawingml/2006/main" xmlns:r="http://schemas.openxmlformats.org/officeDocument/2006/relationships" xmlns:p="http://schemas.openxmlformats.org/presentationml/2006/main">
+  <p:cSld>
+    <p:spTree>
+      <p:nvGrpSpPr>
+        <p:cNvPr id="1" name=""/>
+        <p:cNvGrpSpPr/>
+        <p:nvPr/>
+      </p:nvGrpSpPr>
+      <p:grpSpPr>
+        <a:xfrm>
+          <a:off x="0" y="0"/>
+          <a:ext cx="0" cy="0"/>
+          <a:chOff x="0" y="0"/>
+          <a:chExt cx="0" cy="0"/>
+        </a:xfrm>
+      </p:grpSpPr>
+      <p:pic>
+        <p:nvPicPr>
+          <p:cNvPr id="19" name="Рисунок 18">
+            <a:extLst>
+              <a:ext uri="{FF2B5EF4-FFF2-40B4-BE49-F238E27FC236}">
+                <a16:creationId xmlns:a16="http://schemas.microsoft.com/office/drawing/2014/main" id="{99FE507C-2C48-A423-9756-13891072B78F}"/>
+              </a:ext>
+            </a:extLst>
+          </p:cNvPr>
+          <p:cNvPicPr>
+            <a:picLocks noChangeAspect="1"/>
+          </p:cNvPicPr>
+          <p:nvPr/>
+        </p:nvPicPr>
+        <p:blipFill>
+          <a:blip r:embed="rId3">
+            <a:extLst>
+              <a:ext uri="{28A0092B-C50C-407E-A947-70E740481C1C}">
+                <a14:useLocalDpi xmlns:a14="http://schemas.microsoft.com/office/drawing/2010/main" val="0"/>
+              </a:ext>
+            </a:extLst>
+          </a:blip>
+          <a:srcRect l="8733" t="13068" r="8466" b="3458"/>
+          <a:stretch/>
+        </p:blipFill>
+        <p:spPr>
+          <a:xfrm>
+            <a:off x="5021065" y="3247173"/>
+            <a:ext cx="3921040" cy="2555874"/>
+          </a:xfrm>
+          <a:prstGeom prst="rect">
+            <a:avLst/>
+          </a:prstGeom>
+        </p:spPr>
+      </p:pic>
+      <p:sp>
+        <p:nvSpPr>
+          <p:cNvPr id="2" name="Заголовок 1">
+            <a:extLst>
+              <a:ext uri="{FF2B5EF4-FFF2-40B4-BE49-F238E27FC236}">
+                <a16:creationId xmlns:a16="http://schemas.microsoft.com/office/drawing/2014/main" id="{49CC29E7-47AE-4C1B-A66A-06BAB8AB4DBE}"/>
+              </a:ext>
+            </a:extLst>
+          </p:cNvPr>
+          <p:cNvSpPr>
+            <a:spLocks noGrp="1"/>
+          </p:cNvSpPr>
+          <p:nvPr>
+            <p:ph type="title"/>
+          </p:nvPr>
+        </p:nvSpPr>
+        <p:spPr>
+          <a:xfrm>
+            <a:off x="628650" y="-116476"/>
+            <a:ext cx="7886700" cy="712868"/>
+          </a:xfrm>
+        </p:spPr>
+        <p:txBody>
+          <a:bodyPr wrap="square" lIns="91440" tIns="45720" rIns="91440" bIns="45720">
+            <a:noAutofit/>
+          </a:bodyPr>
+          <a:lstStyle>
+            <a:defPPr algn="ctr">
+              <a:defRPr sz="4400" b="0">
+                <a:solidFill>
+                  <a:srgbClr val="000000"/>
+                </a:solidFill>
+                <a:latin typeface="Times New Roman"/>
+                <a:ea typeface="Times New Roman"/>
+                <a:cs typeface="Times New Roman"/>
+              </a:defRPr>
+            </a:defPPr>
+          </a:lstStyle>
+          <a:p>
+            <a:pPr algn="ctr">
+              <a:buNone/>
+              <a:defRPr sz="4400" b="0">
+                <a:solidFill>
+                  <a:srgbClr val="000000"/>
+                </a:solidFill>
+                <a:latin typeface="Times New Roman"/>
+                <a:ea typeface="Times New Roman"/>
+                <a:cs typeface="Times New Roman"/>
+              </a:defRPr>
+            </a:pPr>
+            <a:r>
+              <a:rPr sz="4000" b="0" dirty="0">
+                <a:solidFill>
+                  <a:srgbClr val="000000"/>
+                </a:solidFill>
+                <a:latin typeface="Times New Roman"/>
+                <a:ea typeface="Times New Roman"/>
+                <a:cs typeface="Times New Roman"/>
+              </a:rPr>
+              <a:t>В </a:t>
+            </a:r>
+            <a:r>
+              <a:rPr sz="4000" b="0" dirty="0" err="1">
+                <a:solidFill>
+                  <a:srgbClr val="000000"/>
+                </a:solidFill>
+                <a:latin typeface="Times New Roman"/>
+                <a:ea typeface="Times New Roman"/>
+                <a:cs typeface="Times New Roman"/>
+              </a:rPr>
+              <a:t>чем</a:t>
+            </a:r>
+            <a:r>
+              <a:rPr sz="4000" b="0" dirty="0">
+                <a:solidFill>
+                  <a:srgbClr val="000000"/>
+                </a:solidFill>
+                <a:latin typeface="Times New Roman"/>
+                <a:ea typeface="Times New Roman"/>
+                <a:cs typeface="Times New Roman"/>
+              </a:rPr>
+              <a:t> </a:t>
+            </a:r>
+            <a:r>
+              <a:rPr sz="4000" b="0" dirty="0" err="1">
+                <a:solidFill>
+                  <a:srgbClr val="000000"/>
+                </a:solidFill>
+                <a:latin typeface="Times New Roman"/>
+                <a:ea typeface="Times New Roman"/>
+                <a:cs typeface="Times New Roman"/>
+              </a:rPr>
+              <a:t>заключается</a:t>
+            </a:r>
+            <a:r>
+              <a:rPr sz="4000" b="0" dirty="0">
+                <a:solidFill>
+                  <a:srgbClr val="000000"/>
+                </a:solidFill>
+                <a:latin typeface="Times New Roman"/>
+                <a:ea typeface="Times New Roman"/>
+                <a:cs typeface="Times New Roman"/>
+              </a:rPr>
+              <a:t> </a:t>
+            </a:r>
+            <a:r>
+              <a:rPr sz="4000" b="0" dirty="0" err="1">
+                <a:solidFill>
+                  <a:srgbClr val="000000"/>
+                </a:solidFill>
+                <a:latin typeface="Times New Roman"/>
+                <a:ea typeface="Times New Roman"/>
+                <a:cs typeface="Times New Roman"/>
+              </a:rPr>
+              <a:t>проблема</a:t>
+            </a:r>
+            <a:r>
+              <a:rPr sz="4000" b="0" dirty="0">
+                <a:solidFill>
+                  <a:srgbClr val="000000"/>
+                </a:solidFill>
+                <a:latin typeface="Times New Roman"/>
+                <a:ea typeface="Times New Roman"/>
+                <a:cs typeface="Times New Roman"/>
+              </a:rPr>
+              <a:t>:</a:t>
+            </a:r>
+            <a:endParaRPr sz="4000" dirty="0"/>
+          </a:p>
+        </p:txBody>
+      </p:sp>
+      <p:sp>
+        <p:nvSpPr>
+          <p:cNvPr id="5" name="Замещающий номер слайда 4">
+            <a:extLst>
+              <a:ext uri="{FF2B5EF4-FFF2-40B4-BE49-F238E27FC236}">
+                <a16:creationId xmlns:a16="http://schemas.microsoft.com/office/drawing/2014/main" id="{7A7AC3B3-0D3D-46AF-A9AF-3FA15E2C3D9E}"/>
+              </a:ext>
+            </a:extLst>
+          </p:cNvPr>
+          <p:cNvSpPr>
+            <a:spLocks noGrp="1"/>
+          </p:cNvSpPr>
+          <p:nvPr>
+            <p:ph type="sldNum" idx="12"/>
+          </p:nvPr>
+        </p:nvSpPr>
+        <p:spPr>
+          <a:xfrm>
+            <a:off x="7088886" y="6493511"/>
+            <a:ext cx="2057400" cy="365125"/>
+          </a:xfrm>
+        </p:spPr>
+        <p:txBody>
+          <a:bodyPr wrap="square" lIns="91440" tIns="45720" rIns="91440" bIns="45720">
+            <a:noAutofit/>
+          </a:bodyPr>
+          <a:lstStyle>
+            <a:defPPr algn="r">
+              <a:defRPr sz="2000" b="0">
+                <a:solidFill>
+                  <a:srgbClr val="000000"/>
+                </a:solidFill>
+                <a:latin typeface="Times New Roman"/>
+                <a:ea typeface="Times New Roman"/>
+                <a:cs typeface="Times New Roman"/>
+              </a:defRPr>
+            </a:defPPr>
+          </a:lstStyle>
+          <a:p>
+            <a:pPr algn="r">
+              <a:defRPr sz="2000" b="0">
+                <a:solidFill>
+                  <a:srgbClr val="000000"/>
+                </a:solidFill>
+                <a:latin typeface="Times New Roman"/>
+                <a:ea typeface="Times New Roman"/>
+                <a:cs typeface="Times New Roman"/>
+              </a:defRPr>
+            </a:pPr>
+            <a:fld id="{D6ED8A53-8D2F-4011-BE06-EDB0774336BA}" type="slidenum">
+              <a:rPr sz="2000" b="0">
+                <a:solidFill>
+                  <a:srgbClr val="000000"/>
+                </a:solidFill>
+                <a:latin typeface="Times New Roman"/>
+                <a:ea typeface="Times New Roman"/>
+                <a:cs typeface="Times New Roman"/>
+              </a:rPr>
+              <a:t>3</a:t>
+            </a:fld>
+            <a:endParaRPr sz="2000">
+              <a:solidFill>
+                <a:schemeClr val="tx1"/>
+              </a:solidFill>
+              <a:latin typeface="Times New Roman"/>
+              <a:ea typeface="Times New Roman"/>
+              <a:cs typeface="Times New Roman"/>
+            </a:endParaRPr>
+          </a:p>
+        </p:txBody>
+      </p:sp>
+      <p:sp>
+        <p:nvSpPr>
+          <p:cNvPr id="3" name="TextBox 2">
+            <a:extLst>
+              <a:ext uri="{FF2B5EF4-FFF2-40B4-BE49-F238E27FC236}">
+                <a16:creationId xmlns:a16="http://schemas.microsoft.com/office/drawing/2014/main" id="{B9A98C53-8330-9192-D210-4F5703BD6F05}"/>
+              </a:ext>
+            </a:extLst>
+          </p:cNvPr>
+          <p:cNvSpPr>
+            <a:spLocks noGrp="1"/>
+          </p:cNvSpPr>
+          <p:nvPr/>
+        </p:nvSpPr>
+        <p:spPr>
+          <a:xfrm>
+            <a:off x="277897" y="597203"/>
+            <a:ext cx="5948583" cy="2297417"/>
+          </a:xfrm>
+          <a:prstGeom prst="rect">
+            <a:avLst/>
+          </a:prstGeom>
+          <a:noFill/>
+          <a:ln>
+            <a:solidFill>
+              <a:schemeClr val="tx1"/>
+            </a:solidFill>
+            <a:prstDash val="dash"/>
+          </a:ln>
+        </p:spPr>
+        <p:txBody>
+          <a:bodyPr rot="0" spcFirstLastPara="0" vert="horz" wrap="square" lIns="91440" tIns="45720" rIns="91440" bIns="45720" anchor="ctr">
+            <a:noAutofit/>
+          </a:bodyPr>
+          <a:lstStyle>
+            <a:defPPr algn="l">
+              <a:defRPr sz="1800" b="0">
+                <a:solidFill>
+                  <a:srgbClr val="000000"/>
+                </a:solidFill>
+                <a:latin typeface="Times New Roman"/>
+                <a:ea typeface="Times New Roman"/>
+                <a:cs typeface="Times New Roman"/>
+              </a:defRPr>
+            </a:defPPr>
+          </a:lstStyle>
+          <a:p>
+            <a:pPr algn="l">
+              <a:defRPr sz="1800" b="0">
+                <a:solidFill>
+                  <a:srgbClr val="000000"/>
+                </a:solidFill>
+                <a:latin typeface="Times New Roman"/>
+                <a:ea typeface="Times New Roman"/>
+                <a:cs typeface="Times New Roman"/>
+              </a:defRPr>
+            </a:pPr>
+            <a:r>
+              <a:rPr lang="ru-RU" sz="1800" b="0" dirty="0">
+                <a:solidFill>
+                  <a:srgbClr val="000000"/>
+                </a:solidFill>
+                <a:latin typeface="Times New Roman"/>
+                <a:ea typeface="Times New Roman"/>
+                <a:cs typeface="Times New Roman"/>
+              </a:rPr>
+              <a:t>На фермах 3D-принтеров в процессе печати могут возникать сбои, вызванные различными факторами. Такие дефекты, как отлипание, расслоение или смещение слоёв, в конечном итоге могут привести к </a:t>
+            </a:r>
+            <a:r>
+              <a:rPr lang="ru-RU" sz="1800" b="1" dirty="0">
+                <a:solidFill>
+                  <a:srgbClr val="000000"/>
+                </a:solidFill>
+                <a:latin typeface="Times New Roman"/>
+                <a:ea typeface="Times New Roman"/>
+                <a:cs typeface="Times New Roman"/>
+              </a:rPr>
+              <a:t>критическому дефекту «спагетти»</a:t>
+            </a:r>
+            <a:r>
+              <a:rPr lang="ru-RU" sz="1800" b="0" dirty="0">
+                <a:solidFill>
+                  <a:srgbClr val="000000"/>
+                </a:solidFill>
+                <a:latin typeface="Times New Roman"/>
+                <a:ea typeface="Times New Roman"/>
+                <a:cs typeface="Times New Roman"/>
+              </a:rPr>
+              <a:t>, при котором пластик начинает хаотично укладываться в воздухе. Такой дефект приводит к перерасходу материала, а в отдельных случаях может стать </a:t>
+            </a:r>
+            <a:r>
+              <a:rPr lang="ru-RU" sz="1800" b="1" dirty="0">
+                <a:solidFill>
+                  <a:srgbClr val="000000"/>
+                </a:solidFill>
+                <a:latin typeface="Times New Roman"/>
+                <a:ea typeface="Times New Roman"/>
+                <a:cs typeface="Times New Roman"/>
+              </a:rPr>
+              <a:t>причиной повреждения </a:t>
+            </a:r>
+            <a:r>
+              <a:rPr lang="ru-RU" sz="1800" b="0" dirty="0">
+                <a:solidFill>
+                  <a:srgbClr val="000000"/>
+                </a:solidFill>
+                <a:latin typeface="Times New Roman"/>
+                <a:ea typeface="Times New Roman"/>
+                <a:cs typeface="Times New Roman"/>
+              </a:rPr>
+              <a:t>самого 3D-принтера.</a:t>
+            </a:r>
+            <a:endParaRPr lang="ru-RU" dirty="0"/>
+          </a:p>
+        </p:txBody>
+      </p:sp>
+      <p:sp>
+        <p:nvSpPr>
+          <p:cNvPr id="27" name="TextBox 26">
+            <a:extLst>
+              <a:ext uri="{FF2B5EF4-FFF2-40B4-BE49-F238E27FC236}">
+                <a16:creationId xmlns:a16="http://schemas.microsoft.com/office/drawing/2014/main" id="{93027D3F-6BC8-2110-F2D0-39287E8FAFD7}"/>
+              </a:ext>
+            </a:extLst>
+          </p:cNvPr>
+          <p:cNvSpPr>
+            <a:spLocks noGrp="1"/>
+          </p:cNvSpPr>
+          <p:nvPr/>
+        </p:nvSpPr>
+        <p:spPr>
+          <a:xfrm>
+            <a:off x="6440105" y="2547592"/>
+            <a:ext cx="2182057" cy="579120"/>
+          </a:xfrm>
+          <a:prstGeom prst="rect">
+            <a:avLst/>
+          </a:prstGeom>
+          <a:noFill/>
+        </p:spPr>
+        <p:txBody>
+          <a:bodyPr rot="0" spcFirstLastPara="0" vert="horz" wrap="square" lIns="91440" tIns="45720" rIns="91440" bIns="45720" anchor="t">
+            <a:noAutofit/>
+          </a:bodyPr>
+          <a:lstStyle>
+            <a:defPPr algn="l">
+              <a:defRPr sz="1600" b="0">
+                <a:solidFill>
+                  <a:srgbClr val="000000"/>
+                </a:solidFill>
+                <a:latin typeface="Times New Roman"/>
+                <a:ea typeface="Times New Roman"/>
+                <a:cs typeface="Times New Roman"/>
+              </a:defRPr>
+            </a:defPPr>
+          </a:lstStyle>
+          <a:p>
+            <a:pPr algn="l">
+              <a:defRPr sz="1600" b="0">
+                <a:solidFill>
+                  <a:srgbClr val="000000"/>
+                </a:solidFill>
+                <a:latin typeface="Times New Roman"/>
+                <a:ea typeface="Times New Roman"/>
+                <a:cs typeface="Times New Roman"/>
+              </a:defRPr>
+            </a:pPr>
+            <a:r>
+              <a:rPr sz="1600" b="0" dirty="0" err="1">
+                <a:solidFill>
+                  <a:srgbClr val="000000"/>
+                </a:solidFill>
+                <a:latin typeface="Times New Roman"/>
+                <a:ea typeface="Times New Roman"/>
+                <a:cs typeface="Times New Roman"/>
+              </a:rPr>
+              <a:t>Рис</a:t>
+            </a:r>
+            <a:r>
+              <a:rPr sz="1600" b="0" dirty="0">
+                <a:solidFill>
+                  <a:srgbClr val="000000"/>
+                </a:solidFill>
+                <a:latin typeface="Times New Roman"/>
+                <a:ea typeface="Times New Roman"/>
+                <a:cs typeface="Times New Roman"/>
+              </a:rPr>
+              <a:t>. 1 – </a:t>
+            </a:r>
+            <a:r>
+              <a:rPr sz="1600" b="0" dirty="0" err="1">
+                <a:solidFill>
+                  <a:srgbClr val="000000"/>
+                </a:solidFill>
+                <a:latin typeface="Times New Roman"/>
+                <a:ea typeface="Times New Roman"/>
+                <a:cs typeface="Times New Roman"/>
+              </a:rPr>
+              <a:t>Дефект</a:t>
+            </a:r>
+            <a:r>
+              <a:rPr sz="1600" b="0" dirty="0">
+                <a:solidFill>
+                  <a:srgbClr val="000000"/>
+                </a:solidFill>
+                <a:latin typeface="Times New Roman"/>
+                <a:ea typeface="Times New Roman"/>
+                <a:cs typeface="Times New Roman"/>
+              </a:rPr>
+              <a:t> </a:t>
+            </a:r>
+            <a:r>
+              <a:rPr sz="1600" b="0" dirty="0" err="1">
+                <a:solidFill>
+                  <a:srgbClr val="000000"/>
+                </a:solidFill>
+                <a:latin typeface="Times New Roman"/>
+                <a:ea typeface="Times New Roman"/>
+                <a:cs typeface="Times New Roman"/>
+              </a:rPr>
+              <a:t>типа</a:t>
+            </a:r>
+            <a:r>
+              <a:rPr sz="1600" b="0" dirty="0">
+                <a:solidFill>
+                  <a:srgbClr val="000000"/>
+                </a:solidFill>
+                <a:latin typeface="Times New Roman"/>
+                <a:ea typeface="Times New Roman"/>
+                <a:cs typeface="Times New Roman"/>
+              </a:rPr>
+              <a:t> «</a:t>
+            </a:r>
+            <a:r>
+              <a:rPr sz="1600" b="0" dirty="0" err="1">
+                <a:solidFill>
+                  <a:srgbClr val="000000"/>
+                </a:solidFill>
+                <a:latin typeface="Times New Roman"/>
+                <a:ea typeface="Times New Roman"/>
+                <a:cs typeface="Times New Roman"/>
+              </a:rPr>
+              <a:t>спагетти</a:t>
+            </a:r>
+            <a:r>
+              <a:rPr sz="1600" b="0" dirty="0">
+                <a:solidFill>
+                  <a:srgbClr val="000000"/>
+                </a:solidFill>
+                <a:latin typeface="Times New Roman"/>
+                <a:ea typeface="Times New Roman"/>
+                <a:cs typeface="Times New Roman"/>
+              </a:rPr>
+              <a:t>»</a:t>
+            </a:r>
+          </a:p>
+        </p:txBody>
+      </p:sp>
+      <p:pic>
+        <p:nvPicPr>
+          <p:cNvPr id="4" name="Рисунок 3" descr="Изображение выглядит как искусство, дизайн, соединитель, свет&#10;&#10;Содержимое, созданное ИИ, может быть неверным.">
+            <a:extLst>
+              <a:ext uri="{FF2B5EF4-FFF2-40B4-BE49-F238E27FC236}">
+                <a16:creationId xmlns:a16="http://schemas.microsoft.com/office/drawing/2014/main" id="{AE67ED3C-CB37-618A-EEBF-9C9FF1AB5D40}"/>
+              </a:ext>
+            </a:extLst>
+          </p:cNvPr>
+          <p:cNvPicPr>
+            <a:picLocks noChangeAspect="1"/>
+          </p:cNvPicPr>
+          <p:nvPr/>
+        </p:nvPicPr>
+        <p:blipFill>
+          <a:blip r:embed="rId4"/>
+          <a:srcRect l="6291" t="18812" r="21153" b="24354"/>
+          <a:stretch/>
+        </p:blipFill>
+        <p:spPr>
+          <a:xfrm>
+            <a:off x="6333293" y="704535"/>
+            <a:ext cx="2288869" cy="1792981"/>
+          </a:xfrm>
+          <a:prstGeom prst="rect">
+            <a:avLst/>
+          </a:prstGeom>
+          <a:ln w="28575">
+            <a:noFill/>
+          </a:ln>
+        </p:spPr>
+      </p:pic>
+      <p:sp>
+        <p:nvSpPr>
+          <p:cNvPr id="6" name="TextBox 2">
+            <a:extLst>
+              <a:ext uri="{FF2B5EF4-FFF2-40B4-BE49-F238E27FC236}">
+                <a16:creationId xmlns:a16="http://schemas.microsoft.com/office/drawing/2014/main" id="{452C65C1-2992-0840-D7B0-DF2AD9057D63}"/>
+              </a:ext>
+            </a:extLst>
+          </p:cNvPr>
+          <p:cNvSpPr>
+            <a:spLocks noGrp="1"/>
+          </p:cNvSpPr>
+          <p:nvPr/>
+        </p:nvSpPr>
+        <p:spPr>
+          <a:xfrm>
+            <a:off x="277897" y="3017804"/>
+            <a:ext cx="4637770" cy="2791593"/>
+          </a:xfrm>
+          <a:prstGeom prst="rect">
+            <a:avLst/>
+          </a:prstGeom>
+          <a:noFill/>
+          <a:ln>
+            <a:solidFill>
+              <a:schemeClr val="tx1"/>
+            </a:solidFill>
+            <a:prstDash val="dash"/>
+          </a:ln>
+        </p:spPr>
+        <p:txBody>
+          <a:bodyPr rot="0" spcFirstLastPara="0" vert="horz" wrap="square" lIns="91440" tIns="45720" rIns="91440" bIns="45720" anchor="ctr">
+            <a:noAutofit/>
+          </a:bodyPr>
+          <a:lstStyle>
+            <a:defPPr algn="l">
+              <a:defRPr sz="1800" b="0">
+                <a:solidFill>
+                  <a:srgbClr val="000000"/>
+                </a:solidFill>
+                <a:latin typeface="Times New Roman"/>
+                <a:ea typeface="Times New Roman"/>
+                <a:cs typeface="Times New Roman"/>
+              </a:defRPr>
+            </a:defPPr>
+          </a:lstStyle>
+          <a:p>
+            <a:pPr algn="l">
+              <a:defRPr sz="1800" b="0">
+                <a:solidFill>
+                  <a:srgbClr val="000000"/>
+                </a:solidFill>
+                <a:latin typeface="Times New Roman"/>
+                <a:ea typeface="Times New Roman"/>
+                <a:cs typeface="Times New Roman"/>
+              </a:defRPr>
+            </a:pPr>
+            <a:r>
+              <a:rPr lang="ru-RU" dirty="0">
+                <a:solidFill>
+                  <a:srgbClr val="000000"/>
+                </a:solidFill>
+                <a:latin typeface="Times New Roman"/>
+                <a:ea typeface="Times New Roman"/>
+                <a:cs typeface="Times New Roman"/>
+              </a:rPr>
+              <a:t>Проблему удалось подтвердить на ферме Волгоградской компании «</a:t>
+            </a:r>
+            <a:r>
+              <a:rPr lang="ru-RU" dirty="0" err="1">
+                <a:solidFill>
+                  <a:srgbClr val="000000"/>
+                </a:solidFill>
+                <a:latin typeface="Times New Roman"/>
+                <a:ea typeface="Times New Roman"/>
+                <a:cs typeface="Times New Roman"/>
+              </a:rPr>
+              <a:t>Stereotech</a:t>
+            </a:r>
+            <a:r>
+              <a:rPr lang="ru-RU" dirty="0">
+                <a:solidFill>
+                  <a:srgbClr val="000000"/>
+                </a:solidFill>
+                <a:latin typeface="Times New Roman"/>
+                <a:ea typeface="Times New Roman"/>
+                <a:cs typeface="Times New Roman"/>
+              </a:rPr>
+              <a:t>». По накопленной статистике принтеров с фермы, 26,7</a:t>
+            </a:r>
+            <a:r>
+              <a:rPr lang="ru-RU" b="1" dirty="0">
+                <a:latin typeface="Times New Roman" panose="02020603050405020304" pitchFamily="18" charset="0"/>
+                <a:cs typeface="Times New Roman" panose="02020603050405020304" pitchFamily="18" charset="0"/>
+              </a:rPr>
+              <a:t> </a:t>
+            </a:r>
+            <a:r>
+              <a:rPr lang="ru-RU" dirty="0">
+                <a:solidFill>
+                  <a:srgbClr val="000000"/>
+                </a:solidFill>
+                <a:latin typeface="Times New Roman"/>
+                <a:ea typeface="Times New Roman"/>
+                <a:cs typeface="Times New Roman"/>
+              </a:rPr>
+              <a:t>% заданий были отменены оператором вручную из-за подобных сбоев. Статистика имеет погрешность, так как часть успешных заданий — это печати, когда оператор не мог отменить задачу, хотя сбой был, а часть отмен не связаны со сбоем.</a:t>
+            </a:r>
+            <a:endParaRPr lang="ru-RU" dirty="0"/>
+          </a:p>
+        </p:txBody>
+      </p:sp>
+      <p:sp>
+        <p:nvSpPr>
+          <p:cNvPr id="12" name="TextBox 26">
+            <a:extLst>
+              <a:ext uri="{FF2B5EF4-FFF2-40B4-BE49-F238E27FC236}">
+                <a16:creationId xmlns:a16="http://schemas.microsoft.com/office/drawing/2014/main" id="{DC9D2F2B-4F62-AFAE-5BC3-F6D246AAE8E4}"/>
+              </a:ext>
+            </a:extLst>
+          </p:cNvPr>
+          <p:cNvSpPr>
+            <a:spLocks noGrp="1"/>
+          </p:cNvSpPr>
+          <p:nvPr/>
+        </p:nvSpPr>
+        <p:spPr>
+          <a:xfrm>
+            <a:off x="4868975" y="6014767"/>
+            <a:ext cx="4073130" cy="579120"/>
+          </a:xfrm>
+          <a:prstGeom prst="rect">
+            <a:avLst/>
+          </a:prstGeom>
+          <a:noFill/>
+        </p:spPr>
+        <p:txBody>
+          <a:bodyPr rot="0" spcFirstLastPara="0" vert="horz" wrap="square" lIns="91440" tIns="45720" rIns="91440" bIns="45720" anchor="ctr">
+            <a:noAutofit/>
+          </a:bodyPr>
+          <a:lstStyle>
+            <a:defPPr algn="l">
+              <a:defRPr sz="1600" b="0">
+                <a:solidFill>
+                  <a:srgbClr val="000000"/>
+                </a:solidFill>
+                <a:latin typeface="Times New Roman"/>
+                <a:ea typeface="Times New Roman"/>
+                <a:cs typeface="Times New Roman"/>
+              </a:defRPr>
+            </a:defPPr>
+          </a:lstStyle>
+          <a:p>
+            <a:pPr algn="ctr">
+              <a:defRPr sz="1600" b="0">
+                <a:solidFill>
+                  <a:srgbClr val="000000"/>
+                </a:solidFill>
+                <a:latin typeface="Times New Roman"/>
+                <a:ea typeface="Times New Roman"/>
+                <a:cs typeface="Times New Roman"/>
+              </a:defRPr>
+            </a:pPr>
+            <a:r>
+              <a:rPr sz="1600" b="0" dirty="0" err="1">
+                <a:solidFill>
+                  <a:srgbClr val="000000"/>
+                </a:solidFill>
+                <a:latin typeface="Times New Roman"/>
+                <a:ea typeface="Times New Roman"/>
+                <a:cs typeface="Times New Roman"/>
+              </a:rPr>
+              <a:t>Рис</a:t>
+            </a:r>
+            <a:r>
+              <a:rPr sz="1600" b="0" dirty="0">
+                <a:solidFill>
+                  <a:srgbClr val="000000"/>
+                </a:solidFill>
+                <a:latin typeface="Times New Roman"/>
+                <a:ea typeface="Times New Roman"/>
+                <a:cs typeface="Times New Roman"/>
+              </a:rPr>
+              <a:t>. </a:t>
+            </a:r>
+            <a:r>
+              <a:rPr lang="ru-RU" sz="1600" b="0" dirty="0">
+                <a:solidFill>
+                  <a:srgbClr val="000000"/>
+                </a:solidFill>
+                <a:latin typeface="Times New Roman"/>
+                <a:ea typeface="Times New Roman"/>
+                <a:cs typeface="Times New Roman"/>
+              </a:rPr>
+              <a:t>2</a:t>
+            </a:r>
+            <a:r>
+              <a:rPr sz="1600" b="0" dirty="0">
+                <a:solidFill>
+                  <a:srgbClr val="000000"/>
+                </a:solidFill>
+                <a:latin typeface="Times New Roman"/>
+                <a:ea typeface="Times New Roman"/>
+                <a:cs typeface="Times New Roman"/>
+              </a:rPr>
+              <a:t> – </a:t>
+            </a:r>
+            <a:r>
+              <a:rPr lang="ru-RU" sz="1600" b="0" dirty="0">
+                <a:solidFill>
+                  <a:srgbClr val="000000"/>
+                </a:solidFill>
+                <a:latin typeface="Times New Roman"/>
+                <a:ea typeface="Times New Roman"/>
+                <a:cs typeface="Times New Roman"/>
+              </a:rPr>
+              <a:t>Диаграмма статистики печатей на ферме компании «</a:t>
+            </a:r>
+            <a:r>
+              <a:rPr lang="en-US" sz="1600" b="0" dirty="0" err="1">
+                <a:solidFill>
+                  <a:srgbClr val="000000"/>
+                </a:solidFill>
+                <a:latin typeface="Times New Roman"/>
+                <a:ea typeface="Times New Roman"/>
+                <a:cs typeface="Times New Roman"/>
+              </a:rPr>
+              <a:t>Stereotech</a:t>
+            </a:r>
+            <a:r>
+              <a:rPr lang="ru-RU" sz="1600" b="0" dirty="0">
+                <a:solidFill>
+                  <a:srgbClr val="000000"/>
+                </a:solidFill>
+                <a:latin typeface="Times New Roman"/>
+                <a:ea typeface="Times New Roman"/>
+                <a:cs typeface="Times New Roman"/>
+              </a:rPr>
+              <a:t>»</a:t>
+            </a:r>
+            <a:endParaRPr sz="1600" b="0" dirty="0">
+              <a:solidFill>
+                <a:srgbClr val="000000"/>
+              </a:solidFill>
+              <a:latin typeface="Times New Roman"/>
+              <a:ea typeface="Times New Roman"/>
+              <a:cs typeface="Times New Roman"/>
+            </a:endParaRPr>
+          </a:p>
+        </p:txBody>
+      </p:sp>
+      <p:sp>
+        <p:nvSpPr>
+          <p:cNvPr id="21" name="TextBox 2">
+            <a:extLst>
+              <a:ext uri="{FF2B5EF4-FFF2-40B4-BE49-F238E27FC236}">
+                <a16:creationId xmlns:a16="http://schemas.microsoft.com/office/drawing/2014/main" id="{776FE2EE-EE34-7E14-84FE-9C2304D04340}"/>
+              </a:ext>
+            </a:extLst>
+          </p:cNvPr>
+          <p:cNvSpPr>
+            <a:spLocks noGrp="1"/>
+          </p:cNvSpPr>
+          <p:nvPr/>
+        </p:nvSpPr>
+        <p:spPr>
+          <a:xfrm>
+            <a:off x="277897" y="5932581"/>
+            <a:ext cx="4637770" cy="743492"/>
+          </a:xfrm>
+          <a:prstGeom prst="rect">
+            <a:avLst/>
+          </a:prstGeom>
+          <a:noFill/>
+          <a:ln>
+            <a:solidFill>
+              <a:schemeClr val="tx1"/>
+            </a:solidFill>
+            <a:prstDash val="dash"/>
+          </a:ln>
+        </p:spPr>
+        <p:txBody>
+          <a:bodyPr rot="0" spcFirstLastPara="0" vert="horz" wrap="square" lIns="91440" tIns="45720" rIns="91440" bIns="45720" anchor="ctr">
+            <a:noAutofit/>
+          </a:bodyPr>
+          <a:lstStyle>
+            <a:defPPr algn="l">
+              <a:defRPr sz="1800" b="0">
+                <a:solidFill>
+                  <a:srgbClr val="000000"/>
+                </a:solidFill>
+                <a:latin typeface="Times New Roman"/>
+                <a:ea typeface="Times New Roman"/>
+                <a:cs typeface="Times New Roman"/>
+              </a:defRPr>
+            </a:defPPr>
+          </a:lstStyle>
+          <a:p>
+            <a:pPr algn="l">
+              <a:defRPr sz="1800" b="0">
+                <a:solidFill>
+                  <a:srgbClr val="000000"/>
+                </a:solidFill>
+                <a:latin typeface="Times New Roman"/>
+                <a:ea typeface="Times New Roman"/>
+                <a:cs typeface="Times New Roman"/>
+              </a:defRPr>
+            </a:pPr>
+            <a:r>
+              <a:rPr lang="ru-RU" b="1" dirty="0">
+                <a:solidFill>
+                  <a:srgbClr val="000000"/>
+                </a:solidFill>
+                <a:latin typeface="Times New Roman"/>
+                <a:cs typeface="Times New Roman"/>
+              </a:rPr>
+              <a:t>Предлагаемое</a:t>
+            </a:r>
+            <a:r>
+              <a:rPr lang="ru-RU" dirty="0">
+                <a:solidFill>
+                  <a:srgbClr val="000000"/>
+                </a:solidFill>
+                <a:latin typeface="Times New Roman"/>
+                <a:cs typeface="Times New Roman"/>
+              </a:rPr>
+              <a:t> </a:t>
+            </a:r>
+            <a:r>
+              <a:rPr lang="ru-RU" b="1" dirty="0">
+                <a:solidFill>
+                  <a:srgbClr val="000000"/>
+                </a:solidFill>
+                <a:latin typeface="Times New Roman"/>
+                <a:cs typeface="Times New Roman"/>
+              </a:rPr>
+              <a:t>решение</a:t>
+            </a:r>
+            <a:r>
+              <a:rPr lang="ru-RU" dirty="0">
+                <a:solidFill>
+                  <a:srgbClr val="000000"/>
+                </a:solidFill>
+                <a:latin typeface="Times New Roman"/>
+                <a:cs typeface="Times New Roman"/>
+              </a:rPr>
+              <a:t>: мониторинг печати с помощью методов машинного зрения.</a:t>
+            </a:r>
+            <a:endParaRPr lang="ru-RU" dirty="0"/>
+          </a:p>
+        </p:txBody>
+      </p:sp>
+    </p:spTree>
+    <p:extLst>
+      <p:ext uri="{BB962C8B-B14F-4D97-AF65-F5344CB8AC3E}">
+        <p14:creationId xmlns:p14="http://schemas.microsoft.com/office/powerpoint/2010/main" val="2011050586"/>
+      </p:ext>
+    </p:extLst>
+  </p:cSld>
+  <p:clrMapOvr>
+    <a:masterClrMapping/>
+  </p:clrMapOvr>
+</p:sld>
+</file>
+
+<file path=ppt/slides/slide4.xml><?xml version="1.0" encoding="utf-8"?>
+<p:sld xmlns:a="http://schemas.openxmlformats.org/drawingml/2006/main" xmlns:r="http://schemas.openxmlformats.org/officeDocument/2006/relationships" xmlns:p="http://schemas.openxmlformats.org/presentationml/2006/main">
+  <p:cSld>
+    <p:spTree>
+      <p:nvGrpSpPr>
+        <p:cNvPr id="1" name="">
+          <a:extLst>
+            <a:ext uri="{FF2B5EF4-FFF2-40B4-BE49-F238E27FC236}">
+              <a16:creationId xmlns:a16="http://schemas.microsoft.com/office/drawing/2014/main" id="{586A209A-B3B7-9043-FC7E-DD693EE6AACA}"/>
+            </a:ext>
+          </a:extLst>
+        </p:cNvPr>
+        <p:cNvGrpSpPr/>
+        <p:nvPr/>
+      </p:nvGrpSpPr>
+      <p:grpSpPr>
+        <a:xfrm>
+          <a:off x="0" y="0"/>
+          <a:ext cx="0" cy="0"/>
+          <a:chOff x="0" y="0"/>
+          <a:chExt cx="0" cy="0"/>
+        </a:xfrm>
+      </p:grpSpPr>
+      <p:sp>
+        <p:nvSpPr>
+          <p:cNvPr id="2" name="Заголовок 1">
+            <a:extLst>
+              <a:ext uri="{FF2B5EF4-FFF2-40B4-BE49-F238E27FC236}">
+                <a16:creationId xmlns:a16="http://schemas.microsoft.com/office/drawing/2014/main" id="{648A91D6-F58A-86A8-231A-A5AC58545903}"/>
+              </a:ext>
+            </a:extLst>
+          </p:cNvPr>
+          <p:cNvSpPr>
+            <a:spLocks noGrp="1"/>
+          </p:cNvSpPr>
+          <p:nvPr>
+            <p:ph type="title"/>
+          </p:nvPr>
+        </p:nvSpPr>
+        <p:spPr>
+          <a:xfrm>
+            <a:off x="628648" y="0"/>
+            <a:ext cx="7886700" cy="712868"/>
+          </a:xfrm>
+        </p:spPr>
+        <p:txBody>
+          <a:bodyPr>
+            <a:normAutofit/>
+          </a:bodyPr>
+          <a:lstStyle/>
+          <a:p>
+            <a:pPr algn="ctr"/>
+            <a:r>
+              <a:rPr lang="ru-RU" sz="4000" dirty="0">
+                <a:latin typeface="Times New Roman" panose="02020603050405020304" pitchFamily="18" charset="0"/>
+                <a:ea typeface="Calibri"/>
+                <a:cs typeface="Times New Roman" panose="02020603050405020304" pitchFamily="18" charset="0"/>
+              </a:rPr>
+              <a:t>Подготовка к обучению нейросети</a:t>
+            </a:r>
+          </a:p>
+        </p:txBody>
+      </p:sp>
+      <p:sp>
+        <p:nvSpPr>
+          <p:cNvPr id="5" name="Замещающий номер слайда 4">
+            <a:extLst>
+              <a:ext uri="{FF2B5EF4-FFF2-40B4-BE49-F238E27FC236}">
+                <a16:creationId xmlns:a16="http://schemas.microsoft.com/office/drawing/2014/main" id="{425BE312-5EC5-E722-FD8E-916DFE636F2B}"/>
+              </a:ext>
+            </a:extLst>
+          </p:cNvPr>
+          <p:cNvSpPr>
+            <a:spLocks noGrp="1"/>
+          </p:cNvSpPr>
+          <p:nvPr>
+            <p:ph type="sldNum" sz="quarter" idx="12"/>
+          </p:nvPr>
+        </p:nvSpPr>
+        <p:spPr>
+          <a:xfrm>
+            <a:off x="7088886" y="6493511"/>
+            <a:ext cx="2057400" cy="365125"/>
+          </a:xfrm>
+        </p:spPr>
+        <p:txBody>
+          <a:bodyPr/>
+          <a:lstStyle/>
+          <a:p>
+            <a:fld id="{D6ED8A53-8D2F-4011-BE06-EDB0774336BA}" type="slidenum">
+              <a:rPr lang="ru-RU" sz="2000" dirty="0" smtClean="0">
+                <a:solidFill>
+                  <a:schemeClr val="tx1"/>
+                </a:solidFill>
+                <a:latin typeface="Times New Roman" panose="02020603050405020304" pitchFamily="18" charset="0"/>
+                <a:cs typeface="Times New Roman" panose="02020603050405020304" pitchFamily="18" charset="0"/>
+              </a:rPr>
+              <a:t>4</a:t>
+            </a:fld>
+            <a:endParaRPr lang="ru-RU" sz="2000">
+              <a:solidFill>
+                <a:schemeClr val="tx1"/>
+              </a:solidFill>
+              <a:latin typeface="Times New Roman" panose="02020603050405020304" pitchFamily="18" charset="0"/>
+              <a:ea typeface="Calibri"/>
+              <a:cs typeface="Times New Roman" panose="02020603050405020304" pitchFamily="18" charset="0"/>
+            </a:endParaRPr>
+          </a:p>
+        </p:txBody>
+      </p:sp>
+      <p:sp>
+        <p:nvSpPr>
+          <p:cNvPr id="14" name="TextBox 13">
+            <a:extLst>
+              <a:ext uri="{FF2B5EF4-FFF2-40B4-BE49-F238E27FC236}">
+                <a16:creationId xmlns:a16="http://schemas.microsoft.com/office/drawing/2014/main" id="{733275A9-2422-EE65-68B7-2EFC7CB717FE}"/>
+              </a:ext>
+            </a:extLst>
+          </p:cNvPr>
+          <p:cNvSpPr txBox="1"/>
+          <p:nvPr/>
+        </p:nvSpPr>
+        <p:spPr>
+          <a:xfrm>
+            <a:off x="444579" y="731952"/>
+            <a:ext cx="3869672" cy="2585323"/>
+          </a:xfrm>
+          <a:prstGeom prst="rect">
+            <a:avLst/>
+          </a:prstGeom>
+          <a:noFill/>
+          <a:ln>
+            <a:solidFill>
+              <a:schemeClr val="tx1"/>
+            </a:solidFill>
+            <a:prstDash val="dash"/>
+          </a:ln>
+        </p:spPr>
+        <p:txBody>
+          <a:bodyPr rot="0" spcFirstLastPara="0" vertOverflow="overflow" horzOverflow="overflow" vert="horz" wrap="square" lIns="91440" tIns="45720" rIns="91440" bIns="45720" numCol="1" spcCol="0" rtlCol="0" fromWordArt="0" anchor="ctr" anchorCtr="0" forceAA="0" compatLnSpc="1">
+            <a:prstTxWarp prst="textNoShape">
+              <a:avLst/>
+            </a:prstTxWarp>
+            <a:spAutoFit/>
+          </a:bodyPr>
+          <a:lstStyle/>
+          <a:p>
+            <a:r>
+              <a:rPr lang="ru-RU" dirty="0">
+                <a:latin typeface="Times New Roman" panose="02020603050405020304" pitchFamily="18" charset="0"/>
+                <a:cs typeface="Times New Roman" panose="02020603050405020304" pitchFamily="18" charset="0"/>
+              </a:rPr>
+              <a:t>Для обнаружения «спагетти» выбрана </a:t>
+            </a:r>
+            <a:r>
+              <a:rPr lang="ru-RU" b="1" dirty="0">
+                <a:latin typeface="Times New Roman" panose="02020603050405020304" pitchFamily="18" charset="0"/>
+                <a:cs typeface="Times New Roman" panose="02020603050405020304" pitchFamily="18" charset="0"/>
+              </a:rPr>
+              <a:t>ResNet18</a:t>
+            </a:r>
+            <a:r>
+              <a:rPr lang="ru-RU" dirty="0">
+                <a:latin typeface="Times New Roman" panose="02020603050405020304" pitchFamily="18" charset="0"/>
+                <a:cs typeface="Times New Roman" panose="02020603050405020304" pitchFamily="18" charset="0"/>
+              </a:rPr>
+              <a:t>. Она решает задачу как бинарную классификацию полного кадра: </a:t>
+            </a:r>
+            <a:r>
+              <a:rPr lang="ru-RU" b="1" dirty="0">
+                <a:latin typeface="Times New Roman" panose="02020603050405020304" pitchFamily="18" charset="0"/>
+                <a:cs typeface="Times New Roman" panose="02020603050405020304" pitchFamily="18" charset="0"/>
+              </a:rPr>
+              <a:t>есть дефект или нет</a:t>
+            </a:r>
+            <a:r>
+              <a:rPr lang="ru-RU" dirty="0">
+                <a:latin typeface="Times New Roman" panose="02020603050405020304" pitchFamily="18" charset="0"/>
+                <a:cs typeface="Times New Roman" panose="02020603050405020304" pitchFamily="18" charset="0"/>
+              </a:rPr>
+              <a:t>. Локализация дефектов рамкой в прошлых работах показала низкую точность. Детекция объектов сохранена только для поиска детали на столе.</a:t>
+            </a:r>
+            <a:endParaRPr lang="ru-RU" dirty="0">
+              <a:solidFill>
+                <a:srgbClr val="000000"/>
+              </a:solidFill>
+              <a:latin typeface="Times New Roman" panose="02020603050405020304" pitchFamily="18" charset="0"/>
+              <a:cs typeface="Times New Roman" panose="02020603050405020304" pitchFamily="18" charset="0"/>
+            </a:endParaRPr>
+          </a:p>
+        </p:txBody>
+      </p:sp>
+      <p:sp>
+        <p:nvSpPr>
+          <p:cNvPr id="22" name="TextBox 21">
+            <a:extLst>
+              <a:ext uri="{FF2B5EF4-FFF2-40B4-BE49-F238E27FC236}">
+                <a16:creationId xmlns:a16="http://schemas.microsoft.com/office/drawing/2014/main" id="{EED866B5-82E1-33E1-5DF7-1DCBBD9DCDF8}"/>
+              </a:ext>
+            </a:extLst>
+          </p:cNvPr>
+          <p:cNvSpPr txBox="1"/>
+          <p:nvPr/>
+        </p:nvSpPr>
+        <p:spPr>
+          <a:xfrm>
+            <a:off x="4571998" y="709017"/>
+            <a:ext cx="4197892" cy="2585323"/>
+          </a:xfrm>
+          <a:prstGeom prst="rect">
+            <a:avLst/>
+          </a:prstGeom>
+          <a:noFill/>
+          <a:ln>
+            <a:solidFill>
+              <a:schemeClr val="tx1"/>
+            </a:solidFill>
+            <a:prstDash val="dash"/>
+          </a:ln>
+        </p:spPr>
+        <p:txBody>
+          <a:bodyPr rot="0" spcFirstLastPara="0" vertOverflow="overflow" horzOverflow="overflow" vert="horz" wrap="square" lIns="91440" tIns="45720" rIns="91440" bIns="45720" numCol="1" spcCol="0" rtlCol="0" fromWordArt="0" anchor="ctr" anchorCtr="0" forceAA="0" compatLnSpc="1">
+            <a:prstTxWarp prst="textNoShape">
+              <a:avLst/>
+            </a:prstTxWarp>
+            <a:spAutoFit/>
+          </a:bodyPr>
+          <a:lstStyle/>
+          <a:p>
+            <a:r>
+              <a:rPr lang="ru-RU" dirty="0">
+                <a:latin typeface="Times New Roman" panose="02020603050405020304" pitchFamily="18" charset="0"/>
+                <a:cs typeface="Times New Roman" panose="02020603050405020304" pitchFamily="18" charset="0"/>
+              </a:rPr>
+              <a:t>Датасет содержит </a:t>
+            </a:r>
+            <a:r>
+              <a:rPr lang="ru-RU" b="1" dirty="0">
+                <a:latin typeface="Times New Roman" panose="02020603050405020304" pitchFamily="18" charset="0"/>
+                <a:cs typeface="Times New Roman" panose="02020603050405020304" pitchFamily="18" charset="0"/>
+              </a:rPr>
+              <a:t>16 129 </a:t>
+            </a:r>
+            <a:r>
+              <a:rPr lang="ru-RU" dirty="0">
+                <a:latin typeface="Times New Roman" panose="02020603050405020304" pitchFamily="18" charset="0"/>
+                <a:cs typeface="Times New Roman" panose="02020603050405020304" pitchFamily="18" charset="0"/>
+              </a:rPr>
+              <a:t>исходных кадров </a:t>
+            </a:r>
+            <a:r>
+              <a:rPr lang="ru-RU" b="1" dirty="0">
+                <a:latin typeface="Times New Roman" panose="02020603050405020304" pitchFamily="18" charset="0"/>
+                <a:cs typeface="Times New Roman" panose="02020603050405020304" pitchFamily="18" charset="0"/>
+              </a:rPr>
+              <a:t>без аугментаций</a:t>
+            </a:r>
+            <a:r>
+              <a:rPr lang="ru-RU" dirty="0">
+                <a:latin typeface="Times New Roman" panose="02020603050405020304" pitchFamily="18" charset="0"/>
+                <a:cs typeface="Times New Roman" panose="02020603050405020304" pitchFamily="18" charset="0"/>
+              </a:rPr>
+              <a:t>. Обучающая выборка включает </a:t>
+            </a:r>
+            <a:r>
+              <a:rPr lang="ru-RU" b="1" dirty="0">
+                <a:latin typeface="Times New Roman" panose="02020603050405020304" pitchFamily="18" charset="0"/>
+                <a:cs typeface="Times New Roman" panose="02020603050405020304" pitchFamily="18" charset="0"/>
+              </a:rPr>
+              <a:t>9 787</a:t>
+            </a:r>
+            <a:r>
+              <a:rPr lang="ru-RU" dirty="0">
+                <a:latin typeface="Times New Roman" panose="02020603050405020304" pitchFamily="18" charset="0"/>
+                <a:cs typeface="Times New Roman" panose="02020603050405020304" pitchFamily="18" charset="0"/>
+              </a:rPr>
+              <a:t> кадров, </a:t>
+            </a:r>
+            <a:r>
+              <a:rPr lang="ru-RU" dirty="0" err="1">
+                <a:latin typeface="Times New Roman" panose="02020603050405020304" pitchFamily="18" charset="0"/>
+                <a:cs typeface="Times New Roman" panose="02020603050405020304" pitchFamily="18" charset="0"/>
+              </a:rPr>
+              <a:t>валидационная</a:t>
+            </a:r>
+            <a:r>
+              <a:rPr lang="ru-RU" dirty="0">
+                <a:latin typeface="Times New Roman" panose="02020603050405020304" pitchFamily="18" charset="0"/>
+                <a:cs typeface="Times New Roman" panose="02020603050405020304" pitchFamily="18" charset="0"/>
+              </a:rPr>
+              <a:t> </a:t>
+            </a:r>
+            <a:r>
+              <a:rPr lang="ru-RU" b="1" dirty="0">
+                <a:latin typeface="Times New Roman" panose="02020603050405020304" pitchFamily="18" charset="0"/>
+                <a:cs typeface="Times New Roman" panose="02020603050405020304" pitchFamily="18" charset="0"/>
+              </a:rPr>
+              <a:t>3 005 </a:t>
+            </a:r>
+            <a:r>
+              <a:rPr lang="ru-RU" dirty="0">
+                <a:latin typeface="Times New Roman" panose="02020603050405020304" pitchFamily="18" charset="0"/>
+                <a:cs typeface="Times New Roman" panose="02020603050405020304" pitchFamily="18" charset="0"/>
+              </a:rPr>
+              <a:t>кадров, тестовая </a:t>
+            </a:r>
+            <a:r>
+              <a:rPr lang="ru-RU" b="1" dirty="0">
+                <a:latin typeface="Times New Roman" panose="02020603050405020304" pitchFamily="18" charset="0"/>
+                <a:cs typeface="Times New Roman" panose="02020603050405020304" pitchFamily="18" charset="0"/>
+              </a:rPr>
+              <a:t>3 337</a:t>
+            </a:r>
+            <a:r>
+              <a:rPr lang="ru-RU" dirty="0">
+                <a:latin typeface="Times New Roman" panose="02020603050405020304" pitchFamily="18" charset="0"/>
+                <a:cs typeface="Times New Roman" panose="02020603050405020304" pitchFamily="18" charset="0"/>
+              </a:rPr>
+              <a:t> кадров. Их доли составляют 60,6</a:t>
+            </a:r>
+            <a:r>
+              <a:rPr lang="ru-RU" b="1" dirty="0">
+                <a:latin typeface="Times New Roman" panose="02020603050405020304" pitchFamily="18" charset="0"/>
+                <a:cs typeface="Times New Roman" panose="02020603050405020304" pitchFamily="18" charset="0"/>
+              </a:rPr>
+              <a:t> </a:t>
+            </a:r>
+            <a:r>
+              <a:rPr lang="ru-RU" dirty="0">
+                <a:latin typeface="Times New Roman" panose="02020603050405020304" pitchFamily="18" charset="0"/>
+                <a:cs typeface="Times New Roman" panose="02020603050405020304" pitchFamily="18" charset="0"/>
+              </a:rPr>
+              <a:t>%, 18,7</a:t>
+            </a:r>
+            <a:r>
+              <a:rPr lang="ru-RU" b="1" dirty="0">
+                <a:latin typeface="Times New Roman" panose="02020603050405020304" pitchFamily="18" charset="0"/>
+                <a:cs typeface="Times New Roman" panose="02020603050405020304" pitchFamily="18" charset="0"/>
+              </a:rPr>
+              <a:t> </a:t>
+            </a:r>
+            <a:r>
+              <a:rPr lang="ru-RU" dirty="0">
+                <a:latin typeface="Times New Roman" panose="02020603050405020304" pitchFamily="18" charset="0"/>
+                <a:cs typeface="Times New Roman" panose="02020603050405020304" pitchFamily="18" charset="0"/>
+              </a:rPr>
+              <a:t>% и 20,7</a:t>
+            </a:r>
+            <a:r>
+              <a:rPr lang="ru-RU" b="1" dirty="0">
+                <a:latin typeface="Times New Roman" panose="02020603050405020304" pitchFamily="18" charset="0"/>
+                <a:cs typeface="Times New Roman" panose="02020603050405020304" pitchFamily="18" charset="0"/>
+              </a:rPr>
+              <a:t> </a:t>
+            </a:r>
+            <a:r>
+              <a:rPr lang="ru-RU" dirty="0">
+                <a:latin typeface="Times New Roman" panose="02020603050405020304" pitchFamily="18" charset="0"/>
+                <a:cs typeface="Times New Roman" panose="02020603050405020304" pitchFamily="18" charset="0"/>
+              </a:rPr>
+              <a:t>% соответственно. В обучающей выборке представлены </a:t>
+            </a:r>
+            <a:r>
+              <a:rPr lang="ru-RU" b="1" dirty="0">
+                <a:latin typeface="Times New Roman" panose="02020603050405020304" pitchFamily="18" charset="0"/>
+                <a:cs typeface="Times New Roman" panose="02020603050405020304" pitchFamily="18" charset="0"/>
+              </a:rPr>
+              <a:t>2 761 </a:t>
+            </a:r>
+            <a:r>
+              <a:rPr lang="ru-RU" dirty="0">
+                <a:latin typeface="Times New Roman" panose="02020603050405020304" pitchFamily="18" charset="0"/>
+                <a:cs typeface="Times New Roman" panose="02020603050405020304" pitchFamily="18" charset="0"/>
+              </a:rPr>
+              <a:t>кадр со «спагетти» и </a:t>
+            </a:r>
+            <a:r>
+              <a:rPr lang="ru-RU" b="1" dirty="0">
+                <a:latin typeface="Times New Roman" panose="02020603050405020304" pitchFamily="18" charset="0"/>
+                <a:cs typeface="Times New Roman" panose="02020603050405020304" pitchFamily="18" charset="0"/>
+              </a:rPr>
+              <a:t>7 026 </a:t>
+            </a:r>
+            <a:r>
+              <a:rPr lang="ru-RU" dirty="0">
+                <a:latin typeface="Times New Roman" panose="02020603050405020304" pitchFamily="18" charset="0"/>
+                <a:cs typeface="Times New Roman" panose="02020603050405020304" pitchFamily="18" charset="0"/>
+              </a:rPr>
+              <a:t>кадров без видимых признаков этого дефекта</a:t>
+            </a:r>
+          </a:p>
+        </p:txBody>
+      </p:sp>
+      <p:sp>
+        <p:nvSpPr>
+          <p:cNvPr id="25" name="TextBox 24">
+            <a:extLst>
+              <a:ext uri="{FF2B5EF4-FFF2-40B4-BE49-F238E27FC236}">
+                <a16:creationId xmlns:a16="http://schemas.microsoft.com/office/drawing/2014/main" id="{C8B6B692-286B-EE82-F648-38C45239ECF9}"/>
+              </a:ext>
+            </a:extLst>
+          </p:cNvPr>
+          <p:cNvSpPr txBox="1"/>
+          <p:nvPr/>
+        </p:nvSpPr>
+        <p:spPr>
+          <a:xfrm>
+            <a:off x="480428" y="3410116"/>
+            <a:ext cx="3869672" cy="3139321"/>
+          </a:xfrm>
+          <a:prstGeom prst="rect">
+            <a:avLst/>
+          </a:prstGeom>
+          <a:noFill/>
+          <a:ln>
+            <a:solidFill>
+              <a:schemeClr val="tx1"/>
+            </a:solidFill>
+            <a:prstDash val="dash"/>
+          </a:ln>
+        </p:spPr>
+        <p:txBody>
+          <a:bodyPr rot="0" spcFirstLastPara="0" vertOverflow="overflow" horzOverflow="overflow" vert="horz" wrap="square" lIns="91440" tIns="45720" rIns="91440" bIns="45720" numCol="1" spcCol="0" rtlCol="0" fromWordArt="0" anchor="ctr" anchorCtr="0" forceAA="0" compatLnSpc="1">
+            <a:prstTxWarp prst="textNoShape">
+              <a:avLst/>
+            </a:prstTxWarp>
+            <a:spAutoFit/>
+          </a:bodyPr>
+          <a:lstStyle/>
+          <a:p>
+            <a:r>
+              <a:rPr lang="ru-RU" dirty="0">
+                <a:latin typeface="Times New Roman" panose="02020603050405020304" pitchFamily="18" charset="0"/>
+                <a:cs typeface="Times New Roman" panose="02020603050405020304" pitchFamily="18" charset="0"/>
+              </a:rPr>
+              <a:t>В каждой эпохе обучения сохранялся </a:t>
+            </a:r>
+            <a:r>
+              <a:rPr lang="ru-RU" b="1" dirty="0">
+                <a:latin typeface="Times New Roman" panose="02020603050405020304" pitchFamily="18" charset="0"/>
+                <a:cs typeface="Times New Roman" panose="02020603050405020304" pitchFamily="18" charset="0"/>
+              </a:rPr>
+              <a:t>баланс классов 50/50</a:t>
+            </a:r>
+            <a:r>
+              <a:rPr lang="ru-RU" dirty="0">
+                <a:latin typeface="Times New Roman" panose="02020603050405020304" pitchFamily="18" charset="0"/>
+                <a:cs typeface="Times New Roman" panose="02020603050405020304" pitchFamily="18" charset="0"/>
+              </a:rPr>
+              <a:t>: модель получала </a:t>
+            </a:r>
+            <a:r>
+              <a:rPr lang="ru-RU" b="1" dirty="0">
+                <a:latin typeface="Times New Roman" panose="02020603050405020304" pitchFamily="18" charset="0"/>
+                <a:cs typeface="Times New Roman" panose="02020603050405020304" pitchFamily="18" charset="0"/>
+              </a:rPr>
+              <a:t>5 522</a:t>
+            </a:r>
+            <a:r>
+              <a:rPr lang="ru-RU" dirty="0">
+                <a:latin typeface="Times New Roman" panose="02020603050405020304" pitchFamily="18" charset="0"/>
+                <a:cs typeface="Times New Roman" panose="02020603050405020304" pitchFamily="18" charset="0"/>
+              </a:rPr>
+              <a:t> показа изображений, по </a:t>
+            </a:r>
+            <a:r>
+              <a:rPr lang="ru-RU" b="1" dirty="0">
+                <a:latin typeface="Times New Roman" panose="02020603050405020304" pitchFamily="18" charset="0"/>
+                <a:cs typeface="Times New Roman" panose="02020603050405020304" pitchFamily="18" charset="0"/>
+              </a:rPr>
+              <a:t>2 761</a:t>
+            </a:r>
+            <a:r>
+              <a:rPr lang="ru-RU" dirty="0">
+                <a:latin typeface="Times New Roman" panose="02020603050405020304" pitchFamily="18" charset="0"/>
+                <a:cs typeface="Times New Roman" panose="02020603050405020304" pitchFamily="18" charset="0"/>
+              </a:rPr>
+              <a:t> на каждый класс. После аугментации обучающая выборка содержит </a:t>
+            </a:r>
+            <a:r>
+              <a:rPr lang="ru-RU" b="1" dirty="0">
+                <a:latin typeface="Times New Roman" panose="02020603050405020304" pitchFamily="18" charset="0"/>
+                <a:cs typeface="Times New Roman" panose="02020603050405020304" pitchFamily="18" charset="0"/>
+              </a:rPr>
+              <a:t>29 361</a:t>
+            </a:r>
+            <a:r>
+              <a:rPr lang="ru-RU" dirty="0">
+                <a:latin typeface="Times New Roman" panose="02020603050405020304" pitchFamily="18" charset="0"/>
+                <a:cs typeface="Times New Roman" panose="02020603050405020304" pitchFamily="18" charset="0"/>
+              </a:rPr>
+              <a:t> изображение: к каждому исходному кадру добавлены два варианта. </a:t>
+            </a:r>
+            <a:r>
+              <a:rPr lang="ru-RU" dirty="0" err="1">
+                <a:latin typeface="Times New Roman" panose="02020603050405020304" pitchFamily="18" charset="0"/>
+                <a:cs typeface="Times New Roman" panose="02020603050405020304" pitchFamily="18" charset="0"/>
+              </a:rPr>
+              <a:t>Валидационная</a:t>
+            </a:r>
+            <a:r>
+              <a:rPr lang="ru-RU" dirty="0">
+                <a:latin typeface="Times New Roman" panose="02020603050405020304" pitchFamily="18" charset="0"/>
+                <a:cs typeface="Times New Roman" panose="02020603050405020304" pitchFamily="18" charset="0"/>
+              </a:rPr>
+              <a:t> и тестовая выборки содержат только исходные изображения и не </a:t>
+            </a:r>
+            <a:r>
+              <a:rPr lang="ru-RU" dirty="0" err="1">
+                <a:latin typeface="Times New Roman" panose="02020603050405020304" pitchFamily="18" charset="0"/>
+                <a:cs typeface="Times New Roman" panose="02020603050405020304" pitchFamily="18" charset="0"/>
+              </a:rPr>
+              <a:t>аугментируются</a:t>
+            </a:r>
+            <a:r>
+              <a:rPr lang="ru-RU" dirty="0">
+                <a:latin typeface="Times New Roman" panose="02020603050405020304" pitchFamily="18" charset="0"/>
+                <a:cs typeface="Times New Roman" panose="02020603050405020304" pitchFamily="18" charset="0"/>
+              </a:rPr>
+              <a:t>.</a:t>
+            </a:r>
+          </a:p>
+        </p:txBody>
+      </p:sp>
+      <p:sp>
+        <p:nvSpPr>
+          <p:cNvPr id="3" name="TextBox 26">
+            <a:extLst>
+              <a:ext uri="{FF2B5EF4-FFF2-40B4-BE49-F238E27FC236}">
+                <a16:creationId xmlns:a16="http://schemas.microsoft.com/office/drawing/2014/main" id="{DAC2E642-4E22-B5B0-DB31-19292E122F11}"/>
+              </a:ext>
+            </a:extLst>
+          </p:cNvPr>
+          <p:cNvSpPr>
+            <a:spLocks noGrp="1"/>
+          </p:cNvSpPr>
+          <p:nvPr/>
+        </p:nvSpPr>
+        <p:spPr>
+          <a:xfrm>
+            <a:off x="4634025" y="5970317"/>
+            <a:ext cx="4073130" cy="579120"/>
+          </a:xfrm>
+          <a:prstGeom prst="rect">
+            <a:avLst/>
+          </a:prstGeom>
+          <a:noFill/>
+        </p:spPr>
+        <p:txBody>
+          <a:bodyPr rot="0" spcFirstLastPara="0" vert="horz" wrap="square" lIns="91440" tIns="45720" rIns="91440" bIns="45720" anchor="ctr">
+            <a:noAutofit/>
+          </a:bodyPr>
+          <a:lstStyle>
+            <a:defPPr algn="l">
+              <a:defRPr sz="1600" b="0">
+                <a:solidFill>
+                  <a:srgbClr val="000000"/>
+                </a:solidFill>
+                <a:latin typeface="Times New Roman"/>
+                <a:ea typeface="Times New Roman"/>
+                <a:cs typeface="Times New Roman"/>
+              </a:defRPr>
+            </a:defPPr>
+          </a:lstStyle>
+          <a:p>
+            <a:pPr algn="ctr">
+              <a:defRPr sz="1600" b="0">
+                <a:solidFill>
+                  <a:srgbClr val="000000"/>
+                </a:solidFill>
+                <a:latin typeface="Times New Roman"/>
+                <a:ea typeface="Times New Roman"/>
+                <a:cs typeface="Times New Roman"/>
+              </a:defRPr>
+            </a:pPr>
+            <a:r>
+              <a:rPr sz="1600" b="0" dirty="0" err="1">
+                <a:solidFill>
+                  <a:srgbClr val="000000"/>
+                </a:solidFill>
+                <a:latin typeface="Times New Roman"/>
+                <a:ea typeface="Times New Roman"/>
+                <a:cs typeface="Times New Roman"/>
+              </a:rPr>
+              <a:t>Рис</a:t>
+            </a:r>
+            <a:r>
+              <a:rPr sz="1600" b="0" dirty="0">
+                <a:solidFill>
+                  <a:srgbClr val="000000"/>
+                </a:solidFill>
+                <a:latin typeface="Times New Roman"/>
+                <a:ea typeface="Times New Roman"/>
+                <a:cs typeface="Times New Roman"/>
+              </a:rPr>
+              <a:t>. </a:t>
+            </a:r>
+            <a:r>
+              <a:rPr lang="ru-RU" sz="1600" b="0" dirty="0">
+                <a:solidFill>
+                  <a:srgbClr val="000000"/>
+                </a:solidFill>
+                <a:latin typeface="Times New Roman"/>
+                <a:ea typeface="Times New Roman"/>
+                <a:cs typeface="Times New Roman"/>
+              </a:rPr>
+              <a:t>3</a:t>
+            </a:r>
+            <a:r>
+              <a:rPr sz="1600" b="0" dirty="0">
+                <a:solidFill>
+                  <a:srgbClr val="000000"/>
+                </a:solidFill>
+                <a:latin typeface="Times New Roman"/>
+                <a:ea typeface="Times New Roman"/>
+                <a:cs typeface="Times New Roman"/>
+              </a:rPr>
+              <a:t> – </a:t>
+            </a:r>
+            <a:r>
+              <a:rPr lang="ru-RU" sz="1600" b="0" dirty="0">
+                <a:solidFill>
+                  <a:srgbClr val="000000"/>
+                </a:solidFill>
+                <a:latin typeface="Times New Roman"/>
+                <a:ea typeface="Times New Roman"/>
+                <a:cs typeface="Times New Roman"/>
+              </a:rPr>
+              <a:t>Диаграмма распределения исходных кадров по выборкам</a:t>
+            </a:r>
+            <a:endParaRPr sz="1600" b="0" dirty="0">
+              <a:solidFill>
+                <a:srgbClr val="000000"/>
+              </a:solidFill>
+              <a:latin typeface="Times New Roman"/>
+              <a:ea typeface="Times New Roman"/>
+              <a:cs typeface="Times New Roman"/>
+            </a:endParaRPr>
+          </a:p>
+        </p:txBody>
+      </p:sp>
+      <p:pic>
+        <p:nvPicPr>
+          <p:cNvPr id="8" name="Рисунок 7">
+            <a:extLst>
+              <a:ext uri="{FF2B5EF4-FFF2-40B4-BE49-F238E27FC236}">
+                <a16:creationId xmlns:a16="http://schemas.microsoft.com/office/drawing/2014/main" id="{A2B5EBF5-FBE6-336C-42E4-49A8C5D8A0DF}"/>
+              </a:ext>
+            </a:extLst>
+          </p:cNvPr>
+          <p:cNvPicPr>
+            <a:picLocks noChangeAspect="1"/>
+          </p:cNvPicPr>
+          <p:nvPr/>
+        </p:nvPicPr>
+        <p:blipFill>
+          <a:blip r:embed="rId3"/>
+          <a:stretch>
+            <a:fillRect/>
+          </a:stretch>
+        </p:blipFill>
+        <p:spPr>
+          <a:xfrm>
+            <a:off x="4882102" y="3317275"/>
+            <a:ext cx="3976794" cy="2630107"/>
+          </a:xfrm>
+          <a:prstGeom prst="rect">
+            <a:avLst/>
+          </a:prstGeom>
+        </p:spPr>
+      </p:pic>
+    </p:spTree>
+    <p:extLst>
+      <p:ext uri="{BB962C8B-B14F-4D97-AF65-F5344CB8AC3E}">
+        <p14:creationId xmlns:p14="http://schemas.microsoft.com/office/powerpoint/2010/main" val="169297957"/>
+      </p:ext>
+    </p:extLst>
+  </p:cSld>
+  <p:clrMapOvr>
+    <a:masterClrMapping/>
+  </p:clrMapOvr>
+</p:sld>
+</file>
+
+<file path=ppt/slides/slide5.xml><?xml version="1.0" encoding="utf-8"?>
+<p:sld xmlns:a="http://schemas.openxmlformats.org/drawingml/2006/main" xmlns:r="http://schemas.openxmlformats.org/officeDocument/2006/relationships" xmlns:p="http://schemas.openxmlformats.org/presentationml/2006/main">
+  <p:cSld>
+    <p:spTree>
+      <p:nvGrpSpPr>
+        <p:cNvPr id="1" name="">
+          <a:extLst>
+            <a:ext uri="{FF2B5EF4-FFF2-40B4-BE49-F238E27FC236}">
+              <a16:creationId xmlns:a16="http://schemas.microsoft.com/office/drawing/2014/main" id="{586A209A-B3B7-9043-FC7E-DD693EE6AACA}"/>
+            </a:ext>
+          </a:extLst>
+        </p:cNvPr>
+        <p:cNvGrpSpPr/>
+        <p:nvPr/>
+      </p:nvGrpSpPr>
+      <p:grpSpPr>
+        <a:xfrm>
+          <a:off x="0" y="0"/>
+          <a:ext cx="0" cy="0"/>
+          <a:chOff x="0" y="0"/>
+          <a:chExt cx="0" cy="0"/>
+        </a:xfrm>
+      </p:grpSpPr>
+      <p:sp>
+        <p:nvSpPr>
+          <p:cNvPr id="2" name="Заголовок 1">
+            <a:extLst>
+              <a:ext uri="{FF2B5EF4-FFF2-40B4-BE49-F238E27FC236}">
+                <a16:creationId xmlns:a16="http://schemas.microsoft.com/office/drawing/2014/main" id="{648A91D6-F58A-86A8-231A-A5AC58545903}"/>
+              </a:ext>
+            </a:extLst>
+          </p:cNvPr>
+          <p:cNvSpPr>
+            <a:spLocks noGrp="1"/>
+          </p:cNvSpPr>
+          <p:nvPr>
+            <p:ph type="title"/>
+          </p:nvPr>
+        </p:nvSpPr>
+        <p:spPr>
+          <a:xfrm>
+            <a:off x="628648" y="0"/>
+            <a:ext cx="7886700" cy="712868"/>
+          </a:xfrm>
+        </p:spPr>
+        <p:txBody>
+          <a:bodyPr>
+            <a:normAutofit/>
+          </a:bodyPr>
+          <a:lstStyle/>
+          <a:p>
+            <a:pPr algn="ctr"/>
+            <a:r>
+              <a:rPr lang="ru-RU" sz="4000" dirty="0">
+                <a:latin typeface="Times New Roman" panose="02020603050405020304" pitchFamily="18" charset="0"/>
+                <a:ea typeface="Calibri"/>
+                <a:cs typeface="Times New Roman" panose="02020603050405020304" pitchFamily="18" charset="0"/>
+              </a:rPr>
+              <a:t>Подготовка к обучению нейросети</a:t>
+            </a:r>
+          </a:p>
+        </p:txBody>
+      </p:sp>
+      <p:sp>
+        <p:nvSpPr>
+          <p:cNvPr id="5" name="Замещающий номер слайда 4">
+            <a:extLst>
+              <a:ext uri="{FF2B5EF4-FFF2-40B4-BE49-F238E27FC236}">
+                <a16:creationId xmlns:a16="http://schemas.microsoft.com/office/drawing/2014/main" id="{425BE312-5EC5-E722-FD8E-916DFE636F2B}"/>
+              </a:ext>
+            </a:extLst>
+          </p:cNvPr>
+          <p:cNvSpPr>
+            <a:spLocks noGrp="1"/>
+          </p:cNvSpPr>
+          <p:nvPr>
+            <p:ph type="sldNum" sz="quarter" idx="12"/>
+          </p:nvPr>
+        </p:nvSpPr>
+        <p:spPr>
+          <a:xfrm>
+            <a:off x="7088886" y="6493511"/>
+            <a:ext cx="2057400" cy="365125"/>
+          </a:xfrm>
+        </p:spPr>
+        <p:txBody>
+          <a:bodyPr/>
+          <a:lstStyle/>
+          <a:p>
+            <a:fld id="{D6ED8A53-8D2F-4011-BE06-EDB0774336BA}" type="slidenum">
+              <a:rPr lang="ru-RU" sz="2000" dirty="0" smtClean="0">
+                <a:solidFill>
+                  <a:schemeClr val="tx1"/>
+                </a:solidFill>
+                <a:latin typeface="Times New Roman" panose="02020603050405020304" pitchFamily="18" charset="0"/>
+                <a:cs typeface="Times New Roman" panose="02020603050405020304" pitchFamily="18" charset="0"/>
+              </a:rPr>
+              <a:t>5</a:t>
+            </a:fld>
+            <a:endParaRPr lang="ru-RU" sz="2000">
+              <a:solidFill>
+                <a:schemeClr val="tx1"/>
+              </a:solidFill>
+              <a:latin typeface="Times New Roman" panose="02020603050405020304" pitchFamily="18" charset="0"/>
+              <a:ea typeface="Calibri"/>
+              <a:cs typeface="Times New Roman" panose="02020603050405020304" pitchFamily="18" charset="0"/>
+            </a:endParaRPr>
+          </a:p>
+        </p:txBody>
+      </p:sp>
+      <p:sp>
+        <p:nvSpPr>
+          <p:cNvPr id="14" name="TextBox 13">
+            <a:extLst>
+              <a:ext uri="{FF2B5EF4-FFF2-40B4-BE49-F238E27FC236}">
+                <a16:creationId xmlns:a16="http://schemas.microsoft.com/office/drawing/2014/main" id="{733275A9-2422-EE65-68B7-2EFC7CB717FE}"/>
+              </a:ext>
+            </a:extLst>
+          </p:cNvPr>
+          <p:cNvSpPr txBox="1"/>
+          <p:nvPr/>
+        </p:nvSpPr>
+        <p:spPr>
+          <a:xfrm>
+            <a:off x="444579" y="731952"/>
+            <a:ext cx="3869672" cy="2585323"/>
+          </a:xfrm>
+          <a:prstGeom prst="rect">
+            <a:avLst/>
+          </a:prstGeom>
+          <a:noFill/>
+          <a:ln>
+            <a:solidFill>
+              <a:schemeClr val="tx1"/>
+            </a:solidFill>
+            <a:prstDash val="dash"/>
+          </a:ln>
+        </p:spPr>
+        <p:txBody>
+          <a:bodyPr rot="0" spcFirstLastPara="0" vertOverflow="overflow" horzOverflow="overflow" vert="horz" wrap="square" lIns="91440" tIns="45720" rIns="91440" bIns="45720" numCol="1" spcCol="0" rtlCol="0" fromWordArt="0" anchor="ctr" anchorCtr="0" forceAA="0" compatLnSpc="1">
+            <a:prstTxWarp prst="textNoShape">
+              <a:avLst/>
+            </a:prstTxWarp>
+            <a:spAutoFit/>
+          </a:bodyPr>
+          <a:lstStyle/>
+          <a:p>
+            <a:r>
+              <a:rPr lang="ru-RU" dirty="0">
+                <a:latin typeface="Times New Roman" panose="02020603050405020304" pitchFamily="18" charset="0"/>
+                <a:cs typeface="Times New Roman" panose="02020603050405020304" pitchFamily="18" charset="0"/>
+              </a:rPr>
+              <a:t>Для обнаружения «спагетти» выбрана </a:t>
+            </a:r>
+            <a:r>
+              <a:rPr lang="ru-RU" b="1" dirty="0">
+                <a:latin typeface="Times New Roman" panose="02020603050405020304" pitchFamily="18" charset="0"/>
+                <a:cs typeface="Times New Roman" panose="02020603050405020304" pitchFamily="18" charset="0"/>
+              </a:rPr>
+              <a:t>ResNet18</a:t>
+            </a:r>
+            <a:r>
+              <a:rPr lang="ru-RU" dirty="0">
+                <a:latin typeface="Times New Roman" panose="02020603050405020304" pitchFamily="18" charset="0"/>
+                <a:cs typeface="Times New Roman" panose="02020603050405020304" pitchFamily="18" charset="0"/>
+              </a:rPr>
+              <a:t>. Она решает задачу как бинарную классификацию полного кадра: </a:t>
+            </a:r>
+            <a:r>
+              <a:rPr lang="ru-RU" b="1" dirty="0">
+                <a:latin typeface="Times New Roman" panose="02020603050405020304" pitchFamily="18" charset="0"/>
+                <a:cs typeface="Times New Roman" panose="02020603050405020304" pitchFamily="18" charset="0"/>
+              </a:rPr>
+              <a:t>есть дефект или нет</a:t>
+            </a:r>
+            <a:r>
+              <a:rPr lang="ru-RU" dirty="0">
+                <a:latin typeface="Times New Roman" panose="02020603050405020304" pitchFamily="18" charset="0"/>
+                <a:cs typeface="Times New Roman" panose="02020603050405020304" pitchFamily="18" charset="0"/>
+              </a:rPr>
+              <a:t>. Локализация дефектов рамкой в прошлых работах показала низкую точность. Детекция объектов сохранена только для поиска детали на столе.</a:t>
+            </a:r>
+            <a:endParaRPr lang="ru-RU" dirty="0">
+              <a:solidFill>
+                <a:srgbClr val="000000"/>
+              </a:solidFill>
+              <a:latin typeface="Times New Roman" panose="02020603050405020304" pitchFamily="18" charset="0"/>
+              <a:cs typeface="Times New Roman" panose="02020603050405020304" pitchFamily="18" charset="0"/>
+            </a:endParaRPr>
+          </a:p>
+        </p:txBody>
+      </p:sp>
+      <p:sp>
+        <p:nvSpPr>
+          <p:cNvPr id="22" name="TextBox 21">
+            <a:extLst>
+              <a:ext uri="{FF2B5EF4-FFF2-40B4-BE49-F238E27FC236}">
+                <a16:creationId xmlns:a16="http://schemas.microsoft.com/office/drawing/2014/main" id="{EED866B5-82E1-33E1-5DF7-1DCBBD9DCDF8}"/>
+              </a:ext>
+            </a:extLst>
+          </p:cNvPr>
+          <p:cNvSpPr txBox="1"/>
+          <p:nvPr/>
+        </p:nvSpPr>
+        <p:spPr>
+          <a:xfrm>
+            <a:off x="4571998" y="709017"/>
+            <a:ext cx="4197892" cy="2585323"/>
+          </a:xfrm>
+          <a:prstGeom prst="rect">
+            <a:avLst/>
+          </a:prstGeom>
+          <a:noFill/>
+          <a:ln>
+            <a:solidFill>
+              <a:schemeClr val="tx1"/>
+            </a:solidFill>
+            <a:prstDash val="dash"/>
+          </a:ln>
+        </p:spPr>
+        <p:txBody>
+          <a:bodyPr rot="0" spcFirstLastPara="0" vertOverflow="overflow" horzOverflow="overflow" vert="horz" wrap="square" lIns="91440" tIns="45720" rIns="91440" bIns="45720" numCol="1" spcCol="0" rtlCol="0" fromWordArt="0" anchor="ctr" anchorCtr="0" forceAA="0" compatLnSpc="1">
+            <a:prstTxWarp prst="textNoShape">
+              <a:avLst/>
+            </a:prstTxWarp>
+            <a:spAutoFit/>
+          </a:bodyPr>
+          <a:lstStyle/>
+          <a:p>
+            <a:r>
+              <a:rPr lang="ru-RU" dirty="0">
+                <a:latin typeface="Times New Roman" panose="02020603050405020304" pitchFamily="18" charset="0"/>
+                <a:cs typeface="Times New Roman" panose="02020603050405020304" pitchFamily="18" charset="0"/>
+              </a:rPr>
+              <a:t>Датасет содержит </a:t>
+            </a:r>
+            <a:r>
+              <a:rPr lang="ru-RU" b="1" dirty="0">
+                <a:latin typeface="Times New Roman" panose="02020603050405020304" pitchFamily="18" charset="0"/>
+                <a:cs typeface="Times New Roman" panose="02020603050405020304" pitchFamily="18" charset="0"/>
+              </a:rPr>
+              <a:t>16 129 </a:t>
+            </a:r>
+            <a:r>
+              <a:rPr lang="ru-RU" dirty="0">
+                <a:latin typeface="Times New Roman" panose="02020603050405020304" pitchFamily="18" charset="0"/>
+                <a:cs typeface="Times New Roman" panose="02020603050405020304" pitchFamily="18" charset="0"/>
+              </a:rPr>
+              <a:t>исходных кадров </a:t>
+            </a:r>
+            <a:r>
+              <a:rPr lang="ru-RU" b="1" dirty="0">
+                <a:latin typeface="Times New Roman" panose="02020603050405020304" pitchFamily="18" charset="0"/>
+                <a:cs typeface="Times New Roman" panose="02020603050405020304" pitchFamily="18" charset="0"/>
+              </a:rPr>
+              <a:t>без аугментаций</a:t>
+            </a:r>
+            <a:r>
+              <a:rPr lang="ru-RU" dirty="0">
+                <a:latin typeface="Times New Roman" panose="02020603050405020304" pitchFamily="18" charset="0"/>
+                <a:cs typeface="Times New Roman" panose="02020603050405020304" pitchFamily="18" charset="0"/>
+              </a:rPr>
+              <a:t>. Обучающая выборка включает </a:t>
+            </a:r>
+            <a:r>
+              <a:rPr lang="ru-RU" b="1" dirty="0">
+                <a:latin typeface="Times New Roman" panose="02020603050405020304" pitchFamily="18" charset="0"/>
+                <a:cs typeface="Times New Roman" panose="02020603050405020304" pitchFamily="18" charset="0"/>
+              </a:rPr>
+              <a:t>9 787</a:t>
+            </a:r>
+            <a:r>
+              <a:rPr lang="ru-RU" dirty="0">
+                <a:latin typeface="Times New Roman" panose="02020603050405020304" pitchFamily="18" charset="0"/>
+                <a:cs typeface="Times New Roman" panose="02020603050405020304" pitchFamily="18" charset="0"/>
+              </a:rPr>
+              <a:t> кадров, </a:t>
+            </a:r>
+            <a:r>
+              <a:rPr lang="ru-RU" dirty="0" err="1">
+                <a:latin typeface="Times New Roman" panose="02020603050405020304" pitchFamily="18" charset="0"/>
+                <a:cs typeface="Times New Roman" panose="02020603050405020304" pitchFamily="18" charset="0"/>
+              </a:rPr>
+              <a:t>валидационная</a:t>
+            </a:r>
+            <a:r>
+              <a:rPr lang="ru-RU" dirty="0">
+                <a:latin typeface="Times New Roman" panose="02020603050405020304" pitchFamily="18" charset="0"/>
+                <a:cs typeface="Times New Roman" panose="02020603050405020304" pitchFamily="18" charset="0"/>
+              </a:rPr>
+              <a:t> </a:t>
+            </a:r>
+            <a:r>
+              <a:rPr lang="ru-RU" b="1" dirty="0">
+                <a:latin typeface="Times New Roman" panose="02020603050405020304" pitchFamily="18" charset="0"/>
+                <a:cs typeface="Times New Roman" panose="02020603050405020304" pitchFamily="18" charset="0"/>
+              </a:rPr>
+              <a:t>3 005 </a:t>
+            </a:r>
+            <a:r>
+              <a:rPr lang="ru-RU" dirty="0">
+                <a:latin typeface="Times New Roman" panose="02020603050405020304" pitchFamily="18" charset="0"/>
+                <a:cs typeface="Times New Roman" panose="02020603050405020304" pitchFamily="18" charset="0"/>
+              </a:rPr>
+              <a:t>кадр, тестовая </a:t>
+            </a:r>
+            <a:r>
+              <a:rPr lang="ru-RU" b="1" dirty="0">
+                <a:latin typeface="Times New Roman" panose="02020603050405020304" pitchFamily="18" charset="0"/>
+                <a:cs typeface="Times New Roman" panose="02020603050405020304" pitchFamily="18" charset="0"/>
+              </a:rPr>
+              <a:t>3 337</a:t>
+            </a:r>
+            <a:r>
+              <a:rPr lang="ru-RU" dirty="0">
+                <a:latin typeface="Times New Roman" panose="02020603050405020304" pitchFamily="18" charset="0"/>
+                <a:cs typeface="Times New Roman" panose="02020603050405020304" pitchFamily="18" charset="0"/>
+              </a:rPr>
+              <a:t> кадров. Их доли составляют 60,6</a:t>
+            </a:r>
+            <a:r>
+              <a:rPr lang="ru-RU" b="1" dirty="0">
+                <a:latin typeface="Times New Roman" panose="02020603050405020304" pitchFamily="18" charset="0"/>
+                <a:cs typeface="Times New Roman" panose="02020603050405020304" pitchFamily="18" charset="0"/>
+              </a:rPr>
+              <a:t> </a:t>
+            </a:r>
+            <a:r>
+              <a:rPr lang="ru-RU" dirty="0">
+                <a:latin typeface="Times New Roman" panose="02020603050405020304" pitchFamily="18" charset="0"/>
+                <a:cs typeface="Times New Roman" panose="02020603050405020304" pitchFamily="18" charset="0"/>
+              </a:rPr>
+              <a:t>%, 18,7</a:t>
+            </a:r>
+            <a:r>
+              <a:rPr lang="ru-RU" b="1" dirty="0">
+                <a:latin typeface="Times New Roman" panose="02020603050405020304" pitchFamily="18" charset="0"/>
+                <a:cs typeface="Times New Roman" panose="02020603050405020304" pitchFamily="18" charset="0"/>
+              </a:rPr>
+              <a:t> </a:t>
+            </a:r>
+            <a:r>
+              <a:rPr lang="ru-RU" dirty="0">
+                <a:latin typeface="Times New Roman" panose="02020603050405020304" pitchFamily="18" charset="0"/>
+                <a:cs typeface="Times New Roman" panose="02020603050405020304" pitchFamily="18" charset="0"/>
+              </a:rPr>
+              <a:t>% и 20,7</a:t>
+            </a:r>
+            <a:r>
+              <a:rPr lang="ru-RU" b="1" dirty="0">
+                <a:latin typeface="Times New Roman" panose="02020603050405020304" pitchFamily="18" charset="0"/>
+                <a:cs typeface="Times New Roman" panose="02020603050405020304" pitchFamily="18" charset="0"/>
+              </a:rPr>
+              <a:t> </a:t>
+            </a:r>
+            <a:r>
+              <a:rPr lang="ru-RU" dirty="0">
+                <a:latin typeface="Times New Roman" panose="02020603050405020304" pitchFamily="18" charset="0"/>
+                <a:cs typeface="Times New Roman" panose="02020603050405020304" pitchFamily="18" charset="0"/>
+              </a:rPr>
+              <a:t>% соответственно. В обучающей выборке представлены </a:t>
+            </a:r>
+            <a:r>
+              <a:rPr lang="ru-RU" b="1" dirty="0">
+                <a:latin typeface="Times New Roman" panose="02020603050405020304" pitchFamily="18" charset="0"/>
+                <a:cs typeface="Times New Roman" panose="02020603050405020304" pitchFamily="18" charset="0"/>
+              </a:rPr>
+              <a:t>2 751 </a:t>
+            </a:r>
+            <a:r>
+              <a:rPr lang="ru-RU" dirty="0">
+                <a:latin typeface="Times New Roman" panose="02020603050405020304" pitchFamily="18" charset="0"/>
+                <a:cs typeface="Times New Roman" panose="02020603050405020304" pitchFamily="18" charset="0"/>
+              </a:rPr>
+              <a:t>кадр со «спагетти» и </a:t>
+            </a:r>
+            <a:r>
+              <a:rPr lang="ru-RU" b="1" dirty="0">
+                <a:latin typeface="Times New Roman" panose="02020603050405020304" pitchFamily="18" charset="0"/>
+                <a:cs typeface="Times New Roman" panose="02020603050405020304" pitchFamily="18" charset="0"/>
+              </a:rPr>
+              <a:t>7 017 </a:t>
+            </a:r>
+            <a:r>
+              <a:rPr lang="ru-RU" dirty="0">
+                <a:latin typeface="Times New Roman" panose="02020603050405020304" pitchFamily="18" charset="0"/>
+                <a:cs typeface="Times New Roman" panose="02020603050405020304" pitchFamily="18" charset="0"/>
+              </a:rPr>
+              <a:t>кадров без видимых признаков этого дефекта</a:t>
+            </a:r>
+          </a:p>
+        </p:txBody>
+      </p:sp>
+      <p:sp>
+        <p:nvSpPr>
+          <p:cNvPr id="25" name="TextBox 24">
+            <a:extLst>
+              <a:ext uri="{FF2B5EF4-FFF2-40B4-BE49-F238E27FC236}">
+                <a16:creationId xmlns:a16="http://schemas.microsoft.com/office/drawing/2014/main" id="{C8B6B692-286B-EE82-F648-38C45239ECF9}"/>
+              </a:ext>
+            </a:extLst>
+          </p:cNvPr>
+          <p:cNvSpPr txBox="1"/>
+          <p:nvPr/>
+        </p:nvSpPr>
+        <p:spPr>
+          <a:xfrm>
+            <a:off x="480428" y="3410116"/>
+            <a:ext cx="3869672" cy="3139321"/>
+          </a:xfrm>
+          <a:prstGeom prst="rect">
+            <a:avLst/>
+          </a:prstGeom>
+          <a:noFill/>
+          <a:ln>
+            <a:solidFill>
+              <a:schemeClr val="tx1"/>
+            </a:solidFill>
+            <a:prstDash val="dash"/>
+          </a:ln>
+        </p:spPr>
+        <p:txBody>
+          <a:bodyPr rot="0" spcFirstLastPara="0" vertOverflow="overflow" horzOverflow="overflow" vert="horz" wrap="square" lIns="91440" tIns="45720" rIns="91440" bIns="45720" numCol="1" spcCol="0" rtlCol="0" fromWordArt="0" anchor="ctr" anchorCtr="0" forceAA="0" compatLnSpc="1">
+            <a:prstTxWarp prst="textNoShape">
+              <a:avLst/>
+            </a:prstTxWarp>
+            <a:spAutoFit/>
+          </a:bodyPr>
+          <a:lstStyle/>
+          <a:p>
+            <a:r>
+              <a:rPr lang="ru-RU" dirty="0">
+                <a:latin typeface="Times New Roman" panose="02020603050405020304" pitchFamily="18" charset="0"/>
+                <a:cs typeface="Times New Roman" panose="02020603050405020304" pitchFamily="18" charset="0"/>
+              </a:rPr>
+              <a:t>В каждой эпохе обучения сохранялся </a:t>
+            </a:r>
+            <a:r>
+              <a:rPr lang="ru-RU" b="1" dirty="0">
+                <a:latin typeface="Times New Roman" panose="02020603050405020304" pitchFamily="18" charset="0"/>
+                <a:cs typeface="Times New Roman" panose="02020603050405020304" pitchFamily="18" charset="0"/>
+              </a:rPr>
+              <a:t>баланс классов 50/50</a:t>
+            </a:r>
+            <a:r>
+              <a:rPr lang="ru-RU" dirty="0">
+                <a:latin typeface="Times New Roman" panose="02020603050405020304" pitchFamily="18" charset="0"/>
+                <a:cs typeface="Times New Roman" panose="02020603050405020304" pitchFamily="18" charset="0"/>
+              </a:rPr>
+              <a:t>: модель получала </a:t>
+            </a:r>
+            <a:r>
+              <a:rPr lang="ru-RU" b="1" dirty="0">
+                <a:latin typeface="Times New Roman" panose="02020603050405020304" pitchFamily="18" charset="0"/>
+                <a:cs typeface="Times New Roman" panose="02020603050405020304" pitchFamily="18" charset="0"/>
+              </a:rPr>
+              <a:t>5 502</a:t>
+            </a:r>
+            <a:r>
+              <a:rPr lang="ru-RU" dirty="0">
+                <a:latin typeface="Times New Roman" panose="02020603050405020304" pitchFamily="18" charset="0"/>
+                <a:cs typeface="Times New Roman" panose="02020603050405020304" pitchFamily="18" charset="0"/>
+              </a:rPr>
+              <a:t> показа изображений, по </a:t>
+            </a:r>
+            <a:r>
+              <a:rPr lang="ru-RU" b="1" dirty="0">
+                <a:latin typeface="Times New Roman" panose="02020603050405020304" pitchFamily="18" charset="0"/>
+                <a:cs typeface="Times New Roman" panose="02020603050405020304" pitchFamily="18" charset="0"/>
+              </a:rPr>
+              <a:t>2 751</a:t>
+            </a:r>
+            <a:r>
+              <a:rPr lang="ru-RU" dirty="0">
+                <a:latin typeface="Times New Roman" panose="02020603050405020304" pitchFamily="18" charset="0"/>
+                <a:cs typeface="Times New Roman" panose="02020603050405020304" pitchFamily="18" charset="0"/>
+              </a:rPr>
+              <a:t> на каждый класс. После аугментации обучающая выборка содержит </a:t>
+            </a:r>
+            <a:r>
+              <a:rPr lang="ru-RU" b="1" dirty="0">
+                <a:latin typeface="Times New Roman" panose="02020603050405020304" pitchFamily="18" charset="0"/>
+                <a:cs typeface="Times New Roman" panose="02020603050405020304" pitchFamily="18" charset="0"/>
+              </a:rPr>
+              <a:t>29 304</a:t>
+            </a:r>
+            <a:r>
+              <a:rPr lang="ru-RU" dirty="0">
+                <a:latin typeface="Times New Roman" panose="02020603050405020304" pitchFamily="18" charset="0"/>
+                <a:cs typeface="Times New Roman" panose="02020603050405020304" pitchFamily="18" charset="0"/>
+              </a:rPr>
+              <a:t> изображения: к каждому исходному кадру добавлены два варианта. </a:t>
+            </a:r>
+            <a:r>
+              <a:rPr lang="ru-RU" dirty="0" err="1">
+                <a:latin typeface="Times New Roman" panose="02020603050405020304" pitchFamily="18" charset="0"/>
+                <a:cs typeface="Times New Roman" panose="02020603050405020304" pitchFamily="18" charset="0"/>
+              </a:rPr>
+              <a:t>Валидационная</a:t>
+            </a:r>
+            <a:r>
+              <a:rPr lang="ru-RU" dirty="0">
+                <a:latin typeface="Times New Roman" panose="02020603050405020304" pitchFamily="18" charset="0"/>
+                <a:cs typeface="Times New Roman" panose="02020603050405020304" pitchFamily="18" charset="0"/>
+              </a:rPr>
+              <a:t> и тестовая выборки содержат только исходные изображения и не </a:t>
+            </a:r>
+            <a:r>
+              <a:rPr lang="ru-RU" dirty="0" err="1">
+                <a:latin typeface="Times New Roman" panose="02020603050405020304" pitchFamily="18" charset="0"/>
+                <a:cs typeface="Times New Roman" panose="02020603050405020304" pitchFamily="18" charset="0"/>
+              </a:rPr>
+              <a:t>аугментируются</a:t>
+            </a:r>
+            <a:r>
+              <a:rPr lang="ru-RU" dirty="0">
+                <a:latin typeface="Times New Roman" panose="02020603050405020304" pitchFamily="18" charset="0"/>
+                <a:cs typeface="Times New Roman" panose="02020603050405020304" pitchFamily="18" charset="0"/>
+              </a:rPr>
+              <a:t>.</a:t>
+            </a:r>
+          </a:p>
+        </p:txBody>
+      </p:sp>
+      <p:sp>
+        <p:nvSpPr>
+          <p:cNvPr id="3" name="TextBox 26">
+            <a:extLst>
+              <a:ext uri="{FF2B5EF4-FFF2-40B4-BE49-F238E27FC236}">
+                <a16:creationId xmlns:a16="http://schemas.microsoft.com/office/drawing/2014/main" id="{DAC2E642-4E22-B5B0-DB31-19292E122F11}"/>
+              </a:ext>
+            </a:extLst>
+          </p:cNvPr>
+          <p:cNvSpPr>
+            <a:spLocks noGrp="1"/>
+          </p:cNvSpPr>
+          <p:nvPr/>
+        </p:nvSpPr>
+        <p:spPr>
+          <a:xfrm>
+            <a:off x="4634025" y="5970317"/>
+            <a:ext cx="4073130" cy="579120"/>
+          </a:xfrm>
+          <a:prstGeom prst="rect">
+            <a:avLst/>
+          </a:prstGeom>
+          <a:noFill/>
+        </p:spPr>
+        <p:txBody>
+          <a:bodyPr rot="0" spcFirstLastPara="0" vert="horz" wrap="square" lIns="91440" tIns="45720" rIns="91440" bIns="45720" anchor="ctr">
+            <a:noAutofit/>
+          </a:bodyPr>
+          <a:lstStyle>
+            <a:defPPr algn="l">
+              <a:defRPr sz="1600" b="0">
+                <a:solidFill>
+                  <a:srgbClr val="000000"/>
+                </a:solidFill>
+                <a:latin typeface="Times New Roman"/>
+                <a:ea typeface="Times New Roman"/>
+                <a:cs typeface="Times New Roman"/>
+              </a:defRPr>
+            </a:defPPr>
+          </a:lstStyle>
+          <a:p>
+            <a:pPr algn="ctr">
+              <a:defRPr sz="1600" b="0">
+                <a:solidFill>
+                  <a:srgbClr val="000000"/>
+                </a:solidFill>
+                <a:latin typeface="Times New Roman"/>
+                <a:ea typeface="Times New Roman"/>
+                <a:cs typeface="Times New Roman"/>
+              </a:defRPr>
+            </a:pPr>
+            <a:r>
+              <a:rPr sz="1600" b="0" dirty="0" err="1">
+                <a:solidFill>
+                  <a:srgbClr val="000000"/>
+                </a:solidFill>
+                <a:latin typeface="Times New Roman"/>
+                <a:ea typeface="Times New Roman"/>
+                <a:cs typeface="Times New Roman"/>
+              </a:rPr>
+              <a:t>Рис</a:t>
+            </a:r>
+            <a:r>
+              <a:rPr sz="1600" b="0" dirty="0">
+                <a:solidFill>
+                  <a:srgbClr val="000000"/>
+                </a:solidFill>
+                <a:latin typeface="Times New Roman"/>
+                <a:ea typeface="Times New Roman"/>
+                <a:cs typeface="Times New Roman"/>
+              </a:rPr>
+              <a:t>. </a:t>
+            </a:r>
+            <a:r>
+              <a:rPr lang="ru-RU" sz="1600" b="0" dirty="0">
+                <a:solidFill>
+                  <a:srgbClr val="000000"/>
+                </a:solidFill>
+                <a:latin typeface="Times New Roman"/>
+                <a:ea typeface="Times New Roman"/>
+                <a:cs typeface="Times New Roman"/>
+              </a:rPr>
+              <a:t>3</a:t>
+            </a:r>
+            <a:r>
+              <a:rPr sz="1600" b="0" dirty="0">
+                <a:solidFill>
+                  <a:srgbClr val="000000"/>
+                </a:solidFill>
+                <a:latin typeface="Times New Roman"/>
+                <a:ea typeface="Times New Roman"/>
+                <a:cs typeface="Times New Roman"/>
+              </a:rPr>
+              <a:t> – </a:t>
+            </a:r>
+            <a:r>
+              <a:rPr lang="ru-RU" sz="1600" b="0" dirty="0">
+                <a:solidFill>
+                  <a:srgbClr val="000000"/>
+                </a:solidFill>
+                <a:latin typeface="Times New Roman"/>
+                <a:ea typeface="Times New Roman"/>
+                <a:cs typeface="Times New Roman"/>
+              </a:rPr>
+              <a:t>Диаграмма распределения исходных кадров по выборкам</a:t>
+            </a:r>
+            <a:endParaRPr sz="1600" b="0" dirty="0">
+              <a:solidFill>
+                <a:srgbClr val="000000"/>
+              </a:solidFill>
+              <a:latin typeface="Times New Roman"/>
+              <a:ea typeface="Times New Roman"/>
+              <a:cs typeface="Times New Roman"/>
+            </a:endParaRPr>
+          </a:p>
+        </p:txBody>
+      </p:sp>
+      <p:pic>
+        <p:nvPicPr>
+          <p:cNvPr id="8" name="Рисунок 7">
+            <a:extLst>
+              <a:ext uri="{FF2B5EF4-FFF2-40B4-BE49-F238E27FC236}">
+                <a16:creationId xmlns:a16="http://schemas.microsoft.com/office/drawing/2014/main" id="{A2B5EBF5-FBE6-336C-42E4-49A8C5D8A0DF}"/>
+              </a:ext>
+            </a:extLst>
+          </p:cNvPr>
+          <p:cNvPicPr>
+            <a:picLocks noChangeAspect="1"/>
+          </p:cNvPicPr>
+          <p:nvPr/>
+        </p:nvPicPr>
+        <p:blipFill>
+          <a:blip r:embed="rId3"/>
+          <a:stretch>
+            <a:fillRect/>
+          </a:stretch>
+        </p:blipFill>
+        <p:spPr>
+          <a:xfrm>
+            <a:off x="4882102" y="3317275"/>
+            <a:ext cx="3976794" cy="2630107"/>
+          </a:xfrm>
+          <a:prstGeom prst="rect">
+            <a:avLst/>
+          </a:prstGeom>
+        </p:spPr>
+      </p:pic>
+    </p:spTree>
+    <p:extLst>
+      <p:ext uri="{BB962C8B-B14F-4D97-AF65-F5344CB8AC3E}">
+        <p14:creationId xmlns:p14="http://schemas.microsoft.com/office/powerpoint/2010/main" val="2707964732"/>
+      </p:ext>
+    </p:extLst>
+  </p:cSld>
+  <p:clrMapOvr>
+    <a:masterClrMapping/>
+  </p:clrMapOvr>
+</p:sld>
+</file>
+
+<file path=ppt/slides/slide6.xml><?xml version="1.0" encoding="utf-8"?>
+<p:sld xmlns:a="http://schemas.openxmlformats.org/drawingml/2006/main" xmlns:r="http://schemas.openxmlformats.org/officeDocument/2006/relationships" xmlns:p="http://schemas.openxmlformats.org/presentationml/2006/main">
+  <p:cSld>
+    <p:spTree>
+      <p:nvGrpSpPr>
+        <p:cNvPr id="1" name="">
+          <a:extLst>
+            <a:ext uri="{FF2B5EF4-FFF2-40B4-BE49-F238E27FC236}">
+              <a16:creationId xmlns:a16="http://schemas.microsoft.com/office/drawing/2014/main" id="{586A209A-B3B7-9043-FC7E-DD693EE6AACA}"/>
+            </a:ext>
+          </a:extLst>
+        </p:cNvPr>
+        <p:cNvGrpSpPr/>
+        <p:nvPr/>
+      </p:nvGrpSpPr>
+      <p:grpSpPr>
+        <a:xfrm>
+          <a:off x="0" y="0"/>
+          <a:ext cx="0" cy="0"/>
+          <a:chOff x="0" y="0"/>
+          <a:chExt cx="0" cy="0"/>
+        </a:xfrm>
+      </p:grpSpPr>
+      <p:sp>
+        <p:nvSpPr>
+          <p:cNvPr id="2" name="Заголовок 1">
+            <a:extLst>
+              <a:ext uri="{FF2B5EF4-FFF2-40B4-BE49-F238E27FC236}">
+                <a16:creationId xmlns:a16="http://schemas.microsoft.com/office/drawing/2014/main" id="{648A91D6-F58A-86A8-231A-A5AC58545903}"/>
+              </a:ext>
+            </a:extLst>
+          </p:cNvPr>
+          <p:cNvSpPr>
+            <a:spLocks noGrp="1"/>
+          </p:cNvSpPr>
+          <p:nvPr>
+            <p:ph type="title"/>
+          </p:nvPr>
+        </p:nvSpPr>
+        <p:spPr>
+          <a:xfrm>
+            <a:off x="628648" y="0"/>
+            <a:ext cx="7886700" cy="712868"/>
+          </a:xfrm>
+        </p:spPr>
+        <p:txBody>
+          <a:bodyPr>
+            <a:normAutofit/>
+          </a:bodyPr>
+          <a:lstStyle/>
+          <a:p>
+            <a:pPr algn="ctr"/>
+            <a:r>
+              <a:rPr lang="ru-RU" sz="4000" dirty="0">
+                <a:latin typeface="Times New Roman" panose="02020603050405020304" pitchFamily="18" charset="0"/>
+                <a:ea typeface="Calibri"/>
+                <a:cs typeface="Times New Roman" panose="02020603050405020304" pitchFamily="18" charset="0"/>
+              </a:rPr>
+              <a:t>Результат обучения нейросети</a:t>
+            </a:r>
+          </a:p>
+        </p:txBody>
+      </p:sp>
+      <p:sp>
+        <p:nvSpPr>
+          <p:cNvPr id="5" name="Замещающий номер слайда 4">
+            <a:extLst>
+              <a:ext uri="{FF2B5EF4-FFF2-40B4-BE49-F238E27FC236}">
+                <a16:creationId xmlns:a16="http://schemas.microsoft.com/office/drawing/2014/main" id="{425BE312-5EC5-E722-FD8E-916DFE636F2B}"/>
+              </a:ext>
+            </a:extLst>
+          </p:cNvPr>
+          <p:cNvSpPr>
+            <a:spLocks noGrp="1"/>
+          </p:cNvSpPr>
+          <p:nvPr>
+            <p:ph type="sldNum" sz="quarter" idx="12"/>
+          </p:nvPr>
+        </p:nvSpPr>
+        <p:spPr>
+          <a:xfrm>
+            <a:off x="7088886" y="6493511"/>
+            <a:ext cx="2057400" cy="365125"/>
+          </a:xfrm>
+        </p:spPr>
+        <p:txBody>
+          <a:bodyPr/>
+          <a:lstStyle/>
+          <a:p>
+            <a:fld id="{D6ED8A53-8D2F-4011-BE06-EDB0774336BA}" type="slidenum">
+              <a:rPr lang="ru-RU" sz="2000" dirty="0" smtClean="0">
+                <a:solidFill>
+                  <a:schemeClr val="tx1"/>
+                </a:solidFill>
+                <a:latin typeface="Times New Roman" panose="02020603050405020304" pitchFamily="18" charset="0"/>
+                <a:cs typeface="Times New Roman" panose="02020603050405020304" pitchFamily="18" charset="0"/>
+              </a:rPr>
+              <a:t>6</a:t>
+            </a:fld>
+            <a:endParaRPr lang="ru-RU" sz="2000">
+              <a:solidFill>
+                <a:schemeClr val="tx1"/>
+              </a:solidFill>
+              <a:latin typeface="Times New Roman" panose="02020603050405020304" pitchFamily="18" charset="0"/>
+              <a:ea typeface="Calibri"/>
+              <a:cs typeface="Times New Roman" panose="02020603050405020304" pitchFamily="18" charset="0"/>
+            </a:endParaRPr>
+          </a:p>
+        </p:txBody>
+      </p:sp>
+      <p:sp>
+        <p:nvSpPr>
+          <p:cNvPr id="14" name="TextBox 13">
+            <a:extLst>
+              <a:ext uri="{FF2B5EF4-FFF2-40B4-BE49-F238E27FC236}">
+                <a16:creationId xmlns:a16="http://schemas.microsoft.com/office/drawing/2014/main" id="{733275A9-2422-EE65-68B7-2EFC7CB717FE}"/>
+              </a:ext>
+            </a:extLst>
+          </p:cNvPr>
+          <p:cNvSpPr txBox="1"/>
+          <p:nvPr/>
+        </p:nvSpPr>
+        <p:spPr>
+          <a:xfrm>
+            <a:off x="444579" y="731952"/>
+            <a:ext cx="3869672" cy="2585323"/>
+          </a:xfrm>
+          <a:prstGeom prst="rect">
+            <a:avLst/>
+          </a:prstGeom>
+          <a:noFill/>
+          <a:ln>
+            <a:solidFill>
+              <a:schemeClr val="tx1"/>
+            </a:solidFill>
+            <a:prstDash val="dash"/>
+          </a:ln>
+        </p:spPr>
+        <p:txBody>
+          <a:bodyPr rot="0" spcFirstLastPara="0" vertOverflow="overflow" horzOverflow="overflow" vert="horz" wrap="square" lIns="91440" tIns="45720" rIns="91440" bIns="45720" numCol="1" spcCol="0" rtlCol="0" fromWordArt="0" anchor="ctr" anchorCtr="0" forceAA="0" compatLnSpc="1">
+            <a:prstTxWarp prst="textNoShape">
+              <a:avLst/>
+            </a:prstTxWarp>
+            <a:spAutoFit/>
+          </a:bodyPr>
+          <a:lstStyle/>
+          <a:p>
+            <a:r>
+              <a:rPr lang="ru-RU" dirty="0">
+                <a:latin typeface="Times New Roman" panose="02020603050405020304" pitchFamily="18" charset="0"/>
+                <a:cs typeface="Times New Roman" panose="02020603050405020304" pitchFamily="18" charset="0"/>
+              </a:rPr>
+              <a:t>Для обнаружения «спагетти» выбрана </a:t>
+            </a:r>
+            <a:r>
+              <a:rPr lang="ru-RU" b="1" dirty="0">
+                <a:latin typeface="Times New Roman" panose="02020603050405020304" pitchFamily="18" charset="0"/>
+                <a:cs typeface="Times New Roman" panose="02020603050405020304" pitchFamily="18" charset="0"/>
+              </a:rPr>
+              <a:t>ResNet18</a:t>
+            </a:r>
+            <a:r>
+              <a:rPr lang="ru-RU" dirty="0">
+                <a:latin typeface="Times New Roman" panose="02020603050405020304" pitchFamily="18" charset="0"/>
+                <a:cs typeface="Times New Roman" panose="02020603050405020304" pitchFamily="18" charset="0"/>
+              </a:rPr>
+              <a:t>. Она решает задачу как бинарную классификацию полного кадра: </a:t>
+            </a:r>
+            <a:r>
+              <a:rPr lang="ru-RU" b="1" dirty="0">
+                <a:latin typeface="Times New Roman" panose="02020603050405020304" pitchFamily="18" charset="0"/>
+                <a:cs typeface="Times New Roman" panose="02020603050405020304" pitchFamily="18" charset="0"/>
+              </a:rPr>
+              <a:t>есть дефект или нет</a:t>
+            </a:r>
+            <a:r>
+              <a:rPr lang="ru-RU" dirty="0">
+                <a:latin typeface="Times New Roman" panose="02020603050405020304" pitchFamily="18" charset="0"/>
+                <a:cs typeface="Times New Roman" panose="02020603050405020304" pitchFamily="18" charset="0"/>
+              </a:rPr>
+              <a:t>. Локализация дефектов рамкой в прошлых работах показала низкую точность. Детекция объектов сохранена только для поиска детали на столе.</a:t>
+            </a:r>
+            <a:endParaRPr lang="ru-RU" dirty="0">
+              <a:solidFill>
+                <a:srgbClr val="000000"/>
+              </a:solidFill>
+              <a:latin typeface="Times New Roman" panose="02020603050405020304" pitchFamily="18" charset="0"/>
+              <a:cs typeface="Times New Roman" panose="02020603050405020304" pitchFamily="18" charset="0"/>
+            </a:endParaRPr>
+          </a:p>
+        </p:txBody>
+      </p:sp>
+      <p:sp>
+        <p:nvSpPr>
+          <p:cNvPr id="22" name="TextBox 21">
+            <a:extLst>
+              <a:ext uri="{FF2B5EF4-FFF2-40B4-BE49-F238E27FC236}">
+                <a16:creationId xmlns:a16="http://schemas.microsoft.com/office/drawing/2014/main" id="{EED866B5-82E1-33E1-5DF7-1DCBBD9DCDF8}"/>
+              </a:ext>
+            </a:extLst>
+          </p:cNvPr>
+          <p:cNvSpPr txBox="1"/>
+          <p:nvPr/>
+        </p:nvSpPr>
+        <p:spPr>
+          <a:xfrm>
+            <a:off x="4771553" y="724829"/>
+            <a:ext cx="4197892" cy="1477328"/>
+          </a:xfrm>
+          <a:prstGeom prst="rect">
+            <a:avLst/>
+          </a:prstGeom>
+          <a:noFill/>
+          <a:ln>
+            <a:solidFill>
+              <a:schemeClr val="tx1"/>
+            </a:solidFill>
+            <a:prstDash val="dash"/>
+          </a:ln>
+        </p:spPr>
+        <p:txBody>
+          <a:bodyPr rot="0" spcFirstLastPara="0" vertOverflow="overflow" horzOverflow="overflow" vert="horz" wrap="square" lIns="91440" tIns="45720" rIns="91440" bIns="45720" numCol="1" spcCol="0" rtlCol="0" fromWordArt="0" anchor="ctr" anchorCtr="0" forceAA="0" compatLnSpc="1">
+            <a:prstTxWarp prst="textNoShape">
+              <a:avLst/>
+            </a:prstTxWarp>
+            <a:spAutoFit/>
+          </a:bodyPr>
+          <a:lstStyle/>
+          <a:p>
+            <a:r>
+              <a:rPr lang="ru-RU" dirty="0">
+                <a:latin typeface="Times New Roman" panose="02020603050405020304" pitchFamily="18" charset="0"/>
+                <a:cs typeface="Times New Roman" panose="02020603050405020304" pitchFamily="18" charset="0"/>
+              </a:rPr>
+              <a:t>Датасет содержит </a:t>
+            </a:r>
+            <a:r>
+              <a:rPr lang="ru-RU" b="1" dirty="0">
+                <a:latin typeface="Times New Roman" panose="02020603050405020304" pitchFamily="18" charset="0"/>
+                <a:cs typeface="Times New Roman" panose="02020603050405020304" pitchFamily="18" charset="0"/>
+              </a:rPr>
+              <a:t>16 014 кадров без аугментаций</a:t>
+            </a:r>
+            <a:r>
+              <a:rPr lang="ru-RU" dirty="0">
+                <a:latin typeface="Times New Roman" panose="02020603050405020304" pitchFamily="18" charset="0"/>
+                <a:cs typeface="Times New Roman" panose="02020603050405020304" pitchFamily="18" charset="0"/>
+              </a:rPr>
+              <a:t>: 4 574 кадра со «спагетти» и 11 440 кадров без видимых признаков этого дефекта. Выборки делились по соотношению 60/20/20.</a:t>
+            </a:r>
+          </a:p>
+        </p:txBody>
+      </p:sp>
+      <p:sp>
+        <p:nvSpPr>
+          <p:cNvPr id="25" name="TextBox 24">
+            <a:extLst>
+              <a:ext uri="{FF2B5EF4-FFF2-40B4-BE49-F238E27FC236}">
+                <a16:creationId xmlns:a16="http://schemas.microsoft.com/office/drawing/2014/main" id="{C8B6B692-286B-EE82-F648-38C45239ECF9}"/>
+              </a:ext>
+            </a:extLst>
+          </p:cNvPr>
+          <p:cNvSpPr txBox="1"/>
+          <p:nvPr/>
+        </p:nvSpPr>
+        <p:spPr>
+          <a:xfrm>
+            <a:off x="487537" y="3466535"/>
+            <a:ext cx="3869672" cy="2862322"/>
+          </a:xfrm>
+          <a:prstGeom prst="rect">
+            <a:avLst/>
+          </a:prstGeom>
+          <a:noFill/>
+          <a:ln>
+            <a:solidFill>
+              <a:schemeClr val="tx1"/>
+            </a:solidFill>
+            <a:prstDash val="dash"/>
+          </a:ln>
+        </p:spPr>
+        <p:txBody>
+          <a:bodyPr rot="0" spcFirstLastPara="0" vertOverflow="overflow" horzOverflow="overflow" vert="horz" wrap="square" lIns="91440" tIns="45720" rIns="91440" bIns="45720" numCol="1" spcCol="0" rtlCol="0" fromWordArt="0" anchor="ctr" anchorCtr="0" forceAA="0" compatLnSpc="1">
+            <a:prstTxWarp prst="textNoShape">
+              <a:avLst/>
+            </a:prstTxWarp>
+            <a:spAutoFit/>
+          </a:bodyPr>
+          <a:lstStyle/>
+          <a:p>
+            <a:r>
+              <a:rPr lang="ru-RU" dirty="0">
+                <a:latin typeface="Times New Roman" panose="02020603050405020304" pitchFamily="18" charset="0"/>
+                <a:cs typeface="Times New Roman" panose="02020603050405020304" pitchFamily="18" charset="0"/>
+              </a:rPr>
+              <a:t>Для каждой эпохи обучения сохранялся </a:t>
+            </a:r>
+            <a:r>
+              <a:rPr lang="ru-RU" b="1" dirty="0">
+                <a:latin typeface="Times New Roman" panose="02020603050405020304" pitchFamily="18" charset="0"/>
+                <a:cs typeface="Times New Roman" panose="02020603050405020304" pitchFamily="18" charset="0"/>
+              </a:rPr>
+              <a:t>баланс классов 50/50</a:t>
+            </a:r>
+            <a:r>
+              <a:rPr lang="ru-RU" dirty="0">
+                <a:latin typeface="Times New Roman" panose="02020603050405020304" pitchFamily="18" charset="0"/>
+                <a:cs typeface="Times New Roman" panose="02020603050405020304" pitchFamily="18" charset="0"/>
+              </a:rPr>
+              <a:t>: использовались все 2 746 кадров со «спагетти» и столько же случайно выбранных кадров без дефекта. Всего модель получала </a:t>
+            </a:r>
+            <a:r>
+              <a:rPr lang="ru-RU" b="1" dirty="0">
+                <a:latin typeface="Times New Roman" panose="02020603050405020304" pitchFamily="18" charset="0"/>
+                <a:cs typeface="Times New Roman" panose="02020603050405020304" pitchFamily="18" charset="0"/>
+              </a:rPr>
+              <a:t>5 492 изображения за эпоху</a:t>
+            </a:r>
+            <a:r>
+              <a:rPr lang="ru-RU" dirty="0">
+                <a:latin typeface="Times New Roman" panose="02020603050405020304" pitchFamily="18" charset="0"/>
+                <a:cs typeface="Times New Roman" panose="02020603050405020304" pitchFamily="18" charset="0"/>
+              </a:rPr>
+              <a:t>. </a:t>
+            </a:r>
+            <a:r>
+              <a:rPr lang="ru-RU" dirty="0" err="1">
+                <a:latin typeface="Times New Roman" panose="02020603050405020304" pitchFamily="18" charset="0"/>
+                <a:cs typeface="Times New Roman" panose="02020603050405020304" pitchFamily="18" charset="0"/>
+              </a:rPr>
+              <a:t>Валидационная</a:t>
+            </a:r>
+            <a:r>
+              <a:rPr lang="ru-RU" dirty="0">
+                <a:latin typeface="Times New Roman" panose="02020603050405020304" pitchFamily="18" charset="0"/>
+                <a:cs typeface="Times New Roman" panose="02020603050405020304" pitchFamily="18" charset="0"/>
+              </a:rPr>
+              <a:t> и тестовая выборки содержат только исходные изображения без аугментаций.</a:t>
+            </a:r>
+          </a:p>
+        </p:txBody>
+      </p:sp>
+      <p:sp>
+        <p:nvSpPr>
+          <p:cNvPr id="3" name="TextBox 26">
+            <a:extLst>
+              <a:ext uri="{FF2B5EF4-FFF2-40B4-BE49-F238E27FC236}">
+                <a16:creationId xmlns:a16="http://schemas.microsoft.com/office/drawing/2014/main" id="{155F7BCE-57B1-4886-841D-DAD17BC5CA7C}"/>
+              </a:ext>
+            </a:extLst>
+          </p:cNvPr>
+          <p:cNvSpPr>
+            <a:spLocks noGrp="1"/>
+          </p:cNvSpPr>
+          <p:nvPr/>
+        </p:nvSpPr>
+        <p:spPr>
+          <a:xfrm>
+            <a:off x="4703875" y="5554051"/>
+            <a:ext cx="4073130" cy="579120"/>
+          </a:xfrm>
+          <a:prstGeom prst="rect">
+            <a:avLst/>
+          </a:prstGeom>
+          <a:noFill/>
+        </p:spPr>
+        <p:txBody>
+          <a:bodyPr rot="0" spcFirstLastPara="0" vert="horz" wrap="square" lIns="91440" tIns="45720" rIns="91440" bIns="45720" anchor="ctr">
+            <a:noAutofit/>
+          </a:bodyPr>
+          <a:lstStyle>
+            <a:defPPr algn="l">
+              <a:defRPr sz="1600" b="0">
+                <a:solidFill>
+                  <a:srgbClr val="000000"/>
+                </a:solidFill>
+                <a:latin typeface="Times New Roman"/>
+                <a:ea typeface="Times New Roman"/>
+                <a:cs typeface="Times New Roman"/>
+              </a:defRPr>
+            </a:defPPr>
+          </a:lstStyle>
+          <a:p>
+            <a:pPr algn="ctr">
+              <a:defRPr sz="1600" b="0">
+                <a:solidFill>
+                  <a:srgbClr val="000000"/>
+                </a:solidFill>
+                <a:latin typeface="Times New Roman"/>
+                <a:ea typeface="Times New Roman"/>
+                <a:cs typeface="Times New Roman"/>
+              </a:defRPr>
+            </a:pPr>
+            <a:r>
+              <a:rPr sz="1600" b="0" dirty="0" err="1">
+                <a:solidFill>
+                  <a:srgbClr val="000000"/>
+                </a:solidFill>
+                <a:latin typeface="Times New Roman"/>
+                <a:ea typeface="Times New Roman"/>
+                <a:cs typeface="Times New Roman"/>
+              </a:rPr>
+              <a:t>Рис</a:t>
+            </a:r>
+            <a:r>
+              <a:rPr sz="1600" b="0" dirty="0">
+                <a:solidFill>
+                  <a:srgbClr val="000000"/>
+                </a:solidFill>
+                <a:latin typeface="Times New Roman"/>
+                <a:ea typeface="Times New Roman"/>
+                <a:cs typeface="Times New Roman"/>
+              </a:rPr>
+              <a:t>. </a:t>
+            </a:r>
+            <a:r>
+              <a:rPr lang="ru-RU" sz="1600" b="0" dirty="0">
+                <a:solidFill>
+                  <a:srgbClr val="000000"/>
+                </a:solidFill>
+                <a:latin typeface="Times New Roman"/>
+                <a:ea typeface="Times New Roman"/>
+                <a:cs typeface="Times New Roman"/>
+              </a:rPr>
+              <a:t>4,5</a:t>
+            </a:r>
+            <a:r>
+              <a:rPr sz="1600" b="0" dirty="0">
+                <a:solidFill>
+                  <a:srgbClr val="000000"/>
+                </a:solidFill>
+                <a:latin typeface="Times New Roman"/>
+                <a:ea typeface="Times New Roman"/>
+                <a:cs typeface="Times New Roman"/>
+              </a:rPr>
+              <a:t> – </a:t>
+            </a:r>
+            <a:r>
+              <a:rPr lang="ru-RU" sz="1600" b="0" dirty="0">
+                <a:solidFill>
+                  <a:srgbClr val="000000"/>
+                </a:solidFill>
+                <a:latin typeface="Times New Roman"/>
+                <a:ea typeface="Times New Roman"/>
+                <a:cs typeface="Times New Roman"/>
+              </a:rPr>
+              <a:t>Диаграмма статистики печатей на ферме компании «</a:t>
+            </a:r>
+            <a:r>
+              <a:rPr lang="en-US" sz="1600" b="0" dirty="0" err="1">
+                <a:solidFill>
+                  <a:srgbClr val="000000"/>
+                </a:solidFill>
+                <a:latin typeface="Times New Roman"/>
+                <a:ea typeface="Times New Roman"/>
+                <a:cs typeface="Times New Roman"/>
+              </a:rPr>
+              <a:t>Stereotech</a:t>
+            </a:r>
+            <a:r>
+              <a:rPr lang="ru-RU" sz="1600" b="0" dirty="0">
+                <a:solidFill>
+                  <a:srgbClr val="000000"/>
+                </a:solidFill>
+                <a:latin typeface="Times New Roman"/>
+                <a:ea typeface="Times New Roman"/>
+                <a:cs typeface="Times New Roman"/>
+              </a:rPr>
+              <a:t>»</a:t>
+            </a:r>
+            <a:endParaRPr sz="1600" b="0" dirty="0">
+              <a:solidFill>
+                <a:srgbClr val="000000"/>
+              </a:solidFill>
+              <a:latin typeface="Times New Roman"/>
+              <a:ea typeface="Times New Roman"/>
+              <a:cs typeface="Times New Roman"/>
+            </a:endParaRPr>
+          </a:p>
+        </p:txBody>
+      </p:sp>
+    </p:spTree>
+    <p:extLst>
+      <p:ext uri="{BB962C8B-B14F-4D97-AF65-F5344CB8AC3E}">
+        <p14:creationId xmlns:p14="http://schemas.microsoft.com/office/powerpoint/2010/main" val="3025447512"/>
+      </p:ext>
+    </p:extLst>
+  </p:cSld>
+  <p:clrMapOvr>
+    <a:masterClrMapping/>
+  </p:clrMapOvr>
+</p:sld>
+</file>
+
+<file path=ppt/slides/slide7.xml><?xml version="1.0" encoding="utf-8"?>
+<p:sld xmlns:a="http://schemas.openxmlformats.org/drawingml/2006/main" xmlns:r="http://schemas.openxmlformats.org/officeDocument/2006/relationships" xmlns:p="http://schemas.openxmlformats.org/presentationml/2006/main">
+  <p:cSld>
+    <p:spTree>
+      <p:nvGrpSpPr>
+        <p:cNvPr id="1" name="">
+          <a:extLst>
+            <a:ext uri="{FF2B5EF4-FFF2-40B4-BE49-F238E27FC236}">
+              <a16:creationId xmlns:a16="http://schemas.microsoft.com/office/drawing/2014/main" id="{829A4193-2A96-4292-27DF-7C8F10ED51F0}"/>
+            </a:ext>
+          </a:extLst>
+        </p:cNvPr>
+        <p:cNvGrpSpPr/>
+        <p:nvPr/>
+      </p:nvGrpSpPr>
+      <p:grpSpPr>
+        <a:xfrm>
+          <a:off x="0" y="0"/>
+          <a:ext cx="0" cy="0"/>
+          <a:chOff x="0" y="0"/>
+          <a:chExt cx="0" cy="0"/>
+        </a:xfrm>
+      </p:grpSpPr>
+      <p:sp>
+        <p:nvSpPr>
+          <p:cNvPr id="2" name="Заголовок 1">
+            <a:extLst>
+              <a:ext uri="{FF2B5EF4-FFF2-40B4-BE49-F238E27FC236}">
+                <a16:creationId xmlns:a16="http://schemas.microsoft.com/office/drawing/2014/main" id="{F71B51DD-8424-3898-F322-045B44C926E8}"/>
+              </a:ext>
+            </a:extLst>
+          </p:cNvPr>
+          <p:cNvSpPr>
+            <a:spLocks noGrp="1"/>
+          </p:cNvSpPr>
+          <p:nvPr>
+            <p:ph type="title"/>
+          </p:nvPr>
+        </p:nvSpPr>
+        <p:spPr>
+          <a:xfrm>
+            <a:off x="628650" y="9098"/>
+            <a:ext cx="7886700" cy="712868"/>
+          </a:xfrm>
+        </p:spPr>
+        <p:txBody>
+          <a:bodyPr>
+            <a:normAutofit/>
+          </a:bodyPr>
+          <a:lstStyle/>
+          <a:p>
+            <a:pPr algn="ctr"/>
+            <a:r>
+              <a:rPr lang="ru-RU" sz="4000" dirty="0">
+                <a:latin typeface="Times New Roman"/>
+                <a:ea typeface="Calibri"/>
+                <a:cs typeface="Times New Roman"/>
+              </a:rPr>
+              <a:t>Обработка на сервере</a:t>
+            </a:r>
+          </a:p>
+        </p:txBody>
+      </p:sp>
+      <p:sp>
+        <p:nvSpPr>
+          <p:cNvPr id="4" name="Текстовое поле 3">
+            <a:extLst>
+              <a:ext uri="{FF2B5EF4-FFF2-40B4-BE49-F238E27FC236}">
+                <a16:creationId xmlns:a16="http://schemas.microsoft.com/office/drawing/2014/main" id="{5E8559DA-50BE-07AC-B0EB-3414FBFB6481}"/>
+              </a:ext>
+            </a:extLst>
+          </p:cNvPr>
+          <p:cNvSpPr txBox="1"/>
+          <p:nvPr/>
+        </p:nvSpPr>
+        <p:spPr>
+          <a:xfrm>
+            <a:off x="3775710" y="5640705"/>
+            <a:ext cx="309880" cy="368300"/>
+          </a:xfrm>
+          <a:prstGeom prst="rect">
+            <a:avLst/>
+          </a:prstGeom>
+          <a:noFill/>
+        </p:spPr>
+        <p:txBody>
+          <a:bodyPr wrap="none" rtlCol="0">
+            <a:spAutoFit/>
+          </a:bodyPr>
+          <a:lstStyle/>
+          <a:p>
+            <a:endParaRPr lang="ru-RU" altLang="en-US"/>
+          </a:p>
+        </p:txBody>
+      </p:sp>
+      <p:sp>
+        <p:nvSpPr>
+          <p:cNvPr id="5" name="Замещающий номер слайда 4">
+            <a:extLst>
+              <a:ext uri="{FF2B5EF4-FFF2-40B4-BE49-F238E27FC236}">
+                <a16:creationId xmlns:a16="http://schemas.microsoft.com/office/drawing/2014/main" id="{28EFF76E-32CA-AB56-A1FE-FC86064D66B4}"/>
+              </a:ext>
+            </a:extLst>
+          </p:cNvPr>
+          <p:cNvSpPr>
+            <a:spLocks noGrp="1"/>
+          </p:cNvSpPr>
+          <p:nvPr>
+            <p:ph type="sldNum" sz="quarter" idx="12"/>
+          </p:nvPr>
+        </p:nvSpPr>
+        <p:spPr>
+          <a:xfrm>
+            <a:off x="7088886" y="6493511"/>
+            <a:ext cx="2057400" cy="365125"/>
+          </a:xfrm>
+        </p:spPr>
+        <p:txBody>
+          <a:bodyPr/>
+          <a:lstStyle/>
+          <a:p>
+            <a:fld id="{D6ED8A53-8D2F-4011-BE06-EDB0774336BA}" type="slidenum">
+              <a:rPr lang="ru-RU" sz="2000" dirty="0" smtClean="0">
+                <a:solidFill>
+                  <a:schemeClr val="tx1"/>
+                </a:solidFill>
+                <a:latin typeface="Times New Roman"/>
+                <a:cs typeface="Times New Roman"/>
+              </a:rPr>
+              <a:t>7</a:t>
+            </a:fld>
+            <a:endParaRPr lang="ru-RU" sz="2000">
+              <a:solidFill>
+                <a:schemeClr val="tx1"/>
+              </a:solidFill>
+              <a:latin typeface="Times New Roman"/>
+              <a:ea typeface="Calibri"/>
+              <a:cs typeface="Times New Roman"/>
+            </a:endParaRPr>
+          </a:p>
+        </p:txBody>
+      </p:sp>
+      <p:sp>
+        <p:nvSpPr>
+          <p:cNvPr id="8" name="TextBox 7">
+            <a:extLst>
+              <a:ext uri="{FF2B5EF4-FFF2-40B4-BE49-F238E27FC236}">
+                <a16:creationId xmlns:a16="http://schemas.microsoft.com/office/drawing/2014/main" id="{3FDAB50E-3BD8-57A2-B047-497A3FD50648}"/>
+              </a:ext>
+            </a:extLst>
+          </p:cNvPr>
+          <p:cNvSpPr txBox="1"/>
+          <p:nvPr/>
+        </p:nvSpPr>
+        <p:spPr>
+          <a:xfrm>
+            <a:off x="186213" y="875407"/>
+            <a:ext cx="2920514" cy="1477328"/>
+          </a:xfrm>
+          <a:prstGeom prst="rect">
+            <a:avLst/>
+          </a:prstGeom>
+          <a:noFill/>
+          <a:ln>
+            <a:solidFill>
+              <a:schemeClr val="tx1"/>
+            </a:solidFill>
+            <a:prstDash val="dash"/>
+          </a:ln>
+        </p:spPr>
+        <p:txBody>
+          <a:bodyPr rot="0" spcFirstLastPara="0" vertOverflow="overflow" horzOverflow="overflow" vert="horz" wrap="square" lIns="91440" tIns="45720" rIns="91440" bIns="45720" numCol="1" spcCol="0" rtlCol="0" fromWordArt="0" anchor="ctr" anchorCtr="0" forceAA="0" compatLnSpc="1">
+            <a:prstTxWarp prst="textNoShape">
+              <a:avLst/>
+            </a:prstTxWarp>
+            <a:spAutoFit/>
+          </a:bodyPr>
+          <a:lstStyle/>
+          <a:p>
+            <a:pPr algn="ctr"/>
+            <a:r>
+              <a:rPr lang="ru-RU" dirty="0">
+                <a:latin typeface="Times New Roman"/>
+                <a:ea typeface="+mn-lt"/>
+                <a:cs typeface="+mn-lt"/>
+              </a:rPr>
+              <a:t>Роль сервера:</a:t>
+            </a:r>
+            <a:endParaRPr lang="ru-RU" dirty="0">
+              <a:latin typeface="Times New Roman"/>
+              <a:cs typeface="Times New Roman"/>
+            </a:endParaRPr>
+          </a:p>
+          <a:p>
+            <a:pPr marL="285750" indent="-285750">
+              <a:buFont typeface="Arial"/>
+              <a:buChar char="•"/>
+            </a:pPr>
+            <a:r>
+              <a:rPr lang="ru-RU" b="1" dirty="0">
+                <a:latin typeface="Times New Roman"/>
+                <a:ea typeface="+mn-lt"/>
+                <a:cs typeface="+mn-lt"/>
+              </a:rPr>
+              <a:t>Централизованная </a:t>
+            </a:r>
+            <a:r>
+              <a:rPr lang="ru-RU" dirty="0">
+                <a:latin typeface="Times New Roman"/>
+                <a:ea typeface="+mn-lt"/>
+                <a:cs typeface="+mn-lt"/>
+              </a:rPr>
+              <a:t>обработка запросов.</a:t>
+            </a:r>
+            <a:endParaRPr lang="ru-RU" dirty="0">
+              <a:latin typeface="Times New Roman"/>
+              <a:cs typeface="Times New Roman"/>
+            </a:endParaRPr>
+          </a:p>
+          <a:p>
+            <a:pPr marL="285750" indent="-285750">
+              <a:buFont typeface="Arial"/>
+              <a:buChar char="•"/>
+            </a:pPr>
+            <a:r>
+              <a:rPr lang="ru-RU" dirty="0">
+                <a:latin typeface="Times New Roman"/>
+                <a:ea typeface="+mn-lt"/>
+                <a:cs typeface="+mn-lt"/>
+              </a:rPr>
+              <a:t>Выполнение </a:t>
+            </a:r>
+            <a:r>
+              <a:rPr lang="ru-RU" b="1" dirty="0">
+                <a:latin typeface="Times New Roman"/>
+                <a:ea typeface="+mn-lt"/>
+                <a:cs typeface="+mn-lt"/>
+              </a:rPr>
+              <a:t>ресурсоёмких </a:t>
+            </a:r>
+            <a:r>
+              <a:rPr lang="ru-RU" dirty="0">
+                <a:latin typeface="Times New Roman"/>
+                <a:ea typeface="+mn-lt"/>
+                <a:cs typeface="+mn-lt"/>
+              </a:rPr>
+              <a:t>задач.</a:t>
+            </a:r>
+            <a:endParaRPr lang="ru-RU" dirty="0">
+              <a:latin typeface="Times New Roman"/>
+              <a:cs typeface="Times New Roman"/>
+            </a:endParaRPr>
+          </a:p>
+        </p:txBody>
+      </p:sp>
+      <p:pic>
+        <p:nvPicPr>
+          <p:cNvPr id="7" name="Рисунок 6">
+            <a:extLst>
+              <a:ext uri="{FF2B5EF4-FFF2-40B4-BE49-F238E27FC236}">
+                <a16:creationId xmlns:a16="http://schemas.microsoft.com/office/drawing/2014/main" id="{DA035444-9EBE-0F23-C21B-B713FDEC75FD}"/>
+              </a:ext>
+            </a:extLst>
+          </p:cNvPr>
+          <p:cNvPicPr>
+            <a:picLocks noChangeAspect="1"/>
+          </p:cNvPicPr>
+          <p:nvPr/>
+        </p:nvPicPr>
+        <p:blipFill>
+          <a:blip r:embed="rId3">
+            <a:extLst>
+              <a:ext uri="{28A0092B-C50C-407E-A947-70E740481C1C}">
+                <a14:useLocalDpi xmlns:a14="http://schemas.microsoft.com/office/drawing/2010/main" val="0"/>
+              </a:ext>
+            </a:extLst>
+          </a:blip>
+          <a:srcRect/>
+          <a:stretch/>
+        </p:blipFill>
+        <p:spPr>
+          <a:xfrm>
+            <a:off x="3302968" y="875407"/>
+            <a:ext cx="5639137" cy="5093570"/>
+          </a:xfrm>
+          <a:prstGeom prst="rect">
+            <a:avLst/>
+          </a:prstGeom>
+        </p:spPr>
+      </p:pic>
+      <p:sp>
+        <p:nvSpPr>
+          <p:cNvPr id="12" name="TextBox 11">
+            <a:extLst>
+              <a:ext uri="{FF2B5EF4-FFF2-40B4-BE49-F238E27FC236}">
+                <a16:creationId xmlns:a16="http://schemas.microsoft.com/office/drawing/2014/main" id="{D77D804C-EAD2-5379-2030-7517770A46AB}"/>
+              </a:ext>
+            </a:extLst>
+          </p:cNvPr>
+          <p:cNvSpPr txBox="1"/>
+          <p:nvPr/>
+        </p:nvSpPr>
+        <p:spPr>
+          <a:xfrm>
+            <a:off x="186213" y="2593566"/>
+            <a:ext cx="2920514" cy="3416320"/>
+          </a:xfrm>
+          <a:prstGeom prst="rect">
+            <a:avLst/>
+          </a:prstGeom>
+          <a:noFill/>
+          <a:ln>
+            <a:solidFill>
+              <a:schemeClr val="tx1"/>
+            </a:solidFill>
+            <a:prstDash val="dash"/>
+          </a:ln>
+        </p:spPr>
+        <p:txBody>
+          <a:bodyPr rot="0" spcFirstLastPara="0" vertOverflow="overflow" horzOverflow="overflow" vert="horz" wrap="square" lIns="91440" tIns="45720" rIns="91440" bIns="45720" numCol="1" spcCol="0" rtlCol="0" fromWordArt="0" anchor="ctr" anchorCtr="0" forceAA="0" compatLnSpc="1">
+            <a:prstTxWarp prst="textNoShape">
+              <a:avLst/>
+            </a:prstTxWarp>
+            <a:spAutoFit/>
+          </a:bodyPr>
+          <a:lstStyle/>
+          <a:p>
+            <a:r>
+              <a:rPr lang="ru-RU" dirty="0">
+                <a:latin typeface="Times New Roman" panose="02020603050405020304" pitchFamily="18" charset="0"/>
+                <a:cs typeface="Times New Roman" panose="02020603050405020304" pitchFamily="18" charset="0"/>
+              </a:rPr>
+              <a:t>Сервер </a:t>
+            </a:r>
+            <a:r>
+              <a:rPr lang="ru-RU" b="1" dirty="0">
+                <a:latin typeface="Times New Roman" panose="02020603050405020304" pitchFamily="18" charset="0"/>
+                <a:cs typeface="Times New Roman" panose="02020603050405020304" pitchFamily="18" charset="0"/>
+              </a:rPr>
+              <a:t>получает кадр </a:t>
+            </a:r>
+            <a:r>
+              <a:rPr lang="ru-RU" dirty="0">
+                <a:latin typeface="Times New Roman" panose="02020603050405020304" pitchFamily="18" charset="0"/>
+                <a:cs typeface="Times New Roman" panose="02020603050405020304" pitchFamily="18" charset="0"/>
+              </a:rPr>
+              <a:t>с камеры и идентификаторы сессии. После кадр анализируется нейросетью, которая </a:t>
+            </a:r>
+            <a:r>
+              <a:rPr lang="ru-RU" b="1" dirty="0">
+                <a:latin typeface="Times New Roman" panose="02020603050405020304" pitchFamily="18" charset="0"/>
+                <a:cs typeface="Times New Roman" panose="02020603050405020304" pitchFamily="18" charset="0"/>
+              </a:rPr>
+              <a:t>определяет наличие «спагетти»</a:t>
+            </a:r>
+            <a:r>
+              <a:rPr lang="ru-RU" dirty="0">
+                <a:latin typeface="Times New Roman" panose="02020603050405020304" pitchFamily="18" charset="0"/>
+                <a:cs typeface="Times New Roman" panose="02020603050405020304" pitchFamily="18" charset="0"/>
+              </a:rPr>
+              <a:t>.</a:t>
+            </a:r>
+            <a:r>
+              <a:rPr lang="ru-RU" b="1" dirty="0">
+                <a:latin typeface="Times New Roman" panose="02020603050405020304" pitchFamily="18" charset="0"/>
+                <a:cs typeface="Times New Roman" panose="02020603050405020304" pitchFamily="18" charset="0"/>
+              </a:rPr>
+              <a:t> </a:t>
+            </a:r>
+            <a:r>
+              <a:rPr lang="ru-RU" dirty="0">
+                <a:latin typeface="Times New Roman" panose="02020603050405020304" pitchFamily="18" charset="0"/>
+                <a:cs typeface="Times New Roman" panose="02020603050405020304" pitchFamily="18" charset="0"/>
+              </a:rPr>
+              <a:t>Сервер возвращает признак дефекта и числовую оценку модели вместе с исходными идентификаторами, связывающими результат с конкретным кадром</a:t>
+            </a:r>
+          </a:p>
+        </p:txBody>
+      </p:sp>
+      <p:sp>
+        <p:nvSpPr>
+          <p:cNvPr id="3" name="TextBox 26">
+            <a:extLst>
+              <a:ext uri="{FF2B5EF4-FFF2-40B4-BE49-F238E27FC236}">
+                <a16:creationId xmlns:a16="http://schemas.microsoft.com/office/drawing/2014/main" id="{B2494F24-8111-2CAC-A358-3AE7239D4D1C}"/>
+              </a:ext>
+            </a:extLst>
+          </p:cNvPr>
+          <p:cNvSpPr>
+            <a:spLocks noGrp="1"/>
+          </p:cNvSpPr>
+          <p:nvPr/>
+        </p:nvSpPr>
+        <p:spPr>
+          <a:xfrm>
+            <a:off x="4085971" y="6009005"/>
+            <a:ext cx="4073130" cy="579120"/>
+          </a:xfrm>
+          <a:prstGeom prst="rect">
+            <a:avLst/>
+          </a:prstGeom>
+          <a:noFill/>
+        </p:spPr>
+        <p:txBody>
+          <a:bodyPr rot="0" spcFirstLastPara="0" vert="horz" wrap="square" lIns="91440" tIns="45720" rIns="91440" bIns="45720" anchor="ctr">
+            <a:noAutofit/>
+          </a:bodyPr>
+          <a:lstStyle>
+            <a:defPPr algn="l">
+              <a:defRPr sz="1600" b="0">
+                <a:solidFill>
+                  <a:srgbClr val="000000"/>
+                </a:solidFill>
+                <a:latin typeface="Times New Roman"/>
+                <a:ea typeface="Times New Roman"/>
+                <a:cs typeface="Times New Roman"/>
+              </a:defRPr>
+            </a:defPPr>
+          </a:lstStyle>
+          <a:p>
+            <a:pPr algn="ctr">
+              <a:defRPr sz="1600" b="0">
+                <a:solidFill>
+                  <a:srgbClr val="000000"/>
+                </a:solidFill>
+                <a:latin typeface="Times New Roman"/>
+                <a:ea typeface="Times New Roman"/>
+                <a:cs typeface="Times New Roman"/>
+              </a:defRPr>
+            </a:pPr>
+            <a:r>
+              <a:rPr sz="1600" b="0" dirty="0" err="1">
+                <a:solidFill>
+                  <a:srgbClr val="000000"/>
+                </a:solidFill>
+                <a:latin typeface="Times New Roman"/>
+                <a:ea typeface="Times New Roman"/>
+                <a:cs typeface="Times New Roman"/>
+              </a:rPr>
+              <a:t>Рис</a:t>
+            </a:r>
+            <a:r>
+              <a:rPr sz="1600" b="0" dirty="0">
+                <a:solidFill>
+                  <a:srgbClr val="000000"/>
+                </a:solidFill>
+                <a:latin typeface="Times New Roman"/>
+                <a:ea typeface="Times New Roman"/>
+                <a:cs typeface="Times New Roman"/>
+              </a:rPr>
+              <a:t>. </a:t>
+            </a:r>
+            <a:r>
+              <a:rPr lang="ru-RU" sz="1600" b="0" dirty="0">
+                <a:solidFill>
+                  <a:srgbClr val="000000"/>
+                </a:solidFill>
+                <a:latin typeface="Times New Roman"/>
+                <a:ea typeface="Times New Roman"/>
+                <a:cs typeface="Times New Roman"/>
+              </a:rPr>
+              <a:t>6</a:t>
+            </a:r>
+            <a:r>
+              <a:rPr sz="1600" b="0" dirty="0">
+                <a:solidFill>
+                  <a:srgbClr val="000000"/>
+                </a:solidFill>
+                <a:latin typeface="Times New Roman"/>
+                <a:ea typeface="Times New Roman"/>
+                <a:cs typeface="Times New Roman"/>
+              </a:rPr>
+              <a:t> –</a:t>
+            </a:r>
+            <a:r>
+              <a:rPr lang="ru-RU" sz="1600" b="0" dirty="0">
+                <a:solidFill>
+                  <a:srgbClr val="000000"/>
+                </a:solidFill>
+                <a:latin typeface="Times New Roman"/>
+                <a:ea typeface="Times New Roman"/>
+                <a:cs typeface="Times New Roman"/>
+              </a:rPr>
+              <a:t> Блок-схема серверной обработки кадров и определения дефектов FDM-печати</a:t>
+            </a:r>
+            <a:r>
+              <a:rPr sz="1600" b="0" dirty="0">
+                <a:solidFill>
+                  <a:srgbClr val="000000"/>
+                </a:solidFill>
+                <a:latin typeface="Times New Roman"/>
+                <a:ea typeface="Times New Roman"/>
+                <a:cs typeface="Times New Roman"/>
+              </a:rPr>
+              <a:t> </a:t>
+            </a:r>
+          </a:p>
+        </p:txBody>
+      </p:sp>
+    </p:spTree>
+    <p:extLst>
+      <p:ext uri="{BB962C8B-B14F-4D97-AF65-F5344CB8AC3E}">
+        <p14:creationId xmlns:p14="http://schemas.microsoft.com/office/powerpoint/2010/main" val="2065725557"/>
+      </p:ext>
+    </p:extLst>
+  </p:cSld>
+  <p:clrMapOvr>
+    <a:masterClrMapping/>
+  </p:clrMapOvr>
+</p:sld>
+</file>
+
+<file path=ppt/slides/slide8.xml><?xml version="1.0" encoding="utf-8"?>
+<p:sld xmlns:a="http://schemas.openxmlformats.org/drawingml/2006/main" xmlns:r="http://schemas.openxmlformats.org/officeDocument/2006/relationships" xmlns:p="http://schemas.openxmlformats.org/presentationml/2006/main">
+  <p:cSld>
+    <p:spTree>
+      <p:nvGrpSpPr>
+        <p:cNvPr id="1" name="">
+          <a:extLst>
+            <a:ext uri="{FF2B5EF4-FFF2-40B4-BE49-F238E27FC236}">
+              <a16:creationId xmlns:a16="http://schemas.microsoft.com/office/drawing/2014/main" id="{829A4193-2A96-4292-27DF-7C8F10ED51F0}"/>
+            </a:ext>
+          </a:extLst>
+        </p:cNvPr>
+        <p:cNvGrpSpPr/>
+        <p:nvPr/>
+      </p:nvGrpSpPr>
+      <p:grpSpPr>
+        <a:xfrm>
+          <a:off x="0" y="0"/>
+          <a:ext cx="0" cy="0"/>
+          <a:chOff x="0" y="0"/>
+          <a:chExt cx="0" cy="0"/>
+        </a:xfrm>
+      </p:grpSpPr>
+      <p:sp>
+        <p:nvSpPr>
+          <p:cNvPr id="2" name="Заголовок 1">
+            <a:extLst>
+              <a:ext uri="{FF2B5EF4-FFF2-40B4-BE49-F238E27FC236}">
+                <a16:creationId xmlns:a16="http://schemas.microsoft.com/office/drawing/2014/main" id="{F71B51DD-8424-3898-F322-045B44C926E8}"/>
+              </a:ext>
+            </a:extLst>
+          </p:cNvPr>
+          <p:cNvSpPr>
+            <a:spLocks noGrp="1"/>
+          </p:cNvSpPr>
+          <p:nvPr>
+            <p:ph type="title"/>
+          </p:nvPr>
+        </p:nvSpPr>
+        <p:spPr>
+          <a:xfrm>
+            <a:off x="628650" y="9098"/>
+            <a:ext cx="7886700" cy="712868"/>
+          </a:xfrm>
+        </p:spPr>
+        <p:txBody>
+          <a:bodyPr>
+            <a:normAutofit/>
+          </a:bodyPr>
+          <a:lstStyle/>
+          <a:p>
+            <a:pPr algn="ctr"/>
+            <a:r>
+              <a:rPr lang="ru-RU" sz="4000" dirty="0">
+                <a:latin typeface="Times New Roman"/>
+                <a:ea typeface="Calibri"/>
+                <a:cs typeface="Times New Roman"/>
+              </a:rPr>
+              <a:t>Обработка на принтере</a:t>
+            </a:r>
+          </a:p>
+        </p:txBody>
+      </p:sp>
+      <p:sp>
+        <p:nvSpPr>
+          <p:cNvPr id="4" name="Текстовое поле 3">
+            <a:extLst>
+              <a:ext uri="{FF2B5EF4-FFF2-40B4-BE49-F238E27FC236}">
+                <a16:creationId xmlns:a16="http://schemas.microsoft.com/office/drawing/2014/main" id="{5E8559DA-50BE-07AC-B0EB-3414FBFB6481}"/>
+              </a:ext>
+            </a:extLst>
+          </p:cNvPr>
+          <p:cNvSpPr txBox="1"/>
+          <p:nvPr/>
+        </p:nvSpPr>
+        <p:spPr>
+          <a:xfrm>
+            <a:off x="3775710" y="5640705"/>
+            <a:ext cx="309880" cy="368300"/>
+          </a:xfrm>
+          <a:prstGeom prst="rect">
+            <a:avLst/>
+          </a:prstGeom>
+          <a:noFill/>
+        </p:spPr>
+        <p:txBody>
+          <a:bodyPr wrap="none" rtlCol="0">
+            <a:spAutoFit/>
+          </a:bodyPr>
+          <a:lstStyle/>
+          <a:p>
+            <a:endParaRPr lang="ru-RU" altLang="en-US"/>
+          </a:p>
+        </p:txBody>
+      </p:sp>
+      <p:sp>
+        <p:nvSpPr>
+          <p:cNvPr id="5" name="Замещающий номер слайда 4">
+            <a:extLst>
+              <a:ext uri="{FF2B5EF4-FFF2-40B4-BE49-F238E27FC236}">
+                <a16:creationId xmlns:a16="http://schemas.microsoft.com/office/drawing/2014/main" id="{28EFF76E-32CA-AB56-A1FE-FC86064D66B4}"/>
+              </a:ext>
+            </a:extLst>
+          </p:cNvPr>
+          <p:cNvSpPr>
+            <a:spLocks noGrp="1"/>
+          </p:cNvSpPr>
+          <p:nvPr>
+            <p:ph type="sldNum" sz="quarter" idx="12"/>
+          </p:nvPr>
+        </p:nvSpPr>
+        <p:spPr>
+          <a:xfrm>
+            <a:off x="7088886" y="6493511"/>
+            <a:ext cx="2057400" cy="365125"/>
+          </a:xfrm>
+        </p:spPr>
+        <p:txBody>
+          <a:bodyPr/>
+          <a:lstStyle/>
+          <a:p>
+            <a:fld id="{D6ED8A53-8D2F-4011-BE06-EDB0774336BA}" type="slidenum">
+              <a:rPr lang="ru-RU" sz="2000" dirty="0" smtClean="0">
+                <a:solidFill>
+                  <a:schemeClr val="tx1"/>
+                </a:solidFill>
+                <a:latin typeface="Times New Roman"/>
+                <a:cs typeface="Times New Roman"/>
+              </a:rPr>
+              <a:t>8</a:t>
+            </a:fld>
+            <a:endParaRPr lang="ru-RU" sz="2000">
+              <a:solidFill>
+                <a:schemeClr val="tx1"/>
+              </a:solidFill>
+              <a:latin typeface="Times New Roman"/>
+              <a:ea typeface="Calibri"/>
+              <a:cs typeface="Times New Roman"/>
+            </a:endParaRPr>
+          </a:p>
+        </p:txBody>
+      </p:sp>
+      <p:pic>
+        <p:nvPicPr>
+          <p:cNvPr id="7" name="Рисунок 6">
+            <a:extLst>
+              <a:ext uri="{FF2B5EF4-FFF2-40B4-BE49-F238E27FC236}">
+                <a16:creationId xmlns:a16="http://schemas.microsoft.com/office/drawing/2014/main" id="{DA035444-9EBE-0F23-C21B-B713FDEC75FD}"/>
+              </a:ext>
+            </a:extLst>
+          </p:cNvPr>
+          <p:cNvPicPr>
+            <a:picLocks noChangeAspect="1"/>
+          </p:cNvPicPr>
+          <p:nvPr/>
+        </p:nvPicPr>
+        <p:blipFill>
+          <a:blip r:embed="rId3">
+            <a:extLst>
+              <a:ext uri="{28A0092B-C50C-407E-A947-70E740481C1C}">
+                <a14:useLocalDpi xmlns:a14="http://schemas.microsoft.com/office/drawing/2010/main" val="0"/>
+              </a:ext>
+            </a:extLst>
+          </a:blip>
+          <a:srcRect/>
+          <a:stretch/>
+        </p:blipFill>
+        <p:spPr>
+          <a:xfrm>
+            <a:off x="3106727" y="875407"/>
+            <a:ext cx="5905217" cy="5295358"/>
+          </a:xfrm>
+          <a:prstGeom prst="rect">
+            <a:avLst/>
+          </a:prstGeom>
+        </p:spPr>
+      </p:pic>
+      <p:sp>
+        <p:nvSpPr>
+          <p:cNvPr id="12" name="TextBox 11">
+            <a:extLst>
+              <a:ext uri="{FF2B5EF4-FFF2-40B4-BE49-F238E27FC236}">
+                <a16:creationId xmlns:a16="http://schemas.microsoft.com/office/drawing/2014/main" id="{D77D804C-EAD2-5379-2030-7517770A46AB}"/>
+              </a:ext>
+            </a:extLst>
+          </p:cNvPr>
+          <p:cNvSpPr txBox="1"/>
+          <p:nvPr/>
+        </p:nvSpPr>
+        <p:spPr>
+          <a:xfrm>
+            <a:off x="132056" y="875407"/>
+            <a:ext cx="2917990" cy="5355312"/>
+          </a:xfrm>
+          <a:prstGeom prst="rect">
+            <a:avLst/>
+          </a:prstGeom>
+          <a:noFill/>
+          <a:ln>
+            <a:solidFill>
+              <a:schemeClr val="tx1"/>
+            </a:solidFill>
+            <a:prstDash val="dash"/>
+          </a:ln>
+        </p:spPr>
+        <p:txBody>
+          <a:bodyPr rot="0" spcFirstLastPara="0" vertOverflow="overflow" horzOverflow="overflow" vert="horz" wrap="square" lIns="91440" tIns="45720" rIns="91440" bIns="45720" numCol="1" spcCol="0" rtlCol="0" fromWordArt="0" anchor="ctr" anchorCtr="0" forceAA="0" compatLnSpc="1">
+            <a:prstTxWarp prst="textNoShape">
+              <a:avLst/>
+            </a:prstTxWarp>
+            <a:spAutoFit/>
+          </a:bodyPr>
+          <a:lstStyle/>
+          <a:p>
+            <a:r>
+              <a:rPr lang="ru-RU" dirty="0">
+                <a:latin typeface="Times New Roman" panose="02020603050405020304" pitchFamily="18" charset="0"/>
+                <a:cs typeface="Times New Roman" panose="02020603050405020304" pitchFamily="18" charset="0"/>
+              </a:rPr>
+              <a:t>Единичное обнаружение дефекта не приводит к отмене задания. Локальный модуль </a:t>
+            </a:r>
+            <a:r>
+              <a:rPr lang="ru-RU" b="1" dirty="0">
+                <a:latin typeface="Times New Roman" panose="02020603050405020304" pitchFamily="18" charset="0"/>
+                <a:cs typeface="Times New Roman" panose="02020603050405020304" pitchFamily="18" charset="0"/>
+              </a:rPr>
+              <a:t>проверяет принадлежность результата </a:t>
+            </a:r>
+            <a:r>
+              <a:rPr lang="ru-RU" dirty="0">
+                <a:latin typeface="Times New Roman" panose="02020603050405020304" pitchFamily="18" charset="0"/>
+                <a:cs typeface="Times New Roman" panose="02020603050405020304" pitchFamily="18" charset="0"/>
+              </a:rPr>
+              <a:t>текущей печатной сессии и учитывает последовательные срабатывания. Отрицательный или неопределённый результат сбрасывает счётчик. </a:t>
+            </a:r>
+            <a:r>
+              <a:rPr lang="ru-RU" b="1" dirty="0">
+                <a:latin typeface="Times New Roman" panose="02020603050405020304" pitchFamily="18" charset="0"/>
+                <a:cs typeface="Times New Roman" panose="02020603050405020304" pitchFamily="18" charset="0"/>
+              </a:rPr>
+              <a:t>После трёх последовательных обнаружений</a:t>
+            </a:r>
+            <a:r>
+              <a:rPr lang="ru-RU" dirty="0">
+                <a:latin typeface="Times New Roman" panose="02020603050405020304" pitchFamily="18" charset="0"/>
+                <a:cs typeface="Times New Roman" panose="02020603050405020304" pitchFamily="18" charset="0"/>
+              </a:rPr>
+              <a:t> «спагетти» повторно проверяется активность сессии и </a:t>
+            </a:r>
+            <a:r>
+              <a:rPr lang="ru-RU" b="1" dirty="0">
+                <a:latin typeface="Times New Roman" panose="02020603050405020304" pitchFamily="18" charset="0"/>
+                <a:cs typeface="Times New Roman" panose="02020603050405020304" pitchFamily="18" charset="0"/>
+              </a:rPr>
+              <a:t>формируется команда отмены печати</a:t>
+            </a:r>
+            <a:r>
+              <a:rPr lang="ru-RU" dirty="0">
+                <a:latin typeface="Times New Roman" panose="02020603050405020304" pitchFamily="18" charset="0"/>
+                <a:cs typeface="Times New Roman" panose="02020603050405020304" pitchFamily="18" charset="0"/>
+              </a:rPr>
+              <a:t>.</a:t>
+            </a:r>
+          </a:p>
+        </p:txBody>
+      </p:sp>
+      <p:sp>
+        <p:nvSpPr>
+          <p:cNvPr id="3" name="TextBox 26">
+            <a:extLst>
+              <a:ext uri="{FF2B5EF4-FFF2-40B4-BE49-F238E27FC236}">
+                <a16:creationId xmlns:a16="http://schemas.microsoft.com/office/drawing/2014/main" id="{E5B04886-22A1-2CCD-9C65-F1ADEC0EB19F}"/>
+              </a:ext>
+            </a:extLst>
+          </p:cNvPr>
+          <p:cNvSpPr>
+            <a:spLocks noGrp="1"/>
+          </p:cNvSpPr>
+          <p:nvPr/>
+        </p:nvSpPr>
+        <p:spPr>
+          <a:xfrm>
+            <a:off x="3723995" y="6170765"/>
+            <a:ext cx="4670679" cy="579120"/>
+          </a:xfrm>
+          <a:prstGeom prst="rect">
+            <a:avLst/>
+          </a:prstGeom>
+          <a:noFill/>
+        </p:spPr>
+        <p:txBody>
+          <a:bodyPr rot="0" spcFirstLastPara="0" vert="horz" wrap="square" lIns="91440" tIns="45720" rIns="91440" bIns="45720" anchor="ctr">
+            <a:noAutofit/>
+          </a:bodyPr>
+          <a:lstStyle>
+            <a:defPPr algn="l">
+              <a:defRPr sz="1600" b="0">
+                <a:solidFill>
+                  <a:srgbClr val="000000"/>
+                </a:solidFill>
+                <a:latin typeface="Times New Roman"/>
+                <a:ea typeface="Times New Roman"/>
+                <a:cs typeface="Times New Roman"/>
+              </a:defRPr>
+            </a:defPPr>
+          </a:lstStyle>
+          <a:p>
+            <a:pPr algn="ctr">
+              <a:defRPr sz="1600" b="0">
+                <a:solidFill>
+                  <a:srgbClr val="000000"/>
+                </a:solidFill>
+                <a:latin typeface="Times New Roman"/>
+                <a:ea typeface="Times New Roman"/>
+                <a:cs typeface="Times New Roman"/>
+              </a:defRPr>
+            </a:pPr>
+            <a:r>
+              <a:rPr sz="1600" b="0" dirty="0" err="1">
+                <a:solidFill>
+                  <a:srgbClr val="000000"/>
+                </a:solidFill>
+                <a:latin typeface="Times New Roman"/>
+                <a:ea typeface="Times New Roman"/>
+                <a:cs typeface="Times New Roman"/>
+              </a:rPr>
+              <a:t>Рис</a:t>
+            </a:r>
+            <a:r>
+              <a:rPr sz="1600" b="0" dirty="0">
+                <a:solidFill>
+                  <a:srgbClr val="000000"/>
+                </a:solidFill>
+                <a:latin typeface="Times New Roman"/>
+                <a:ea typeface="Times New Roman"/>
+                <a:cs typeface="Times New Roman"/>
+              </a:rPr>
+              <a:t>. </a:t>
+            </a:r>
+            <a:r>
+              <a:rPr lang="ru-RU" sz="1600" b="0" dirty="0">
+                <a:solidFill>
+                  <a:srgbClr val="000000"/>
+                </a:solidFill>
+                <a:latin typeface="Times New Roman"/>
+                <a:ea typeface="Times New Roman"/>
+                <a:cs typeface="Times New Roman"/>
+              </a:rPr>
+              <a:t>7</a:t>
+            </a:r>
+            <a:r>
+              <a:rPr sz="1600" b="0" dirty="0">
+                <a:solidFill>
+                  <a:srgbClr val="000000"/>
+                </a:solidFill>
+                <a:latin typeface="Times New Roman"/>
+                <a:ea typeface="Times New Roman"/>
+                <a:cs typeface="Times New Roman"/>
+              </a:rPr>
+              <a:t> – </a:t>
+            </a:r>
+            <a:r>
+              <a:rPr lang="ru-RU" sz="1600" b="0" dirty="0">
+                <a:solidFill>
+                  <a:srgbClr val="000000"/>
+                </a:solidFill>
+                <a:latin typeface="Times New Roman"/>
+                <a:ea typeface="Times New Roman"/>
+                <a:cs typeface="Times New Roman"/>
+              </a:rPr>
+              <a:t>Блок-схема проверки результатов обнаружения дефекта и отмены FDM-печати</a:t>
+            </a:r>
+            <a:endParaRPr sz="1600" b="0" dirty="0">
+              <a:solidFill>
+                <a:srgbClr val="000000"/>
+              </a:solidFill>
+              <a:latin typeface="Times New Roman"/>
+              <a:ea typeface="Times New Roman"/>
+              <a:cs typeface="Times New Roman"/>
+            </a:endParaRPr>
+          </a:p>
+        </p:txBody>
+      </p:sp>
+      <p:sp>
+        <p:nvSpPr>
+          <p:cNvPr id="6" name="TextBox 26">
+            <a:extLst>
+              <a:ext uri="{FF2B5EF4-FFF2-40B4-BE49-F238E27FC236}">
+                <a16:creationId xmlns:a16="http://schemas.microsoft.com/office/drawing/2014/main" id="{8AF7D2B0-5020-6F43-9662-A5B7C34B40EB}"/>
+              </a:ext>
+            </a:extLst>
+          </p:cNvPr>
+          <p:cNvSpPr>
+            <a:spLocks noGrp="1"/>
+          </p:cNvSpPr>
+          <p:nvPr/>
+        </p:nvSpPr>
+        <p:spPr>
+          <a:xfrm>
+            <a:off x="339471" y="5651599"/>
+            <a:ext cx="4073130" cy="579120"/>
+          </a:xfrm>
+          <a:prstGeom prst="rect">
+            <a:avLst/>
+          </a:prstGeom>
+          <a:noFill/>
+        </p:spPr>
+        <p:txBody>
+          <a:bodyPr rot="0" spcFirstLastPara="0" vert="horz" wrap="square" lIns="91440" tIns="45720" rIns="91440" bIns="45720" anchor="ctr">
+            <a:noAutofit/>
+          </a:bodyPr>
+          <a:lstStyle>
+            <a:defPPr algn="l">
+              <a:defRPr sz="1600" b="0">
+                <a:solidFill>
+                  <a:srgbClr val="000000"/>
+                </a:solidFill>
+                <a:latin typeface="Times New Roman"/>
+                <a:ea typeface="Times New Roman"/>
+                <a:cs typeface="Times New Roman"/>
+              </a:defRPr>
+            </a:defPPr>
+          </a:lstStyle>
+          <a:p>
+            <a:pPr algn="ctr">
+              <a:defRPr sz="1600" b="0">
+                <a:solidFill>
+                  <a:srgbClr val="000000"/>
+                </a:solidFill>
+                <a:latin typeface="Times New Roman"/>
+                <a:ea typeface="Times New Roman"/>
+                <a:cs typeface="Times New Roman"/>
+              </a:defRPr>
+            </a:pPr>
+            <a:r>
+              <a:rPr sz="1600" b="0" dirty="0" err="1">
+                <a:solidFill>
+                  <a:srgbClr val="000000"/>
+                </a:solidFill>
+                <a:latin typeface="Times New Roman"/>
+                <a:ea typeface="Times New Roman"/>
+                <a:cs typeface="Times New Roman"/>
+              </a:rPr>
+              <a:t>Рис</a:t>
+            </a:r>
+            <a:r>
+              <a:rPr sz="1600" b="0" dirty="0">
+                <a:solidFill>
+                  <a:srgbClr val="000000"/>
+                </a:solidFill>
+                <a:latin typeface="Times New Roman"/>
+                <a:ea typeface="Times New Roman"/>
+                <a:cs typeface="Times New Roman"/>
+              </a:rPr>
+              <a:t>. </a:t>
+            </a:r>
+            <a:r>
+              <a:rPr lang="ru-RU" sz="1600" b="0" dirty="0">
+                <a:solidFill>
+                  <a:srgbClr val="000000"/>
+                </a:solidFill>
+                <a:latin typeface="Times New Roman"/>
+                <a:ea typeface="Times New Roman"/>
+                <a:cs typeface="Times New Roman"/>
+              </a:rPr>
+              <a:t>7</a:t>
+            </a:r>
+            <a:r>
+              <a:rPr sz="1600" b="0" dirty="0">
+                <a:solidFill>
+                  <a:srgbClr val="000000"/>
+                </a:solidFill>
+                <a:latin typeface="Times New Roman"/>
+                <a:ea typeface="Times New Roman"/>
+                <a:cs typeface="Times New Roman"/>
+              </a:rPr>
+              <a:t> – </a:t>
+            </a:r>
+          </a:p>
+        </p:txBody>
+      </p:sp>
+    </p:spTree>
+    <p:extLst>
+      <p:ext uri="{BB962C8B-B14F-4D97-AF65-F5344CB8AC3E}">
+        <p14:creationId xmlns:p14="http://schemas.microsoft.com/office/powerpoint/2010/main" val="1366394556"/>
+      </p:ext>
+    </p:extLst>
+  </p:cSld>
+  <p:clrMapOvr>
+    <a:masterClrMapping/>
+  </p:clrMapOvr>
+</p:sld>
+</file>
+
+<file path=ppt/slides/slide9.xml><?xml version="1.0" encoding="utf-8"?>
+<p:sld xmlns:a="http://schemas.openxmlformats.org/drawingml/2006/main" xmlns:r="http://schemas.openxmlformats.org/officeDocument/2006/relationships" xmlns:p="http://schemas.openxmlformats.org/presentationml/2006/main">
+  <p:cSld>
+    <p:spTree>
+      <p:nvGrpSpPr>
+        <p:cNvPr id="1" name="">
+          <a:extLst>
+            <a:ext uri="{FF2B5EF4-FFF2-40B4-BE49-F238E27FC236}">
+              <a16:creationId xmlns:a16="http://schemas.microsoft.com/office/drawing/2014/main" id="{829A4193-2A96-4292-27DF-7C8F10ED51F0}"/>
+            </a:ext>
+          </a:extLst>
+        </p:cNvPr>
+        <p:cNvGrpSpPr/>
+        <p:nvPr/>
+      </p:nvGrpSpPr>
+      <p:grpSpPr>
+        <a:xfrm>
+          <a:off x="0" y="0"/>
+          <a:ext cx="0" cy="0"/>
+          <a:chOff x="0" y="0"/>
+          <a:chExt cx="0" cy="0"/>
+        </a:xfrm>
+      </p:grpSpPr>
+      <p:sp>
+        <p:nvSpPr>
+          <p:cNvPr id="2" name="Заголовок 1">
+            <a:extLst>
+              <a:ext uri="{FF2B5EF4-FFF2-40B4-BE49-F238E27FC236}">
+                <a16:creationId xmlns:a16="http://schemas.microsoft.com/office/drawing/2014/main" id="{F71B51DD-8424-3898-F322-045B44C926E8}"/>
+              </a:ext>
+            </a:extLst>
+          </p:cNvPr>
+          <p:cNvSpPr>
+            <a:spLocks noGrp="1"/>
+          </p:cNvSpPr>
+          <p:nvPr>
+            <p:ph type="title"/>
+          </p:nvPr>
+        </p:nvSpPr>
+        <p:spPr>
+          <a:xfrm>
+            <a:off x="628650" y="-64546"/>
+            <a:ext cx="7886700" cy="712868"/>
+          </a:xfrm>
+        </p:spPr>
+        <p:txBody>
+          <a:bodyPr>
+            <a:normAutofit/>
+          </a:bodyPr>
+          <a:lstStyle/>
+          <a:p>
+            <a:pPr algn="ctr"/>
+            <a:r>
+              <a:rPr lang="ru-RU" sz="4000" dirty="0">
+                <a:latin typeface="Times New Roman"/>
+                <a:ea typeface="Calibri"/>
+                <a:cs typeface="Times New Roman"/>
+              </a:rPr>
+              <a:t>Электросхема 3</a:t>
+            </a:r>
+            <a:r>
+              <a:rPr lang="en-US" sz="4000" dirty="0">
+                <a:latin typeface="Times New Roman"/>
+                <a:ea typeface="Calibri"/>
+                <a:cs typeface="Times New Roman"/>
+              </a:rPr>
+              <a:t>D-</a:t>
+            </a:r>
+            <a:r>
+              <a:rPr lang="ru-RU" sz="4000" dirty="0">
+                <a:latin typeface="Times New Roman"/>
+                <a:ea typeface="Calibri"/>
+                <a:cs typeface="Times New Roman"/>
+              </a:rPr>
+              <a:t>принтера</a:t>
+            </a:r>
+          </a:p>
+        </p:txBody>
+      </p:sp>
+      <p:sp>
+        <p:nvSpPr>
+          <p:cNvPr id="4" name="Текстовое поле 3">
+            <a:extLst>
+              <a:ext uri="{FF2B5EF4-FFF2-40B4-BE49-F238E27FC236}">
+                <a16:creationId xmlns:a16="http://schemas.microsoft.com/office/drawing/2014/main" id="{5E8559DA-50BE-07AC-B0EB-3414FBFB6481}"/>
+              </a:ext>
+            </a:extLst>
+          </p:cNvPr>
+          <p:cNvSpPr txBox="1"/>
+          <p:nvPr/>
+        </p:nvSpPr>
+        <p:spPr>
+          <a:xfrm>
+            <a:off x="3775710" y="5640705"/>
+            <a:ext cx="309880" cy="368300"/>
+          </a:xfrm>
+          <a:prstGeom prst="rect">
+            <a:avLst/>
+          </a:prstGeom>
+          <a:noFill/>
+        </p:spPr>
+        <p:txBody>
+          <a:bodyPr wrap="none" rtlCol="0">
+            <a:spAutoFit/>
+          </a:bodyPr>
+          <a:lstStyle/>
+          <a:p>
+            <a:endParaRPr lang="ru-RU" altLang="en-US"/>
+          </a:p>
+        </p:txBody>
+      </p:sp>
+      <p:sp>
+        <p:nvSpPr>
+          <p:cNvPr id="5" name="Замещающий номер слайда 4">
+            <a:extLst>
+              <a:ext uri="{FF2B5EF4-FFF2-40B4-BE49-F238E27FC236}">
+                <a16:creationId xmlns:a16="http://schemas.microsoft.com/office/drawing/2014/main" id="{28EFF76E-32CA-AB56-A1FE-FC86064D66B4}"/>
+              </a:ext>
+            </a:extLst>
+          </p:cNvPr>
+          <p:cNvSpPr>
+            <a:spLocks noGrp="1"/>
+          </p:cNvSpPr>
+          <p:nvPr>
+            <p:ph type="sldNum" sz="quarter" idx="12"/>
+          </p:nvPr>
+        </p:nvSpPr>
+        <p:spPr>
+          <a:xfrm>
+            <a:off x="7088886" y="6493511"/>
+            <a:ext cx="2057400" cy="365125"/>
+          </a:xfrm>
+        </p:spPr>
+        <p:txBody>
+          <a:bodyPr/>
+          <a:lstStyle/>
+          <a:p>
+            <a:fld id="{D6ED8A53-8D2F-4011-BE06-EDB0774336BA}" type="slidenum">
+              <a:rPr lang="ru-RU" sz="2000" dirty="0" smtClean="0">
+                <a:solidFill>
+                  <a:schemeClr val="tx1"/>
+                </a:solidFill>
+                <a:latin typeface="Times New Roman"/>
+                <a:cs typeface="Times New Roman"/>
+              </a:rPr>
+              <a:t>9</a:t>
+            </a:fld>
+            <a:endParaRPr lang="ru-RU" sz="2000">
+              <a:solidFill>
+                <a:schemeClr val="tx1"/>
+              </a:solidFill>
+              <a:latin typeface="Times New Roman"/>
+              <a:ea typeface="Calibri"/>
+              <a:cs typeface="Times New Roman"/>
+            </a:endParaRPr>
+          </a:p>
+        </p:txBody>
+      </p:sp>
+      <p:pic>
+        <p:nvPicPr>
+          <p:cNvPr id="13" name="Рисунок 12">
+            <a:extLst>
+              <a:ext uri="{FF2B5EF4-FFF2-40B4-BE49-F238E27FC236}">
+                <a16:creationId xmlns:a16="http://schemas.microsoft.com/office/drawing/2014/main" id="{4E875F94-D2E7-0E2D-5267-8B670B1C8AC0}"/>
+              </a:ext>
+            </a:extLst>
+          </p:cNvPr>
+          <p:cNvPicPr>
+            <a:picLocks noChangeAspect="1"/>
+          </p:cNvPicPr>
+          <p:nvPr/>
+        </p:nvPicPr>
+        <p:blipFill>
+          <a:blip r:embed="rId3">
+            <a:extLst>
+              <a:ext uri="{96DAC541-7B7A-43D3-8B79-37D633B846F1}">
+                <asvg:svgBlip xmlns:asvg="http://schemas.microsoft.com/office/drawing/2016/SVG/main" r:embed="rId4"/>
+              </a:ext>
+            </a:extLst>
+          </a:blip>
+          <a:stretch>
+            <a:fillRect/>
+          </a:stretch>
+        </p:blipFill>
+        <p:spPr>
+          <a:xfrm>
+            <a:off x="351681" y="603944"/>
+            <a:ext cx="8440637" cy="3708649"/>
+          </a:xfrm>
+          <a:prstGeom prst="rect">
+            <a:avLst/>
+          </a:prstGeom>
+        </p:spPr>
+      </p:pic>
+      <p:sp>
+        <p:nvSpPr>
+          <p:cNvPr id="14" name="TextBox 13">
+            <a:extLst>
+              <a:ext uri="{FF2B5EF4-FFF2-40B4-BE49-F238E27FC236}">
+                <a16:creationId xmlns:a16="http://schemas.microsoft.com/office/drawing/2014/main" id="{971BDEBA-A42A-8680-F3A2-087C760E6CFE}"/>
+              </a:ext>
+            </a:extLst>
+          </p:cNvPr>
+          <p:cNvSpPr txBox="1"/>
+          <p:nvPr/>
+        </p:nvSpPr>
+        <p:spPr>
+          <a:xfrm>
+            <a:off x="254001" y="4734036"/>
+            <a:ext cx="8487517" cy="2031325"/>
+          </a:xfrm>
+          <a:prstGeom prst="rect">
+            <a:avLst/>
+          </a:prstGeom>
+          <a:noFill/>
+          <a:ln>
+            <a:solidFill>
+              <a:schemeClr val="tx1"/>
+            </a:solidFill>
+            <a:prstDash val="dash"/>
+          </a:ln>
+        </p:spPr>
+        <p:txBody>
+          <a:bodyPr rot="0" spcFirstLastPara="0" vertOverflow="overflow" horzOverflow="overflow" vert="horz" wrap="square" lIns="91440" tIns="45720" rIns="91440" bIns="45720" numCol="1" spcCol="0" rtlCol="0" fromWordArt="0" anchor="ctr" anchorCtr="0" forceAA="0" compatLnSpc="1">
+            <a:prstTxWarp prst="textNoShape">
+              <a:avLst/>
+            </a:prstTxWarp>
+            <a:spAutoFit/>
+          </a:bodyPr>
+          <a:lstStyle/>
+          <a:p>
+            <a:r>
+              <a:rPr lang="ru-RU" dirty="0">
+                <a:latin typeface="Times New Roman" panose="02020603050405020304" pitchFamily="18" charset="0"/>
+                <a:cs typeface="Times New Roman" panose="02020603050405020304" pitchFamily="18" charset="0"/>
+              </a:rPr>
+              <a:t>Для электрической части разрабатываемого 3</a:t>
+            </a:r>
+            <a:r>
+              <a:rPr lang="en-US" dirty="0">
+                <a:latin typeface="Times New Roman" panose="02020603050405020304" pitchFamily="18" charset="0"/>
+                <a:cs typeface="Times New Roman" panose="02020603050405020304" pitchFamily="18" charset="0"/>
+              </a:rPr>
+              <a:t>D-</a:t>
+            </a:r>
+            <a:r>
+              <a:rPr lang="ru-RU" dirty="0">
+                <a:latin typeface="Times New Roman" panose="02020603050405020304" pitchFamily="18" charset="0"/>
+                <a:cs typeface="Times New Roman" panose="02020603050405020304" pitchFamily="18" charset="0"/>
+              </a:rPr>
+              <a:t>принтера выбрана плата </a:t>
+            </a:r>
+            <a:r>
+              <a:rPr lang="ru-RU" b="1" dirty="0">
+                <a:latin typeface="Times New Roman" panose="02020603050405020304" pitchFamily="18" charset="0"/>
+                <a:cs typeface="Times New Roman" panose="02020603050405020304" pitchFamily="18" charset="0"/>
+              </a:rPr>
+              <a:t>MKS </a:t>
+            </a:r>
+            <a:r>
+              <a:rPr lang="ru-RU" b="1" dirty="0" err="1">
+                <a:latin typeface="Times New Roman" panose="02020603050405020304" pitchFamily="18" charset="0"/>
+                <a:cs typeface="Times New Roman" panose="02020603050405020304" pitchFamily="18" charset="0"/>
+              </a:rPr>
+              <a:t>Robin</a:t>
+            </a:r>
+            <a:r>
+              <a:rPr lang="ru-RU" b="1" dirty="0">
+                <a:latin typeface="Times New Roman" panose="02020603050405020304" pitchFamily="18" charset="0"/>
+                <a:cs typeface="Times New Roman" panose="02020603050405020304" pitchFamily="18" charset="0"/>
+              </a:rPr>
+              <a:t> </a:t>
+            </a:r>
+            <a:r>
+              <a:rPr lang="ru-RU" b="1" dirty="0" err="1">
+                <a:latin typeface="Times New Roman" panose="02020603050405020304" pitchFamily="18" charset="0"/>
+                <a:cs typeface="Times New Roman" panose="02020603050405020304" pitchFamily="18" charset="0"/>
+              </a:rPr>
+              <a:t>Nano</a:t>
+            </a:r>
+            <a:r>
+              <a:rPr lang="ru-RU" b="1" dirty="0">
+                <a:latin typeface="Times New Roman" panose="02020603050405020304" pitchFamily="18" charset="0"/>
+                <a:cs typeface="Times New Roman" panose="02020603050405020304" pitchFamily="18" charset="0"/>
+              </a:rPr>
+              <a:t> V1.2 (7) </a:t>
+            </a:r>
+            <a:r>
+              <a:rPr lang="ru-RU" dirty="0">
+                <a:latin typeface="Times New Roman" panose="02020603050405020304" pitchFamily="18" charset="0"/>
+                <a:cs typeface="Times New Roman" panose="02020603050405020304" pitchFamily="18" charset="0"/>
+              </a:rPr>
+              <a:t>и драйвера TMC2209. Плата управляет двигателями (5), нагревателями (1, 2) и вентиляторами, а также получает сигналы с датчиков (6). </a:t>
+            </a:r>
+            <a:r>
+              <a:rPr lang="ru-RU" b="1" dirty="0" err="1">
+                <a:latin typeface="Times New Roman" panose="02020603050405020304" pitchFamily="18" charset="0"/>
+                <a:cs typeface="Times New Roman" panose="02020603050405020304" pitchFamily="18" charset="0"/>
+              </a:rPr>
+              <a:t>Raspberry</a:t>
+            </a:r>
+            <a:r>
+              <a:rPr lang="ru-RU" b="1" dirty="0">
+                <a:latin typeface="Times New Roman" panose="02020603050405020304" pitchFamily="18" charset="0"/>
+                <a:cs typeface="Times New Roman" panose="02020603050405020304" pitchFamily="18" charset="0"/>
+              </a:rPr>
+              <a:t> </a:t>
+            </a:r>
+            <a:r>
+              <a:rPr lang="ru-RU" b="1" dirty="0" err="1">
+                <a:latin typeface="Times New Roman" panose="02020603050405020304" pitchFamily="18" charset="0"/>
+                <a:cs typeface="Times New Roman" panose="02020603050405020304" pitchFamily="18" charset="0"/>
+              </a:rPr>
+              <a:t>Pi</a:t>
+            </a:r>
+            <a:r>
+              <a:rPr lang="ru-RU" b="1" dirty="0">
+                <a:latin typeface="Times New Roman" panose="02020603050405020304" pitchFamily="18" charset="0"/>
+                <a:cs typeface="Times New Roman" panose="02020603050405020304" pitchFamily="18" charset="0"/>
+              </a:rPr>
+              <a:t> 3B (10) </a:t>
+            </a:r>
+            <a:r>
+              <a:rPr lang="ru-RU" dirty="0">
+                <a:latin typeface="Times New Roman" panose="02020603050405020304" pitchFamily="18" charset="0"/>
+                <a:cs typeface="Times New Roman" panose="02020603050405020304" pitchFamily="18" charset="0"/>
+              </a:rPr>
+              <a:t>обеспечивает подключение камеры (9), сенсорного экрана (8) и обменивается данными с управляющей платой по UART. Блок питания (3) обеспечивает силовые узлы напряжением </a:t>
+            </a:r>
+            <a:r>
+              <a:rPr lang="ru-RU" b="1" dirty="0">
+                <a:latin typeface="Times New Roman" panose="02020603050405020304" pitchFamily="18" charset="0"/>
+                <a:cs typeface="Times New Roman" panose="02020603050405020304" pitchFamily="18" charset="0"/>
+              </a:rPr>
+              <a:t>24 В</a:t>
+            </a:r>
+            <a:r>
+              <a:rPr lang="ru-RU" dirty="0">
+                <a:latin typeface="Times New Roman" panose="02020603050405020304" pitchFamily="18" charset="0"/>
+                <a:cs typeface="Times New Roman" panose="02020603050405020304" pitchFamily="18" charset="0"/>
+              </a:rPr>
+              <a:t>, а DC-DC-преобразователь (4) понижает его до </a:t>
+            </a:r>
+            <a:r>
+              <a:rPr lang="ru-RU" b="1" dirty="0">
+                <a:latin typeface="Times New Roman" panose="02020603050405020304" pitchFamily="18" charset="0"/>
+                <a:cs typeface="Times New Roman" panose="02020603050405020304" pitchFamily="18" charset="0"/>
+              </a:rPr>
+              <a:t>5 В</a:t>
+            </a:r>
+            <a:r>
+              <a:rPr lang="ru-RU" dirty="0">
+                <a:latin typeface="Times New Roman" panose="02020603050405020304" pitchFamily="18" charset="0"/>
+                <a:cs typeface="Times New Roman" panose="02020603050405020304" pitchFamily="18" charset="0"/>
+              </a:rPr>
+              <a:t> для </a:t>
+            </a:r>
+            <a:r>
+              <a:rPr lang="ru-RU" dirty="0" err="1">
+                <a:latin typeface="Times New Roman" panose="02020603050405020304" pitchFamily="18" charset="0"/>
+                <a:cs typeface="Times New Roman" panose="02020603050405020304" pitchFamily="18" charset="0"/>
+              </a:rPr>
+              <a:t>Raspberry</a:t>
+            </a:r>
+            <a:r>
+              <a:rPr lang="ru-RU" dirty="0">
+                <a:latin typeface="Times New Roman" panose="02020603050405020304" pitchFamily="18" charset="0"/>
+                <a:cs typeface="Times New Roman" panose="02020603050405020304" pitchFamily="18" charset="0"/>
+              </a:rPr>
+              <a:t> </a:t>
+            </a:r>
+            <a:r>
+              <a:rPr lang="ru-RU" dirty="0" err="1">
+                <a:latin typeface="Times New Roman" panose="02020603050405020304" pitchFamily="18" charset="0"/>
+                <a:cs typeface="Times New Roman" panose="02020603050405020304" pitchFamily="18" charset="0"/>
+              </a:rPr>
+              <a:t>Pi</a:t>
+            </a:r>
+            <a:r>
+              <a:rPr lang="ru-RU" dirty="0">
+                <a:latin typeface="Times New Roman" panose="02020603050405020304" pitchFamily="18" charset="0"/>
+                <a:cs typeface="Times New Roman" panose="02020603050405020304" pitchFamily="18" charset="0"/>
+              </a:rPr>
+              <a:t> и подключённой периферии.</a:t>
+            </a:r>
+          </a:p>
+        </p:txBody>
+      </p:sp>
+      <p:sp>
+        <p:nvSpPr>
+          <p:cNvPr id="16" name="TextBox 26">
+            <a:extLst>
+              <a:ext uri="{FF2B5EF4-FFF2-40B4-BE49-F238E27FC236}">
+                <a16:creationId xmlns:a16="http://schemas.microsoft.com/office/drawing/2014/main" id="{6C4BDD25-6E44-8F04-93A8-3BDF96080B11}"/>
+              </a:ext>
+            </a:extLst>
+          </p:cNvPr>
+          <p:cNvSpPr>
+            <a:spLocks noGrp="1"/>
+          </p:cNvSpPr>
+          <p:nvPr/>
+        </p:nvSpPr>
+        <p:spPr>
+          <a:xfrm>
+            <a:off x="1313146" y="4181848"/>
+            <a:ext cx="6517706" cy="579120"/>
+          </a:xfrm>
+          <a:prstGeom prst="rect">
+            <a:avLst/>
+          </a:prstGeom>
+          <a:noFill/>
+        </p:spPr>
+        <p:txBody>
+          <a:bodyPr rot="0" spcFirstLastPara="0" vert="horz" wrap="square" lIns="91440" tIns="45720" rIns="91440" bIns="45720" anchor="ctr">
+            <a:noAutofit/>
+          </a:bodyPr>
+          <a:lstStyle>
+            <a:defPPr algn="l">
+              <a:defRPr sz="1600" b="0">
+                <a:solidFill>
+                  <a:srgbClr val="000000"/>
+                </a:solidFill>
+                <a:latin typeface="Times New Roman"/>
+                <a:ea typeface="Times New Roman"/>
+                <a:cs typeface="Times New Roman"/>
+              </a:defRPr>
+            </a:defPPr>
+          </a:lstStyle>
+          <a:p>
+            <a:pPr algn="ctr">
+              <a:defRPr sz="1600" b="0">
+                <a:solidFill>
+                  <a:srgbClr val="000000"/>
+                </a:solidFill>
+                <a:latin typeface="Times New Roman"/>
+                <a:ea typeface="Times New Roman"/>
+                <a:cs typeface="Times New Roman"/>
+              </a:defRPr>
+            </a:pPr>
+            <a:r>
+              <a:rPr lang="ru-RU" sz="1600" b="0" dirty="0">
+                <a:solidFill>
+                  <a:srgbClr val="000000"/>
+                </a:solidFill>
+                <a:latin typeface="Times New Roman"/>
+                <a:ea typeface="Times New Roman"/>
+                <a:cs typeface="Times New Roman"/>
+              </a:rPr>
+              <a:t>Рис. </a:t>
+            </a:r>
+            <a:r>
+              <a:rPr lang="ru-RU" sz="1600" dirty="0">
+                <a:solidFill>
+                  <a:srgbClr val="000000"/>
+                </a:solidFill>
+                <a:latin typeface="Times New Roman"/>
+                <a:ea typeface="Times New Roman"/>
+                <a:cs typeface="Times New Roman"/>
+              </a:rPr>
+              <a:t>8</a:t>
+            </a:r>
+            <a:r>
+              <a:rPr lang="ru-RU" sz="1600" b="0" dirty="0">
+                <a:solidFill>
+                  <a:srgbClr val="000000"/>
+                </a:solidFill>
+                <a:latin typeface="Times New Roman"/>
+                <a:ea typeface="Times New Roman"/>
+                <a:cs typeface="Times New Roman"/>
+              </a:rPr>
+              <a:t> – Схема электрической коммутации компонентов 3D-принтера </a:t>
+            </a:r>
+          </a:p>
+        </p:txBody>
+      </p:sp>
+    </p:spTree>
+    <p:extLst>
+      <p:ext uri="{BB962C8B-B14F-4D97-AF65-F5344CB8AC3E}">
+        <p14:creationId xmlns:p14="http://schemas.microsoft.com/office/powerpoint/2010/main" val="128376505"/>
       </p:ext>
     </p:extLst>
   </p:cSld>

--- a/presentation/NIR2_slide01_v2.pptx
+++ b/presentation/NIR2_slide01_v2.pptx
@@ -5,20 +5,19 @@
     <p:sldMasterId id="2147483648" r:id="rId1"/>
   </p:sldMasterIdLst>
   <p:notesMasterIdLst>
-    <p:notesMasterId r:id="rId13"/>
+    <p:notesMasterId r:id="rId12"/>
   </p:notesMasterIdLst>
   <p:sldIdLst>
     <p:sldId id="257" r:id="rId2"/>
     <p:sldId id="258" r:id="rId3"/>
     <p:sldId id="256" r:id="rId4"/>
     <p:sldId id="275" r:id="rId5"/>
-    <p:sldId id="268" r:id="rId6"/>
-    <p:sldId id="273" r:id="rId7"/>
-    <p:sldId id="270" r:id="rId8"/>
-    <p:sldId id="271" r:id="rId9"/>
-    <p:sldId id="272" r:id="rId10"/>
-    <p:sldId id="274" r:id="rId11"/>
-    <p:sldId id="266" r:id="rId12"/>
+    <p:sldId id="273" r:id="rId6"/>
+    <p:sldId id="270" r:id="rId7"/>
+    <p:sldId id="271" r:id="rId8"/>
+    <p:sldId id="272" r:id="rId9"/>
+    <p:sldId id="274" r:id="rId10"/>
+    <p:sldId id="266" r:id="rId11"/>
   </p:sldIdLst>
   <p:sldSz cx="9144000" cy="6858000" type="screen4x3"/>
   <p:notesSz cx="6858000" cy="9144000"/>
@@ -666,14 +665,14 @@
               <a:rPr lang="ru-RU" smtClean="0"/>
               <a:t>5</a:t>
             </a:fld>
-            <a:endParaRPr lang="ru-RU"/>
+            <a:endParaRPr lang="ru-RU" dirty="0"/>
           </a:p>
         </p:txBody>
       </p:sp>
     </p:spTree>
     <p:extLst>
       <p:ext uri="{BB962C8B-B14F-4D97-AF65-F5344CB8AC3E}">
-        <p14:creationId xmlns:p14="http://schemas.microsoft.com/office/powerpoint/2010/main" val="2184438951"/>
+        <p14:creationId xmlns:p14="http://schemas.microsoft.com/office/powerpoint/2010/main" val="2033981817"/>
       </p:ext>
     </p:extLst>
   </p:cSld>
@@ -691,7 +690,7 @@
         <p:cNvPr id="1" name="">
           <a:extLst>
             <a:ext uri="{FF2B5EF4-FFF2-40B4-BE49-F238E27FC236}">
-              <a16:creationId xmlns:a16="http://schemas.microsoft.com/office/drawing/2014/main" id="{F11BACC8-2C4D-334B-9042-96E69D47FBC5}"/>
+              <a16:creationId xmlns:a16="http://schemas.microsoft.com/office/drawing/2014/main" id="{B17726DC-CE10-F03F-2142-18D5DEE97B8B}"/>
             </a:ext>
           </a:extLst>
         </p:cNvPr>
@@ -711,7 +710,7 @@
           <p:cNvPr id="2" name="Образ слайда 1">
             <a:extLst>
               <a:ext uri="{FF2B5EF4-FFF2-40B4-BE49-F238E27FC236}">
-                <a16:creationId xmlns:a16="http://schemas.microsoft.com/office/drawing/2014/main" id="{22BE1D05-A3F2-9A1C-96D7-51E72924A0B9}"/>
+                <a16:creationId xmlns:a16="http://schemas.microsoft.com/office/drawing/2014/main" id="{CBD27571-4120-1AD9-24AF-1F6C37D039DE}"/>
               </a:ext>
             </a:extLst>
           </p:cNvPr>
@@ -729,7 +728,7 @@
           <p:cNvPr id="3" name="Заметки 2">
             <a:extLst>
               <a:ext uri="{FF2B5EF4-FFF2-40B4-BE49-F238E27FC236}">
-                <a16:creationId xmlns:a16="http://schemas.microsoft.com/office/drawing/2014/main" id="{01E14AF7-2AA3-67C6-62C2-2ADB9EC803C7}"/>
+                <a16:creationId xmlns:a16="http://schemas.microsoft.com/office/drawing/2014/main" id="{C020C72C-20DC-053F-06DA-226D6D644D97}"/>
               </a:ext>
             </a:extLst>
           </p:cNvPr>
@@ -745,7 +744,7 @@
           <a:bodyPr/>
           <a:lstStyle/>
           <a:p>
-            <a:endParaRPr lang="ru-RU"/>
+            <a:endParaRPr lang="ru-RU" dirty="0"/>
           </a:p>
         </p:txBody>
       </p:sp>
@@ -754,7 +753,7 @@
           <p:cNvPr id="4" name="Номер слайда 3">
             <a:extLst>
               <a:ext uri="{FF2B5EF4-FFF2-40B4-BE49-F238E27FC236}">
-                <a16:creationId xmlns:a16="http://schemas.microsoft.com/office/drawing/2014/main" id="{0D686308-0247-4379-103C-289F8CA0A19D}"/>
+                <a16:creationId xmlns:a16="http://schemas.microsoft.com/office/drawing/2014/main" id="{55F1735C-DD43-29D0-C068-51A4DFD82638}"/>
               </a:ext>
             </a:extLst>
           </p:cNvPr>
@@ -774,14 +773,14 @@
               <a:rPr lang="ru-RU" smtClean="0"/>
               <a:t>6</a:t>
             </a:fld>
-            <a:endParaRPr lang="ru-RU"/>
+            <a:endParaRPr lang="ru-RU" dirty="0"/>
           </a:p>
         </p:txBody>
       </p:sp>
     </p:spTree>
     <p:extLst>
       <p:ext uri="{BB962C8B-B14F-4D97-AF65-F5344CB8AC3E}">
-        <p14:creationId xmlns:p14="http://schemas.microsoft.com/office/powerpoint/2010/main" val="2033981817"/>
+        <p14:creationId xmlns:p14="http://schemas.microsoft.com/office/powerpoint/2010/main" val="3979846337"/>
       </p:ext>
     </p:extLst>
   </p:cSld>
@@ -882,14 +881,14 @@
               <a:rPr lang="ru-RU" smtClean="0"/>
               <a:t>7</a:t>
             </a:fld>
-            <a:endParaRPr lang="ru-RU"/>
+            <a:endParaRPr lang="ru-RU" dirty="0"/>
           </a:p>
         </p:txBody>
       </p:sp>
     </p:spTree>
     <p:extLst>
       <p:ext uri="{BB962C8B-B14F-4D97-AF65-F5344CB8AC3E}">
-        <p14:creationId xmlns:p14="http://schemas.microsoft.com/office/powerpoint/2010/main" val="3979846337"/>
+        <p14:creationId xmlns:p14="http://schemas.microsoft.com/office/powerpoint/2010/main" val="3040273396"/>
       </p:ext>
     </p:extLst>
   </p:cSld>
@@ -990,14 +989,14 @@
               <a:rPr lang="ru-RU" smtClean="0"/>
               <a:t>8</a:t>
             </a:fld>
-            <a:endParaRPr lang="ru-RU"/>
+            <a:endParaRPr lang="ru-RU" dirty="0"/>
           </a:p>
         </p:txBody>
       </p:sp>
     </p:spTree>
     <p:extLst>
       <p:ext uri="{BB962C8B-B14F-4D97-AF65-F5344CB8AC3E}">
-        <p14:creationId xmlns:p14="http://schemas.microsoft.com/office/powerpoint/2010/main" val="3040273396"/>
+        <p14:creationId xmlns:p14="http://schemas.microsoft.com/office/powerpoint/2010/main" val="879894849"/>
       </p:ext>
     </p:extLst>
   </p:cSld>
@@ -1097,114 +1096,6 @@
             <a:fld id="{8C7347D7-6652-406A-AA51-ABE302EA4CF8}" type="slidenum">
               <a:rPr lang="ru-RU" smtClean="0"/>
               <a:t>9</a:t>
-            </a:fld>
-            <a:endParaRPr lang="ru-RU"/>
-          </a:p>
-        </p:txBody>
-      </p:sp>
-    </p:spTree>
-    <p:extLst>
-      <p:ext uri="{BB962C8B-B14F-4D97-AF65-F5344CB8AC3E}">
-        <p14:creationId xmlns:p14="http://schemas.microsoft.com/office/powerpoint/2010/main" val="879894849"/>
-      </p:ext>
-    </p:extLst>
-  </p:cSld>
-  <p:clrMapOvr>
-    <a:masterClrMapping/>
-  </p:clrMapOvr>
-</p:notes>
-</file>
-
-<file path=ppt/notesSlides/notesSlide9.xml><?xml version="1.0" encoding="utf-8"?>
-<p:notes xmlns:a="http://schemas.openxmlformats.org/drawingml/2006/main" xmlns:r="http://schemas.openxmlformats.org/officeDocument/2006/relationships" xmlns:p="http://schemas.openxmlformats.org/presentationml/2006/main">
-  <p:cSld>
-    <p:spTree>
-      <p:nvGrpSpPr>
-        <p:cNvPr id="1" name="">
-          <a:extLst>
-            <a:ext uri="{FF2B5EF4-FFF2-40B4-BE49-F238E27FC236}">
-              <a16:creationId xmlns:a16="http://schemas.microsoft.com/office/drawing/2014/main" id="{B17726DC-CE10-F03F-2142-18D5DEE97B8B}"/>
-            </a:ext>
-          </a:extLst>
-        </p:cNvPr>
-        <p:cNvGrpSpPr/>
-        <p:nvPr/>
-      </p:nvGrpSpPr>
-      <p:grpSpPr>
-        <a:xfrm>
-          <a:off x="0" y="0"/>
-          <a:ext cx="0" cy="0"/>
-          <a:chOff x="0" y="0"/>
-          <a:chExt cx="0" cy="0"/>
-        </a:xfrm>
-      </p:grpSpPr>
-      <p:sp>
-        <p:nvSpPr>
-          <p:cNvPr id="2" name="Образ слайда 1">
-            <a:extLst>
-              <a:ext uri="{FF2B5EF4-FFF2-40B4-BE49-F238E27FC236}">
-                <a16:creationId xmlns:a16="http://schemas.microsoft.com/office/drawing/2014/main" id="{CBD27571-4120-1AD9-24AF-1F6C37D039DE}"/>
-              </a:ext>
-            </a:extLst>
-          </p:cNvPr>
-          <p:cNvSpPr>
-            <a:spLocks noGrp="1" noRot="1" noChangeAspect="1"/>
-          </p:cNvSpPr>
-          <p:nvPr>
-            <p:ph type="sldImg"/>
-          </p:nvPr>
-        </p:nvSpPr>
-        <p:spPr/>
-      </p:sp>
-      <p:sp>
-        <p:nvSpPr>
-          <p:cNvPr id="3" name="Заметки 2">
-            <a:extLst>
-              <a:ext uri="{FF2B5EF4-FFF2-40B4-BE49-F238E27FC236}">
-                <a16:creationId xmlns:a16="http://schemas.microsoft.com/office/drawing/2014/main" id="{C020C72C-20DC-053F-06DA-226D6D644D97}"/>
-              </a:ext>
-            </a:extLst>
-          </p:cNvPr>
-          <p:cNvSpPr>
-            <a:spLocks noGrp="1"/>
-          </p:cNvSpPr>
-          <p:nvPr>
-            <p:ph type="body" idx="1"/>
-          </p:nvPr>
-        </p:nvSpPr>
-        <p:spPr/>
-        <p:txBody>
-          <a:bodyPr/>
-          <a:lstStyle/>
-          <a:p>
-            <a:endParaRPr lang="ru-RU" dirty="0"/>
-          </a:p>
-        </p:txBody>
-      </p:sp>
-      <p:sp>
-        <p:nvSpPr>
-          <p:cNvPr id="4" name="Номер слайда 3">
-            <a:extLst>
-              <a:ext uri="{FF2B5EF4-FFF2-40B4-BE49-F238E27FC236}">
-                <a16:creationId xmlns:a16="http://schemas.microsoft.com/office/drawing/2014/main" id="{55F1735C-DD43-29D0-C068-51A4DFD82638}"/>
-              </a:ext>
-            </a:extLst>
-          </p:cNvPr>
-          <p:cNvSpPr>
-            <a:spLocks noGrp="1"/>
-          </p:cNvSpPr>
-          <p:nvPr>
-            <p:ph type="sldNum" sz="quarter" idx="5"/>
-          </p:nvPr>
-        </p:nvSpPr>
-        <p:spPr/>
-        <p:txBody>
-          <a:bodyPr/>
-          <a:lstStyle/>
-          <a:p>
-            <a:fld id="{8C7347D7-6652-406A-AA51-ABE302EA4CF8}" type="slidenum">
-              <a:rPr lang="ru-RU" smtClean="0"/>
-              <a:t>10</a:t>
             </a:fld>
             <a:endParaRPr lang="ru-RU"/>
           </a:p>
@@ -5492,6 +5383,2673 @@
   <p:cSld>
     <p:spTree>
       <p:nvGrpSpPr>
+        <p:cNvPr id="1" name=""/>
+        <p:cNvGrpSpPr/>
+        <p:nvPr/>
+      </p:nvGrpSpPr>
+      <p:grpSpPr>
+        <a:xfrm>
+          <a:off x="0" y="0"/>
+          <a:ext cx="0" cy="0"/>
+          <a:chOff x="0" y="0"/>
+          <a:chExt cx="0" cy="0"/>
+        </a:xfrm>
+      </p:grpSpPr>
+      <p:sp>
+        <p:nvSpPr>
+          <p:cNvPr id="3" name="Объект 2"/>
+          <p:cNvSpPr>
+            <a:spLocks noGrp="1"/>
+          </p:cNvSpPr>
+          <p:nvPr>
+            <p:ph idx="1"/>
+          </p:nvPr>
+        </p:nvSpPr>
+        <p:spPr>
+          <a:xfrm>
+            <a:off x="200634" y="1034005"/>
+            <a:ext cx="8736990" cy="5827551"/>
+          </a:xfrm>
+        </p:spPr>
+        <p:txBody>
+          <a:bodyPr vert="horz" lIns="91440" tIns="45720" rIns="91440" bIns="45720" rtlCol="0" anchor="ctr">
+            <a:noAutofit/>
+          </a:bodyPr>
+          <a:lstStyle/>
+          <a:p>
+            <a:pPr marL="0" indent="0">
+              <a:lnSpc>
+                <a:spcPct val="100000"/>
+              </a:lnSpc>
+              <a:buNone/>
+            </a:pPr>
+            <a:r>
+              <a:rPr lang="ru-RU" sz="2000" dirty="0">
+                <a:latin typeface="Times New Roman" panose="02020603050405020304" pitchFamily="18" charset="0"/>
+                <a:cs typeface="Times New Roman" panose="02020603050405020304" pitchFamily="18" charset="0"/>
+              </a:rPr>
+              <a:t>	Цель и задачи моей научно-исследовательской работы выполнены:</a:t>
+            </a:r>
+            <a:endParaRPr lang="ru-RU" sz="2000" dirty="0">
+              <a:latin typeface="Times New Roman" panose="02020603050405020304" pitchFamily="18" charset="0"/>
+              <a:ea typeface="Calibri"/>
+              <a:cs typeface="Times New Roman" panose="02020603050405020304" pitchFamily="18" charset="0"/>
+            </a:endParaRPr>
+          </a:p>
+          <a:p>
+            <a:pPr>
+              <a:lnSpc>
+                <a:spcPct val="100000"/>
+              </a:lnSpc>
+            </a:pPr>
+            <a:r>
+              <a:rPr lang="ru-RU" sz="2000" dirty="0">
+                <a:solidFill>
+                  <a:srgbClr val="000000"/>
+                </a:solidFill>
+                <a:latin typeface="Times New Roman" panose="02020603050405020304" pitchFamily="18" charset="0"/>
+                <a:cs typeface="Times New Roman" panose="02020603050405020304" pitchFamily="18" charset="0"/>
+              </a:rPr>
+              <a:t>Изучены дефекты FDM-печати и выбран целевого дефекта для автоматического обнаружения.</a:t>
+            </a:r>
+          </a:p>
+          <a:p>
+            <a:pPr>
+              <a:lnSpc>
+                <a:spcPct val="100000"/>
+              </a:lnSpc>
+            </a:pPr>
+            <a:r>
+              <a:rPr lang="ru-RU" sz="2000" dirty="0">
+                <a:solidFill>
+                  <a:srgbClr val="000000"/>
+                </a:solidFill>
+                <a:latin typeface="Times New Roman" panose="02020603050405020304" pitchFamily="18" charset="0"/>
+                <a:cs typeface="Times New Roman" panose="02020603050405020304" pitchFamily="18" charset="0"/>
+              </a:rPr>
+              <a:t>Сформирован датасет: произведен поиск данных, балансировка классов, </a:t>
+            </a:r>
+            <a:r>
+              <a:rPr lang="ru-RU" sz="2000" dirty="0" err="1">
+                <a:solidFill>
+                  <a:srgbClr val="000000"/>
+                </a:solidFill>
+                <a:latin typeface="Times New Roman" panose="02020603050405020304" pitchFamily="18" charset="0"/>
+                <a:cs typeface="Times New Roman" panose="02020603050405020304" pitchFamily="18" charset="0"/>
+              </a:rPr>
+              <a:t>аугментирование</a:t>
+            </a:r>
+            <a:r>
+              <a:rPr lang="ru-RU" sz="2000" dirty="0">
+                <a:solidFill>
+                  <a:srgbClr val="000000"/>
+                </a:solidFill>
+                <a:latin typeface="Times New Roman" panose="02020603050405020304" pitchFamily="18" charset="0"/>
+                <a:cs typeface="Times New Roman" panose="02020603050405020304" pitchFamily="18" charset="0"/>
+              </a:rPr>
+              <a:t>, разделение на обучающую и тестовую выборки; </a:t>
+            </a:r>
+          </a:p>
+          <a:p>
+            <a:pPr marL="214630" indent="-214630">
+              <a:lnSpc>
+                <a:spcPct val="100000"/>
+              </a:lnSpc>
+              <a:spcBef>
+                <a:spcPts val="0"/>
+              </a:spcBef>
+              <a:buFont typeface="Arial,Sans-Serif" panose="020B0604020202020204" pitchFamily="34" charset="0"/>
+            </a:pPr>
+            <a:r>
+              <a:rPr lang="ru-RU" sz="2000" dirty="0">
+                <a:latin typeface="Times New Roman" panose="02020603050405020304" pitchFamily="18" charset="0"/>
+                <a:ea typeface="Calibri"/>
+                <a:cs typeface="Times New Roman" panose="02020603050405020304" pitchFamily="18" charset="0"/>
+              </a:rPr>
+              <a:t>Обучена нейронная сеть для распознавания дефекта «Спагетти» на основе изображений печатей; </a:t>
+            </a:r>
+            <a:endParaRPr lang="en-US" sz="2000" dirty="0">
+              <a:latin typeface="Times New Roman" panose="02020603050405020304" pitchFamily="18" charset="0"/>
+              <a:ea typeface="Calibri"/>
+              <a:cs typeface="Times New Roman" panose="02020603050405020304" pitchFamily="18" charset="0"/>
+            </a:endParaRPr>
+          </a:p>
+          <a:p>
+            <a:pPr>
+              <a:lnSpc>
+                <a:spcPct val="100000"/>
+              </a:lnSpc>
+            </a:pPr>
+            <a:r>
+              <a:rPr lang="ru-RU" sz="2000" dirty="0">
+                <a:latin typeface="Times New Roman" panose="02020603050405020304" pitchFamily="18" charset="0"/>
+                <a:ea typeface="Calibri"/>
+                <a:cs typeface="Times New Roman" panose="02020603050405020304" pitchFamily="18" charset="0"/>
+              </a:rPr>
+              <a:t>Разработан, собран и отлажен аппаратно-программный комплекса экспериментального 3D-принтера.</a:t>
+            </a:r>
+            <a:endParaRPr lang="ru-RU" sz="2000" dirty="0">
+              <a:solidFill>
+                <a:srgbClr val="000000"/>
+              </a:solidFill>
+              <a:latin typeface="Times New Roman" panose="02020603050405020304" pitchFamily="18" charset="0"/>
+              <a:cs typeface="Times New Roman" panose="02020603050405020304" pitchFamily="18" charset="0"/>
+            </a:endParaRPr>
+          </a:p>
+          <a:p>
+            <a:pPr>
+              <a:lnSpc>
+                <a:spcPct val="100000"/>
+              </a:lnSpc>
+            </a:pPr>
+            <a:r>
+              <a:rPr lang="ru-RU" sz="2000" dirty="0">
+                <a:latin typeface="Times New Roman" panose="02020603050405020304" pitchFamily="18" charset="0"/>
+                <a:cs typeface="Times New Roman" panose="02020603050405020304" pitchFamily="18" charset="0"/>
+              </a:rPr>
+              <a:t>Проведен тестовый запуск работы системы контроля и 3D-принтера в процессе печати.</a:t>
+            </a:r>
+          </a:p>
+          <a:p>
+            <a:pPr>
+              <a:lnSpc>
+                <a:spcPct val="100000"/>
+              </a:lnSpc>
+            </a:pPr>
+            <a:endParaRPr lang="ru-RU" sz="2000" dirty="0">
+              <a:latin typeface="Times New Roman" panose="02020603050405020304" pitchFamily="18" charset="0"/>
+              <a:cs typeface="Times New Roman" panose="02020603050405020304" pitchFamily="18" charset="0"/>
+            </a:endParaRPr>
+          </a:p>
+          <a:p>
+            <a:pPr marL="0" indent="0">
+              <a:lnSpc>
+                <a:spcPct val="100000"/>
+              </a:lnSpc>
+              <a:buNone/>
+            </a:pPr>
+            <a:r>
+              <a:rPr lang="ru-RU" sz="2000" dirty="0">
+                <a:latin typeface="Times New Roman" panose="02020603050405020304" pitchFamily="18" charset="0"/>
+                <a:cs typeface="Times New Roman" panose="02020603050405020304" pitchFamily="18" charset="0"/>
+              </a:rPr>
+              <a:t>	Цель и задачи моей научно-исследовательской работы выполнены:</a:t>
+            </a:r>
+            <a:endParaRPr lang="ru-RU" sz="2000" dirty="0">
+              <a:latin typeface="Times New Roman" panose="02020603050405020304" pitchFamily="18" charset="0"/>
+              <a:ea typeface="Calibri"/>
+              <a:cs typeface="Times New Roman" panose="02020603050405020304" pitchFamily="18" charset="0"/>
+            </a:endParaRPr>
+          </a:p>
+          <a:p>
+            <a:pPr>
+              <a:lnSpc>
+                <a:spcPct val="100000"/>
+              </a:lnSpc>
+            </a:pPr>
+            <a:endParaRPr lang="ru-RU" sz="2000" dirty="0">
+              <a:latin typeface="Times New Roman" panose="02020603050405020304" pitchFamily="18" charset="0"/>
+              <a:cs typeface="Times New Roman" panose="02020603050405020304" pitchFamily="18" charset="0"/>
+            </a:endParaRPr>
+          </a:p>
+          <a:p>
+            <a:pPr>
+              <a:lnSpc>
+                <a:spcPct val="100000"/>
+              </a:lnSpc>
+            </a:pPr>
+            <a:endParaRPr lang="ru-RU" sz="2000" dirty="0">
+              <a:latin typeface="Times New Roman" panose="02020603050405020304" pitchFamily="18" charset="0"/>
+              <a:cs typeface="Times New Roman" panose="02020603050405020304" pitchFamily="18" charset="0"/>
+            </a:endParaRPr>
+          </a:p>
+          <a:p>
+            <a:pPr>
+              <a:lnSpc>
+                <a:spcPct val="100000"/>
+              </a:lnSpc>
+            </a:pPr>
+            <a:endParaRPr lang="ru-RU" sz="2000" dirty="0">
+              <a:latin typeface="Times New Roman" panose="02020603050405020304" pitchFamily="18" charset="0"/>
+              <a:ea typeface="Calibri"/>
+              <a:cs typeface="Times New Roman" panose="02020603050405020304" pitchFamily="18" charset="0"/>
+            </a:endParaRPr>
+          </a:p>
+        </p:txBody>
+      </p:sp>
+      <p:sp>
+        <p:nvSpPr>
+          <p:cNvPr id="4" name="Замещающий номер слайда 3"/>
+          <p:cNvSpPr>
+            <a:spLocks noGrp="1"/>
+          </p:cNvSpPr>
+          <p:nvPr>
+            <p:ph type="sldNum" sz="quarter" idx="12"/>
+          </p:nvPr>
+        </p:nvSpPr>
+        <p:spPr>
+          <a:xfrm>
+            <a:off x="7088886" y="6493511"/>
+            <a:ext cx="2057400" cy="365125"/>
+          </a:xfrm>
+        </p:spPr>
+        <p:txBody>
+          <a:bodyPr/>
+          <a:lstStyle/>
+          <a:p>
+            <a:fld id="{D6ED8A53-8D2F-4011-BE06-EDB0774336BA}" type="slidenum">
+              <a:rPr lang="ru-RU" sz="2000" dirty="0" smtClean="0">
+                <a:solidFill>
+                  <a:schemeClr val="tx1"/>
+                </a:solidFill>
+                <a:latin typeface="Times New Roman"/>
+                <a:cs typeface="Times New Roman"/>
+              </a:rPr>
+              <a:t>10</a:t>
+            </a:fld>
+            <a:endParaRPr lang="ru-RU" sz="2000">
+              <a:solidFill>
+                <a:schemeClr val="tx1"/>
+              </a:solidFill>
+              <a:latin typeface="Times New Roman"/>
+              <a:cs typeface="Times New Roman"/>
+            </a:endParaRPr>
+          </a:p>
+        </p:txBody>
+      </p:sp>
+      <p:sp>
+        <p:nvSpPr>
+          <p:cNvPr id="6" name="Заголовок 1">
+            <a:extLst>
+              <a:ext uri="{FF2B5EF4-FFF2-40B4-BE49-F238E27FC236}">
+                <a16:creationId xmlns:a16="http://schemas.microsoft.com/office/drawing/2014/main" id="{A5D6DF51-0B62-79A6-6D5B-9EBEFC4103B7}"/>
+              </a:ext>
+            </a:extLst>
+          </p:cNvPr>
+          <p:cNvSpPr txBox="1">
+            <a:spLocks/>
+          </p:cNvSpPr>
+          <p:nvPr/>
+        </p:nvSpPr>
+        <p:spPr>
+          <a:xfrm>
+            <a:off x="701718" y="3637"/>
+            <a:ext cx="7886700" cy="712868"/>
+          </a:xfrm>
+          <a:prstGeom prst="rect">
+            <a:avLst/>
+          </a:prstGeom>
+        </p:spPr>
+        <p:txBody>
+          <a:bodyPr vert="horz" lIns="91440" tIns="45720" rIns="91440" bIns="45720" rtlCol="0" anchor="ctr">
+            <a:normAutofit/>
+          </a:bodyPr>
+          <a:lstStyle>
+            <a:lvl1pPr algn="l" defTabSz="914400" rtl="0" eaLnBrk="1" latinLnBrk="0" hangingPunct="1">
+              <a:lnSpc>
+                <a:spcPct val="90000"/>
+              </a:lnSpc>
+              <a:spcBef>
+                <a:spcPct val="0"/>
+              </a:spcBef>
+              <a:buNone/>
+              <a:defRPr sz="4400" kern="1200">
+                <a:solidFill>
+                  <a:schemeClr val="tx1"/>
+                </a:solidFill>
+                <a:latin typeface="+mj-lt"/>
+                <a:ea typeface="+mj-ea"/>
+                <a:cs typeface="+mj-cs"/>
+              </a:defRPr>
+            </a:lvl1pPr>
+          </a:lstStyle>
+          <a:p>
+            <a:pPr algn="ctr"/>
+            <a:r>
+              <a:rPr lang="ru-RU">
+                <a:latin typeface="Times New Roman"/>
+                <a:ea typeface="Calibri"/>
+                <a:cs typeface="Times New Roman"/>
+              </a:rPr>
+              <a:t>Заключение</a:t>
+            </a:r>
+            <a:endParaRPr lang="ru-RU">
+              <a:ea typeface="Calibri Light"/>
+              <a:cs typeface="Calibri Light"/>
+            </a:endParaRPr>
+          </a:p>
+        </p:txBody>
+      </p:sp>
+    </p:spTree>
+  </p:cSld>
+  <p:clrMapOvr>
+    <a:masterClrMapping/>
+  </p:clrMapOvr>
+</p:sld>
+</file>
+
+<file path=ppt/slides/slide2.xml><?xml version="1.0" encoding="utf-8"?>
+<p:sld xmlns:a="http://schemas.openxmlformats.org/drawingml/2006/main" xmlns:r="http://schemas.openxmlformats.org/officeDocument/2006/relationships" xmlns:p="http://schemas.openxmlformats.org/presentationml/2006/main">
+  <p:cSld>
+    <p:spTree>
+      <p:nvGrpSpPr>
+        <p:cNvPr id="1" name=""/>
+        <p:cNvGrpSpPr/>
+        <p:nvPr/>
+      </p:nvGrpSpPr>
+      <p:grpSpPr>
+        <a:xfrm>
+          <a:off x="0" y="0"/>
+          <a:ext cx="0" cy="0"/>
+          <a:chOff x="0" y="0"/>
+          <a:chExt cx="0" cy="0"/>
+        </a:xfrm>
+      </p:grpSpPr>
+      <p:sp>
+        <p:nvSpPr>
+          <p:cNvPr id="2" name="Заголовок 1"/>
+          <p:cNvSpPr>
+            <a:spLocks noGrp="1"/>
+          </p:cNvSpPr>
+          <p:nvPr>
+            <p:ph type="title"/>
+          </p:nvPr>
+        </p:nvSpPr>
+        <p:spPr>
+          <a:xfrm>
+            <a:off x="633432" y="-5479"/>
+            <a:ext cx="7877136" cy="758162"/>
+          </a:xfrm>
+        </p:spPr>
+        <p:txBody>
+          <a:bodyPr>
+            <a:normAutofit/>
+          </a:bodyPr>
+          <a:lstStyle/>
+          <a:p>
+            <a:pPr algn="ctr"/>
+            <a:r>
+              <a:rPr lang="ru-RU" sz="3600" b="1" dirty="0">
+                <a:latin typeface="Times New Roman" panose="02020603050405020304" pitchFamily="18" charset="0"/>
+                <a:cs typeface="Times New Roman" panose="02020603050405020304" pitchFamily="18" charset="0"/>
+              </a:rPr>
+              <a:t>Цель работы</a:t>
+            </a:r>
+            <a:endParaRPr lang="ru-RU" dirty="0">
+              <a:latin typeface="Times New Roman" panose="02020603050405020304" pitchFamily="18" charset="0"/>
+              <a:cs typeface="Times New Roman" panose="02020603050405020304" pitchFamily="18" charset="0"/>
+            </a:endParaRPr>
+          </a:p>
+        </p:txBody>
+      </p:sp>
+      <p:sp>
+        <p:nvSpPr>
+          <p:cNvPr id="3" name="Объект 2"/>
+          <p:cNvSpPr>
+            <a:spLocks noGrp="1"/>
+          </p:cNvSpPr>
+          <p:nvPr>
+            <p:ph idx="1"/>
+          </p:nvPr>
+        </p:nvSpPr>
+        <p:spPr>
+          <a:xfrm>
+            <a:off x="625440" y="752683"/>
+            <a:ext cx="7885128" cy="1170901"/>
+          </a:xfrm>
+        </p:spPr>
+        <p:txBody>
+          <a:bodyPr vert="horz" lIns="91440" tIns="45720" rIns="91440" bIns="45720" rtlCol="0" anchor="t">
+            <a:noAutofit/>
+          </a:bodyPr>
+          <a:lstStyle/>
+          <a:p>
+            <a:pPr marL="0" indent="0" algn="just">
+              <a:buNone/>
+            </a:pPr>
+            <a:r>
+              <a:rPr lang="ru-RU" sz="2400" dirty="0">
+                <a:latin typeface="Times New Roman" panose="02020603050405020304" pitchFamily="18" charset="0"/>
+                <a:cs typeface="Times New Roman" panose="02020603050405020304" pitchFamily="18" charset="0"/>
+              </a:rPr>
+              <a:t>Цель работы — разработка и тестирование версии 3D-принтера с системой обнаружения дефектов в процессе печати и механизмом своевременного реагирования.</a:t>
+            </a:r>
+            <a:endParaRPr lang="ru-RU" dirty="0">
+              <a:latin typeface="Times New Roman" panose="02020603050405020304" pitchFamily="18" charset="0"/>
+              <a:cs typeface="Times New Roman" panose="02020603050405020304" pitchFamily="18" charset="0"/>
+            </a:endParaRPr>
+          </a:p>
+        </p:txBody>
+      </p:sp>
+      <p:sp>
+        <p:nvSpPr>
+          <p:cNvPr id="4" name="TextBox 3"/>
+          <p:cNvSpPr txBox="1"/>
+          <p:nvPr/>
+        </p:nvSpPr>
+        <p:spPr>
+          <a:xfrm>
+            <a:off x="644087" y="1960801"/>
+            <a:ext cx="7878196" cy="646331"/>
+          </a:xfrm>
+          <a:prstGeom prst="rect">
+            <a:avLst/>
+          </a:prstGeom>
+          <a:noFill/>
+        </p:spPr>
+        <p:txBody>
+          <a:bodyPr wrap="square" lIns="91440" tIns="45720" rIns="91440" bIns="45720" rtlCol="0" anchor="t">
+            <a:spAutoFit/>
+          </a:bodyPr>
+          <a:lstStyle/>
+          <a:p>
+            <a:pPr algn="ctr"/>
+            <a:r>
+              <a:rPr lang="ru-RU" sz="3600" b="1" dirty="0">
+                <a:latin typeface="Times New Roman" panose="02020603050405020304" pitchFamily="18" charset="0"/>
+                <a:cs typeface="Times New Roman" panose="02020603050405020304" pitchFamily="18" charset="0"/>
+              </a:rPr>
+              <a:t>Основные задачи работы</a:t>
+            </a:r>
+          </a:p>
+        </p:txBody>
+      </p:sp>
+      <p:sp>
+        <p:nvSpPr>
+          <p:cNvPr id="5" name="TextBox 4"/>
+          <p:cNvSpPr txBox="1"/>
+          <p:nvPr/>
+        </p:nvSpPr>
+        <p:spPr>
+          <a:xfrm>
+            <a:off x="544994" y="2607132"/>
+            <a:ext cx="8069450" cy="4154984"/>
+          </a:xfrm>
+          <a:prstGeom prst="rect">
+            <a:avLst/>
+          </a:prstGeom>
+          <a:noFill/>
+        </p:spPr>
+        <p:txBody>
+          <a:bodyPr wrap="square" lIns="91440" tIns="45720" rIns="91440" bIns="45720" rtlCol="0" anchor="t">
+            <a:spAutoFit/>
+          </a:bodyPr>
+          <a:lstStyle/>
+          <a:p>
+            <a:pPr marL="214630" indent="-214630" algn="just">
+              <a:buFont typeface="Arial" panose="020B0604020202020204" pitchFamily="34" charset="0"/>
+              <a:buChar char="•"/>
+            </a:pPr>
+            <a:r>
+              <a:rPr lang="ru-RU" sz="2400" dirty="0">
+                <a:latin typeface="Times New Roman" panose="02020603050405020304" pitchFamily="18" charset="0"/>
+                <a:cs typeface="Times New Roman" panose="02020603050405020304" pitchFamily="18" charset="0"/>
+              </a:rPr>
+              <a:t>Изучение дефектов FDM-печати и выбор целевого дефекта для автоматического обнаружения.</a:t>
+            </a:r>
+          </a:p>
+          <a:p>
+            <a:pPr marL="214630" indent="-214630" algn="just">
+              <a:buFont typeface="Arial" panose="020B0604020202020204" pitchFamily="34" charset="0"/>
+              <a:buChar char="•"/>
+            </a:pPr>
+            <a:r>
+              <a:rPr lang="ru-RU" sz="2400" dirty="0">
+                <a:latin typeface="Times New Roman" panose="02020603050405020304" pitchFamily="18" charset="0"/>
+                <a:cs typeface="Times New Roman" panose="02020603050405020304" pitchFamily="18" charset="0"/>
+              </a:rPr>
+              <a:t>Проектирование, сборка и отладка аппаратно-программного комплекса экспериментального 3D-принтера.</a:t>
+            </a:r>
+          </a:p>
+          <a:p>
+            <a:pPr marL="214630" indent="-214630" algn="just">
+              <a:buFont typeface="Arial" panose="020B0604020202020204" pitchFamily="34" charset="0"/>
+              <a:buChar char="•"/>
+            </a:pPr>
+            <a:r>
+              <a:rPr lang="ru-RU" sz="2400" dirty="0">
+                <a:latin typeface="Times New Roman" panose="02020603050405020304" pitchFamily="18" charset="0"/>
+                <a:cs typeface="Times New Roman" panose="02020603050405020304" pitchFamily="18" charset="0"/>
+              </a:rPr>
+              <a:t>Сбор и подготовка данных для обучения нейросети и обучение модели обнаружения целевого дефекта.</a:t>
+            </a:r>
+          </a:p>
+          <a:p>
+            <a:pPr marL="214630" indent="-214630" algn="just">
+              <a:buFont typeface="Arial" panose="020B0604020202020204" pitchFamily="34" charset="0"/>
+              <a:buChar char="•"/>
+            </a:pPr>
+            <a:r>
+              <a:rPr lang="ru-RU" sz="2400" dirty="0">
+                <a:latin typeface="Times New Roman" panose="02020603050405020304" pitchFamily="18" charset="0"/>
+                <a:cs typeface="Times New Roman" panose="02020603050405020304" pitchFamily="18" charset="0"/>
+              </a:rPr>
+              <a:t>Разработка внешней системы контроля печати с автоматическим обнаружением дефектов.</a:t>
+            </a:r>
+          </a:p>
+          <a:p>
+            <a:pPr marL="214630" indent="-214630" algn="just">
+              <a:buFont typeface="Arial" panose="020B0604020202020204" pitchFamily="34" charset="0"/>
+              <a:buChar char="•"/>
+            </a:pPr>
+            <a:r>
+              <a:rPr lang="ru-RU" sz="2400" dirty="0">
+                <a:latin typeface="Times New Roman" panose="02020603050405020304" pitchFamily="18" charset="0"/>
+                <a:cs typeface="Times New Roman" panose="02020603050405020304" pitchFamily="18" charset="0"/>
+              </a:rPr>
+              <a:t>Тестирование работы системы контроля и 3D-принтера в процессе печати.</a:t>
+            </a:r>
+          </a:p>
+        </p:txBody>
+      </p:sp>
+      <p:sp>
+        <p:nvSpPr>
+          <p:cNvPr id="6" name="Замещающий номер слайда 4">
+            <a:extLst>
+              <a:ext uri="{FF2B5EF4-FFF2-40B4-BE49-F238E27FC236}">
+                <a16:creationId xmlns:a16="http://schemas.microsoft.com/office/drawing/2014/main" id="{C78DB24C-FC20-2FE0-98E7-F598D1843687}"/>
+              </a:ext>
+            </a:extLst>
+          </p:cNvPr>
+          <p:cNvSpPr>
+            <a:spLocks noGrp="1"/>
+          </p:cNvSpPr>
+          <p:nvPr>
+            <p:ph type="sldNum" sz="quarter" idx="12"/>
+          </p:nvPr>
+        </p:nvSpPr>
+        <p:spPr>
+          <a:xfrm>
+            <a:off x="7088886" y="6493511"/>
+            <a:ext cx="2057400" cy="365125"/>
+          </a:xfrm>
+        </p:spPr>
+        <p:txBody>
+          <a:bodyPr/>
+          <a:lstStyle/>
+          <a:p>
+            <a:fld id="{D6ED8A53-8D2F-4011-BE06-EDB0774336BA}" type="slidenum">
+              <a:rPr lang="ru-RU" sz="2000" dirty="0" smtClean="0">
+                <a:solidFill>
+                  <a:schemeClr val="tx1"/>
+                </a:solidFill>
+                <a:latin typeface="Times New Roman" panose="02020603050405020304" pitchFamily="18" charset="0"/>
+                <a:cs typeface="Times New Roman" panose="02020603050405020304" pitchFamily="18" charset="0"/>
+              </a:rPr>
+              <a:t>2</a:t>
+            </a:fld>
+            <a:endParaRPr lang="ru-RU" sz="2000">
+              <a:solidFill>
+                <a:schemeClr val="tx1"/>
+              </a:solidFill>
+              <a:latin typeface="Times New Roman" panose="02020603050405020304" pitchFamily="18" charset="0"/>
+              <a:ea typeface="Calibri"/>
+              <a:cs typeface="Times New Roman" panose="02020603050405020304" pitchFamily="18" charset="0"/>
+            </a:endParaRPr>
+          </a:p>
+        </p:txBody>
+      </p:sp>
+    </p:spTree>
+  </p:cSld>
+  <p:clrMapOvr>
+    <a:masterClrMapping/>
+  </p:clrMapOvr>
+</p:sld>
+</file>
+
+<file path=ppt/slides/slide3.xml><?xml version="1.0" encoding="utf-8"?>
+<p:sld xmlns:a="http://schemas.openxmlformats.org/drawingml/2006/main" xmlns:r="http://schemas.openxmlformats.org/officeDocument/2006/relationships" xmlns:p="http://schemas.openxmlformats.org/presentationml/2006/main">
+  <p:cSld>
+    <p:spTree>
+      <p:nvGrpSpPr>
+        <p:cNvPr id="1" name=""/>
+        <p:cNvGrpSpPr/>
+        <p:nvPr/>
+      </p:nvGrpSpPr>
+      <p:grpSpPr>
+        <a:xfrm>
+          <a:off x="0" y="0"/>
+          <a:ext cx="0" cy="0"/>
+          <a:chOff x="0" y="0"/>
+          <a:chExt cx="0" cy="0"/>
+        </a:xfrm>
+      </p:grpSpPr>
+      <p:pic>
+        <p:nvPicPr>
+          <p:cNvPr id="19" name="Рисунок 18">
+            <a:extLst>
+              <a:ext uri="{FF2B5EF4-FFF2-40B4-BE49-F238E27FC236}">
+                <a16:creationId xmlns:a16="http://schemas.microsoft.com/office/drawing/2014/main" id="{99FE507C-2C48-A423-9756-13891072B78F}"/>
+              </a:ext>
+            </a:extLst>
+          </p:cNvPr>
+          <p:cNvPicPr>
+            <a:picLocks noChangeAspect="1"/>
+          </p:cNvPicPr>
+          <p:nvPr/>
+        </p:nvPicPr>
+        <p:blipFill>
+          <a:blip r:embed="rId3">
+            <a:extLst>
+              <a:ext uri="{28A0092B-C50C-407E-A947-70E740481C1C}">
+                <a14:useLocalDpi xmlns:a14="http://schemas.microsoft.com/office/drawing/2010/main" val="0"/>
+              </a:ext>
+            </a:extLst>
+          </a:blip>
+          <a:srcRect l="8733" t="13068" r="8466" b="3458"/>
+          <a:stretch/>
+        </p:blipFill>
+        <p:spPr>
+          <a:xfrm>
+            <a:off x="5021065" y="3247173"/>
+            <a:ext cx="3921040" cy="2555874"/>
+          </a:xfrm>
+          <a:prstGeom prst="rect">
+            <a:avLst/>
+          </a:prstGeom>
+        </p:spPr>
+      </p:pic>
+      <p:sp>
+        <p:nvSpPr>
+          <p:cNvPr id="2" name="Заголовок 1">
+            <a:extLst>
+              <a:ext uri="{FF2B5EF4-FFF2-40B4-BE49-F238E27FC236}">
+                <a16:creationId xmlns:a16="http://schemas.microsoft.com/office/drawing/2014/main" id="{49CC29E7-47AE-4C1B-A66A-06BAB8AB4DBE}"/>
+              </a:ext>
+            </a:extLst>
+          </p:cNvPr>
+          <p:cNvSpPr>
+            <a:spLocks noGrp="1"/>
+          </p:cNvSpPr>
+          <p:nvPr>
+            <p:ph type="title"/>
+          </p:nvPr>
+        </p:nvSpPr>
+        <p:spPr>
+          <a:xfrm>
+            <a:off x="628650" y="-116476"/>
+            <a:ext cx="7886700" cy="712868"/>
+          </a:xfrm>
+        </p:spPr>
+        <p:txBody>
+          <a:bodyPr wrap="square" lIns="91440" tIns="45720" rIns="91440" bIns="45720">
+            <a:noAutofit/>
+          </a:bodyPr>
+          <a:lstStyle>
+            <a:defPPr algn="ctr">
+              <a:defRPr sz="4400" b="0">
+                <a:solidFill>
+                  <a:srgbClr val="000000"/>
+                </a:solidFill>
+                <a:latin typeface="Times New Roman"/>
+                <a:ea typeface="Times New Roman"/>
+                <a:cs typeface="Times New Roman"/>
+              </a:defRPr>
+            </a:defPPr>
+          </a:lstStyle>
+          <a:p>
+            <a:pPr algn="ctr">
+              <a:buNone/>
+              <a:defRPr sz="4400" b="0">
+                <a:solidFill>
+                  <a:srgbClr val="000000"/>
+                </a:solidFill>
+                <a:latin typeface="Times New Roman"/>
+                <a:ea typeface="Times New Roman"/>
+                <a:cs typeface="Times New Roman"/>
+              </a:defRPr>
+            </a:pPr>
+            <a:r>
+              <a:rPr sz="4000" b="0" dirty="0">
+                <a:solidFill>
+                  <a:srgbClr val="000000"/>
+                </a:solidFill>
+                <a:latin typeface="Times New Roman"/>
+                <a:ea typeface="Times New Roman"/>
+                <a:cs typeface="Times New Roman"/>
+              </a:rPr>
+              <a:t>В </a:t>
+            </a:r>
+            <a:r>
+              <a:rPr sz="4000" b="0" dirty="0" err="1">
+                <a:solidFill>
+                  <a:srgbClr val="000000"/>
+                </a:solidFill>
+                <a:latin typeface="Times New Roman"/>
+                <a:ea typeface="Times New Roman"/>
+                <a:cs typeface="Times New Roman"/>
+              </a:rPr>
+              <a:t>чем</a:t>
+            </a:r>
+            <a:r>
+              <a:rPr sz="4000" b="0" dirty="0">
+                <a:solidFill>
+                  <a:srgbClr val="000000"/>
+                </a:solidFill>
+                <a:latin typeface="Times New Roman"/>
+                <a:ea typeface="Times New Roman"/>
+                <a:cs typeface="Times New Roman"/>
+              </a:rPr>
+              <a:t> </a:t>
+            </a:r>
+            <a:r>
+              <a:rPr sz="4000" b="0" dirty="0" err="1">
+                <a:solidFill>
+                  <a:srgbClr val="000000"/>
+                </a:solidFill>
+                <a:latin typeface="Times New Roman"/>
+                <a:ea typeface="Times New Roman"/>
+                <a:cs typeface="Times New Roman"/>
+              </a:rPr>
+              <a:t>заключается</a:t>
+            </a:r>
+            <a:r>
+              <a:rPr sz="4000" b="0" dirty="0">
+                <a:solidFill>
+                  <a:srgbClr val="000000"/>
+                </a:solidFill>
+                <a:latin typeface="Times New Roman"/>
+                <a:ea typeface="Times New Roman"/>
+                <a:cs typeface="Times New Roman"/>
+              </a:rPr>
+              <a:t> </a:t>
+            </a:r>
+            <a:r>
+              <a:rPr sz="4000" b="0" dirty="0" err="1">
+                <a:solidFill>
+                  <a:srgbClr val="000000"/>
+                </a:solidFill>
+                <a:latin typeface="Times New Roman"/>
+                <a:ea typeface="Times New Roman"/>
+                <a:cs typeface="Times New Roman"/>
+              </a:rPr>
+              <a:t>проблема</a:t>
+            </a:r>
+            <a:r>
+              <a:rPr sz="4000" b="0" dirty="0">
+                <a:solidFill>
+                  <a:srgbClr val="000000"/>
+                </a:solidFill>
+                <a:latin typeface="Times New Roman"/>
+                <a:ea typeface="Times New Roman"/>
+                <a:cs typeface="Times New Roman"/>
+              </a:rPr>
+              <a:t>:</a:t>
+            </a:r>
+            <a:endParaRPr sz="4000" dirty="0"/>
+          </a:p>
+        </p:txBody>
+      </p:sp>
+      <p:sp>
+        <p:nvSpPr>
+          <p:cNvPr id="5" name="Замещающий номер слайда 4">
+            <a:extLst>
+              <a:ext uri="{FF2B5EF4-FFF2-40B4-BE49-F238E27FC236}">
+                <a16:creationId xmlns:a16="http://schemas.microsoft.com/office/drawing/2014/main" id="{7A7AC3B3-0D3D-46AF-A9AF-3FA15E2C3D9E}"/>
+              </a:ext>
+            </a:extLst>
+          </p:cNvPr>
+          <p:cNvSpPr>
+            <a:spLocks noGrp="1"/>
+          </p:cNvSpPr>
+          <p:nvPr>
+            <p:ph type="sldNum" idx="12"/>
+          </p:nvPr>
+        </p:nvSpPr>
+        <p:spPr>
+          <a:xfrm>
+            <a:off x="7088886" y="6493511"/>
+            <a:ext cx="2057400" cy="365125"/>
+          </a:xfrm>
+        </p:spPr>
+        <p:txBody>
+          <a:bodyPr wrap="square" lIns="91440" tIns="45720" rIns="91440" bIns="45720">
+            <a:noAutofit/>
+          </a:bodyPr>
+          <a:lstStyle>
+            <a:defPPr algn="r">
+              <a:defRPr sz="2000" b="0">
+                <a:solidFill>
+                  <a:srgbClr val="000000"/>
+                </a:solidFill>
+                <a:latin typeface="Times New Roman"/>
+                <a:ea typeface="Times New Roman"/>
+                <a:cs typeface="Times New Roman"/>
+              </a:defRPr>
+            </a:defPPr>
+          </a:lstStyle>
+          <a:p>
+            <a:pPr algn="r">
+              <a:defRPr sz="2000" b="0">
+                <a:solidFill>
+                  <a:srgbClr val="000000"/>
+                </a:solidFill>
+                <a:latin typeface="Times New Roman"/>
+                <a:ea typeface="Times New Roman"/>
+                <a:cs typeface="Times New Roman"/>
+              </a:defRPr>
+            </a:pPr>
+            <a:fld id="{D6ED8A53-8D2F-4011-BE06-EDB0774336BA}" type="slidenum">
+              <a:rPr sz="2000" b="0">
+                <a:solidFill>
+                  <a:srgbClr val="000000"/>
+                </a:solidFill>
+                <a:latin typeface="Times New Roman"/>
+                <a:ea typeface="Times New Roman"/>
+                <a:cs typeface="Times New Roman"/>
+              </a:rPr>
+              <a:t>3</a:t>
+            </a:fld>
+            <a:endParaRPr sz="2000">
+              <a:solidFill>
+                <a:schemeClr val="tx1"/>
+              </a:solidFill>
+              <a:latin typeface="Times New Roman"/>
+              <a:ea typeface="Times New Roman"/>
+              <a:cs typeface="Times New Roman"/>
+            </a:endParaRPr>
+          </a:p>
+        </p:txBody>
+      </p:sp>
+      <p:sp>
+        <p:nvSpPr>
+          <p:cNvPr id="3" name="TextBox 2">
+            <a:extLst>
+              <a:ext uri="{FF2B5EF4-FFF2-40B4-BE49-F238E27FC236}">
+                <a16:creationId xmlns:a16="http://schemas.microsoft.com/office/drawing/2014/main" id="{B9A98C53-8330-9192-D210-4F5703BD6F05}"/>
+              </a:ext>
+            </a:extLst>
+          </p:cNvPr>
+          <p:cNvSpPr>
+            <a:spLocks noGrp="1"/>
+          </p:cNvSpPr>
+          <p:nvPr/>
+        </p:nvSpPr>
+        <p:spPr>
+          <a:xfrm>
+            <a:off x="277897" y="597203"/>
+            <a:ext cx="5948583" cy="2297417"/>
+          </a:xfrm>
+          <a:prstGeom prst="rect">
+            <a:avLst/>
+          </a:prstGeom>
+          <a:noFill/>
+          <a:ln>
+            <a:solidFill>
+              <a:schemeClr val="tx1"/>
+            </a:solidFill>
+            <a:prstDash val="dash"/>
+          </a:ln>
+        </p:spPr>
+        <p:txBody>
+          <a:bodyPr rot="0" spcFirstLastPara="0" vert="horz" wrap="square" lIns="91440" tIns="45720" rIns="91440" bIns="45720" anchor="ctr">
+            <a:noAutofit/>
+          </a:bodyPr>
+          <a:lstStyle>
+            <a:defPPr algn="l">
+              <a:defRPr sz="1800" b="0">
+                <a:solidFill>
+                  <a:srgbClr val="000000"/>
+                </a:solidFill>
+                <a:latin typeface="Times New Roman"/>
+                <a:ea typeface="Times New Roman"/>
+                <a:cs typeface="Times New Roman"/>
+              </a:defRPr>
+            </a:defPPr>
+          </a:lstStyle>
+          <a:p>
+            <a:pPr algn="l">
+              <a:defRPr sz="1800" b="0">
+                <a:solidFill>
+                  <a:srgbClr val="000000"/>
+                </a:solidFill>
+                <a:latin typeface="Times New Roman"/>
+                <a:ea typeface="Times New Roman"/>
+                <a:cs typeface="Times New Roman"/>
+              </a:defRPr>
+            </a:pPr>
+            <a:r>
+              <a:rPr lang="ru-RU" sz="1800" b="0" dirty="0">
+                <a:solidFill>
+                  <a:srgbClr val="000000"/>
+                </a:solidFill>
+                <a:latin typeface="Times New Roman"/>
+                <a:ea typeface="Times New Roman"/>
+                <a:cs typeface="Times New Roman"/>
+              </a:rPr>
+              <a:t>На фермах 3D-принтеров в процессе печати могут возникать сбои, вызванные различными факторами. Такие дефекты, как отлипание, расслоение или смещение слоёв, в конечном итоге могут привести к </a:t>
+            </a:r>
+            <a:r>
+              <a:rPr lang="ru-RU" sz="1800" b="1" dirty="0">
+                <a:solidFill>
+                  <a:srgbClr val="000000"/>
+                </a:solidFill>
+                <a:latin typeface="Times New Roman"/>
+                <a:ea typeface="Times New Roman"/>
+                <a:cs typeface="Times New Roman"/>
+              </a:rPr>
+              <a:t>критическому дефекту «спагетти»</a:t>
+            </a:r>
+            <a:r>
+              <a:rPr lang="ru-RU" sz="1800" b="0" dirty="0">
+                <a:solidFill>
+                  <a:srgbClr val="000000"/>
+                </a:solidFill>
+                <a:latin typeface="Times New Roman"/>
+                <a:ea typeface="Times New Roman"/>
+                <a:cs typeface="Times New Roman"/>
+              </a:rPr>
+              <a:t>, при котором пластик начинает хаотично укладываться в воздухе. Такой дефект приводит к перерасходу материала, а в отдельных случаях может стать </a:t>
+            </a:r>
+            <a:r>
+              <a:rPr lang="ru-RU" sz="1800" b="1" dirty="0">
+                <a:solidFill>
+                  <a:srgbClr val="000000"/>
+                </a:solidFill>
+                <a:latin typeface="Times New Roman"/>
+                <a:ea typeface="Times New Roman"/>
+                <a:cs typeface="Times New Roman"/>
+              </a:rPr>
+              <a:t>причиной повреждения </a:t>
+            </a:r>
+            <a:r>
+              <a:rPr lang="ru-RU" sz="1800" b="0" dirty="0">
+                <a:solidFill>
+                  <a:srgbClr val="000000"/>
+                </a:solidFill>
+                <a:latin typeface="Times New Roman"/>
+                <a:ea typeface="Times New Roman"/>
+                <a:cs typeface="Times New Roman"/>
+              </a:rPr>
+              <a:t>самого 3D-принтера.</a:t>
+            </a:r>
+            <a:endParaRPr lang="ru-RU" dirty="0"/>
+          </a:p>
+        </p:txBody>
+      </p:sp>
+      <p:sp>
+        <p:nvSpPr>
+          <p:cNvPr id="27" name="TextBox 26">
+            <a:extLst>
+              <a:ext uri="{FF2B5EF4-FFF2-40B4-BE49-F238E27FC236}">
+                <a16:creationId xmlns:a16="http://schemas.microsoft.com/office/drawing/2014/main" id="{93027D3F-6BC8-2110-F2D0-39287E8FAFD7}"/>
+              </a:ext>
+            </a:extLst>
+          </p:cNvPr>
+          <p:cNvSpPr>
+            <a:spLocks noGrp="1"/>
+          </p:cNvSpPr>
+          <p:nvPr/>
+        </p:nvSpPr>
+        <p:spPr>
+          <a:xfrm>
+            <a:off x="6440105" y="2547592"/>
+            <a:ext cx="2182057" cy="579120"/>
+          </a:xfrm>
+          <a:prstGeom prst="rect">
+            <a:avLst/>
+          </a:prstGeom>
+          <a:noFill/>
+        </p:spPr>
+        <p:txBody>
+          <a:bodyPr rot="0" spcFirstLastPara="0" vert="horz" wrap="square" lIns="91440" tIns="45720" rIns="91440" bIns="45720" anchor="t">
+            <a:noAutofit/>
+          </a:bodyPr>
+          <a:lstStyle>
+            <a:defPPr algn="l">
+              <a:defRPr sz="1600" b="0">
+                <a:solidFill>
+                  <a:srgbClr val="000000"/>
+                </a:solidFill>
+                <a:latin typeface="Times New Roman"/>
+                <a:ea typeface="Times New Roman"/>
+                <a:cs typeface="Times New Roman"/>
+              </a:defRPr>
+            </a:defPPr>
+          </a:lstStyle>
+          <a:p>
+            <a:pPr algn="l">
+              <a:defRPr sz="1600" b="0">
+                <a:solidFill>
+                  <a:srgbClr val="000000"/>
+                </a:solidFill>
+                <a:latin typeface="Times New Roman"/>
+                <a:ea typeface="Times New Roman"/>
+                <a:cs typeface="Times New Roman"/>
+              </a:defRPr>
+            </a:pPr>
+            <a:r>
+              <a:rPr sz="1600" b="0" dirty="0" err="1">
+                <a:solidFill>
+                  <a:srgbClr val="000000"/>
+                </a:solidFill>
+                <a:latin typeface="Times New Roman"/>
+                <a:ea typeface="Times New Roman"/>
+                <a:cs typeface="Times New Roman"/>
+              </a:rPr>
+              <a:t>Рис</a:t>
+            </a:r>
+            <a:r>
+              <a:rPr sz="1600" b="0" dirty="0">
+                <a:solidFill>
+                  <a:srgbClr val="000000"/>
+                </a:solidFill>
+                <a:latin typeface="Times New Roman"/>
+                <a:ea typeface="Times New Roman"/>
+                <a:cs typeface="Times New Roman"/>
+              </a:rPr>
+              <a:t>. 1 – </a:t>
+            </a:r>
+            <a:r>
+              <a:rPr sz="1600" b="0" dirty="0" err="1">
+                <a:solidFill>
+                  <a:srgbClr val="000000"/>
+                </a:solidFill>
+                <a:latin typeface="Times New Roman"/>
+                <a:ea typeface="Times New Roman"/>
+                <a:cs typeface="Times New Roman"/>
+              </a:rPr>
+              <a:t>Дефект</a:t>
+            </a:r>
+            <a:r>
+              <a:rPr sz="1600" b="0" dirty="0">
+                <a:solidFill>
+                  <a:srgbClr val="000000"/>
+                </a:solidFill>
+                <a:latin typeface="Times New Roman"/>
+                <a:ea typeface="Times New Roman"/>
+                <a:cs typeface="Times New Roman"/>
+              </a:rPr>
+              <a:t> </a:t>
+            </a:r>
+            <a:r>
+              <a:rPr sz="1600" b="0" dirty="0" err="1">
+                <a:solidFill>
+                  <a:srgbClr val="000000"/>
+                </a:solidFill>
+                <a:latin typeface="Times New Roman"/>
+                <a:ea typeface="Times New Roman"/>
+                <a:cs typeface="Times New Roman"/>
+              </a:rPr>
+              <a:t>типа</a:t>
+            </a:r>
+            <a:r>
+              <a:rPr sz="1600" b="0" dirty="0">
+                <a:solidFill>
+                  <a:srgbClr val="000000"/>
+                </a:solidFill>
+                <a:latin typeface="Times New Roman"/>
+                <a:ea typeface="Times New Roman"/>
+                <a:cs typeface="Times New Roman"/>
+              </a:rPr>
+              <a:t> «</a:t>
+            </a:r>
+            <a:r>
+              <a:rPr sz="1600" b="0" dirty="0" err="1">
+                <a:solidFill>
+                  <a:srgbClr val="000000"/>
+                </a:solidFill>
+                <a:latin typeface="Times New Roman"/>
+                <a:ea typeface="Times New Roman"/>
+                <a:cs typeface="Times New Roman"/>
+              </a:rPr>
+              <a:t>спагетти</a:t>
+            </a:r>
+            <a:r>
+              <a:rPr sz="1600" b="0" dirty="0">
+                <a:solidFill>
+                  <a:srgbClr val="000000"/>
+                </a:solidFill>
+                <a:latin typeface="Times New Roman"/>
+                <a:ea typeface="Times New Roman"/>
+                <a:cs typeface="Times New Roman"/>
+              </a:rPr>
+              <a:t>»</a:t>
+            </a:r>
+          </a:p>
+        </p:txBody>
+      </p:sp>
+      <p:pic>
+        <p:nvPicPr>
+          <p:cNvPr id="4" name="Рисунок 3" descr="Изображение выглядит как искусство, дизайн, соединитель, свет&#10;&#10;Содержимое, созданное ИИ, может быть неверным.">
+            <a:extLst>
+              <a:ext uri="{FF2B5EF4-FFF2-40B4-BE49-F238E27FC236}">
+                <a16:creationId xmlns:a16="http://schemas.microsoft.com/office/drawing/2014/main" id="{AE67ED3C-CB37-618A-EEBF-9C9FF1AB5D40}"/>
+              </a:ext>
+            </a:extLst>
+          </p:cNvPr>
+          <p:cNvPicPr>
+            <a:picLocks noChangeAspect="1"/>
+          </p:cNvPicPr>
+          <p:nvPr/>
+        </p:nvPicPr>
+        <p:blipFill>
+          <a:blip r:embed="rId4"/>
+          <a:srcRect l="6291" t="18812" r="21153" b="24354"/>
+          <a:stretch/>
+        </p:blipFill>
+        <p:spPr>
+          <a:xfrm>
+            <a:off x="6333293" y="704535"/>
+            <a:ext cx="2288869" cy="1792981"/>
+          </a:xfrm>
+          <a:prstGeom prst="rect">
+            <a:avLst/>
+          </a:prstGeom>
+          <a:ln w="28575">
+            <a:noFill/>
+          </a:ln>
+        </p:spPr>
+      </p:pic>
+      <p:sp>
+        <p:nvSpPr>
+          <p:cNvPr id="6" name="TextBox 2">
+            <a:extLst>
+              <a:ext uri="{FF2B5EF4-FFF2-40B4-BE49-F238E27FC236}">
+                <a16:creationId xmlns:a16="http://schemas.microsoft.com/office/drawing/2014/main" id="{452C65C1-2992-0840-D7B0-DF2AD9057D63}"/>
+              </a:ext>
+            </a:extLst>
+          </p:cNvPr>
+          <p:cNvSpPr>
+            <a:spLocks noGrp="1"/>
+          </p:cNvSpPr>
+          <p:nvPr/>
+        </p:nvSpPr>
+        <p:spPr>
+          <a:xfrm>
+            <a:off x="277897" y="3017804"/>
+            <a:ext cx="4637770" cy="2791593"/>
+          </a:xfrm>
+          <a:prstGeom prst="rect">
+            <a:avLst/>
+          </a:prstGeom>
+          <a:noFill/>
+          <a:ln>
+            <a:solidFill>
+              <a:schemeClr val="tx1"/>
+            </a:solidFill>
+            <a:prstDash val="dash"/>
+          </a:ln>
+        </p:spPr>
+        <p:txBody>
+          <a:bodyPr rot="0" spcFirstLastPara="0" vert="horz" wrap="square" lIns="91440" tIns="45720" rIns="91440" bIns="45720" anchor="ctr">
+            <a:noAutofit/>
+          </a:bodyPr>
+          <a:lstStyle>
+            <a:defPPr algn="l">
+              <a:defRPr sz="1800" b="0">
+                <a:solidFill>
+                  <a:srgbClr val="000000"/>
+                </a:solidFill>
+                <a:latin typeface="Times New Roman"/>
+                <a:ea typeface="Times New Roman"/>
+                <a:cs typeface="Times New Roman"/>
+              </a:defRPr>
+            </a:defPPr>
+          </a:lstStyle>
+          <a:p>
+            <a:pPr algn="l">
+              <a:defRPr sz="1800" b="0">
+                <a:solidFill>
+                  <a:srgbClr val="000000"/>
+                </a:solidFill>
+                <a:latin typeface="Times New Roman"/>
+                <a:ea typeface="Times New Roman"/>
+                <a:cs typeface="Times New Roman"/>
+              </a:defRPr>
+            </a:pPr>
+            <a:r>
+              <a:rPr lang="ru-RU" dirty="0">
+                <a:solidFill>
+                  <a:srgbClr val="000000"/>
+                </a:solidFill>
+                <a:latin typeface="Times New Roman"/>
+                <a:ea typeface="Times New Roman"/>
+                <a:cs typeface="Times New Roman"/>
+              </a:rPr>
+              <a:t>Проблему удалось подтвердить на ферме Волгоградской компании «</a:t>
+            </a:r>
+            <a:r>
+              <a:rPr lang="ru-RU" dirty="0" err="1">
+                <a:solidFill>
+                  <a:srgbClr val="000000"/>
+                </a:solidFill>
+                <a:latin typeface="Times New Roman"/>
+                <a:ea typeface="Times New Roman"/>
+                <a:cs typeface="Times New Roman"/>
+              </a:rPr>
+              <a:t>Stereotech</a:t>
+            </a:r>
+            <a:r>
+              <a:rPr lang="ru-RU" dirty="0">
+                <a:solidFill>
+                  <a:srgbClr val="000000"/>
+                </a:solidFill>
+                <a:latin typeface="Times New Roman"/>
+                <a:ea typeface="Times New Roman"/>
+                <a:cs typeface="Times New Roman"/>
+              </a:rPr>
+              <a:t>». По накопленной статистике принтеров с фермы, 26,7</a:t>
+            </a:r>
+            <a:r>
+              <a:rPr lang="ru-RU" b="1" dirty="0">
+                <a:latin typeface="Times New Roman" panose="02020603050405020304" pitchFamily="18" charset="0"/>
+                <a:cs typeface="Times New Roman" panose="02020603050405020304" pitchFamily="18" charset="0"/>
+              </a:rPr>
+              <a:t> </a:t>
+            </a:r>
+            <a:r>
+              <a:rPr lang="ru-RU" dirty="0">
+                <a:solidFill>
+                  <a:srgbClr val="000000"/>
+                </a:solidFill>
+                <a:latin typeface="Times New Roman"/>
+                <a:ea typeface="Times New Roman"/>
+                <a:cs typeface="Times New Roman"/>
+              </a:rPr>
+              <a:t>% заданий были отменены оператором вручную из-за подобных сбоев. Статистика имеет погрешность, так как часть успешных заданий — это печати, когда оператор не мог отменить задачу, хотя сбой был, а часть отмен не связаны со сбоем.</a:t>
+            </a:r>
+            <a:endParaRPr lang="ru-RU" dirty="0"/>
+          </a:p>
+        </p:txBody>
+      </p:sp>
+      <p:sp>
+        <p:nvSpPr>
+          <p:cNvPr id="12" name="TextBox 26">
+            <a:extLst>
+              <a:ext uri="{FF2B5EF4-FFF2-40B4-BE49-F238E27FC236}">
+                <a16:creationId xmlns:a16="http://schemas.microsoft.com/office/drawing/2014/main" id="{DC9D2F2B-4F62-AFAE-5BC3-F6D246AAE8E4}"/>
+              </a:ext>
+            </a:extLst>
+          </p:cNvPr>
+          <p:cNvSpPr>
+            <a:spLocks noGrp="1"/>
+          </p:cNvSpPr>
+          <p:nvPr/>
+        </p:nvSpPr>
+        <p:spPr>
+          <a:xfrm>
+            <a:off x="4868975" y="6014767"/>
+            <a:ext cx="4073130" cy="579120"/>
+          </a:xfrm>
+          <a:prstGeom prst="rect">
+            <a:avLst/>
+          </a:prstGeom>
+          <a:noFill/>
+        </p:spPr>
+        <p:txBody>
+          <a:bodyPr rot="0" spcFirstLastPara="0" vert="horz" wrap="square" lIns="91440" tIns="45720" rIns="91440" bIns="45720" anchor="ctr">
+            <a:noAutofit/>
+          </a:bodyPr>
+          <a:lstStyle>
+            <a:defPPr algn="l">
+              <a:defRPr sz="1600" b="0">
+                <a:solidFill>
+                  <a:srgbClr val="000000"/>
+                </a:solidFill>
+                <a:latin typeface="Times New Roman"/>
+                <a:ea typeface="Times New Roman"/>
+                <a:cs typeface="Times New Roman"/>
+              </a:defRPr>
+            </a:defPPr>
+          </a:lstStyle>
+          <a:p>
+            <a:pPr algn="ctr">
+              <a:defRPr sz="1600" b="0">
+                <a:solidFill>
+                  <a:srgbClr val="000000"/>
+                </a:solidFill>
+                <a:latin typeface="Times New Roman"/>
+                <a:ea typeface="Times New Roman"/>
+                <a:cs typeface="Times New Roman"/>
+              </a:defRPr>
+            </a:pPr>
+            <a:r>
+              <a:rPr sz="1600" b="0" dirty="0" err="1">
+                <a:solidFill>
+                  <a:srgbClr val="000000"/>
+                </a:solidFill>
+                <a:latin typeface="Times New Roman"/>
+                <a:ea typeface="Times New Roman"/>
+                <a:cs typeface="Times New Roman"/>
+              </a:rPr>
+              <a:t>Рис</a:t>
+            </a:r>
+            <a:r>
+              <a:rPr sz="1600" b="0" dirty="0">
+                <a:solidFill>
+                  <a:srgbClr val="000000"/>
+                </a:solidFill>
+                <a:latin typeface="Times New Roman"/>
+                <a:ea typeface="Times New Roman"/>
+                <a:cs typeface="Times New Roman"/>
+              </a:rPr>
+              <a:t>. </a:t>
+            </a:r>
+            <a:r>
+              <a:rPr lang="ru-RU" sz="1600" b="0" dirty="0">
+                <a:solidFill>
+                  <a:srgbClr val="000000"/>
+                </a:solidFill>
+                <a:latin typeface="Times New Roman"/>
+                <a:ea typeface="Times New Roman"/>
+                <a:cs typeface="Times New Roman"/>
+              </a:rPr>
+              <a:t>2</a:t>
+            </a:r>
+            <a:r>
+              <a:rPr sz="1600" b="0" dirty="0">
+                <a:solidFill>
+                  <a:srgbClr val="000000"/>
+                </a:solidFill>
+                <a:latin typeface="Times New Roman"/>
+                <a:ea typeface="Times New Roman"/>
+                <a:cs typeface="Times New Roman"/>
+              </a:rPr>
+              <a:t> – </a:t>
+            </a:r>
+            <a:r>
+              <a:rPr lang="ru-RU" sz="1600" b="0" dirty="0">
+                <a:solidFill>
+                  <a:srgbClr val="000000"/>
+                </a:solidFill>
+                <a:latin typeface="Times New Roman"/>
+                <a:ea typeface="Times New Roman"/>
+                <a:cs typeface="Times New Roman"/>
+              </a:rPr>
+              <a:t>Диаграмма статистики печатей на ферме компании «</a:t>
+            </a:r>
+            <a:r>
+              <a:rPr lang="en-US" sz="1600" b="0" dirty="0">
+                <a:solidFill>
+                  <a:srgbClr val="000000"/>
+                </a:solidFill>
+                <a:latin typeface="Times New Roman"/>
+                <a:ea typeface="Times New Roman"/>
+                <a:cs typeface="Times New Roman"/>
+              </a:rPr>
+              <a:t>Stereotech</a:t>
+            </a:r>
+            <a:r>
+              <a:rPr lang="ru-RU" sz="1600" b="0" dirty="0">
+                <a:solidFill>
+                  <a:srgbClr val="000000"/>
+                </a:solidFill>
+                <a:latin typeface="Times New Roman"/>
+                <a:ea typeface="Times New Roman"/>
+                <a:cs typeface="Times New Roman"/>
+              </a:rPr>
+              <a:t>»</a:t>
+            </a:r>
+            <a:endParaRPr sz="1600" b="0" dirty="0">
+              <a:solidFill>
+                <a:srgbClr val="000000"/>
+              </a:solidFill>
+              <a:latin typeface="Times New Roman"/>
+              <a:ea typeface="Times New Roman"/>
+              <a:cs typeface="Times New Roman"/>
+            </a:endParaRPr>
+          </a:p>
+        </p:txBody>
+      </p:sp>
+      <p:sp>
+        <p:nvSpPr>
+          <p:cNvPr id="21" name="TextBox 2">
+            <a:extLst>
+              <a:ext uri="{FF2B5EF4-FFF2-40B4-BE49-F238E27FC236}">
+                <a16:creationId xmlns:a16="http://schemas.microsoft.com/office/drawing/2014/main" id="{776FE2EE-EE34-7E14-84FE-9C2304D04340}"/>
+              </a:ext>
+            </a:extLst>
+          </p:cNvPr>
+          <p:cNvSpPr>
+            <a:spLocks noGrp="1"/>
+          </p:cNvSpPr>
+          <p:nvPr/>
+        </p:nvSpPr>
+        <p:spPr>
+          <a:xfrm>
+            <a:off x="277897" y="5932581"/>
+            <a:ext cx="4637770" cy="743492"/>
+          </a:xfrm>
+          <a:prstGeom prst="rect">
+            <a:avLst/>
+          </a:prstGeom>
+          <a:noFill/>
+          <a:ln>
+            <a:solidFill>
+              <a:schemeClr val="tx1"/>
+            </a:solidFill>
+            <a:prstDash val="dash"/>
+          </a:ln>
+        </p:spPr>
+        <p:txBody>
+          <a:bodyPr rot="0" spcFirstLastPara="0" vert="horz" wrap="square" lIns="91440" tIns="45720" rIns="91440" bIns="45720" anchor="ctr">
+            <a:noAutofit/>
+          </a:bodyPr>
+          <a:lstStyle>
+            <a:defPPr algn="l">
+              <a:defRPr sz="1800" b="0">
+                <a:solidFill>
+                  <a:srgbClr val="000000"/>
+                </a:solidFill>
+                <a:latin typeface="Times New Roman"/>
+                <a:ea typeface="Times New Roman"/>
+                <a:cs typeface="Times New Roman"/>
+              </a:defRPr>
+            </a:defPPr>
+          </a:lstStyle>
+          <a:p>
+            <a:pPr algn="l">
+              <a:defRPr sz="1800" b="0">
+                <a:solidFill>
+                  <a:srgbClr val="000000"/>
+                </a:solidFill>
+                <a:latin typeface="Times New Roman"/>
+                <a:ea typeface="Times New Roman"/>
+                <a:cs typeface="Times New Roman"/>
+              </a:defRPr>
+            </a:pPr>
+            <a:r>
+              <a:rPr lang="ru-RU" b="1" dirty="0">
+                <a:solidFill>
+                  <a:srgbClr val="000000"/>
+                </a:solidFill>
+                <a:latin typeface="Times New Roman"/>
+                <a:cs typeface="Times New Roman"/>
+              </a:rPr>
+              <a:t>Предлагаемое</a:t>
+            </a:r>
+            <a:r>
+              <a:rPr lang="ru-RU" dirty="0">
+                <a:solidFill>
+                  <a:srgbClr val="000000"/>
+                </a:solidFill>
+                <a:latin typeface="Times New Roman"/>
+                <a:cs typeface="Times New Roman"/>
+              </a:rPr>
+              <a:t> </a:t>
+            </a:r>
+            <a:r>
+              <a:rPr lang="ru-RU" b="1" dirty="0">
+                <a:solidFill>
+                  <a:srgbClr val="000000"/>
+                </a:solidFill>
+                <a:latin typeface="Times New Roman"/>
+                <a:cs typeface="Times New Roman"/>
+              </a:rPr>
+              <a:t>решение</a:t>
+            </a:r>
+            <a:r>
+              <a:rPr lang="ru-RU" dirty="0">
+                <a:solidFill>
+                  <a:srgbClr val="000000"/>
+                </a:solidFill>
+                <a:latin typeface="Times New Roman"/>
+                <a:cs typeface="Times New Roman"/>
+              </a:rPr>
+              <a:t>: мониторинг печати с помощью методов машинного зрения.</a:t>
+            </a:r>
+            <a:endParaRPr lang="ru-RU" dirty="0"/>
+          </a:p>
+        </p:txBody>
+      </p:sp>
+    </p:spTree>
+    <p:extLst>
+      <p:ext uri="{BB962C8B-B14F-4D97-AF65-F5344CB8AC3E}">
+        <p14:creationId xmlns:p14="http://schemas.microsoft.com/office/powerpoint/2010/main" val="2011050586"/>
+      </p:ext>
+    </p:extLst>
+  </p:cSld>
+  <p:clrMapOvr>
+    <a:masterClrMapping/>
+  </p:clrMapOvr>
+</p:sld>
+</file>
+
+<file path=ppt/slides/slide4.xml><?xml version="1.0" encoding="utf-8"?>
+<p:sld xmlns:a="http://schemas.openxmlformats.org/drawingml/2006/main" xmlns:r="http://schemas.openxmlformats.org/officeDocument/2006/relationships" xmlns:p="http://schemas.openxmlformats.org/presentationml/2006/main">
+  <p:cSld>
+    <p:spTree>
+      <p:nvGrpSpPr>
+        <p:cNvPr id="1" name="">
+          <a:extLst>
+            <a:ext uri="{FF2B5EF4-FFF2-40B4-BE49-F238E27FC236}">
+              <a16:creationId xmlns:a16="http://schemas.microsoft.com/office/drawing/2014/main" id="{586A209A-B3B7-9043-FC7E-DD693EE6AACA}"/>
+            </a:ext>
+          </a:extLst>
+        </p:cNvPr>
+        <p:cNvGrpSpPr/>
+        <p:nvPr/>
+      </p:nvGrpSpPr>
+      <p:grpSpPr>
+        <a:xfrm>
+          <a:off x="0" y="0"/>
+          <a:ext cx="0" cy="0"/>
+          <a:chOff x="0" y="0"/>
+          <a:chExt cx="0" cy="0"/>
+        </a:xfrm>
+      </p:grpSpPr>
+      <p:sp>
+        <p:nvSpPr>
+          <p:cNvPr id="2" name="Заголовок 1">
+            <a:extLst>
+              <a:ext uri="{FF2B5EF4-FFF2-40B4-BE49-F238E27FC236}">
+                <a16:creationId xmlns:a16="http://schemas.microsoft.com/office/drawing/2014/main" id="{648A91D6-F58A-86A8-231A-A5AC58545903}"/>
+              </a:ext>
+            </a:extLst>
+          </p:cNvPr>
+          <p:cNvSpPr>
+            <a:spLocks noGrp="1"/>
+          </p:cNvSpPr>
+          <p:nvPr>
+            <p:ph type="title"/>
+          </p:nvPr>
+        </p:nvSpPr>
+        <p:spPr>
+          <a:xfrm>
+            <a:off x="628648" y="0"/>
+            <a:ext cx="7886700" cy="712868"/>
+          </a:xfrm>
+        </p:spPr>
+        <p:txBody>
+          <a:bodyPr>
+            <a:normAutofit/>
+          </a:bodyPr>
+          <a:lstStyle/>
+          <a:p>
+            <a:pPr algn="ctr"/>
+            <a:r>
+              <a:rPr lang="ru-RU" sz="4000" dirty="0">
+                <a:latin typeface="Times New Roman" panose="02020603050405020304" pitchFamily="18" charset="0"/>
+                <a:ea typeface="Calibri"/>
+                <a:cs typeface="Times New Roman" panose="02020603050405020304" pitchFamily="18" charset="0"/>
+              </a:rPr>
+              <a:t>Подготовка к обучению нейросети</a:t>
+            </a:r>
+          </a:p>
+        </p:txBody>
+      </p:sp>
+      <p:sp>
+        <p:nvSpPr>
+          <p:cNvPr id="5" name="Замещающий номер слайда 4">
+            <a:extLst>
+              <a:ext uri="{FF2B5EF4-FFF2-40B4-BE49-F238E27FC236}">
+                <a16:creationId xmlns:a16="http://schemas.microsoft.com/office/drawing/2014/main" id="{425BE312-5EC5-E722-FD8E-916DFE636F2B}"/>
+              </a:ext>
+            </a:extLst>
+          </p:cNvPr>
+          <p:cNvSpPr>
+            <a:spLocks noGrp="1"/>
+          </p:cNvSpPr>
+          <p:nvPr>
+            <p:ph type="sldNum" sz="quarter" idx="12"/>
+          </p:nvPr>
+        </p:nvSpPr>
+        <p:spPr>
+          <a:xfrm>
+            <a:off x="7088886" y="6493511"/>
+            <a:ext cx="2057400" cy="365125"/>
+          </a:xfrm>
+        </p:spPr>
+        <p:txBody>
+          <a:bodyPr/>
+          <a:lstStyle/>
+          <a:p>
+            <a:fld id="{D6ED8A53-8D2F-4011-BE06-EDB0774336BA}" type="slidenum">
+              <a:rPr lang="ru-RU" sz="2000" dirty="0" smtClean="0">
+                <a:solidFill>
+                  <a:schemeClr val="tx1"/>
+                </a:solidFill>
+                <a:latin typeface="Times New Roman" panose="02020603050405020304" pitchFamily="18" charset="0"/>
+                <a:cs typeface="Times New Roman" panose="02020603050405020304" pitchFamily="18" charset="0"/>
+              </a:rPr>
+              <a:t>4</a:t>
+            </a:fld>
+            <a:endParaRPr lang="ru-RU" sz="2000">
+              <a:solidFill>
+                <a:schemeClr val="tx1"/>
+              </a:solidFill>
+              <a:latin typeface="Times New Roman" panose="02020603050405020304" pitchFamily="18" charset="0"/>
+              <a:ea typeface="Calibri"/>
+              <a:cs typeface="Times New Roman" panose="02020603050405020304" pitchFamily="18" charset="0"/>
+            </a:endParaRPr>
+          </a:p>
+        </p:txBody>
+      </p:sp>
+      <p:sp>
+        <p:nvSpPr>
+          <p:cNvPr id="14" name="TextBox 13">
+            <a:extLst>
+              <a:ext uri="{FF2B5EF4-FFF2-40B4-BE49-F238E27FC236}">
+                <a16:creationId xmlns:a16="http://schemas.microsoft.com/office/drawing/2014/main" id="{733275A9-2422-EE65-68B7-2EFC7CB717FE}"/>
+              </a:ext>
+            </a:extLst>
+          </p:cNvPr>
+          <p:cNvSpPr txBox="1"/>
+          <p:nvPr/>
+        </p:nvSpPr>
+        <p:spPr>
+          <a:xfrm>
+            <a:off x="444579" y="731952"/>
+            <a:ext cx="3869672" cy="2585323"/>
+          </a:xfrm>
+          <a:prstGeom prst="rect">
+            <a:avLst/>
+          </a:prstGeom>
+          <a:noFill/>
+          <a:ln>
+            <a:solidFill>
+              <a:schemeClr val="tx1"/>
+            </a:solidFill>
+            <a:prstDash val="dash"/>
+          </a:ln>
+        </p:spPr>
+        <p:txBody>
+          <a:bodyPr rot="0" spcFirstLastPara="0" vertOverflow="overflow" horzOverflow="overflow" vert="horz" wrap="square" lIns="91440" tIns="45720" rIns="91440" bIns="45720" numCol="1" spcCol="0" rtlCol="0" fromWordArt="0" anchor="ctr" anchorCtr="0" forceAA="0" compatLnSpc="1">
+            <a:prstTxWarp prst="textNoShape">
+              <a:avLst/>
+            </a:prstTxWarp>
+            <a:spAutoFit/>
+          </a:bodyPr>
+          <a:lstStyle/>
+          <a:p>
+            <a:r>
+              <a:rPr lang="ru-RU" dirty="0">
+                <a:latin typeface="Times New Roman" panose="02020603050405020304" pitchFamily="18" charset="0"/>
+                <a:cs typeface="Times New Roman" panose="02020603050405020304" pitchFamily="18" charset="0"/>
+              </a:rPr>
+              <a:t>Для обнаружения «спагетти» выбрана </a:t>
+            </a:r>
+            <a:r>
+              <a:rPr lang="ru-RU" b="1" dirty="0">
+                <a:latin typeface="Times New Roman" panose="02020603050405020304" pitchFamily="18" charset="0"/>
+                <a:cs typeface="Times New Roman" panose="02020603050405020304" pitchFamily="18" charset="0"/>
+              </a:rPr>
+              <a:t>ResNet18</a:t>
+            </a:r>
+            <a:r>
+              <a:rPr lang="ru-RU" dirty="0">
+                <a:latin typeface="Times New Roman" panose="02020603050405020304" pitchFamily="18" charset="0"/>
+                <a:cs typeface="Times New Roman" panose="02020603050405020304" pitchFamily="18" charset="0"/>
+              </a:rPr>
+              <a:t>. Она решает задачу как бинарную классификацию полного кадра: </a:t>
+            </a:r>
+            <a:r>
+              <a:rPr lang="ru-RU" b="1" dirty="0">
+                <a:latin typeface="Times New Roman" panose="02020603050405020304" pitchFamily="18" charset="0"/>
+                <a:cs typeface="Times New Roman" panose="02020603050405020304" pitchFamily="18" charset="0"/>
+              </a:rPr>
+              <a:t>есть дефект или нет</a:t>
+            </a:r>
+            <a:r>
+              <a:rPr lang="ru-RU" dirty="0">
+                <a:latin typeface="Times New Roman" panose="02020603050405020304" pitchFamily="18" charset="0"/>
+                <a:cs typeface="Times New Roman" panose="02020603050405020304" pitchFamily="18" charset="0"/>
+              </a:rPr>
+              <a:t>. Локализация дефектов рамкой в прошлых работах показала низкую точность. Детекция объектов сохранена только для поиска детали на столе.</a:t>
+            </a:r>
+            <a:endParaRPr lang="ru-RU" dirty="0">
+              <a:solidFill>
+                <a:srgbClr val="000000"/>
+              </a:solidFill>
+              <a:latin typeface="Times New Roman" panose="02020603050405020304" pitchFamily="18" charset="0"/>
+              <a:cs typeface="Times New Roman" panose="02020603050405020304" pitchFamily="18" charset="0"/>
+            </a:endParaRPr>
+          </a:p>
+        </p:txBody>
+      </p:sp>
+      <p:sp>
+        <p:nvSpPr>
+          <p:cNvPr id="22" name="TextBox 21">
+            <a:extLst>
+              <a:ext uri="{FF2B5EF4-FFF2-40B4-BE49-F238E27FC236}">
+                <a16:creationId xmlns:a16="http://schemas.microsoft.com/office/drawing/2014/main" id="{EED866B5-82E1-33E1-5DF7-1DCBBD9DCDF8}"/>
+              </a:ext>
+            </a:extLst>
+          </p:cNvPr>
+          <p:cNvSpPr txBox="1"/>
+          <p:nvPr/>
+        </p:nvSpPr>
+        <p:spPr>
+          <a:xfrm>
+            <a:off x="4571998" y="709017"/>
+            <a:ext cx="4197892" cy="2585323"/>
+          </a:xfrm>
+          <a:prstGeom prst="rect">
+            <a:avLst/>
+          </a:prstGeom>
+          <a:noFill/>
+          <a:ln>
+            <a:solidFill>
+              <a:schemeClr val="tx1"/>
+            </a:solidFill>
+            <a:prstDash val="dash"/>
+          </a:ln>
+        </p:spPr>
+        <p:txBody>
+          <a:bodyPr rot="0" spcFirstLastPara="0" vertOverflow="overflow" horzOverflow="overflow" vert="horz" wrap="square" lIns="91440" tIns="45720" rIns="91440" bIns="45720" numCol="1" spcCol="0" rtlCol="0" fromWordArt="0" anchor="ctr" anchorCtr="0" forceAA="0" compatLnSpc="1">
+            <a:prstTxWarp prst="textNoShape">
+              <a:avLst/>
+            </a:prstTxWarp>
+            <a:spAutoFit/>
+          </a:bodyPr>
+          <a:lstStyle/>
+          <a:p>
+            <a:r>
+              <a:rPr lang="ru-RU" dirty="0">
+                <a:latin typeface="Times New Roman" panose="02020603050405020304" pitchFamily="18" charset="0"/>
+                <a:cs typeface="Times New Roman" panose="02020603050405020304" pitchFamily="18" charset="0"/>
+              </a:rPr>
+              <a:t>Датасет содержит </a:t>
+            </a:r>
+            <a:r>
+              <a:rPr lang="ru-RU" b="1" dirty="0">
+                <a:latin typeface="Times New Roman" panose="02020603050405020304" pitchFamily="18" charset="0"/>
+                <a:cs typeface="Times New Roman" panose="02020603050405020304" pitchFamily="18" charset="0"/>
+              </a:rPr>
+              <a:t>16 129 </a:t>
+            </a:r>
+            <a:r>
+              <a:rPr lang="ru-RU" dirty="0">
+                <a:latin typeface="Times New Roman" panose="02020603050405020304" pitchFamily="18" charset="0"/>
+                <a:cs typeface="Times New Roman" panose="02020603050405020304" pitchFamily="18" charset="0"/>
+              </a:rPr>
+              <a:t>исходных кадров </a:t>
+            </a:r>
+            <a:r>
+              <a:rPr lang="ru-RU" b="1" dirty="0">
+                <a:latin typeface="Times New Roman" panose="02020603050405020304" pitchFamily="18" charset="0"/>
+                <a:cs typeface="Times New Roman" panose="02020603050405020304" pitchFamily="18" charset="0"/>
+              </a:rPr>
+              <a:t>без аугментаций</a:t>
+            </a:r>
+            <a:r>
+              <a:rPr lang="ru-RU" dirty="0">
+                <a:latin typeface="Times New Roman" panose="02020603050405020304" pitchFamily="18" charset="0"/>
+                <a:cs typeface="Times New Roman" panose="02020603050405020304" pitchFamily="18" charset="0"/>
+              </a:rPr>
+              <a:t>. Обучающая выборка включает </a:t>
+            </a:r>
+            <a:r>
+              <a:rPr lang="ru-RU" b="1" dirty="0">
+                <a:latin typeface="Times New Roman" panose="02020603050405020304" pitchFamily="18" charset="0"/>
+                <a:cs typeface="Times New Roman" panose="02020603050405020304" pitchFamily="18" charset="0"/>
+              </a:rPr>
+              <a:t>9 787</a:t>
+            </a:r>
+            <a:r>
+              <a:rPr lang="ru-RU" dirty="0">
+                <a:latin typeface="Times New Roman" panose="02020603050405020304" pitchFamily="18" charset="0"/>
+                <a:cs typeface="Times New Roman" panose="02020603050405020304" pitchFamily="18" charset="0"/>
+              </a:rPr>
+              <a:t> кадров, </a:t>
+            </a:r>
+            <a:r>
+              <a:rPr lang="ru-RU" dirty="0" err="1">
+                <a:latin typeface="Times New Roman" panose="02020603050405020304" pitchFamily="18" charset="0"/>
+                <a:cs typeface="Times New Roman" panose="02020603050405020304" pitchFamily="18" charset="0"/>
+              </a:rPr>
+              <a:t>валидационная</a:t>
+            </a:r>
+            <a:r>
+              <a:rPr lang="ru-RU" dirty="0">
+                <a:latin typeface="Times New Roman" panose="02020603050405020304" pitchFamily="18" charset="0"/>
+                <a:cs typeface="Times New Roman" panose="02020603050405020304" pitchFamily="18" charset="0"/>
+              </a:rPr>
+              <a:t> </a:t>
+            </a:r>
+            <a:r>
+              <a:rPr lang="ru-RU" b="1" dirty="0">
+                <a:latin typeface="Times New Roman" panose="02020603050405020304" pitchFamily="18" charset="0"/>
+                <a:cs typeface="Times New Roman" panose="02020603050405020304" pitchFamily="18" charset="0"/>
+              </a:rPr>
+              <a:t>3 005 </a:t>
+            </a:r>
+            <a:r>
+              <a:rPr lang="ru-RU" dirty="0">
+                <a:latin typeface="Times New Roman" panose="02020603050405020304" pitchFamily="18" charset="0"/>
+                <a:cs typeface="Times New Roman" panose="02020603050405020304" pitchFamily="18" charset="0"/>
+              </a:rPr>
+              <a:t>кадров, тестовая </a:t>
+            </a:r>
+            <a:r>
+              <a:rPr lang="ru-RU" b="1" dirty="0">
+                <a:latin typeface="Times New Roman" panose="02020603050405020304" pitchFamily="18" charset="0"/>
+                <a:cs typeface="Times New Roman" panose="02020603050405020304" pitchFamily="18" charset="0"/>
+              </a:rPr>
+              <a:t>3 337</a:t>
+            </a:r>
+            <a:r>
+              <a:rPr lang="ru-RU" dirty="0">
+                <a:latin typeface="Times New Roman" panose="02020603050405020304" pitchFamily="18" charset="0"/>
+                <a:cs typeface="Times New Roman" panose="02020603050405020304" pitchFamily="18" charset="0"/>
+              </a:rPr>
+              <a:t> кадров. Их доли составляют 60,6</a:t>
+            </a:r>
+            <a:r>
+              <a:rPr lang="ru-RU" b="1" dirty="0">
+                <a:latin typeface="Times New Roman" panose="02020603050405020304" pitchFamily="18" charset="0"/>
+                <a:cs typeface="Times New Roman" panose="02020603050405020304" pitchFamily="18" charset="0"/>
+              </a:rPr>
+              <a:t> </a:t>
+            </a:r>
+            <a:r>
+              <a:rPr lang="ru-RU" dirty="0">
+                <a:latin typeface="Times New Roman" panose="02020603050405020304" pitchFamily="18" charset="0"/>
+                <a:cs typeface="Times New Roman" panose="02020603050405020304" pitchFamily="18" charset="0"/>
+              </a:rPr>
+              <a:t>%, 18,7</a:t>
+            </a:r>
+            <a:r>
+              <a:rPr lang="ru-RU" b="1" dirty="0">
+                <a:latin typeface="Times New Roman" panose="02020603050405020304" pitchFamily="18" charset="0"/>
+                <a:cs typeface="Times New Roman" panose="02020603050405020304" pitchFamily="18" charset="0"/>
+              </a:rPr>
+              <a:t> </a:t>
+            </a:r>
+            <a:r>
+              <a:rPr lang="ru-RU" dirty="0">
+                <a:latin typeface="Times New Roman" panose="02020603050405020304" pitchFamily="18" charset="0"/>
+                <a:cs typeface="Times New Roman" panose="02020603050405020304" pitchFamily="18" charset="0"/>
+              </a:rPr>
+              <a:t>% и 20,7</a:t>
+            </a:r>
+            <a:r>
+              <a:rPr lang="ru-RU" b="1" dirty="0">
+                <a:latin typeface="Times New Roman" panose="02020603050405020304" pitchFamily="18" charset="0"/>
+                <a:cs typeface="Times New Roman" panose="02020603050405020304" pitchFamily="18" charset="0"/>
+              </a:rPr>
+              <a:t> </a:t>
+            </a:r>
+            <a:r>
+              <a:rPr lang="ru-RU" dirty="0">
+                <a:latin typeface="Times New Roman" panose="02020603050405020304" pitchFamily="18" charset="0"/>
+                <a:cs typeface="Times New Roman" panose="02020603050405020304" pitchFamily="18" charset="0"/>
+              </a:rPr>
+              <a:t>% соответственно. В обучающей выборке представлены </a:t>
+            </a:r>
+            <a:r>
+              <a:rPr lang="ru-RU" b="1" dirty="0">
+                <a:latin typeface="Times New Roman" panose="02020603050405020304" pitchFamily="18" charset="0"/>
+                <a:cs typeface="Times New Roman" panose="02020603050405020304" pitchFamily="18" charset="0"/>
+              </a:rPr>
+              <a:t>2 761 </a:t>
+            </a:r>
+            <a:r>
+              <a:rPr lang="ru-RU" dirty="0">
+                <a:latin typeface="Times New Roman" panose="02020603050405020304" pitchFamily="18" charset="0"/>
+                <a:cs typeface="Times New Roman" panose="02020603050405020304" pitchFamily="18" charset="0"/>
+              </a:rPr>
+              <a:t>кадр со «спагетти» и </a:t>
+            </a:r>
+            <a:r>
+              <a:rPr lang="ru-RU" b="1" dirty="0">
+                <a:latin typeface="Times New Roman" panose="02020603050405020304" pitchFamily="18" charset="0"/>
+                <a:cs typeface="Times New Roman" panose="02020603050405020304" pitchFamily="18" charset="0"/>
+              </a:rPr>
+              <a:t>7 026 </a:t>
+            </a:r>
+            <a:r>
+              <a:rPr lang="ru-RU" dirty="0">
+                <a:latin typeface="Times New Roman" panose="02020603050405020304" pitchFamily="18" charset="0"/>
+                <a:cs typeface="Times New Roman" panose="02020603050405020304" pitchFamily="18" charset="0"/>
+              </a:rPr>
+              <a:t>кадров без видимых признаков этого дефекта</a:t>
+            </a:r>
+          </a:p>
+        </p:txBody>
+      </p:sp>
+      <p:sp>
+        <p:nvSpPr>
+          <p:cNvPr id="25" name="TextBox 24">
+            <a:extLst>
+              <a:ext uri="{FF2B5EF4-FFF2-40B4-BE49-F238E27FC236}">
+                <a16:creationId xmlns:a16="http://schemas.microsoft.com/office/drawing/2014/main" id="{C8B6B692-286B-EE82-F648-38C45239ECF9}"/>
+              </a:ext>
+            </a:extLst>
+          </p:cNvPr>
+          <p:cNvSpPr txBox="1"/>
+          <p:nvPr/>
+        </p:nvSpPr>
+        <p:spPr>
+          <a:xfrm>
+            <a:off x="480428" y="3410116"/>
+            <a:ext cx="3869672" cy="3139321"/>
+          </a:xfrm>
+          <a:prstGeom prst="rect">
+            <a:avLst/>
+          </a:prstGeom>
+          <a:noFill/>
+          <a:ln>
+            <a:solidFill>
+              <a:schemeClr val="tx1"/>
+            </a:solidFill>
+            <a:prstDash val="dash"/>
+          </a:ln>
+        </p:spPr>
+        <p:txBody>
+          <a:bodyPr rot="0" spcFirstLastPara="0" vertOverflow="overflow" horzOverflow="overflow" vert="horz" wrap="square" lIns="91440" tIns="45720" rIns="91440" bIns="45720" numCol="1" spcCol="0" rtlCol="0" fromWordArt="0" anchor="ctr" anchorCtr="0" forceAA="0" compatLnSpc="1">
+            <a:prstTxWarp prst="textNoShape">
+              <a:avLst/>
+            </a:prstTxWarp>
+            <a:spAutoFit/>
+          </a:bodyPr>
+          <a:lstStyle/>
+          <a:p>
+            <a:r>
+              <a:rPr lang="ru-RU" dirty="0">
+                <a:latin typeface="Times New Roman" panose="02020603050405020304" pitchFamily="18" charset="0"/>
+                <a:cs typeface="Times New Roman" panose="02020603050405020304" pitchFamily="18" charset="0"/>
+              </a:rPr>
+              <a:t>В каждой эпохе обучения сохранялся </a:t>
+            </a:r>
+            <a:r>
+              <a:rPr lang="ru-RU" b="1" dirty="0">
+                <a:latin typeface="Times New Roman" panose="02020603050405020304" pitchFamily="18" charset="0"/>
+                <a:cs typeface="Times New Roman" panose="02020603050405020304" pitchFamily="18" charset="0"/>
+              </a:rPr>
+              <a:t>баланс классов 50/50</a:t>
+            </a:r>
+            <a:r>
+              <a:rPr lang="ru-RU" dirty="0">
+                <a:latin typeface="Times New Roman" panose="02020603050405020304" pitchFamily="18" charset="0"/>
+                <a:cs typeface="Times New Roman" panose="02020603050405020304" pitchFamily="18" charset="0"/>
+              </a:rPr>
+              <a:t>: модель получала </a:t>
+            </a:r>
+            <a:r>
+              <a:rPr lang="ru-RU" b="1" dirty="0">
+                <a:latin typeface="Times New Roman" panose="02020603050405020304" pitchFamily="18" charset="0"/>
+                <a:cs typeface="Times New Roman" panose="02020603050405020304" pitchFamily="18" charset="0"/>
+              </a:rPr>
+              <a:t>5 522</a:t>
+            </a:r>
+            <a:r>
+              <a:rPr lang="ru-RU" dirty="0">
+                <a:latin typeface="Times New Roman" panose="02020603050405020304" pitchFamily="18" charset="0"/>
+                <a:cs typeface="Times New Roman" panose="02020603050405020304" pitchFamily="18" charset="0"/>
+              </a:rPr>
+              <a:t> показа изображений, по </a:t>
+            </a:r>
+            <a:r>
+              <a:rPr lang="ru-RU" b="1" dirty="0">
+                <a:latin typeface="Times New Roman" panose="02020603050405020304" pitchFamily="18" charset="0"/>
+                <a:cs typeface="Times New Roman" panose="02020603050405020304" pitchFamily="18" charset="0"/>
+              </a:rPr>
+              <a:t>2 761</a:t>
+            </a:r>
+            <a:r>
+              <a:rPr lang="ru-RU" dirty="0">
+                <a:latin typeface="Times New Roman" panose="02020603050405020304" pitchFamily="18" charset="0"/>
+                <a:cs typeface="Times New Roman" panose="02020603050405020304" pitchFamily="18" charset="0"/>
+              </a:rPr>
+              <a:t> на каждый класс. После аугментации обучающая выборка содержит </a:t>
+            </a:r>
+            <a:r>
+              <a:rPr lang="ru-RU" b="1" dirty="0">
+                <a:latin typeface="Times New Roman" panose="02020603050405020304" pitchFamily="18" charset="0"/>
+                <a:cs typeface="Times New Roman" panose="02020603050405020304" pitchFamily="18" charset="0"/>
+              </a:rPr>
+              <a:t>29 361</a:t>
+            </a:r>
+            <a:r>
+              <a:rPr lang="ru-RU" dirty="0">
+                <a:latin typeface="Times New Roman" panose="02020603050405020304" pitchFamily="18" charset="0"/>
+                <a:cs typeface="Times New Roman" panose="02020603050405020304" pitchFamily="18" charset="0"/>
+              </a:rPr>
+              <a:t> изображение: к каждому исходному кадру добавлены два варианта. Валидационная и тестовая выборки содержат только исходные изображения и не </a:t>
+            </a:r>
+            <a:r>
+              <a:rPr lang="ru-RU" dirty="0" err="1">
+                <a:latin typeface="Times New Roman" panose="02020603050405020304" pitchFamily="18" charset="0"/>
+                <a:cs typeface="Times New Roman" panose="02020603050405020304" pitchFamily="18" charset="0"/>
+              </a:rPr>
+              <a:t>аугментируются</a:t>
+            </a:r>
+            <a:r>
+              <a:rPr lang="ru-RU" dirty="0">
+                <a:latin typeface="Times New Roman" panose="02020603050405020304" pitchFamily="18" charset="0"/>
+                <a:cs typeface="Times New Roman" panose="02020603050405020304" pitchFamily="18" charset="0"/>
+              </a:rPr>
+              <a:t>.</a:t>
+            </a:r>
+          </a:p>
+        </p:txBody>
+      </p:sp>
+      <p:sp>
+        <p:nvSpPr>
+          <p:cNvPr id="3" name="TextBox 26">
+            <a:extLst>
+              <a:ext uri="{FF2B5EF4-FFF2-40B4-BE49-F238E27FC236}">
+                <a16:creationId xmlns:a16="http://schemas.microsoft.com/office/drawing/2014/main" id="{DAC2E642-4E22-B5B0-DB31-19292E122F11}"/>
+              </a:ext>
+            </a:extLst>
+          </p:cNvPr>
+          <p:cNvSpPr>
+            <a:spLocks noGrp="1"/>
+          </p:cNvSpPr>
+          <p:nvPr/>
+        </p:nvSpPr>
+        <p:spPr>
+          <a:xfrm>
+            <a:off x="4634025" y="5970317"/>
+            <a:ext cx="4073130" cy="579120"/>
+          </a:xfrm>
+          <a:prstGeom prst="rect">
+            <a:avLst/>
+          </a:prstGeom>
+          <a:noFill/>
+        </p:spPr>
+        <p:txBody>
+          <a:bodyPr rot="0" spcFirstLastPara="0" vert="horz" wrap="square" lIns="91440" tIns="45720" rIns="91440" bIns="45720" anchor="ctr">
+            <a:noAutofit/>
+          </a:bodyPr>
+          <a:lstStyle>
+            <a:defPPr algn="l">
+              <a:defRPr sz="1600" b="0">
+                <a:solidFill>
+                  <a:srgbClr val="000000"/>
+                </a:solidFill>
+                <a:latin typeface="Times New Roman"/>
+                <a:ea typeface="Times New Roman"/>
+                <a:cs typeface="Times New Roman"/>
+              </a:defRPr>
+            </a:defPPr>
+          </a:lstStyle>
+          <a:p>
+            <a:pPr algn="ctr">
+              <a:defRPr sz="1600" b="0">
+                <a:solidFill>
+                  <a:srgbClr val="000000"/>
+                </a:solidFill>
+                <a:latin typeface="Times New Roman"/>
+                <a:ea typeface="Times New Roman"/>
+                <a:cs typeface="Times New Roman"/>
+              </a:defRPr>
+            </a:pPr>
+            <a:r>
+              <a:rPr sz="1600" b="0" dirty="0" err="1">
+                <a:solidFill>
+                  <a:srgbClr val="000000"/>
+                </a:solidFill>
+                <a:latin typeface="Times New Roman"/>
+                <a:ea typeface="Times New Roman"/>
+                <a:cs typeface="Times New Roman"/>
+              </a:rPr>
+              <a:t>Рис</a:t>
+            </a:r>
+            <a:r>
+              <a:rPr sz="1600" b="0" dirty="0">
+                <a:solidFill>
+                  <a:srgbClr val="000000"/>
+                </a:solidFill>
+                <a:latin typeface="Times New Roman"/>
+                <a:ea typeface="Times New Roman"/>
+                <a:cs typeface="Times New Roman"/>
+              </a:rPr>
+              <a:t>. </a:t>
+            </a:r>
+            <a:r>
+              <a:rPr lang="ru-RU" sz="1600" b="0" dirty="0">
+                <a:solidFill>
+                  <a:srgbClr val="000000"/>
+                </a:solidFill>
+                <a:latin typeface="Times New Roman"/>
+                <a:ea typeface="Times New Roman"/>
+                <a:cs typeface="Times New Roman"/>
+              </a:rPr>
+              <a:t>3</a:t>
+            </a:r>
+            <a:r>
+              <a:rPr sz="1600" b="0" dirty="0">
+                <a:solidFill>
+                  <a:srgbClr val="000000"/>
+                </a:solidFill>
+                <a:latin typeface="Times New Roman"/>
+                <a:ea typeface="Times New Roman"/>
+                <a:cs typeface="Times New Roman"/>
+              </a:rPr>
+              <a:t> – </a:t>
+            </a:r>
+            <a:r>
+              <a:rPr lang="ru-RU" sz="1600" b="0" dirty="0">
+                <a:solidFill>
+                  <a:srgbClr val="000000"/>
+                </a:solidFill>
+                <a:latin typeface="Times New Roman"/>
+                <a:ea typeface="Times New Roman"/>
+                <a:cs typeface="Times New Roman"/>
+              </a:rPr>
+              <a:t>Диаграмма распределения исходных кадров по выборкам</a:t>
+            </a:r>
+            <a:endParaRPr sz="1600" b="0" dirty="0">
+              <a:solidFill>
+                <a:srgbClr val="000000"/>
+              </a:solidFill>
+              <a:latin typeface="Times New Roman"/>
+              <a:ea typeface="Times New Roman"/>
+              <a:cs typeface="Times New Roman"/>
+            </a:endParaRPr>
+          </a:p>
+        </p:txBody>
+      </p:sp>
+      <p:pic>
+        <p:nvPicPr>
+          <p:cNvPr id="8" name="Рисунок 7">
+            <a:extLst>
+              <a:ext uri="{FF2B5EF4-FFF2-40B4-BE49-F238E27FC236}">
+                <a16:creationId xmlns:a16="http://schemas.microsoft.com/office/drawing/2014/main" id="{A2B5EBF5-FBE6-336C-42E4-49A8C5D8A0DF}"/>
+              </a:ext>
+            </a:extLst>
+          </p:cNvPr>
+          <p:cNvPicPr>
+            <a:picLocks noChangeAspect="1"/>
+          </p:cNvPicPr>
+          <p:nvPr/>
+        </p:nvPicPr>
+        <p:blipFill>
+          <a:blip r:embed="rId3"/>
+          <a:stretch>
+            <a:fillRect/>
+          </a:stretch>
+        </p:blipFill>
+        <p:spPr>
+          <a:xfrm>
+            <a:off x="4882102" y="3317275"/>
+            <a:ext cx="3976794" cy="2630107"/>
+          </a:xfrm>
+          <a:prstGeom prst="rect">
+            <a:avLst/>
+          </a:prstGeom>
+        </p:spPr>
+      </p:pic>
+    </p:spTree>
+    <p:extLst>
+      <p:ext uri="{BB962C8B-B14F-4D97-AF65-F5344CB8AC3E}">
+        <p14:creationId xmlns:p14="http://schemas.microsoft.com/office/powerpoint/2010/main" val="169297957"/>
+      </p:ext>
+    </p:extLst>
+  </p:cSld>
+  <p:clrMapOvr>
+    <a:masterClrMapping/>
+  </p:clrMapOvr>
+</p:sld>
+</file>
+
+<file path=ppt/slides/slide5.xml><?xml version="1.0" encoding="utf-8"?>
+<p:sld xmlns:a="http://schemas.openxmlformats.org/drawingml/2006/main" xmlns:r="http://schemas.openxmlformats.org/officeDocument/2006/relationships" xmlns:p="http://schemas.openxmlformats.org/presentationml/2006/main">
+  <p:cSld>
+    <p:spTree>
+      <p:nvGrpSpPr>
+        <p:cNvPr id="1" name="">
+          <a:extLst>
+            <a:ext uri="{FF2B5EF4-FFF2-40B4-BE49-F238E27FC236}">
+              <a16:creationId xmlns:a16="http://schemas.microsoft.com/office/drawing/2014/main" id="{586A209A-B3B7-9043-FC7E-DD693EE6AACA}"/>
+            </a:ext>
+          </a:extLst>
+        </p:cNvPr>
+        <p:cNvGrpSpPr/>
+        <p:nvPr/>
+      </p:nvGrpSpPr>
+      <p:grpSpPr>
+        <a:xfrm>
+          <a:off x="0" y="0"/>
+          <a:ext cx="0" cy="0"/>
+          <a:chOff x="0" y="0"/>
+          <a:chExt cx="0" cy="0"/>
+        </a:xfrm>
+      </p:grpSpPr>
+      <p:sp>
+        <p:nvSpPr>
+          <p:cNvPr id="2" name="Заголовок 1">
+            <a:extLst>
+              <a:ext uri="{FF2B5EF4-FFF2-40B4-BE49-F238E27FC236}">
+                <a16:creationId xmlns:a16="http://schemas.microsoft.com/office/drawing/2014/main" id="{648A91D6-F58A-86A8-231A-A5AC58545903}"/>
+              </a:ext>
+            </a:extLst>
+          </p:cNvPr>
+          <p:cNvSpPr>
+            <a:spLocks noGrp="1"/>
+          </p:cNvSpPr>
+          <p:nvPr>
+            <p:ph type="title"/>
+          </p:nvPr>
+        </p:nvSpPr>
+        <p:spPr>
+          <a:xfrm>
+            <a:off x="628648" y="0"/>
+            <a:ext cx="7886700" cy="712868"/>
+          </a:xfrm>
+        </p:spPr>
+        <p:txBody>
+          <a:bodyPr>
+            <a:normAutofit/>
+          </a:bodyPr>
+          <a:lstStyle/>
+          <a:p>
+            <a:pPr algn="ctr"/>
+            <a:r>
+              <a:rPr lang="ru-RU" sz="4000" dirty="0">
+                <a:latin typeface="Times New Roman" panose="02020603050405020304" pitchFamily="18" charset="0"/>
+                <a:ea typeface="Calibri"/>
+                <a:cs typeface="Times New Roman" panose="02020603050405020304" pitchFamily="18" charset="0"/>
+              </a:rPr>
+              <a:t>Результат обучения нейросети</a:t>
+            </a:r>
+          </a:p>
+        </p:txBody>
+      </p:sp>
+      <p:sp>
+        <p:nvSpPr>
+          <p:cNvPr id="5" name="Замещающий номер слайда 4">
+            <a:extLst>
+              <a:ext uri="{FF2B5EF4-FFF2-40B4-BE49-F238E27FC236}">
+                <a16:creationId xmlns:a16="http://schemas.microsoft.com/office/drawing/2014/main" id="{425BE312-5EC5-E722-FD8E-916DFE636F2B}"/>
+              </a:ext>
+            </a:extLst>
+          </p:cNvPr>
+          <p:cNvSpPr>
+            <a:spLocks noGrp="1"/>
+          </p:cNvSpPr>
+          <p:nvPr>
+            <p:ph type="sldNum" sz="quarter" idx="12"/>
+          </p:nvPr>
+        </p:nvSpPr>
+        <p:spPr>
+          <a:xfrm>
+            <a:off x="7088886" y="6493511"/>
+            <a:ext cx="2057400" cy="365125"/>
+          </a:xfrm>
+        </p:spPr>
+        <p:txBody>
+          <a:bodyPr/>
+          <a:lstStyle/>
+          <a:p>
+            <a:fld id="{D6ED8A53-8D2F-4011-BE06-EDB0774336BA}" type="slidenum">
+              <a:rPr lang="ru-RU" sz="2000" dirty="0" smtClean="0">
+                <a:solidFill>
+                  <a:schemeClr val="tx1"/>
+                </a:solidFill>
+                <a:latin typeface="Times New Roman" panose="02020603050405020304" pitchFamily="18" charset="0"/>
+                <a:cs typeface="Times New Roman" panose="02020603050405020304" pitchFamily="18" charset="0"/>
+              </a:rPr>
+              <a:t>5</a:t>
+            </a:fld>
+            <a:endParaRPr lang="ru-RU" sz="2000" dirty="0">
+              <a:solidFill>
+                <a:schemeClr val="tx1"/>
+              </a:solidFill>
+              <a:latin typeface="Times New Roman" panose="02020603050405020304" pitchFamily="18" charset="0"/>
+              <a:ea typeface="Calibri"/>
+              <a:cs typeface="Times New Roman" panose="02020603050405020304" pitchFamily="18" charset="0"/>
+            </a:endParaRPr>
+          </a:p>
+        </p:txBody>
+      </p:sp>
+      <p:sp>
+        <p:nvSpPr>
+          <p:cNvPr id="14" name="TextBox 13">
+            <a:extLst>
+              <a:ext uri="{FF2B5EF4-FFF2-40B4-BE49-F238E27FC236}">
+                <a16:creationId xmlns:a16="http://schemas.microsoft.com/office/drawing/2014/main" id="{733275A9-2422-EE65-68B7-2EFC7CB717FE}"/>
+              </a:ext>
+            </a:extLst>
+          </p:cNvPr>
+          <p:cNvSpPr txBox="1"/>
+          <p:nvPr/>
+        </p:nvSpPr>
+        <p:spPr>
+          <a:xfrm>
+            <a:off x="444579" y="731952"/>
+            <a:ext cx="3869672" cy="2585323"/>
+          </a:xfrm>
+          <a:prstGeom prst="rect">
+            <a:avLst/>
+          </a:prstGeom>
+          <a:noFill/>
+          <a:ln>
+            <a:solidFill>
+              <a:schemeClr val="tx1"/>
+            </a:solidFill>
+            <a:prstDash val="dash"/>
+          </a:ln>
+        </p:spPr>
+        <p:txBody>
+          <a:bodyPr rot="0" spcFirstLastPara="0" vertOverflow="overflow" horzOverflow="overflow" vert="horz" wrap="square" lIns="91440" tIns="45720" rIns="91440" bIns="45720" numCol="1" spcCol="0" rtlCol="0" fromWordArt="0" anchor="ctr" anchorCtr="0" forceAA="0" compatLnSpc="1">
+            <a:prstTxWarp prst="textNoShape">
+              <a:avLst/>
+            </a:prstTxWarp>
+            <a:spAutoFit/>
+          </a:bodyPr>
+          <a:lstStyle/>
+          <a:p>
+            <a:r>
+              <a:rPr lang="ru-RU" dirty="0">
+                <a:latin typeface="Times New Roman" panose="02020603050405020304" pitchFamily="18" charset="0"/>
+                <a:cs typeface="Times New Roman" panose="02020603050405020304" pitchFamily="18" charset="0"/>
+              </a:rPr>
+              <a:t>Для обнаружения «спагетти» выбрана </a:t>
+            </a:r>
+            <a:r>
+              <a:rPr lang="ru-RU" b="1" dirty="0">
+                <a:latin typeface="Times New Roman" panose="02020603050405020304" pitchFamily="18" charset="0"/>
+                <a:cs typeface="Times New Roman" panose="02020603050405020304" pitchFamily="18" charset="0"/>
+              </a:rPr>
+              <a:t>ResNet18</a:t>
+            </a:r>
+            <a:r>
+              <a:rPr lang="ru-RU" dirty="0">
+                <a:latin typeface="Times New Roman" panose="02020603050405020304" pitchFamily="18" charset="0"/>
+                <a:cs typeface="Times New Roman" panose="02020603050405020304" pitchFamily="18" charset="0"/>
+              </a:rPr>
+              <a:t>. Она решает задачу как бинарную классификацию полного кадра: </a:t>
+            </a:r>
+            <a:r>
+              <a:rPr lang="ru-RU" b="1" dirty="0">
+                <a:latin typeface="Times New Roman" panose="02020603050405020304" pitchFamily="18" charset="0"/>
+                <a:cs typeface="Times New Roman" panose="02020603050405020304" pitchFamily="18" charset="0"/>
+              </a:rPr>
+              <a:t>есть дефект или нет</a:t>
+            </a:r>
+            <a:r>
+              <a:rPr lang="ru-RU" dirty="0">
+                <a:latin typeface="Times New Roman" panose="02020603050405020304" pitchFamily="18" charset="0"/>
+                <a:cs typeface="Times New Roman" panose="02020603050405020304" pitchFamily="18" charset="0"/>
+              </a:rPr>
+              <a:t>. Локализация дефектов рамкой в прошлых работах показала низкую точность. Детекция объектов сохранена только для поиска детали на столе.</a:t>
+            </a:r>
+            <a:endParaRPr lang="ru-RU" dirty="0">
+              <a:solidFill>
+                <a:srgbClr val="000000"/>
+              </a:solidFill>
+              <a:latin typeface="Times New Roman" panose="02020603050405020304" pitchFamily="18" charset="0"/>
+              <a:cs typeface="Times New Roman" panose="02020603050405020304" pitchFamily="18" charset="0"/>
+            </a:endParaRPr>
+          </a:p>
+        </p:txBody>
+      </p:sp>
+      <p:sp>
+        <p:nvSpPr>
+          <p:cNvPr id="22" name="TextBox 21">
+            <a:extLst>
+              <a:ext uri="{FF2B5EF4-FFF2-40B4-BE49-F238E27FC236}">
+                <a16:creationId xmlns:a16="http://schemas.microsoft.com/office/drawing/2014/main" id="{EED866B5-82E1-33E1-5DF7-1DCBBD9DCDF8}"/>
+              </a:ext>
+            </a:extLst>
+          </p:cNvPr>
+          <p:cNvSpPr txBox="1"/>
+          <p:nvPr/>
+        </p:nvSpPr>
+        <p:spPr>
+          <a:xfrm>
+            <a:off x="4771553" y="724829"/>
+            <a:ext cx="4197892" cy="1477328"/>
+          </a:xfrm>
+          <a:prstGeom prst="rect">
+            <a:avLst/>
+          </a:prstGeom>
+          <a:noFill/>
+          <a:ln>
+            <a:solidFill>
+              <a:schemeClr val="tx1"/>
+            </a:solidFill>
+            <a:prstDash val="dash"/>
+          </a:ln>
+        </p:spPr>
+        <p:txBody>
+          <a:bodyPr rot="0" spcFirstLastPara="0" vertOverflow="overflow" horzOverflow="overflow" vert="horz" wrap="square" lIns="91440" tIns="45720" rIns="91440" bIns="45720" numCol="1" spcCol="0" rtlCol="0" fromWordArt="0" anchor="ctr" anchorCtr="0" forceAA="0" compatLnSpc="1">
+            <a:prstTxWarp prst="textNoShape">
+              <a:avLst/>
+            </a:prstTxWarp>
+            <a:spAutoFit/>
+          </a:bodyPr>
+          <a:lstStyle/>
+          <a:p>
+            <a:r>
+              <a:rPr lang="ru-RU" dirty="0">
+                <a:latin typeface="Times New Roman" panose="02020603050405020304" pitchFamily="18" charset="0"/>
+                <a:cs typeface="Times New Roman" panose="02020603050405020304" pitchFamily="18" charset="0"/>
+              </a:rPr>
+              <a:t>Датасет содержит </a:t>
+            </a:r>
+            <a:r>
+              <a:rPr lang="ru-RU" b="1" dirty="0">
+                <a:latin typeface="Times New Roman" panose="02020603050405020304" pitchFamily="18" charset="0"/>
+                <a:cs typeface="Times New Roman" panose="02020603050405020304" pitchFamily="18" charset="0"/>
+              </a:rPr>
+              <a:t>16 014 кадров без аугментаций</a:t>
+            </a:r>
+            <a:r>
+              <a:rPr lang="ru-RU" dirty="0">
+                <a:latin typeface="Times New Roman" panose="02020603050405020304" pitchFamily="18" charset="0"/>
+                <a:cs typeface="Times New Roman" panose="02020603050405020304" pitchFamily="18" charset="0"/>
+              </a:rPr>
+              <a:t>: 4 574 кадра со «спагетти» и 11 440 кадров без видимых признаков этого дефекта. Выборки делились по соотношению 60/20/20.</a:t>
+            </a:r>
+          </a:p>
+        </p:txBody>
+      </p:sp>
+      <p:sp>
+        <p:nvSpPr>
+          <p:cNvPr id="25" name="TextBox 24">
+            <a:extLst>
+              <a:ext uri="{FF2B5EF4-FFF2-40B4-BE49-F238E27FC236}">
+                <a16:creationId xmlns:a16="http://schemas.microsoft.com/office/drawing/2014/main" id="{C8B6B692-286B-EE82-F648-38C45239ECF9}"/>
+              </a:ext>
+            </a:extLst>
+          </p:cNvPr>
+          <p:cNvSpPr txBox="1"/>
+          <p:nvPr/>
+        </p:nvSpPr>
+        <p:spPr>
+          <a:xfrm>
+            <a:off x="487537" y="3466535"/>
+            <a:ext cx="3869672" cy="2862322"/>
+          </a:xfrm>
+          <a:prstGeom prst="rect">
+            <a:avLst/>
+          </a:prstGeom>
+          <a:noFill/>
+          <a:ln>
+            <a:solidFill>
+              <a:schemeClr val="tx1"/>
+            </a:solidFill>
+            <a:prstDash val="dash"/>
+          </a:ln>
+        </p:spPr>
+        <p:txBody>
+          <a:bodyPr rot="0" spcFirstLastPara="0" vertOverflow="overflow" horzOverflow="overflow" vert="horz" wrap="square" lIns="91440" tIns="45720" rIns="91440" bIns="45720" numCol="1" spcCol="0" rtlCol="0" fromWordArt="0" anchor="ctr" anchorCtr="0" forceAA="0" compatLnSpc="1">
+            <a:prstTxWarp prst="textNoShape">
+              <a:avLst/>
+            </a:prstTxWarp>
+            <a:spAutoFit/>
+          </a:bodyPr>
+          <a:lstStyle/>
+          <a:p>
+            <a:r>
+              <a:rPr lang="ru-RU" dirty="0">
+                <a:latin typeface="Times New Roman" panose="02020603050405020304" pitchFamily="18" charset="0"/>
+                <a:cs typeface="Times New Roman" panose="02020603050405020304" pitchFamily="18" charset="0"/>
+              </a:rPr>
+              <a:t>Для каждой эпохи обучения сохранялся </a:t>
+            </a:r>
+            <a:r>
+              <a:rPr lang="ru-RU" b="1" dirty="0">
+                <a:latin typeface="Times New Roman" panose="02020603050405020304" pitchFamily="18" charset="0"/>
+                <a:cs typeface="Times New Roman" panose="02020603050405020304" pitchFamily="18" charset="0"/>
+              </a:rPr>
+              <a:t>баланс классов 50/50</a:t>
+            </a:r>
+            <a:r>
+              <a:rPr lang="ru-RU" dirty="0">
+                <a:latin typeface="Times New Roman" panose="02020603050405020304" pitchFamily="18" charset="0"/>
+                <a:cs typeface="Times New Roman" panose="02020603050405020304" pitchFamily="18" charset="0"/>
+              </a:rPr>
+              <a:t>: использовались все 2 746 кадров со «спагетти» и столько же случайно выбранных кадров без дефекта. Всего модель получала </a:t>
+            </a:r>
+            <a:r>
+              <a:rPr lang="ru-RU" b="1" dirty="0">
+                <a:latin typeface="Times New Roman" panose="02020603050405020304" pitchFamily="18" charset="0"/>
+                <a:cs typeface="Times New Roman" panose="02020603050405020304" pitchFamily="18" charset="0"/>
+              </a:rPr>
+              <a:t>5 492 изображения за эпоху</a:t>
+            </a:r>
+            <a:r>
+              <a:rPr lang="ru-RU" dirty="0">
+                <a:latin typeface="Times New Roman" panose="02020603050405020304" pitchFamily="18" charset="0"/>
+                <a:cs typeface="Times New Roman" panose="02020603050405020304" pitchFamily="18" charset="0"/>
+              </a:rPr>
+              <a:t>. Валидационная и тестовая выборки содержат только исходные изображения без аугментаций.</a:t>
+            </a:r>
+          </a:p>
+        </p:txBody>
+      </p:sp>
+      <p:sp>
+        <p:nvSpPr>
+          <p:cNvPr id="3" name="TextBox 26">
+            <a:extLst>
+              <a:ext uri="{FF2B5EF4-FFF2-40B4-BE49-F238E27FC236}">
+                <a16:creationId xmlns:a16="http://schemas.microsoft.com/office/drawing/2014/main" id="{155F7BCE-57B1-4886-841D-DAD17BC5CA7C}"/>
+              </a:ext>
+            </a:extLst>
+          </p:cNvPr>
+          <p:cNvSpPr>
+            <a:spLocks noGrp="1"/>
+          </p:cNvSpPr>
+          <p:nvPr/>
+        </p:nvSpPr>
+        <p:spPr>
+          <a:xfrm>
+            <a:off x="4703875" y="5554051"/>
+            <a:ext cx="4073130" cy="579120"/>
+          </a:xfrm>
+          <a:prstGeom prst="rect">
+            <a:avLst/>
+          </a:prstGeom>
+          <a:noFill/>
+        </p:spPr>
+        <p:txBody>
+          <a:bodyPr rot="0" spcFirstLastPara="0" vert="horz" wrap="square" lIns="91440" tIns="45720" rIns="91440" bIns="45720" anchor="ctr">
+            <a:noAutofit/>
+          </a:bodyPr>
+          <a:lstStyle>
+            <a:defPPr algn="l">
+              <a:defRPr sz="1600" b="0">
+                <a:solidFill>
+                  <a:srgbClr val="000000"/>
+                </a:solidFill>
+                <a:latin typeface="Times New Roman"/>
+                <a:ea typeface="Times New Roman"/>
+                <a:cs typeface="Times New Roman"/>
+              </a:defRPr>
+            </a:defPPr>
+          </a:lstStyle>
+          <a:p>
+            <a:pPr algn="ctr">
+              <a:defRPr sz="1600" b="0">
+                <a:solidFill>
+                  <a:srgbClr val="000000"/>
+                </a:solidFill>
+                <a:latin typeface="Times New Roman"/>
+                <a:ea typeface="Times New Roman"/>
+                <a:cs typeface="Times New Roman"/>
+              </a:defRPr>
+            </a:pPr>
+            <a:r>
+              <a:rPr sz="1600" b="0" dirty="0">
+                <a:solidFill>
+                  <a:srgbClr val="000000"/>
+                </a:solidFill>
+                <a:latin typeface="Times New Roman"/>
+                <a:ea typeface="Times New Roman"/>
+                <a:cs typeface="Times New Roman"/>
+              </a:rPr>
+              <a:t>Рис. </a:t>
+            </a:r>
+            <a:r>
+              <a:rPr lang="ru-RU" sz="1600" b="0" dirty="0">
+                <a:solidFill>
+                  <a:srgbClr val="000000"/>
+                </a:solidFill>
+                <a:latin typeface="Times New Roman"/>
+                <a:ea typeface="Times New Roman"/>
+                <a:cs typeface="Times New Roman"/>
+              </a:rPr>
+              <a:t>4,5</a:t>
+            </a:r>
+            <a:r>
+              <a:rPr sz="1600" b="0" dirty="0">
+                <a:solidFill>
+                  <a:srgbClr val="000000"/>
+                </a:solidFill>
+                <a:latin typeface="Times New Roman"/>
+                <a:ea typeface="Times New Roman"/>
+                <a:cs typeface="Times New Roman"/>
+              </a:rPr>
+              <a:t> – </a:t>
+            </a:r>
+            <a:r>
+              <a:rPr lang="ru-RU" sz="1600" b="0" dirty="0">
+                <a:solidFill>
+                  <a:srgbClr val="000000"/>
+                </a:solidFill>
+                <a:latin typeface="Times New Roman"/>
+                <a:ea typeface="Times New Roman"/>
+                <a:cs typeface="Times New Roman"/>
+              </a:rPr>
+              <a:t>Диаграмма статистики печатей на ферме компании «</a:t>
+            </a:r>
+            <a:r>
+              <a:rPr lang="en-US" sz="1600" b="0" dirty="0">
+                <a:solidFill>
+                  <a:srgbClr val="000000"/>
+                </a:solidFill>
+                <a:latin typeface="Times New Roman"/>
+                <a:ea typeface="Times New Roman"/>
+                <a:cs typeface="Times New Roman"/>
+              </a:rPr>
+              <a:t>Stereotech</a:t>
+            </a:r>
+            <a:r>
+              <a:rPr lang="ru-RU" sz="1600" b="0" dirty="0">
+                <a:solidFill>
+                  <a:srgbClr val="000000"/>
+                </a:solidFill>
+                <a:latin typeface="Times New Roman"/>
+                <a:ea typeface="Times New Roman"/>
+                <a:cs typeface="Times New Roman"/>
+              </a:rPr>
+              <a:t>»</a:t>
+            </a:r>
+            <a:endParaRPr sz="1600" b="0" dirty="0">
+              <a:solidFill>
+                <a:srgbClr val="000000"/>
+              </a:solidFill>
+              <a:latin typeface="Times New Roman"/>
+              <a:ea typeface="Times New Roman"/>
+              <a:cs typeface="Times New Roman"/>
+            </a:endParaRPr>
+          </a:p>
+        </p:txBody>
+      </p:sp>
+    </p:spTree>
+    <p:extLst>
+      <p:ext uri="{BB962C8B-B14F-4D97-AF65-F5344CB8AC3E}">
+        <p14:creationId xmlns:p14="http://schemas.microsoft.com/office/powerpoint/2010/main" val="3025447512"/>
+      </p:ext>
+    </p:extLst>
+  </p:cSld>
+  <p:clrMapOvr>
+    <a:masterClrMapping/>
+  </p:clrMapOvr>
+</p:sld>
+</file>
+
+<file path=ppt/slides/slide6.xml><?xml version="1.0" encoding="utf-8"?>
+<p:sld xmlns:a="http://schemas.openxmlformats.org/drawingml/2006/main" xmlns:r="http://schemas.openxmlformats.org/officeDocument/2006/relationships" xmlns:p="http://schemas.openxmlformats.org/presentationml/2006/main">
+  <p:cSld>
+    <p:spTree>
+      <p:nvGrpSpPr>
         <p:cNvPr id="1" name="">
           <a:extLst>
             <a:ext uri="{FF2B5EF4-FFF2-40B4-BE49-F238E27FC236}">
@@ -5528,24 +8086,24 @@
         </p:nvSpPr>
         <p:spPr>
           <a:xfrm>
-            <a:off x="628650" y="-64546"/>
+            <a:off x="628650" y="9098"/>
             <a:ext cx="7886700" cy="712868"/>
           </a:xfrm>
         </p:spPr>
         <p:txBody>
           <a:bodyPr>
-            <a:normAutofit fontScale="90000"/>
+            <a:normAutofit/>
           </a:bodyPr>
           <a:lstStyle/>
           <a:p>
             <a:pPr algn="ctr"/>
             <a:r>
-              <a:rPr lang="ru-RU" dirty="0">
+              <a:rPr lang="ru-RU" sz="4000" dirty="0">
                 <a:latin typeface="Times New Roman"/>
                 <a:ea typeface="Calibri"/>
                 <a:cs typeface="Times New Roman"/>
               </a:rPr>
-              <a:t>Тестирование на реальной печати</a:t>
+              <a:t>Обработка на сервере</a:t>
             </a:r>
           </a:p>
         </p:txBody>
@@ -5578,7 +8136,7 @@
           </a:bodyPr>
           <a:lstStyle/>
           <a:p>
-            <a:endParaRPr lang="ru-RU" altLang="en-US"/>
+            <a:endParaRPr lang="ru-RU" altLang="en-US" dirty="0"/>
           </a:p>
         </p:txBody>
       </p:sp>
@@ -5616,9 +8174,1421 @@
                 <a:latin typeface="Times New Roman"/>
                 <a:cs typeface="Times New Roman"/>
               </a:rPr>
-              <a:t>10</a:t>
+              <a:t>6</a:t>
             </a:fld>
-            <a:endParaRPr lang="ru-RU" sz="2000">
+            <a:endParaRPr lang="ru-RU" sz="2000" dirty="0">
+              <a:solidFill>
+                <a:schemeClr val="tx1"/>
+              </a:solidFill>
+              <a:latin typeface="Times New Roman"/>
+              <a:ea typeface="Calibri"/>
+              <a:cs typeface="Times New Roman"/>
+            </a:endParaRPr>
+          </a:p>
+        </p:txBody>
+      </p:sp>
+      <p:sp>
+        <p:nvSpPr>
+          <p:cNvPr id="8" name="TextBox 7">
+            <a:extLst>
+              <a:ext uri="{FF2B5EF4-FFF2-40B4-BE49-F238E27FC236}">
+                <a16:creationId xmlns:a16="http://schemas.microsoft.com/office/drawing/2014/main" id="{3FDAB50E-3BD8-57A2-B047-497A3FD50648}"/>
+              </a:ext>
+            </a:extLst>
+          </p:cNvPr>
+          <p:cNvSpPr txBox="1"/>
+          <p:nvPr/>
+        </p:nvSpPr>
+        <p:spPr>
+          <a:xfrm>
+            <a:off x="186213" y="875407"/>
+            <a:ext cx="2920514" cy="1477328"/>
+          </a:xfrm>
+          <a:prstGeom prst="rect">
+            <a:avLst/>
+          </a:prstGeom>
+          <a:noFill/>
+          <a:ln>
+            <a:solidFill>
+              <a:schemeClr val="tx1"/>
+            </a:solidFill>
+            <a:prstDash val="dash"/>
+          </a:ln>
+        </p:spPr>
+        <p:txBody>
+          <a:bodyPr rot="0" spcFirstLastPara="0" vertOverflow="overflow" horzOverflow="overflow" vert="horz" wrap="square" lIns="91440" tIns="45720" rIns="91440" bIns="45720" numCol="1" spcCol="0" rtlCol="0" fromWordArt="0" anchor="ctr" anchorCtr="0" forceAA="0" compatLnSpc="1">
+            <a:prstTxWarp prst="textNoShape">
+              <a:avLst/>
+            </a:prstTxWarp>
+            <a:spAutoFit/>
+          </a:bodyPr>
+          <a:lstStyle/>
+          <a:p>
+            <a:pPr algn="ctr"/>
+            <a:r>
+              <a:rPr lang="ru-RU" dirty="0">
+                <a:latin typeface="Times New Roman"/>
+                <a:ea typeface="+mn-lt"/>
+                <a:cs typeface="+mn-lt"/>
+              </a:rPr>
+              <a:t>Роль сервера:</a:t>
+            </a:r>
+            <a:endParaRPr lang="ru-RU" dirty="0">
+              <a:latin typeface="Times New Roman"/>
+              <a:cs typeface="Times New Roman"/>
+            </a:endParaRPr>
+          </a:p>
+          <a:p>
+            <a:pPr marL="285750" indent="-285750">
+              <a:buFont typeface="Arial"/>
+              <a:buChar char="•"/>
+            </a:pPr>
+            <a:r>
+              <a:rPr lang="ru-RU" b="1" dirty="0">
+                <a:latin typeface="Times New Roman"/>
+                <a:ea typeface="+mn-lt"/>
+                <a:cs typeface="+mn-lt"/>
+              </a:rPr>
+              <a:t>Централизованная </a:t>
+            </a:r>
+            <a:r>
+              <a:rPr lang="ru-RU" dirty="0">
+                <a:latin typeface="Times New Roman"/>
+                <a:ea typeface="+mn-lt"/>
+                <a:cs typeface="+mn-lt"/>
+              </a:rPr>
+              <a:t>обработка запросов.</a:t>
+            </a:r>
+            <a:endParaRPr lang="ru-RU" dirty="0">
+              <a:latin typeface="Times New Roman"/>
+              <a:cs typeface="Times New Roman"/>
+            </a:endParaRPr>
+          </a:p>
+          <a:p>
+            <a:pPr marL="285750" indent="-285750">
+              <a:buFont typeface="Arial"/>
+              <a:buChar char="•"/>
+            </a:pPr>
+            <a:r>
+              <a:rPr lang="ru-RU" dirty="0">
+                <a:latin typeface="Times New Roman"/>
+                <a:ea typeface="+mn-lt"/>
+                <a:cs typeface="+mn-lt"/>
+              </a:rPr>
+              <a:t>Выполнение </a:t>
+            </a:r>
+            <a:r>
+              <a:rPr lang="ru-RU" b="1" dirty="0">
+                <a:latin typeface="Times New Roman"/>
+                <a:ea typeface="+mn-lt"/>
+                <a:cs typeface="+mn-lt"/>
+              </a:rPr>
+              <a:t>ресурсоёмких </a:t>
+            </a:r>
+            <a:r>
+              <a:rPr lang="ru-RU" dirty="0">
+                <a:latin typeface="Times New Roman"/>
+                <a:ea typeface="+mn-lt"/>
+                <a:cs typeface="+mn-lt"/>
+              </a:rPr>
+              <a:t>задач.</a:t>
+            </a:r>
+            <a:endParaRPr lang="ru-RU" dirty="0">
+              <a:latin typeface="Times New Roman"/>
+              <a:cs typeface="Times New Roman"/>
+            </a:endParaRPr>
+          </a:p>
+        </p:txBody>
+      </p:sp>
+      <p:pic>
+        <p:nvPicPr>
+          <p:cNvPr id="7" name="Рисунок 6">
+            <a:extLst>
+              <a:ext uri="{FF2B5EF4-FFF2-40B4-BE49-F238E27FC236}">
+                <a16:creationId xmlns:a16="http://schemas.microsoft.com/office/drawing/2014/main" id="{DA035444-9EBE-0F23-C21B-B713FDEC75FD}"/>
+              </a:ext>
+            </a:extLst>
+          </p:cNvPr>
+          <p:cNvPicPr>
+            <a:picLocks noChangeAspect="1"/>
+          </p:cNvPicPr>
+          <p:nvPr/>
+        </p:nvPicPr>
+        <p:blipFill>
+          <a:blip r:embed="rId3">
+            <a:extLst>
+              <a:ext uri="{28A0092B-C50C-407E-A947-70E740481C1C}">
+                <a14:useLocalDpi xmlns:a14="http://schemas.microsoft.com/office/drawing/2010/main" val="0"/>
+              </a:ext>
+            </a:extLst>
+          </a:blip>
+          <a:srcRect/>
+          <a:stretch/>
+        </p:blipFill>
+        <p:spPr>
+          <a:xfrm>
+            <a:off x="3302968" y="875407"/>
+            <a:ext cx="5639137" cy="5093570"/>
+          </a:xfrm>
+          <a:prstGeom prst="rect">
+            <a:avLst/>
+          </a:prstGeom>
+        </p:spPr>
+      </p:pic>
+      <p:sp>
+        <p:nvSpPr>
+          <p:cNvPr id="12" name="TextBox 11">
+            <a:extLst>
+              <a:ext uri="{FF2B5EF4-FFF2-40B4-BE49-F238E27FC236}">
+                <a16:creationId xmlns:a16="http://schemas.microsoft.com/office/drawing/2014/main" id="{D77D804C-EAD2-5379-2030-7517770A46AB}"/>
+              </a:ext>
+            </a:extLst>
+          </p:cNvPr>
+          <p:cNvSpPr txBox="1"/>
+          <p:nvPr/>
+        </p:nvSpPr>
+        <p:spPr>
+          <a:xfrm>
+            <a:off x="186213" y="2593566"/>
+            <a:ext cx="2920514" cy="3416320"/>
+          </a:xfrm>
+          <a:prstGeom prst="rect">
+            <a:avLst/>
+          </a:prstGeom>
+          <a:noFill/>
+          <a:ln>
+            <a:solidFill>
+              <a:schemeClr val="tx1"/>
+            </a:solidFill>
+            <a:prstDash val="dash"/>
+          </a:ln>
+        </p:spPr>
+        <p:txBody>
+          <a:bodyPr rot="0" spcFirstLastPara="0" vertOverflow="overflow" horzOverflow="overflow" vert="horz" wrap="square" lIns="91440" tIns="45720" rIns="91440" bIns="45720" numCol="1" spcCol="0" rtlCol="0" fromWordArt="0" anchor="ctr" anchorCtr="0" forceAA="0" compatLnSpc="1">
+            <a:prstTxWarp prst="textNoShape">
+              <a:avLst/>
+            </a:prstTxWarp>
+            <a:spAutoFit/>
+          </a:bodyPr>
+          <a:lstStyle/>
+          <a:p>
+            <a:r>
+              <a:rPr lang="ru-RU" dirty="0">
+                <a:latin typeface="Times New Roman" panose="02020603050405020304" pitchFamily="18" charset="0"/>
+                <a:cs typeface="Times New Roman" panose="02020603050405020304" pitchFamily="18" charset="0"/>
+              </a:rPr>
+              <a:t>Сервер </a:t>
+            </a:r>
+            <a:r>
+              <a:rPr lang="ru-RU" b="1" dirty="0">
+                <a:latin typeface="Times New Roman" panose="02020603050405020304" pitchFamily="18" charset="0"/>
+                <a:cs typeface="Times New Roman" panose="02020603050405020304" pitchFamily="18" charset="0"/>
+              </a:rPr>
+              <a:t>получает кадр </a:t>
+            </a:r>
+            <a:r>
+              <a:rPr lang="ru-RU" dirty="0">
+                <a:latin typeface="Times New Roman" panose="02020603050405020304" pitchFamily="18" charset="0"/>
+                <a:cs typeface="Times New Roman" panose="02020603050405020304" pitchFamily="18" charset="0"/>
+              </a:rPr>
+              <a:t>с камеры и идентификаторы сессии. После кадр анализируется нейросетью, которая </a:t>
+            </a:r>
+            <a:r>
+              <a:rPr lang="ru-RU" b="1" dirty="0">
+                <a:latin typeface="Times New Roman" panose="02020603050405020304" pitchFamily="18" charset="0"/>
+                <a:cs typeface="Times New Roman" panose="02020603050405020304" pitchFamily="18" charset="0"/>
+              </a:rPr>
+              <a:t>определяет наличие «спагетти»</a:t>
+            </a:r>
+            <a:r>
+              <a:rPr lang="ru-RU" dirty="0">
+                <a:latin typeface="Times New Roman" panose="02020603050405020304" pitchFamily="18" charset="0"/>
+                <a:cs typeface="Times New Roman" panose="02020603050405020304" pitchFamily="18" charset="0"/>
+              </a:rPr>
+              <a:t>.</a:t>
+            </a:r>
+            <a:r>
+              <a:rPr lang="ru-RU" b="1" dirty="0">
+                <a:latin typeface="Times New Roman" panose="02020603050405020304" pitchFamily="18" charset="0"/>
+                <a:cs typeface="Times New Roman" panose="02020603050405020304" pitchFamily="18" charset="0"/>
+              </a:rPr>
+              <a:t> </a:t>
+            </a:r>
+            <a:r>
+              <a:rPr lang="ru-RU" dirty="0">
+                <a:latin typeface="Times New Roman" panose="02020603050405020304" pitchFamily="18" charset="0"/>
+                <a:cs typeface="Times New Roman" panose="02020603050405020304" pitchFamily="18" charset="0"/>
+              </a:rPr>
+              <a:t>Сервер возвращает признак дефекта и числовую оценку модели вместе с исходными идентификаторами, связывающими результат с конкретным кадром</a:t>
+            </a:r>
+          </a:p>
+        </p:txBody>
+      </p:sp>
+      <p:sp>
+        <p:nvSpPr>
+          <p:cNvPr id="3" name="TextBox 26">
+            <a:extLst>
+              <a:ext uri="{FF2B5EF4-FFF2-40B4-BE49-F238E27FC236}">
+                <a16:creationId xmlns:a16="http://schemas.microsoft.com/office/drawing/2014/main" id="{B2494F24-8111-2CAC-A358-3AE7239D4D1C}"/>
+              </a:ext>
+            </a:extLst>
+          </p:cNvPr>
+          <p:cNvSpPr>
+            <a:spLocks noGrp="1"/>
+          </p:cNvSpPr>
+          <p:nvPr/>
+        </p:nvSpPr>
+        <p:spPr>
+          <a:xfrm>
+            <a:off x="4085971" y="6009005"/>
+            <a:ext cx="4073130" cy="579120"/>
+          </a:xfrm>
+          <a:prstGeom prst="rect">
+            <a:avLst/>
+          </a:prstGeom>
+          <a:noFill/>
+        </p:spPr>
+        <p:txBody>
+          <a:bodyPr rot="0" spcFirstLastPara="0" vert="horz" wrap="square" lIns="91440" tIns="45720" rIns="91440" bIns="45720" anchor="ctr">
+            <a:noAutofit/>
+          </a:bodyPr>
+          <a:lstStyle>
+            <a:defPPr algn="l">
+              <a:defRPr sz="1600" b="0">
+                <a:solidFill>
+                  <a:srgbClr val="000000"/>
+                </a:solidFill>
+                <a:latin typeface="Times New Roman"/>
+                <a:ea typeface="Times New Roman"/>
+                <a:cs typeface="Times New Roman"/>
+              </a:defRPr>
+            </a:defPPr>
+          </a:lstStyle>
+          <a:p>
+            <a:pPr algn="ctr">
+              <a:defRPr sz="1600" b="0">
+                <a:solidFill>
+                  <a:srgbClr val="000000"/>
+                </a:solidFill>
+                <a:latin typeface="Times New Roman"/>
+                <a:ea typeface="Times New Roman"/>
+                <a:cs typeface="Times New Roman"/>
+              </a:defRPr>
+            </a:pPr>
+            <a:r>
+              <a:rPr sz="1600" b="0" dirty="0">
+                <a:solidFill>
+                  <a:srgbClr val="000000"/>
+                </a:solidFill>
+                <a:latin typeface="Times New Roman"/>
+                <a:ea typeface="Times New Roman"/>
+                <a:cs typeface="Times New Roman"/>
+              </a:rPr>
+              <a:t>Рис. </a:t>
+            </a:r>
+            <a:r>
+              <a:rPr lang="ru-RU" sz="1600" b="0" dirty="0">
+                <a:solidFill>
+                  <a:srgbClr val="000000"/>
+                </a:solidFill>
+                <a:latin typeface="Times New Roman"/>
+                <a:ea typeface="Times New Roman"/>
+                <a:cs typeface="Times New Roman"/>
+              </a:rPr>
+              <a:t>6</a:t>
+            </a:r>
+            <a:r>
+              <a:rPr sz="1600" b="0" dirty="0">
+                <a:solidFill>
+                  <a:srgbClr val="000000"/>
+                </a:solidFill>
+                <a:latin typeface="Times New Roman"/>
+                <a:ea typeface="Times New Roman"/>
+                <a:cs typeface="Times New Roman"/>
+              </a:rPr>
+              <a:t> –</a:t>
+            </a:r>
+            <a:r>
+              <a:rPr lang="ru-RU" sz="1600" b="0" dirty="0">
+                <a:solidFill>
+                  <a:srgbClr val="000000"/>
+                </a:solidFill>
+                <a:latin typeface="Times New Roman"/>
+                <a:ea typeface="Times New Roman"/>
+                <a:cs typeface="Times New Roman"/>
+              </a:rPr>
+              <a:t> Блок-схема серверной обработки кадров и определения дефектов FDM-печати</a:t>
+            </a:r>
+            <a:r>
+              <a:rPr sz="1600" b="0" dirty="0">
+                <a:solidFill>
+                  <a:srgbClr val="000000"/>
+                </a:solidFill>
+                <a:latin typeface="Times New Roman"/>
+                <a:ea typeface="Times New Roman"/>
+                <a:cs typeface="Times New Roman"/>
+              </a:rPr>
+              <a:t> </a:t>
+            </a:r>
+          </a:p>
+        </p:txBody>
+      </p:sp>
+    </p:spTree>
+    <p:extLst>
+      <p:ext uri="{BB962C8B-B14F-4D97-AF65-F5344CB8AC3E}">
+        <p14:creationId xmlns:p14="http://schemas.microsoft.com/office/powerpoint/2010/main" val="2065725557"/>
+      </p:ext>
+    </p:extLst>
+  </p:cSld>
+  <p:clrMapOvr>
+    <a:masterClrMapping/>
+  </p:clrMapOvr>
+</p:sld>
+</file>
+
+<file path=ppt/slides/slide7.xml><?xml version="1.0" encoding="utf-8"?>
+<p:sld xmlns:a="http://schemas.openxmlformats.org/drawingml/2006/main" xmlns:r="http://schemas.openxmlformats.org/officeDocument/2006/relationships" xmlns:p="http://schemas.openxmlformats.org/presentationml/2006/main">
+  <p:cSld>
+    <p:spTree>
+      <p:nvGrpSpPr>
+        <p:cNvPr id="1" name="">
+          <a:extLst>
+            <a:ext uri="{FF2B5EF4-FFF2-40B4-BE49-F238E27FC236}">
+              <a16:creationId xmlns:a16="http://schemas.microsoft.com/office/drawing/2014/main" id="{829A4193-2A96-4292-27DF-7C8F10ED51F0}"/>
+            </a:ext>
+          </a:extLst>
+        </p:cNvPr>
+        <p:cNvGrpSpPr/>
+        <p:nvPr/>
+      </p:nvGrpSpPr>
+      <p:grpSpPr>
+        <a:xfrm>
+          <a:off x="0" y="0"/>
+          <a:ext cx="0" cy="0"/>
+          <a:chOff x="0" y="0"/>
+          <a:chExt cx="0" cy="0"/>
+        </a:xfrm>
+      </p:grpSpPr>
+      <p:sp>
+        <p:nvSpPr>
+          <p:cNvPr id="2" name="Заголовок 1">
+            <a:extLst>
+              <a:ext uri="{FF2B5EF4-FFF2-40B4-BE49-F238E27FC236}">
+                <a16:creationId xmlns:a16="http://schemas.microsoft.com/office/drawing/2014/main" id="{F71B51DD-8424-3898-F322-045B44C926E8}"/>
+              </a:ext>
+            </a:extLst>
+          </p:cNvPr>
+          <p:cNvSpPr>
+            <a:spLocks noGrp="1"/>
+          </p:cNvSpPr>
+          <p:nvPr>
+            <p:ph type="title"/>
+          </p:nvPr>
+        </p:nvSpPr>
+        <p:spPr>
+          <a:xfrm>
+            <a:off x="628650" y="9098"/>
+            <a:ext cx="7886700" cy="712868"/>
+          </a:xfrm>
+        </p:spPr>
+        <p:txBody>
+          <a:bodyPr>
+            <a:normAutofit/>
+          </a:bodyPr>
+          <a:lstStyle/>
+          <a:p>
+            <a:pPr algn="ctr"/>
+            <a:r>
+              <a:rPr lang="ru-RU" sz="4000" dirty="0">
+                <a:latin typeface="Times New Roman"/>
+                <a:ea typeface="Calibri"/>
+                <a:cs typeface="Times New Roman"/>
+              </a:rPr>
+              <a:t>Обработка на принтере</a:t>
+            </a:r>
+          </a:p>
+        </p:txBody>
+      </p:sp>
+      <p:sp>
+        <p:nvSpPr>
+          <p:cNvPr id="4" name="Текстовое поле 3">
+            <a:extLst>
+              <a:ext uri="{FF2B5EF4-FFF2-40B4-BE49-F238E27FC236}">
+                <a16:creationId xmlns:a16="http://schemas.microsoft.com/office/drawing/2014/main" id="{5E8559DA-50BE-07AC-B0EB-3414FBFB6481}"/>
+              </a:ext>
+            </a:extLst>
+          </p:cNvPr>
+          <p:cNvSpPr txBox="1"/>
+          <p:nvPr/>
+        </p:nvSpPr>
+        <p:spPr>
+          <a:xfrm>
+            <a:off x="3775710" y="5640705"/>
+            <a:ext cx="309880" cy="368300"/>
+          </a:xfrm>
+          <a:prstGeom prst="rect">
+            <a:avLst/>
+          </a:prstGeom>
+          <a:noFill/>
+        </p:spPr>
+        <p:txBody>
+          <a:bodyPr wrap="none" rtlCol="0">
+            <a:spAutoFit/>
+          </a:bodyPr>
+          <a:lstStyle/>
+          <a:p>
+            <a:endParaRPr lang="ru-RU" altLang="en-US" dirty="0"/>
+          </a:p>
+        </p:txBody>
+      </p:sp>
+      <p:sp>
+        <p:nvSpPr>
+          <p:cNvPr id="5" name="Замещающий номер слайда 4">
+            <a:extLst>
+              <a:ext uri="{FF2B5EF4-FFF2-40B4-BE49-F238E27FC236}">
+                <a16:creationId xmlns:a16="http://schemas.microsoft.com/office/drawing/2014/main" id="{28EFF76E-32CA-AB56-A1FE-FC86064D66B4}"/>
+              </a:ext>
+            </a:extLst>
+          </p:cNvPr>
+          <p:cNvSpPr>
+            <a:spLocks noGrp="1"/>
+          </p:cNvSpPr>
+          <p:nvPr>
+            <p:ph type="sldNum" sz="quarter" idx="12"/>
+          </p:nvPr>
+        </p:nvSpPr>
+        <p:spPr>
+          <a:xfrm>
+            <a:off x="7088886" y="6493511"/>
+            <a:ext cx="2057400" cy="365125"/>
+          </a:xfrm>
+        </p:spPr>
+        <p:txBody>
+          <a:bodyPr/>
+          <a:lstStyle/>
+          <a:p>
+            <a:fld id="{D6ED8A53-8D2F-4011-BE06-EDB0774336BA}" type="slidenum">
+              <a:rPr lang="ru-RU" sz="2000" dirty="0" smtClean="0">
+                <a:solidFill>
+                  <a:schemeClr val="tx1"/>
+                </a:solidFill>
+                <a:latin typeface="Times New Roman"/>
+                <a:cs typeface="Times New Roman"/>
+              </a:rPr>
+              <a:t>7</a:t>
+            </a:fld>
+            <a:endParaRPr lang="ru-RU" sz="2000" dirty="0">
+              <a:solidFill>
+                <a:schemeClr val="tx1"/>
+              </a:solidFill>
+              <a:latin typeface="Times New Roman"/>
+              <a:ea typeface="Calibri"/>
+              <a:cs typeface="Times New Roman"/>
+            </a:endParaRPr>
+          </a:p>
+        </p:txBody>
+      </p:sp>
+      <p:pic>
+        <p:nvPicPr>
+          <p:cNvPr id="7" name="Рисунок 6">
+            <a:extLst>
+              <a:ext uri="{FF2B5EF4-FFF2-40B4-BE49-F238E27FC236}">
+                <a16:creationId xmlns:a16="http://schemas.microsoft.com/office/drawing/2014/main" id="{DA035444-9EBE-0F23-C21B-B713FDEC75FD}"/>
+              </a:ext>
+            </a:extLst>
+          </p:cNvPr>
+          <p:cNvPicPr>
+            <a:picLocks noChangeAspect="1"/>
+          </p:cNvPicPr>
+          <p:nvPr/>
+        </p:nvPicPr>
+        <p:blipFill>
+          <a:blip r:embed="rId3">
+            <a:extLst>
+              <a:ext uri="{28A0092B-C50C-407E-A947-70E740481C1C}">
+                <a14:useLocalDpi xmlns:a14="http://schemas.microsoft.com/office/drawing/2010/main" val="0"/>
+              </a:ext>
+            </a:extLst>
+          </a:blip>
+          <a:srcRect/>
+          <a:stretch/>
+        </p:blipFill>
+        <p:spPr>
+          <a:xfrm>
+            <a:off x="3106727" y="875407"/>
+            <a:ext cx="5905217" cy="5295358"/>
+          </a:xfrm>
+          <a:prstGeom prst="rect">
+            <a:avLst/>
+          </a:prstGeom>
+        </p:spPr>
+      </p:pic>
+      <p:sp>
+        <p:nvSpPr>
+          <p:cNvPr id="12" name="TextBox 11">
+            <a:extLst>
+              <a:ext uri="{FF2B5EF4-FFF2-40B4-BE49-F238E27FC236}">
+                <a16:creationId xmlns:a16="http://schemas.microsoft.com/office/drawing/2014/main" id="{D77D804C-EAD2-5379-2030-7517770A46AB}"/>
+              </a:ext>
+            </a:extLst>
+          </p:cNvPr>
+          <p:cNvSpPr txBox="1"/>
+          <p:nvPr/>
+        </p:nvSpPr>
+        <p:spPr>
+          <a:xfrm>
+            <a:off x="132056" y="875407"/>
+            <a:ext cx="2917990" cy="5355312"/>
+          </a:xfrm>
+          <a:prstGeom prst="rect">
+            <a:avLst/>
+          </a:prstGeom>
+          <a:noFill/>
+          <a:ln>
+            <a:solidFill>
+              <a:schemeClr val="tx1"/>
+            </a:solidFill>
+            <a:prstDash val="dash"/>
+          </a:ln>
+        </p:spPr>
+        <p:txBody>
+          <a:bodyPr rot="0" spcFirstLastPara="0" vertOverflow="overflow" horzOverflow="overflow" vert="horz" wrap="square" lIns="91440" tIns="45720" rIns="91440" bIns="45720" numCol="1" spcCol="0" rtlCol="0" fromWordArt="0" anchor="ctr" anchorCtr="0" forceAA="0" compatLnSpc="1">
+            <a:prstTxWarp prst="textNoShape">
+              <a:avLst/>
+            </a:prstTxWarp>
+            <a:spAutoFit/>
+          </a:bodyPr>
+          <a:lstStyle/>
+          <a:p>
+            <a:r>
+              <a:rPr lang="ru-RU" dirty="0">
+                <a:latin typeface="Times New Roman" panose="02020603050405020304" pitchFamily="18" charset="0"/>
+                <a:cs typeface="Times New Roman" panose="02020603050405020304" pitchFamily="18" charset="0"/>
+              </a:rPr>
+              <a:t>Единичное обнаружение дефекта не приводит к отмене задания. Локальный модуль </a:t>
+            </a:r>
+            <a:r>
+              <a:rPr lang="ru-RU" b="1" dirty="0">
+                <a:latin typeface="Times New Roman" panose="02020603050405020304" pitchFamily="18" charset="0"/>
+                <a:cs typeface="Times New Roman" panose="02020603050405020304" pitchFamily="18" charset="0"/>
+              </a:rPr>
+              <a:t>проверяет принадлежность результата </a:t>
+            </a:r>
+            <a:r>
+              <a:rPr lang="ru-RU" dirty="0">
+                <a:latin typeface="Times New Roman" panose="02020603050405020304" pitchFamily="18" charset="0"/>
+                <a:cs typeface="Times New Roman" panose="02020603050405020304" pitchFamily="18" charset="0"/>
+              </a:rPr>
+              <a:t>текущей печатной сессии и учитывает последовательные срабатывания. Отрицательный или неопределённый результат сбрасывает счётчик. </a:t>
+            </a:r>
+            <a:r>
+              <a:rPr lang="ru-RU" b="1" dirty="0">
+                <a:latin typeface="Times New Roman" panose="02020603050405020304" pitchFamily="18" charset="0"/>
+                <a:cs typeface="Times New Roman" panose="02020603050405020304" pitchFamily="18" charset="0"/>
+              </a:rPr>
+              <a:t>После трёх последовательных обнаружений</a:t>
+            </a:r>
+            <a:r>
+              <a:rPr lang="ru-RU" dirty="0">
+                <a:latin typeface="Times New Roman" panose="02020603050405020304" pitchFamily="18" charset="0"/>
+                <a:cs typeface="Times New Roman" panose="02020603050405020304" pitchFamily="18" charset="0"/>
+              </a:rPr>
+              <a:t> «спагетти» повторно проверяется активность сессии и </a:t>
+            </a:r>
+            <a:r>
+              <a:rPr lang="ru-RU" b="1" dirty="0">
+                <a:latin typeface="Times New Roman" panose="02020603050405020304" pitchFamily="18" charset="0"/>
+                <a:cs typeface="Times New Roman" panose="02020603050405020304" pitchFamily="18" charset="0"/>
+              </a:rPr>
+              <a:t>формируется команда отмены печати</a:t>
+            </a:r>
+            <a:r>
+              <a:rPr lang="ru-RU" dirty="0">
+                <a:latin typeface="Times New Roman" panose="02020603050405020304" pitchFamily="18" charset="0"/>
+                <a:cs typeface="Times New Roman" panose="02020603050405020304" pitchFamily="18" charset="0"/>
+              </a:rPr>
+              <a:t>.</a:t>
+            </a:r>
+          </a:p>
+        </p:txBody>
+      </p:sp>
+      <p:sp>
+        <p:nvSpPr>
+          <p:cNvPr id="3" name="TextBox 26">
+            <a:extLst>
+              <a:ext uri="{FF2B5EF4-FFF2-40B4-BE49-F238E27FC236}">
+                <a16:creationId xmlns:a16="http://schemas.microsoft.com/office/drawing/2014/main" id="{E5B04886-22A1-2CCD-9C65-F1ADEC0EB19F}"/>
+              </a:ext>
+            </a:extLst>
+          </p:cNvPr>
+          <p:cNvSpPr>
+            <a:spLocks noGrp="1"/>
+          </p:cNvSpPr>
+          <p:nvPr/>
+        </p:nvSpPr>
+        <p:spPr>
+          <a:xfrm>
+            <a:off x="3723995" y="6170765"/>
+            <a:ext cx="4670679" cy="579120"/>
+          </a:xfrm>
+          <a:prstGeom prst="rect">
+            <a:avLst/>
+          </a:prstGeom>
+          <a:noFill/>
+        </p:spPr>
+        <p:txBody>
+          <a:bodyPr rot="0" spcFirstLastPara="0" vert="horz" wrap="square" lIns="91440" tIns="45720" rIns="91440" bIns="45720" anchor="ctr">
+            <a:noAutofit/>
+          </a:bodyPr>
+          <a:lstStyle>
+            <a:defPPr algn="l">
+              <a:defRPr sz="1600" b="0">
+                <a:solidFill>
+                  <a:srgbClr val="000000"/>
+                </a:solidFill>
+                <a:latin typeface="Times New Roman"/>
+                <a:ea typeface="Times New Roman"/>
+                <a:cs typeface="Times New Roman"/>
+              </a:defRPr>
+            </a:defPPr>
+          </a:lstStyle>
+          <a:p>
+            <a:pPr algn="ctr">
+              <a:defRPr sz="1600" b="0">
+                <a:solidFill>
+                  <a:srgbClr val="000000"/>
+                </a:solidFill>
+                <a:latin typeface="Times New Roman"/>
+                <a:ea typeface="Times New Roman"/>
+                <a:cs typeface="Times New Roman"/>
+              </a:defRPr>
+            </a:pPr>
+            <a:r>
+              <a:rPr sz="1600" b="0" dirty="0">
+                <a:solidFill>
+                  <a:srgbClr val="000000"/>
+                </a:solidFill>
+                <a:latin typeface="Times New Roman"/>
+                <a:ea typeface="Times New Roman"/>
+                <a:cs typeface="Times New Roman"/>
+              </a:rPr>
+              <a:t>Рис. </a:t>
+            </a:r>
+            <a:r>
+              <a:rPr lang="ru-RU" sz="1600" b="0" dirty="0">
+                <a:solidFill>
+                  <a:srgbClr val="000000"/>
+                </a:solidFill>
+                <a:latin typeface="Times New Roman"/>
+                <a:ea typeface="Times New Roman"/>
+                <a:cs typeface="Times New Roman"/>
+              </a:rPr>
+              <a:t>7</a:t>
+            </a:r>
+            <a:r>
+              <a:rPr sz="1600" b="0" dirty="0">
+                <a:solidFill>
+                  <a:srgbClr val="000000"/>
+                </a:solidFill>
+                <a:latin typeface="Times New Roman"/>
+                <a:ea typeface="Times New Roman"/>
+                <a:cs typeface="Times New Roman"/>
+              </a:rPr>
+              <a:t> – </a:t>
+            </a:r>
+            <a:r>
+              <a:rPr lang="ru-RU" sz="1600" b="0" dirty="0">
+                <a:solidFill>
+                  <a:srgbClr val="000000"/>
+                </a:solidFill>
+                <a:latin typeface="Times New Roman"/>
+                <a:ea typeface="Times New Roman"/>
+                <a:cs typeface="Times New Roman"/>
+              </a:rPr>
+              <a:t>Блок-схема проверки результатов обнаружения дефекта и отмены FDM-печати</a:t>
+            </a:r>
+            <a:endParaRPr sz="1600" b="0" dirty="0">
+              <a:solidFill>
+                <a:srgbClr val="000000"/>
+              </a:solidFill>
+              <a:latin typeface="Times New Roman"/>
+              <a:ea typeface="Times New Roman"/>
+              <a:cs typeface="Times New Roman"/>
+            </a:endParaRPr>
+          </a:p>
+        </p:txBody>
+      </p:sp>
+      <p:sp>
+        <p:nvSpPr>
+          <p:cNvPr id="6" name="TextBox 26">
+            <a:extLst>
+              <a:ext uri="{FF2B5EF4-FFF2-40B4-BE49-F238E27FC236}">
+                <a16:creationId xmlns:a16="http://schemas.microsoft.com/office/drawing/2014/main" id="{8AF7D2B0-5020-6F43-9662-A5B7C34B40EB}"/>
+              </a:ext>
+            </a:extLst>
+          </p:cNvPr>
+          <p:cNvSpPr>
+            <a:spLocks noGrp="1"/>
+          </p:cNvSpPr>
+          <p:nvPr/>
+        </p:nvSpPr>
+        <p:spPr>
+          <a:xfrm>
+            <a:off x="339471" y="5651599"/>
+            <a:ext cx="4073130" cy="579120"/>
+          </a:xfrm>
+          <a:prstGeom prst="rect">
+            <a:avLst/>
+          </a:prstGeom>
+          <a:noFill/>
+        </p:spPr>
+        <p:txBody>
+          <a:bodyPr rot="0" spcFirstLastPara="0" vert="horz" wrap="square" lIns="91440" tIns="45720" rIns="91440" bIns="45720" anchor="ctr">
+            <a:noAutofit/>
+          </a:bodyPr>
+          <a:lstStyle>
+            <a:defPPr algn="l">
+              <a:defRPr sz="1600" b="0">
+                <a:solidFill>
+                  <a:srgbClr val="000000"/>
+                </a:solidFill>
+                <a:latin typeface="Times New Roman"/>
+                <a:ea typeface="Times New Roman"/>
+                <a:cs typeface="Times New Roman"/>
+              </a:defRPr>
+            </a:defPPr>
+          </a:lstStyle>
+          <a:p>
+            <a:pPr algn="ctr">
+              <a:defRPr sz="1600" b="0">
+                <a:solidFill>
+                  <a:srgbClr val="000000"/>
+                </a:solidFill>
+                <a:latin typeface="Times New Roman"/>
+                <a:ea typeface="Times New Roman"/>
+                <a:cs typeface="Times New Roman"/>
+              </a:defRPr>
+            </a:pPr>
+            <a:r>
+              <a:rPr sz="1600" b="0" dirty="0">
+                <a:solidFill>
+                  <a:srgbClr val="000000"/>
+                </a:solidFill>
+                <a:latin typeface="Times New Roman"/>
+                <a:ea typeface="Times New Roman"/>
+                <a:cs typeface="Times New Roman"/>
+              </a:rPr>
+              <a:t>Рис. </a:t>
+            </a:r>
+            <a:r>
+              <a:rPr lang="ru-RU" sz="1600" b="0" dirty="0">
+                <a:solidFill>
+                  <a:srgbClr val="000000"/>
+                </a:solidFill>
+                <a:latin typeface="Times New Roman"/>
+                <a:ea typeface="Times New Roman"/>
+                <a:cs typeface="Times New Roman"/>
+              </a:rPr>
+              <a:t>7</a:t>
+            </a:r>
+            <a:r>
+              <a:rPr sz="1600" b="0" dirty="0">
+                <a:solidFill>
+                  <a:srgbClr val="000000"/>
+                </a:solidFill>
+                <a:latin typeface="Times New Roman"/>
+                <a:ea typeface="Times New Roman"/>
+                <a:cs typeface="Times New Roman"/>
+              </a:rPr>
+              <a:t> – </a:t>
+            </a:r>
+          </a:p>
+        </p:txBody>
+      </p:sp>
+    </p:spTree>
+    <p:extLst>
+      <p:ext uri="{BB962C8B-B14F-4D97-AF65-F5344CB8AC3E}">
+        <p14:creationId xmlns:p14="http://schemas.microsoft.com/office/powerpoint/2010/main" val="1366394556"/>
+      </p:ext>
+    </p:extLst>
+  </p:cSld>
+  <p:clrMapOvr>
+    <a:masterClrMapping/>
+  </p:clrMapOvr>
+</p:sld>
+</file>
+
+<file path=ppt/slides/slide8.xml><?xml version="1.0" encoding="utf-8"?>
+<p:sld xmlns:a="http://schemas.openxmlformats.org/drawingml/2006/main" xmlns:r="http://schemas.openxmlformats.org/officeDocument/2006/relationships" xmlns:p="http://schemas.openxmlformats.org/presentationml/2006/main">
+  <p:cSld>
+    <p:spTree>
+      <p:nvGrpSpPr>
+        <p:cNvPr id="1" name="">
+          <a:extLst>
+            <a:ext uri="{FF2B5EF4-FFF2-40B4-BE49-F238E27FC236}">
+              <a16:creationId xmlns:a16="http://schemas.microsoft.com/office/drawing/2014/main" id="{829A4193-2A96-4292-27DF-7C8F10ED51F0}"/>
+            </a:ext>
+          </a:extLst>
+        </p:cNvPr>
+        <p:cNvGrpSpPr/>
+        <p:nvPr/>
+      </p:nvGrpSpPr>
+      <p:grpSpPr>
+        <a:xfrm>
+          <a:off x="0" y="0"/>
+          <a:ext cx="0" cy="0"/>
+          <a:chOff x="0" y="0"/>
+          <a:chExt cx="0" cy="0"/>
+        </a:xfrm>
+      </p:grpSpPr>
+      <p:sp>
+        <p:nvSpPr>
+          <p:cNvPr id="2" name="Заголовок 1">
+            <a:extLst>
+              <a:ext uri="{FF2B5EF4-FFF2-40B4-BE49-F238E27FC236}">
+                <a16:creationId xmlns:a16="http://schemas.microsoft.com/office/drawing/2014/main" id="{F71B51DD-8424-3898-F322-045B44C926E8}"/>
+              </a:ext>
+            </a:extLst>
+          </p:cNvPr>
+          <p:cNvSpPr>
+            <a:spLocks noGrp="1"/>
+          </p:cNvSpPr>
+          <p:nvPr>
+            <p:ph type="title"/>
+          </p:nvPr>
+        </p:nvSpPr>
+        <p:spPr>
+          <a:xfrm>
+            <a:off x="628650" y="-64546"/>
+            <a:ext cx="7886700" cy="712868"/>
+          </a:xfrm>
+        </p:spPr>
+        <p:txBody>
+          <a:bodyPr>
+            <a:normAutofit/>
+          </a:bodyPr>
+          <a:lstStyle/>
+          <a:p>
+            <a:pPr algn="ctr"/>
+            <a:r>
+              <a:rPr lang="ru-RU" sz="4000" dirty="0">
+                <a:latin typeface="Times New Roman"/>
+                <a:ea typeface="Calibri"/>
+                <a:cs typeface="Times New Roman"/>
+              </a:rPr>
+              <a:t>Электросхема 3</a:t>
+            </a:r>
+            <a:r>
+              <a:rPr lang="en-US" sz="4000" dirty="0">
+                <a:latin typeface="Times New Roman"/>
+                <a:ea typeface="Calibri"/>
+                <a:cs typeface="Times New Roman"/>
+              </a:rPr>
+              <a:t>D-</a:t>
+            </a:r>
+            <a:r>
+              <a:rPr lang="ru-RU" sz="4000" dirty="0">
+                <a:latin typeface="Times New Roman"/>
+                <a:ea typeface="Calibri"/>
+                <a:cs typeface="Times New Roman"/>
+              </a:rPr>
+              <a:t>принтера</a:t>
+            </a:r>
+          </a:p>
+        </p:txBody>
+      </p:sp>
+      <p:sp>
+        <p:nvSpPr>
+          <p:cNvPr id="4" name="Текстовое поле 3">
+            <a:extLst>
+              <a:ext uri="{FF2B5EF4-FFF2-40B4-BE49-F238E27FC236}">
+                <a16:creationId xmlns:a16="http://schemas.microsoft.com/office/drawing/2014/main" id="{5E8559DA-50BE-07AC-B0EB-3414FBFB6481}"/>
+              </a:ext>
+            </a:extLst>
+          </p:cNvPr>
+          <p:cNvSpPr txBox="1"/>
+          <p:nvPr/>
+        </p:nvSpPr>
+        <p:spPr>
+          <a:xfrm>
+            <a:off x="3775710" y="5640705"/>
+            <a:ext cx="309880" cy="368300"/>
+          </a:xfrm>
+          <a:prstGeom prst="rect">
+            <a:avLst/>
+          </a:prstGeom>
+          <a:noFill/>
+        </p:spPr>
+        <p:txBody>
+          <a:bodyPr wrap="none" rtlCol="0">
+            <a:spAutoFit/>
+          </a:bodyPr>
+          <a:lstStyle/>
+          <a:p>
+            <a:endParaRPr lang="ru-RU" altLang="en-US" dirty="0"/>
+          </a:p>
+        </p:txBody>
+      </p:sp>
+      <p:sp>
+        <p:nvSpPr>
+          <p:cNvPr id="5" name="Замещающий номер слайда 4">
+            <a:extLst>
+              <a:ext uri="{FF2B5EF4-FFF2-40B4-BE49-F238E27FC236}">
+                <a16:creationId xmlns:a16="http://schemas.microsoft.com/office/drawing/2014/main" id="{28EFF76E-32CA-AB56-A1FE-FC86064D66B4}"/>
+              </a:ext>
+            </a:extLst>
+          </p:cNvPr>
+          <p:cNvSpPr>
+            <a:spLocks noGrp="1"/>
+          </p:cNvSpPr>
+          <p:nvPr>
+            <p:ph type="sldNum" sz="quarter" idx="12"/>
+          </p:nvPr>
+        </p:nvSpPr>
+        <p:spPr>
+          <a:xfrm>
+            <a:off x="7088886" y="6493511"/>
+            <a:ext cx="2057400" cy="365125"/>
+          </a:xfrm>
+        </p:spPr>
+        <p:txBody>
+          <a:bodyPr/>
+          <a:lstStyle/>
+          <a:p>
+            <a:fld id="{D6ED8A53-8D2F-4011-BE06-EDB0774336BA}" type="slidenum">
+              <a:rPr lang="ru-RU" sz="2000" dirty="0" smtClean="0">
+                <a:solidFill>
+                  <a:schemeClr val="tx1"/>
+                </a:solidFill>
+                <a:latin typeface="Times New Roman"/>
+                <a:cs typeface="Times New Roman"/>
+              </a:rPr>
+              <a:t>8</a:t>
+            </a:fld>
+            <a:endParaRPr lang="ru-RU" sz="2000" dirty="0">
+              <a:solidFill>
+                <a:schemeClr val="tx1"/>
+              </a:solidFill>
+              <a:latin typeface="Times New Roman"/>
+              <a:ea typeface="Calibri"/>
+              <a:cs typeface="Times New Roman"/>
+            </a:endParaRPr>
+          </a:p>
+        </p:txBody>
+      </p:sp>
+      <p:pic>
+        <p:nvPicPr>
+          <p:cNvPr id="13" name="Рисунок 12">
+            <a:extLst>
+              <a:ext uri="{FF2B5EF4-FFF2-40B4-BE49-F238E27FC236}">
+                <a16:creationId xmlns:a16="http://schemas.microsoft.com/office/drawing/2014/main" id="{4E875F94-D2E7-0E2D-5267-8B670B1C8AC0}"/>
+              </a:ext>
+            </a:extLst>
+          </p:cNvPr>
+          <p:cNvPicPr>
+            <a:picLocks noChangeAspect="1"/>
+          </p:cNvPicPr>
+          <p:nvPr/>
+        </p:nvPicPr>
+        <p:blipFill>
+          <a:blip r:embed="rId3">
+            <a:extLst>
+              <a:ext uri="{96DAC541-7B7A-43D3-8B79-37D633B846F1}">
+                <asvg:svgBlip xmlns:asvg="http://schemas.microsoft.com/office/drawing/2016/SVG/main" r:embed="rId4"/>
+              </a:ext>
+            </a:extLst>
+          </a:blip>
+          <a:stretch>
+            <a:fillRect/>
+          </a:stretch>
+        </p:blipFill>
+        <p:spPr>
+          <a:xfrm>
+            <a:off x="351681" y="603944"/>
+            <a:ext cx="8440637" cy="3708649"/>
+          </a:xfrm>
+          <a:prstGeom prst="rect">
+            <a:avLst/>
+          </a:prstGeom>
+        </p:spPr>
+      </p:pic>
+      <p:sp>
+        <p:nvSpPr>
+          <p:cNvPr id="14" name="TextBox 13">
+            <a:extLst>
+              <a:ext uri="{FF2B5EF4-FFF2-40B4-BE49-F238E27FC236}">
+                <a16:creationId xmlns:a16="http://schemas.microsoft.com/office/drawing/2014/main" id="{971BDEBA-A42A-8680-F3A2-087C760E6CFE}"/>
+              </a:ext>
+            </a:extLst>
+          </p:cNvPr>
+          <p:cNvSpPr txBox="1"/>
+          <p:nvPr/>
+        </p:nvSpPr>
+        <p:spPr>
+          <a:xfrm>
+            <a:off x="254001" y="4734036"/>
+            <a:ext cx="8487517" cy="2031325"/>
+          </a:xfrm>
+          <a:prstGeom prst="rect">
+            <a:avLst/>
+          </a:prstGeom>
+          <a:noFill/>
+          <a:ln>
+            <a:solidFill>
+              <a:schemeClr val="tx1"/>
+            </a:solidFill>
+            <a:prstDash val="dash"/>
+          </a:ln>
+        </p:spPr>
+        <p:txBody>
+          <a:bodyPr rot="0" spcFirstLastPara="0" vertOverflow="overflow" horzOverflow="overflow" vert="horz" wrap="square" lIns="91440" tIns="45720" rIns="91440" bIns="45720" numCol="1" spcCol="0" rtlCol="0" fromWordArt="0" anchor="ctr" anchorCtr="0" forceAA="0" compatLnSpc="1">
+            <a:prstTxWarp prst="textNoShape">
+              <a:avLst/>
+            </a:prstTxWarp>
+            <a:spAutoFit/>
+          </a:bodyPr>
+          <a:lstStyle/>
+          <a:p>
+            <a:r>
+              <a:rPr lang="ru-RU" dirty="0">
+                <a:latin typeface="Times New Roman" panose="02020603050405020304" pitchFamily="18" charset="0"/>
+                <a:cs typeface="Times New Roman" panose="02020603050405020304" pitchFamily="18" charset="0"/>
+              </a:rPr>
+              <a:t>Для электрической части разрабатываемого 3</a:t>
+            </a:r>
+            <a:r>
+              <a:rPr lang="en-US" dirty="0">
+                <a:latin typeface="Times New Roman" panose="02020603050405020304" pitchFamily="18" charset="0"/>
+                <a:cs typeface="Times New Roman" panose="02020603050405020304" pitchFamily="18" charset="0"/>
+              </a:rPr>
+              <a:t>D-</a:t>
+            </a:r>
+            <a:r>
+              <a:rPr lang="ru-RU" dirty="0">
+                <a:latin typeface="Times New Roman" panose="02020603050405020304" pitchFamily="18" charset="0"/>
+                <a:cs typeface="Times New Roman" panose="02020603050405020304" pitchFamily="18" charset="0"/>
+              </a:rPr>
+              <a:t>принтера выбрана плата </a:t>
+            </a:r>
+            <a:r>
+              <a:rPr lang="ru-RU" b="1" dirty="0">
+                <a:latin typeface="Times New Roman" panose="02020603050405020304" pitchFamily="18" charset="0"/>
+                <a:cs typeface="Times New Roman" panose="02020603050405020304" pitchFamily="18" charset="0"/>
+              </a:rPr>
+              <a:t>MKS Robin Nano V1.2 (7) </a:t>
+            </a:r>
+            <a:r>
+              <a:rPr lang="ru-RU" dirty="0">
+                <a:latin typeface="Times New Roman" panose="02020603050405020304" pitchFamily="18" charset="0"/>
+                <a:cs typeface="Times New Roman" panose="02020603050405020304" pitchFamily="18" charset="0"/>
+              </a:rPr>
+              <a:t>и драйвера TMC2209. Плата управляет двигателями (5), нагревателями (1, 2) и вентиляторами, а также получает сигналы с датчиков (6). </a:t>
+            </a:r>
+            <a:r>
+              <a:rPr lang="ru-RU" b="1" dirty="0">
+                <a:latin typeface="Times New Roman" panose="02020603050405020304" pitchFamily="18" charset="0"/>
+                <a:cs typeface="Times New Roman" panose="02020603050405020304" pitchFamily="18" charset="0"/>
+              </a:rPr>
+              <a:t>Raspberry </a:t>
+            </a:r>
+            <a:r>
+              <a:rPr lang="ru-RU" b="1" dirty="0" err="1">
+                <a:latin typeface="Times New Roman" panose="02020603050405020304" pitchFamily="18" charset="0"/>
+                <a:cs typeface="Times New Roman" panose="02020603050405020304" pitchFamily="18" charset="0"/>
+              </a:rPr>
+              <a:t>Pi</a:t>
+            </a:r>
+            <a:r>
+              <a:rPr lang="ru-RU" b="1" dirty="0">
+                <a:latin typeface="Times New Roman" panose="02020603050405020304" pitchFamily="18" charset="0"/>
+                <a:cs typeface="Times New Roman" panose="02020603050405020304" pitchFamily="18" charset="0"/>
+              </a:rPr>
+              <a:t> 3B (10) </a:t>
+            </a:r>
+            <a:r>
+              <a:rPr lang="ru-RU" dirty="0">
+                <a:latin typeface="Times New Roman" panose="02020603050405020304" pitchFamily="18" charset="0"/>
+                <a:cs typeface="Times New Roman" panose="02020603050405020304" pitchFamily="18" charset="0"/>
+              </a:rPr>
+              <a:t>обеспечивает подключение камеры (9), сенсорного экрана (8) и обменивается данными с управляющей платой по UART. Блок питания (3) обеспечивает силовые узлы напряжением </a:t>
+            </a:r>
+            <a:r>
+              <a:rPr lang="ru-RU" b="1" dirty="0">
+                <a:latin typeface="Times New Roman" panose="02020603050405020304" pitchFamily="18" charset="0"/>
+                <a:cs typeface="Times New Roman" panose="02020603050405020304" pitchFamily="18" charset="0"/>
+              </a:rPr>
+              <a:t>24 В</a:t>
+            </a:r>
+            <a:r>
+              <a:rPr lang="ru-RU" dirty="0">
+                <a:latin typeface="Times New Roman" panose="02020603050405020304" pitchFamily="18" charset="0"/>
+                <a:cs typeface="Times New Roman" panose="02020603050405020304" pitchFamily="18" charset="0"/>
+              </a:rPr>
+              <a:t>, а DC-DC-преобразователь (4) понижает его до </a:t>
+            </a:r>
+            <a:r>
+              <a:rPr lang="ru-RU" b="1" dirty="0">
+                <a:latin typeface="Times New Roman" panose="02020603050405020304" pitchFamily="18" charset="0"/>
+                <a:cs typeface="Times New Roman" panose="02020603050405020304" pitchFamily="18" charset="0"/>
+              </a:rPr>
+              <a:t>5 В</a:t>
+            </a:r>
+            <a:r>
+              <a:rPr lang="ru-RU" dirty="0">
+                <a:latin typeface="Times New Roman" panose="02020603050405020304" pitchFamily="18" charset="0"/>
+                <a:cs typeface="Times New Roman" panose="02020603050405020304" pitchFamily="18" charset="0"/>
+              </a:rPr>
+              <a:t> для Raspberry </a:t>
+            </a:r>
+            <a:r>
+              <a:rPr lang="ru-RU" dirty="0" err="1">
+                <a:latin typeface="Times New Roman" panose="02020603050405020304" pitchFamily="18" charset="0"/>
+                <a:cs typeface="Times New Roman" panose="02020603050405020304" pitchFamily="18" charset="0"/>
+              </a:rPr>
+              <a:t>Pi</a:t>
+            </a:r>
+            <a:r>
+              <a:rPr lang="ru-RU" dirty="0">
+                <a:latin typeface="Times New Roman" panose="02020603050405020304" pitchFamily="18" charset="0"/>
+                <a:cs typeface="Times New Roman" panose="02020603050405020304" pitchFamily="18" charset="0"/>
+              </a:rPr>
+              <a:t> и подключённой периферии.</a:t>
+            </a:r>
+          </a:p>
+        </p:txBody>
+      </p:sp>
+      <p:sp>
+        <p:nvSpPr>
+          <p:cNvPr id="16" name="TextBox 26">
+            <a:extLst>
+              <a:ext uri="{FF2B5EF4-FFF2-40B4-BE49-F238E27FC236}">
+                <a16:creationId xmlns:a16="http://schemas.microsoft.com/office/drawing/2014/main" id="{6C4BDD25-6E44-8F04-93A8-3BDF96080B11}"/>
+              </a:ext>
+            </a:extLst>
+          </p:cNvPr>
+          <p:cNvSpPr>
+            <a:spLocks noGrp="1"/>
+          </p:cNvSpPr>
+          <p:nvPr/>
+        </p:nvSpPr>
+        <p:spPr>
+          <a:xfrm>
+            <a:off x="1313146" y="4181848"/>
+            <a:ext cx="6517706" cy="579120"/>
+          </a:xfrm>
+          <a:prstGeom prst="rect">
+            <a:avLst/>
+          </a:prstGeom>
+          <a:noFill/>
+        </p:spPr>
+        <p:txBody>
+          <a:bodyPr rot="0" spcFirstLastPara="0" vert="horz" wrap="square" lIns="91440" tIns="45720" rIns="91440" bIns="45720" anchor="ctr">
+            <a:noAutofit/>
+          </a:bodyPr>
+          <a:lstStyle>
+            <a:defPPr algn="l">
+              <a:defRPr sz="1600" b="0">
+                <a:solidFill>
+                  <a:srgbClr val="000000"/>
+                </a:solidFill>
+                <a:latin typeface="Times New Roman"/>
+                <a:ea typeface="Times New Roman"/>
+                <a:cs typeface="Times New Roman"/>
+              </a:defRPr>
+            </a:defPPr>
+          </a:lstStyle>
+          <a:p>
+            <a:pPr algn="ctr">
+              <a:defRPr sz="1600" b="0">
+                <a:solidFill>
+                  <a:srgbClr val="000000"/>
+                </a:solidFill>
+                <a:latin typeface="Times New Roman"/>
+                <a:ea typeface="Times New Roman"/>
+                <a:cs typeface="Times New Roman"/>
+              </a:defRPr>
+            </a:pPr>
+            <a:r>
+              <a:rPr lang="ru-RU" sz="1600" b="0" dirty="0">
+                <a:solidFill>
+                  <a:srgbClr val="000000"/>
+                </a:solidFill>
+                <a:latin typeface="Times New Roman"/>
+                <a:ea typeface="Times New Roman"/>
+                <a:cs typeface="Times New Roman"/>
+              </a:rPr>
+              <a:t>Рис. </a:t>
+            </a:r>
+            <a:r>
+              <a:rPr lang="ru-RU" sz="1600" dirty="0">
+                <a:solidFill>
+                  <a:srgbClr val="000000"/>
+                </a:solidFill>
+                <a:latin typeface="Times New Roman"/>
+                <a:ea typeface="Times New Roman"/>
+                <a:cs typeface="Times New Roman"/>
+              </a:rPr>
+              <a:t>8</a:t>
+            </a:r>
+            <a:r>
+              <a:rPr lang="ru-RU" sz="1600" b="0" dirty="0">
+                <a:solidFill>
+                  <a:srgbClr val="000000"/>
+                </a:solidFill>
+                <a:latin typeface="Times New Roman"/>
+                <a:ea typeface="Times New Roman"/>
+                <a:cs typeface="Times New Roman"/>
+              </a:rPr>
+              <a:t> – Схема электрической коммутации компонентов 3D-принтера </a:t>
+            </a:r>
+          </a:p>
+        </p:txBody>
+      </p:sp>
+    </p:spTree>
+    <p:extLst>
+      <p:ext uri="{BB962C8B-B14F-4D97-AF65-F5344CB8AC3E}">
+        <p14:creationId xmlns:p14="http://schemas.microsoft.com/office/powerpoint/2010/main" val="128376505"/>
+      </p:ext>
+    </p:extLst>
+  </p:cSld>
+  <p:clrMapOvr>
+    <a:masterClrMapping/>
+  </p:clrMapOvr>
+</p:sld>
+</file>
+
+<file path=ppt/slides/slide9.xml><?xml version="1.0" encoding="utf-8"?>
+<p:sld xmlns:a="http://schemas.openxmlformats.org/drawingml/2006/main" xmlns:r="http://schemas.openxmlformats.org/officeDocument/2006/relationships" xmlns:p="http://schemas.openxmlformats.org/presentationml/2006/main">
+  <p:cSld>
+    <p:spTree>
+      <p:nvGrpSpPr>
+        <p:cNvPr id="1" name="">
+          <a:extLst>
+            <a:ext uri="{FF2B5EF4-FFF2-40B4-BE49-F238E27FC236}">
+              <a16:creationId xmlns:a16="http://schemas.microsoft.com/office/drawing/2014/main" id="{829A4193-2A96-4292-27DF-7C8F10ED51F0}"/>
+            </a:ext>
+          </a:extLst>
+        </p:cNvPr>
+        <p:cNvGrpSpPr/>
+        <p:nvPr/>
+      </p:nvGrpSpPr>
+      <p:grpSpPr>
+        <a:xfrm>
+          <a:off x="0" y="0"/>
+          <a:ext cx="0" cy="0"/>
+          <a:chOff x="0" y="0"/>
+          <a:chExt cx="0" cy="0"/>
+        </a:xfrm>
+      </p:grpSpPr>
+      <p:sp>
+        <p:nvSpPr>
+          <p:cNvPr id="2" name="Заголовок 1">
+            <a:extLst>
+              <a:ext uri="{FF2B5EF4-FFF2-40B4-BE49-F238E27FC236}">
+                <a16:creationId xmlns:a16="http://schemas.microsoft.com/office/drawing/2014/main" id="{F71B51DD-8424-3898-F322-045B44C926E8}"/>
+              </a:ext>
+            </a:extLst>
+          </p:cNvPr>
+          <p:cNvSpPr>
+            <a:spLocks noGrp="1"/>
+          </p:cNvSpPr>
+          <p:nvPr>
+            <p:ph type="title"/>
+          </p:nvPr>
+        </p:nvSpPr>
+        <p:spPr>
+          <a:xfrm>
+            <a:off x="628650" y="-64546"/>
+            <a:ext cx="7886700" cy="712868"/>
+          </a:xfrm>
+        </p:spPr>
+        <p:txBody>
+          <a:bodyPr>
+            <a:normAutofit fontScale="90000"/>
+          </a:bodyPr>
+          <a:lstStyle/>
+          <a:p>
+            <a:pPr algn="ctr"/>
+            <a:r>
+              <a:rPr lang="ru-RU" dirty="0">
+                <a:latin typeface="Times New Roman"/>
+                <a:ea typeface="Calibri"/>
+                <a:cs typeface="Times New Roman"/>
+              </a:rPr>
+              <a:t>Тестирование на реальной печати</a:t>
+            </a:r>
+          </a:p>
+        </p:txBody>
+      </p:sp>
+      <p:sp>
+        <p:nvSpPr>
+          <p:cNvPr id="4" name="Текстовое поле 3">
+            <a:extLst>
+              <a:ext uri="{FF2B5EF4-FFF2-40B4-BE49-F238E27FC236}">
+                <a16:creationId xmlns:a16="http://schemas.microsoft.com/office/drawing/2014/main" id="{5E8559DA-50BE-07AC-B0EB-3414FBFB6481}"/>
+              </a:ext>
+            </a:extLst>
+          </p:cNvPr>
+          <p:cNvSpPr txBox="1"/>
+          <p:nvPr/>
+        </p:nvSpPr>
+        <p:spPr>
+          <a:xfrm>
+            <a:off x="3775710" y="5640705"/>
+            <a:ext cx="309880" cy="368300"/>
+          </a:xfrm>
+          <a:prstGeom prst="rect">
+            <a:avLst/>
+          </a:prstGeom>
+          <a:noFill/>
+        </p:spPr>
+        <p:txBody>
+          <a:bodyPr wrap="none" rtlCol="0">
+            <a:spAutoFit/>
+          </a:bodyPr>
+          <a:lstStyle/>
+          <a:p>
+            <a:endParaRPr lang="ru-RU" altLang="en-US" dirty="0"/>
+          </a:p>
+        </p:txBody>
+      </p:sp>
+      <p:sp>
+        <p:nvSpPr>
+          <p:cNvPr id="5" name="Замещающий номер слайда 4">
+            <a:extLst>
+              <a:ext uri="{FF2B5EF4-FFF2-40B4-BE49-F238E27FC236}">
+                <a16:creationId xmlns:a16="http://schemas.microsoft.com/office/drawing/2014/main" id="{28EFF76E-32CA-AB56-A1FE-FC86064D66B4}"/>
+              </a:ext>
+            </a:extLst>
+          </p:cNvPr>
+          <p:cNvSpPr>
+            <a:spLocks noGrp="1"/>
+          </p:cNvSpPr>
+          <p:nvPr>
+            <p:ph type="sldNum" sz="quarter" idx="12"/>
+          </p:nvPr>
+        </p:nvSpPr>
+        <p:spPr>
+          <a:xfrm>
+            <a:off x="7088886" y="6493511"/>
+            <a:ext cx="2057400" cy="365125"/>
+          </a:xfrm>
+        </p:spPr>
+        <p:txBody>
+          <a:bodyPr/>
+          <a:lstStyle/>
+          <a:p>
+            <a:fld id="{D6ED8A53-8D2F-4011-BE06-EDB0774336BA}" type="slidenum">
+              <a:rPr lang="ru-RU" sz="2000" dirty="0" smtClean="0">
+                <a:solidFill>
+                  <a:schemeClr val="tx1"/>
+                </a:solidFill>
+                <a:latin typeface="Times New Roman"/>
+                <a:cs typeface="Times New Roman"/>
+              </a:rPr>
+              <a:t>9</a:t>
+            </a:fld>
+            <a:endParaRPr lang="ru-RU" sz="2000" dirty="0">
               <a:solidFill>
                 <a:schemeClr val="tx1"/>
               </a:solidFill>
@@ -5671,21 +9641,20 @@
                 <a:latin typeface="Times New Roman" panose="02020603050405020304" pitchFamily="18" charset="0"/>
                 <a:cs typeface="Times New Roman" panose="02020603050405020304" pitchFamily="18" charset="0"/>
               </a:rPr>
-              <a:t>В процессе печати после запуска контролируемого сбоя, модель постепенно увеличивала оценку обнаружения «спагетти». Через </a:t>
-            </a:r>
-            <a:r>
-              <a:rPr lang="ru-RU" b="1" dirty="0" err="1">
-                <a:latin typeface="Times New Roman" panose="02020603050405020304" pitchFamily="18" charset="0"/>
-                <a:cs typeface="Times New Roman" panose="02020603050405020304" pitchFamily="18" charset="0"/>
-              </a:rPr>
-              <a:t>Через</a:t>
-            </a:r>
+              <a:t>В процессе печати после запуска контролируемого сбоя, модель постепенно увеличивала оценку обнаружения «спагетти». </a:t>
+            </a:r>
+            <a:br>
+              <a:rPr lang="ru-RU" dirty="0">
+                <a:latin typeface="Times New Roman" panose="02020603050405020304" pitchFamily="18" charset="0"/>
+                <a:cs typeface="Times New Roman" panose="02020603050405020304" pitchFamily="18" charset="0"/>
+              </a:rPr>
+            </a:br>
             <a:r>
               <a:rPr lang="ru-RU" b="1" dirty="0">
                 <a:latin typeface="Times New Roman" panose="02020603050405020304" pitchFamily="18" charset="0"/>
                 <a:cs typeface="Times New Roman" panose="02020603050405020304" pitchFamily="18" charset="0"/>
               </a:rPr>
-              <a:t> 3 мин 21 с,</a:t>
+              <a:t>Через 3 мин 21 с,</a:t>
             </a:r>
             <a:r>
               <a:rPr lang="ru-RU" dirty="0">
@@ -6329,4890 +10298,6 @@
     <p:extLst>
       <p:ext uri="{BB962C8B-B14F-4D97-AF65-F5344CB8AC3E}">
         <p14:creationId xmlns:p14="http://schemas.microsoft.com/office/powerpoint/2010/main" val="3237985341"/>
-      </p:ext>
-    </p:extLst>
-  </p:cSld>
-  <p:clrMapOvr>
-    <a:masterClrMapping/>
-  </p:clrMapOvr>
-</p:sld>
-</file>
-
-<file path=ppt/slides/slide11.xml><?xml version="1.0" encoding="utf-8"?>
-<p:sld xmlns:a="http://schemas.openxmlformats.org/drawingml/2006/main" xmlns:r="http://schemas.openxmlformats.org/officeDocument/2006/relationships" xmlns:p="http://schemas.openxmlformats.org/presentationml/2006/main">
-  <p:cSld>
-    <p:spTree>
-      <p:nvGrpSpPr>
-        <p:cNvPr id="1" name=""/>
-        <p:cNvGrpSpPr/>
-        <p:nvPr/>
-      </p:nvGrpSpPr>
-      <p:grpSpPr>
-        <a:xfrm>
-          <a:off x="0" y="0"/>
-          <a:ext cx="0" cy="0"/>
-          <a:chOff x="0" y="0"/>
-          <a:chExt cx="0" cy="0"/>
-        </a:xfrm>
-      </p:grpSpPr>
-      <p:sp>
-        <p:nvSpPr>
-          <p:cNvPr id="3" name="Объект 2"/>
-          <p:cNvSpPr>
-            <a:spLocks noGrp="1"/>
-          </p:cNvSpPr>
-          <p:nvPr>
-            <p:ph idx="1"/>
-          </p:nvPr>
-        </p:nvSpPr>
-        <p:spPr>
-          <a:xfrm>
-            <a:off x="200634" y="1034005"/>
-            <a:ext cx="8736990" cy="5827551"/>
-          </a:xfrm>
-        </p:spPr>
-        <p:txBody>
-          <a:bodyPr vert="horz" lIns="91440" tIns="45720" rIns="91440" bIns="45720" rtlCol="0" anchor="ctr">
-            <a:noAutofit/>
-          </a:bodyPr>
-          <a:lstStyle/>
-          <a:p>
-            <a:pPr marL="0" indent="0">
-              <a:lnSpc>
-                <a:spcPct val="100000"/>
-              </a:lnSpc>
-              <a:buNone/>
-            </a:pPr>
-            <a:r>
-              <a:rPr lang="ru-RU" sz="2000" dirty="0">
-                <a:latin typeface="Times New Roman" panose="02020603050405020304" pitchFamily="18" charset="0"/>
-                <a:cs typeface="Times New Roman" panose="02020603050405020304" pitchFamily="18" charset="0"/>
-              </a:rPr>
-              <a:t>	Цель и задачи моей научно-исследовательской работы выполнены:</a:t>
-            </a:r>
-            <a:endParaRPr lang="ru-RU" sz="2000" dirty="0">
-              <a:latin typeface="Times New Roman" panose="02020603050405020304" pitchFamily="18" charset="0"/>
-              <a:ea typeface="Calibri"/>
-              <a:cs typeface="Times New Roman" panose="02020603050405020304" pitchFamily="18" charset="0"/>
-            </a:endParaRPr>
-          </a:p>
-          <a:p>
-            <a:pPr>
-              <a:lnSpc>
-                <a:spcPct val="100000"/>
-              </a:lnSpc>
-            </a:pPr>
-            <a:r>
-              <a:rPr lang="ru-RU" sz="2000" dirty="0">
-                <a:solidFill>
-                  <a:srgbClr val="000000"/>
-                </a:solidFill>
-                <a:latin typeface="Times New Roman" panose="02020603050405020304" pitchFamily="18" charset="0"/>
-                <a:cs typeface="Times New Roman" panose="02020603050405020304" pitchFamily="18" charset="0"/>
-              </a:rPr>
-              <a:t>Изучены дефекты FDM-печати и выбран целевого дефекта для автоматического обнаружения.</a:t>
-            </a:r>
-          </a:p>
-          <a:p>
-            <a:pPr>
-              <a:lnSpc>
-                <a:spcPct val="100000"/>
-              </a:lnSpc>
-            </a:pPr>
-            <a:r>
-              <a:rPr lang="ru-RU" sz="2000" dirty="0">
-                <a:solidFill>
-                  <a:srgbClr val="000000"/>
-                </a:solidFill>
-                <a:latin typeface="Times New Roman" panose="02020603050405020304" pitchFamily="18" charset="0"/>
-                <a:cs typeface="Times New Roman" panose="02020603050405020304" pitchFamily="18" charset="0"/>
-              </a:rPr>
-              <a:t>Сформирован датасет: произведен поиск данных, балансировка классов, </a:t>
-            </a:r>
-            <a:r>
-              <a:rPr lang="ru-RU" sz="2000" dirty="0" err="1">
-                <a:solidFill>
-                  <a:srgbClr val="000000"/>
-                </a:solidFill>
-                <a:latin typeface="Times New Roman" panose="02020603050405020304" pitchFamily="18" charset="0"/>
-                <a:cs typeface="Times New Roman" panose="02020603050405020304" pitchFamily="18" charset="0"/>
-              </a:rPr>
-              <a:t>аугментирование</a:t>
-            </a:r>
-            <a:r>
-              <a:rPr lang="ru-RU" sz="2000" dirty="0">
-                <a:solidFill>
-                  <a:srgbClr val="000000"/>
-                </a:solidFill>
-                <a:latin typeface="Times New Roman" panose="02020603050405020304" pitchFamily="18" charset="0"/>
-                <a:cs typeface="Times New Roman" panose="02020603050405020304" pitchFamily="18" charset="0"/>
-              </a:rPr>
-              <a:t>, разделение на обучающую и тестовую выборки; </a:t>
-            </a:r>
-          </a:p>
-          <a:p>
-            <a:pPr marL="214630" indent="-214630">
-              <a:lnSpc>
-                <a:spcPct val="100000"/>
-              </a:lnSpc>
-              <a:spcBef>
-                <a:spcPts val="0"/>
-              </a:spcBef>
-              <a:buFont typeface="Arial,Sans-Serif" panose="020B0604020202020204" pitchFamily="34" charset="0"/>
-            </a:pPr>
-            <a:r>
-              <a:rPr lang="ru-RU" sz="2000" dirty="0">
-                <a:latin typeface="Times New Roman" panose="02020603050405020304" pitchFamily="18" charset="0"/>
-                <a:ea typeface="Calibri"/>
-                <a:cs typeface="Times New Roman" panose="02020603050405020304" pitchFamily="18" charset="0"/>
-              </a:rPr>
-              <a:t>Обучена нейронная сеть для распознавания дефекта «Спагетти» на основе изображений печатей; </a:t>
-            </a:r>
-            <a:endParaRPr lang="en-US" sz="2000" dirty="0">
-              <a:latin typeface="Times New Roman" panose="02020603050405020304" pitchFamily="18" charset="0"/>
-              <a:ea typeface="Calibri"/>
-              <a:cs typeface="Times New Roman" panose="02020603050405020304" pitchFamily="18" charset="0"/>
-            </a:endParaRPr>
-          </a:p>
-          <a:p>
-            <a:pPr>
-              <a:lnSpc>
-                <a:spcPct val="100000"/>
-              </a:lnSpc>
-            </a:pPr>
-            <a:r>
-              <a:rPr lang="ru-RU" sz="2000" dirty="0">
-                <a:latin typeface="Times New Roman" panose="02020603050405020304" pitchFamily="18" charset="0"/>
-                <a:ea typeface="Calibri"/>
-                <a:cs typeface="Times New Roman" panose="02020603050405020304" pitchFamily="18" charset="0"/>
-              </a:rPr>
-              <a:t>Разработан, собран и отлажен аппаратно-программный комплекса экспериментального 3D-принтера.</a:t>
-            </a:r>
-            <a:endParaRPr lang="ru-RU" sz="2000" dirty="0">
-              <a:solidFill>
-                <a:srgbClr val="000000"/>
-              </a:solidFill>
-              <a:latin typeface="Times New Roman" panose="02020603050405020304" pitchFamily="18" charset="0"/>
-              <a:cs typeface="Times New Roman" panose="02020603050405020304" pitchFamily="18" charset="0"/>
-            </a:endParaRPr>
-          </a:p>
-          <a:p>
-            <a:pPr>
-              <a:lnSpc>
-                <a:spcPct val="100000"/>
-              </a:lnSpc>
-            </a:pPr>
-            <a:r>
-              <a:rPr lang="ru-RU" sz="2000" dirty="0">
-                <a:latin typeface="Times New Roman" panose="02020603050405020304" pitchFamily="18" charset="0"/>
-                <a:cs typeface="Times New Roman" panose="02020603050405020304" pitchFamily="18" charset="0"/>
-              </a:rPr>
-              <a:t>Проведен тестовый запуск работы системы контроля и 3D-принтера в процессе печати.</a:t>
-            </a:r>
-          </a:p>
-          <a:p>
-            <a:pPr>
-              <a:lnSpc>
-                <a:spcPct val="100000"/>
-              </a:lnSpc>
-            </a:pPr>
-            <a:endParaRPr lang="ru-RU" sz="2000" dirty="0">
-              <a:latin typeface="Times New Roman" panose="02020603050405020304" pitchFamily="18" charset="0"/>
-              <a:cs typeface="Times New Roman" panose="02020603050405020304" pitchFamily="18" charset="0"/>
-            </a:endParaRPr>
-          </a:p>
-          <a:p>
-            <a:pPr marL="0" indent="0">
-              <a:lnSpc>
-                <a:spcPct val="100000"/>
-              </a:lnSpc>
-              <a:buNone/>
-            </a:pPr>
-            <a:r>
-              <a:rPr lang="ru-RU" sz="2000" dirty="0">
-                <a:latin typeface="Times New Roman" panose="02020603050405020304" pitchFamily="18" charset="0"/>
-                <a:cs typeface="Times New Roman" panose="02020603050405020304" pitchFamily="18" charset="0"/>
-              </a:rPr>
-              <a:t>	Цель и задачи моей научно-исследовательской работы выполнены:</a:t>
-            </a:r>
-            <a:endParaRPr lang="ru-RU" sz="2000" dirty="0">
-              <a:latin typeface="Times New Roman" panose="02020603050405020304" pitchFamily="18" charset="0"/>
-              <a:ea typeface="Calibri"/>
-              <a:cs typeface="Times New Roman" panose="02020603050405020304" pitchFamily="18" charset="0"/>
-            </a:endParaRPr>
-          </a:p>
-          <a:p>
-            <a:pPr>
-              <a:lnSpc>
-                <a:spcPct val="100000"/>
-              </a:lnSpc>
-            </a:pPr>
-            <a:endParaRPr lang="ru-RU" sz="2000" dirty="0">
-              <a:latin typeface="Times New Roman" panose="02020603050405020304" pitchFamily="18" charset="0"/>
-              <a:cs typeface="Times New Roman" panose="02020603050405020304" pitchFamily="18" charset="0"/>
-            </a:endParaRPr>
-          </a:p>
-          <a:p>
-            <a:pPr>
-              <a:lnSpc>
-                <a:spcPct val="100000"/>
-              </a:lnSpc>
-            </a:pPr>
-            <a:endParaRPr lang="ru-RU" sz="2000" dirty="0">
-              <a:latin typeface="Times New Roman" panose="02020603050405020304" pitchFamily="18" charset="0"/>
-              <a:cs typeface="Times New Roman" panose="02020603050405020304" pitchFamily="18" charset="0"/>
-            </a:endParaRPr>
-          </a:p>
-          <a:p>
-            <a:pPr>
-              <a:lnSpc>
-                <a:spcPct val="100000"/>
-              </a:lnSpc>
-            </a:pPr>
-            <a:endParaRPr lang="ru-RU" sz="2000" dirty="0">
-              <a:latin typeface="Times New Roman" panose="02020603050405020304" pitchFamily="18" charset="0"/>
-              <a:ea typeface="Calibri"/>
-              <a:cs typeface="Times New Roman" panose="02020603050405020304" pitchFamily="18" charset="0"/>
-            </a:endParaRPr>
-          </a:p>
-        </p:txBody>
-      </p:sp>
-      <p:sp>
-        <p:nvSpPr>
-          <p:cNvPr id="4" name="Замещающий номер слайда 3"/>
-          <p:cNvSpPr>
-            <a:spLocks noGrp="1"/>
-          </p:cNvSpPr>
-          <p:nvPr>
-            <p:ph type="sldNum" sz="quarter" idx="12"/>
-          </p:nvPr>
-        </p:nvSpPr>
-        <p:spPr>
-          <a:xfrm>
-            <a:off x="7088886" y="6493511"/>
-            <a:ext cx="2057400" cy="365125"/>
-          </a:xfrm>
-        </p:spPr>
-        <p:txBody>
-          <a:bodyPr/>
-          <a:lstStyle/>
-          <a:p>
-            <a:fld id="{D6ED8A53-8D2F-4011-BE06-EDB0774336BA}" type="slidenum">
-              <a:rPr lang="ru-RU" sz="2000" dirty="0" smtClean="0">
-                <a:solidFill>
-                  <a:schemeClr val="tx1"/>
-                </a:solidFill>
-                <a:latin typeface="Times New Roman"/>
-                <a:cs typeface="Times New Roman"/>
-              </a:rPr>
-              <a:t>11</a:t>
-            </a:fld>
-            <a:endParaRPr lang="ru-RU" sz="2000">
-              <a:solidFill>
-                <a:schemeClr val="tx1"/>
-              </a:solidFill>
-              <a:latin typeface="Times New Roman"/>
-              <a:cs typeface="Times New Roman"/>
-            </a:endParaRPr>
-          </a:p>
-        </p:txBody>
-      </p:sp>
-      <p:sp>
-        <p:nvSpPr>
-          <p:cNvPr id="6" name="Заголовок 1">
-            <a:extLst>
-              <a:ext uri="{FF2B5EF4-FFF2-40B4-BE49-F238E27FC236}">
-                <a16:creationId xmlns:a16="http://schemas.microsoft.com/office/drawing/2014/main" id="{A5D6DF51-0B62-79A6-6D5B-9EBEFC4103B7}"/>
-              </a:ext>
-            </a:extLst>
-          </p:cNvPr>
-          <p:cNvSpPr txBox="1">
-            <a:spLocks/>
-          </p:cNvSpPr>
-          <p:nvPr/>
-        </p:nvSpPr>
-        <p:spPr>
-          <a:xfrm>
-            <a:off x="701718" y="3637"/>
-            <a:ext cx="7886700" cy="712868"/>
-          </a:xfrm>
-          <a:prstGeom prst="rect">
-            <a:avLst/>
-          </a:prstGeom>
-        </p:spPr>
-        <p:txBody>
-          <a:bodyPr vert="horz" lIns="91440" tIns="45720" rIns="91440" bIns="45720" rtlCol="0" anchor="ctr">
-            <a:normAutofit/>
-          </a:bodyPr>
-          <a:lstStyle>
-            <a:lvl1pPr algn="l" defTabSz="914400" rtl="0" eaLnBrk="1" latinLnBrk="0" hangingPunct="1">
-              <a:lnSpc>
-                <a:spcPct val="90000"/>
-              </a:lnSpc>
-              <a:spcBef>
-                <a:spcPct val="0"/>
-              </a:spcBef>
-              <a:buNone/>
-              <a:defRPr sz="4400" kern="1200">
-                <a:solidFill>
-                  <a:schemeClr val="tx1"/>
-                </a:solidFill>
-                <a:latin typeface="+mj-lt"/>
-                <a:ea typeface="+mj-ea"/>
-                <a:cs typeface="+mj-cs"/>
-              </a:defRPr>
-            </a:lvl1pPr>
-          </a:lstStyle>
-          <a:p>
-            <a:pPr algn="ctr"/>
-            <a:r>
-              <a:rPr lang="ru-RU">
-                <a:latin typeface="Times New Roman"/>
-                <a:ea typeface="Calibri"/>
-                <a:cs typeface="Times New Roman"/>
-              </a:rPr>
-              <a:t>Заключение</a:t>
-            </a:r>
-            <a:endParaRPr lang="ru-RU">
-              <a:ea typeface="Calibri Light"/>
-              <a:cs typeface="Calibri Light"/>
-            </a:endParaRPr>
-          </a:p>
-        </p:txBody>
-      </p:sp>
-    </p:spTree>
-  </p:cSld>
-  <p:clrMapOvr>
-    <a:masterClrMapping/>
-  </p:clrMapOvr>
-</p:sld>
-</file>
-
-<file path=ppt/slides/slide2.xml><?xml version="1.0" encoding="utf-8"?>
-<p:sld xmlns:a="http://schemas.openxmlformats.org/drawingml/2006/main" xmlns:r="http://schemas.openxmlformats.org/officeDocument/2006/relationships" xmlns:p="http://schemas.openxmlformats.org/presentationml/2006/main">
-  <p:cSld>
-    <p:spTree>
-      <p:nvGrpSpPr>
-        <p:cNvPr id="1" name=""/>
-        <p:cNvGrpSpPr/>
-        <p:nvPr/>
-      </p:nvGrpSpPr>
-      <p:grpSpPr>
-        <a:xfrm>
-          <a:off x="0" y="0"/>
-          <a:ext cx="0" cy="0"/>
-          <a:chOff x="0" y="0"/>
-          <a:chExt cx="0" cy="0"/>
-        </a:xfrm>
-      </p:grpSpPr>
-      <p:sp>
-        <p:nvSpPr>
-          <p:cNvPr id="2" name="Заголовок 1"/>
-          <p:cNvSpPr>
-            <a:spLocks noGrp="1"/>
-          </p:cNvSpPr>
-          <p:nvPr>
-            <p:ph type="title"/>
-          </p:nvPr>
-        </p:nvSpPr>
-        <p:spPr>
-          <a:xfrm>
-            <a:off x="633432" y="-5479"/>
-            <a:ext cx="7877136" cy="758162"/>
-          </a:xfrm>
-        </p:spPr>
-        <p:txBody>
-          <a:bodyPr>
-            <a:normAutofit/>
-          </a:bodyPr>
-          <a:lstStyle/>
-          <a:p>
-            <a:pPr algn="ctr"/>
-            <a:r>
-              <a:rPr lang="ru-RU" sz="3600" b="1" dirty="0">
-                <a:latin typeface="Times New Roman" panose="02020603050405020304" pitchFamily="18" charset="0"/>
-                <a:cs typeface="Times New Roman" panose="02020603050405020304" pitchFamily="18" charset="0"/>
-              </a:rPr>
-              <a:t>Цель работы</a:t>
-            </a:r>
-            <a:endParaRPr lang="ru-RU" dirty="0">
-              <a:latin typeface="Times New Roman" panose="02020603050405020304" pitchFamily="18" charset="0"/>
-              <a:cs typeface="Times New Roman" panose="02020603050405020304" pitchFamily="18" charset="0"/>
-            </a:endParaRPr>
-          </a:p>
-        </p:txBody>
-      </p:sp>
-      <p:sp>
-        <p:nvSpPr>
-          <p:cNvPr id="3" name="Объект 2"/>
-          <p:cNvSpPr>
-            <a:spLocks noGrp="1"/>
-          </p:cNvSpPr>
-          <p:nvPr>
-            <p:ph idx="1"/>
-          </p:nvPr>
-        </p:nvSpPr>
-        <p:spPr>
-          <a:xfrm>
-            <a:off x="625440" y="752683"/>
-            <a:ext cx="7885128" cy="1170901"/>
-          </a:xfrm>
-        </p:spPr>
-        <p:txBody>
-          <a:bodyPr vert="horz" lIns="91440" tIns="45720" rIns="91440" bIns="45720" rtlCol="0" anchor="t">
-            <a:noAutofit/>
-          </a:bodyPr>
-          <a:lstStyle/>
-          <a:p>
-            <a:pPr marL="0" indent="0" algn="just">
-              <a:buNone/>
-            </a:pPr>
-            <a:r>
-              <a:rPr lang="ru-RU" sz="2400" dirty="0">
-                <a:latin typeface="Times New Roman" panose="02020603050405020304" pitchFamily="18" charset="0"/>
-                <a:cs typeface="Times New Roman" panose="02020603050405020304" pitchFamily="18" charset="0"/>
-              </a:rPr>
-              <a:t>Цель работы — разработка и тестирование версии 3D-принтера с системой обнаружения дефектов в процессе печати и механизмом своевременного реагирования.</a:t>
-            </a:r>
-            <a:endParaRPr lang="ru-RU" dirty="0">
-              <a:latin typeface="Times New Roman" panose="02020603050405020304" pitchFamily="18" charset="0"/>
-              <a:cs typeface="Times New Roman" panose="02020603050405020304" pitchFamily="18" charset="0"/>
-            </a:endParaRPr>
-          </a:p>
-        </p:txBody>
-      </p:sp>
-      <p:sp>
-        <p:nvSpPr>
-          <p:cNvPr id="4" name="TextBox 3"/>
-          <p:cNvSpPr txBox="1"/>
-          <p:nvPr/>
-        </p:nvSpPr>
-        <p:spPr>
-          <a:xfrm>
-            <a:off x="644087" y="1960801"/>
-            <a:ext cx="7878196" cy="646331"/>
-          </a:xfrm>
-          <a:prstGeom prst="rect">
-            <a:avLst/>
-          </a:prstGeom>
-          <a:noFill/>
-        </p:spPr>
-        <p:txBody>
-          <a:bodyPr wrap="square" lIns="91440" tIns="45720" rIns="91440" bIns="45720" rtlCol="0" anchor="t">
-            <a:spAutoFit/>
-          </a:bodyPr>
-          <a:lstStyle/>
-          <a:p>
-            <a:pPr algn="ctr"/>
-            <a:r>
-              <a:rPr lang="ru-RU" sz="3600" b="1" dirty="0">
-                <a:latin typeface="Times New Roman" panose="02020603050405020304" pitchFamily="18" charset="0"/>
-                <a:cs typeface="Times New Roman" panose="02020603050405020304" pitchFamily="18" charset="0"/>
-              </a:rPr>
-              <a:t>Основные задачи работы</a:t>
-            </a:r>
-          </a:p>
-        </p:txBody>
-      </p:sp>
-      <p:sp>
-        <p:nvSpPr>
-          <p:cNvPr id="5" name="TextBox 4"/>
-          <p:cNvSpPr txBox="1"/>
-          <p:nvPr/>
-        </p:nvSpPr>
-        <p:spPr>
-          <a:xfrm>
-            <a:off x="544994" y="2607132"/>
-            <a:ext cx="8069450" cy="4154984"/>
-          </a:xfrm>
-          <a:prstGeom prst="rect">
-            <a:avLst/>
-          </a:prstGeom>
-          <a:noFill/>
-        </p:spPr>
-        <p:txBody>
-          <a:bodyPr wrap="square" lIns="91440" tIns="45720" rIns="91440" bIns="45720" rtlCol="0" anchor="t">
-            <a:spAutoFit/>
-          </a:bodyPr>
-          <a:lstStyle/>
-          <a:p>
-            <a:pPr marL="214630" indent="-214630" algn="just">
-              <a:buFont typeface="Arial" panose="020B0604020202020204" pitchFamily="34" charset="0"/>
-              <a:buChar char="•"/>
-            </a:pPr>
-            <a:r>
-              <a:rPr lang="ru-RU" sz="2400" dirty="0">
-                <a:latin typeface="Times New Roman" panose="02020603050405020304" pitchFamily="18" charset="0"/>
-                <a:cs typeface="Times New Roman" panose="02020603050405020304" pitchFamily="18" charset="0"/>
-              </a:rPr>
-              <a:t>Изучение дефектов FDM-печати и выбор целевого дефекта для автоматического обнаружения.</a:t>
-            </a:r>
-          </a:p>
-          <a:p>
-            <a:pPr marL="214630" indent="-214630" algn="just">
-              <a:buFont typeface="Arial" panose="020B0604020202020204" pitchFamily="34" charset="0"/>
-              <a:buChar char="•"/>
-            </a:pPr>
-            <a:r>
-              <a:rPr lang="ru-RU" sz="2400" dirty="0">
-                <a:latin typeface="Times New Roman" panose="02020603050405020304" pitchFamily="18" charset="0"/>
-                <a:cs typeface="Times New Roman" panose="02020603050405020304" pitchFamily="18" charset="0"/>
-              </a:rPr>
-              <a:t>Проектирование, сборка и отладка аппаратно-программного комплекса экспериментального 3D-принтера.</a:t>
-            </a:r>
-          </a:p>
-          <a:p>
-            <a:pPr marL="214630" indent="-214630" algn="just">
-              <a:buFont typeface="Arial" panose="020B0604020202020204" pitchFamily="34" charset="0"/>
-              <a:buChar char="•"/>
-            </a:pPr>
-            <a:r>
-              <a:rPr lang="ru-RU" sz="2400" dirty="0">
-                <a:latin typeface="Times New Roman" panose="02020603050405020304" pitchFamily="18" charset="0"/>
-                <a:cs typeface="Times New Roman" panose="02020603050405020304" pitchFamily="18" charset="0"/>
-              </a:rPr>
-              <a:t>Сбор и подготовка данных для обучения нейросети и обучение модели обнаружения целевого дефекта.</a:t>
-            </a:r>
-          </a:p>
-          <a:p>
-            <a:pPr marL="214630" indent="-214630" algn="just">
-              <a:buFont typeface="Arial" panose="020B0604020202020204" pitchFamily="34" charset="0"/>
-              <a:buChar char="•"/>
-            </a:pPr>
-            <a:r>
-              <a:rPr lang="ru-RU" sz="2400" dirty="0">
-                <a:latin typeface="Times New Roman" panose="02020603050405020304" pitchFamily="18" charset="0"/>
-                <a:cs typeface="Times New Roman" panose="02020603050405020304" pitchFamily="18" charset="0"/>
-              </a:rPr>
-              <a:t>Разработка внешней системы контроля печати с автоматическим обнаружением дефектов.</a:t>
-            </a:r>
-          </a:p>
-          <a:p>
-            <a:pPr marL="214630" indent="-214630" algn="just">
-              <a:buFont typeface="Arial" panose="020B0604020202020204" pitchFamily="34" charset="0"/>
-              <a:buChar char="•"/>
-            </a:pPr>
-            <a:r>
-              <a:rPr lang="ru-RU" sz="2400" dirty="0">
-                <a:latin typeface="Times New Roman" panose="02020603050405020304" pitchFamily="18" charset="0"/>
-                <a:cs typeface="Times New Roman" panose="02020603050405020304" pitchFamily="18" charset="0"/>
-              </a:rPr>
-              <a:t>Тестирование работы системы контроля и 3D-принтера в процессе печати.</a:t>
-            </a:r>
-          </a:p>
-        </p:txBody>
-      </p:sp>
-      <p:sp>
-        <p:nvSpPr>
-          <p:cNvPr id="6" name="Замещающий номер слайда 4">
-            <a:extLst>
-              <a:ext uri="{FF2B5EF4-FFF2-40B4-BE49-F238E27FC236}">
-                <a16:creationId xmlns:a16="http://schemas.microsoft.com/office/drawing/2014/main" id="{C78DB24C-FC20-2FE0-98E7-F598D1843687}"/>
-              </a:ext>
-            </a:extLst>
-          </p:cNvPr>
-          <p:cNvSpPr>
-            <a:spLocks noGrp="1"/>
-          </p:cNvSpPr>
-          <p:nvPr>
-            <p:ph type="sldNum" sz="quarter" idx="12"/>
-          </p:nvPr>
-        </p:nvSpPr>
-        <p:spPr>
-          <a:xfrm>
-            <a:off x="7088886" y="6493511"/>
-            <a:ext cx="2057400" cy="365125"/>
-          </a:xfrm>
-        </p:spPr>
-        <p:txBody>
-          <a:bodyPr/>
-          <a:lstStyle/>
-          <a:p>
-            <a:fld id="{D6ED8A53-8D2F-4011-BE06-EDB0774336BA}" type="slidenum">
-              <a:rPr lang="ru-RU" sz="2000" dirty="0" smtClean="0">
-                <a:solidFill>
-                  <a:schemeClr val="tx1"/>
-                </a:solidFill>
-                <a:latin typeface="Times New Roman" panose="02020603050405020304" pitchFamily="18" charset="0"/>
-                <a:cs typeface="Times New Roman" panose="02020603050405020304" pitchFamily="18" charset="0"/>
-              </a:rPr>
-              <a:t>2</a:t>
-            </a:fld>
-            <a:endParaRPr lang="ru-RU" sz="2000">
-              <a:solidFill>
-                <a:schemeClr val="tx1"/>
-              </a:solidFill>
-              <a:latin typeface="Times New Roman" panose="02020603050405020304" pitchFamily="18" charset="0"/>
-              <a:ea typeface="Calibri"/>
-              <a:cs typeface="Times New Roman" panose="02020603050405020304" pitchFamily="18" charset="0"/>
-            </a:endParaRPr>
-          </a:p>
-        </p:txBody>
-      </p:sp>
-    </p:spTree>
-  </p:cSld>
-  <p:clrMapOvr>
-    <a:masterClrMapping/>
-  </p:clrMapOvr>
-</p:sld>
-</file>
-
-<file path=ppt/slides/slide3.xml><?xml version="1.0" encoding="utf-8"?>
-<p:sld xmlns:a="http://schemas.openxmlformats.org/drawingml/2006/main" xmlns:r="http://schemas.openxmlformats.org/officeDocument/2006/relationships" xmlns:p="http://schemas.openxmlformats.org/presentationml/2006/main">
-  <p:cSld>
-    <p:spTree>
-      <p:nvGrpSpPr>
-        <p:cNvPr id="1" name=""/>
-        <p:cNvGrpSpPr/>
-        <p:nvPr/>
-      </p:nvGrpSpPr>
-      <p:grpSpPr>
-        <a:xfrm>
-          <a:off x="0" y="0"/>
-          <a:ext cx="0" cy="0"/>
-          <a:chOff x="0" y="0"/>
-          <a:chExt cx="0" cy="0"/>
-        </a:xfrm>
-      </p:grpSpPr>
-      <p:pic>
-        <p:nvPicPr>
-          <p:cNvPr id="19" name="Рисунок 18">
-            <a:extLst>
-              <a:ext uri="{FF2B5EF4-FFF2-40B4-BE49-F238E27FC236}">
-                <a16:creationId xmlns:a16="http://schemas.microsoft.com/office/drawing/2014/main" id="{99FE507C-2C48-A423-9756-13891072B78F}"/>
-              </a:ext>
-            </a:extLst>
-          </p:cNvPr>
-          <p:cNvPicPr>
-            <a:picLocks noChangeAspect="1"/>
-          </p:cNvPicPr>
-          <p:nvPr/>
-        </p:nvPicPr>
-        <p:blipFill>
-          <a:blip r:embed="rId3">
-            <a:extLst>
-              <a:ext uri="{28A0092B-C50C-407E-A947-70E740481C1C}">
-                <a14:useLocalDpi xmlns:a14="http://schemas.microsoft.com/office/drawing/2010/main" val="0"/>
-              </a:ext>
-            </a:extLst>
-          </a:blip>
-          <a:srcRect l="8733" t="13068" r="8466" b="3458"/>
-          <a:stretch/>
-        </p:blipFill>
-        <p:spPr>
-          <a:xfrm>
-            <a:off x="5021065" y="3247173"/>
-            <a:ext cx="3921040" cy="2555874"/>
-          </a:xfrm>
-          <a:prstGeom prst="rect">
-            <a:avLst/>
-          </a:prstGeom>
-        </p:spPr>
-      </p:pic>
-      <p:sp>
-        <p:nvSpPr>
-          <p:cNvPr id="2" name="Заголовок 1">
-            <a:extLst>
-              <a:ext uri="{FF2B5EF4-FFF2-40B4-BE49-F238E27FC236}">
-                <a16:creationId xmlns:a16="http://schemas.microsoft.com/office/drawing/2014/main" id="{49CC29E7-47AE-4C1B-A66A-06BAB8AB4DBE}"/>
-              </a:ext>
-            </a:extLst>
-          </p:cNvPr>
-          <p:cNvSpPr>
-            <a:spLocks noGrp="1"/>
-          </p:cNvSpPr>
-          <p:nvPr>
-            <p:ph type="title"/>
-          </p:nvPr>
-        </p:nvSpPr>
-        <p:spPr>
-          <a:xfrm>
-            <a:off x="628650" y="-116476"/>
-            <a:ext cx="7886700" cy="712868"/>
-          </a:xfrm>
-        </p:spPr>
-        <p:txBody>
-          <a:bodyPr wrap="square" lIns="91440" tIns="45720" rIns="91440" bIns="45720">
-            <a:noAutofit/>
-          </a:bodyPr>
-          <a:lstStyle>
-            <a:defPPr algn="ctr">
-              <a:defRPr sz="4400" b="0">
-                <a:solidFill>
-                  <a:srgbClr val="000000"/>
-                </a:solidFill>
-                <a:latin typeface="Times New Roman"/>
-                <a:ea typeface="Times New Roman"/>
-                <a:cs typeface="Times New Roman"/>
-              </a:defRPr>
-            </a:defPPr>
-          </a:lstStyle>
-          <a:p>
-            <a:pPr algn="ctr">
-              <a:buNone/>
-              <a:defRPr sz="4400" b="0">
-                <a:solidFill>
-                  <a:srgbClr val="000000"/>
-                </a:solidFill>
-                <a:latin typeface="Times New Roman"/>
-                <a:ea typeface="Times New Roman"/>
-                <a:cs typeface="Times New Roman"/>
-              </a:defRPr>
-            </a:pPr>
-            <a:r>
-              <a:rPr sz="4000" b="0" dirty="0">
-                <a:solidFill>
-                  <a:srgbClr val="000000"/>
-                </a:solidFill>
-                <a:latin typeface="Times New Roman"/>
-                <a:ea typeface="Times New Roman"/>
-                <a:cs typeface="Times New Roman"/>
-              </a:rPr>
-              <a:t>В </a:t>
-            </a:r>
-            <a:r>
-              <a:rPr sz="4000" b="0" dirty="0" err="1">
-                <a:solidFill>
-                  <a:srgbClr val="000000"/>
-                </a:solidFill>
-                <a:latin typeface="Times New Roman"/>
-                <a:ea typeface="Times New Roman"/>
-                <a:cs typeface="Times New Roman"/>
-              </a:rPr>
-              <a:t>чем</a:t>
-            </a:r>
-            <a:r>
-              <a:rPr sz="4000" b="0" dirty="0">
-                <a:solidFill>
-                  <a:srgbClr val="000000"/>
-                </a:solidFill>
-                <a:latin typeface="Times New Roman"/>
-                <a:ea typeface="Times New Roman"/>
-                <a:cs typeface="Times New Roman"/>
-              </a:rPr>
-              <a:t> </a:t>
-            </a:r>
-            <a:r>
-              <a:rPr sz="4000" b="0" dirty="0" err="1">
-                <a:solidFill>
-                  <a:srgbClr val="000000"/>
-                </a:solidFill>
-                <a:latin typeface="Times New Roman"/>
-                <a:ea typeface="Times New Roman"/>
-                <a:cs typeface="Times New Roman"/>
-              </a:rPr>
-              <a:t>заключается</a:t>
-            </a:r>
-            <a:r>
-              <a:rPr sz="4000" b="0" dirty="0">
-                <a:solidFill>
-                  <a:srgbClr val="000000"/>
-                </a:solidFill>
-                <a:latin typeface="Times New Roman"/>
-                <a:ea typeface="Times New Roman"/>
-                <a:cs typeface="Times New Roman"/>
-              </a:rPr>
-              <a:t> </a:t>
-            </a:r>
-            <a:r>
-              <a:rPr sz="4000" b="0" dirty="0" err="1">
-                <a:solidFill>
-                  <a:srgbClr val="000000"/>
-                </a:solidFill>
-                <a:latin typeface="Times New Roman"/>
-                <a:ea typeface="Times New Roman"/>
-                <a:cs typeface="Times New Roman"/>
-              </a:rPr>
-              <a:t>проблема</a:t>
-            </a:r>
-            <a:r>
-              <a:rPr sz="4000" b="0" dirty="0">
-                <a:solidFill>
-                  <a:srgbClr val="000000"/>
-                </a:solidFill>
-                <a:latin typeface="Times New Roman"/>
-                <a:ea typeface="Times New Roman"/>
-                <a:cs typeface="Times New Roman"/>
-              </a:rPr>
-              <a:t>:</a:t>
-            </a:r>
-            <a:endParaRPr sz="4000" dirty="0"/>
-          </a:p>
-        </p:txBody>
-      </p:sp>
-      <p:sp>
-        <p:nvSpPr>
-          <p:cNvPr id="5" name="Замещающий номер слайда 4">
-            <a:extLst>
-              <a:ext uri="{FF2B5EF4-FFF2-40B4-BE49-F238E27FC236}">
-                <a16:creationId xmlns:a16="http://schemas.microsoft.com/office/drawing/2014/main" id="{7A7AC3B3-0D3D-46AF-A9AF-3FA15E2C3D9E}"/>
-              </a:ext>
-            </a:extLst>
-          </p:cNvPr>
-          <p:cNvSpPr>
-            <a:spLocks noGrp="1"/>
-          </p:cNvSpPr>
-          <p:nvPr>
-            <p:ph type="sldNum" idx="12"/>
-          </p:nvPr>
-        </p:nvSpPr>
-        <p:spPr>
-          <a:xfrm>
-            <a:off x="7088886" y="6493511"/>
-            <a:ext cx="2057400" cy="365125"/>
-          </a:xfrm>
-        </p:spPr>
-        <p:txBody>
-          <a:bodyPr wrap="square" lIns="91440" tIns="45720" rIns="91440" bIns="45720">
-            <a:noAutofit/>
-          </a:bodyPr>
-          <a:lstStyle>
-            <a:defPPr algn="r">
-              <a:defRPr sz="2000" b="0">
-                <a:solidFill>
-                  <a:srgbClr val="000000"/>
-                </a:solidFill>
-                <a:latin typeface="Times New Roman"/>
-                <a:ea typeface="Times New Roman"/>
-                <a:cs typeface="Times New Roman"/>
-              </a:defRPr>
-            </a:defPPr>
-          </a:lstStyle>
-          <a:p>
-            <a:pPr algn="r">
-              <a:defRPr sz="2000" b="0">
-                <a:solidFill>
-                  <a:srgbClr val="000000"/>
-                </a:solidFill>
-                <a:latin typeface="Times New Roman"/>
-                <a:ea typeface="Times New Roman"/>
-                <a:cs typeface="Times New Roman"/>
-              </a:defRPr>
-            </a:pPr>
-            <a:fld id="{D6ED8A53-8D2F-4011-BE06-EDB0774336BA}" type="slidenum">
-              <a:rPr sz="2000" b="0">
-                <a:solidFill>
-                  <a:srgbClr val="000000"/>
-                </a:solidFill>
-                <a:latin typeface="Times New Roman"/>
-                <a:ea typeface="Times New Roman"/>
-                <a:cs typeface="Times New Roman"/>
-              </a:rPr>
-              <a:t>3</a:t>
-            </a:fld>
-            <a:endParaRPr sz="2000">
-              <a:solidFill>
-                <a:schemeClr val="tx1"/>
-              </a:solidFill>
-              <a:latin typeface="Times New Roman"/>
-              <a:ea typeface="Times New Roman"/>
-              <a:cs typeface="Times New Roman"/>
-            </a:endParaRPr>
-          </a:p>
-        </p:txBody>
-      </p:sp>
-      <p:sp>
-        <p:nvSpPr>
-          <p:cNvPr id="3" name="TextBox 2">
-            <a:extLst>
-              <a:ext uri="{FF2B5EF4-FFF2-40B4-BE49-F238E27FC236}">
-                <a16:creationId xmlns:a16="http://schemas.microsoft.com/office/drawing/2014/main" id="{B9A98C53-8330-9192-D210-4F5703BD6F05}"/>
-              </a:ext>
-            </a:extLst>
-          </p:cNvPr>
-          <p:cNvSpPr>
-            <a:spLocks noGrp="1"/>
-          </p:cNvSpPr>
-          <p:nvPr/>
-        </p:nvSpPr>
-        <p:spPr>
-          <a:xfrm>
-            <a:off x="277897" y="597203"/>
-            <a:ext cx="5948583" cy="2297417"/>
-          </a:xfrm>
-          <a:prstGeom prst="rect">
-            <a:avLst/>
-          </a:prstGeom>
-          <a:noFill/>
-          <a:ln>
-            <a:solidFill>
-              <a:schemeClr val="tx1"/>
-            </a:solidFill>
-            <a:prstDash val="dash"/>
-          </a:ln>
-        </p:spPr>
-        <p:txBody>
-          <a:bodyPr rot="0" spcFirstLastPara="0" vert="horz" wrap="square" lIns="91440" tIns="45720" rIns="91440" bIns="45720" anchor="ctr">
-            <a:noAutofit/>
-          </a:bodyPr>
-          <a:lstStyle>
-            <a:defPPr algn="l">
-              <a:defRPr sz="1800" b="0">
-                <a:solidFill>
-                  <a:srgbClr val="000000"/>
-                </a:solidFill>
-                <a:latin typeface="Times New Roman"/>
-                <a:ea typeface="Times New Roman"/>
-                <a:cs typeface="Times New Roman"/>
-              </a:defRPr>
-            </a:defPPr>
-          </a:lstStyle>
-          <a:p>
-            <a:pPr algn="l">
-              <a:defRPr sz="1800" b="0">
-                <a:solidFill>
-                  <a:srgbClr val="000000"/>
-                </a:solidFill>
-                <a:latin typeface="Times New Roman"/>
-                <a:ea typeface="Times New Roman"/>
-                <a:cs typeface="Times New Roman"/>
-              </a:defRPr>
-            </a:pPr>
-            <a:r>
-              <a:rPr lang="ru-RU" sz="1800" b="0" dirty="0">
-                <a:solidFill>
-                  <a:srgbClr val="000000"/>
-                </a:solidFill>
-                <a:latin typeface="Times New Roman"/>
-                <a:ea typeface="Times New Roman"/>
-                <a:cs typeface="Times New Roman"/>
-              </a:rPr>
-              <a:t>На фермах 3D-принтеров в процессе печати могут возникать сбои, вызванные различными факторами. Такие дефекты, как отлипание, расслоение или смещение слоёв, в конечном итоге могут привести к </a:t>
-            </a:r>
-            <a:r>
-              <a:rPr lang="ru-RU" sz="1800" b="1" dirty="0">
-                <a:solidFill>
-                  <a:srgbClr val="000000"/>
-                </a:solidFill>
-                <a:latin typeface="Times New Roman"/>
-                <a:ea typeface="Times New Roman"/>
-                <a:cs typeface="Times New Roman"/>
-              </a:rPr>
-              <a:t>критическому дефекту «спагетти»</a:t>
-            </a:r>
-            <a:r>
-              <a:rPr lang="ru-RU" sz="1800" b="0" dirty="0">
-                <a:solidFill>
-                  <a:srgbClr val="000000"/>
-                </a:solidFill>
-                <a:latin typeface="Times New Roman"/>
-                <a:ea typeface="Times New Roman"/>
-                <a:cs typeface="Times New Roman"/>
-              </a:rPr>
-              <a:t>, при котором пластик начинает хаотично укладываться в воздухе. Такой дефект приводит к перерасходу материала, а в отдельных случаях может стать </a:t>
-            </a:r>
-            <a:r>
-              <a:rPr lang="ru-RU" sz="1800" b="1" dirty="0">
-                <a:solidFill>
-                  <a:srgbClr val="000000"/>
-                </a:solidFill>
-                <a:latin typeface="Times New Roman"/>
-                <a:ea typeface="Times New Roman"/>
-                <a:cs typeface="Times New Roman"/>
-              </a:rPr>
-              <a:t>причиной повреждения </a:t>
-            </a:r>
-            <a:r>
-              <a:rPr lang="ru-RU" sz="1800" b="0" dirty="0">
-                <a:solidFill>
-                  <a:srgbClr val="000000"/>
-                </a:solidFill>
-                <a:latin typeface="Times New Roman"/>
-                <a:ea typeface="Times New Roman"/>
-                <a:cs typeface="Times New Roman"/>
-              </a:rPr>
-              <a:t>самого 3D-принтера.</a:t>
-            </a:r>
-            <a:endParaRPr lang="ru-RU" dirty="0"/>
-          </a:p>
-        </p:txBody>
-      </p:sp>
-      <p:sp>
-        <p:nvSpPr>
-          <p:cNvPr id="27" name="TextBox 26">
-            <a:extLst>
-              <a:ext uri="{FF2B5EF4-FFF2-40B4-BE49-F238E27FC236}">
-                <a16:creationId xmlns:a16="http://schemas.microsoft.com/office/drawing/2014/main" id="{93027D3F-6BC8-2110-F2D0-39287E8FAFD7}"/>
-              </a:ext>
-            </a:extLst>
-          </p:cNvPr>
-          <p:cNvSpPr>
-            <a:spLocks noGrp="1"/>
-          </p:cNvSpPr>
-          <p:nvPr/>
-        </p:nvSpPr>
-        <p:spPr>
-          <a:xfrm>
-            <a:off x="6440105" y="2547592"/>
-            <a:ext cx="2182057" cy="579120"/>
-          </a:xfrm>
-          <a:prstGeom prst="rect">
-            <a:avLst/>
-          </a:prstGeom>
-          <a:noFill/>
-        </p:spPr>
-        <p:txBody>
-          <a:bodyPr rot="0" spcFirstLastPara="0" vert="horz" wrap="square" lIns="91440" tIns="45720" rIns="91440" bIns="45720" anchor="t">
-            <a:noAutofit/>
-          </a:bodyPr>
-          <a:lstStyle>
-            <a:defPPr algn="l">
-              <a:defRPr sz="1600" b="0">
-                <a:solidFill>
-                  <a:srgbClr val="000000"/>
-                </a:solidFill>
-                <a:latin typeface="Times New Roman"/>
-                <a:ea typeface="Times New Roman"/>
-                <a:cs typeface="Times New Roman"/>
-              </a:defRPr>
-            </a:defPPr>
-          </a:lstStyle>
-          <a:p>
-            <a:pPr algn="l">
-              <a:defRPr sz="1600" b="0">
-                <a:solidFill>
-                  <a:srgbClr val="000000"/>
-                </a:solidFill>
-                <a:latin typeface="Times New Roman"/>
-                <a:ea typeface="Times New Roman"/>
-                <a:cs typeface="Times New Roman"/>
-              </a:defRPr>
-            </a:pPr>
-            <a:r>
-              <a:rPr sz="1600" b="0" dirty="0" err="1">
-                <a:solidFill>
-                  <a:srgbClr val="000000"/>
-                </a:solidFill>
-                <a:latin typeface="Times New Roman"/>
-                <a:ea typeface="Times New Roman"/>
-                <a:cs typeface="Times New Roman"/>
-              </a:rPr>
-              <a:t>Рис</a:t>
-            </a:r>
-            <a:r>
-              <a:rPr sz="1600" b="0" dirty="0">
-                <a:solidFill>
-                  <a:srgbClr val="000000"/>
-                </a:solidFill>
-                <a:latin typeface="Times New Roman"/>
-                <a:ea typeface="Times New Roman"/>
-                <a:cs typeface="Times New Roman"/>
-              </a:rPr>
-              <a:t>. 1 – </a:t>
-            </a:r>
-            <a:r>
-              <a:rPr sz="1600" b="0" dirty="0" err="1">
-                <a:solidFill>
-                  <a:srgbClr val="000000"/>
-                </a:solidFill>
-                <a:latin typeface="Times New Roman"/>
-                <a:ea typeface="Times New Roman"/>
-                <a:cs typeface="Times New Roman"/>
-              </a:rPr>
-              <a:t>Дефект</a:t>
-            </a:r>
-            <a:r>
-              <a:rPr sz="1600" b="0" dirty="0">
-                <a:solidFill>
-                  <a:srgbClr val="000000"/>
-                </a:solidFill>
-                <a:latin typeface="Times New Roman"/>
-                <a:ea typeface="Times New Roman"/>
-                <a:cs typeface="Times New Roman"/>
-              </a:rPr>
-              <a:t> </a:t>
-            </a:r>
-            <a:r>
-              <a:rPr sz="1600" b="0" dirty="0" err="1">
-                <a:solidFill>
-                  <a:srgbClr val="000000"/>
-                </a:solidFill>
-                <a:latin typeface="Times New Roman"/>
-                <a:ea typeface="Times New Roman"/>
-                <a:cs typeface="Times New Roman"/>
-              </a:rPr>
-              <a:t>типа</a:t>
-            </a:r>
-            <a:r>
-              <a:rPr sz="1600" b="0" dirty="0">
-                <a:solidFill>
-                  <a:srgbClr val="000000"/>
-                </a:solidFill>
-                <a:latin typeface="Times New Roman"/>
-                <a:ea typeface="Times New Roman"/>
-                <a:cs typeface="Times New Roman"/>
-              </a:rPr>
-              <a:t> «</a:t>
-            </a:r>
-            <a:r>
-              <a:rPr sz="1600" b="0" dirty="0" err="1">
-                <a:solidFill>
-                  <a:srgbClr val="000000"/>
-                </a:solidFill>
-                <a:latin typeface="Times New Roman"/>
-                <a:ea typeface="Times New Roman"/>
-                <a:cs typeface="Times New Roman"/>
-              </a:rPr>
-              <a:t>спагетти</a:t>
-            </a:r>
-            <a:r>
-              <a:rPr sz="1600" b="0" dirty="0">
-                <a:solidFill>
-                  <a:srgbClr val="000000"/>
-                </a:solidFill>
-                <a:latin typeface="Times New Roman"/>
-                <a:ea typeface="Times New Roman"/>
-                <a:cs typeface="Times New Roman"/>
-              </a:rPr>
-              <a:t>»</a:t>
-            </a:r>
-          </a:p>
-        </p:txBody>
-      </p:sp>
-      <p:pic>
-        <p:nvPicPr>
-          <p:cNvPr id="4" name="Рисунок 3" descr="Изображение выглядит как искусство, дизайн, соединитель, свет&#10;&#10;Содержимое, созданное ИИ, может быть неверным.">
-            <a:extLst>
-              <a:ext uri="{FF2B5EF4-FFF2-40B4-BE49-F238E27FC236}">
-                <a16:creationId xmlns:a16="http://schemas.microsoft.com/office/drawing/2014/main" id="{AE67ED3C-CB37-618A-EEBF-9C9FF1AB5D40}"/>
-              </a:ext>
-            </a:extLst>
-          </p:cNvPr>
-          <p:cNvPicPr>
-            <a:picLocks noChangeAspect="1"/>
-          </p:cNvPicPr>
-          <p:nvPr/>
-        </p:nvPicPr>
-        <p:blipFill>
-          <a:blip r:embed="rId4"/>
-          <a:srcRect l="6291" t="18812" r="21153" b="24354"/>
-          <a:stretch/>
-        </p:blipFill>
-        <p:spPr>
-          <a:xfrm>
-            <a:off x="6333293" y="704535"/>
-            <a:ext cx="2288869" cy="1792981"/>
-          </a:xfrm>
-          <a:prstGeom prst="rect">
-            <a:avLst/>
-          </a:prstGeom>
-          <a:ln w="28575">
-            <a:noFill/>
-          </a:ln>
-        </p:spPr>
-      </p:pic>
-      <p:sp>
-        <p:nvSpPr>
-          <p:cNvPr id="6" name="TextBox 2">
-            <a:extLst>
-              <a:ext uri="{FF2B5EF4-FFF2-40B4-BE49-F238E27FC236}">
-                <a16:creationId xmlns:a16="http://schemas.microsoft.com/office/drawing/2014/main" id="{452C65C1-2992-0840-D7B0-DF2AD9057D63}"/>
-              </a:ext>
-            </a:extLst>
-          </p:cNvPr>
-          <p:cNvSpPr>
-            <a:spLocks noGrp="1"/>
-          </p:cNvSpPr>
-          <p:nvPr/>
-        </p:nvSpPr>
-        <p:spPr>
-          <a:xfrm>
-            <a:off x="277897" y="3017804"/>
-            <a:ext cx="4637770" cy="2791593"/>
-          </a:xfrm>
-          <a:prstGeom prst="rect">
-            <a:avLst/>
-          </a:prstGeom>
-          <a:noFill/>
-          <a:ln>
-            <a:solidFill>
-              <a:schemeClr val="tx1"/>
-            </a:solidFill>
-            <a:prstDash val="dash"/>
-          </a:ln>
-        </p:spPr>
-        <p:txBody>
-          <a:bodyPr rot="0" spcFirstLastPara="0" vert="horz" wrap="square" lIns="91440" tIns="45720" rIns="91440" bIns="45720" anchor="ctr">
-            <a:noAutofit/>
-          </a:bodyPr>
-          <a:lstStyle>
-            <a:defPPr algn="l">
-              <a:defRPr sz="1800" b="0">
-                <a:solidFill>
-                  <a:srgbClr val="000000"/>
-                </a:solidFill>
-                <a:latin typeface="Times New Roman"/>
-                <a:ea typeface="Times New Roman"/>
-                <a:cs typeface="Times New Roman"/>
-              </a:defRPr>
-            </a:defPPr>
-          </a:lstStyle>
-          <a:p>
-            <a:pPr algn="l">
-              <a:defRPr sz="1800" b="0">
-                <a:solidFill>
-                  <a:srgbClr val="000000"/>
-                </a:solidFill>
-                <a:latin typeface="Times New Roman"/>
-                <a:ea typeface="Times New Roman"/>
-                <a:cs typeface="Times New Roman"/>
-              </a:defRPr>
-            </a:pPr>
-            <a:r>
-              <a:rPr lang="ru-RU" dirty="0">
-                <a:solidFill>
-                  <a:srgbClr val="000000"/>
-                </a:solidFill>
-                <a:latin typeface="Times New Roman"/>
-                <a:ea typeface="Times New Roman"/>
-                <a:cs typeface="Times New Roman"/>
-              </a:rPr>
-              <a:t>Проблему удалось подтвердить на ферме Волгоградской компании «</a:t>
-            </a:r>
-            <a:r>
-              <a:rPr lang="ru-RU" dirty="0" err="1">
-                <a:solidFill>
-                  <a:srgbClr val="000000"/>
-                </a:solidFill>
-                <a:latin typeface="Times New Roman"/>
-                <a:ea typeface="Times New Roman"/>
-                <a:cs typeface="Times New Roman"/>
-              </a:rPr>
-              <a:t>Stereotech</a:t>
-            </a:r>
-            <a:r>
-              <a:rPr lang="ru-RU" dirty="0">
-                <a:solidFill>
-                  <a:srgbClr val="000000"/>
-                </a:solidFill>
-                <a:latin typeface="Times New Roman"/>
-                <a:ea typeface="Times New Roman"/>
-                <a:cs typeface="Times New Roman"/>
-              </a:rPr>
-              <a:t>». По накопленной статистике принтеров с фермы, 26,7</a:t>
-            </a:r>
-            <a:r>
-              <a:rPr lang="ru-RU" b="1" dirty="0">
-                <a:latin typeface="Times New Roman" panose="02020603050405020304" pitchFamily="18" charset="0"/>
-                <a:cs typeface="Times New Roman" panose="02020603050405020304" pitchFamily="18" charset="0"/>
-              </a:rPr>
-              <a:t> </a:t>
-            </a:r>
-            <a:r>
-              <a:rPr lang="ru-RU" dirty="0">
-                <a:solidFill>
-                  <a:srgbClr val="000000"/>
-                </a:solidFill>
-                <a:latin typeface="Times New Roman"/>
-                <a:ea typeface="Times New Roman"/>
-                <a:cs typeface="Times New Roman"/>
-              </a:rPr>
-              <a:t>% заданий были отменены оператором вручную из-за подобных сбоев. Статистика имеет погрешность, так как часть успешных заданий — это печати, когда оператор не мог отменить задачу, хотя сбой был, а часть отмен не связаны со сбоем.</a:t>
-            </a:r>
-            <a:endParaRPr lang="ru-RU" dirty="0"/>
-          </a:p>
-        </p:txBody>
-      </p:sp>
-      <p:sp>
-        <p:nvSpPr>
-          <p:cNvPr id="12" name="TextBox 26">
-            <a:extLst>
-              <a:ext uri="{FF2B5EF4-FFF2-40B4-BE49-F238E27FC236}">
-                <a16:creationId xmlns:a16="http://schemas.microsoft.com/office/drawing/2014/main" id="{DC9D2F2B-4F62-AFAE-5BC3-F6D246AAE8E4}"/>
-              </a:ext>
-            </a:extLst>
-          </p:cNvPr>
-          <p:cNvSpPr>
-            <a:spLocks noGrp="1"/>
-          </p:cNvSpPr>
-          <p:nvPr/>
-        </p:nvSpPr>
-        <p:spPr>
-          <a:xfrm>
-            <a:off x="4868975" y="6014767"/>
-            <a:ext cx="4073130" cy="579120"/>
-          </a:xfrm>
-          <a:prstGeom prst="rect">
-            <a:avLst/>
-          </a:prstGeom>
-          <a:noFill/>
-        </p:spPr>
-        <p:txBody>
-          <a:bodyPr rot="0" spcFirstLastPara="0" vert="horz" wrap="square" lIns="91440" tIns="45720" rIns="91440" bIns="45720" anchor="ctr">
-            <a:noAutofit/>
-          </a:bodyPr>
-          <a:lstStyle>
-            <a:defPPr algn="l">
-              <a:defRPr sz="1600" b="0">
-                <a:solidFill>
-                  <a:srgbClr val="000000"/>
-                </a:solidFill>
-                <a:latin typeface="Times New Roman"/>
-                <a:ea typeface="Times New Roman"/>
-                <a:cs typeface="Times New Roman"/>
-              </a:defRPr>
-            </a:defPPr>
-          </a:lstStyle>
-          <a:p>
-            <a:pPr algn="ctr">
-              <a:defRPr sz="1600" b="0">
-                <a:solidFill>
-                  <a:srgbClr val="000000"/>
-                </a:solidFill>
-                <a:latin typeface="Times New Roman"/>
-                <a:ea typeface="Times New Roman"/>
-                <a:cs typeface="Times New Roman"/>
-              </a:defRPr>
-            </a:pPr>
-            <a:r>
-              <a:rPr sz="1600" b="0" dirty="0" err="1">
-                <a:solidFill>
-                  <a:srgbClr val="000000"/>
-                </a:solidFill>
-                <a:latin typeface="Times New Roman"/>
-                <a:ea typeface="Times New Roman"/>
-                <a:cs typeface="Times New Roman"/>
-              </a:rPr>
-              <a:t>Рис</a:t>
-            </a:r>
-            <a:r>
-              <a:rPr sz="1600" b="0" dirty="0">
-                <a:solidFill>
-                  <a:srgbClr val="000000"/>
-                </a:solidFill>
-                <a:latin typeface="Times New Roman"/>
-                <a:ea typeface="Times New Roman"/>
-                <a:cs typeface="Times New Roman"/>
-              </a:rPr>
-              <a:t>. </a:t>
-            </a:r>
-            <a:r>
-              <a:rPr lang="ru-RU" sz="1600" b="0" dirty="0">
-                <a:solidFill>
-                  <a:srgbClr val="000000"/>
-                </a:solidFill>
-                <a:latin typeface="Times New Roman"/>
-                <a:ea typeface="Times New Roman"/>
-                <a:cs typeface="Times New Roman"/>
-              </a:rPr>
-              <a:t>2</a:t>
-            </a:r>
-            <a:r>
-              <a:rPr sz="1600" b="0" dirty="0">
-                <a:solidFill>
-                  <a:srgbClr val="000000"/>
-                </a:solidFill>
-                <a:latin typeface="Times New Roman"/>
-                <a:ea typeface="Times New Roman"/>
-                <a:cs typeface="Times New Roman"/>
-              </a:rPr>
-              <a:t> – </a:t>
-            </a:r>
-            <a:r>
-              <a:rPr lang="ru-RU" sz="1600" b="0" dirty="0">
-                <a:solidFill>
-                  <a:srgbClr val="000000"/>
-                </a:solidFill>
-                <a:latin typeface="Times New Roman"/>
-                <a:ea typeface="Times New Roman"/>
-                <a:cs typeface="Times New Roman"/>
-              </a:rPr>
-              <a:t>Диаграмма статистики печатей на ферме компании «</a:t>
-            </a:r>
-            <a:r>
-              <a:rPr lang="en-US" sz="1600" b="0" dirty="0" err="1">
-                <a:solidFill>
-                  <a:srgbClr val="000000"/>
-                </a:solidFill>
-                <a:latin typeface="Times New Roman"/>
-                <a:ea typeface="Times New Roman"/>
-                <a:cs typeface="Times New Roman"/>
-              </a:rPr>
-              <a:t>Stereotech</a:t>
-            </a:r>
-            <a:r>
-              <a:rPr lang="ru-RU" sz="1600" b="0" dirty="0">
-                <a:solidFill>
-                  <a:srgbClr val="000000"/>
-                </a:solidFill>
-                <a:latin typeface="Times New Roman"/>
-                <a:ea typeface="Times New Roman"/>
-                <a:cs typeface="Times New Roman"/>
-              </a:rPr>
-              <a:t>»</a:t>
-            </a:r>
-            <a:endParaRPr sz="1600" b="0" dirty="0">
-              <a:solidFill>
-                <a:srgbClr val="000000"/>
-              </a:solidFill>
-              <a:latin typeface="Times New Roman"/>
-              <a:ea typeface="Times New Roman"/>
-              <a:cs typeface="Times New Roman"/>
-            </a:endParaRPr>
-          </a:p>
-        </p:txBody>
-      </p:sp>
-      <p:sp>
-        <p:nvSpPr>
-          <p:cNvPr id="21" name="TextBox 2">
-            <a:extLst>
-              <a:ext uri="{FF2B5EF4-FFF2-40B4-BE49-F238E27FC236}">
-                <a16:creationId xmlns:a16="http://schemas.microsoft.com/office/drawing/2014/main" id="{776FE2EE-EE34-7E14-84FE-9C2304D04340}"/>
-              </a:ext>
-            </a:extLst>
-          </p:cNvPr>
-          <p:cNvSpPr>
-            <a:spLocks noGrp="1"/>
-          </p:cNvSpPr>
-          <p:nvPr/>
-        </p:nvSpPr>
-        <p:spPr>
-          <a:xfrm>
-            <a:off x="277897" y="5932581"/>
-            <a:ext cx="4637770" cy="743492"/>
-          </a:xfrm>
-          <a:prstGeom prst="rect">
-            <a:avLst/>
-          </a:prstGeom>
-          <a:noFill/>
-          <a:ln>
-            <a:solidFill>
-              <a:schemeClr val="tx1"/>
-            </a:solidFill>
-            <a:prstDash val="dash"/>
-          </a:ln>
-        </p:spPr>
-        <p:txBody>
-          <a:bodyPr rot="0" spcFirstLastPara="0" vert="horz" wrap="square" lIns="91440" tIns="45720" rIns="91440" bIns="45720" anchor="ctr">
-            <a:noAutofit/>
-          </a:bodyPr>
-          <a:lstStyle>
-            <a:defPPr algn="l">
-              <a:defRPr sz="1800" b="0">
-                <a:solidFill>
-                  <a:srgbClr val="000000"/>
-                </a:solidFill>
-                <a:latin typeface="Times New Roman"/>
-                <a:ea typeface="Times New Roman"/>
-                <a:cs typeface="Times New Roman"/>
-              </a:defRPr>
-            </a:defPPr>
-          </a:lstStyle>
-          <a:p>
-            <a:pPr algn="l">
-              <a:defRPr sz="1800" b="0">
-                <a:solidFill>
-                  <a:srgbClr val="000000"/>
-                </a:solidFill>
-                <a:latin typeface="Times New Roman"/>
-                <a:ea typeface="Times New Roman"/>
-                <a:cs typeface="Times New Roman"/>
-              </a:defRPr>
-            </a:pPr>
-            <a:r>
-              <a:rPr lang="ru-RU" b="1" dirty="0">
-                <a:solidFill>
-                  <a:srgbClr val="000000"/>
-                </a:solidFill>
-                <a:latin typeface="Times New Roman"/>
-                <a:cs typeface="Times New Roman"/>
-              </a:rPr>
-              <a:t>Предлагаемое</a:t>
-            </a:r>
-            <a:r>
-              <a:rPr lang="ru-RU" dirty="0">
-                <a:solidFill>
-                  <a:srgbClr val="000000"/>
-                </a:solidFill>
-                <a:latin typeface="Times New Roman"/>
-                <a:cs typeface="Times New Roman"/>
-              </a:rPr>
-              <a:t> </a:t>
-            </a:r>
-            <a:r>
-              <a:rPr lang="ru-RU" b="1" dirty="0">
-                <a:solidFill>
-                  <a:srgbClr val="000000"/>
-                </a:solidFill>
-                <a:latin typeface="Times New Roman"/>
-                <a:cs typeface="Times New Roman"/>
-              </a:rPr>
-              <a:t>решение</a:t>
-            </a:r>
-            <a:r>
-              <a:rPr lang="ru-RU" dirty="0">
-                <a:solidFill>
-                  <a:srgbClr val="000000"/>
-                </a:solidFill>
-                <a:latin typeface="Times New Roman"/>
-                <a:cs typeface="Times New Roman"/>
-              </a:rPr>
-              <a:t>: мониторинг печати с помощью методов машинного зрения.</a:t>
-            </a:r>
-            <a:endParaRPr lang="ru-RU" dirty="0"/>
-          </a:p>
-        </p:txBody>
-      </p:sp>
-    </p:spTree>
-    <p:extLst>
-      <p:ext uri="{BB962C8B-B14F-4D97-AF65-F5344CB8AC3E}">
-        <p14:creationId xmlns:p14="http://schemas.microsoft.com/office/powerpoint/2010/main" val="2011050586"/>
-      </p:ext>
-    </p:extLst>
-  </p:cSld>
-  <p:clrMapOvr>
-    <a:masterClrMapping/>
-  </p:clrMapOvr>
-</p:sld>
-</file>
-
-<file path=ppt/slides/slide4.xml><?xml version="1.0" encoding="utf-8"?>
-<p:sld xmlns:a="http://schemas.openxmlformats.org/drawingml/2006/main" xmlns:r="http://schemas.openxmlformats.org/officeDocument/2006/relationships" xmlns:p="http://schemas.openxmlformats.org/presentationml/2006/main">
-  <p:cSld>
-    <p:spTree>
-      <p:nvGrpSpPr>
-        <p:cNvPr id="1" name="">
-          <a:extLst>
-            <a:ext uri="{FF2B5EF4-FFF2-40B4-BE49-F238E27FC236}">
-              <a16:creationId xmlns:a16="http://schemas.microsoft.com/office/drawing/2014/main" id="{586A209A-B3B7-9043-FC7E-DD693EE6AACA}"/>
-            </a:ext>
-          </a:extLst>
-        </p:cNvPr>
-        <p:cNvGrpSpPr/>
-        <p:nvPr/>
-      </p:nvGrpSpPr>
-      <p:grpSpPr>
-        <a:xfrm>
-          <a:off x="0" y="0"/>
-          <a:ext cx="0" cy="0"/>
-          <a:chOff x="0" y="0"/>
-          <a:chExt cx="0" cy="0"/>
-        </a:xfrm>
-      </p:grpSpPr>
-      <p:sp>
-        <p:nvSpPr>
-          <p:cNvPr id="2" name="Заголовок 1">
-            <a:extLst>
-              <a:ext uri="{FF2B5EF4-FFF2-40B4-BE49-F238E27FC236}">
-                <a16:creationId xmlns:a16="http://schemas.microsoft.com/office/drawing/2014/main" id="{648A91D6-F58A-86A8-231A-A5AC58545903}"/>
-              </a:ext>
-            </a:extLst>
-          </p:cNvPr>
-          <p:cNvSpPr>
-            <a:spLocks noGrp="1"/>
-          </p:cNvSpPr>
-          <p:nvPr>
-            <p:ph type="title"/>
-          </p:nvPr>
-        </p:nvSpPr>
-        <p:spPr>
-          <a:xfrm>
-            <a:off x="628648" y="0"/>
-            <a:ext cx="7886700" cy="712868"/>
-          </a:xfrm>
-        </p:spPr>
-        <p:txBody>
-          <a:bodyPr>
-            <a:normAutofit/>
-          </a:bodyPr>
-          <a:lstStyle/>
-          <a:p>
-            <a:pPr algn="ctr"/>
-            <a:r>
-              <a:rPr lang="ru-RU" sz="4000" dirty="0">
-                <a:latin typeface="Times New Roman" panose="02020603050405020304" pitchFamily="18" charset="0"/>
-                <a:ea typeface="Calibri"/>
-                <a:cs typeface="Times New Roman" panose="02020603050405020304" pitchFamily="18" charset="0"/>
-              </a:rPr>
-              <a:t>Подготовка к обучению нейросети</a:t>
-            </a:r>
-          </a:p>
-        </p:txBody>
-      </p:sp>
-      <p:sp>
-        <p:nvSpPr>
-          <p:cNvPr id="5" name="Замещающий номер слайда 4">
-            <a:extLst>
-              <a:ext uri="{FF2B5EF4-FFF2-40B4-BE49-F238E27FC236}">
-                <a16:creationId xmlns:a16="http://schemas.microsoft.com/office/drawing/2014/main" id="{425BE312-5EC5-E722-FD8E-916DFE636F2B}"/>
-              </a:ext>
-            </a:extLst>
-          </p:cNvPr>
-          <p:cNvSpPr>
-            <a:spLocks noGrp="1"/>
-          </p:cNvSpPr>
-          <p:nvPr>
-            <p:ph type="sldNum" sz="quarter" idx="12"/>
-          </p:nvPr>
-        </p:nvSpPr>
-        <p:spPr>
-          <a:xfrm>
-            <a:off x="7088886" y="6493511"/>
-            <a:ext cx="2057400" cy="365125"/>
-          </a:xfrm>
-        </p:spPr>
-        <p:txBody>
-          <a:bodyPr/>
-          <a:lstStyle/>
-          <a:p>
-            <a:fld id="{D6ED8A53-8D2F-4011-BE06-EDB0774336BA}" type="slidenum">
-              <a:rPr lang="ru-RU" sz="2000" dirty="0" smtClean="0">
-                <a:solidFill>
-                  <a:schemeClr val="tx1"/>
-                </a:solidFill>
-                <a:latin typeface="Times New Roman" panose="02020603050405020304" pitchFamily="18" charset="0"/>
-                <a:cs typeface="Times New Roman" panose="02020603050405020304" pitchFamily="18" charset="0"/>
-              </a:rPr>
-              <a:t>4</a:t>
-            </a:fld>
-            <a:endParaRPr lang="ru-RU" sz="2000">
-              <a:solidFill>
-                <a:schemeClr val="tx1"/>
-              </a:solidFill>
-              <a:latin typeface="Times New Roman" panose="02020603050405020304" pitchFamily="18" charset="0"/>
-              <a:ea typeface="Calibri"/>
-              <a:cs typeface="Times New Roman" panose="02020603050405020304" pitchFamily="18" charset="0"/>
-            </a:endParaRPr>
-          </a:p>
-        </p:txBody>
-      </p:sp>
-      <p:sp>
-        <p:nvSpPr>
-          <p:cNvPr id="14" name="TextBox 13">
-            <a:extLst>
-              <a:ext uri="{FF2B5EF4-FFF2-40B4-BE49-F238E27FC236}">
-                <a16:creationId xmlns:a16="http://schemas.microsoft.com/office/drawing/2014/main" id="{733275A9-2422-EE65-68B7-2EFC7CB717FE}"/>
-              </a:ext>
-            </a:extLst>
-          </p:cNvPr>
-          <p:cNvSpPr txBox="1"/>
-          <p:nvPr/>
-        </p:nvSpPr>
-        <p:spPr>
-          <a:xfrm>
-            <a:off x="444579" y="731952"/>
-            <a:ext cx="3869672" cy="2585323"/>
-          </a:xfrm>
-          <a:prstGeom prst="rect">
-            <a:avLst/>
-          </a:prstGeom>
-          <a:noFill/>
-          <a:ln>
-            <a:solidFill>
-              <a:schemeClr val="tx1"/>
-            </a:solidFill>
-            <a:prstDash val="dash"/>
-          </a:ln>
-        </p:spPr>
-        <p:txBody>
-          <a:bodyPr rot="0" spcFirstLastPara="0" vertOverflow="overflow" horzOverflow="overflow" vert="horz" wrap="square" lIns="91440" tIns="45720" rIns="91440" bIns="45720" numCol="1" spcCol="0" rtlCol="0" fromWordArt="0" anchor="ctr" anchorCtr="0" forceAA="0" compatLnSpc="1">
-            <a:prstTxWarp prst="textNoShape">
-              <a:avLst/>
-            </a:prstTxWarp>
-            <a:spAutoFit/>
-          </a:bodyPr>
-          <a:lstStyle/>
-          <a:p>
-            <a:r>
-              <a:rPr lang="ru-RU" dirty="0">
-                <a:latin typeface="Times New Roman" panose="02020603050405020304" pitchFamily="18" charset="0"/>
-                <a:cs typeface="Times New Roman" panose="02020603050405020304" pitchFamily="18" charset="0"/>
-              </a:rPr>
-              <a:t>Для обнаружения «спагетти» выбрана </a:t>
-            </a:r>
-            <a:r>
-              <a:rPr lang="ru-RU" b="1" dirty="0">
-                <a:latin typeface="Times New Roman" panose="02020603050405020304" pitchFamily="18" charset="0"/>
-                <a:cs typeface="Times New Roman" panose="02020603050405020304" pitchFamily="18" charset="0"/>
-              </a:rPr>
-              <a:t>ResNet18</a:t>
-            </a:r>
-            <a:r>
-              <a:rPr lang="ru-RU" dirty="0">
-                <a:latin typeface="Times New Roman" panose="02020603050405020304" pitchFamily="18" charset="0"/>
-                <a:cs typeface="Times New Roman" panose="02020603050405020304" pitchFamily="18" charset="0"/>
-              </a:rPr>
-              <a:t>. Она решает задачу как бинарную классификацию полного кадра: </a:t>
-            </a:r>
-            <a:r>
-              <a:rPr lang="ru-RU" b="1" dirty="0">
-                <a:latin typeface="Times New Roman" panose="02020603050405020304" pitchFamily="18" charset="0"/>
-                <a:cs typeface="Times New Roman" panose="02020603050405020304" pitchFamily="18" charset="0"/>
-              </a:rPr>
-              <a:t>есть дефект или нет</a:t>
-            </a:r>
-            <a:r>
-              <a:rPr lang="ru-RU" dirty="0">
-                <a:latin typeface="Times New Roman" panose="02020603050405020304" pitchFamily="18" charset="0"/>
-                <a:cs typeface="Times New Roman" panose="02020603050405020304" pitchFamily="18" charset="0"/>
-              </a:rPr>
-              <a:t>. Локализация дефектов рамкой в прошлых работах показала низкую точность. Детекция объектов сохранена только для поиска детали на столе.</a:t>
-            </a:r>
-            <a:endParaRPr lang="ru-RU" dirty="0">
-              <a:solidFill>
-                <a:srgbClr val="000000"/>
-              </a:solidFill>
-              <a:latin typeface="Times New Roman" panose="02020603050405020304" pitchFamily="18" charset="0"/>
-              <a:cs typeface="Times New Roman" panose="02020603050405020304" pitchFamily="18" charset="0"/>
-            </a:endParaRPr>
-          </a:p>
-        </p:txBody>
-      </p:sp>
-      <p:sp>
-        <p:nvSpPr>
-          <p:cNvPr id="22" name="TextBox 21">
-            <a:extLst>
-              <a:ext uri="{FF2B5EF4-FFF2-40B4-BE49-F238E27FC236}">
-                <a16:creationId xmlns:a16="http://schemas.microsoft.com/office/drawing/2014/main" id="{EED866B5-82E1-33E1-5DF7-1DCBBD9DCDF8}"/>
-              </a:ext>
-            </a:extLst>
-          </p:cNvPr>
-          <p:cNvSpPr txBox="1"/>
-          <p:nvPr/>
-        </p:nvSpPr>
-        <p:spPr>
-          <a:xfrm>
-            <a:off x="4571998" y="709017"/>
-            <a:ext cx="4197892" cy="2585323"/>
-          </a:xfrm>
-          <a:prstGeom prst="rect">
-            <a:avLst/>
-          </a:prstGeom>
-          <a:noFill/>
-          <a:ln>
-            <a:solidFill>
-              <a:schemeClr val="tx1"/>
-            </a:solidFill>
-            <a:prstDash val="dash"/>
-          </a:ln>
-        </p:spPr>
-        <p:txBody>
-          <a:bodyPr rot="0" spcFirstLastPara="0" vertOverflow="overflow" horzOverflow="overflow" vert="horz" wrap="square" lIns="91440" tIns="45720" rIns="91440" bIns="45720" numCol="1" spcCol="0" rtlCol="0" fromWordArt="0" anchor="ctr" anchorCtr="0" forceAA="0" compatLnSpc="1">
-            <a:prstTxWarp prst="textNoShape">
-              <a:avLst/>
-            </a:prstTxWarp>
-            <a:spAutoFit/>
-          </a:bodyPr>
-          <a:lstStyle/>
-          <a:p>
-            <a:r>
-              <a:rPr lang="ru-RU" dirty="0">
-                <a:latin typeface="Times New Roman" panose="02020603050405020304" pitchFamily="18" charset="0"/>
-                <a:cs typeface="Times New Roman" panose="02020603050405020304" pitchFamily="18" charset="0"/>
-              </a:rPr>
-              <a:t>Датасет содержит </a:t>
-            </a:r>
-            <a:r>
-              <a:rPr lang="ru-RU" b="1" dirty="0">
-                <a:latin typeface="Times New Roman" panose="02020603050405020304" pitchFamily="18" charset="0"/>
-                <a:cs typeface="Times New Roman" panose="02020603050405020304" pitchFamily="18" charset="0"/>
-              </a:rPr>
-              <a:t>16 129 </a:t>
-            </a:r>
-            <a:r>
-              <a:rPr lang="ru-RU" dirty="0">
-                <a:latin typeface="Times New Roman" panose="02020603050405020304" pitchFamily="18" charset="0"/>
-                <a:cs typeface="Times New Roman" panose="02020603050405020304" pitchFamily="18" charset="0"/>
-              </a:rPr>
-              <a:t>исходных кадров </a:t>
-            </a:r>
-            <a:r>
-              <a:rPr lang="ru-RU" b="1" dirty="0">
-                <a:latin typeface="Times New Roman" panose="02020603050405020304" pitchFamily="18" charset="0"/>
-                <a:cs typeface="Times New Roman" panose="02020603050405020304" pitchFamily="18" charset="0"/>
-              </a:rPr>
-              <a:t>без аугментаций</a:t>
-            </a:r>
-            <a:r>
-              <a:rPr lang="ru-RU" dirty="0">
-                <a:latin typeface="Times New Roman" panose="02020603050405020304" pitchFamily="18" charset="0"/>
-                <a:cs typeface="Times New Roman" panose="02020603050405020304" pitchFamily="18" charset="0"/>
-              </a:rPr>
-              <a:t>. Обучающая выборка включает </a:t>
-            </a:r>
-            <a:r>
-              <a:rPr lang="ru-RU" b="1" dirty="0">
-                <a:latin typeface="Times New Roman" panose="02020603050405020304" pitchFamily="18" charset="0"/>
-                <a:cs typeface="Times New Roman" panose="02020603050405020304" pitchFamily="18" charset="0"/>
-              </a:rPr>
-              <a:t>9 787</a:t>
-            </a:r>
-            <a:r>
-              <a:rPr lang="ru-RU" dirty="0">
-                <a:latin typeface="Times New Roman" panose="02020603050405020304" pitchFamily="18" charset="0"/>
-                <a:cs typeface="Times New Roman" panose="02020603050405020304" pitchFamily="18" charset="0"/>
-              </a:rPr>
-              <a:t> кадров, </a:t>
-            </a:r>
-            <a:r>
-              <a:rPr lang="ru-RU" dirty="0" err="1">
-                <a:latin typeface="Times New Roman" panose="02020603050405020304" pitchFamily="18" charset="0"/>
-                <a:cs typeface="Times New Roman" panose="02020603050405020304" pitchFamily="18" charset="0"/>
-              </a:rPr>
-              <a:t>валидационная</a:t>
-            </a:r>
-            <a:r>
-              <a:rPr lang="ru-RU" dirty="0">
-                <a:latin typeface="Times New Roman" panose="02020603050405020304" pitchFamily="18" charset="0"/>
-                <a:cs typeface="Times New Roman" panose="02020603050405020304" pitchFamily="18" charset="0"/>
-              </a:rPr>
-              <a:t> </a:t>
-            </a:r>
-            <a:r>
-              <a:rPr lang="ru-RU" b="1" dirty="0">
-                <a:latin typeface="Times New Roman" panose="02020603050405020304" pitchFamily="18" charset="0"/>
-                <a:cs typeface="Times New Roman" panose="02020603050405020304" pitchFamily="18" charset="0"/>
-              </a:rPr>
-              <a:t>3 005 </a:t>
-            </a:r>
-            <a:r>
-              <a:rPr lang="ru-RU" dirty="0">
-                <a:latin typeface="Times New Roman" panose="02020603050405020304" pitchFamily="18" charset="0"/>
-                <a:cs typeface="Times New Roman" panose="02020603050405020304" pitchFamily="18" charset="0"/>
-              </a:rPr>
-              <a:t>кадров, тестовая </a:t>
-            </a:r>
-            <a:r>
-              <a:rPr lang="ru-RU" b="1" dirty="0">
-                <a:latin typeface="Times New Roman" panose="02020603050405020304" pitchFamily="18" charset="0"/>
-                <a:cs typeface="Times New Roman" panose="02020603050405020304" pitchFamily="18" charset="0"/>
-              </a:rPr>
-              <a:t>3 337</a:t>
-            </a:r>
-            <a:r>
-              <a:rPr lang="ru-RU" dirty="0">
-                <a:latin typeface="Times New Roman" panose="02020603050405020304" pitchFamily="18" charset="0"/>
-                <a:cs typeface="Times New Roman" panose="02020603050405020304" pitchFamily="18" charset="0"/>
-              </a:rPr>
-              <a:t> кадров. Их доли составляют 60,6</a:t>
-            </a:r>
-            <a:r>
-              <a:rPr lang="ru-RU" b="1" dirty="0">
-                <a:latin typeface="Times New Roman" panose="02020603050405020304" pitchFamily="18" charset="0"/>
-                <a:cs typeface="Times New Roman" panose="02020603050405020304" pitchFamily="18" charset="0"/>
-              </a:rPr>
-              <a:t> </a:t>
-            </a:r>
-            <a:r>
-              <a:rPr lang="ru-RU" dirty="0">
-                <a:latin typeface="Times New Roman" panose="02020603050405020304" pitchFamily="18" charset="0"/>
-                <a:cs typeface="Times New Roman" panose="02020603050405020304" pitchFamily="18" charset="0"/>
-              </a:rPr>
-              <a:t>%, 18,7</a:t>
-            </a:r>
-            <a:r>
-              <a:rPr lang="ru-RU" b="1" dirty="0">
-                <a:latin typeface="Times New Roman" panose="02020603050405020304" pitchFamily="18" charset="0"/>
-                <a:cs typeface="Times New Roman" panose="02020603050405020304" pitchFamily="18" charset="0"/>
-              </a:rPr>
-              <a:t> </a:t>
-            </a:r>
-            <a:r>
-              <a:rPr lang="ru-RU" dirty="0">
-                <a:latin typeface="Times New Roman" panose="02020603050405020304" pitchFamily="18" charset="0"/>
-                <a:cs typeface="Times New Roman" panose="02020603050405020304" pitchFamily="18" charset="0"/>
-              </a:rPr>
-              <a:t>% и 20,7</a:t>
-            </a:r>
-            <a:r>
-              <a:rPr lang="ru-RU" b="1" dirty="0">
-                <a:latin typeface="Times New Roman" panose="02020603050405020304" pitchFamily="18" charset="0"/>
-                <a:cs typeface="Times New Roman" panose="02020603050405020304" pitchFamily="18" charset="0"/>
-              </a:rPr>
-              <a:t> </a:t>
-            </a:r>
-            <a:r>
-              <a:rPr lang="ru-RU" dirty="0">
-                <a:latin typeface="Times New Roman" panose="02020603050405020304" pitchFamily="18" charset="0"/>
-                <a:cs typeface="Times New Roman" panose="02020603050405020304" pitchFamily="18" charset="0"/>
-              </a:rPr>
-              <a:t>% соответственно. В обучающей выборке представлены </a:t>
-            </a:r>
-            <a:r>
-              <a:rPr lang="ru-RU" b="1" dirty="0">
-                <a:latin typeface="Times New Roman" panose="02020603050405020304" pitchFamily="18" charset="0"/>
-                <a:cs typeface="Times New Roman" panose="02020603050405020304" pitchFamily="18" charset="0"/>
-              </a:rPr>
-              <a:t>2 761 </a:t>
-            </a:r>
-            <a:r>
-              <a:rPr lang="ru-RU" dirty="0">
-                <a:latin typeface="Times New Roman" panose="02020603050405020304" pitchFamily="18" charset="0"/>
-                <a:cs typeface="Times New Roman" panose="02020603050405020304" pitchFamily="18" charset="0"/>
-              </a:rPr>
-              <a:t>кадр со «спагетти» и </a:t>
-            </a:r>
-            <a:r>
-              <a:rPr lang="ru-RU" b="1" dirty="0">
-                <a:latin typeface="Times New Roman" panose="02020603050405020304" pitchFamily="18" charset="0"/>
-                <a:cs typeface="Times New Roman" panose="02020603050405020304" pitchFamily="18" charset="0"/>
-              </a:rPr>
-              <a:t>7 026 </a:t>
-            </a:r>
-            <a:r>
-              <a:rPr lang="ru-RU" dirty="0">
-                <a:latin typeface="Times New Roman" panose="02020603050405020304" pitchFamily="18" charset="0"/>
-                <a:cs typeface="Times New Roman" panose="02020603050405020304" pitchFamily="18" charset="0"/>
-              </a:rPr>
-              <a:t>кадров без видимых признаков этого дефекта</a:t>
-            </a:r>
-          </a:p>
-        </p:txBody>
-      </p:sp>
-      <p:sp>
-        <p:nvSpPr>
-          <p:cNvPr id="25" name="TextBox 24">
-            <a:extLst>
-              <a:ext uri="{FF2B5EF4-FFF2-40B4-BE49-F238E27FC236}">
-                <a16:creationId xmlns:a16="http://schemas.microsoft.com/office/drawing/2014/main" id="{C8B6B692-286B-EE82-F648-38C45239ECF9}"/>
-              </a:ext>
-            </a:extLst>
-          </p:cNvPr>
-          <p:cNvSpPr txBox="1"/>
-          <p:nvPr/>
-        </p:nvSpPr>
-        <p:spPr>
-          <a:xfrm>
-            <a:off x="480428" y="3410116"/>
-            <a:ext cx="3869672" cy="3139321"/>
-          </a:xfrm>
-          <a:prstGeom prst="rect">
-            <a:avLst/>
-          </a:prstGeom>
-          <a:noFill/>
-          <a:ln>
-            <a:solidFill>
-              <a:schemeClr val="tx1"/>
-            </a:solidFill>
-            <a:prstDash val="dash"/>
-          </a:ln>
-        </p:spPr>
-        <p:txBody>
-          <a:bodyPr rot="0" spcFirstLastPara="0" vertOverflow="overflow" horzOverflow="overflow" vert="horz" wrap="square" lIns="91440" tIns="45720" rIns="91440" bIns="45720" numCol="1" spcCol="0" rtlCol="0" fromWordArt="0" anchor="ctr" anchorCtr="0" forceAA="0" compatLnSpc="1">
-            <a:prstTxWarp prst="textNoShape">
-              <a:avLst/>
-            </a:prstTxWarp>
-            <a:spAutoFit/>
-          </a:bodyPr>
-          <a:lstStyle/>
-          <a:p>
-            <a:r>
-              <a:rPr lang="ru-RU" dirty="0">
-                <a:latin typeface="Times New Roman" panose="02020603050405020304" pitchFamily="18" charset="0"/>
-                <a:cs typeface="Times New Roman" panose="02020603050405020304" pitchFamily="18" charset="0"/>
-              </a:rPr>
-              <a:t>В каждой эпохе обучения сохранялся </a:t>
-            </a:r>
-            <a:r>
-              <a:rPr lang="ru-RU" b="1" dirty="0">
-                <a:latin typeface="Times New Roman" panose="02020603050405020304" pitchFamily="18" charset="0"/>
-                <a:cs typeface="Times New Roman" panose="02020603050405020304" pitchFamily="18" charset="0"/>
-              </a:rPr>
-              <a:t>баланс классов 50/50</a:t>
-            </a:r>
-            <a:r>
-              <a:rPr lang="ru-RU" dirty="0">
-                <a:latin typeface="Times New Roman" panose="02020603050405020304" pitchFamily="18" charset="0"/>
-                <a:cs typeface="Times New Roman" panose="02020603050405020304" pitchFamily="18" charset="0"/>
-              </a:rPr>
-              <a:t>: модель получала </a:t>
-            </a:r>
-            <a:r>
-              <a:rPr lang="ru-RU" b="1" dirty="0">
-                <a:latin typeface="Times New Roman" panose="02020603050405020304" pitchFamily="18" charset="0"/>
-                <a:cs typeface="Times New Roman" panose="02020603050405020304" pitchFamily="18" charset="0"/>
-              </a:rPr>
-              <a:t>5 522</a:t>
-            </a:r>
-            <a:r>
-              <a:rPr lang="ru-RU" dirty="0">
-                <a:latin typeface="Times New Roman" panose="02020603050405020304" pitchFamily="18" charset="0"/>
-                <a:cs typeface="Times New Roman" panose="02020603050405020304" pitchFamily="18" charset="0"/>
-              </a:rPr>
-              <a:t> показа изображений, по </a:t>
-            </a:r>
-            <a:r>
-              <a:rPr lang="ru-RU" b="1" dirty="0">
-                <a:latin typeface="Times New Roman" panose="02020603050405020304" pitchFamily="18" charset="0"/>
-                <a:cs typeface="Times New Roman" panose="02020603050405020304" pitchFamily="18" charset="0"/>
-              </a:rPr>
-              <a:t>2 761</a:t>
-            </a:r>
-            <a:r>
-              <a:rPr lang="ru-RU" dirty="0">
-                <a:latin typeface="Times New Roman" panose="02020603050405020304" pitchFamily="18" charset="0"/>
-                <a:cs typeface="Times New Roman" panose="02020603050405020304" pitchFamily="18" charset="0"/>
-              </a:rPr>
-              <a:t> на каждый класс. После аугментации обучающая выборка содержит </a:t>
-            </a:r>
-            <a:r>
-              <a:rPr lang="ru-RU" b="1" dirty="0">
-                <a:latin typeface="Times New Roman" panose="02020603050405020304" pitchFamily="18" charset="0"/>
-                <a:cs typeface="Times New Roman" panose="02020603050405020304" pitchFamily="18" charset="0"/>
-              </a:rPr>
-              <a:t>29 361</a:t>
-            </a:r>
-            <a:r>
-              <a:rPr lang="ru-RU" dirty="0">
-                <a:latin typeface="Times New Roman" panose="02020603050405020304" pitchFamily="18" charset="0"/>
-                <a:cs typeface="Times New Roman" panose="02020603050405020304" pitchFamily="18" charset="0"/>
-              </a:rPr>
-              <a:t> изображение: к каждому исходному кадру добавлены два варианта. </a:t>
-            </a:r>
-            <a:r>
-              <a:rPr lang="ru-RU" dirty="0" err="1">
-                <a:latin typeface="Times New Roman" panose="02020603050405020304" pitchFamily="18" charset="0"/>
-                <a:cs typeface="Times New Roman" panose="02020603050405020304" pitchFamily="18" charset="0"/>
-              </a:rPr>
-              <a:t>Валидационная</a:t>
-            </a:r>
-            <a:r>
-              <a:rPr lang="ru-RU" dirty="0">
-                <a:latin typeface="Times New Roman" panose="02020603050405020304" pitchFamily="18" charset="0"/>
-                <a:cs typeface="Times New Roman" panose="02020603050405020304" pitchFamily="18" charset="0"/>
-              </a:rPr>
-              <a:t> и тестовая выборки содержат только исходные изображения и не </a:t>
-            </a:r>
-            <a:r>
-              <a:rPr lang="ru-RU" dirty="0" err="1">
-                <a:latin typeface="Times New Roman" panose="02020603050405020304" pitchFamily="18" charset="0"/>
-                <a:cs typeface="Times New Roman" panose="02020603050405020304" pitchFamily="18" charset="0"/>
-              </a:rPr>
-              <a:t>аугментируются</a:t>
-            </a:r>
-            <a:r>
-              <a:rPr lang="ru-RU" dirty="0">
-                <a:latin typeface="Times New Roman" panose="02020603050405020304" pitchFamily="18" charset="0"/>
-                <a:cs typeface="Times New Roman" panose="02020603050405020304" pitchFamily="18" charset="0"/>
-              </a:rPr>
-              <a:t>.</a:t>
-            </a:r>
-          </a:p>
-        </p:txBody>
-      </p:sp>
-      <p:sp>
-        <p:nvSpPr>
-          <p:cNvPr id="3" name="TextBox 26">
-            <a:extLst>
-              <a:ext uri="{FF2B5EF4-FFF2-40B4-BE49-F238E27FC236}">
-                <a16:creationId xmlns:a16="http://schemas.microsoft.com/office/drawing/2014/main" id="{DAC2E642-4E22-B5B0-DB31-19292E122F11}"/>
-              </a:ext>
-            </a:extLst>
-          </p:cNvPr>
-          <p:cNvSpPr>
-            <a:spLocks noGrp="1"/>
-          </p:cNvSpPr>
-          <p:nvPr/>
-        </p:nvSpPr>
-        <p:spPr>
-          <a:xfrm>
-            <a:off x="4634025" y="5970317"/>
-            <a:ext cx="4073130" cy="579120"/>
-          </a:xfrm>
-          <a:prstGeom prst="rect">
-            <a:avLst/>
-          </a:prstGeom>
-          <a:noFill/>
-        </p:spPr>
-        <p:txBody>
-          <a:bodyPr rot="0" spcFirstLastPara="0" vert="horz" wrap="square" lIns="91440" tIns="45720" rIns="91440" bIns="45720" anchor="ctr">
-            <a:noAutofit/>
-          </a:bodyPr>
-          <a:lstStyle>
-            <a:defPPr algn="l">
-              <a:defRPr sz="1600" b="0">
-                <a:solidFill>
-                  <a:srgbClr val="000000"/>
-                </a:solidFill>
-                <a:latin typeface="Times New Roman"/>
-                <a:ea typeface="Times New Roman"/>
-                <a:cs typeface="Times New Roman"/>
-              </a:defRPr>
-            </a:defPPr>
-          </a:lstStyle>
-          <a:p>
-            <a:pPr algn="ctr">
-              <a:defRPr sz="1600" b="0">
-                <a:solidFill>
-                  <a:srgbClr val="000000"/>
-                </a:solidFill>
-                <a:latin typeface="Times New Roman"/>
-                <a:ea typeface="Times New Roman"/>
-                <a:cs typeface="Times New Roman"/>
-              </a:defRPr>
-            </a:pPr>
-            <a:r>
-              <a:rPr sz="1600" b="0" dirty="0" err="1">
-                <a:solidFill>
-                  <a:srgbClr val="000000"/>
-                </a:solidFill>
-                <a:latin typeface="Times New Roman"/>
-                <a:ea typeface="Times New Roman"/>
-                <a:cs typeface="Times New Roman"/>
-              </a:rPr>
-              <a:t>Рис</a:t>
-            </a:r>
-            <a:r>
-              <a:rPr sz="1600" b="0" dirty="0">
-                <a:solidFill>
-                  <a:srgbClr val="000000"/>
-                </a:solidFill>
-                <a:latin typeface="Times New Roman"/>
-                <a:ea typeface="Times New Roman"/>
-                <a:cs typeface="Times New Roman"/>
-              </a:rPr>
-              <a:t>. </a:t>
-            </a:r>
-            <a:r>
-              <a:rPr lang="ru-RU" sz="1600" b="0" dirty="0">
-                <a:solidFill>
-                  <a:srgbClr val="000000"/>
-                </a:solidFill>
-                <a:latin typeface="Times New Roman"/>
-                <a:ea typeface="Times New Roman"/>
-                <a:cs typeface="Times New Roman"/>
-              </a:rPr>
-              <a:t>3</a:t>
-            </a:r>
-            <a:r>
-              <a:rPr sz="1600" b="0" dirty="0">
-                <a:solidFill>
-                  <a:srgbClr val="000000"/>
-                </a:solidFill>
-                <a:latin typeface="Times New Roman"/>
-                <a:ea typeface="Times New Roman"/>
-                <a:cs typeface="Times New Roman"/>
-              </a:rPr>
-              <a:t> – </a:t>
-            </a:r>
-            <a:r>
-              <a:rPr lang="ru-RU" sz="1600" b="0" dirty="0">
-                <a:solidFill>
-                  <a:srgbClr val="000000"/>
-                </a:solidFill>
-                <a:latin typeface="Times New Roman"/>
-                <a:ea typeface="Times New Roman"/>
-                <a:cs typeface="Times New Roman"/>
-              </a:rPr>
-              <a:t>Диаграмма распределения исходных кадров по выборкам</a:t>
-            </a:r>
-            <a:endParaRPr sz="1600" b="0" dirty="0">
-              <a:solidFill>
-                <a:srgbClr val="000000"/>
-              </a:solidFill>
-              <a:latin typeface="Times New Roman"/>
-              <a:ea typeface="Times New Roman"/>
-              <a:cs typeface="Times New Roman"/>
-            </a:endParaRPr>
-          </a:p>
-        </p:txBody>
-      </p:sp>
-      <p:pic>
-        <p:nvPicPr>
-          <p:cNvPr id="8" name="Рисунок 7">
-            <a:extLst>
-              <a:ext uri="{FF2B5EF4-FFF2-40B4-BE49-F238E27FC236}">
-                <a16:creationId xmlns:a16="http://schemas.microsoft.com/office/drawing/2014/main" id="{A2B5EBF5-FBE6-336C-42E4-49A8C5D8A0DF}"/>
-              </a:ext>
-            </a:extLst>
-          </p:cNvPr>
-          <p:cNvPicPr>
-            <a:picLocks noChangeAspect="1"/>
-          </p:cNvPicPr>
-          <p:nvPr/>
-        </p:nvPicPr>
-        <p:blipFill>
-          <a:blip r:embed="rId3"/>
-          <a:stretch>
-            <a:fillRect/>
-          </a:stretch>
-        </p:blipFill>
-        <p:spPr>
-          <a:xfrm>
-            <a:off x="4882102" y="3317275"/>
-            <a:ext cx="3976794" cy="2630107"/>
-          </a:xfrm>
-          <a:prstGeom prst="rect">
-            <a:avLst/>
-          </a:prstGeom>
-        </p:spPr>
-      </p:pic>
-    </p:spTree>
-    <p:extLst>
-      <p:ext uri="{BB962C8B-B14F-4D97-AF65-F5344CB8AC3E}">
-        <p14:creationId xmlns:p14="http://schemas.microsoft.com/office/powerpoint/2010/main" val="169297957"/>
-      </p:ext>
-    </p:extLst>
-  </p:cSld>
-  <p:clrMapOvr>
-    <a:masterClrMapping/>
-  </p:clrMapOvr>
-</p:sld>
-</file>
-
-<file path=ppt/slides/slide5.xml><?xml version="1.0" encoding="utf-8"?>
-<p:sld xmlns:a="http://schemas.openxmlformats.org/drawingml/2006/main" xmlns:r="http://schemas.openxmlformats.org/officeDocument/2006/relationships" xmlns:p="http://schemas.openxmlformats.org/presentationml/2006/main">
-  <p:cSld>
-    <p:spTree>
-      <p:nvGrpSpPr>
-        <p:cNvPr id="1" name="">
-          <a:extLst>
-            <a:ext uri="{FF2B5EF4-FFF2-40B4-BE49-F238E27FC236}">
-              <a16:creationId xmlns:a16="http://schemas.microsoft.com/office/drawing/2014/main" id="{586A209A-B3B7-9043-FC7E-DD693EE6AACA}"/>
-            </a:ext>
-          </a:extLst>
-        </p:cNvPr>
-        <p:cNvGrpSpPr/>
-        <p:nvPr/>
-      </p:nvGrpSpPr>
-      <p:grpSpPr>
-        <a:xfrm>
-          <a:off x="0" y="0"/>
-          <a:ext cx="0" cy="0"/>
-          <a:chOff x="0" y="0"/>
-          <a:chExt cx="0" cy="0"/>
-        </a:xfrm>
-      </p:grpSpPr>
-      <p:sp>
-        <p:nvSpPr>
-          <p:cNvPr id="2" name="Заголовок 1">
-            <a:extLst>
-              <a:ext uri="{FF2B5EF4-FFF2-40B4-BE49-F238E27FC236}">
-                <a16:creationId xmlns:a16="http://schemas.microsoft.com/office/drawing/2014/main" id="{648A91D6-F58A-86A8-231A-A5AC58545903}"/>
-              </a:ext>
-            </a:extLst>
-          </p:cNvPr>
-          <p:cNvSpPr>
-            <a:spLocks noGrp="1"/>
-          </p:cNvSpPr>
-          <p:nvPr>
-            <p:ph type="title"/>
-          </p:nvPr>
-        </p:nvSpPr>
-        <p:spPr>
-          <a:xfrm>
-            <a:off x="628648" y="0"/>
-            <a:ext cx="7886700" cy="712868"/>
-          </a:xfrm>
-        </p:spPr>
-        <p:txBody>
-          <a:bodyPr>
-            <a:normAutofit/>
-          </a:bodyPr>
-          <a:lstStyle/>
-          <a:p>
-            <a:pPr algn="ctr"/>
-            <a:r>
-              <a:rPr lang="ru-RU" sz="4000" dirty="0">
-                <a:latin typeface="Times New Roman" panose="02020603050405020304" pitchFamily="18" charset="0"/>
-                <a:ea typeface="Calibri"/>
-                <a:cs typeface="Times New Roman" panose="02020603050405020304" pitchFamily="18" charset="0"/>
-              </a:rPr>
-              <a:t>Подготовка к обучению нейросети</a:t>
-            </a:r>
-          </a:p>
-        </p:txBody>
-      </p:sp>
-      <p:sp>
-        <p:nvSpPr>
-          <p:cNvPr id="5" name="Замещающий номер слайда 4">
-            <a:extLst>
-              <a:ext uri="{FF2B5EF4-FFF2-40B4-BE49-F238E27FC236}">
-                <a16:creationId xmlns:a16="http://schemas.microsoft.com/office/drawing/2014/main" id="{425BE312-5EC5-E722-FD8E-916DFE636F2B}"/>
-              </a:ext>
-            </a:extLst>
-          </p:cNvPr>
-          <p:cNvSpPr>
-            <a:spLocks noGrp="1"/>
-          </p:cNvSpPr>
-          <p:nvPr>
-            <p:ph type="sldNum" sz="quarter" idx="12"/>
-          </p:nvPr>
-        </p:nvSpPr>
-        <p:spPr>
-          <a:xfrm>
-            <a:off x="7088886" y="6493511"/>
-            <a:ext cx="2057400" cy="365125"/>
-          </a:xfrm>
-        </p:spPr>
-        <p:txBody>
-          <a:bodyPr/>
-          <a:lstStyle/>
-          <a:p>
-            <a:fld id="{D6ED8A53-8D2F-4011-BE06-EDB0774336BA}" type="slidenum">
-              <a:rPr lang="ru-RU" sz="2000" dirty="0" smtClean="0">
-                <a:solidFill>
-                  <a:schemeClr val="tx1"/>
-                </a:solidFill>
-                <a:latin typeface="Times New Roman" panose="02020603050405020304" pitchFamily="18" charset="0"/>
-                <a:cs typeface="Times New Roman" panose="02020603050405020304" pitchFamily="18" charset="0"/>
-              </a:rPr>
-              <a:t>5</a:t>
-            </a:fld>
-            <a:endParaRPr lang="ru-RU" sz="2000">
-              <a:solidFill>
-                <a:schemeClr val="tx1"/>
-              </a:solidFill>
-              <a:latin typeface="Times New Roman" panose="02020603050405020304" pitchFamily="18" charset="0"/>
-              <a:ea typeface="Calibri"/>
-              <a:cs typeface="Times New Roman" panose="02020603050405020304" pitchFamily="18" charset="0"/>
-            </a:endParaRPr>
-          </a:p>
-        </p:txBody>
-      </p:sp>
-      <p:sp>
-        <p:nvSpPr>
-          <p:cNvPr id="14" name="TextBox 13">
-            <a:extLst>
-              <a:ext uri="{FF2B5EF4-FFF2-40B4-BE49-F238E27FC236}">
-                <a16:creationId xmlns:a16="http://schemas.microsoft.com/office/drawing/2014/main" id="{733275A9-2422-EE65-68B7-2EFC7CB717FE}"/>
-              </a:ext>
-            </a:extLst>
-          </p:cNvPr>
-          <p:cNvSpPr txBox="1"/>
-          <p:nvPr/>
-        </p:nvSpPr>
-        <p:spPr>
-          <a:xfrm>
-            <a:off x="444579" y="731952"/>
-            <a:ext cx="3869672" cy="2585323"/>
-          </a:xfrm>
-          <a:prstGeom prst="rect">
-            <a:avLst/>
-          </a:prstGeom>
-          <a:noFill/>
-          <a:ln>
-            <a:solidFill>
-              <a:schemeClr val="tx1"/>
-            </a:solidFill>
-            <a:prstDash val="dash"/>
-          </a:ln>
-        </p:spPr>
-        <p:txBody>
-          <a:bodyPr rot="0" spcFirstLastPara="0" vertOverflow="overflow" horzOverflow="overflow" vert="horz" wrap="square" lIns="91440" tIns="45720" rIns="91440" bIns="45720" numCol="1" spcCol="0" rtlCol="0" fromWordArt="0" anchor="ctr" anchorCtr="0" forceAA="0" compatLnSpc="1">
-            <a:prstTxWarp prst="textNoShape">
-              <a:avLst/>
-            </a:prstTxWarp>
-            <a:spAutoFit/>
-          </a:bodyPr>
-          <a:lstStyle/>
-          <a:p>
-            <a:r>
-              <a:rPr lang="ru-RU" dirty="0">
-                <a:latin typeface="Times New Roman" panose="02020603050405020304" pitchFamily="18" charset="0"/>
-                <a:cs typeface="Times New Roman" panose="02020603050405020304" pitchFamily="18" charset="0"/>
-              </a:rPr>
-              <a:t>Для обнаружения «спагетти» выбрана </a:t>
-            </a:r>
-            <a:r>
-              <a:rPr lang="ru-RU" b="1" dirty="0">
-                <a:latin typeface="Times New Roman" panose="02020603050405020304" pitchFamily="18" charset="0"/>
-                <a:cs typeface="Times New Roman" panose="02020603050405020304" pitchFamily="18" charset="0"/>
-              </a:rPr>
-              <a:t>ResNet18</a:t>
-            </a:r>
-            <a:r>
-              <a:rPr lang="ru-RU" dirty="0">
-                <a:latin typeface="Times New Roman" panose="02020603050405020304" pitchFamily="18" charset="0"/>
-                <a:cs typeface="Times New Roman" panose="02020603050405020304" pitchFamily="18" charset="0"/>
-              </a:rPr>
-              <a:t>. Она решает задачу как бинарную классификацию полного кадра: </a:t>
-            </a:r>
-            <a:r>
-              <a:rPr lang="ru-RU" b="1" dirty="0">
-                <a:latin typeface="Times New Roman" panose="02020603050405020304" pitchFamily="18" charset="0"/>
-                <a:cs typeface="Times New Roman" panose="02020603050405020304" pitchFamily="18" charset="0"/>
-              </a:rPr>
-              <a:t>есть дефект или нет</a:t>
-            </a:r>
-            <a:r>
-              <a:rPr lang="ru-RU" dirty="0">
-                <a:latin typeface="Times New Roman" panose="02020603050405020304" pitchFamily="18" charset="0"/>
-                <a:cs typeface="Times New Roman" panose="02020603050405020304" pitchFamily="18" charset="0"/>
-              </a:rPr>
-              <a:t>. Локализация дефектов рамкой в прошлых работах показала низкую точность. Детекция объектов сохранена только для поиска детали на столе.</a:t>
-            </a:r>
-            <a:endParaRPr lang="ru-RU" dirty="0">
-              <a:solidFill>
-                <a:srgbClr val="000000"/>
-              </a:solidFill>
-              <a:latin typeface="Times New Roman" panose="02020603050405020304" pitchFamily="18" charset="0"/>
-              <a:cs typeface="Times New Roman" panose="02020603050405020304" pitchFamily="18" charset="0"/>
-            </a:endParaRPr>
-          </a:p>
-        </p:txBody>
-      </p:sp>
-      <p:sp>
-        <p:nvSpPr>
-          <p:cNvPr id="22" name="TextBox 21">
-            <a:extLst>
-              <a:ext uri="{FF2B5EF4-FFF2-40B4-BE49-F238E27FC236}">
-                <a16:creationId xmlns:a16="http://schemas.microsoft.com/office/drawing/2014/main" id="{EED866B5-82E1-33E1-5DF7-1DCBBD9DCDF8}"/>
-              </a:ext>
-            </a:extLst>
-          </p:cNvPr>
-          <p:cNvSpPr txBox="1"/>
-          <p:nvPr/>
-        </p:nvSpPr>
-        <p:spPr>
-          <a:xfrm>
-            <a:off x="4571998" y="709017"/>
-            <a:ext cx="4197892" cy="2585323"/>
-          </a:xfrm>
-          <a:prstGeom prst="rect">
-            <a:avLst/>
-          </a:prstGeom>
-          <a:noFill/>
-          <a:ln>
-            <a:solidFill>
-              <a:schemeClr val="tx1"/>
-            </a:solidFill>
-            <a:prstDash val="dash"/>
-          </a:ln>
-        </p:spPr>
-        <p:txBody>
-          <a:bodyPr rot="0" spcFirstLastPara="0" vertOverflow="overflow" horzOverflow="overflow" vert="horz" wrap="square" lIns="91440" tIns="45720" rIns="91440" bIns="45720" numCol="1" spcCol="0" rtlCol="0" fromWordArt="0" anchor="ctr" anchorCtr="0" forceAA="0" compatLnSpc="1">
-            <a:prstTxWarp prst="textNoShape">
-              <a:avLst/>
-            </a:prstTxWarp>
-            <a:spAutoFit/>
-          </a:bodyPr>
-          <a:lstStyle/>
-          <a:p>
-            <a:r>
-              <a:rPr lang="ru-RU" dirty="0">
-                <a:latin typeface="Times New Roman" panose="02020603050405020304" pitchFamily="18" charset="0"/>
-                <a:cs typeface="Times New Roman" panose="02020603050405020304" pitchFamily="18" charset="0"/>
-              </a:rPr>
-              <a:t>Датасет содержит </a:t>
-            </a:r>
-            <a:r>
-              <a:rPr lang="ru-RU" b="1" dirty="0">
-                <a:latin typeface="Times New Roman" panose="02020603050405020304" pitchFamily="18" charset="0"/>
-                <a:cs typeface="Times New Roman" panose="02020603050405020304" pitchFamily="18" charset="0"/>
-              </a:rPr>
-              <a:t>16 129 </a:t>
-            </a:r>
-            <a:r>
-              <a:rPr lang="ru-RU" dirty="0">
-                <a:latin typeface="Times New Roman" panose="02020603050405020304" pitchFamily="18" charset="0"/>
-                <a:cs typeface="Times New Roman" panose="02020603050405020304" pitchFamily="18" charset="0"/>
-              </a:rPr>
-              <a:t>исходных кадров </a:t>
-            </a:r>
-            <a:r>
-              <a:rPr lang="ru-RU" b="1" dirty="0">
-                <a:latin typeface="Times New Roman" panose="02020603050405020304" pitchFamily="18" charset="0"/>
-                <a:cs typeface="Times New Roman" panose="02020603050405020304" pitchFamily="18" charset="0"/>
-              </a:rPr>
-              <a:t>без аугментаций</a:t>
-            </a:r>
-            <a:r>
-              <a:rPr lang="ru-RU" dirty="0">
-                <a:latin typeface="Times New Roman" panose="02020603050405020304" pitchFamily="18" charset="0"/>
-                <a:cs typeface="Times New Roman" panose="02020603050405020304" pitchFamily="18" charset="0"/>
-              </a:rPr>
-              <a:t>. Обучающая выборка включает </a:t>
-            </a:r>
-            <a:r>
-              <a:rPr lang="ru-RU" b="1" dirty="0">
-                <a:latin typeface="Times New Roman" panose="02020603050405020304" pitchFamily="18" charset="0"/>
-                <a:cs typeface="Times New Roman" panose="02020603050405020304" pitchFamily="18" charset="0"/>
-              </a:rPr>
-              <a:t>9 787</a:t>
-            </a:r>
-            <a:r>
-              <a:rPr lang="ru-RU" dirty="0">
-                <a:latin typeface="Times New Roman" panose="02020603050405020304" pitchFamily="18" charset="0"/>
-                <a:cs typeface="Times New Roman" panose="02020603050405020304" pitchFamily="18" charset="0"/>
-              </a:rPr>
-              <a:t> кадров, </a:t>
-            </a:r>
-            <a:r>
-              <a:rPr lang="ru-RU" dirty="0" err="1">
-                <a:latin typeface="Times New Roman" panose="02020603050405020304" pitchFamily="18" charset="0"/>
-                <a:cs typeface="Times New Roman" panose="02020603050405020304" pitchFamily="18" charset="0"/>
-              </a:rPr>
-              <a:t>валидационная</a:t>
-            </a:r>
-            <a:r>
-              <a:rPr lang="ru-RU" dirty="0">
-                <a:latin typeface="Times New Roman" panose="02020603050405020304" pitchFamily="18" charset="0"/>
-                <a:cs typeface="Times New Roman" panose="02020603050405020304" pitchFamily="18" charset="0"/>
-              </a:rPr>
-              <a:t> </a:t>
-            </a:r>
-            <a:r>
-              <a:rPr lang="ru-RU" b="1" dirty="0">
-                <a:latin typeface="Times New Roman" panose="02020603050405020304" pitchFamily="18" charset="0"/>
-                <a:cs typeface="Times New Roman" panose="02020603050405020304" pitchFamily="18" charset="0"/>
-              </a:rPr>
-              <a:t>3 005 </a:t>
-            </a:r>
-            <a:r>
-              <a:rPr lang="ru-RU" dirty="0">
-                <a:latin typeface="Times New Roman" panose="02020603050405020304" pitchFamily="18" charset="0"/>
-                <a:cs typeface="Times New Roman" panose="02020603050405020304" pitchFamily="18" charset="0"/>
-              </a:rPr>
-              <a:t>кадр, тестовая </a:t>
-            </a:r>
-            <a:r>
-              <a:rPr lang="ru-RU" b="1" dirty="0">
-                <a:latin typeface="Times New Roman" panose="02020603050405020304" pitchFamily="18" charset="0"/>
-                <a:cs typeface="Times New Roman" panose="02020603050405020304" pitchFamily="18" charset="0"/>
-              </a:rPr>
-              <a:t>3 337</a:t>
-            </a:r>
-            <a:r>
-              <a:rPr lang="ru-RU" dirty="0">
-                <a:latin typeface="Times New Roman" panose="02020603050405020304" pitchFamily="18" charset="0"/>
-                <a:cs typeface="Times New Roman" panose="02020603050405020304" pitchFamily="18" charset="0"/>
-              </a:rPr>
-              <a:t> кадров. Их доли составляют 60,6</a:t>
-            </a:r>
-            <a:r>
-              <a:rPr lang="ru-RU" b="1" dirty="0">
-                <a:latin typeface="Times New Roman" panose="02020603050405020304" pitchFamily="18" charset="0"/>
-                <a:cs typeface="Times New Roman" panose="02020603050405020304" pitchFamily="18" charset="0"/>
-              </a:rPr>
-              <a:t> </a:t>
-            </a:r>
-            <a:r>
-              <a:rPr lang="ru-RU" dirty="0">
-                <a:latin typeface="Times New Roman" panose="02020603050405020304" pitchFamily="18" charset="0"/>
-                <a:cs typeface="Times New Roman" panose="02020603050405020304" pitchFamily="18" charset="0"/>
-              </a:rPr>
-              <a:t>%, 18,7</a:t>
-            </a:r>
-            <a:r>
-              <a:rPr lang="ru-RU" b="1" dirty="0">
-                <a:latin typeface="Times New Roman" panose="02020603050405020304" pitchFamily="18" charset="0"/>
-                <a:cs typeface="Times New Roman" panose="02020603050405020304" pitchFamily="18" charset="0"/>
-              </a:rPr>
-              <a:t> </a:t>
-            </a:r>
-            <a:r>
-              <a:rPr lang="ru-RU" dirty="0">
-                <a:latin typeface="Times New Roman" panose="02020603050405020304" pitchFamily="18" charset="0"/>
-                <a:cs typeface="Times New Roman" panose="02020603050405020304" pitchFamily="18" charset="0"/>
-              </a:rPr>
-              <a:t>% и 20,7</a:t>
-            </a:r>
-            <a:r>
-              <a:rPr lang="ru-RU" b="1" dirty="0">
-                <a:latin typeface="Times New Roman" panose="02020603050405020304" pitchFamily="18" charset="0"/>
-                <a:cs typeface="Times New Roman" panose="02020603050405020304" pitchFamily="18" charset="0"/>
-              </a:rPr>
-              <a:t> </a:t>
-            </a:r>
-            <a:r>
-              <a:rPr lang="ru-RU" dirty="0">
-                <a:latin typeface="Times New Roman" panose="02020603050405020304" pitchFamily="18" charset="0"/>
-                <a:cs typeface="Times New Roman" panose="02020603050405020304" pitchFamily="18" charset="0"/>
-              </a:rPr>
-              <a:t>% соответственно. В обучающей выборке представлены </a:t>
-            </a:r>
-            <a:r>
-              <a:rPr lang="ru-RU" b="1" dirty="0">
-                <a:latin typeface="Times New Roman" panose="02020603050405020304" pitchFamily="18" charset="0"/>
-                <a:cs typeface="Times New Roman" panose="02020603050405020304" pitchFamily="18" charset="0"/>
-              </a:rPr>
-              <a:t>2 751 </a:t>
-            </a:r>
-            <a:r>
-              <a:rPr lang="ru-RU" dirty="0">
-                <a:latin typeface="Times New Roman" panose="02020603050405020304" pitchFamily="18" charset="0"/>
-                <a:cs typeface="Times New Roman" panose="02020603050405020304" pitchFamily="18" charset="0"/>
-              </a:rPr>
-              <a:t>кадр со «спагетти» и </a:t>
-            </a:r>
-            <a:r>
-              <a:rPr lang="ru-RU" b="1" dirty="0">
-                <a:latin typeface="Times New Roman" panose="02020603050405020304" pitchFamily="18" charset="0"/>
-                <a:cs typeface="Times New Roman" panose="02020603050405020304" pitchFamily="18" charset="0"/>
-              </a:rPr>
-              <a:t>7 017 </a:t>
-            </a:r>
-            <a:r>
-              <a:rPr lang="ru-RU" dirty="0">
-                <a:latin typeface="Times New Roman" panose="02020603050405020304" pitchFamily="18" charset="0"/>
-                <a:cs typeface="Times New Roman" panose="02020603050405020304" pitchFamily="18" charset="0"/>
-              </a:rPr>
-              <a:t>кадров без видимых признаков этого дефекта</a:t>
-            </a:r>
-          </a:p>
-        </p:txBody>
-      </p:sp>
-      <p:sp>
-        <p:nvSpPr>
-          <p:cNvPr id="25" name="TextBox 24">
-            <a:extLst>
-              <a:ext uri="{FF2B5EF4-FFF2-40B4-BE49-F238E27FC236}">
-                <a16:creationId xmlns:a16="http://schemas.microsoft.com/office/drawing/2014/main" id="{C8B6B692-286B-EE82-F648-38C45239ECF9}"/>
-              </a:ext>
-            </a:extLst>
-          </p:cNvPr>
-          <p:cNvSpPr txBox="1"/>
-          <p:nvPr/>
-        </p:nvSpPr>
-        <p:spPr>
-          <a:xfrm>
-            <a:off x="480428" y="3410116"/>
-            <a:ext cx="3869672" cy="3139321"/>
-          </a:xfrm>
-          <a:prstGeom prst="rect">
-            <a:avLst/>
-          </a:prstGeom>
-          <a:noFill/>
-          <a:ln>
-            <a:solidFill>
-              <a:schemeClr val="tx1"/>
-            </a:solidFill>
-            <a:prstDash val="dash"/>
-          </a:ln>
-        </p:spPr>
-        <p:txBody>
-          <a:bodyPr rot="0" spcFirstLastPara="0" vertOverflow="overflow" horzOverflow="overflow" vert="horz" wrap="square" lIns="91440" tIns="45720" rIns="91440" bIns="45720" numCol="1" spcCol="0" rtlCol="0" fromWordArt="0" anchor="ctr" anchorCtr="0" forceAA="0" compatLnSpc="1">
-            <a:prstTxWarp prst="textNoShape">
-              <a:avLst/>
-            </a:prstTxWarp>
-            <a:spAutoFit/>
-          </a:bodyPr>
-          <a:lstStyle/>
-          <a:p>
-            <a:r>
-              <a:rPr lang="ru-RU" dirty="0">
-                <a:latin typeface="Times New Roman" panose="02020603050405020304" pitchFamily="18" charset="0"/>
-                <a:cs typeface="Times New Roman" panose="02020603050405020304" pitchFamily="18" charset="0"/>
-              </a:rPr>
-              <a:t>В каждой эпохе обучения сохранялся </a:t>
-            </a:r>
-            <a:r>
-              <a:rPr lang="ru-RU" b="1" dirty="0">
-                <a:latin typeface="Times New Roman" panose="02020603050405020304" pitchFamily="18" charset="0"/>
-                <a:cs typeface="Times New Roman" panose="02020603050405020304" pitchFamily="18" charset="0"/>
-              </a:rPr>
-              <a:t>баланс классов 50/50</a:t>
-            </a:r>
-            <a:r>
-              <a:rPr lang="ru-RU" dirty="0">
-                <a:latin typeface="Times New Roman" panose="02020603050405020304" pitchFamily="18" charset="0"/>
-                <a:cs typeface="Times New Roman" panose="02020603050405020304" pitchFamily="18" charset="0"/>
-              </a:rPr>
-              <a:t>: модель получала </a:t>
-            </a:r>
-            <a:r>
-              <a:rPr lang="ru-RU" b="1" dirty="0">
-                <a:latin typeface="Times New Roman" panose="02020603050405020304" pitchFamily="18" charset="0"/>
-                <a:cs typeface="Times New Roman" panose="02020603050405020304" pitchFamily="18" charset="0"/>
-              </a:rPr>
-              <a:t>5 502</a:t>
-            </a:r>
-            <a:r>
-              <a:rPr lang="ru-RU" dirty="0">
-                <a:latin typeface="Times New Roman" panose="02020603050405020304" pitchFamily="18" charset="0"/>
-                <a:cs typeface="Times New Roman" panose="02020603050405020304" pitchFamily="18" charset="0"/>
-              </a:rPr>
-              <a:t> показа изображений, по </a:t>
-            </a:r>
-            <a:r>
-              <a:rPr lang="ru-RU" b="1" dirty="0">
-                <a:latin typeface="Times New Roman" panose="02020603050405020304" pitchFamily="18" charset="0"/>
-                <a:cs typeface="Times New Roman" panose="02020603050405020304" pitchFamily="18" charset="0"/>
-              </a:rPr>
-              <a:t>2 751</a:t>
-            </a:r>
-            <a:r>
-              <a:rPr lang="ru-RU" dirty="0">
-                <a:latin typeface="Times New Roman" panose="02020603050405020304" pitchFamily="18" charset="0"/>
-                <a:cs typeface="Times New Roman" panose="02020603050405020304" pitchFamily="18" charset="0"/>
-              </a:rPr>
-              <a:t> на каждый класс. После аугментации обучающая выборка содержит </a:t>
-            </a:r>
-            <a:r>
-              <a:rPr lang="ru-RU" b="1" dirty="0">
-                <a:latin typeface="Times New Roman" panose="02020603050405020304" pitchFamily="18" charset="0"/>
-                <a:cs typeface="Times New Roman" panose="02020603050405020304" pitchFamily="18" charset="0"/>
-              </a:rPr>
-              <a:t>29 304</a:t>
-            </a:r>
-            <a:r>
-              <a:rPr lang="ru-RU" dirty="0">
-                <a:latin typeface="Times New Roman" panose="02020603050405020304" pitchFamily="18" charset="0"/>
-                <a:cs typeface="Times New Roman" panose="02020603050405020304" pitchFamily="18" charset="0"/>
-              </a:rPr>
-              <a:t> изображения: к каждому исходному кадру добавлены два варианта. </a:t>
-            </a:r>
-            <a:r>
-              <a:rPr lang="ru-RU" dirty="0" err="1">
-                <a:latin typeface="Times New Roman" panose="02020603050405020304" pitchFamily="18" charset="0"/>
-                <a:cs typeface="Times New Roman" panose="02020603050405020304" pitchFamily="18" charset="0"/>
-              </a:rPr>
-              <a:t>Валидационная</a:t>
-            </a:r>
-            <a:r>
-              <a:rPr lang="ru-RU" dirty="0">
-                <a:latin typeface="Times New Roman" panose="02020603050405020304" pitchFamily="18" charset="0"/>
-                <a:cs typeface="Times New Roman" panose="02020603050405020304" pitchFamily="18" charset="0"/>
-              </a:rPr>
-              <a:t> и тестовая выборки содержат только исходные изображения и не </a:t>
-            </a:r>
-            <a:r>
-              <a:rPr lang="ru-RU" dirty="0" err="1">
-                <a:latin typeface="Times New Roman" panose="02020603050405020304" pitchFamily="18" charset="0"/>
-                <a:cs typeface="Times New Roman" panose="02020603050405020304" pitchFamily="18" charset="0"/>
-              </a:rPr>
-              <a:t>аугментируются</a:t>
-            </a:r>
-            <a:r>
-              <a:rPr lang="ru-RU" dirty="0">
-                <a:latin typeface="Times New Roman" panose="02020603050405020304" pitchFamily="18" charset="0"/>
-                <a:cs typeface="Times New Roman" panose="02020603050405020304" pitchFamily="18" charset="0"/>
-              </a:rPr>
-              <a:t>.</a:t>
-            </a:r>
-          </a:p>
-        </p:txBody>
-      </p:sp>
-      <p:sp>
-        <p:nvSpPr>
-          <p:cNvPr id="3" name="TextBox 26">
-            <a:extLst>
-              <a:ext uri="{FF2B5EF4-FFF2-40B4-BE49-F238E27FC236}">
-                <a16:creationId xmlns:a16="http://schemas.microsoft.com/office/drawing/2014/main" id="{DAC2E642-4E22-B5B0-DB31-19292E122F11}"/>
-              </a:ext>
-            </a:extLst>
-          </p:cNvPr>
-          <p:cNvSpPr>
-            <a:spLocks noGrp="1"/>
-          </p:cNvSpPr>
-          <p:nvPr/>
-        </p:nvSpPr>
-        <p:spPr>
-          <a:xfrm>
-            <a:off x="4634025" y="5970317"/>
-            <a:ext cx="4073130" cy="579120"/>
-          </a:xfrm>
-          <a:prstGeom prst="rect">
-            <a:avLst/>
-          </a:prstGeom>
-          <a:noFill/>
-        </p:spPr>
-        <p:txBody>
-          <a:bodyPr rot="0" spcFirstLastPara="0" vert="horz" wrap="square" lIns="91440" tIns="45720" rIns="91440" bIns="45720" anchor="ctr">
-            <a:noAutofit/>
-          </a:bodyPr>
-          <a:lstStyle>
-            <a:defPPr algn="l">
-              <a:defRPr sz="1600" b="0">
-                <a:solidFill>
-                  <a:srgbClr val="000000"/>
-                </a:solidFill>
-                <a:latin typeface="Times New Roman"/>
-                <a:ea typeface="Times New Roman"/>
-                <a:cs typeface="Times New Roman"/>
-              </a:defRPr>
-            </a:defPPr>
-          </a:lstStyle>
-          <a:p>
-            <a:pPr algn="ctr">
-              <a:defRPr sz="1600" b="0">
-                <a:solidFill>
-                  <a:srgbClr val="000000"/>
-                </a:solidFill>
-                <a:latin typeface="Times New Roman"/>
-                <a:ea typeface="Times New Roman"/>
-                <a:cs typeface="Times New Roman"/>
-              </a:defRPr>
-            </a:pPr>
-            <a:r>
-              <a:rPr sz="1600" b="0" dirty="0" err="1">
-                <a:solidFill>
-                  <a:srgbClr val="000000"/>
-                </a:solidFill>
-                <a:latin typeface="Times New Roman"/>
-                <a:ea typeface="Times New Roman"/>
-                <a:cs typeface="Times New Roman"/>
-              </a:rPr>
-              <a:t>Рис</a:t>
-            </a:r>
-            <a:r>
-              <a:rPr sz="1600" b="0" dirty="0">
-                <a:solidFill>
-                  <a:srgbClr val="000000"/>
-                </a:solidFill>
-                <a:latin typeface="Times New Roman"/>
-                <a:ea typeface="Times New Roman"/>
-                <a:cs typeface="Times New Roman"/>
-              </a:rPr>
-              <a:t>. </a:t>
-            </a:r>
-            <a:r>
-              <a:rPr lang="ru-RU" sz="1600" b="0" dirty="0">
-                <a:solidFill>
-                  <a:srgbClr val="000000"/>
-                </a:solidFill>
-                <a:latin typeface="Times New Roman"/>
-                <a:ea typeface="Times New Roman"/>
-                <a:cs typeface="Times New Roman"/>
-              </a:rPr>
-              <a:t>3</a:t>
-            </a:r>
-            <a:r>
-              <a:rPr sz="1600" b="0" dirty="0">
-                <a:solidFill>
-                  <a:srgbClr val="000000"/>
-                </a:solidFill>
-                <a:latin typeface="Times New Roman"/>
-                <a:ea typeface="Times New Roman"/>
-                <a:cs typeface="Times New Roman"/>
-              </a:rPr>
-              <a:t> – </a:t>
-            </a:r>
-            <a:r>
-              <a:rPr lang="ru-RU" sz="1600" b="0" dirty="0">
-                <a:solidFill>
-                  <a:srgbClr val="000000"/>
-                </a:solidFill>
-                <a:latin typeface="Times New Roman"/>
-                <a:ea typeface="Times New Roman"/>
-                <a:cs typeface="Times New Roman"/>
-              </a:rPr>
-              <a:t>Диаграмма распределения исходных кадров по выборкам</a:t>
-            </a:r>
-            <a:endParaRPr sz="1600" b="0" dirty="0">
-              <a:solidFill>
-                <a:srgbClr val="000000"/>
-              </a:solidFill>
-              <a:latin typeface="Times New Roman"/>
-              <a:ea typeface="Times New Roman"/>
-              <a:cs typeface="Times New Roman"/>
-            </a:endParaRPr>
-          </a:p>
-        </p:txBody>
-      </p:sp>
-      <p:pic>
-        <p:nvPicPr>
-          <p:cNvPr id="8" name="Рисунок 7">
-            <a:extLst>
-              <a:ext uri="{FF2B5EF4-FFF2-40B4-BE49-F238E27FC236}">
-                <a16:creationId xmlns:a16="http://schemas.microsoft.com/office/drawing/2014/main" id="{A2B5EBF5-FBE6-336C-42E4-49A8C5D8A0DF}"/>
-              </a:ext>
-            </a:extLst>
-          </p:cNvPr>
-          <p:cNvPicPr>
-            <a:picLocks noChangeAspect="1"/>
-          </p:cNvPicPr>
-          <p:nvPr/>
-        </p:nvPicPr>
-        <p:blipFill>
-          <a:blip r:embed="rId3"/>
-          <a:stretch>
-            <a:fillRect/>
-          </a:stretch>
-        </p:blipFill>
-        <p:spPr>
-          <a:xfrm>
-            <a:off x="4882102" y="3317275"/>
-            <a:ext cx="3976794" cy="2630107"/>
-          </a:xfrm>
-          <a:prstGeom prst="rect">
-            <a:avLst/>
-          </a:prstGeom>
-        </p:spPr>
-      </p:pic>
-    </p:spTree>
-    <p:extLst>
-      <p:ext uri="{BB962C8B-B14F-4D97-AF65-F5344CB8AC3E}">
-        <p14:creationId xmlns:p14="http://schemas.microsoft.com/office/powerpoint/2010/main" val="2707964732"/>
-      </p:ext>
-    </p:extLst>
-  </p:cSld>
-  <p:clrMapOvr>
-    <a:masterClrMapping/>
-  </p:clrMapOvr>
-</p:sld>
-</file>
-
-<file path=ppt/slides/slide6.xml><?xml version="1.0" encoding="utf-8"?>
-<p:sld xmlns:a="http://schemas.openxmlformats.org/drawingml/2006/main" xmlns:r="http://schemas.openxmlformats.org/officeDocument/2006/relationships" xmlns:p="http://schemas.openxmlformats.org/presentationml/2006/main">
-  <p:cSld>
-    <p:spTree>
-      <p:nvGrpSpPr>
-        <p:cNvPr id="1" name="">
-          <a:extLst>
-            <a:ext uri="{FF2B5EF4-FFF2-40B4-BE49-F238E27FC236}">
-              <a16:creationId xmlns:a16="http://schemas.microsoft.com/office/drawing/2014/main" id="{586A209A-B3B7-9043-FC7E-DD693EE6AACA}"/>
-            </a:ext>
-          </a:extLst>
-        </p:cNvPr>
-        <p:cNvGrpSpPr/>
-        <p:nvPr/>
-      </p:nvGrpSpPr>
-      <p:grpSpPr>
-        <a:xfrm>
-          <a:off x="0" y="0"/>
-          <a:ext cx="0" cy="0"/>
-          <a:chOff x="0" y="0"/>
-          <a:chExt cx="0" cy="0"/>
-        </a:xfrm>
-      </p:grpSpPr>
-      <p:sp>
-        <p:nvSpPr>
-          <p:cNvPr id="2" name="Заголовок 1">
-            <a:extLst>
-              <a:ext uri="{FF2B5EF4-FFF2-40B4-BE49-F238E27FC236}">
-                <a16:creationId xmlns:a16="http://schemas.microsoft.com/office/drawing/2014/main" id="{648A91D6-F58A-86A8-231A-A5AC58545903}"/>
-              </a:ext>
-            </a:extLst>
-          </p:cNvPr>
-          <p:cNvSpPr>
-            <a:spLocks noGrp="1"/>
-          </p:cNvSpPr>
-          <p:nvPr>
-            <p:ph type="title"/>
-          </p:nvPr>
-        </p:nvSpPr>
-        <p:spPr>
-          <a:xfrm>
-            <a:off x="628648" y="0"/>
-            <a:ext cx="7886700" cy="712868"/>
-          </a:xfrm>
-        </p:spPr>
-        <p:txBody>
-          <a:bodyPr>
-            <a:normAutofit/>
-          </a:bodyPr>
-          <a:lstStyle/>
-          <a:p>
-            <a:pPr algn="ctr"/>
-            <a:r>
-              <a:rPr lang="ru-RU" sz="4000" dirty="0">
-                <a:latin typeface="Times New Roman" panose="02020603050405020304" pitchFamily="18" charset="0"/>
-                <a:ea typeface="Calibri"/>
-                <a:cs typeface="Times New Roman" panose="02020603050405020304" pitchFamily="18" charset="0"/>
-              </a:rPr>
-              <a:t>Результат обучения нейросети</a:t>
-            </a:r>
-          </a:p>
-        </p:txBody>
-      </p:sp>
-      <p:sp>
-        <p:nvSpPr>
-          <p:cNvPr id="5" name="Замещающий номер слайда 4">
-            <a:extLst>
-              <a:ext uri="{FF2B5EF4-FFF2-40B4-BE49-F238E27FC236}">
-                <a16:creationId xmlns:a16="http://schemas.microsoft.com/office/drawing/2014/main" id="{425BE312-5EC5-E722-FD8E-916DFE636F2B}"/>
-              </a:ext>
-            </a:extLst>
-          </p:cNvPr>
-          <p:cNvSpPr>
-            <a:spLocks noGrp="1"/>
-          </p:cNvSpPr>
-          <p:nvPr>
-            <p:ph type="sldNum" sz="quarter" idx="12"/>
-          </p:nvPr>
-        </p:nvSpPr>
-        <p:spPr>
-          <a:xfrm>
-            <a:off x="7088886" y="6493511"/>
-            <a:ext cx="2057400" cy="365125"/>
-          </a:xfrm>
-        </p:spPr>
-        <p:txBody>
-          <a:bodyPr/>
-          <a:lstStyle/>
-          <a:p>
-            <a:fld id="{D6ED8A53-8D2F-4011-BE06-EDB0774336BA}" type="slidenum">
-              <a:rPr lang="ru-RU" sz="2000" dirty="0" smtClean="0">
-                <a:solidFill>
-                  <a:schemeClr val="tx1"/>
-                </a:solidFill>
-                <a:latin typeface="Times New Roman" panose="02020603050405020304" pitchFamily="18" charset="0"/>
-                <a:cs typeface="Times New Roman" panose="02020603050405020304" pitchFamily="18" charset="0"/>
-              </a:rPr>
-              <a:t>6</a:t>
-            </a:fld>
-            <a:endParaRPr lang="ru-RU" sz="2000">
-              <a:solidFill>
-                <a:schemeClr val="tx1"/>
-              </a:solidFill>
-              <a:latin typeface="Times New Roman" panose="02020603050405020304" pitchFamily="18" charset="0"/>
-              <a:ea typeface="Calibri"/>
-              <a:cs typeface="Times New Roman" panose="02020603050405020304" pitchFamily="18" charset="0"/>
-            </a:endParaRPr>
-          </a:p>
-        </p:txBody>
-      </p:sp>
-      <p:sp>
-        <p:nvSpPr>
-          <p:cNvPr id="14" name="TextBox 13">
-            <a:extLst>
-              <a:ext uri="{FF2B5EF4-FFF2-40B4-BE49-F238E27FC236}">
-                <a16:creationId xmlns:a16="http://schemas.microsoft.com/office/drawing/2014/main" id="{733275A9-2422-EE65-68B7-2EFC7CB717FE}"/>
-              </a:ext>
-            </a:extLst>
-          </p:cNvPr>
-          <p:cNvSpPr txBox="1"/>
-          <p:nvPr/>
-        </p:nvSpPr>
-        <p:spPr>
-          <a:xfrm>
-            <a:off x="444579" y="731952"/>
-            <a:ext cx="3869672" cy="2585323"/>
-          </a:xfrm>
-          <a:prstGeom prst="rect">
-            <a:avLst/>
-          </a:prstGeom>
-          <a:noFill/>
-          <a:ln>
-            <a:solidFill>
-              <a:schemeClr val="tx1"/>
-            </a:solidFill>
-            <a:prstDash val="dash"/>
-          </a:ln>
-        </p:spPr>
-        <p:txBody>
-          <a:bodyPr rot="0" spcFirstLastPara="0" vertOverflow="overflow" horzOverflow="overflow" vert="horz" wrap="square" lIns="91440" tIns="45720" rIns="91440" bIns="45720" numCol="1" spcCol="0" rtlCol="0" fromWordArt="0" anchor="ctr" anchorCtr="0" forceAA="0" compatLnSpc="1">
-            <a:prstTxWarp prst="textNoShape">
-              <a:avLst/>
-            </a:prstTxWarp>
-            <a:spAutoFit/>
-          </a:bodyPr>
-          <a:lstStyle/>
-          <a:p>
-            <a:r>
-              <a:rPr lang="ru-RU" dirty="0">
-                <a:latin typeface="Times New Roman" panose="02020603050405020304" pitchFamily="18" charset="0"/>
-                <a:cs typeface="Times New Roman" panose="02020603050405020304" pitchFamily="18" charset="0"/>
-              </a:rPr>
-              <a:t>Для обнаружения «спагетти» выбрана </a:t>
-            </a:r>
-            <a:r>
-              <a:rPr lang="ru-RU" b="1" dirty="0">
-                <a:latin typeface="Times New Roman" panose="02020603050405020304" pitchFamily="18" charset="0"/>
-                <a:cs typeface="Times New Roman" panose="02020603050405020304" pitchFamily="18" charset="0"/>
-              </a:rPr>
-              <a:t>ResNet18</a:t>
-            </a:r>
-            <a:r>
-              <a:rPr lang="ru-RU" dirty="0">
-                <a:latin typeface="Times New Roman" panose="02020603050405020304" pitchFamily="18" charset="0"/>
-                <a:cs typeface="Times New Roman" panose="02020603050405020304" pitchFamily="18" charset="0"/>
-              </a:rPr>
-              <a:t>. Она решает задачу как бинарную классификацию полного кадра: </a:t>
-            </a:r>
-            <a:r>
-              <a:rPr lang="ru-RU" b="1" dirty="0">
-                <a:latin typeface="Times New Roman" panose="02020603050405020304" pitchFamily="18" charset="0"/>
-                <a:cs typeface="Times New Roman" panose="02020603050405020304" pitchFamily="18" charset="0"/>
-              </a:rPr>
-              <a:t>есть дефект или нет</a:t>
-            </a:r>
-            <a:r>
-              <a:rPr lang="ru-RU" dirty="0">
-                <a:latin typeface="Times New Roman" panose="02020603050405020304" pitchFamily="18" charset="0"/>
-                <a:cs typeface="Times New Roman" panose="02020603050405020304" pitchFamily="18" charset="0"/>
-              </a:rPr>
-              <a:t>. Локализация дефектов рамкой в прошлых работах показала низкую точность. Детекция объектов сохранена только для поиска детали на столе.</a:t>
-            </a:r>
-            <a:endParaRPr lang="ru-RU" dirty="0">
-              <a:solidFill>
-                <a:srgbClr val="000000"/>
-              </a:solidFill>
-              <a:latin typeface="Times New Roman" panose="02020603050405020304" pitchFamily="18" charset="0"/>
-              <a:cs typeface="Times New Roman" panose="02020603050405020304" pitchFamily="18" charset="0"/>
-            </a:endParaRPr>
-          </a:p>
-        </p:txBody>
-      </p:sp>
-      <p:sp>
-        <p:nvSpPr>
-          <p:cNvPr id="22" name="TextBox 21">
-            <a:extLst>
-              <a:ext uri="{FF2B5EF4-FFF2-40B4-BE49-F238E27FC236}">
-                <a16:creationId xmlns:a16="http://schemas.microsoft.com/office/drawing/2014/main" id="{EED866B5-82E1-33E1-5DF7-1DCBBD9DCDF8}"/>
-              </a:ext>
-            </a:extLst>
-          </p:cNvPr>
-          <p:cNvSpPr txBox="1"/>
-          <p:nvPr/>
-        </p:nvSpPr>
-        <p:spPr>
-          <a:xfrm>
-            <a:off x="4771553" y="724829"/>
-            <a:ext cx="4197892" cy="1477328"/>
-          </a:xfrm>
-          <a:prstGeom prst="rect">
-            <a:avLst/>
-          </a:prstGeom>
-          <a:noFill/>
-          <a:ln>
-            <a:solidFill>
-              <a:schemeClr val="tx1"/>
-            </a:solidFill>
-            <a:prstDash val="dash"/>
-          </a:ln>
-        </p:spPr>
-        <p:txBody>
-          <a:bodyPr rot="0" spcFirstLastPara="0" vertOverflow="overflow" horzOverflow="overflow" vert="horz" wrap="square" lIns="91440" tIns="45720" rIns="91440" bIns="45720" numCol="1" spcCol="0" rtlCol="0" fromWordArt="0" anchor="ctr" anchorCtr="0" forceAA="0" compatLnSpc="1">
-            <a:prstTxWarp prst="textNoShape">
-              <a:avLst/>
-            </a:prstTxWarp>
-            <a:spAutoFit/>
-          </a:bodyPr>
-          <a:lstStyle/>
-          <a:p>
-            <a:r>
-              <a:rPr lang="ru-RU" dirty="0">
-                <a:latin typeface="Times New Roman" panose="02020603050405020304" pitchFamily="18" charset="0"/>
-                <a:cs typeface="Times New Roman" panose="02020603050405020304" pitchFamily="18" charset="0"/>
-              </a:rPr>
-              <a:t>Датасет содержит </a:t>
-            </a:r>
-            <a:r>
-              <a:rPr lang="ru-RU" b="1" dirty="0">
-                <a:latin typeface="Times New Roman" panose="02020603050405020304" pitchFamily="18" charset="0"/>
-                <a:cs typeface="Times New Roman" panose="02020603050405020304" pitchFamily="18" charset="0"/>
-              </a:rPr>
-              <a:t>16 014 кадров без аугментаций</a:t>
-            </a:r>
-            <a:r>
-              <a:rPr lang="ru-RU" dirty="0">
-                <a:latin typeface="Times New Roman" panose="02020603050405020304" pitchFamily="18" charset="0"/>
-                <a:cs typeface="Times New Roman" panose="02020603050405020304" pitchFamily="18" charset="0"/>
-              </a:rPr>
-              <a:t>: 4 574 кадра со «спагетти» и 11 440 кадров без видимых признаков этого дефекта. Выборки делились по соотношению 60/20/20.</a:t>
-            </a:r>
-          </a:p>
-        </p:txBody>
-      </p:sp>
-      <p:sp>
-        <p:nvSpPr>
-          <p:cNvPr id="25" name="TextBox 24">
-            <a:extLst>
-              <a:ext uri="{FF2B5EF4-FFF2-40B4-BE49-F238E27FC236}">
-                <a16:creationId xmlns:a16="http://schemas.microsoft.com/office/drawing/2014/main" id="{C8B6B692-286B-EE82-F648-38C45239ECF9}"/>
-              </a:ext>
-            </a:extLst>
-          </p:cNvPr>
-          <p:cNvSpPr txBox="1"/>
-          <p:nvPr/>
-        </p:nvSpPr>
-        <p:spPr>
-          <a:xfrm>
-            <a:off x="487537" y="3466535"/>
-            <a:ext cx="3869672" cy="2862322"/>
-          </a:xfrm>
-          <a:prstGeom prst="rect">
-            <a:avLst/>
-          </a:prstGeom>
-          <a:noFill/>
-          <a:ln>
-            <a:solidFill>
-              <a:schemeClr val="tx1"/>
-            </a:solidFill>
-            <a:prstDash val="dash"/>
-          </a:ln>
-        </p:spPr>
-        <p:txBody>
-          <a:bodyPr rot="0" spcFirstLastPara="0" vertOverflow="overflow" horzOverflow="overflow" vert="horz" wrap="square" lIns="91440" tIns="45720" rIns="91440" bIns="45720" numCol="1" spcCol="0" rtlCol="0" fromWordArt="0" anchor="ctr" anchorCtr="0" forceAA="0" compatLnSpc="1">
-            <a:prstTxWarp prst="textNoShape">
-              <a:avLst/>
-            </a:prstTxWarp>
-            <a:spAutoFit/>
-          </a:bodyPr>
-          <a:lstStyle/>
-          <a:p>
-            <a:r>
-              <a:rPr lang="ru-RU" dirty="0">
-                <a:latin typeface="Times New Roman" panose="02020603050405020304" pitchFamily="18" charset="0"/>
-                <a:cs typeface="Times New Roman" panose="02020603050405020304" pitchFamily="18" charset="0"/>
-              </a:rPr>
-              <a:t>Для каждой эпохи обучения сохранялся </a:t>
-            </a:r>
-            <a:r>
-              <a:rPr lang="ru-RU" b="1" dirty="0">
-                <a:latin typeface="Times New Roman" panose="02020603050405020304" pitchFamily="18" charset="0"/>
-                <a:cs typeface="Times New Roman" panose="02020603050405020304" pitchFamily="18" charset="0"/>
-              </a:rPr>
-              <a:t>баланс классов 50/50</a:t>
-            </a:r>
-            <a:r>
-              <a:rPr lang="ru-RU" dirty="0">
-                <a:latin typeface="Times New Roman" panose="02020603050405020304" pitchFamily="18" charset="0"/>
-                <a:cs typeface="Times New Roman" panose="02020603050405020304" pitchFamily="18" charset="0"/>
-              </a:rPr>
-              <a:t>: использовались все 2 746 кадров со «спагетти» и столько же случайно выбранных кадров без дефекта. Всего модель получала </a:t>
-            </a:r>
-            <a:r>
-              <a:rPr lang="ru-RU" b="1" dirty="0">
-                <a:latin typeface="Times New Roman" panose="02020603050405020304" pitchFamily="18" charset="0"/>
-                <a:cs typeface="Times New Roman" panose="02020603050405020304" pitchFamily="18" charset="0"/>
-              </a:rPr>
-              <a:t>5 492 изображения за эпоху</a:t>
-            </a:r>
-            <a:r>
-              <a:rPr lang="ru-RU" dirty="0">
-                <a:latin typeface="Times New Roman" panose="02020603050405020304" pitchFamily="18" charset="0"/>
-                <a:cs typeface="Times New Roman" panose="02020603050405020304" pitchFamily="18" charset="0"/>
-              </a:rPr>
-              <a:t>. </a:t>
-            </a:r>
-            <a:r>
-              <a:rPr lang="ru-RU" dirty="0" err="1">
-                <a:latin typeface="Times New Roman" panose="02020603050405020304" pitchFamily="18" charset="0"/>
-                <a:cs typeface="Times New Roman" panose="02020603050405020304" pitchFamily="18" charset="0"/>
-              </a:rPr>
-              <a:t>Валидационная</a:t>
-            </a:r>
-            <a:r>
-              <a:rPr lang="ru-RU" dirty="0">
-                <a:latin typeface="Times New Roman" panose="02020603050405020304" pitchFamily="18" charset="0"/>
-                <a:cs typeface="Times New Roman" panose="02020603050405020304" pitchFamily="18" charset="0"/>
-              </a:rPr>
-              <a:t> и тестовая выборки содержат только исходные изображения без аугментаций.</a:t>
-            </a:r>
-          </a:p>
-        </p:txBody>
-      </p:sp>
-      <p:sp>
-        <p:nvSpPr>
-          <p:cNvPr id="3" name="TextBox 26">
-            <a:extLst>
-              <a:ext uri="{FF2B5EF4-FFF2-40B4-BE49-F238E27FC236}">
-                <a16:creationId xmlns:a16="http://schemas.microsoft.com/office/drawing/2014/main" id="{155F7BCE-57B1-4886-841D-DAD17BC5CA7C}"/>
-              </a:ext>
-            </a:extLst>
-          </p:cNvPr>
-          <p:cNvSpPr>
-            <a:spLocks noGrp="1"/>
-          </p:cNvSpPr>
-          <p:nvPr/>
-        </p:nvSpPr>
-        <p:spPr>
-          <a:xfrm>
-            <a:off x="4703875" y="5554051"/>
-            <a:ext cx="4073130" cy="579120"/>
-          </a:xfrm>
-          <a:prstGeom prst="rect">
-            <a:avLst/>
-          </a:prstGeom>
-          <a:noFill/>
-        </p:spPr>
-        <p:txBody>
-          <a:bodyPr rot="0" spcFirstLastPara="0" vert="horz" wrap="square" lIns="91440" tIns="45720" rIns="91440" bIns="45720" anchor="ctr">
-            <a:noAutofit/>
-          </a:bodyPr>
-          <a:lstStyle>
-            <a:defPPr algn="l">
-              <a:defRPr sz="1600" b="0">
-                <a:solidFill>
-                  <a:srgbClr val="000000"/>
-                </a:solidFill>
-                <a:latin typeface="Times New Roman"/>
-                <a:ea typeface="Times New Roman"/>
-                <a:cs typeface="Times New Roman"/>
-              </a:defRPr>
-            </a:defPPr>
-          </a:lstStyle>
-          <a:p>
-            <a:pPr algn="ctr">
-              <a:defRPr sz="1600" b="0">
-                <a:solidFill>
-                  <a:srgbClr val="000000"/>
-                </a:solidFill>
-                <a:latin typeface="Times New Roman"/>
-                <a:ea typeface="Times New Roman"/>
-                <a:cs typeface="Times New Roman"/>
-              </a:defRPr>
-            </a:pPr>
-            <a:r>
-              <a:rPr sz="1600" b="0" dirty="0" err="1">
-                <a:solidFill>
-                  <a:srgbClr val="000000"/>
-                </a:solidFill>
-                <a:latin typeface="Times New Roman"/>
-                <a:ea typeface="Times New Roman"/>
-                <a:cs typeface="Times New Roman"/>
-              </a:rPr>
-              <a:t>Рис</a:t>
-            </a:r>
-            <a:r>
-              <a:rPr sz="1600" b="0" dirty="0">
-                <a:solidFill>
-                  <a:srgbClr val="000000"/>
-                </a:solidFill>
-                <a:latin typeface="Times New Roman"/>
-                <a:ea typeface="Times New Roman"/>
-                <a:cs typeface="Times New Roman"/>
-              </a:rPr>
-              <a:t>. </a:t>
-            </a:r>
-            <a:r>
-              <a:rPr lang="ru-RU" sz="1600" b="0" dirty="0">
-                <a:solidFill>
-                  <a:srgbClr val="000000"/>
-                </a:solidFill>
-                <a:latin typeface="Times New Roman"/>
-                <a:ea typeface="Times New Roman"/>
-                <a:cs typeface="Times New Roman"/>
-              </a:rPr>
-              <a:t>4,5</a:t>
-            </a:r>
-            <a:r>
-              <a:rPr sz="1600" b="0" dirty="0">
-                <a:solidFill>
-                  <a:srgbClr val="000000"/>
-                </a:solidFill>
-                <a:latin typeface="Times New Roman"/>
-                <a:ea typeface="Times New Roman"/>
-                <a:cs typeface="Times New Roman"/>
-              </a:rPr>
-              <a:t> – </a:t>
-            </a:r>
-            <a:r>
-              <a:rPr lang="ru-RU" sz="1600" b="0" dirty="0">
-                <a:solidFill>
-                  <a:srgbClr val="000000"/>
-                </a:solidFill>
-                <a:latin typeface="Times New Roman"/>
-                <a:ea typeface="Times New Roman"/>
-                <a:cs typeface="Times New Roman"/>
-              </a:rPr>
-              <a:t>Диаграмма статистики печатей на ферме компании «</a:t>
-            </a:r>
-            <a:r>
-              <a:rPr lang="en-US" sz="1600" b="0" dirty="0" err="1">
-                <a:solidFill>
-                  <a:srgbClr val="000000"/>
-                </a:solidFill>
-                <a:latin typeface="Times New Roman"/>
-                <a:ea typeface="Times New Roman"/>
-                <a:cs typeface="Times New Roman"/>
-              </a:rPr>
-              <a:t>Stereotech</a:t>
-            </a:r>
-            <a:r>
-              <a:rPr lang="ru-RU" sz="1600" b="0" dirty="0">
-                <a:solidFill>
-                  <a:srgbClr val="000000"/>
-                </a:solidFill>
-                <a:latin typeface="Times New Roman"/>
-                <a:ea typeface="Times New Roman"/>
-                <a:cs typeface="Times New Roman"/>
-              </a:rPr>
-              <a:t>»</a:t>
-            </a:r>
-            <a:endParaRPr sz="1600" b="0" dirty="0">
-              <a:solidFill>
-                <a:srgbClr val="000000"/>
-              </a:solidFill>
-              <a:latin typeface="Times New Roman"/>
-              <a:ea typeface="Times New Roman"/>
-              <a:cs typeface="Times New Roman"/>
-            </a:endParaRPr>
-          </a:p>
-        </p:txBody>
-      </p:sp>
-    </p:spTree>
-    <p:extLst>
-      <p:ext uri="{BB962C8B-B14F-4D97-AF65-F5344CB8AC3E}">
-        <p14:creationId xmlns:p14="http://schemas.microsoft.com/office/powerpoint/2010/main" val="3025447512"/>
-      </p:ext>
-    </p:extLst>
-  </p:cSld>
-  <p:clrMapOvr>
-    <a:masterClrMapping/>
-  </p:clrMapOvr>
-</p:sld>
-</file>
-
-<file path=ppt/slides/slide7.xml><?xml version="1.0" encoding="utf-8"?>
-<p:sld xmlns:a="http://schemas.openxmlformats.org/drawingml/2006/main" xmlns:r="http://schemas.openxmlformats.org/officeDocument/2006/relationships" xmlns:p="http://schemas.openxmlformats.org/presentationml/2006/main">
-  <p:cSld>
-    <p:spTree>
-      <p:nvGrpSpPr>
-        <p:cNvPr id="1" name="">
-          <a:extLst>
-            <a:ext uri="{FF2B5EF4-FFF2-40B4-BE49-F238E27FC236}">
-              <a16:creationId xmlns:a16="http://schemas.microsoft.com/office/drawing/2014/main" id="{829A4193-2A96-4292-27DF-7C8F10ED51F0}"/>
-            </a:ext>
-          </a:extLst>
-        </p:cNvPr>
-        <p:cNvGrpSpPr/>
-        <p:nvPr/>
-      </p:nvGrpSpPr>
-      <p:grpSpPr>
-        <a:xfrm>
-          <a:off x="0" y="0"/>
-          <a:ext cx="0" cy="0"/>
-          <a:chOff x="0" y="0"/>
-          <a:chExt cx="0" cy="0"/>
-        </a:xfrm>
-      </p:grpSpPr>
-      <p:sp>
-        <p:nvSpPr>
-          <p:cNvPr id="2" name="Заголовок 1">
-            <a:extLst>
-              <a:ext uri="{FF2B5EF4-FFF2-40B4-BE49-F238E27FC236}">
-                <a16:creationId xmlns:a16="http://schemas.microsoft.com/office/drawing/2014/main" id="{F71B51DD-8424-3898-F322-045B44C926E8}"/>
-              </a:ext>
-            </a:extLst>
-          </p:cNvPr>
-          <p:cNvSpPr>
-            <a:spLocks noGrp="1"/>
-          </p:cNvSpPr>
-          <p:nvPr>
-            <p:ph type="title"/>
-          </p:nvPr>
-        </p:nvSpPr>
-        <p:spPr>
-          <a:xfrm>
-            <a:off x="628650" y="9098"/>
-            <a:ext cx="7886700" cy="712868"/>
-          </a:xfrm>
-        </p:spPr>
-        <p:txBody>
-          <a:bodyPr>
-            <a:normAutofit/>
-          </a:bodyPr>
-          <a:lstStyle/>
-          <a:p>
-            <a:pPr algn="ctr"/>
-            <a:r>
-              <a:rPr lang="ru-RU" sz="4000" dirty="0">
-                <a:latin typeface="Times New Roman"/>
-                <a:ea typeface="Calibri"/>
-                <a:cs typeface="Times New Roman"/>
-              </a:rPr>
-              <a:t>Обработка на сервере</a:t>
-            </a:r>
-          </a:p>
-        </p:txBody>
-      </p:sp>
-      <p:sp>
-        <p:nvSpPr>
-          <p:cNvPr id="4" name="Текстовое поле 3">
-            <a:extLst>
-              <a:ext uri="{FF2B5EF4-FFF2-40B4-BE49-F238E27FC236}">
-                <a16:creationId xmlns:a16="http://schemas.microsoft.com/office/drawing/2014/main" id="{5E8559DA-50BE-07AC-B0EB-3414FBFB6481}"/>
-              </a:ext>
-            </a:extLst>
-          </p:cNvPr>
-          <p:cNvSpPr txBox="1"/>
-          <p:nvPr/>
-        </p:nvSpPr>
-        <p:spPr>
-          <a:xfrm>
-            <a:off x="3775710" y="5640705"/>
-            <a:ext cx="309880" cy="368300"/>
-          </a:xfrm>
-          <a:prstGeom prst="rect">
-            <a:avLst/>
-          </a:prstGeom>
-          <a:noFill/>
-        </p:spPr>
-        <p:txBody>
-          <a:bodyPr wrap="none" rtlCol="0">
-            <a:spAutoFit/>
-          </a:bodyPr>
-          <a:lstStyle/>
-          <a:p>
-            <a:endParaRPr lang="ru-RU" altLang="en-US"/>
-          </a:p>
-        </p:txBody>
-      </p:sp>
-      <p:sp>
-        <p:nvSpPr>
-          <p:cNvPr id="5" name="Замещающий номер слайда 4">
-            <a:extLst>
-              <a:ext uri="{FF2B5EF4-FFF2-40B4-BE49-F238E27FC236}">
-                <a16:creationId xmlns:a16="http://schemas.microsoft.com/office/drawing/2014/main" id="{28EFF76E-32CA-AB56-A1FE-FC86064D66B4}"/>
-              </a:ext>
-            </a:extLst>
-          </p:cNvPr>
-          <p:cNvSpPr>
-            <a:spLocks noGrp="1"/>
-          </p:cNvSpPr>
-          <p:nvPr>
-            <p:ph type="sldNum" sz="quarter" idx="12"/>
-          </p:nvPr>
-        </p:nvSpPr>
-        <p:spPr>
-          <a:xfrm>
-            <a:off x="7088886" y="6493511"/>
-            <a:ext cx="2057400" cy="365125"/>
-          </a:xfrm>
-        </p:spPr>
-        <p:txBody>
-          <a:bodyPr/>
-          <a:lstStyle/>
-          <a:p>
-            <a:fld id="{D6ED8A53-8D2F-4011-BE06-EDB0774336BA}" type="slidenum">
-              <a:rPr lang="ru-RU" sz="2000" dirty="0" smtClean="0">
-                <a:solidFill>
-                  <a:schemeClr val="tx1"/>
-                </a:solidFill>
-                <a:latin typeface="Times New Roman"/>
-                <a:cs typeface="Times New Roman"/>
-              </a:rPr>
-              <a:t>7</a:t>
-            </a:fld>
-            <a:endParaRPr lang="ru-RU" sz="2000">
-              <a:solidFill>
-                <a:schemeClr val="tx1"/>
-              </a:solidFill>
-              <a:latin typeface="Times New Roman"/>
-              <a:ea typeface="Calibri"/>
-              <a:cs typeface="Times New Roman"/>
-            </a:endParaRPr>
-          </a:p>
-        </p:txBody>
-      </p:sp>
-      <p:sp>
-        <p:nvSpPr>
-          <p:cNvPr id="8" name="TextBox 7">
-            <a:extLst>
-              <a:ext uri="{FF2B5EF4-FFF2-40B4-BE49-F238E27FC236}">
-                <a16:creationId xmlns:a16="http://schemas.microsoft.com/office/drawing/2014/main" id="{3FDAB50E-3BD8-57A2-B047-497A3FD50648}"/>
-              </a:ext>
-            </a:extLst>
-          </p:cNvPr>
-          <p:cNvSpPr txBox="1"/>
-          <p:nvPr/>
-        </p:nvSpPr>
-        <p:spPr>
-          <a:xfrm>
-            <a:off x="186213" y="875407"/>
-            <a:ext cx="2920514" cy="1477328"/>
-          </a:xfrm>
-          <a:prstGeom prst="rect">
-            <a:avLst/>
-          </a:prstGeom>
-          <a:noFill/>
-          <a:ln>
-            <a:solidFill>
-              <a:schemeClr val="tx1"/>
-            </a:solidFill>
-            <a:prstDash val="dash"/>
-          </a:ln>
-        </p:spPr>
-        <p:txBody>
-          <a:bodyPr rot="0" spcFirstLastPara="0" vertOverflow="overflow" horzOverflow="overflow" vert="horz" wrap="square" lIns="91440" tIns="45720" rIns="91440" bIns="45720" numCol="1" spcCol="0" rtlCol="0" fromWordArt="0" anchor="ctr" anchorCtr="0" forceAA="0" compatLnSpc="1">
-            <a:prstTxWarp prst="textNoShape">
-              <a:avLst/>
-            </a:prstTxWarp>
-            <a:spAutoFit/>
-          </a:bodyPr>
-          <a:lstStyle/>
-          <a:p>
-            <a:pPr algn="ctr"/>
-            <a:r>
-              <a:rPr lang="ru-RU" dirty="0">
-                <a:latin typeface="Times New Roman"/>
-                <a:ea typeface="+mn-lt"/>
-                <a:cs typeface="+mn-lt"/>
-              </a:rPr>
-              <a:t>Роль сервера:</a:t>
-            </a:r>
-            <a:endParaRPr lang="ru-RU" dirty="0">
-              <a:latin typeface="Times New Roman"/>
-              <a:cs typeface="Times New Roman"/>
-            </a:endParaRPr>
-          </a:p>
-          <a:p>
-            <a:pPr marL="285750" indent="-285750">
-              <a:buFont typeface="Arial"/>
-              <a:buChar char="•"/>
-            </a:pPr>
-            <a:r>
-              <a:rPr lang="ru-RU" b="1" dirty="0">
-                <a:latin typeface="Times New Roman"/>
-                <a:ea typeface="+mn-lt"/>
-                <a:cs typeface="+mn-lt"/>
-              </a:rPr>
-              <a:t>Централизованная </a:t>
-            </a:r>
-            <a:r>
-              <a:rPr lang="ru-RU" dirty="0">
-                <a:latin typeface="Times New Roman"/>
-                <a:ea typeface="+mn-lt"/>
-                <a:cs typeface="+mn-lt"/>
-              </a:rPr>
-              <a:t>обработка запросов.</a:t>
-            </a:r>
-            <a:endParaRPr lang="ru-RU" dirty="0">
-              <a:latin typeface="Times New Roman"/>
-              <a:cs typeface="Times New Roman"/>
-            </a:endParaRPr>
-          </a:p>
-          <a:p>
-            <a:pPr marL="285750" indent="-285750">
-              <a:buFont typeface="Arial"/>
-              <a:buChar char="•"/>
-            </a:pPr>
-            <a:r>
-              <a:rPr lang="ru-RU" dirty="0">
-                <a:latin typeface="Times New Roman"/>
-                <a:ea typeface="+mn-lt"/>
-                <a:cs typeface="+mn-lt"/>
-              </a:rPr>
-              <a:t>Выполнение </a:t>
-            </a:r>
-            <a:r>
-              <a:rPr lang="ru-RU" b="1" dirty="0">
-                <a:latin typeface="Times New Roman"/>
-                <a:ea typeface="+mn-lt"/>
-                <a:cs typeface="+mn-lt"/>
-              </a:rPr>
-              <a:t>ресурсоёмких </a:t>
-            </a:r>
-            <a:r>
-              <a:rPr lang="ru-RU" dirty="0">
-                <a:latin typeface="Times New Roman"/>
-                <a:ea typeface="+mn-lt"/>
-                <a:cs typeface="+mn-lt"/>
-              </a:rPr>
-              <a:t>задач.</a:t>
-            </a:r>
-            <a:endParaRPr lang="ru-RU" dirty="0">
-              <a:latin typeface="Times New Roman"/>
-              <a:cs typeface="Times New Roman"/>
-            </a:endParaRPr>
-          </a:p>
-        </p:txBody>
-      </p:sp>
-      <p:pic>
-        <p:nvPicPr>
-          <p:cNvPr id="7" name="Рисунок 6">
-            <a:extLst>
-              <a:ext uri="{FF2B5EF4-FFF2-40B4-BE49-F238E27FC236}">
-                <a16:creationId xmlns:a16="http://schemas.microsoft.com/office/drawing/2014/main" id="{DA035444-9EBE-0F23-C21B-B713FDEC75FD}"/>
-              </a:ext>
-            </a:extLst>
-          </p:cNvPr>
-          <p:cNvPicPr>
-            <a:picLocks noChangeAspect="1"/>
-          </p:cNvPicPr>
-          <p:nvPr/>
-        </p:nvPicPr>
-        <p:blipFill>
-          <a:blip r:embed="rId3">
-            <a:extLst>
-              <a:ext uri="{28A0092B-C50C-407E-A947-70E740481C1C}">
-                <a14:useLocalDpi xmlns:a14="http://schemas.microsoft.com/office/drawing/2010/main" val="0"/>
-              </a:ext>
-            </a:extLst>
-          </a:blip>
-          <a:srcRect/>
-          <a:stretch/>
-        </p:blipFill>
-        <p:spPr>
-          <a:xfrm>
-            <a:off x="3302968" y="875407"/>
-            <a:ext cx="5639137" cy="5093570"/>
-          </a:xfrm>
-          <a:prstGeom prst="rect">
-            <a:avLst/>
-          </a:prstGeom>
-        </p:spPr>
-      </p:pic>
-      <p:sp>
-        <p:nvSpPr>
-          <p:cNvPr id="12" name="TextBox 11">
-            <a:extLst>
-              <a:ext uri="{FF2B5EF4-FFF2-40B4-BE49-F238E27FC236}">
-                <a16:creationId xmlns:a16="http://schemas.microsoft.com/office/drawing/2014/main" id="{D77D804C-EAD2-5379-2030-7517770A46AB}"/>
-              </a:ext>
-            </a:extLst>
-          </p:cNvPr>
-          <p:cNvSpPr txBox="1"/>
-          <p:nvPr/>
-        </p:nvSpPr>
-        <p:spPr>
-          <a:xfrm>
-            <a:off x="186213" y="2593566"/>
-            <a:ext cx="2920514" cy="3416320"/>
-          </a:xfrm>
-          <a:prstGeom prst="rect">
-            <a:avLst/>
-          </a:prstGeom>
-          <a:noFill/>
-          <a:ln>
-            <a:solidFill>
-              <a:schemeClr val="tx1"/>
-            </a:solidFill>
-            <a:prstDash val="dash"/>
-          </a:ln>
-        </p:spPr>
-        <p:txBody>
-          <a:bodyPr rot="0" spcFirstLastPara="0" vertOverflow="overflow" horzOverflow="overflow" vert="horz" wrap="square" lIns="91440" tIns="45720" rIns="91440" bIns="45720" numCol="1" spcCol="0" rtlCol="0" fromWordArt="0" anchor="ctr" anchorCtr="0" forceAA="0" compatLnSpc="1">
-            <a:prstTxWarp prst="textNoShape">
-              <a:avLst/>
-            </a:prstTxWarp>
-            <a:spAutoFit/>
-          </a:bodyPr>
-          <a:lstStyle/>
-          <a:p>
-            <a:r>
-              <a:rPr lang="ru-RU" dirty="0">
-                <a:latin typeface="Times New Roman" panose="02020603050405020304" pitchFamily="18" charset="0"/>
-                <a:cs typeface="Times New Roman" panose="02020603050405020304" pitchFamily="18" charset="0"/>
-              </a:rPr>
-              <a:t>Сервер </a:t>
-            </a:r>
-            <a:r>
-              <a:rPr lang="ru-RU" b="1" dirty="0">
-                <a:latin typeface="Times New Roman" panose="02020603050405020304" pitchFamily="18" charset="0"/>
-                <a:cs typeface="Times New Roman" panose="02020603050405020304" pitchFamily="18" charset="0"/>
-              </a:rPr>
-              <a:t>получает кадр </a:t>
-            </a:r>
-            <a:r>
-              <a:rPr lang="ru-RU" dirty="0">
-                <a:latin typeface="Times New Roman" panose="02020603050405020304" pitchFamily="18" charset="0"/>
-                <a:cs typeface="Times New Roman" panose="02020603050405020304" pitchFamily="18" charset="0"/>
-              </a:rPr>
-              <a:t>с камеры и идентификаторы сессии. После кадр анализируется нейросетью, которая </a:t>
-            </a:r>
-            <a:r>
-              <a:rPr lang="ru-RU" b="1" dirty="0">
-                <a:latin typeface="Times New Roman" panose="02020603050405020304" pitchFamily="18" charset="0"/>
-                <a:cs typeface="Times New Roman" panose="02020603050405020304" pitchFamily="18" charset="0"/>
-              </a:rPr>
-              <a:t>определяет наличие «спагетти»</a:t>
-            </a:r>
-            <a:r>
-              <a:rPr lang="ru-RU" dirty="0">
-                <a:latin typeface="Times New Roman" panose="02020603050405020304" pitchFamily="18" charset="0"/>
-                <a:cs typeface="Times New Roman" panose="02020603050405020304" pitchFamily="18" charset="0"/>
-              </a:rPr>
-              <a:t>.</a:t>
-            </a:r>
-            <a:r>
-              <a:rPr lang="ru-RU" b="1" dirty="0">
-                <a:latin typeface="Times New Roman" panose="02020603050405020304" pitchFamily="18" charset="0"/>
-                <a:cs typeface="Times New Roman" panose="02020603050405020304" pitchFamily="18" charset="0"/>
-              </a:rPr>
-              <a:t> </a:t>
-            </a:r>
-            <a:r>
-              <a:rPr lang="ru-RU" dirty="0">
-                <a:latin typeface="Times New Roman" panose="02020603050405020304" pitchFamily="18" charset="0"/>
-                <a:cs typeface="Times New Roman" panose="02020603050405020304" pitchFamily="18" charset="0"/>
-              </a:rPr>
-              <a:t>Сервер возвращает признак дефекта и числовую оценку модели вместе с исходными идентификаторами, связывающими результат с конкретным кадром</a:t>
-            </a:r>
-          </a:p>
-        </p:txBody>
-      </p:sp>
-      <p:sp>
-        <p:nvSpPr>
-          <p:cNvPr id="3" name="TextBox 26">
-            <a:extLst>
-              <a:ext uri="{FF2B5EF4-FFF2-40B4-BE49-F238E27FC236}">
-                <a16:creationId xmlns:a16="http://schemas.microsoft.com/office/drawing/2014/main" id="{B2494F24-8111-2CAC-A358-3AE7239D4D1C}"/>
-              </a:ext>
-            </a:extLst>
-          </p:cNvPr>
-          <p:cNvSpPr>
-            <a:spLocks noGrp="1"/>
-          </p:cNvSpPr>
-          <p:nvPr/>
-        </p:nvSpPr>
-        <p:spPr>
-          <a:xfrm>
-            <a:off x="4085971" y="6009005"/>
-            <a:ext cx="4073130" cy="579120"/>
-          </a:xfrm>
-          <a:prstGeom prst="rect">
-            <a:avLst/>
-          </a:prstGeom>
-          <a:noFill/>
-        </p:spPr>
-        <p:txBody>
-          <a:bodyPr rot="0" spcFirstLastPara="0" vert="horz" wrap="square" lIns="91440" tIns="45720" rIns="91440" bIns="45720" anchor="ctr">
-            <a:noAutofit/>
-          </a:bodyPr>
-          <a:lstStyle>
-            <a:defPPr algn="l">
-              <a:defRPr sz="1600" b="0">
-                <a:solidFill>
-                  <a:srgbClr val="000000"/>
-                </a:solidFill>
-                <a:latin typeface="Times New Roman"/>
-                <a:ea typeface="Times New Roman"/>
-                <a:cs typeface="Times New Roman"/>
-              </a:defRPr>
-            </a:defPPr>
-          </a:lstStyle>
-          <a:p>
-            <a:pPr algn="ctr">
-              <a:defRPr sz="1600" b="0">
-                <a:solidFill>
-                  <a:srgbClr val="000000"/>
-                </a:solidFill>
-                <a:latin typeface="Times New Roman"/>
-                <a:ea typeface="Times New Roman"/>
-                <a:cs typeface="Times New Roman"/>
-              </a:defRPr>
-            </a:pPr>
-            <a:r>
-              <a:rPr sz="1600" b="0" dirty="0" err="1">
-                <a:solidFill>
-                  <a:srgbClr val="000000"/>
-                </a:solidFill>
-                <a:latin typeface="Times New Roman"/>
-                <a:ea typeface="Times New Roman"/>
-                <a:cs typeface="Times New Roman"/>
-              </a:rPr>
-              <a:t>Рис</a:t>
-            </a:r>
-            <a:r>
-              <a:rPr sz="1600" b="0" dirty="0">
-                <a:solidFill>
-                  <a:srgbClr val="000000"/>
-                </a:solidFill>
-                <a:latin typeface="Times New Roman"/>
-                <a:ea typeface="Times New Roman"/>
-                <a:cs typeface="Times New Roman"/>
-              </a:rPr>
-              <a:t>. </a:t>
-            </a:r>
-            <a:r>
-              <a:rPr lang="ru-RU" sz="1600" b="0" dirty="0">
-                <a:solidFill>
-                  <a:srgbClr val="000000"/>
-                </a:solidFill>
-                <a:latin typeface="Times New Roman"/>
-                <a:ea typeface="Times New Roman"/>
-                <a:cs typeface="Times New Roman"/>
-              </a:rPr>
-              <a:t>6</a:t>
-            </a:r>
-            <a:r>
-              <a:rPr sz="1600" b="0" dirty="0">
-                <a:solidFill>
-                  <a:srgbClr val="000000"/>
-                </a:solidFill>
-                <a:latin typeface="Times New Roman"/>
-                <a:ea typeface="Times New Roman"/>
-                <a:cs typeface="Times New Roman"/>
-              </a:rPr>
-              <a:t> –</a:t>
-            </a:r>
-            <a:r>
-              <a:rPr lang="ru-RU" sz="1600" b="0" dirty="0">
-                <a:solidFill>
-                  <a:srgbClr val="000000"/>
-                </a:solidFill>
-                <a:latin typeface="Times New Roman"/>
-                <a:ea typeface="Times New Roman"/>
-                <a:cs typeface="Times New Roman"/>
-              </a:rPr>
-              <a:t> Блок-схема серверной обработки кадров и определения дефектов FDM-печати</a:t>
-            </a:r>
-            <a:r>
-              <a:rPr sz="1600" b="0" dirty="0">
-                <a:solidFill>
-                  <a:srgbClr val="000000"/>
-                </a:solidFill>
-                <a:latin typeface="Times New Roman"/>
-                <a:ea typeface="Times New Roman"/>
-                <a:cs typeface="Times New Roman"/>
-              </a:rPr>
-              <a:t> </a:t>
-            </a:r>
-          </a:p>
-        </p:txBody>
-      </p:sp>
-    </p:spTree>
-    <p:extLst>
-      <p:ext uri="{BB962C8B-B14F-4D97-AF65-F5344CB8AC3E}">
-        <p14:creationId xmlns:p14="http://schemas.microsoft.com/office/powerpoint/2010/main" val="2065725557"/>
-      </p:ext>
-    </p:extLst>
-  </p:cSld>
-  <p:clrMapOvr>
-    <a:masterClrMapping/>
-  </p:clrMapOvr>
-</p:sld>
-</file>
-
-<file path=ppt/slides/slide8.xml><?xml version="1.0" encoding="utf-8"?>
-<p:sld xmlns:a="http://schemas.openxmlformats.org/drawingml/2006/main" xmlns:r="http://schemas.openxmlformats.org/officeDocument/2006/relationships" xmlns:p="http://schemas.openxmlformats.org/presentationml/2006/main">
-  <p:cSld>
-    <p:spTree>
-      <p:nvGrpSpPr>
-        <p:cNvPr id="1" name="">
-          <a:extLst>
-            <a:ext uri="{FF2B5EF4-FFF2-40B4-BE49-F238E27FC236}">
-              <a16:creationId xmlns:a16="http://schemas.microsoft.com/office/drawing/2014/main" id="{829A4193-2A96-4292-27DF-7C8F10ED51F0}"/>
-            </a:ext>
-          </a:extLst>
-        </p:cNvPr>
-        <p:cNvGrpSpPr/>
-        <p:nvPr/>
-      </p:nvGrpSpPr>
-      <p:grpSpPr>
-        <a:xfrm>
-          <a:off x="0" y="0"/>
-          <a:ext cx="0" cy="0"/>
-          <a:chOff x="0" y="0"/>
-          <a:chExt cx="0" cy="0"/>
-        </a:xfrm>
-      </p:grpSpPr>
-      <p:sp>
-        <p:nvSpPr>
-          <p:cNvPr id="2" name="Заголовок 1">
-            <a:extLst>
-              <a:ext uri="{FF2B5EF4-FFF2-40B4-BE49-F238E27FC236}">
-                <a16:creationId xmlns:a16="http://schemas.microsoft.com/office/drawing/2014/main" id="{F71B51DD-8424-3898-F322-045B44C926E8}"/>
-              </a:ext>
-            </a:extLst>
-          </p:cNvPr>
-          <p:cNvSpPr>
-            <a:spLocks noGrp="1"/>
-          </p:cNvSpPr>
-          <p:nvPr>
-            <p:ph type="title"/>
-          </p:nvPr>
-        </p:nvSpPr>
-        <p:spPr>
-          <a:xfrm>
-            <a:off x="628650" y="9098"/>
-            <a:ext cx="7886700" cy="712868"/>
-          </a:xfrm>
-        </p:spPr>
-        <p:txBody>
-          <a:bodyPr>
-            <a:normAutofit/>
-          </a:bodyPr>
-          <a:lstStyle/>
-          <a:p>
-            <a:pPr algn="ctr"/>
-            <a:r>
-              <a:rPr lang="ru-RU" sz="4000" dirty="0">
-                <a:latin typeface="Times New Roman"/>
-                <a:ea typeface="Calibri"/>
-                <a:cs typeface="Times New Roman"/>
-              </a:rPr>
-              <a:t>Обработка на принтере</a:t>
-            </a:r>
-          </a:p>
-        </p:txBody>
-      </p:sp>
-      <p:sp>
-        <p:nvSpPr>
-          <p:cNvPr id="4" name="Текстовое поле 3">
-            <a:extLst>
-              <a:ext uri="{FF2B5EF4-FFF2-40B4-BE49-F238E27FC236}">
-                <a16:creationId xmlns:a16="http://schemas.microsoft.com/office/drawing/2014/main" id="{5E8559DA-50BE-07AC-B0EB-3414FBFB6481}"/>
-              </a:ext>
-            </a:extLst>
-          </p:cNvPr>
-          <p:cNvSpPr txBox="1"/>
-          <p:nvPr/>
-        </p:nvSpPr>
-        <p:spPr>
-          <a:xfrm>
-            <a:off x="3775710" y="5640705"/>
-            <a:ext cx="309880" cy="368300"/>
-          </a:xfrm>
-          <a:prstGeom prst="rect">
-            <a:avLst/>
-          </a:prstGeom>
-          <a:noFill/>
-        </p:spPr>
-        <p:txBody>
-          <a:bodyPr wrap="none" rtlCol="0">
-            <a:spAutoFit/>
-          </a:bodyPr>
-          <a:lstStyle/>
-          <a:p>
-            <a:endParaRPr lang="ru-RU" altLang="en-US"/>
-          </a:p>
-        </p:txBody>
-      </p:sp>
-      <p:sp>
-        <p:nvSpPr>
-          <p:cNvPr id="5" name="Замещающий номер слайда 4">
-            <a:extLst>
-              <a:ext uri="{FF2B5EF4-FFF2-40B4-BE49-F238E27FC236}">
-                <a16:creationId xmlns:a16="http://schemas.microsoft.com/office/drawing/2014/main" id="{28EFF76E-32CA-AB56-A1FE-FC86064D66B4}"/>
-              </a:ext>
-            </a:extLst>
-          </p:cNvPr>
-          <p:cNvSpPr>
-            <a:spLocks noGrp="1"/>
-          </p:cNvSpPr>
-          <p:nvPr>
-            <p:ph type="sldNum" sz="quarter" idx="12"/>
-          </p:nvPr>
-        </p:nvSpPr>
-        <p:spPr>
-          <a:xfrm>
-            <a:off x="7088886" y="6493511"/>
-            <a:ext cx="2057400" cy="365125"/>
-          </a:xfrm>
-        </p:spPr>
-        <p:txBody>
-          <a:bodyPr/>
-          <a:lstStyle/>
-          <a:p>
-            <a:fld id="{D6ED8A53-8D2F-4011-BE06-EDB0774336BA}" type="slidenum">
-              <a:rPr lang="ru-RU" sz="2000" dirty="0" smtClean="0">
-                <a:solidFill>
-                  <a:schemeClr val="tx1"/>
-                </a:solidFill>
-                <a:latin typeface="Times New Roman"/>
-                <a:cs typeface="Times New Roman"/>
-              </a:rPr>
-              <a:t>8</a:t>
-            </a:fld>
-            <a:endParaRPr lang="ru-RU" sz="2000">
-              <a:solidFill>
-                <a:schemeClr val="tx1"/>
-              </a:solidFill>
-              <a:latin typeface="Times New Roman"/>
-              <a:ea typeface="Calibri"/>
-              <a:cs typeface="Times New Roman"/>
-            </a:endParaRPr>
-          </a:p>
-        </p:txBody>
-      </p:sp>
-      <p:pic>
-        <p:nvPicPr>
-          <p:cNvPr id="7" name="Рисунок 6">
-            <a:extLst>
-              <a:ext uri="{FF2B5EF4-FFF2-40B4-BE49-F238E27FC236}">
-                <a16:creationId xmlns:a16="http://schemas.microsoft.com/office/drawing/2014/main" id="{DA035444-9EBE-0F23-C21B-B713FDEC75FD}"/>
-              </a:ext>
-            </a:extLst>
-          </p:cNvPr>
-          <p:cNvPicPr>
-            <a:picLocks noChangeAspect="1"/>
-          </p:cNvPicPr>
-          <p:nvPr/>
-        </p:nvPicPr>
-        <p:blipFill>
-          <a:blip r:embed="rId3">
-            <a:extLst>
-              <a:ext uri="{28A0092B-C50C-407E-A947-70E740481C1C}">
-                <a14:useLocalDpi xmlns:a14="http://schemas.microsoft.com/office/drawing/2010/main" val="0"/>
-              </a:ext>
-            </a:extLst>
-          </a:blip>
-          <a:srcRect/>
-          <a:stretch/>
-        </p:blipFill>
-        <p:spPr>
-          <a:xfrm>
-            <a:off x="3106727" y="875407"/>
-            <a:ext cx="5905217" cy="5295358"/>
-          </a:xfrm>
-          <a:prstGeom prst="rect">
-            <a:avLst/>
-          </a:prstGeom>
-        </p:spPr>
-      </p:pic>
-      <p:sp>
-        <p:nvSpPr>
-          <p:cNvPr id="12" name="TextBox 11">
-            <a:extLst>
-              <a:ext uri="{FF2B5EF4-FFF2-40B4-BE49-F238E27FC236}">
-                <a16:creationId xmlns:a16="http://schemas.microsoft.com/office/drawing/2014/main" id="{D77D804C-EAD2-5379-2030-7517770A46AB}"/>
-              </a:ext>
-            </a:extLst>
-          </p:cNvPr>
-          <p:cNvSpPr txBox="1"/>
-          <p:nvPr/>
-        </p:nvSpPr>
-        <p:spPr>
-          <a:xfrm>
-            <a:off x="132056" y="875407"/>
-            <a:ext cx="2917990" cy="5355312"/>
-          </a:xfrm>
-          <a:prstGeom prst="rect">
-            <a:avLst/>
-          </a:prstGeom>
-          <a:noFill/>
-          <a:ln>
-            <a:solidFill>
-              <a:schemeClr val="tx1"/>
-            </a:solidFill>
-            <a:prstDash val="dash"/>
-          </a:ln>
-        </p:spPr>
-        <p:txBody>
-          <a:bodyPr rot="0" spcFirstLastPara="0" vertOverflow="overflow" horzOverflow="overflow" vert="horz" wrap="square" lIns="91440" tIns="45720" rIns="91440" bIns="45720" numCol="1" spcCol="0" rtlCol="0" fromWordArt="0" anchor="ctr" anchorCtr="0" forceAA="0" compatLnSpc="1">
-            <a:prstTxWarp prst="textNoShape">
-              <a:avLst/>
-            </a:prstTxWarp>
-            <a:spAutoFit/>
-          </a:bodyPr>
-          <a:lstStyle/>
-          <a:p>
-            <a:r>
-              <a:rPr lang="ru-RU" dirty="0">
-                <a:latin typeface="Times New Roman" panose="02020603050405020304" pitchFamily="18" charset="0"/>
-                <a:cs typeface="Times New Roman" panose="02020603050405020304" pitchFamily="18" charset="0"/>
-              </a:rPr>
-              <a:t>Единичное обнаружение дефекта не приводит к отмене задания. Локальный модуль </a:t>
-            </a:r>
-            <a:r>
-              <a:rPr lang="ru-RU" b="1" dirty="0">
-                <a:latin typeface="Times New Roman" panose="02020603050405020304" pitchFamily="18" charset="0"/>
-                <a:cs typeface="Times New Roman" panose="02020603050405020304" pitchFamily="18" charset="0"/>
-              </a:rPr>
-              <a:t>проверяет принадлежность результата </a:t>
-            </a:r>
-            <a:r>
-              <a:rPr lang="ru-RU" dirty="0">
-                <a:latin typeface="Times New Roman" panose="02020603050405020304" pitchFamily="18" charset="0"/>
-                <a:cs typeface="Times New Roman" panose="02020603050405020304" pitchFamily="18" charset="0"/>
-              </a:rPr>
-              <a:t>текущей печатной сессии и учитывает последовательные срабатывания. Отрицательный или неопределённый результат сбрасывает счётчик. </a:t>
-            </a:r>
-            <a:r>
-              <a:rPr lang="ru-RU" b="1" dirty="0">
-                <a:latin typeface="Times New Roman" panose="02020603050405020304" pitchFamily="18" charset="0"/>
-                <a:cs typeface="Times New Roman" panose="02020603050405020304" pitchFamily="18" charset="0"/>
-              </a:rPr>
-              <a:t>После трёх последовательных обнаружений</a:t>
-            </a:r>
-            <a:r>
-              <a:rPr lang="ru-RU" dirty="0">
-                <a:latin typeface="Times New Roman" panose="02020603050405020304" pitchFamily="18" charset="0"/>
-                <a:cs typeface="Times New Roman" panose="02020603050405020304" pitchFamily="18" charset="0"/>
-              </a:rPr>
-              <a:t> «спагетти» повторно проверяется активность сессии и </a:t>
-            </a:r>
-            <a:r>
-              <a:rPr lang="ru-RU" b="1" dirty="0">
-                <a:latin typeface="Times New Roman" panose="02020603050405020304" pitchFamily="18" charset="0"/>
-                <a:cs typeface="Times New Roman" panose="02020603050405020304" pitchFamily="18" charset="0"/>
-              </a:rPr>
-              <a:t>формируется команда отмены печати</a:t>
-            </a:r>
-            <a:r>
-              <a:rPr lang="ru-RU" dirty="0">
-                <a:latin typeface="Times New Roman" panose="02020603050405020304" pitchFamily="18" charset="0"/>
-                <a:cs typeface="Times New Roman" panose="02020603050405020304" pitchFamily="18" charset="0"/>
-              </a:rPr>
-              <a:t>.</a:t>
-            </a:r>
-          </a:p>
-        </p:txBody>
-      </p:sp>
-      <p:sp>
-        <p:nvSpPr>
-          <p:cNvPr id="3" name="TextBox 26">
-            <a:extLst>
-              <a:ext uri="{FF2B5EF4-FFF2-40B4-BE49-F238E27FC236}">
-                <a16:creationId xmlns:a16="http://schemas.microsoft.com/office/drawing/2014/main" id="{E5B04886-22A1-2CCD-9C65-F1ADEC0EB19F}"/>
-              </a:ext>
-            </a:extLst>
-          </p:cNvPr>
-          <p:cNvSpPr>
-            <a:spLocks noGrp="1"/>
-          </p:cNvSpPr>
-          <p:nvPr/>
-        </p:nvSpPr>
-        <p:spPr>
-          <a:xfrm>
-            <a:off x="3723995" y="6170765"/>
-            <a:ext cx="4670679" cy="579120"/>
-          </a:xfrm>
-          <a:prstGeom prst="rect">
-            <a:avLst/>
-          </a:prstGeom>
-          <a:noFill/>
-        </p:spPr>
-        <p:txBody>
-          <a:bodyPr rot="0" spcFirstLastPara="0" vert="horz" wrap="square" lIns="91440" tIns="45720" rIns="91440" bIns="45720" anchor="ctr">
-            <a:noAutofit/>
-          </a:bodyPr>
-          <a:lstStyle>
-            <a:defPPr algn="l">
-              <a:defRPr sz="1600" b="0">
-                <a:solidFill>
-                  <a:srgbClr val="000000"/>
-                </a:solidFill>
-                <a:latin typeface="Times New Roman"/>
-                <a:ea typeface="Times New Roman"/>
-                <a:cs typeface="Times New Roman"/>
-              </a:defRPr>
-            </a:defPPr>
-          </a:lstStyle>
-          <a:p>
-            <a:pPr algn="ctr">
-              <a:defRPr sz="1600" b="0">
-                <a:solidFill>
-                  <a:srgbClr val="000000"/>
-                </a:solidFill>
-                <a:latin typeface="Times New Roman"/>
-                <a:ea typeface="Times New Roman"/>
-                <a:cs typeface="Times New Roman"/>
-              </a:defRPr>
-            </a:pPr>
-            <a:r>
-              <a:rPr sz="1600" b="0" dirty="0" err="1">
-                <a:solidFill>
-                  <a:srgbClr val="000000"/>
-                </a:solidFill>
-                <a:latin typeface="Times New Roman"/>
-                <a:ea typeface="Times New Roman"/>
-                <a:cs typeface="Times New Roman"/>
-              </a:rPr>
-              <a:t>Рис</a:t>
-            </a:r>
-            <a:r>
-              <a:rPr sz="1600" b="0" dirty="0">
-                <a:solidFill>
-                  <a:srgbClr val="000000"/>
-                </a:solidFill>
-                <a:latin typeface="Times New Roman"/>
-                <a:ea typeface="Times New Roman"/>
-                <a:cs typeface="Times New Roman"/>
-              </a:rPr>
-              <a:t>. </a:t>
-            </a:r>
-            <a:r>
-              <a:rPr lang="ru-RU" sz="1600" b="0" dirty="0">
-                <a:solidFill>
-                  <a:srgbClr val="000000"/>
-                </a:solidFill>
-                <a:latin typeface="Times New Roman"/>
-                <a:ea typeface="Times New Roman"/>
-                <a:cs typeface="Times New Roman"/>
-              </a:rPr>
-              <a:t>7</a:t>
-            </a:r>
-            <a:r>
-              <a:rPr sz="1600" b="0" dirty="0">
-                <a:solidFill>
-                  <a:srgbClr val="000000"/>
-                </a:solidFill>
-                <a:latin typeface="Times New Roman"/>
-                <a:ea typeface="Times New Roman"/>
-                <a:cs typeface="Times New Roman"/>
-              </a:rPr>
-              <a:t> – </a:t>
-            </a:r>
-            <a:r>
-              <a:rPr lang="ru-RU" sz="1600" b="0" dirty="0">
-                <a:solidFill>
-                  <a:srgbClr val="000000"/>
-                </a:solidFill>
-                <a:latin typeface="Times New Roman"/>
-                <a:ea typeface="Times New Roman"/>
-                <a:cs typeface="Times New Roman"/>
-              </a:rPr>
-              <a:t>Блок-схема проверки результатов обнаружения дефекта и отмены FDM-печати</a:t>
-            </a:r>
-            <a:endParaRPr sz="1600" b="0" dirty="0">
-              <a:solidFill>
-                <a:srgbClr val="000000"/>
-              </a:solidFill>
-              <a:latin typeface="Times New Roman"/>
-              <a:ea typeface="Times New Roman"/>
-              <a:cs typeface="Times New Roman"/>
-            </a:endParaRPr>
-          </a:p>
-        </p:txBody>
-      </p:sp>
-      <p:sp>
-        <p:nvSpPr>
-          <p:cNvPr id="6" name="TextBox 26">
-            <a:extLst>
-              <a:ext uri="{FF2B5EF4-FFF2-40B4-BE49-F238E27FC236}">
-                <a16:creationId xmlns:a16="http://schemas.microsoft.com/office/drawing/2014/main" id="{8AF7D2B0-5020-6F43-9662-A5B7C34B40EB}"/>
-              </a:ext>
-            </a:extLst>
-          </p:cNvPr>
-          <p:cNvSpPr>
-            <a:spLocks noGrp="1"/>
-          </p:cNvSpPr>
-          <p:nvPr/>
-        </p:nvSpPr>
-        <p:spPr>
-          <a:xfrm>
-            <a:off x="339471" y="5651599"/>
-            <a:ext cx="4073130" cy="579120"/>
-          </a:xfrm>
-          <a:prstGeom prst="rect">
-            <a:avLst/>
-          </a:prstGeom>
-          <a:noFill/>
-        </p:spPr>
-        <p:txBody>
-          <a:bodyPr rot="0" spcFirstLastPara="0" vert="horz" wrap="square" lIns="91440" tIns="45720" rIns="91440" bIns="45720" anchor="ctr">
-            <a:noAutofit/>
-          </a:bodyPr>
-          <a:lstStyle>
-            <a:defPPr algn="l">
-              <a:defRPr sz="1600" b="0">
-                <a:solidFill>
-                  <a:srgbClr val="000000"/>
-                </a:solidFill>
-                <a:latin typeface="Times New Roman"/>
-                <a:ea typeface="Times New Roman"/>
-                <a:cs typeface="Times New Roman"/>
-              </a:defRPr>
-            </a:defPPr>
-          </a:lstStyle>
-          <a:p>
-            <a:pPr algn="ctr">
-              <a:defRPr sz="1600" b="0">
-                <a:solidFill>
-                  <a:srgbClr val="000000"/>
-                </a:solidFill>
-                <a:latin typeface="Times New Roman"/>
-                <a:ea typeface="Times New Roman"/>
-                <a:cs typeface="Times New Roman"/>
-              </a:defRPr>
-            </a:pPr>
-            <a:r>
-              <a:rPr sz="1600" b="0" dirty="0" err="1">
-                <a:solidFill>
-                  <a:srgbClr val="000000"/>
-                </a:solidFill>
-                <a:latin typeface="Times New Roman"/>
-                <a:ea typeface="Times New Roman"/>
-                <a:cs typeface="Times New Roman"/>
-              </a:rPr>
-              <a:t>Рис</a:t>
-            </a:r>
-            <a:r>
-              <a:rPr sz="1600" b="0" dirty="0">
-                <a:solidFill>
-                  <a:srgbClr val="000000"/>
-                </a:solidFill>
-                <a:latin typeface="Times New Roman"/>
-                <a:ea typeface="Times New Roman"/>
-                <a:cs typeface="Times New Roman"/>
-              </a:rPr>
-              <a:t>. </a:t>
-            </a:r>
-            <a:r>
-              <a:rPr lang="ru-RU" sz="1600" b="0" dirty="0">
-                <a:solidFill>
-                  <a:srgbClr val="000000"/>
-                </a:solidFill>
-                <a:latin typeface="Times New Roman"/>
-                <a:ea typeface="Times New Roman"/>
-                <a:cs typeface="Times New Roman"/>
-              </a:rPr>
-              <a:t>7</a:t>
-            </a:r>
-            <a:r>
-              <a:rPr sz="1600" b="0" dirty="0">
-                <a:solidFill>
-                  <a:srgbClr val="000000"/>
-                </a:solidFill>
-                <a:latin typeface="Times New Roman"/>
-                <a:ea typeface="Times New Roman"/>
-                <a:cs typeface="Times New Roman"/>
-              </a:rPr>
-              <a:t> – </a:t>
-            </a:r>
-          </a:p>
-        </p:txBody>
-      </p:sp>
-    </p:spTree>
-    <p:extLst>
-      <p:ext uri="{BB962C8B-B14F-4D97-AF65-F5344CB8AC3E}">
-        <p14:creationId xmlns:p14="http://schemas.microsoft.com/office/powerpoint/2010/main" val="1366394556"/>
-      </p:ext>
-    </p:extLst>
-  </p:cSld>
-  <p:clrMapOvr>
-    <a:masterClrMapping/>
-  </p:clrMapOvr>
-</p:sld>
-</file>
-
-<file path=ppt/slides/slide9.xml><?xml version="1.0" encoding="utf-8"?>
-<p:sld xmlns:a="http://schemas.openxmlformats.org/drawingml/2006/main" xmlns:r="http://schemas.openxmlformats.org/officeDocument/2006/relationships" xmlns:p="http://schemas.openxmlformats.org/presentationml/2006/main">
-  <p:cSld>
-    <p:spTree>
-      <p:nvGrpSpPr>
-        <p:cNvPr id="1" name="">
-          <a:extLst>
-            <a:ext uri="{FF2B5EF4-FFF2-40B4-BE49-F238E27FC236}">
-              <a16:creationId xmlns:a16="http://schemas.microsoft.com/office/drawing/2014/main" id="{829A4193-2A96-4292-27DF-7C8F10ED51F0}"/>
-            </a:ext>
-          </a:extLst>
-        </p:cNvPr>
-        <p:cNvGrpSpPr/>
-        <p:nvPr/>
-      </p:nvGrpSpPr>
-      <p:grpSpPr>
-        <a:xfrm>
-          <a:off x="0" y="0"/>
-          <a:ext cx="0" cy="0"/>
-          <a:chOff x="0" y="0"/>
-          <a:chExt cx="0" cy="0"/>
-        </a:xfrm>
-      </p:grpSpPr>
-      <p:sp>
-        <p:nvSpPr>
-          <p:cNvPr id="2" name="Заголовок 1">
-            <a:extLst>
-              <a:ext uri="{FF2B5EF4-FFF2-40B4-BE49-F238E27FC236}">
-                <a16:creationId xmlns:a16="http://schemas.microsoft.com/office/drawing/2014/main" id="{F71B51DD-8424-3898-F322-045B44C926E8}"/>
-              </a:ext>
-            </a:extLst>
-          </p:cNvPr>
-          <p:cNvSpPr>
-            <a:spLocks noGrp="1"/>
-          </p:cNvSpPr>
-          <p:nvPr>
-            <p:ph type="title"/>
-          </p:nvPr>
-        </p:nvSpPr>
-        <p:spPr>
-          <a:xfrm>
-            <a:off x="628650" y="-64546"/>
-            <a:ext cx="7886700" cy="712868"/>
-          </a:xfrm>
-        </p:spPr>
-        <p:txBody>
-          <a:bodyPr>
-            <a:normAutofit/>
-          </a:bodyPr>
-          <a:lstStyle/>
-          <a:p>
-            <a:pPr algn="ctr"/>
-            <a:r>
-              <a:rPr lang="ru-RU" sz="4000" dirty="0">
-                <a:latin typeface="Times New Roman"/>
-                <a:ea typeface="Calibri"/>
-                <a:cs typeface="Times New Roman"/>
-              </a:rPr>
-              <a:t>Электросхема 3</a:t>
-            </a:r>
-            <a:r>
-              <a:rPr lang="en-US" sz="4000" dirty="0">
-                <a:latin typeface="Times New Roman"/>
-                <a:ea typeface="Calibri"/>
-                <a:cs typeface="Times New Roman"/>
-              </a:rPr>
-              <a:t>D-</a:t>
-            </a:r>
-            <a:r>
-              <a:rPr lang="ru-RU" sz="4000" dirty="0">
-                <a:latin typeface="Times New Roman"/>
-                <a:ea typeface="Calibri"/>
-                <a:cs typeface="Times New Roman"/>
-              </a:rPr>
-              <a:t>принтера</a:t>
-            </a:r>
-          </a:p>
-        </p:txBody>
-      </p:sp>
-      <p:sp>
-        <p:nvSpPr>
-          <p:cNvPr id="4" name="Текстовое поле 3">
-            <a:extLst>
-              <a:ext uri="{FF2B5EF4-FFF2-40B4-BE49-F238E27FC236}">
-                <a16:creationId xmlns:a16="http://schemas.microsoft.com/office/drawing/2014/main" id="{5E8559DA-50BE-07AC-B0EB-3414FBFB6481}"/>
-              </a:ext>
-            </a:extLst>
-          </p:cNvPr>
-          <p:cNvSpPr txBox="1"/>
-          <p:nvPr/>
-        </p:nvSpPr>
-        <p:spPr>
-          <a:xfrm>
-            <a:off x="3775710" y="5640705"/>
-            <a:ext cx="309880" cy="368300"/>
-          </a:xfrm>
-          <a:prstGeom prst="rect">
-            <a:avLst/>
-          </a:prstGeom>
-          <a:noFill/>
-        </p:spPr>
-        <p:txBody>
-          <a:bodyPr wrap="none" rtlCol="0">
-            <a:spAutoFit/>
-          </a:bodyPr>
-          <a:lstStyle/>
-          <a:p>
-            <a:endParaRPr lang="ru-RU" altLang="en-US"/>
-          </a:p>
-        </p:txBody>
-      </p:sp>
-      <p:sp>
-        <p:nvSpPr>
-          <p:cNvPr id="5" name="Замещающий номер слайда 4">
-            <a:extLst>
-              <a:ext uri="{FF2B5EF4-FFF2-40B4-BE49-F238E27FC236}">
-                <a16:creationId xmlns:a16="http://schemas.microsoft.com/office/drawing/2014/main" id="{28EFF76E-32CA-AB56-A1FE-FC86064D66B4}"/>
-              </a:ext>
-            </a:extLst>
-          </p:cNvPr>
-          <p:cNvSpPr>
-            <a:spLocks noGrp="1"/>
-          </p:cNvSpPr>
-          <p:nvPr>
-            <p:ph type="sldNum" sz="quarter" idx="12"/>
-          </p:nvPr>
-        </p:nvSpPr>
-        <p:spPr>
-          <a:xfrm>
-            <a:off x="7088886" y="6493511"/>
-            <a:ext cx="2057400" cy="365125"/>
-          </a:xfrm>
-        </p:spPr>
-        <p:txBody>
-          <a:bodyPr/>
-          <a:lstStyle/>
-          <a:p>
-            <a:fld id="{D6ED8A53-8D2F-4011-BE06-EDB0774336BA}" type="slidenum">
-              <a:rPr lang="ru-RU" sz="2000" dirty="0" smtClean="0">
-                <a:solidFill>
-                  <a:schemeClr val="tx1"/>
-                </a:solidFill>
-                <a:latin typeface="Times New Roman"/>
-                <a:cs typeface="Times New Roman"/>
-              </a:rPr>
-              <a:t>9</a:t>
-            </a:fld>
-            <a:endParaRPr lang="ru-RU" sz="2000">
-              <a:solidFill>
-                <a:schemeClr val="tx1"/>
-              </a:solidFill>
-              <a:latin typeface="Times New Roman"/>
-              <a:ea typeface="Calibri"/>
-              <a:cs typeface="Times New Roman"/>
-            </a:endParaRPr>
-          </a:p>
-        </p:txBody>
-      </p:sp>
-      <p:pic>
-        <p:nvPicPr>
-          <p:cNvPr id="13" name="Рисунок 12">
-            <a:extLst>
-              <a:ext uri="{FF2B5EF4-FFF2-40B4-BE49-F238E27FC236}">
-                <a16:creationId xmlns:a16="http://schemas.microsoft.com/office/drawing/2014/main" id="{4E875F94-D2E7-0E2D-5267-8B670B1C8AC0}"/>
-              </a:ext>
-            </a:extLst>
-          </p:cNvPr>
-          <p:cNvPicPr>
-            <a:picLocks noChangeAspect="1"/>
-          </p:cNvPicPr>
-          <p:nvPr/>
-        </p:nvPicPr>
-        <p:blipFill>
-          <a:blip r:embed="rId3">
-            <a:extLst>
-              <a:ext uri="{96DAC541-7B7A-43D3-8B79-37D633B846F1}">
-                <asvg:svgBlip xmlns:asvg="http://schemas.microsoft.com/office/drawing/2016/SVG/main" r:embed="rId4"/>
-              </a:ext>
-            </a:extLst>
-          </a:blip>
-          <a:stretch>
-            <a:fillRect/>
-          </a:stretch>
-        </p:blipFill>
-        <p:spPr>
-          <a:xfrm>
-            <a:off x="351681" y="603944"/>
-            <a:ext cx="8440637" cy="3708649"/>
-          </a:xfrm>
-          <a:prstGeom prst="rect">
-            <a:avLst/>
-          </a:prstGeom>
-        </p:spPr>
-      </p:pic>
-      <p:sp>
-        <p:nvSpPr>
-          <p:cNvPr id="14" name="TextBox 13">
-            <a:extLst>
-              <a:ext uri="{FF2B5EF4-FFF2-40B4-BE49-F238E27FC236}">
-                <a16:creationId xmlns:a16="http://schemas.microsoft.com/office/drawing/2014/main" id="{971BDEBA-A42A-8680-F3A2-087C760E6CFE}"/>
-              </a:ext>
-            </a:extLst>
-          </p:cNvPr>
-          <p:cNvSpPr txBox="1"/>
-          <p:nvPr/>
-        </p:nvSpPr>
-        <p:spPr>
-          <a:xfrm>
-            <a:off x="254001" y="4734036"/>
-            <a:ext cx="8487517" cy="2031325"/>
-          </a:xfrm>
-          <a:prstGeom prst="rect">
-            <a:avLst/>
-          </a:prstGeom>
-          <a:noFill/>
-          <a:ln>
-            <a:solidFill>
-              <a:schemeClr val="tx1"/>
-            </a:solidFill>
-            <a:prstDash val="dash"/>
-          </a:ln>
-        </p:spPr>
-        <p:txBody>
-          <a:bodyPr rot="0" spcFirstLastPara="0" vertOverflow="overflow" horzOverflow="overflow" vert="horz" wrap="square" lIns="91440" tIns="45720" rIns="91440" bIns="45720" numCol="1" spcCol="0" rtlCol="0" fromWordArt="0" anchor="ctr" anchorCtr="0" forceAA="0" compatLnSpc="1">
-            <a:prstTxWarp prst="textNoShape">
-              <a:avLst/>
-            </a:prstTxWarp>
-            <a:spAutoFit/>
-          </a:bodyPr>
-          <a:lstStyle/>
-          <a:p>
-            <a:r>
-              <a:rPr lang="ru-RU" dirty="0">
-                <a:latin typeface="Times New Roman" panose="02020603050405020304" pitchFamily="18" charset="0"/>
-                <a:cs typeface="Times New Roman" panose="02020603050405020304" pitchFamily="18" charset="0"/>
-              </a:rPr>
-              <a:t>Для электрической части разрабатываемого 3</a:t>
-            </a:r>
-            <a:r>
-              <a:rPr lang="en-US" dirty="0">
-                <a:latin typeface="Times New Roman" panose="02020603050405020304" pitchFamily="18" charset="0"/>
-                <a:cs typeface="Times New Roman" panose="02020603050405020304" pitchFamily="18" charset="0"/>
-              </a:rPr>
-              <a:t>D-</a:t>
-            </a:r>
-            <a:r>
-              <a:rPr lang="ru-RU" dirty="0">
-                <a:latin typeface="Times New Roman" panose="02020603050405020304" pitchFamily="18" charset="0"/>
-                <a:cs typeface="Times New Roman" panose="02020603050405020304" pitchFamily="18" charset="0"/>
-              </a:rPr>
-              <a:t>принтера выбрана плата </a:t>
-            </a:r>
-            <a:r>
-              <a:rPr lang="ru-RU" b="1" dirty="0">
-                <a:latin typeface="Times New Roman" panose="02020603050405020304" pitchFamily="18" charset="0"/>
-                <a:cs typeface="Times New Roman" panose="02020603050405020304" pitchFamily="18" charset="0"/>
-              </a:rPr>
-              <a:t>MKS </a:t>
-            </a:r>
-            <a:r>
-              <a:rPr lang="ru-RU" b="1" dirty="0" err="1">
-                <a:latin typeface="Times New Roman" panose="02020603050405020304" pitchFamily="18" charset="0"/>
-                <a:cs typeface="Times New Roman" panose="02020603050405020304" pitchFamily="18" charset="0"/>
-              </a:rPr>
-              <a:t>Robin</a:t>
-            </a:r>
-            <a:r>
-              <a:rPr lang="ru-RU" b="1" dirty="0">
-                <a:latin typeface="Times New Roman" panose="02020603050405020304" pitchFamily="18" charset="0"/>
-                <a:cs typeface="Times New Roman" panose="02020603050405020304" pitchFamily="18" charset="0"/>
-              </a:rPr>
-              <a:t> </a:t>
-            </a:r>
-            <a:r>
-              <a:rPr lang="ru-RU" b="1" dirty="0" err="1">
-                <a:latin typeface="Times New Roman" panose="02020603050405020304" pitchFamily="18" charset="0"/>
-                <a:cs typeface="Times New Roman" panose="02020603050405020304" pitchFamily="18" charset="0"/>
-              </a:rPr>
-              <a:t>Nano</a:t>
-            </a:r>
-            <a:r>
-              <a:rPr lang="ru-RU" b="1" dirty="0">
-                <a:latin typeface="Times New Roman" panose="02020603050405020304" pitchFamily="18" charset="0"/>
-                <a:cs typeface="Times New Roman" panose="02020603050405020304" pitchFamily="18" charset="0"/>
-              </a:rPr>
-              <a:t> V1.2 (7) </a:t>
-            </a:r>
-            <a:r>
-              <a:rPr lang="ru-RU" dirty="0">
-                <a:latin typeface="Times New Roman" panose="02020603050405020304" pitchFamily="18" charset="0"/>
-                <a:cs typeface="Times New Roman" panose="02020603050405020304" pitchFamily="18" charset="0"/>
-              </a:rPr>
-              <a:t>и драйвера TMC2209. Плата управляет двигателями (5), нагревателями (1, 2) и вентиляторами, а также получает сигналы с датчиков (6). </a:t>
-            </a:r>
-            <a:r>
-              <a:rPr lang="ru-RU" b="1" dirty="0" err="1">
-                <a:latin typeface="Times New Roman" panose="02020603050405020304" pitchFamily="18" charset="0"/>
-                <a:cs typeface="Times New Roman" panose="02020603050405020304" pitchFamily="18" charset="0"/>
-              </a:rPr>
-              <a:t>Raspberry</a:t>
-            </a:r>
-            <a:r>
-              <a:rPr lang="ru-RU" b="1" dirty="0">
-                <a:latin typeface="Times New Roman" panose="02020603050405020304" pitchFamily="18" charset="0"/>
-                <a:cs typeface="Times New Roman" panose="02020603050405020304" pitchFamily="18" charset="0"/>
-              </a:rPr>
-              <a:t> </a:t>
-            </a:r>
-            <a:r>
-              <a:rPr lang="ru-RU" b="1" dirty="0" err="1">
-                <a:latin typeface="Times New Roman" panose="02020603050405020304" pitchFamily="18" charset="0"/>
-                <a:cs typeface="Times New Roman" panose="02020603050405020304" pitchFamily="18" charset="0"/>
-              </a:rPr>
-              <a:t>Pi</a:t>
-            </a:r>
-            <a:r>
-              <a:rPr lang="ru-RU" b="1" dirty="0">
-                <a:latin typeface="Times New Roman" panose="02020603050405020304" pitchFamily="18" charset="0"/>
-                <a:cs typeface="Times New Roman" panose="02020603050405020304" pitchFamily="18" charset="0"/>
-              </a:rPr>
-              <a:t> 3B (10) </a:t>
-            </a:r>
-            <a:r>
-              <a:rPr lang="ru-RU" dirty="0">
-                <a:latin typeface="Times New Roman" panose="02020603050405020304" pitchFamily="18" charset="0"/>
-                <a:cs typeface="Times New Roman" panose="02020603050405020304" pitchFamily="18" charset="0"/>
-              </a:rPr>
-              <a:t>обеспечивает подключение камеры (9), сенсорного экрана (8) и обменивается данными с управляющей платой по UART. Блок питания (3) обеспечивает силовые узлы напряжением </a:t>
-            </a:r>
-            <a:r>
-              <a:rPr lang="ru-RU" b="1" dirty="0">
-                <a:latin typeface="Times New Roman" panose="02020603050405020304" pitchFamily="18" charset="0"/>
-                <a:cs typeface="Times New Roman" panose="02020603050405020304" pitchFamily="18" charset="0"/>
-              </a:rPr>
-              <a:t>24 В</a:t>
-            </a:r>
-            <a:r>
-              <a:rPr lang="ru-RU" dirty="0">
-                <a:latin typeface="Times New Roman" panose="02020603050405020304" pitchFamily="18" charset="0"/>
-                <a:cs typeface="Times New Roman" panose="02020603050405020304" pitchFamily="18" charset="0"/>
-              </a:rPr>
-              <a:t>, а DC-DC-преобразователь (4) понижает его до </a:t>
-            </a:r>
-            <a:r>
-              <a:rPr lang="ru-RU" b="1" dirty="0">
-                <a:latin typeface="Times New Roman" panose="02020603050405020304" pitchFamily="18" charset="0"/>
-                <a:cs typeface="Times New Roman" panose="02020603050405020304" pitchFamily="18" charset="0"/>
-              </a:rPr>
-              <a:t>5 В</a:t>
-            </a:r>
-            <a:r>
-              <a:rPr lang="ru-RU" dirty="0">
-                <a:latin typeface="Times New Roman" panose="02020603050405020304" pitchFamily="18" charset="0"/>
-                <a:cs typeface="Times New Roman" panose="02020603050405020304" pitchFamily="18" charset="0"/>
-              </a:rPr>
-              <a:t> для </a:t>
-            </a:r>
-            <a:r>
-              <a:rPr lang="ru-RU" dirty="0" err="1">
-                <a:latin typeface="Times New Roman" panose="02020603050405020304" pitchFamily="18" charset="0"/>
-                <a:cs typeface="Times New Roman" panose="02020603050405020304" pitchFamily="18" charset="0"/>
-              </a:rPr>
-              <a:t>Raspberry</a:t>
-            </a:r>
-            <a:r>
-              <a:rPr lang="ru-RU" dirty="0">
-                <a:latin typeface="Times New Roman" panose="02020603050405020304" pitchFamily="18" charset="0"/>
-                <a:cs typeface="Times New Roman" panose="02020603050405020304" pitchFamily="18" charset="0"/>
-              </a:rPr>
-              <a:t> </a:t>
-            </a:r>
-            <a:r>
-              <a:rPr lang="ru-RU" dirty="0" err="1">
-                <a:latin typeface="Times New Roman" panose="02020603050405020304" pitchFamily="18" charset="0"/>
-                <a:cs typeface="Times New Roman" panose="02020603050405020304" pitchFamily="18" charset="0"/>
-              </a:rPr>
-              <a:t>Pi</a:t>
-            </a:r>
-            <a:r>
-              <a:rPr lang="ru-RU" dirty="0">
-                <a:latin typeface="Times New Roman" panose="02020603050405020304" pitchFamily="18" charset="0"/>
-                <a:cs typeface="Times New Roman" panose="02020603050405020304" pitchFamily="18" charset="0"/>
-              </a:rPr>
-              <a:t> и подключённой периферии.</a:t>
-            </a:r>
-          </a:p>
-        </p:txBody>
-      </p:sp>
-      <p:sp>
-        <p:nvSpPr>
-          <p:cNvPr id="16" name="TextBox 26">
-            <a:extLst>
-              <a:ext uri="{FF2B5EF4-FFF2-40B4-BE49-F238E27FC236}">
-                <a16:creationId xmlns:a16="http://schemas.microsoft.com/office/drawing/2014/main" id="{6C4BDD25-6E44-8F04-93A8-3BDF96080B11}"/>
-              </a:ext>
-            </a:extLst>
-          </p:cNvPr>
-          <p:cNvSpPr>
-            <a:spLocks noGrp="1"/>
-          </p:cNvSpPr>
-          <p:nvPr/>
-        </p:nvSpPr>
-        <p:spPr>
-          <a:xfrm>
-            <a:off x="1313146" y="4181848"/>
-            <a:ext cx="6517706" cy="579120"/>
-          </a:xfrm>
-          <a:prstGeom prst="rect">
-            <a:avLst/>
-          </a:prstGeom>
-          <a:noFill/>
-        </p:spPr>
-        <p:txBody>
-          <a:bodyPr rot="0" spcFirstLastPara="0" vert="horz" wrap="square" lIns="91440" tIns="45720" rIns="91440" bIns="45720" anchor="ctr">
-            <a:noAutofit/>
-          </a:bodyPr>
-          <a:lstStyle>
-            <a:defPPr algn="l">
-              <a:defRPr sz="1600" b="0">
-                <a:solidFill>
-                  <a:srgbClr val="000000"/>
-                </a:solidFill>
-                <a:latin typeface="Times New Roman"/>
-                <a:ea typeface="Times New Roman"/>
-                <a:cs typeface="Times New Roman"/>
-              </a:defRPr>
-            </a:defPPr>
-          </a:lstStyle>
-          <a:p>
-            <a:pPr algn="ctr">
-              <a:defRPr sz="1600" b="0">
-                <a:solidFill>
-                  <a:srgbClr val="000000"/>
-                </a:solidFill>
-                <a:latin typeface="Times New Roman"/>
-                <a:ea typeface="Times New Roman"/>
-                <a:cs typeface="Times New Roman"/>
-              </a:defRPr>
-            </a:pPr>
-            <a:r>
-              <a:rPr lang="ru-RU" sz="1600" b="0" dirty="0">
-                <a:solidFill>
-                  <a:srgbClr val="000000"/>
-                </a:solidFill>
-                <a:latin typeface="Times New Roman"/>
-                <a:ea typeface="Times New Roman"/>
-                <a:cs typeface="Times New Roman"/>
-              </a:rPr>
-              <a:t>Рис. </a:t>
-            </a:r>
-            <a:r>
-              <a:rPr lang="ru-RU" sz="1600" dirty="0">
-                <a:solidFill>
-                  <a:srgbClr val="000000"/>
-                </a:solidFill>
-                <a:latin typeface="Times New Roman"/>
-                <a:ea typeface="Times New Roman"/>
-                <a:cs typeface="Times New Roman"/>
-              </a:rPr>
-              <a:t>8</a:t>
-            </a:r>
-            <a:r>
-              <a:rPr lang="ru-RU" sz="1600" b="0" dirty="0">
-                <a:solidFill>
-                  <a:srgbClr val="000000"/>
-                </a:solidFill>
-                <a:latin typeface="Times New Roman"/>
-                <a:ea typeface="Times New Roman"/>
-                <a:cs typeface="Times New Roman"/>
-              </a:rPr>
-              <a:t> – Схема электрической коммутации компонентов 3D-принтера </a:t>
-            </a:r>
-          </a:p>
-        </p:txBody>
-      </p:sp>
-    </p:spTree>
-    <p:extLst>
-      <p:ext uri="{BB962C8B-B14F-4D97-AF65-F5344CB8AC3E}">
-        <p14:creationId xmlns:p14="http://schemas.microsoft.com/office/powerpoint/2010/main" val="128376505"/>
       </p:ext>
     </p:extLst>
   </p:cSld>

--- a/presentation/NIR2_slide01_v2.pptx
+++ b/presentation/NIR2_slide01_v2.pptx
@@ -8737,8 +8737,8 @@
         </p:nvSpPr>
         <p:spPr>
           <a:xfrm>
-            <a:off x="132056" y="875407"/>
-            <a:ext cx="2917990" cy="5355312"/>
+            <a:off x="132056" y="1152406"/>
+            <a:ext cx="2917990" cy="4801314"/>
           </a:xfrm>
           <a:prstGeom prst="rect">
             <a:avLst/>
@@ -8765,7 +8765,7 @@
                 <a:latin typeface="Times New Roman" panose="02020603050405020304" pitchFamily="18" charset="0"/>
                 <a:cs typeface="Times New Roman" panose="02020603050405020304" pitchFamily="18" charset="0"/>
               </a:rPr>
-              <a:t>Единичное обнаружение дефекта не приводит к отмене задания. Локальный модуль </a:t>
+              <a:t>Локальный модуль </a:t>
             </a:r>
             <a:r>
               <a:rPr lang="ru-RU" b="1" dirty="0">
@@ -8915,93 +8915,6 @@
               <a:ea typeface="Times New Roman"/>
               <a:cs typeface="Times New Roman"/>
             </a:endParaRPr>
-          </a:p>
-        </p:txBody>
-      </p:sp>
-      <p:sp>
-        <p:nvSpPr>
-          <p:cNvPr id="6" name="TextBox 26">
-            <a:extLst>
-              <a:ext uri="{FF2B5EF4-FFF2-40B4-BE49-F238E27FC236}">
-                <a16:creationId xmlns:a16="http://schemas.microsoft.com/office/drawing/2014/main" id="{8AF7D2B0-5020-6F43-9662-A5B7C34B40EB}"/>
-              </a:ext>
-            </a:extLst>
-          </p:cNvPr>
-          <p:cNvSpPr>
-            <a:spLocks noGrp="1"/>
-          </p:cNvSpPr>
-          <p:nvPr/>
-        </p:nvSpPr>
-        <p:spPr>
-          <a:xfrm>
-            <a:off x="339471" y="5651599"/>
-            <a:ext cx="4073130" cy="579120"/>
-          </a:xfrm>
-          <a:prstGeom prst="rect">
-            <a:avLst/>
-          </a:prstGeom>
-          <a:noFill/>
-        </p:spPr>
-        <p:txBody>
-          <a:bodyPr rot="0" spcFirstLastPara="0" vert="horz" wrap="square" lIns="91440" tIns="45720" rIns="91440" bIns="45720" anchor="ctr">
-            <a:noAutofit/>
-          </a:bodyPr>
-          <a:lstStyle>
-            <a:defPPr algn="l">
-              <a:defRPr sz="1600" b="0">
-                <a:solidFill>
-                  <a:srgbClr val="000000"/>
-                </a:solidFill>
-                <a:latin typeface="Times New Roman"/>
-                <a:ea typeface="Times New Roman"/>
-                <a:cs typeface="Times New Roman"/>
-              </a:defRPr>
-            </a:defPPr>
-          </a:lstStyle>
-          <a:p>
-            <a:pPr algn="ctr">
-              <a:defRPr sz="1600" b="0">
-                <a:solidFill>
-                  <a:srgbClr val="000000"/>
-                </a:solidFill>
-                <a:latin typeface="Times New Roman"/>
-                <a:ea typeface="Times New Roman"/>
-                <a:cs typeface="Times New Roman"/>
-              </a:defRPr>
-            </a:pPr>
-            <a:r>
-              <a:rPr sz="1600" b="0" dirty="0">
-                <a:solidFill>
-                  <a:srgbClr val="000000"/>
-                </a:solidFill>
-                <a:latin typeface="Times New Roman"/>
-                <a:ea typeface="Times New Roman"/>
-                <a:cs typeface="Times New Roman"/>
-              </a:rPr>
-              <a:t>Рис. </a:t>
-            </a:r>
-            <a:r>
-              <a:rPr lang="ru-RU" sz="1600" b="0" dirty="0">
-                <a:solidFill>
-                  <a:srgbClr val="000000"/>
-                </a:solidFill>
-                <a:latin typeface="Times New Roman"/>
-                <a:ea typeface="Times New Roman"/>
-                <a:cs typeface="Times New Roman"/>
-              </a:rPr>
-              <a:t>7</a:t>
-            </a:r>
-            <a:r>
-              <a:rPr sz="1600" b="0" dirty="0">
-                <a:solidFill>
-                  <a:srgbClr val="000000"/>
-                </a:solidFill>
-                <a:latin typeface="Times New Roman"/>
-                <a:ea typeface="Times New Roman"/>
-                <a:cs typeface="Times New Roman"/>
-              </a:rPr>
-              <a:t> – </a:t>
-            </a:r>
           </a:p>
         </p:txBody>
       </p:sp>
